--- a/Lessons/07_trees_and_ensembles/Slides/trees_and_ensembles_slides.pptx
+++ b/Lessons/07_trees_and_ensembles/Slides/trees_and_ensembles_slides.pptx
@@ -802,7 +802,7 @@
             </a:pPr>
             <a:r>
               <a:rPr/>
-              <a:t>The two m terms are the sizes of the left and right children, and they add to the parent’s. Read it as: what the parent’s impurity was, minus what is left after the split, weighted by how the group was divided. The tree keeps whichever candidate split makes ΔG largest.</a:t>
+              <a:t>Say what the subscripts are before reading the formula: P, L and R are the parent group and its two children, the same three the handout names in words, and the m terms are how many examples are in each. The two m terms are the sizes of the left and right children, and they add to the parent’s. Read it as: what the parent’s impurity was, minus what is left after the split, weighted by how the group was divided. The tree keeps whichever candidate split makes ΔG largest.</a:t>
             </a:r>
           </a:p>
           <a:p>
@@ -9465,7 +9465,7 @@
       </p:sp>
       <p:pic>
         <p:nvPicPr>
-          <p:cNvPr descr="eq_77488865aa.png" id="0" name="Picture 1"/>
+          <p:cNvPr descr="eq_e6f67b5356.png" id="0" name="Picture 1"/>
           <p:cNvPicPr>
             <a:picLocks noGrp="1" noChangeAspect="1"/>
           </p:cNvPicPr>
@@ -9479,8 +9479,8 @@
         </p:blipFill>
         <p:spPr bwMode="auto">
           <a:xfrm>
-            <a:off x="457200" y="2554089"/>
-            <a:ext cx="8229600" cy="584200"/>
+            <a:off x="457204" y="2363590"/>
+            <a:ext cx="8229591" cy="965199"/>
           </a:xfrm>
           <a:prstGeom prst="rect">
             <a:avLst/>

--- a/Lessons/07_trees_and_ensembles/Slides/trees_and_ensembles_slides.pptx
+++ b/Lessons/07_trees_and_ensembles/Slides/trees_and_ensembles_slides.pptx
@@ -5580,7 +5580,7 @@
             </a:pPr>
             <a:r>
               <a:rPr/>
-              <a:t>Set it explicitly and say out loud when it comes back: the first ten minutes of lesson 8, Friday 13 November.</a:t>
+              <a:t>Set it explicitly and say out loud when it comes back: the first ten minutes of lesson 8, Friday 20 November.</a:t>
             </a:r>
           </a:p>
           <a:p>
@@ -9195,7 +9195,7 @@
             </a:pPr>
             <a:r>
               <a:rPr/>
-              <a:t>6 November 2026</a:t>
+              <a:t>13 November 2026</a:t>
             </a:r>
           </a:p>
         </p:txBody>
@@ -16077,7 +16077,7 @@
             </a:r>
             <a:r>
               <a:rPr b="1"/>
-              <a:t>Friday 13 November</a:t>
+              <a:t>Friday 20 November</a:t>
             </a:r>
           </a:p>
           <a:p>

--- a/Lessons/07_trees_and_ensembles/Slides/trees_and_ensembles_slides.pptx
+++ b/Lessons/07_trees_and_ensembles/Slides/trees_and_ensembles_slides.pptx
@@ -5,7 +5,7 @@
     <p:sldMasterId id="2147483648" r:id="rId1"/>
   </p:sldMasterIdLst>
   <p:notesMasterIdLst>
-    <p:notesMasterId r:id="rId53"/>
+    <p:notesMasterId r:id="rId56"/>
   </p:notesMasterIdLst>
   <p:sldIdLst>
     <p:sldId id="256" r:id="rId2"/>
@@ -59,6 +59,9 @@
     <p:sldId id="304" r:id="rId50"/>
     <p:sldId id="305" r:id="rId51"/>
     <p:sldId id="306" r:id="rId52"/>
+    <p:sldId id="307" r:id="rId53"/>
+    <p:sldId id="308" r:id="rId54"/>
+    <p:sldId id="309" r:id="rId55"/>
   </p:sldIdLst>
   <p:sldSz cx="9144000" cy="5143500" type="screen16x9"/>
   <p:notesSz cx="6858000" cy="9144000"/>
@@ -1118,35 +1121,21 @@
             </a:pPr>
             <a:r>
               <a:rPr/>
-              <a:t>This is the check notebook 1 runs live, and it matters for trust rather than for novelty: once the from-scratch version is shown to agree with scikit-learn exactly, every later result in the lesson - obtained with scikit-learn - inherits that confidence.</a:t>
-            </a:r>
-          </a:p>
-          <a:p>
-            <a:pPr lvl="0" indent="0" marL="0">
-              <a:buNone/>
-            </a:pPr>
-          </a:p>
-          <a:p>
-            <a:pPr lvl="0" indent="0" marL="0">
-              <a:buNone/>
-            </a:pPr>
-            <a:r>
-              <a:rPr/>
-              <a:t>Point out the “Try this” box in the handout: computing Gini impurity for the income-floor subgroup alone and comparing it against the full dataset’s 0.474 is a two-line exercise that makes the impurity number concrete rather than abstract.</a:t>
-            </a:r>
-          </a:p>
-          <a:p>
-            <a:pPr lvl="0" indent="0" marL="0">
-              <a:buNone/>
-            </a:pPr>
-          </a:p>
-          <a:p>
-            <a:pPr lvl="0" indent="0" marL="0">
-              <a:buNone/>
-            </a:pPr>
-            <a:r>
-              <a:rPr/>
-              <a:t>Handout section 2.2, and the “Try this” box that follows it.</a:t>
+              <a:t>The previous slide’s arithmetic, drawn. The curve is 2p(1-p): zero for a pure group, 0.5 for a fifty-fifty one. The black dot is all 1,200 applicants at p = 0.387, impurity 0.474. The split sends 971 left, at p = 0.256, and 229 right, at p = 0.939 - teal and rust.</a:t>
+            </a:r>
+          </a:p>
+          <a:p>
+            <a:pPr lvl="0" indent="0" marL="0">
+              <a:buNone/>
+            </a:pPr>
+          </a:p>
+          <a:p>
+            <a:pPr lvl="0" indent="0" marL="0">
+              <a:buNone/>
+            </a:pPr>
+            <a:r>
+              <a:rPr/>
+              <a:t>The gold square is the two children averaged by size, 0.3305, and it sits on the dotted straight line between them. Point at the bulge: the curve lies above every such line, so any split that separates the classes at all lowers the weighted impurity. The gap, 0.144, is the gain, and the tree takes whichever split makes it largest. Handout section 2.2.</a:t>
             </a:r>
           </a:p>
         </p:txBody>
@@ -1228,43 +1217,35 @@
             </a:pPr>
             <a:r>
               <a:rPr/>
-              <a:t>Close the Gini segment with the limitation, because it sets up everything that follows. Ask the room: if the debt ceiling and the income floor are the two easiest wins, what happens to the two interior islands, which need </a:t>
-            </a:r>
-            <a:r>
-              <a:rPr i="1"/>
-              <a:t>two</a:t>
-            </a:r>
-            <a:r>
-              <a:rPr/>
-              <a:t> conditions at once to identify?</a:t>
-            </a:r>
-          </a:p>
-          <a:p>
-            <a:pPr lvl="0" indent="0" marL="0">
-              <a:buNone/>
-            </a:pPr>
-          </a:p>
-          <a:p>
-            <a:pPr lvl="0" indent="0" marL="0">
-              <a:buNone/>
-            </a:pPr>
-            <a:r>
-              <a:rPr/>
-              <a:t>The honest answer is that a shallow tree simply cannot see them - not because the information isn’t there, but because greedy search only ever commits to the best split available at each individual step. Depth is what buys the tree enough steps to eventually stumble onto them, which is exactly where the next segment goes.</a:t>
-            </a:r>
-          </a:p>
-          <a:p>
-            <a:pPr lvl="0" indent="0" marL="0">
-              <a:buNone/>
-            </a:pPr>
-          </a:p>
-          <a:p>
-            <a:pPr lvl="0" indent="0" marL="0">
-              <a:buNone/>
-            </a:pPr>
-            <a:r>
-              <a:rPr/>
-              <a:t>Handout sections 2.2 and 3.</a:t>
+              <a:t>This is the check notebook 1 runs live, and it matters for trust rather than for novelty: once the from-scratch version is shown to agree with scikit-learn exactly, every later result in the lesson - obtained with scikit-learn - inherits that confidence.</a:t>
+            </a:r>
+          </a:p>
+          <a:p>
+            <a:pPr lvl="0" indent="0" marL="0">
+              <a:buNone/>
+            </a:pPr>
+          </a:p>
+          <a:p>
+            <a:pPr lvl="0" indent="0" marL="0">
+              <a:buNone/>
+            </a:pPr>
+            <a:r>
+              <a:rPr/>
+              <a:t>Point out the “Try this” box in the handout: computing Gini impurity for the income-floor subgroup alone and comparing it against the full dataset’s 0.474 is a two-line exercise that makes the impurity number concrete rather than abstract.</a:t>
+            </a:r>
+          </a:p>
+          <a:p>
+            <a:pPr lvl="0" indent="0" marL="0">
+              <a:buNone/>
+            </a:pPr>
+          </a:p>
+          <a:p>
+            <a:pPr lvl="0" indent="0" marL="0">
+              <a:buNone/>
+            </a:pPr>
+            <a:r>
+              <a:rPr/>
+              <a:t>Handout section 2.2, and the “Try this” box that follows it.</a:t>
             </a:r>
           </a:p>
         </p:txBody>
@@ -1346,35 +1327,43 @@
             </a:pPr>
             <a:r>
               <a:rPr/>
-              <a:t>Name the dial explicitly and connect it to lesson 6: k in k-nearest neighbours traded bias against variance directly, and depth is a tree’s version of the same knob.</a:t>
-            </a:r>
-          </a:p>
-          <a:p>
-            <a:pPr lvl="0" indent="0" marL="0">
-              <a:buNone/>
-            </a:pPr>
-          </a:p>
-          <a:p>
-            <a:pPr lvl="0" indent="0" marL="0">
-              <a:buNone/>
-            </a:pPr>
-            <a:r>
-              <a:rPr/>
-              <a:t>The training-accuracy-1.000 claim is the one to make them justify. Ask why an unconstrained tree gets every training point right, always, on any data - the answer is that splitting never has to stop until every leaf holds one example, which it then “predicts” perfectly by definition. That number demonstrates the model class can memorise, not that anything has been learned - the same reading lesson 6 gave k = 1’s training accuracy.</a:t>
-            </a:r>
-          </a:p>
-          <a:p>
-            <a:pPr lvl="0" indent="0" marL="0">
-              <a:buNone/>
-            </a:pPr>
-          </a:p>
-          <a:p>
-            <a:pPr lvl="0" indent="0" marL="0">
-              <a:buNone/>
-            </a:pPr>
-            <a:r>
-              <a:rPr/>
-              <a:t>Handout section 3.</a:t>
+              <a:t>Close the Gini segment with the limitation, because it sets up everything that follows. Ask the room: if the debt ceiling and the income floor are the two easiest wins, what happens to the two interior islands, which need </a:t>
+            </a:r>
+            <a:r>
+              <a:rPr i="1"/>
+              <a:t>two</a:t>
+            </a:r>
+            <a:r>
+              <a:rPr/>
+              <a:t> conditions at once to identify?</a:t>
+            </a:r>
+          </a:p>
+          <a:p>
+            <a:pPr lvl="0" indent="0" marL="0">
+              <a:buNone/>
+            </a:pPr>
+          </a:p>
+          <a:p>
+            <a:pPr lvl="0" indent="0" marL="0">
+              <a:buNone/>
+            </a:pPr>
+            <a:r>
+              <a:rPr/>
+              <a:t>The honest answer is that a shallow tree simply cannot see them - not because the information isn’t there, but because greedy search only ever commits to the best split available at each individual step. Depth is what buys the tree enough steps to eventually stumble onto them, which is exactly where the next segment goes.</a:t>
+            </a:r>
+          </a:p>
+          <a:p>
+            <a:pPr lvl="0" indent="0" marL="0">
+              <a:buNone/>
+            </a:pPr>
+          </a:p>
+          <a:p>
+            <a:pPr lvl="0" indent="0" marL="0">
+              <a:buNone/>
+            </a:pPr>
+            <a:r>
+              <a:rPr/>
+              <a:t>Handout sections 2.2 and 3.</a:t>
             </a:r>
           </a:p>
         </p:txBody>
@@ -1456,43 +1445,35 @@
             </a:pPr>
             <a:r>
               <a:rPr/>
-              <a:t>Read the two columns against each other, never in isolation, exactly as lesson 5 taught. Training accuracy climbs monotonically towards 1.000. Cross-validated accuracy rises, peaks at depth 8, and then falls back - even though the model keeps getting strictly more flexible.</a:t>
-            </a:r>
-          </a:p>
-          <a:p>
-            <a:pPr lvl="0" indent="0" marL="0">
-              <a:buNone/>
-            </a:pPr>
-          </a:p>
-          <a:p>
-            <a:pPr lvl="0" indent="0" marL="0">
-              <a:buNone/>
-            </a:pPr>
-            <a:r>
-              <a:rPr/>
-              <a:t>Ask which column they would have picked a tree by, if they had only seen the training column. The far right, the unconstrained tree, looks unbeatable on that evidence and is in fact the worst honest model on this table.</a:t>
-            </a:r>
-          </a:p>
-          <a:p>
-            <a:pPr lvl="0" indent="0" marL="0">
-              <a:buNone/>
-            </a:pPr>
-          </a:p>
-          <a:p>
-            <a:pPr lvl="0" indent="0" marL="0">
-              <a:buNone/>
-            </a:pPr>
-            <a:r>
-              <a:rPr/>
-              <a:t>The unconstrained tree loses </a:t>
-            </a:r>
-            <a:r>
-              <a:rPr b="1"/>
-              <a:t>3 points</a:t>
-            </a:r>
-            <a:r>
-              <a:rPr/>
-              <a:t> of cross-validated accuracy relative to the depth-8 peak, for a training score nobody should have trusted in the first place. Handout section 3.</a:t>
+              <a:t>Name the dial explicitly and connect it to lesson 6: k in k-nearest neighbours traded bias against variance directly, and depth is a tree’s version of the same knob.</a:t>
+            </a:r>
+          </a:p>
+          <a:p>
+            <a:pPr lvl="0" indent="0" marL="0">
+              <a:buNone/>
+            </a:pPr>
+          </a:p>
+          <a:p>
+            <a:pPr lvl="0" indent="0" marL="0">
+              <a:buNone/>
+            </a:pPr>
+            <a:r>
+              <a:rPr/>
+              <a:t>The training-accuracy-1.000 claim is the one to make them justify. Ask why an unconstrained tree gets every training point right, always, on any data - the answer is that splitting never has to stop until every leaf holds one example, which it then “predicts” perfectly by definition. That number demonstrates the model class can memorise, not that anything has been learned - the same reading lesson 6 gave k = 1’s training accuracy.</a:t>
+            </a:r>
+          </a:p>
+          <a:p>
+            <a:pPr lvl="0" indent="0" marL="0">
+              <a:buNone/>
+            </a:pPr>
+          </a:p>
+          <a:p>
+            <a:pPr lvl="0" indent="0" marL="0">
+              <a:buNone/>
+            </a:pPr>
+            <a:r>
+              <a:rPr/>
+              <a:t>Handout section 3.</a:t>
             </a:r>
           </a:p>
         </p:txBody>
@@ -1574,35 +1555,43 @@
             </a:pPr>
             <a:r>
               <a:rPr/>
-              <a:t>Point at the two curves in order: training climbing steadily towards the top, cross-validated rising and then turning over. The peak is where the tree is deep enough to isolate both stressed islands and shallow enough to leave the flipped labels as errors rather than as leaves of their own.</a:t>
-            </a:r>
-          </a:p>
-          <a:p>
-            <a:pPr lvl="0" indent="0" marL="0">
-              <a:buNone/>
-            </a:pPr>
-          </a:p>
-          <a:p>
-            <a:pPr lvl="0" indent="0" marL="0">
-              <a:buNone/>
-            </a:pPr>
-            <a:r>
-              <a:rPr/>
-              <a:t>Say plainly what past the peak is buying: every extra split is spent fitting some of the 7% of labels this dataset deliberately flips, and a flipped label has no pattern to learn. A tree that classifies it “correctly” on training data has memorised it, not generalised.</a:t>
-            </a:r>
-          </a:p>
-          <a:p>
-            <a:pPr lvl="0" indent="0" marL="0">
-              <a:buNone/>
-            </a:pPr>
-          </a:p>
-          <a:p>
-            <a:pPr lvl="0" indent="0" marL="0">
-              <a:buNone/>
-            </a:pPr>
-            <a:r>
-              <a:rPr/>
-              <a:t>This is the second time this course has shown a curve bend this way - lesson 3’s Lasso penalty was the first. Handout section 3.</a:t>
+              <a:t>Read the two columns against each other, never in isolation, exactly as lesson 5 taught. Training accuracy climbs monotonically towards 1.000. Cross-validated accuracy rises, peaks at depth 8, and then falls back - even though the model keeps getting strictly more flexible.</a:t>
+            </a:r>
+          </a:p>
+          <a:p>
+            <a:pPr lvl="0" indent="0" marL="0">
+              <a:buNone/>
+            </a:pPr>
+          </a:p>
+          <a:p>
+            <a:pPr lvl="0" indent="0" marL="0">
+              <a:buNone/>
+            </a:pPr>
+            <a:r>
+              <a:rPr/>
+              <a:t>Ask which column they would have picked a tree by, if they had only seen the training column. The far right, the unconstrained tree, looks unbeatable on that evidence and is in fact the worst honest model on this table.</a:t>
+            </a:r>
+          </a:p>
+          <a:p>
+            <a:pPr lvl="0" indent="0" marL="0">
+              <a:buNone/>
+            </a:pPr>
+          </a:p>
+          <a:p>
+            <a:pPr lvl="0" indent="0" marL="0">
+              <a:buNone/>
+            </a:pPr>
+            <a:r>
+              <a:rPr/>
+              <a:t>The unconstrained tree loses </a:t>
+            </a:r>
+            <a:r>
+              <a:rPr b="1"/>
+              <a:t>3 points</a:t>
+            </a:r>
+            <a:r>
+              <a:rPr/>
+              <a:t> of cross-validated accuracy relative to the depth-8 peak, for a training score nobody should have trusted in the first place. Handout section 3.</a:t>
             </a:r>
           </a:p>
         </p:txBody>
@@ -1684,35 +1673,35 @@
             </a:pPr>
             <a:r>
               <a:rPr/>
-              <a:t>Left to right: at depth 2 the tree affords only the income floor and the debt ceiling - the two biggest, easiest-to-find regions - and neither interior island is visible at all. At depth 8 both islands appear as clean rectangles, close to the rule that generated the data. At full depth the boundary has grown a fringe of tiny rectangles chasing individual flipped labels.</a:t>
-            </a:r>
-          </a:p>
-          <a:p>
-            <a:pPr lvl="0" indent="0" marL="0">
-              <a:buNone/>
-            </a:pPr>
-          </a:p>
-          <a:p>
-            <a:pPr lvl="0" indent="0" marL="0">
-              <a:buNone/>
-            </a:pPr>
-            <a:r>
-              <a:rPr/>
-              <a:t>Make the point explicit: the full-depth boundary is not a smoother version of the depth-8 boundary. It is a noisier one, built out of the same mechanism that gave the unconstrained tree its perfect training score.</a:t>
-            </a:r>
-          </a:p>
-          <a:p>
-            <a:pPr lvl="0" indent="0" marL="0">
-              <a:buNone/>
-            </a:pPr>
-          </a:p>
-          <a:p>
-            <a:pPr lvl="0" indent="0" marL="0">
-              <a:buNone/>
-            </a:pPr>
-            <a:r>
-              <a:rPr/>
-              <a:t>Ask the room which of the three they would trust on a loan applicant they had never seen. Handout section 3.</a:t>
+              <a:t>Point at the two curves in order: training climbing steadily towards the top, cross-validated rising and then turning over. The peak is where the tree is deep enough to isolate both stressed islands and shallow enough to leave the flipped labels as errors rather than as leaves of their own.</a:t>
+            </a:r>
+          </a:p>
+          <a:p>
+            <a:pPr lvl="0" indent="0" marL="0">
+              <a:buNone/>
+            </a:pPr>
+          </a:p>
+          <a:p>
+            <a:pPr lvl="0" indent="0" marL="0">
+              <a:buNone/>
+            </a:pPr>
+            <a:r>
+              <a:rPr/>
+              <a:t>Say plainly what past the peak is buying: every extra split is spent fitting some of the 7% of labels this dataset deliberately flips, and a flipped label has no pattern to learn. A tree that classifies it “correctly” on training data has memorised it, not generalised.</a:t>
+            </a:r>
+          </a:p>
+          <a:p>
+            <a:pPr lvl="0" indent="0" marL="0">
+              <a:buNone/>
+            </a:pPr>
+          </a:p>
+          <a:p>
+            <a:pPr lvl="0" indent="0" marL="0">
+              <a:buNone/>
+            </a:pPr>
+            <a:r>
+              <a:rPr/>
+              <a:t>This is the second time this course has shown a curve bend this way - lesson 3’s Lasso penalty was the first. Handout section 3.</a:t>
             </a:r>
           </a:p>
         </p:txBody>
@@ -1890,35 +1879,35 @@
             </a:pPr>
             <a:r>
               <a:rPr/>
-              <a:t>This is the readability half of the story. For a tree meant to be read rather than merely scored, best-first growth is the better knob: a small budget of splits goes to the ones that matter most, instead of being spent uniformly across every branch regardless of whether it’s worth it.</a:t>
-            </a:r>
-          </a:p>
-          <a:p>
-            <a:pPr lvl="0" indent="0" marL="0">
-              <a:buNone/>
-            </a:pPr>
-          </a:p>
-          <a:p>
-            <a:pPr lvl="0" indent="0" marL="0">
-              <a:buNone/>
-            </a:pPr>
-            <a:r>
-              <a:rPr/>
-              <a:t>The nine-leaf tree is worth reading aloud as a sequence of if/else statements - that is the entire model, and it is the thing k-nearest neighbours and support vector machines cannot offer at all. For a decision that has to be justified to the person it affects, that can matter as much as accuracy.</a:t>
-            </a:r>
-          </a:p>
-          <a:p>
-            <a:pPr lvl="0" indent="0" marL="0">
-              <a:buNone/>
-            </a:pPr>
-          </a:p>
-          <a:p>
-            <a:pPr lvl="0" indent="0" marL="0">
-              <a:buNone/>
-            </a:pPr>
-            <a:r>
-              <a:rPr/>
-              <a:t>Handout section 4.</a:t>
+              <a:t>Left to right: at depth 2 the tree affords only the income floor and the debt ceiling - the two biggest, easiest-to-find regions - and neither interior island is visible at all. At depth 8 both islands appear as clean rectangles, close to the rule that generated the data. At full depth the boundary has grown a fringe of tiny rectangles chasing individual flipped labels.</a:t>
+            </a:r>
+          </a:p>
+          <a:p>
+            <a:pPr lvl="0" indent="0" marL="0">
+              <a:buNone/>
+            </a:pPr>
+          </a:p>
+          <a:p>
+            <a:pPr lvl="0" indent="0" marL="0">
+              <a:buNone/>
+            </a:pPr>
+            <a:r>
+              <a:rPr/>
+              <a:t>Make the point explicit: the full-depth boundary is not a smoother version of the depth-8 boundary. It is a noisier one, built out of the same mechanism that gave the unconstrained tree its perfect training score.</a:t>
+            </a:r>
+          </a:p>
+          <a:p>
+            <a:pPr lvl="0" indent="0" marL="0">
+              <a:buNone/>
+            </a:pPr>
+          </a:p>
+          <a:p>
+            <a:pPr lvl="0" indent="0" marL="0">
+              <a:buNone/>
+            </a:pPr>
+            <a:r>
+              <a:rPr/>
+              <a:t>Ask the room which of the three they would trust on a loan applicant they had never seen. Handout section 3.</a:t>
             </a:r>
           </a:p>
         </p:txBody>
@@ -2000,21 +1989,21 @@
             </a:pPr>
             <a:r>
               <a:rPr/>
-              <a:t>This is the instability that ensembles turn into raw material. The strongest split barely moves under resampling, because the evidence behind it - 1,200 points supporting the debt ceiling - is overwhelming. Everything weaker than that is supported by far fewer points, and those splits are what actually determine a tree’s shape.</a:t>
-            </a:r>
-          </a:p>
-          <a:p>
-            <a:pPr lvl="0" indent="0" marL="0">
-              <a:buNone/>
-            </a:pPr>
-          </a:p>
-          <a:p>
-            <a:pPr lvl="0" indent="0" marL="0">
-              <a:buNone/>
-            </a:pPr>
-            <a:r>
-              <a:rPr/>
-              <a:t>Ask the room what 11.7% disagreement between two trees fit to almost the same data implies about trusting any single tree’s exact boundary. The answer is the whole of the next segment: a single tree’s instability looks like a flaw, and it is about to become a strength.</a:t>
+              <a:t>This is the readability half of the story. For a tree meant to be read rather than merely scored, best-first growth is the better knob: a small budget of splits goes to the ones that matter most, instead of being spent uniformly across every branch regardless of whether it’s worth it.</a:t>
+            </a:r>
+          </a:p>
+          <a:p>
+            <a:pPr lvl="0" indent="0" marL="0">
+              <a:buNone/>
+            </a:pPr>
+          </a:p>
+          <a:p>
+            <a:pPr lvl="0" indent="0" marL="0">
+              <a:buNone/>
+            </a:pPr>
+            <a:r>
+              <a:rPr/>
+              <a:t>The nine-leaf tree is worth reading aloud as a sequence of if/else statements - that is the entire model, and it is the thing k-nearest neighbours and support vector machines cannot offer at all. For a decision that has to be justified to the person it affects, that can matter as much as accuracy.</a:t>
             </a:r>
           </a:p>
           <a:p>
@@ -2110,35 +2099,35 @@
             </a:pPr>
             <a:r>
               <a:rPr/>
-              <a:t>Run Notebooks/01_decision_trees_from_scratch.ipynb. Twenty minutes.</a:t>
-            </a:r>
-          </a:p>
-          <a:p>
-            <a:pPr lvl="0" indent="0" marL="0">
-              <a:buNone/>
-            </a:pPr>
-          </a:p>
-          <a:p>
-            <a:pPr lvl="0" indent="0" marL="0">
-              <a:buNone/>
-            </a:pPr>
-            <a:r>
-              <a:rPr/>
-              <a:t>Have them watch the from-scratch implementation confirm the debt-ceiling root split before scikit-learn’s version ever runs - the point is that the agreement is not assumed, it is checked, at every depth.</a:t>
-            </a:r>
-          </a:p>
-          <a:p>
-            <a:pPr lvl="0" indent="0" marL="0">
-              <a:buNone/>
-            </a:pPr>
-          </a:p>
-          <a:p>
-            <a:pPr lvl="0" indent="0" marL="0">
-              <a:buNone/>
-            </a:pPr>
-            <a:r>
-              <a:rPr/>
-              <a:t>The cell worth protecting if time is short is the two-tree resampling comparison at the end: printing the 11.7% disagreement figure themselves lands harder than reading it off a slide.</a:t>
+              <a:t>This is the instability that ensembles turn into raw material. The strongest split barely moves under resampling, because the evidence behind it - 1,200 points supporting the debt ceiling - is overwhelming. Everything weaker than that is supported by far fewer points, and those splits are what actually determine a tree’s shape.</a:t>
+            </a:r>
+          </a:p>
+          <a:p>
+            <a:pPr lvl="0" indent="0" marL="0">
+              <a:buNone/>
+            </a:pPr>
+          </a:p>
+          <a:p>
+            <a:pPr lvl="0" indent="0" marL="0">
+              <a:buNone/>
+            </a:pPr>
+            <a:r>
+              <a:rPr/>
+              <a:t>Ask the room what 11.7% disagreement between two trees fit to almost the same data implies about trusting any single tree’s exact boundary. The answer is the whole of the next segment: a single tree’s instability looks like a flaw, and it is about to become a strength.</a:t>
+            </a:r>
+          </a:p>
+          <a:p>
+            <a:pPr lvl="0" indent="0" marL="0">
+              <a:buNone/>
+            </a:pPr>
+          </a:p>
+          <a:p>
+            <a:pPr lvl="0" indent="0" marL="0">
+              <a:buNone/>
+            </a:pPr>
+            <a:r>
+              <a:rPr/>
+              <a:t>Handout section 4.</a:t>
             </a:r>
           </a:p>
         </p:txBody>
@@ -2220,7 +2209,35 @@
             </a:pPr>
             <a:r>
               <a:rPr/>
-              <a:t>Twelve minutes. The next segment is where the lesson’s real content starts - one tree’s instability, turned into an ensemble’s strength - so they need to come back with that framing fresh.</a:t>
+              <a:t>Run Notebooks/01_decision_trees_from_scratch.ipynb. Twenty minutes.</a:t>
+            </a:r>
+          </a:p>
+          <a:p>
+            <a:pPr lvl="0" indent="0" marL="0">
+              <a:buNone/>
+            </a:pPr>
+          </a:p>
+          <a:p>
+            <a:pPr lvl="0" indent="0" marL="0">
+              <a:buNone/>
+            </a:pPr>
+            <a:r>
+              <a:rPr/>
+              <a:t>Have them watch the from-scratch implementation confirm the debt-ceiling root split before scikit-learn’s version ever runs - the point is that the agreement is not assumed, it is checked, at every depth.</a:t>
+            </a:r>
+          </a:p>
+          <a:p>
+            <a:pPr lvl="0" indent="0" marL="0">
+              <a:buNone/>
+            </a:pPr>
+          </a:p>
+          <a:p>
+            <a:pPr lvl="0" indent="0" marL="0">
+              <a:buNone/>
+            </a:pPr>
+            <a:r>
+              <a:rPr/>
+              <a:t>The cell worth protecting if time is short is the two-tree resampling comparison at the end: printing the 11.7% disagreement figure themselves lands harder than reading it off a slide.</a:t>
             </a:r>
           </a:p>
         </p:txBody>
@@ -2302,35 +2319,7 @@
             </a:pPr>
             <a:r>
               <a:rPr/>
-              <a:t>State the logic before the name. Section 4 just measured that two trees on overlapping resamples disagree on more than a tenth of predictions. If those disagreements are close to random, averaging many such trees should cancel some of them out - that is the entire idea behind bagging, bootstrap aggregating.</a:t>
-            </a:r>
-          </a:p>
-          <a:p>
-            <a:pPr lvl="0" indent="0" marL="0">
-              <a:buNone/>
-            </a:pPr>
-          </a:p>
-          <a:p>
-            <a:pPr lvl="0" indent="0" marL="0">
-              <a:buNone/>
-            </a:pPr>
-            <a:r>
-              <a:rPr/>
-              <a:t>Be precise about “with replacement”: some rows appear more than once in a given sample, some not at all. That leftover fraction is not wasted - it becomes free validation data, on the next slide.</a:t>
-            </a:r>
-          </a:p>
-          <a:p>
-            <a:pPr lvl="0" indent="0" marL="0">
-              <a:buNone/>
-            </a:pPr>
-          </a:p>
-          <a:p>
-            <a:pPr lvl="0" indent="0" marL="0">
-              <a:buNone/>
-            </a:pPr>
-            <a:r>
-              <a:rPr/>
-              <a:t>Handout section 5.</a:t>
+              <a:t>Twelve minutes. The next segment is where the lesson’s real content starts - one tree’s instability, turned into an ensemble’s strength - so they need to come back with that framing fresh.</a:t>
             </a:r>
           </a:p>
         </p:txBody>
@@ -2412,35 +2401,35 @@
             </a:pPr>
             <a:r>
               <a:rPr/>
-              <a:t>State the result, do not derive it - the limit that gives 63.2%/36.8% is a standard exponential limit, worked out in full in the handout, and it does not belong on a slide. What matters here is the consequence: every bootstrap tree automatically leaves out over a third of the data it never saw, for free.</a:t>
-            </a:r>
-          </a:p>
-          <a:p>
-            <a:pPr lvl="0" indent="0" marL="0">
-              <a:buNone/>
-            </a:pPr>
-          </a:p>
-          <a:p>
-            <a:pPr lvl="0" indent="0" marL="0">
-              <a:buNone/>
-            </a:pPr>
-            <a:r>
-              <a:rPr/>
-              <a:t>Ask the room what that leftover third is good for. The answer is the next slide: it is validation data for exactly the one tree that never saw it.</a:t>
-            </a:r>
-          </a:p>
-          <a:p>
-            <a:pPr lvl="0" indent="0" marL="0">
-              <a:buNone/>
-            </a:pPr>
-          </a:p>
-          <a:p>
-            <a:pPr lvl="0" indent="0" marL="0">
-              <a:buNone/>
-            </a:pPr>
-            <a:r>
-              <a:rPr/>
-              <a:t>Handout section 5.1.</a:t>
+              <a:t>State the logic before the name. Section 4 just measured that two trees on overlapping resamples disagree on more than a tenth of predictions. If those disagreements are close to random, averaging many such trees should cancel some of them out - that is the entire idea behind bagging, bootstrap aggregating.</a:t>
+            </a:r>
+          </a:p>
+          <a:p>
+            <a:pPr lvl="0" indent="0" marL="0">
+              <a:buNone/>
+            </a:pPr>
+          </a:p>
+          <a:p>
+            <a:pPr lvl="0" indent="0" marL="0">
+              <a:buNone/>
+            </a:pPr>
+            <a:r>
+              <a:rPr/>
+              <a:t>Be precise about “with replacement”: some rows appear more than once in a given sample, some not at all. That leftover fraction is not wasted - it becomes free validation data, on the next slide.</a:t>
+            </a:r>
+          </a:p>
+          <a:p>
+            <a:pPr lvl="0" indent="0" marL="0">
+              <a:buNone/>
+            </a:pPr>
+          </a:p>
+          <a:p>
+            <a:pPr lvl="0" indent="0" marL="0">
+              <a:buNone/>
+            </a:pPr>
+            <a:r>
+              <a:rPr/>
+              <a:t>Handout section 5.</a:t>
             </a:r>
           </a:p>
         </p:txBody>
@@ -2522,51 +2511,21 @@
             </a:pPr>
             <a:r>
               <a:rPr/>
-              <a:t>The agreement is the point, but be careful how you sell it. On this seed the two numbers match to four decimal places, and that is luck: over twelve seeds the typical gap is 0.0026 and the worst is 0.0075. What is not luck is that they track each other well inside cross-validation’s own ±0.021 spread, because OOB score </a:t>
-            </a:r>
-            <a:r>
-              <a:rPr i="1"/>
-              <a:t>is</a:t>
-            </a:r>
-            <a:r>
-              <a:rPr/>
-              <a:t> cross-validation with different bookkeeping - each tree supplying its own held-out fold, the rows it never bootstrapped, instead of the dataset being split up front.</a:t>
-            </a:r>
-          </a:p>
-          <a:p>
-            <a:pPr lvl="0" indent="0" marL="0">
-              <a:buNone/>
-            </a:pPr>
-          </a:p>
-          <a:p>
-            <a:pPr lvl="0" indent="0" marL="0">
-              <a:buNone/>
-            </a:pPr>
-            <a:r>
-              <a:rPr/>
-              <a:t>Worth pausing on, because it is a habit rather than a fact: </a:t>
-            </a:r>
-            <a:r>
-              <a:rPr b="1"/>
-              <a:t>a single coincidence is not evidence of a law.</a:t>
-            </a:r>
-            <a:r>
-              <a:rPr/>
-              <a:t> If you catch yourself saying “exactly”, run it again with another seed. They will need that reflex in their own exercises, and it is cheaper to learn it here.</a:t>
-            </a:r>
-          </a:p>
-          <a:p>
-            <a:pPr lvl="0" indent="0" marL="0">
-              <a:buNone/>
-            </a:pPr>
-          </a:p>
-          <a:p>
-            <a:pPr lvl="0" indent="0" marL="0">
-              <a:buNone/>
-            </a:pPr>
-            <a:r>
-              <a:rPr/>
-              <a:t>Then make the practical consequence explicit: with a bagged ensemble you get a trustworthy estimate of generalisation for free, without setting aside a separate validation set at all - just not one to read to the fourth decimal.</a:t>
+              <a:t>State the result, do not derive it - the limit that gives 63.2%/36.8% is a standard exponential limit, worked out in full in the handout, and it does not belong on a slide. What matters here is the consequence: every bootstrap tree automatically leaves out over a third of the data it never saw, for free.</a:t>
+            </a:r>
+          </a:p>
+          <a:p>
+            <a:pPr lvl="0" indent="0" marL="0">
+              <a:buNone/>
+            </a:pPr>
+          </a:p>
+          <a:p>
+            <a:pPr lvl="0" indent="0" marL="0">
+              <a:buNone/>
+            </a:pPr>
+            <a:r>
+              <a:rPr/>
+              <a:t>Ask the room what that leftover third is good for. The answer is the next slide: it is validation data for exactly the one tree that never saw it.</a:t>
             </a:r>
           </a:p>
           <a:p>
@@ -2662,35 +2621,21 @@
             </a:pPr>
             <a:r>
               <a:rPr/>
-              <a:t>State the headline, not the algebra - the covariance expansion behind this is in the handout, and it does not belong on a slide. The two consequences are what matter: there is a floor variance cannot fall below, set by how correlated the trees are with each other, and averaging is a variance tool only, powerless against a systematic mistake shared by every tree.</a:t>
-            </a:r>
-          </a:p>
-          <a:p>
-            <a:pPr lvl="0" indent="0" marL="0">
-              <a:buNone/>
-            </a:pPr>
-          </a:p>
-          <a:p>
-            <a:pPr lvl="0" indent="0" marL="0">
-              <a:buNone/>
-            </a:pPr>
-            <a:r>
-              <a:rPr/>
-              <a:t>That second point is worth a beat: bagging does nothing for a tree that is too shallow to represent the rule in the first place. It cleans up noise, it does not add capability.</a:t>
-            </a:r>
-          </a:p>
-          <a:p>
-            <a:pPr lvl="0" indent="0" marL="0">
-              <a:buNone/>
-            </a:pPr>
-          </a:p>
-          <a:p>
-            <a:pPr lvl="0" indent="0" marL="0">
-              <a:buNone/>
-            </a:pPr>
-            <a:r>
-              <a:rPr/>
-              <a:t>Handout section 5.2.</a:t>
+              <a:t>How often each of the 1,200 loans turns up in one bootstrap sample, blue, against the limit e^-1 / k!, gold. The first bar is the out-of-bag share: 0.366 here, 0.368 in the limit. The rest are rows drawn once, twice, three times.</a:t>
+            </a:r>
+          </a:p>
+          <a:p>
+            <a:pPr lvl="0" indent="0" marL="0">
+              <a:buNone/>
+            </a:pPr>
+          </a:p>
+          <a:p>
+            <a:pPr lvl="0" indent="0" marL="0">
+              <a:buNone/>
+            </a:pPr>
+            <a:r>
+              <a:rPr/>
+              <a:t>The point to make: about one row in four appears two or more times. Every tree sees a different mix of repeats and absences, and that is where their disagreement - the raw material of bagging - comes from. Handout section 5.1.</a:t>
             </a:r>
           </a:p>
         </p:txBody>
@@ -2772,35 +2717,65 @@
             </a:pPr>
             <a:r>
               <a:rPr/>
-              <a:t>Across 30 independent 70/30 splits of the loan data, both numbers moved in the predicted direction. The mean rose, because bagging also averages out some of a deep tree’s overfitting; the spread fell, which is exactly what the previous slide’s formula says averaging correlated estimators should do.</a:t>
-            </a:r>
-          </a:p>
-          <a:p>
-            <a:pPr lvl="0" indent="0" marL="0">
-              <a:buNone/>
-            </a:pPr>
-          </a:p>
-          <a:p>
-            <a:pPr lvl="0" indent="0" marL="0">
-              <a:buNone/>
-            </a:pPr>
-            <a:r>
-              <a:rPr/>
-              <a:t>Ask the room to name which of the two changes matters more for trusting a single deployed model - the tighter spread, because it means the number you report is less likely to be a lucky split.</a:t>
-            </a:r>
-          </a:p>
-          <a:p>
-            <a:pPr lvl="0" indent="0" marL="0">
-              <a:buNone/>
-            </a:pPr>
-          </a:p>
-          <a:p>
-            <a:pPr lvl="0" indent="0" marL="0">
-              <a:buNone/>
-            </a:pPr>
-            <a:r>
-              <a:rPr/>
-              <a:t>Handout section 5.2.</a:t>
+              <a:t>The agreement is the point, but be careful how you sell it. On this seed the two numbers match to four decimal places, and that is luck: over twelve seeds the typical gap is 0.0026 and the worst is 0.0075. What is not luck is that they track each other well inside cross-validation’s own ±0.021 spread, because OOB score </a:t>
+            </a:r>
+            <a:r>
+              <a:rPr i="1"/>
+              <a:t>is</a:t>
+            </a:r>
+            <a:r>
+              <a:rPr/>
+              <a:t> cross-validation with different bookkeeping - each tree supplying its own held-out fold, the rows it never bootstrapped, instead of the dataset being split up front.</a:t>
+            </a:r>
+          </a:p>
+          <a:p>
+            <a:pPr lvl="0" indent="0" marL="0">
+              <a:buNone/>
+            </a:pPr>
+          </a:p>
+          <a:p>
+            <a:pPr lvl="0" indent="0" marL="0">
+              <a:buNone/>
+            </a:pPr>
+            <a:r>
+              <a:rPr/>
+              <a:t>Worth pausing on, because it is a habit rather than a fact: </a:t>
+            </a:r>
+            <a:r>
+              <a:rPr b="1"/>
+              <a:t>a single coincidence is not evidence of a law.</a:t>
+            </a:r>
+            <a:r>
+              <a:rPr/>
+              <a:t> If you catch yourself saying “exactly”, run it again with another seed. They will need that reflex in their own exercises, and it is cheaper to learn it here.</a:t>
+            </a:r>
+          </a:p>
+          <a:p>
+            <a:pPr lvl="0" indent="0" marL="0">
+              <a:buNone/>
+            </a:pPr>
+          </a:p>
+          <a:p>
+            <a:pPr lvl="0" indent="0" marL="0">
+              <a:buNone/>
+            </a:pPr>
+            <a:r>
+              <a:rPr/>
+              <a:t>Then make the practical consequence explicit: with a bagged ensemble you get a trustworthy estimate of generalisation for free, without setting aside a separate validation set at all - just not one to read to the fourth decimal.</a:t>
+            </a:r>
+          </a:p>
+          <a:p>
+            <a:pPr lvl="0" indent="0" marL="0">
+              <a:buNone/>
+            </a:pPr>
+          </a:p>
+          <a:p>
+            <a:pPr lvl="0" indent="0" marL="0">
+              <a:buNone/>
+            </a:pPr>
+            <a:r>
+              <a:rPr/>
+              <a:t>Handout section 5.1.</a:t>
             </a:r>
           </a:p>
         </p:txBody>
@@ -2882,35 +2857,35 @@
             </a:pPr>
             <a:r>
               <a:rPr/>
-              <a:t>Connect this directly to the previous slide’s algebra: if the floor is ρσ², the only way to push it lower is to push ρ down, and bootstrap resampling alone only does that partially, because every bagged tree still gets to see the full feature list.</a:t>
-            </a:r>
-          </a:p>
-          <a:p>
-            <a:pPr lvl="0" indent="0" marL="0">
-              <a:buNone/>
-            </a:pPr>
-          </a:p>
-          <a:p>
-            <a:pPr lvl="0" indent="0" marL="0">
-              <a:buNone/>
-            </a:pPr>
-            <a:r>
-              <a:rPr/>
-              <a:t>The random forest’s one change is a restriction, not an addition: at each split, only a random handful of candidate features is even offered. That forces disagreement between trees at the same point in the tree, purely by denying them the same menu.</a:t>
-            </a:r>
-          </a:p>
-          <a:p>
-            <a:pPr lvl="0" indent="0" marL="0">
-              <a:buNone/>
-            </a:pPr>
-          </a:p>
-          <a:p>
-            <a:pPr lvl="0" indent="0" marL="0">
-              <a:buNone/>
-            </a:pPr>
-            <a:r>
-              <a:rPr/>
-              <a:t>Handout section 6.</a:t>
+              <a:t>State the headline, not the algebra - the covariance expansion behind this is in the handout, and it does not belong on a slide. The two consequences are what matter: there is a floor variance cannot fall below, set by how correlated the trees are with each other, and averaging is a variance tool only, powerless against a systematic mistake shared by every tree.</a:t>
+            </a:r>
+          </a:p>
+          <a:p>
+            <a:pPr lvl="0" indent="0" marL="0">
+              <a:buNone/>
+            </a:pPr>
+          </a:p>
+          <a:p>
+            <a:pPr lvl="0" indent="0" marL="0">
+              <a:buNone/>
+            </a:pPr>
+            <a:r>
+              <a:rPr/>
+              <a:t>That second point is worth a beat: bagging does nothing for a tree that is too shallow to represent the rule in the first place. It cleans up noise, it does not add capability.</a:t>
+            </a:r>
+          </a:p>
+          <a:p>
+            <a:pPr lvl="0" indent="0" marL="0">
+              <a:buNone/>
+            </a:pPr>
+          </a:p>
+          <a:p>
+            <a:pPr lvl="0" indent="0" marL="0">
+              <a:buNone/>
+            </a:pPr>
+            <a:r>
+              <a:rPr/>
+              <a:t>Handout section 5.2.</a:t>
             </a:r>
           </a:p>
         </p:txBody>
@@ -3102,35 +3077,21 @@
             </a:pPr>
             <a:r>
               <a:rPr/>
-              <a:t>Same 30 splits as the bagging comparison. The random forest beats plain bagging on both counts - a better mean and a tighter spread - consistent with ρ having fallen further, exactly as the restriction on the previous slide predicts.</a:t>
-            </a:r>
-          </a:p>
-          <a:p>
-            <a:pPr lvl="0" indent="0" marL="0">
-              <a:buNone/>
-            </a:pPr>
-          </a:p>
-          <a:p>
-            <a:pPr lvl="0" indent="0" marL="0">
-              <a:buNone/>
-            </a:pPr>
-            <a:r>
-              <a:rPr/>
-              <a:t>Say plainly what has and hasn’t changed: nothing about the splitting rule is different from section 2. The only change across all three rows of this table is what surrounds the tree - resampling, then also restricting the feature menu.</a:t>
-            </a:r>
-          </a:p>
-          <a:p>
-            <a:pPr lvl="0" indent="0" marL="0">
-              <a:buNone/>
-            </a:pPr>
-          </a:p>
-          <a:p>
-            <a:pPr lvl="0" indent="0" marL="0">
-              <a:buNone/>
-            </a:pPr>
-            <a:r>
-              <a:rPr/>
-              <a:t>Handout section 6.</a:t>
+              <a:t>The previous slide’s formula as curves: the variance of an average of B trees, as a share of one tree’s, for rho = 0, 0.2, 0.5 and 0.8.</a:t>
+            </a:r>
+          </a:p>
+          <a:p>
+            <a:pPr lvl="0" indent="0" marL="0">
+              <a:buNone/>
+            </a:pPr>
+          </a:p>
+          <a:p>
+            <a:pPr lvl="0" indent="0" marL="0">
+              <a:buNone/>
+            </a:pPr>
+            <a:r>
+              <a:rPr/>
+              <a:t>Only the rho = 0 curve goes to zero. Every other one flattens onto its dotted floor: at rho = 0.5, ten trees keep 0.550 of one tree’s variance and a hundred keep 0.505. Ask the room what the curves say about adding trees past fifty - almost nothing - and what the only remaining lever is: lower rho. That is the random forest, two slides on. Handout section 5.2.</a:t>
             </a:r>
           </a:p>
         </p:txBody>
@@ -3212,45 +3173,35 @@
             </a:pPr>
             <a:r>
               <a:rPr/>
-              <a:t>State the definition plainly, then set up the experiment. With just income and debt ratio in the dataset, feature importance is a clean, correct answer - both real features get essentially all the credit, because there is nothing else to compete with them.</a:t>
-            </a:r>
-          </a:p>
-          <a:p>
-            <a:pPr lvl="0" indent="0" marL="0">
-              <a:buNone/>
-            </a:pPr>
-          </a:p>
-          <a:p>
-            <a:pPr lvl="0" indent="0" marL="0">
-              <a:buNone/>
-            </a:pPr>
-            <a:r>
-              <a:rPr/>
-              <a:t>Ask the room to predict what happens as you add columns of pure noise - </a:t>
-            </a:r>
-            <a:r>
-              <a:rPr>
-                <a:latin typeface="Courier"/>
-              </a:rPr>
-              <a:t>np.random.normal</a:t>
-            </a:r>
-            <a:r>
-              <a:rPr/>
-              <a:t>, wired to nothing. Most will predict the noise columns get close to zero importance, because averaging over hundreds of trees should wash out anything with no signal. Do not confirm or deny yet - the next slide is the answer.</a:t>
-            </a:r>
-          </a:p>
-          <a:p>
-            <a:pPr lvl="0" indent="0" marL="0">
-              <a:buNone/>
-            </a:pPr>
-          </a:p>
-          <a:p>
-            <a:pPr lvl="0" indent="0" marL="0">
-              <a:buNone/>
-            </a:pPr>
-            <a:r>
-              <a:rPr/>
-              <a:t>Handout section 7.</a:t>
+              <a:t>Across 30 independent 70/30 splits of the loan data, both numbers moved in the predicted direction. The mean rose, because bagging also averages out some of a deep tree’s overfitting; the spread fell, which is exactly what the previous slide’s formula says averaging correlated estimators should do.</a:t>
+            </a:r>
+          </a:p>
+          <a:p>
+            <a:pPr lvl="0" indent="0" marL="0">
+              <a:buNone/>
+            </a:pPr>
+          </a:p>
+          <a:p>
+            <a:pPr lvl="0" indent="0" marL="0">
+              <a:buNone/>
+            </a:pPr>
+            <a:r>
+              <a:rPr/>
+              <a:t>Ask the room to name which of the two changes matters more for trusting a single deployed model - the tighter spread, because it means the number you report is less likely to be a lucky split.</a:t>
+            </a:r>
+          </a:p>
+          <a:p>
+            <a:pPr lvl="0" indent="0" marL="0">
+              <a:buNone/>
+            </a:pPr>
+          </a:p>
+          <a:p>
+            <a:pPr lvl="0" indent="0" marL="0">
+              <a:buNone/>
+            </a:pPr>
+            <a:r>
+              <a:rPr/>
+              <a:t>Handout section 5.2.</a:t>
             </a:r>
           </a:p>
         </p:txBody>
@@ -3332,53 +3283,35 @@
             </a:pPr>
             <a:r>
               <a:rPr/>
-              <a:t>Read down the last column, slowly, and let the bottom row sit before explaining anything. With 20 pure-noise columns against 2 real features, more than half of the forest’s own importance scores land on columns that are </a:t>
-            </a:r>
-            <a:r>
-              <a:rPr>
-                <a:latin typeface="Courier"/>
-              </a:rPr>
-              <a:t>np.random.normal</a:t>
-            </a:r>
-            <a:r>
-              <a:rPr/>
-              <a:t> noise by construction.</a:t>
-            </a:r>
-          </a:p>
-          <a:p>
-            <a:pPr lvl="0" indent="0" marL="0">
-              <a:buNone/>
-            </a:pPr>
-          </a:p>
-          <a:p>
-            <a:pPr lvl="0" indent="0" marL="0">
-              <a:buNone/>
-            </a:pPr>
-            <a:r>
-              <a:rPr/>
-              <a:t>Name the instinct this breaks, and defend it before moving on: expecting an average over hundreds of trees to wash out noise is entirely reasonable - the variance-reduction result from section 5.2 is real and measured, and it does point the same way. It reduces the variance of the </a:t>
-            </a:r>
-            <a:r>
-              <a:rPr i="1"/>
-              <a:t>prediction</a:t>
-            </a:r>
-            <a:r>
-              <a:rPr/>
-              <a:t>. It does not guarantee small importance for irrelevant columns, because the very restriction that decorrelates the trees - a random, incomplete menu at each split - is what occasionally hands a split to noise with nothing better on offer.</a:t>
-            </a:r>
-          </a:p>
-          <a:p>
-            <a:pPr lvl="0" indent="0" marL="0">
-              <a:buNone/>
-            </a:pPr>
-          </a:p>
-          <a:p>
-            <a:pPr lvl="0" indent="0" marL="0">
-              <a:buNone/>
-            </a:pPr>
-            <a:r>
-              <a:rPr/>
-              <a:t>The mechanism is exact and is in handout section 7. The practical consequence to leave them with: treat a random forest’s importances as suggestive, not definitive, when real features are few against many candidate columns.</a:t>
+              <a:t>Connect this directly to the previous slide’s algebra: if the floor is ρσ², the only way to push it lower is to push ρ down, and bootstrap resampling alone only does that partially, because every bagged tree still gets to see the full feature list.</a:t>
+            </a:r>
+          </a:p>
+          <a:p>
+            <a:pPr lvl="0" indent="0" marL="0">
+              <a:buNone/>
+            </a:pPr>
+          </a:p>
+          <a:p>
+            <a:pPr lvl="0" indent="0" marL="0">
+              <a:buNone/>
+            </a:pPr>
+            <a:r>
+              <a:rPr/>
+              <a:t>The random forest’s one change is a restriction, not an addition: at each split, only a random handful of candidate features is even offered. That forces disagreement between trees at the same point in the tree, purely by denying them the same menu.</a:t>
+            </a:r>
+          </a:p>
+          <a:p>
+            <a:pPr lvl="0" indent="0" marL="0">
+              <a:buNone/>
+            </a:pPr>
+          </a:p>
+          <a:p>
+            <a:pPr lvl="0" indent="0" marL="0">
+              <a:buNone/>
+            </a:pPr>
+            <a:r>
+              <a:rPr/>
+              <a:t>Handout section 6.</a:t>
             </a:r>
           </a:p>
         </p:txBody>
@@ -3460,55 +3393,35 @@
             </a:pPr>
             <a:r>
               <a:rPr/>
-              <a:t>Run Notebooks/02_bagging_and_random_forests.ipynb. Eighteen minutes.</a:t>
-            </a:r>
-          </a:p>
-          <a:p>
-            <a:pPr lvl="0" indent="0" marL="0">
-              <a:buNone/>
-            </a:pPr>
-          </a:p>
-          <a:p>
-            <a:pPr lvl="0" indent="0" marL="0">
-              <a:buNone/>
-            </a:pPr>
-            <a:r>
-              <a:rPr/>
-              <a:t>The cell to protect is the noise-column sweep. Let them add the columns themselves and watch the importance share climb - reading the number off a slide does not land the same way as watching it happen.</a:t>
-            </a:r>
-          </a:p>
-          <a:p>
-            <a:pPr lvl="0" indent="0" marL="0">
-              <a:buNone/>
-            </a:pPr>
-          </a:p>
-          <a:p>
-            <a:pPr lvl="0" indent="0" marL="0">
-              <a:buNone/>
-            </a:pPr>
-            <a:r>
-              <a:rPr/>
-              <a:t>If time allows, have them try </a:t>
-            </a:r>
-            <a:r>
-              <a:rPr>
-                <a:latin typeface="Courier"/>
-              </a:rPr>
-              <a:t>max_features=None</a:t>
-            </a:r>
-            <a:r>
-              <a:rPr/>
-              <a:t> instead of the default </a:t>
-            </a:r>
-            <a:r>
-              <a:rPr>
-                <a:latin typeface="Courier"/>
-              </a:rPr>
-              <a:t>"sqrt"</a:t>
-            </a:r>
-            <a:r>
-              <a:rPr/>
-              <a:t> and predict what happens to the noise share before running it - it should fall, at the cost of the decorrelation that made the forest work in the first place.</a:t>
+              <a:t>Same 30 splits as the bagging comparison. The random forest beats plain bagging on both counts - a better mean and a tighter spread - consistent with ρ having fallen further, exactly as the restriction on the previous slide predicts.</a:t>
+            </a:r>
+          </a:p>
+          <a:p>
+            <a:pPr lvl="0" indent="0" marL="0">
+              <a:buNone/>
+            </a:pPr>
+          </a:p>
+          <a:p>
+            <a:pPr lvl="0" indent="0" marL="0">
+              <a:buNone/>
+            </a:pPr>
+            <a:r>
+              <a:rPr/>
+              <a:t>Say plainly what has and hasn’t changed: nothing about the splitting rule is different from section 2. The only change across all three rows of this table is what surrounds the tree - resampling, then also restricting the feature menu.</a:t>
+            </a:r>
+          </a:p>
+          <a:p>
+            <a:pPr lvl="0" indent="0" marL="0">
+              <a:buNone/>
+            </a:pPr>
+          </a:p>
+          <a:p>
+            <a:pPr lvl="0" indent="0" marL="0">
+              <a:buNone/>
+            </a:pPr>
+            <a:r>
+              <a:rPr/>
+              <a:t>Handout section 6.</a:t>
             </a:r>
           </a:p>
         </p:txBody>
@@ -3590,35 +3503,45 @@
             </a:pPr>
             <a:r>
               <a:rPr/>
-              <a:t>Contrast the two strategies directly, because the difference is the whole segment. Bagging and random forests are parallel: every tree is grown once, independently, and combined only at prediction time. Boosting is sequential: tree t exists specifically because of what trees 1 through t-1 still got wrong.</a:t>
-            </a:r>
-          </a:p>
-          <a:p>
-            <a:pPr lvl="0" indent="0" marL="0">
-              <a:buNone/>
-            </a:pPr>
-          </a:p>
-          <a:p>
-            <a:pPr lvl="0" indent="0" marL="0">
-              <a:buNone/>
-            </a:pPr>
-            <a:r>
-              <a:rPr/>
-              <a:t>Name α carefully and tie it to the course’s shared notation - this is the same symbol as lesson 3’s gradient descent learning rate, doing an analogous job: how large a step each correction takes.</a:t>
-            </a:r>
-          </a:p>
-          <a:p>
-            <a:pPr lvl="0" indent="0" marL="0">
-              <a:buNone/>
-            </a:pPr>
-          </a:p>
-          <a:p>
-            <a:pPr lvl="0" indent="0" marL="0">
-              <a:buNone/>
-            </a:pPr>
-            <a:r>
-              <a:rPr/>
-              <a:t>Handout section 8.</a:t>
+              <a:t>State the definition plainly, then set up the experiment. With just income and debt ratio in the dataset, feature importance is a clean, correct answer - both real features get essentially all the credit, because there is nothing else to compete with them.</a:t>
+            </a:r>
+          </a:p>
+          <a:p>
+            <a:pPr lvl="0" indent="0" marL="0">
+              <a:buNone/>
+            </a:pPr>
+          </a:p>
+          <a:p>
+            <a:pPr lvl="0" indent="0" marL="0">
+              <a:buNone/>
+            </a:pPr>
+            <a:r>
+              <a:rPr/>
+              <a:t>Ask the room to predict what happens as you add columns of pure noise - </a:t>
+            </a:r>
+            <a:r>
+              <a:rPr>
+                <a:latin typeface="Courier"/>
+              </a:rPr>
+              <a:t>np.random.normal</a:t>
+            </a:r>
+            <a:r>
+              <a:rPr/>
+              <a:t>, wired to nothing. Most will predict the noise columns get close to zero importance, because averaging over hundreds of trees should wash out anything with no signal. Do not confirm or deny yet - the next slide is the answer.</a:t>
+            </a:r>
+          </a:p>
+          <a:p>
+            <a:pPr lvl="0" indent="0" marL="0">
+              <a:buNone/>
+            </a:pPr>
+          </a:p>
+          <a:p>
+            <a:pPr lvl="0" indent="0" marL="0">
+              <a:buNone/>
+            </a:pPr>
+            <a:r>
+              <a:rPr/>
+              <a:t>Handout section 7.</a:t>
             </a:r>
           </a:p>
         </p:txBody>
@@ -3700,21 +3623,53 @@
             </a:pPr>
             <a:r>
               <a:rPr/>
-              <a:t>F₀ is the flat starting guess, the mean of the target. Each subsequent Fₜ is the previous ensemble plus a scaled correction from the newest tree, hₜ. Read it left to right: start flat, then keep adding small, scaled corrections.</a:t>
-            </a:r>
-          </a:p>
-          <a:p>
-            <a:pPr lvl="0" indent="0" marL="0">
-              <a:buNone/>
-            </a:pPr>
-          </a:p>
-          <a:p>
-            <a:pPr lvl="0" indent="0" marL="0">
-              <a:buNone/>
-            </a:pPr>
-            <a:r>
-              <a:rPr/>
-              <a:t>Do not derive anything further here - the next slide states what hₜ is actually fit to. Handout section 8.</a:t>
+              <a:t>Read down the last column, slowly, and let the bottom row sit before explaining anything. With 20 pure-noise columns against 2 real features, more than half of the forest’s own importance scores land on columns that are </a:t>
+            </a:r>
+            <a:r>
+              <a:rPr>
+                <a:latin typeface="Courier"/>
+              </a:rPr>
+              <a:t>np.random.normal</a:t>
+            </a:r>
+            <a:r>
+              <a:rPr/>
+              <a:t> noise by construction.</a:t>
+            </a:r>
+          </a:p>
+          <a:p>
+            <a:pPr lvl="0" indent="0" marL="0">
+              <a:buNone/>
+            </a:pPr>
+          </a:p>
+          <a:p>
+            <a:pPr lvl="0" indent="0" marL="0">
+              <a:buNone/>
+            </a:pPr>
+            <a:r>
+              <a:rPr/>
+              <a:t>Name the instinct this breaks, and defend it before moving on: expecting an average over hundreds of trees to wash out noise is entirely reasonable - the variance-reduction result from section 5.2 is real and measured, and it does point the same way. It reduces the variance of the </a:t>
+            </a:r>
+            <a:r>
+              <a:rPr i="1"/>
+              <a:t>prediction</a:t>
+            </a:r>
+            <a:r>
+              <a:rPr/>
+              <a:t>. It does not guarantee small importance for irrelevant columns, because the very restriction that decorrelates the trees - a random, incomplete menu at each split - is what occasionally hands a split to noise with nothing better on offer.</a:t>
+            </a:r>
+          </a:p>
+          <a:p>
+            <a:pPr lvl="0" indent="0" marL="0">
+              <a:buNone/>
+            </a:pPr>
+          </a:p>
+          <a:p>
+            <a:pPr lvl="0" indent="0" marL="0">
+              <a:buNone/>
+            </a:pPr>
+            <a:r>
+              <a:rPr/>
+              <a:t>The mechanism is exact and is in handout section 7. The practical consequence to leave them with: treat a random forest’s importances as suggestive, not definitive, when real features are few against many candidate columns.</a:t>
             </a:r>
           </a:p>
         </p:txBody>
@@ -3796,21 +3751,55 @@
             </a:pPr>
             <a:r>
               <a:rPr/>
-              <a:t>State the result without the calculus. For plain squared-error regression, what a new tree corrects is literally the residual - the gap between the truth and the ensemble’s current prediction. That is intuitive on its own and does not need a derivative to justify.</a:t>
-            </a:r>
-          </a:p>
-          <a:p>
-            <a:pPr lvl="0" indent="0" marL="0">
-              <a:buNone/>
-            </a:pPr>
-          </a:p>
-          <a:p>
-            <a:pPr lvl="0" indent="0" marL="0">
-              <a:buNone/>
-            </a:pPr>
-            <a:r>
-              <a:rPr/>
-              <a:t>The second bullet is the generalisation that pays off in the very next segment: the same recipe - fit a tree to the negative gradient of whatever loss you’re using - covers classification too, once the loss changes from squared error to something else. Handout section 8 has the one line of algebra connecting the two.</a:t>
+              <a:t>Run Notebooks/02_bagging_and_random_forests.ipynb. Eighteen minutes.</a:t>
+            </a:r>
+          </a:p>
+          <a:p>
+            <a:pPr lvl="0" indent="0" marL="0">
+              <a:buNone/>
+            </a:pPr>
+          </a:p>
+          <a:p>
+            <a:pPr lvl="0" indent="0" marL="0">
+              <a:buNone/>
+            </a:pPr>
+            <a:r>
+              <a:rPr/>
+              <a:t>The cell to protect is the noise-column sweep. Let them add the columns themselves and watch the importance share climb - reading the number off a slide does not land the same way as watching it happen.</a:t>
+            </a:r>
+          </a:p>
+          <a:p>
+            <a:pPr lvl="0" indent="0" marL="0">
+              <a:buNone/>
+            </a:pPr>
+          </a:p>
+          <a:p>
+            <a:pPr lvl="0" indent="0" marL="0">
+              <a:buNone/>
+            </a:pPr>
+            <a:r>
+              <a:rPr/>
+              <a:t>If time allows, have them try </a:t>
+            </a:r>
+            <a:r>
+              <a:rPr>
+                <a:latin typeface="Courier"/>
+              </a:rPr>
+              <a:t>max_features=None</a:t>
+            </a:r>
+            <a:r>
+              <a:rPr/>
+              <a:t> instead of the default </a:t>
+            </a:r>
+            <a:r>
+              <a:rPr>
+                <a:latin typeface="Courier"/>
+              </a:rPr>
+              <a:t>"sqrt"</a:t>
+            </a:r>
+            <a:r>
+              <a:rPr/>
+              <a:t> and predict what happens to the noise share before running it - it should fall, at the cost of the decorrelation that made the forest work in the first place.</a:t>
             </a:r>
           </a:p>
         </p:txBody>
@@ -3892,21 +3881,21 @@
             </a:pPr>
             <a:r>
               <a:rPr/>
-              <a:t>Sixty depth-2 trees, learning rate 0.3, fit to a step function plus a gentle sine wave, observed with noise. Walk through the panels in order.</a:t>
-            </a:r>
-          </a:p>
-          <a:p>
-            <a:pPr lvl="0" indent="0" marL="0">
-              <a:buNone/>
-            </a:pPr>
-          </a:p>
-          <a:p>
-            <a:pPr lvl="0" indent="0" marL="0">
-              <a:buNone/>
-            </a:pPr>
-            <a:r>
-              <a:rPr/>
-              <a:t>Say the numbers as you point: one tree barely moves the flat starting guess. Five trees sketch the coarse shape. Twenty trace the step function closely - the ensemble’s best point, on the next slide. By sixty, the ensemble is tracking individual noisy observations as well as the underlying shape.</a:t>
+              <a:t>Contrast the two strategies directly, because the difference is the whole segment. Bagging and random forests are parallel: every tree is grown once, independently, and combined only at prediction time. Boosting is sequential: tree t exists specifically because of what trees 1 through t-1 still got wrong.</a:t>
+            </a:r>
+          </a:p>
+          <a:p>
+            <a:pPr lvl="0" indent="0" marL="0">
+              <a:buNone/>
+            </a:pPr>
+          </a:p>
+          <a:p>
+            <a:pPr lvl="0" indent="0" marL="0">
+              <a:buNone/>
+            </a:pPr>
+            <a:r>
+              <a:rPr/>
+              <a:t>Name α carefully and tie it to the course’s shared notation - this is the same symbol as lesson 3’s gradient descent learning rate, doing an analogous job: how large a step each correction takes.</a:t>
             </a:r>
           </a:p>
           <a:p>
@@ -4002,43 +3991,21 @@
             </a:pPr>
             <a:r>
               <a:rPr/>
-              <a:t>Put a number on each panel of the previous slide. Twenty trees is the sweet spot; by sixty the error against the true, noise-free function has risen again, even though the ensemble is still adding trees that reduce error on the </a:t>
-            </a:r>
-            <a:r>
-              <a:rPr i="1"/>
-              <a:t>training</a:t>
-            </a:r>
-            <a:r>
-              <a:rPr/>
-              <a:t> residuals.</a:t>
-            </a:r>
-          </a:p>
-          <a:p>
-            <a:pPr lvl="0" indent="0" marL="0">
-              <a:buNone/>
-            </a:pPr>
-          </a:p>
-          <a:p>
-            <a:pPr lvl="0" indent="0" marL="0">
-              <a:buNone/>
-            </a:pPr>
-            <a:r>
-              <a:rPr/>
-              <a:t>Name what this is: the same overfitting story as the unconstrained single tree from section 3, reached by a completely different route - not one tree grown too deep, but too many shallow trees each chasing whatever residual noise is left.</a:t>
-            </a:r>
-          </a:p>
-          <a:p>
-            <a:pPr lvl="0" indent="0" marL="0">
-              <a:buNone/>
-            </a:pPr>
-          </a:p>
-          <a:p>
-            <a:pPr lvl="0" indent="0" marL="0">
-              <a:buNone/>
-            </a:pPr>
-            <a:r>
-              <a:rPr/>
-              <a:t>Handout section 8.</a:t>
+              <a:t>F₀ is the flat starting guess, the mean of the target. Each subsequent Fₜ is the previous ensemble plus a scaled correction from the newest tree, hₜ. Read it left to right: start flat, then keep adding small, scaled corrections.</a:t>
+            </a:r>
+          </a:p>
+          <a:p>
+            <a:pPr lvl="0" indent="0" marL="0">
+              <a:buNone/>
+            </a:pPr>
+          </a:p>
+          <a:p>
+            <a:pPr lvl="0" indent="0" marL="0">
+              <a:buNone/>
+            </a:pPr>
+            <a:r>
+              <a:rPr/>
+              <a:t>Do not derive anything further here - the next slide states what hₜ is actually fit to. Handout section 8.</a:t>
             </a:r>
           </a:p>
         </p:txBody>
@@ -4120,35 +4087,21 @@
             </a:pPr>
             <a:r>
               <a:rPr/>
-              <a:t>State the result, not the chain rule behind it - the handout carries the full derivative. What matters for this course is the connection: boosting for classification fits a sequence of small trees to y - p, one correction at a time, rather than adjusting a fixed set of linear coefficients against the same quantity in one continuous descent.</a:t>
-            </a:r>
-          </a:p>
-          <a:p>
-            <a:pPr lvl="0" indent="0" marL="0">
-              <a:buNone/>
-            </a:pPr>
-          </a:p>
-          <a:p>
-            <a:pPr lvl="0" indent="0" marL="0">
-              <a:buNone/>
-            </a:pPr>
-            <a:r>
-              <a:rPr/>
-              <a:t>Ask the room to name what’s genuinely different between this and lesson 4’s logistic regression, given they’re descending against the same quantity. The answer: lesson 4 moves a fixed number of coefficients; boosting adds entirely new trees, so the model’s structure itself grows with training rather than staying fixed.</a:t>
-            </a:r>
-          </a:p>
-          <a:p>
-            <a:pPr lvl="0" indent="0" marL="0">
-              <a:buNone/>
-            </a:pPr>
-          </a:p>
-          <a:p>
-            <a:pPr lvl="0" indent="0" marL="0">
-              <a:buNone/>
-            </a:pPr>
-            <a:r>
-              <a:rPr/>
-              <a:t>Handout section 9.</a:t>
+              <a:t>State the result without the calculus. For plain squared-error regression, what a new tree corrects is literally the residual - the gap between the truth and the ensemble’s current prediction. That is intuitive on its own and does not need a derivative to justify.</a:t>
+            </a:r>
+          </a:p>
+          <a:p>
+            <a:pPr lvl="0" indent="0" marL="0">
+              <a:buNone/>
+            </a:pPr>
+          </a:p>
+          <a:p>
+            <a:pPr lvl="0" indent="0" marL="0">
+              <a:buNone/>
+            </a:pPr>
+            <a:r>
+              <a:rPr/>
+              <a:t>The second bullet is the generalisation that pays off in the very next segment: the same recipe - fit a tree to the negative gradient of whatever loss you’re using - covers classification too, once the loss changes from squared error to something else. Handout section 8 has the one line of algebra connecting the two.</a:t>
             </a:r>
           </a:p>
         </p:txBody>
@@ -4340,43 +4293,35 @@
             </a:pPr>
             <a:r>
               <a:rPr/>
-              <a:t>Give the number and let it sit against everything shown so far this lesson: 0.902, from a method run at scikit-learn’s defaults, no tuning at all. Ask the room to recall the single tuned tree’s number from section 3 - 0.882 at depth 8 - and note that boosting has already passed it without being told anything about depth.</a:t>
-            </a:r>
-          </a:p>
-          <a:p>
-            <a:pPr lvl="0" indent="0" marL="0">
-              <a:buNone/>
-            </a:pPr>
-          </a:p>
-          <a:p>
-            <a:pPr lvl="0" indent="0" marL="0">
-              <a:buNone/>
-            </a:pPr>
-            <a:r>
-              <a:rPr/>
-              <a:t>The rest of this segment is what happens when boosting is </a:t>
-            </a:r>
-            <a:r>
-              <a:rPr i="1"/>
-              <a:t>not</a:t>
-            </a:r>
-            <a:r>
-              <a:rPr/>
-              <a:t> left at sensible defaults.</a:t>
-            </a:r>
-          </a:p>
-          <a:p>
-            <a:pPr lvl="0" indent="0" marL="0">
-              <a:buNone/>
-            </a:pPr>
-          </a:p>
-          <a:p>
-            <a:pPr lvl="0" indent="0" marL="0">
-              <a:buNone/>
-            </a:pPr>
-            <a:r>
-              <a:rPr/>
-              <a:t>Handout section 9.</a:t>
+              <a:t>Sixty depth-2 trees, learning rate 0.3, fit to a step function plus a gentle sine wave, observed with noise. Walk through the panels in order.</a:t>
+            </a:r>
+          </a:p>
+          <a:p>
+            <a:pPr lvl="0" indent="0" marL="0">
+              <a:buNone/>
+            </a:pPr>
+          </a:p>
+          <a:p>
+            <a:pPr lvl="0" indent="0" marL="0">
+              <a:buNone/>
+            </a:pPr>
+            <a:r>
+              <a:rPr/>
+              <a:t>Say the numbers as you point: one tree barely moves the flat starting guess. Five trees sketch the coarse shape. Twenty trace the step function closely - the ensemble’s best point, on the next slide. By sixty, the ensemble is tracking individual noisy observations as well as the underlying shape.</a:t>
+            </a:r>
+          </a:p>
+          <a:p>
+            <a:pPr lvl="0" indent="0" marL="0">
+              <a:buNone/>
+            </a:pPr>
+          </a:p>
+          <a:p>
+            <a:pPr lvl="0" indent="0" marL="0">
+              <a:buNone/>
+            </a:pPr>
+            <a:r>
+              <a:rPr/>
+              <a:t>Handout section 8.</a:t>
             </a:r>
           </a:p>
         </p:txBody>
@@ -4458,35 +4403,43 @@
             </a:pPr>
             <a:r>
               <a:rPr/>
-              <a:t>Unlike bagging, boosting keeps reducing training error for as long as it runs, because every new tree is built specifically to reduce what remains - including the 7% of labels that are noise by construction. There is nothing in the algorithm itself that says “stop”.</a:t>
-            </a:r>
-          </a:p>
-          <a:p>
-            <a:pPr lvl="0" indent="0" marL="0">
-              <a:buNone/>
-            </a:pPr>
-          </a:p>
-          <a:p>
-            <a:pPr lvl="0" indent="0" marL="0">
-              <a:buNone/>
-            </a:pPr>
-            <a:r>
-              <a:rPr/>
-              <a:t>Point at the peak, 30 trees, and then at 800: training accuracy has been at 1.000 since well before 200, and cross-validated accuracy has drifted down by about a point since the peak. Contrast the size of that drop with section 3’s unconstrained tree, which lost three points past its own peak - boosting’s overfitting is real but gentler.</a:t>
-            </a:r>
-          </a:p>
-          <a:p>
-            <a:pPr lvl="0" indent="0" marL="0">
-              <a:buNone/>
-            </a:pPr>
-          </a:p>
-          <a:p>
-            <a:pPr lvl="0" indent="0" marL="0">
-              <a:buNone/>
-            </a:pPr>
-            <a:r>
-              <a:rPr/>
-              <a:t>Handout section 10.</a:t>
+              <a:t>Put a number on each panel of the previous slide. Twenty trees is the sweet spot; by sixty the error against the true, noise-free function has risen again, even though the ensemble is still adding trees that reduce error on the </a:t>
+            </a:r>
+            <a:r>
+              <a:rPr i="1"/>
+              <a:t>training</a:t>
+            </a:r>
+            <a:r>
+              <a:rPr/>
+              <a:t> residuals.</a:t>
+            </a:r>
+          </a:p>
+          <a:p>
+            <a:pPr lvl="0" indent="0" marL="0">
+              <a:buNone/>
+            </a:pPr>
+          </a:p>
+          <a:p>
+            <a:pPr lvl="0" indent="0" marL="0">
+              <a:buNone/>
+            </a:pPr>
+            <a:r>
+              <a:rPr/>
+              <a:t>Name what this is: the same overfitting story as the unconstrained single tree from section 3, reached by a completely different route - not one tree grown too deep, but too many shallow trees each chasing whatever residual noise is left.</a:t>
+            </a:r>
+          </a:p>
+          <a:p>
+            <a:pPr lvl="0" indent="0" marL="0">
+              <a:buNone/>
+            </a:pPr>
+          </a:p>
+          <a:p>
+            <a:pPr lvl="0" indent="0" marL="0">
+              <a:buNone/>
+            </a:pPr>
+            <a:r>
+              <a:rPr/>
+              <a:t>Handout section 8.</a:t>
             </a:r>
           </a:p>
         </p:txBody>
@@ -4568,35 +4521,49 @@
             </a:pPr>
             <a:r>
               <a:rPr/>
-              <a:t>Two curves again, the same shape of story as the depth curve earlier this lesson but reached by adding trees instead of depth. Training reaches 1.000 by around 200 trees and sits there. Cross-validated accuracy climbs quickly, peaks near 30 trees, and drifts down over the following 770.</a:t>
-            </a:r>
-          </a:p>
-          <a:p>
-            <a:pPr lvl="0" indent="0" marL="0">
-              <a:buNone/>
-            </a:pPr>
-          </a:p>
-          <a:p>
-            <a:pPr lvl="0" indent="0" marL="0">
-              <a:buNone/>
-            </a:pPr>
-            <a:r>
-              <a:rPr/>
-              <a:t>The point worth making explicit: the damage per added tree here is small and easy to miss on a single run - which is exactly why early stopping matters for boosting rather than being optional, even though the overfit is gentler than a single unconstrained tree’s.</a:t>
-            </a:r>
-          </a:p>
-          <a:p>
-            <a:pPr lvl="0" indent="0" marL="0">
-              <a:buNone/>
-            </a:pPr>
-          </a:p>
-          <a:p>
-            <a:pPr lvl="0" indent="0" marL="0">
-              <a:buNone/>
-            </a:pPr>
-            <a:r>
-              <a:rPr/>
-              <a:t>Handout section 10.</a:t>
+              <a:t>State the result, not the chain rule behind it - the handout carries the full derivative. What matters for this course is the connection: boosting for classification fits a sequence of small trees to y - p, one correction at a time, rather than adjusting a fixed set of linear coefficients against the same quantity in one continuous descent.</a:t>
+            </a:r>
+          </a:p>
+          <a:p>
+            <a:pPr lvl="0" indent="0" marL="0">
+              <a:buNone/>
+            </a:pPr>
+          </a:p>
+          <a:p>
+            <a:pPr lvl="0" indent="0" marL="0">
+              <a:buNone/>
+            </a:pPr>
+            <a:r>
+              <a:rPr/>
+              <a:t>Ask the room to name what’s genuinely different between this and lesson 4’s logistic regression, given they’re descending against the same quantity. The answer: lesson 4 moves a fixed number of coefficients; boosting adds entirely new trees, so the model’s structure itself grows with training rather than staying fixed.</a:t>
+            </a:r>
+          </a:p>
+          <a:p>
+            <a:pPr lvl="0" indent="0" marL="0">
+              <a:buNone/>
+            </a:pPr>
+          </a:p>
+          <a:p>
+            <a:pPr lvl="0" indent="0" marL="0">
+              <a:buNone/>
+            </a:pPr>
+            <a:r>
+              <a:rPr/>
+              <a:t>Give them the first step in numbers, because it makes y - p concrete. The ensemble starts at the base rate’s log-odds, F0 = log(0.387 / 0.613) = -0.461, which predicts 0.387 for everyone. The first tree is fit to y - p: +0.613 for every applicant who defaulted, -0.387 for every one who repaid.</a:t>
+            </a:r>
+          </a:p>
+          <a:p>
+            <a:pPr lvl="0" indent="0" marL="0">
+              <a:buNone/>
+            </a:pPr>
+          </a:p>
+          <a:p>
+            <a:pPr lvl="0" indent="0" marL="0">
+              <a:buNone/>
+            </a:pPr>
+            <a:r>
+              <a:rPr/>
+              <a:t>Handout section 9.</a:t>
             </a:r>
           </a:p>
         </p:txBody>
@@ -4678,43 +4645,43 @@
             </a:pPr>
             <a:r>
               <a:rPr/>
-              <a:t>Learning rate and tree count are not independent - both control how much total correction the ensemble applies, so they trade off against each other. At α = 0.02, 120 trees haven’t finished fitting the signal: training accuracy is still under 0.89. At α = 1.00, the ensemble has memorised the training set completely and given back several points of cross-validated accuracy for it.</a:t>
-            </a:r>
-          </a:p>
-          <a:p>
-            <a:pPr lvl="0" indent="0" marL="0">
-              <a:buNone/>
-            </a:pPr>
-          </a:p>
-          <a:p>
-            <a:pPr lvl="0" indent="0" marL="0">
-              <a:buNone/>
-            </a:pPr>
-            <a:r>
-              <a:rPr/>
-              <a:t>The best setting sits in between - large enough to make real progress within the tree budget, small enough that any one correction is easy to outvote if it turns out to be wrong. Ask the room which direction they’d guess is “more regularised” before revealing that it’s the </a:t>
+              <a:t>Give the number and let it sit against everything shown so far this lesson: 0.902, from a method run at scikit-learn’s defaults, no tuning at all. Ask the room to recall the single tuned tree’s number from section 3 - 0.882 at depth 8 - and note that boosting has already passed it without being told anything about depth.</a:t>
+            </a:r>
+          </a:p>
+          <a:p>
+            <a:pPr lvl="0" indent="0" marL="0">
+              <a:buNone/>
+            </a:pPr>
+          </a:p>
+          <a:p>
+            <a:pPr lvl="0" indent="0" marL="0">
+              <a:buNone/>
+            </a:pPr>
+            <a:r>
+              <a:rPr/>
+              <a:t>The rest of this segment is what happens when boosting is </a:t>
             </a:r>
             <a:r>
               <a:rPr i="1"/>
-              <a:t>small</a:t>
-            </a:r>
-            <a:r>
-              <a:rPr/>
-              <a:t> α side, the same kind of inverted-direction trap lesson 6’s C was.</a:t>
-            </a:r>
-          </a:p>
-          <a:p>
-            <a:pPr lvl="0" indent="0" marL="0">
-              <a:buNone/>
-            </a:pPr>
-          </a:p>
-          <a:p>
-            <a:pPr lvl="0" indent="0" marL="0">
-              <a:buNone/>
-            </a:pPr>
-            <a:r>
-              <a:rPr/>
-              <a:t>Handout section 10.</a:t>
+              <a:t>not</a:t>
+            </a:r>
+            <a:r>
+              <a:rPr/>
+              <a:t> left at sensible defaults.</a:t>
+            </a:r>
+          </a:p>
+          <a:p>
+            <a:pPr lvl="0" indent="0" marL="0">
+              <a:buNone/>
+            </a:pPr>
+          </a:p>
+          <a:p>
+            <a:pPr lvl="0" indent="0" marL="0">
+              <a:buNone/>
+            </a:pPr>
+            <a:r>
+              <a:rPr/>
+              <a:t>Handout section 9.</a:t>
             </a:r>
           </a:p>
         </p:txBody>
@@ -4796,35 +4763,35 @@
             </a:pPr>
             <a:r>
               <a:rPr/>
-              <a:t>Run Notebooks/03_gradient_boosting.ipynb. Eighteen minutes.</a:t>
-            </a:r>
-          </a:p>
-          <a:p>
-            <a:pPr lvl="0" indent="0" marL="0">
-              <a:buNone/>
-            </a:pPr>
-          </a:p>
-          <a:p>
-            <a:pPr lvl="0" indent="0" marL="0">
-              <a:buNone/>
-            </a:pPr>
-            <a:r>
-              <a:rPr/>
-              <a:t>The cell to protect is the residual sweep at 1, 5, 20 and 60 trees - seeing the ensemble’s fit against the true function rise and then fall again, in real time, is the most direct experience of boosting’s overfitting available in this course.</a:t>
-            </a:r>
-          </a:p>
-          <a:p>
-            <a:pPr lvl="0" indent="0" marL="0">
-              <a:buNone/>
-            </a:pPr>
-          </a:p>
-          <a:p>
-            <a:pPr lvl="0" indent="0" marL="0">
-              <a:buNone/>
-            </a:pPr>
-            <a:r>
-              <a:rPr/>
-              <a:t>If time is short, skip the learning-rate sweep live and set it as reading - the table is in handout section 10.</a:t>
+              <a:t>Unlike bagging, boosting keeps reducing training error for as long as it runs, because every new tree is built specifically to reduce what remains - including the 7% of labels that are noise by construction. There is nothing in the algorithm itself that says “stop”.</a:t>
+            </a:r>
+          </a:p>
+          <a:p>
+            <a:pPr lvl="0" indent="0" marL="0">
+              <a:buNone/>
+            </a:pPr>
+          </a:p>
+          <a:p>
+            <a:pPr lvl="0" indent="0" marL="0">
+              <a:buNone/>
+            </a:pPr>
+            <a:r>
+              <a:rPr/>
+              <a:t>Point at the peak, 30 trees, and then at 800: training accuracy has been at 1.000 since well before 200, and cross-validated accuracy has drifted down by about a point since the peak. Contrast the size of that drop with section 3’s unconstrained tree, which lost three points past its own peak - boosting’s overfitting is real but gentler.</a:t>
+            </a:r>
+          </a:p>
+          <a:p>
+            <a:pPr lvl="0" indent="0" marL="0">
+              <a:buNone/>
+            </a:pPr>
+          </a:p>
+          <a:p>
+            <a:pPr lvl="0" indent="0" marL="0">
+              <a:buNone/>
+            </a:pPr>
+            <a:r>
+              <a:rPr/>
+              <a:t>Handout section 10.</a:t>
             </a:r>
           </a:p>
         </p:txBody>
@@ -4906,35 +4873,35 @@
             </a:pPr>
             <a:r>
               <a:rPr/>
-              <a:t>Everything from this lesson, cross-validated the same way. Read down the column and let the pattern speak before naming it: every ensemble method - bagging, the random forest, gradient boosting - lands within about a point and a half of the others, and all three sit closer to the ceiling than either single tree.</a:t>
-            </a:r>
-          </a:p>
-          <a:p>
-            <a:pPr lvl="0" indent="0" marL="0">
-              <a:buNone/>
-            </a:pPr>
-          </a:p>
-          <a:p>
-            <a:pPr lvl="0" indent="0" marL="0">
-              <a:buNone/>
-            </a:pPr>
-            <a:r>
-              <a:rPr/>
-              <a:t>The ceiling itself: 1 minus the 7% of labels deliberately flipped. No method reaches it, and none should - a model that classified the flipped labels “correctly” would be modelling the noise, not the rule.</a:t>
-            </a:r>
-          </a:p>
-          <a:p>
-            <a:pPr lvl="0" indent="0" marL="0">
-              <a:buNone/>
-            </a:pPr>
-          </a:p>
-          <a:p>
-            <a:pPr lvl="0" indent="0" marL="0">
-              <a:buNone/>
-            </a:pPr>
-            <a:r>
-              <a:rPr/>
-              <a:t>Handout section 11.</a:t>
+              <a:t>Two curves again, the same shape of story as the depth curve earlier this lesson but reached by adding trees instead of depth. Training reaches 1.000 by around 200 trees and sits there. Cross-validated accuracy climbs quickly, peaks near 30 trees, and drifts down over the following 770.</a:t>
+            </a:r>
+          </a:p>
+          <a:p>
+            <a:pPr lvl="0" indent="0" marL="0">
+              <a:buNone/>
+            </a:pPr>
+          </a:p>
+          <a:p>
+            <a:pPr lvl="0" indent="0" marL="0">
+              <a:buNone/>
+            </a:pPr>
+            <a:r>
+              <a:rPr/>
+              <a:t>The point worth making explicit: the damage per added tree here is small and easy to miss on a single run - which is exactly why early stopping matters for boosting rather than being optional, even though the overfit is gentler than a single unconstrained tree’s.</a:t>
+            </a:r>
+          </a:p>
+          <a:p>
+            <a:pPr lvl="0" indent="0" marL="0">
+              <a:buNone/>
+            </a:pPr>
+          </a:p>
+          <a:p>
+            <a:pPr lvl="0" indent="0" marL="0">
+              <a:buNone/>
+            </a:pPr>
+            <a:r>
+              <a:rPr/>
+              <a:t>Handout section 10.</a:t>
             </a:r>
           </a:p>
         </p:txBody>
@@ -5016,35 +4983,43 @@
             </a:pPr>
             <a:r>
               <a:rPr/>
-              <a:t>Read the three findings as a set - together they are this lesson’s real content, more than any single accuracy number.</a:t>
-            </a:r>
-          </a:p>
-          <a:p>
-            <a:pPr lvl="0" indent="0" marL="0">
-              <a:buNone/>
-            </a:pPr>
-          </a:p>
-          <a:p>
-            <a:pPr lvl="0" indent="0" marL="0">
-              <a:buNone/>
-            </a:pPr>
-            <a:r>
-              <a:rPr/>
-              <a:t>The third finding is the one to land hardest, because it repeats a pattern they’ve now seen four times with four different methods: flexibility without a stopping rule is not an advantage. Ask the room to name the earlier three occurrences before you do - k = 1 in lesson 6, an unregularised fit in lesson 3, and today’s own unconstrained tree from section 3.</a:t>
-            </a:r>
-          </a:p>
-          <a:p>
-            <a:pPr lvl="0" indent="0" marL="0">
-              <a:buNone/>
-            </a:pPr>
-          </a:p>
-          <a:p>
-            <a:pPr lvl="0" indent="0" marL="0">
-              <a:buNone/>
-            </a:pPr>
-            <a:r>
-              <a:rPr/>
-              <a:t>Handout section 11.</a:t>
+              <a:t>Learning rate and tree count are not independent - both control how much total correction the ensemble applies, so they trade off against each other. At α = 0.02, 120 trees haven’t finished fitting the signal: training accuracy is still under 0.89. At α = 1.00, the ensemble has memorised the training set completely and given back several points of cross-validated accuracy for it.</a:t>
+            </a:r>
+          </a:p>
+          <a:p>
+            <a:pPr lvl="0" indent="0" marL="0">
+              <a:buNone/>
+            </a:pPr>
+          </a:p>
+          <a:p>
+            <a:pPr lvl="0" indent="0" marL="0">
+              <a:buNone/>
+            </a:pPr>
+            <a:r>
+              <a:rPr/>
+              <a:t>The best setting sits in between - large enough to make real progress within the tree budget, small enough that any one correction is easy to outvote if it turns out to be wrong. Ask the room which direction they’d guess is “more regularised” before revealing that it’s the </a:t>
+            </a:r>
+            <a:r>
+              <a:rPr i="1"/>
+              <a:t>small</a:t>
+            </a:r>
+            <a:r>
+              <a:rPr/>
+              <a:t> α side, the same kind of inverted-direction trap lesson 6’s C was.</a:t>
+            </a:r>
+          </a:p>
+          <a:p>
+            <a:pPr lvl="0" indent="0" marL="0">
+              <a:buNone/>
+            </a:pPr>
+          </a:p>
+          <a:p>
+            <a:pPr lvl="0" indent="0" marL="0">
+              <a:buNone/>
+            </a:pPr>
+            <a:r>
+              <a:rPr/>
+              <a:t>Handout section 10.</a:t>
             </a:r>
           </a:p>
         </p:txBody>
@@ -5126,35 +5101,35 @@
             </a:pPr>
             <a:r>
               <a:rPr/>
-              <a:t>A table to photograph, exactly as lesson 6 closed with one. Work down it and attach today’s evidence to each row rather than leaving it as generic advice.</a:t>
-            </a:r>
-          </a:p>
-          <a:p>
-            <a:pPr lvl="0" indent="0" marL="0">
-              <a:buNone/>
-            </a:pPr>
-          </a:p>
-          <a:p>
-            <a:pPr lvl="0" indent="0" marL="0">
-              <a:buNone/>
-            </a:pPr>
-            <a:r>
-              <a:rPr/>
-              <a:t>The fourth row is worth a sentence of its own, tying back to the noise experiment: with few real features against many candidate columns, trust importances less as the column count grows past what the data can support.</a:t>
-            </a:r>
-          </a:p>
-          <a:p>
-            <a:pPr lvl="0" indent="0" marL="0">
-              <a:buNone/>
-            </a:pPr>
-          </a:p>
-          <a:p>
-            <a:pPr lvl="0" indent="0" marL="0">
-              <a:buNone/>
-            </a:pPr>
-            <a:r>
-              <a:rPr/>
-              <a:t>Handout section 11.</a:t>
+              <a:t>Run Notebooks/03_gradient_boosting.ipynb. Eighteen minutes.</a:t>
+            </a:r>
+          </a:p>
+          <a:p>
+            <a:pPr lvl="0" indent="0" marL="0">
+              <a:buNone/>
+            </a:pPr>
+          </a:p>
+          <a:p>
+            <a:pPr lvl="0" indent="0" marL="0">
+              <a:buNone/>
+            </a:pPr>
+            <a:r>
+              <a:rPr/>
+              <a:t>The cell to protect is the residual sweep at 1, 5, 20 and 60 trees - seeing the ensemble’s fit against the true function rise and then fall again, in real time, is the most direct experience of boosting’s overfitting available in this course.</a:t>
+            </a:r>
+          </a:p>
+          <a:p>
+            <a:pPr lvl="0" indent="0" marL="0">
+              <a:buNone/>
+            </a:pPr>
+          </a:p>
+          <a:p>
+            <a:pPr lvl="0" indent="0" marL="0">
+              <a:buNone/>
+            </a:pPr>
+            <a:r>
+              <a:rPr/>
+              <a:t>If time is short, skip the learning-rate sweep live and set it as reading - the table is in handout section 10.</a:t>
             </a:r>
           </a:p>
         </p:txBody>
@@ -5236,35 +5211,35 @@
             </a:pPr>
             <a:r>
               <a:rPr/>
-              <a:t>This is the number to carry out of the room. Say it once more, slowly: with twenty pure-noise columns against two real features, more than half of a random forest’s importance mass sat on columns wired to nothing.</a:t>
-            </a:r>
-          </a:p>
-          <a:p>
-            <a:pPr lvl="0" indent="0" marL="0">
-              <a:buNone/>
-            </a:pPr>
-          </a:p>
-          <a:p>
-            <a:pPr lvl="0" indent="0" marL="0">
-              <a:buNone/>
-            </a:pPr>
-            <a:r>
-              <a:rPr/>
-              <a:t>Ask them to write it down - derivations fade, this kind of number tends not to. It is the fourth lesson this course has produced one of these: coin flip labels, borrowed test-set values, a coefficient of 365 where an unpenalised fit wanted billions, and now this.</a:t>
-            </a:r>
-          </a:p>
-          <a:p>
-            <a:pPr lvl="0" indent="0" marL="0">
-              <a:buNone/>
-            </a:pPr>
-          </a:p>
-          <a:p>
-            <a:pPr lvl="0" indent="0" marL="0">
-              <a:buNone/>
-            </a:pPr>
-            <a:r>
-              <a:rPr/>
-              <a:t>Handout section 7 has the full mechanism.</a:t>
+              <a:t>Everything from this lesson, cross-validated the same way. Read down the column and let the pattern speak before naming it: every ensemble method - bagging, the random forest, gradient boosting - lands within about a point and a half of the others, and all three sit closer to the ceiling than either single tree.</a:t>
+            </a:r>
+          </a:p>
+          <a:p>
+            <a:pPr lvl="0" indent="0" marL="0">
+              <a:buNone/>
+            </a:pPr>
+          </a:p>
+          <a:p>
+            <a:pPr lvl="0" indent="0" marL="0">
+              <a:buNone/>
+            </a:pPr>
+            <a:r>
+              <a:rPr/>
+              <a:t>The ceiling itself: 1 minus the 7% of labels deliberately flipped. No method reaches it, and none should - a model that classified the flipped labels “correctly” would be modelling the noise, not the rule.</a:t>
+            </a:r>
+          </a:p>
+          <a:p>
+            <a:pPr lvl="0" indent="0" marL="0">
+              <a:buNone/>
+            </a:pPr>
+          </a:p>
+          <a:p>
+            <a:pPr lvl="0" indent="0" marL="0">
+              <a:buNone/>
+            </a:pPr>
+            <a:r>
+              <a:rPr/>
+              <a:t>Handout section 11.</a:t>
             </a:r>
           </a:p>
         </p:txBody>
@@ -5346,49 +5321,35 @@
             </a:pPr>
             <a:r>
               <a:rPr/>
-              <a:t>Close on the same shape as lesson 6’s summary: a handful of numbers that carry the lesson’s argument without needing the mathematics behind them re-derived.</a:t>
-            </a:r>
-          </a:p>
-          <a:p>
-            <a:pPr lvl="0" indent="0" marL="0">
-              <a:buNone/>
-            </a:pPr>
-          </a:p>
-          <a:p>
-            <a:pPr lvl="0" indent="0" marL="0">
-              <a:buNone/>
-            </a:pPr>
-            <a:r>
-              <a:rPr/>
-              <a:t>If they remember one habit from today, make it this: before trusting a random forest’s importance ranking, ask how many candidate columns compete for attention at each split, because that number - not the accuracy score - is what decides how much noise gets credit it didn’t earn.</a:t>
-            </a:r>
-          </a:p>
-          <a:p>
-            <a:pPr lvl="0" indent="0" marL="0">
-              <a:buNone/>
-            </a:pPr>
-          </a:p>
-          <a:p>
-            <a:pPr lvl="0" indent="0" marL="0">
-              <a:buNone/>
-            </a:pPr>
-            <a:r>
-              <a:rPr/>
-              <a:t>Next lesson turns from labelled data to unlabelled data - a fourth question this course asks of a dataset, after “what’s the relationship”, “which class”, and “how do you know you’re not fooling yourself”: what structure is there when nobody has told you the answer at all.</a:t>
-            </a:r>
-          </a:p>
-          <a:p>
-            <a:pPr lvl="0" indent="0" marL="0">
-              <a:buNone/>
-            </a:pPr>
-          </a:p>
-          <a:p>
-            <a:pPr lvl="0" indent="0" marL="0">
-              <a:buNone/>
-            </a:pPr>
-            <a:r>
-              <a:rPr/>
-              <a:t>Handout summary and notation table.</a:t>
+              <a:t>Read the three findings as a set - together they are this lesson’s real content, more than any single accuracy number.</a:t>
+            </a:r>
+          </a:p>
+          <a:p>
+            <a:pPr lvl="0" indent="0" marL="0">
+              <a:buNone/>
+            </a:pPr>
+          </a:p>
+          <a:p>
+            <a:pPr lvl="0" indent="0" marL="0">
+              <a:buNone/>
+            </a:pPr>
+            <a:r>
+              <a:rPr/>
+              <a:t>The third finding is the one to land hardest, because it repeats a pattern they’ve now seen four times with four different methods: flexibility without a stopping rule is not an advantage. Ask the room to name the earlier three occurrences before you do - k = 1 in lesson 6, an unregularised fit in lesson 3, and today’s own unconstrained tree from section 3.</a:t>
+            </a:r>
+          </a:p>
+          <a:p>
+            <a:pPr lvl="0" indent="0" marL="0">
+              <a:buNone/>
+            </a:pPr>
+          </a:p>
+          <a:p>
+            <a:pPr lvl="0" indent="0" marL="0">
+              <a:buNone/>
+            </a:pPr>
+            <a:r>
+              <a:rPr/>
+              <a:t>Handout section 11.</a:t>
             </a:r>
           </a:p>
         </p:txBody>
@@ -5580,35 +5541,35 @@
             </a:pPr>
             <a:r>
               <a:rPr/>
-              <a:t>Set it explicitly and say out loud when it comes back: the first ten minutes of lesson 8, Friday 20 November.</a:t>
-            </a:r>
-          </a:p>
-          <a:p>
-            <a:pPr lvl="0" indent="0" marL="0">
-              <a:buNone/>
-            </a:pPr>
-          </a:p>
-          <a:p>
-            <a:pPr lvl="0" indent="0" marL="0">
-              <a:buNone/>
-            </a:pPr>
-            <a:r>
-              <a:rPr/>
-              <a:t>Remind them of the standing rule from lesson 5: every reported number needs a cross-validated spread, and any feature-importance claim needs the check this lesson just demonstrated - a random forest’s importance ranking is a claim to be verified, not a fact to be quoted.</a:t>
-            </a:r>
-          </a:p>
-          <a:p>
-            <a:pPr lvl="0" indent="0" marL="0">
-              <a:buNone/>
-            </a:pPr>
-          </a:p>
-          <a:p>
-            <a:pPr lvl="0" indent="0" marL="0">
-              <a:buNone/>
-            </a:pPr>
-            <a:r>
-              <a:rPr/>
-              <a:t>Next week: unsupervised learning, the first lesson this course asks of data with no labels at all.</a:t>
+              <a:t>A table to photograph, exactly as lesson 6 closed with one. Work down it and attach today’s evidence to each row rather than leaving it as generic advice.</a:t>
+            </a:r>
+          </a:p>
+          <a:p>
+            <a:pPr lvl="0" indent="0" marL="0">
+              <a:buNone/>
+            </a:pPr>
+          </a:p>
+          <a:p>
+            <a:pPr lvl="0" indent="0" marL="0">
+              <a:buNone/>
+            </a:pPr>
+            <a:r>
+              <a:rPr/>
+              <a:t>The fourth row is worth a sentence of its own, tying back to the noise experiment: with few real features against many candidate columns, trust importances less as the column count grows past what the data can support.</a:t>
+            </a:r>
+          </a:p>
+          <a:p>
+            <a:pPr lvl="0" indent="0" marL="0">
+              <a:buNone/>
+            </a:pPr>
+          </a:p>
+          <a:p>
+            <a:pPr lvl="0" indent="0" marL="0">
+              <a:buNone/>
+            </a:pPr>
+            <a:r>
+              <a:rPr/>
+              <a:t>Handout section 11.</a:t>
             </a:r>
           </a:p>
         </p:txBody>
@@ -5631,6 +5592,350 @@
             <a:fld id="{18BDFEC3-8487-43E8-A154-7C12CBC1FFF2}" type="slidenum">
               <a:rPr lang="en-US"/>
               <a:t>51</a:t>
+            </a:fld>
+            <a:endParaRPr lang="en-US"/>
+          </a:p>
+        </p:txBody>
+      </p:sp>
+    </p:spTree>
+  </p:cSld>
+</p:notes>
+</file>
+
+<file path=ppt/notesSlides/notesSlide51.xml><?xml version="1.0" encoding="utf-8"?>
+<p:notes xmlns:a="http://schemas.openxmlformats.org/drawingml/2006/main" xmlns:r="http://schemas.openxmlformats.org/officeDocument/2006/relationships" xmlns:p="http://schemas.openxmlformats.org/presentationml/2006/main">
+  <p:cSld>
+    <p:spTree>
+      <p:nvGrpSpPr>
+        <p:cNvPr id="1" name=""/>
+        <p:cNvGrpSpPr/>
+        <p:nvPr/>
+      </p:nvGrpSpPr>
+      <p:grpSpPr>
+        <a:xfrm>
+          <a:off x="0" y="0"/>
+          <a:ext cx="0" cy="0"/>
+          <a:chOff x="0" y="0"/>
+          <a:chExt cx="0" cy="0"/>
+        </a:xfrm>
+      </p:grpSpPr>
+      <p:sp>
+        <p:nvSpPr>
+          <p:cNvPr id="2" name="Slide Image Placeholder 1"/>
+          <p:cNvSpPr>
+            <a:spLocks noGrp="1" noRot="1" noChangeAspect="1"/>
+          </p:cNvSpPr>
+          <p:nvPr>
+            <p:ph type="sldImg"/>
+          </p:nvPr>
+        </p:nvSpPr>
+        <p:spPr/>
+      </p:sp>
+      <p:sp>
+        <p:nvSpPr>
+          <p:cNvPr id="3" name="Notes Placeholder 2"/>
+          <p:cNvSpPr>
+            <a:spLocks noGrp="1"/>
+          </p:cNvSpPr>
+          <p:nvPr>
+            <p:ph type="body" idx="1"/>
+          </p:nvPr>
+        </p:nvSpPr>
+        <p:spPr/>
+        <p:txBody>
+          <a:bodyPr/>
+          <a:lstStyle/>
+          <a:p>
+            <a:pPr lvl="0" indent="0" marL="0">
+              <a:buNone/>
+            </a:pPr>
+            <a:r>
+              <a:rPr/>
+              <a:t>This is the number to carry out of the room. Say it once more, slowly: with twenty pure-noise columns against two real features, more than half of a random forest’s importance mass sat on columns wired to nothing.</a:t>
+            </a:r>
+          </a:p>
+          <a:p>
+            <a:pPr lvl="0" indent="0" marL="0">
+              <a:buNone/>
+            </a:pPr>
+          </a:p>
+          <a:p>
+            <a:pPr lvl="0" indent="0" marL="0">
+              <a:buNone/>
+            </a:pPr>
+            <a:r>
+              <a:rPr/>
+              <a:t>Ask them to write it down - derivations fade, this kind of number tends not to. It is the fourth lesson this course has produced one of these: coin flip labels, borrowed test-set values, a coefficient of 365 where an unpenalised fit wanted billions, and now this.</a:t>
+            </a:r>
+          </a:p>
+          <a:p>
+            <a:pPr lvl="0" indent="0" marL="0">
+              <a:buNone/>
+            </a:pPr>
+          </a:p>
+          <a:p>
+            <a:pPr lvl="0" indent="0" marL="0">
+              <a:buNone/>
+            </a:pPr>
+            <a:r>
+              <a:rPr/>
+              <a:t>Handout section 7 has the full mechanism.</a:t>
+            </a:r>
+          </a:p>
+        </p:txBody>
+      </p:sp>
+      <p:sp>
+        <p:nvSpPr>
+          <p:cNvPr id="4" name="Slide Number Placeholder 3"/>
+          <p:cNvSpPr>
+            <a:spLocks noGrp="1"/>
+          </p:cNvSpPr>
+          <p:nvPr>
+            <p:ph type="sldNum" sz="quarter" idx="10"/>
+          </p:nvPr>
+        </p:nvSpPr>
+        <p:spPr/>
+        <p:txBody>
+          <a:bodyPr/>
+          <a:lstStyle/>
+          <a:p>
+            <a:fld id="{18BDFEC3-8487-43E8-A154-7C12CBC1FFF2}" type="slidenum">
+              <a:rPr lang="en-US"/>
+              <a:t>52</a:t>
+            </a:fld>
+            <a:endParaRPr lang="en-US"/>
+          </a:p>
+        </p:txBody>
+      </p:sp>
+    </p:spTree>
+  </p:cSld>
+</p:notes>
+</file>
+
+<file path=ppt/notesSlides/notesSlide52.xml><?xml version="1.0" encoding="utf-8"?>
+<p:notes xmlns:a="http://schemas.openxmlformats.org/drawingml/2006/main" xmlns:r="http://schemas.openxmlformats.org/officeDocument/2006/relationships" xmlns:p="http://schemas.openxmlformats.org/presentationml/2006/main">
+  <p:cSld>
+    <p:spTree>
+      <p:nvGrpSpPr>
+        <p:cNvPr id="1" name=""/>
+        <p:cNvGrpSpPr/>
+        <p:nvPr/>
+      </p:nvGrpSpPr>
+      <p:grpSpPr>
+        <a:xfrm>
+          <a:off x="0" y="0"/>
+          <a:ext cx="0" cy="0"/>
+          <a:chOff x="0" y="0"/>
+          <a:chExt cx="0" cy="0"/>
+        </a:xfrm>
+      </p:grpSpPr>
+      <p:sp>
+        <p:nvSpPr>
+          <p:cNvPr id="2" name="Slide Image Placeholder 1"/>
+          <p:cNvSpPr>
+            <a:spLocks noGrp="1" noRot="1" noChangeAspect="1"/>
+          </p:cNvSpPr>
+          <p:nvPr>
+            <p:ph type="sldImg"/>
+          </p:nvPr>
+        </p:nvSpPr>
+        <p:spPr/>
+      </p:sp>
+      <p:sp>
+        <p:nvSpPr>
+          <p:cNvPr id="3" name="Notes Placeholder 2"/>
+          <p:cNvSpPr>
+            <a:spLocks noGrp="1"/>
+          </p:cNvSpPr>
+          <p:nvPr>
+            <p:ph type="body" idx="1"/>
+          </p:nvPr>
+        </p:nvSpPr>
+        <p:spPr/>
+        <p:txBody>
+          <a:bodyPr/>
+          <a:lstStyle/>
+          <a:p>
+            <a:pPr lvl="0" indent="0" marL="0">
+              <a:buNone/>
+            </a:pPr>
+            <a:r>
+              <a:rPr/>
+              <a:t>Close on the same shape as lesson 6’s summary: a handful of numbers that carry the lesson’s argument without needing the mathematics behind them re-derived.</a:t>
+            </a:r>
+          </a:p>
+          <a:p>
+            <a:pPr lvl="0" indent="0" marL="0">
+              <a:buNone/>
+            </a:pPr>
+          </a:p>
+          <a:p>
+            <a:pPr lvl="0" indent="0" marL="0">
+              <a:buNone/>
+            </a:pPr>
+            <a:r>
+              <a:rPr/>
+              <a:t>If they remember one habit from today, make it this: before trusting a random forest’s importance ranking, ask how many candidate columns compete for attention at each split, because that number - not the accuracy score - is what decides how much noise gets credit it didn’t earn.</a:t>
+            </a:r>
+          </a:p>
+          <a:p>
+            <a:pPr lvl="0" indent="0" marL="0">
+              <a:buNone/>
+            </a:pPr>
+          </a:p>
+          <a:p>
+            <a:pPr lvl="0" indent="0" marL="0">
+              <a:buNone/>
+            </a:pPr>
+            <a:r>
+              <a:rPr/>
+              <a:t>Next lesson turns from labelled data to unlabelled data - a fourth question this course asks of a dataset, after “what’s the relationship”, “which class”, and “how do you know you’re not fooling yourself”: what structure is there when nobody has told you the answer at all.</a:t>
+            </a:r>
+          </a:p>
+          <a:p>
+            <a:pPr lvl="0" indent="0" marL="0">
+              <a:buNone/>
+            </a:pPr>
+          </a:p>
+          <a:p>
+            <a:pPr lvl="0" indent="0" marL="0">
+              <a:buNone/>
+            </a:pPr>
+            <a:r>
+              <a:rPr/>
+              <a:t>Handout summary and notation table.</a:t>
+            </a:r>
+          </a:p>
+        </p:txBody>
+      </p:sp>
+      <p:sp>
+        <p:nvSpPr>
+          <p:cNvPr id="4" name="Slide Number Placeholder 3"/>
+          <p:cNvSpPr>
+            <a:spLocks noGrp="1"/>
+          </p:cNvSpPr>
+          <p:nvPr>
+            <p:ph type="sldNum" sz="quarter" idx="10"/>
+          </p:nvPr>
+        </p:nvSpPr>
+        <p:spPr/>
+        <p:txBody>
+          <a:bodyPr/>
+          <a:lstStyle/>
+          <a:p>
+            <a:fld id="{18BDFEC3-8487-43E8-A154-7C12CBC1FFF2}" type="slidenum">
+              <a:rPr lang="en-US"/>
+              <a:t>53</a:t>
+            </a:fld>
+            <a:endParaRPr lang="en-US"/>
+          </a:p>
+        </p:txBody>
+      </p:sp>
+    </p:spTree>
+  </p:cSld>
+</p:notes>
+</file>
+
+<file path=ppt/notesSlides/notesSlide53.xml><?xml version="1.0" encoding="utf-8"?>
+<p:notes xmlns:a="http://schemas.openxmlformats.org/drawingml/2006/main" xmlns:r="http://schemas.openxmlformats.org/officeDocument/2006/relationships" xmlns:p="http://schemas.openxmlformats.org/presentationml/2006/main">
+  <p:cSld>
+    <p:spTree>
+      <p:nvGrpSpPr>
+        <p:cNvPr id="1" name=""/>
+        <p:cNvGrpSpPr/>
+        <p:nvPr/>
+      </p:nvGrpSpPr>
+      <p:grpSpPr>
+        <a:xfrm>
+          <a:off x="0" y="0"/>
+          <a:ext cx="0" cy="0"/>
+          <a:chOff x="0" y="0"/>
+          <a:chExt cx="0" cy="0"/>
+        </a:xfrm>
+      </p:grpSpPr>
+      <p:sp>
+        <p:nvSpPr>
+          <p:cNvPr id="2" name="Slide Image Placeholder 1"/>
+          <p:cNvSpPr>
+            <a:spLocks noGrp="1" noRot="1" noChangeAspect="1"/>
+          </p:cNvSpPr>
+          <p:nvPr>
+            <p:ph type="sldImg"/>
+          </p:nvPr>
+        </p:nvSpPr>
+        <p:spPr/>
+      </p:sp>
+      <p:sp>
+        <p:nvSpPr>
+          <p:cNvPr id="3" name="Notes Placeholder 2"/>
+          <p:cNvSpPr>
+            <a:spLocks noGrp="1"/>
+          </p:cNvSpPr>
+          <p:nvPr>
+            <p:ph type="body" idx="1"/>
+          </p:nvPr>
+        </p:nvSpPr>
+        <p:spPr/>
+        <p:txBody>
+          <a:bodyPr/>
+          <a:lstStyle/>
+          <a:p>
+            <a:pPr lvl="0" indent="0" marL="0">
+              <a:buNone/>
+            </a:pPr>
+            <a:r>
+              <a:rPr/>
+              <a:t>Set it explicitly and say out loud when it comes back: the first ten minutes of lesson 8, Friday 20 November.</a:t>
+            </a:r>
+          </a:p>
+          <a:p>
+            <a:pPr lvl="0" indent="0" marL="0">
+              <a:buNone/>
+            </a:pPr>
+          </a:p>
+          <a:p>
+            <a:pPr lvl="0" indent="0" marL="0">
+              <a:buNone/>
+            </a:pPr>
+            <a:r>
+              <a:rPr/>
+              <a:t>Remind them of the standing rule from lesson 5: every reported number needs a cross-validated spread, and any feature-importance claim needs the check this lesson just demonstrated - a random forest’s importance ranking is a claim to be verified, not a fact to be quoted.</a:t>
+            </a:r>
+          </a:p>
+          <a:p>
+            <a:pPr lvl="0" indent="0" marL="0">
+              <a:buNone/>
+            </a:pPr>
+          </a:p>
+          <a:p>
+            <a:pPr lvl="0" indent="0" marL="0">
+              <a:buNone/>
+            </a:pPr>
+            <a:r>
+              <a:rPr/>
+              <a:t>Next week: unsupervised learning, the first lesson this course asks of data with no labels at all.</a:t>
+            </a:r>
+          </a:p>
+        </p:txBody>
+      </p:sp>
+      <p:sp>
+        <p:nvSpPr>
+          <p:cNvPr id="4" name="Slide Number Placeholder 3"/>
+          <p:cNvSpPr>
+            <a:spLocks noGrp="1"/>
+          </p:cNvSpPr>
+          <p:nvPr>
+            <p:ph type="sldNum" sz="quarter" idx="10"/>
+          </p:nvPr>
+        </p:nvSpPr>
+        <p:spPr/>
+        <p:txBody>
+          <a:bodyPr/>
+          <a:lstStyle/>
+          <a:p>
+            <a:fld id="{18BDFEC3-8487-43E8-A154-7C12CBC1FFF2}" type="slidenum">
+              <a:rPr lang="en-US"/>
+              <a:t>54</a:t>
             </a:fld>
             <a:endParaRPr lang="en-US"/>
           </a:p>
@@ -9728,6 +10033,17 @@
               <a:t> the data was built with</a:t>
             </a:r>
           </a:p>
+          <a:p>
+            <a:pPr lvl="0"/>
+            <a:r>
+              <a:rPr/>
+              <a:t>971 applicants left (0.256 defaulted), 229 right (0.939): gain </a:t>
+            </a:r>
+            <a:r>
+              <a:rPr b="1"/>
+              <a:t>0.144</a:t>
+            </a:r>
+          </a:p>
         </p:txBody>
       </p:sp>
     </p:spTree>
@@ -9777,71 +10093,41 @@
             </a:pPr>
             <a:r>
               <a:rPr/>
-              <a:t>Checked against scikit-learn</a:t>
-            </a:r>
-          </a:p>
-        </p:txBody>
-      </p:sp>
-      <p:sp>
-        <p:nvSpPr>
-          <p:cNvPr id="3" name="Content Placeholder 2"/>
-          <p:cNvSpPr>
-            <a:spLocks noGrp="1"/>
-          </p:cNvSpPr>
-          <p:nvPr>
-            <p:ph idx="1"/>
-          </p:nvPr>
-        </p:nvSpPr>
-        <p:spPr>
+              <a:t>The root split, on the Gini curve</a:t>
+            </a:r>
+          </a:p>
+        </p:txBody>
+      </p:sp>
+      <p:pic>
+        <p:nvPicPr>
+          <p:cNvPr descr="gini_root_split.png" id="0" name="Picture 1"/>
+          <p:cNvPicPr>
+            <a:picLocks noGrp="1" noChangeAspect="1"/>
+          </p:cNvPicPr>
+          <p:nvPr/>
+        </p:nvPicPr>
+        <p:blipFill>
+          <a:blip r:embed="rId3"/>
+          <a:stretch>
+            <a:fillRect/>
+          </a:stretch>
+        </p:blipFill>
+        <p:spPr bwMode="auto">
           <a:xfrm>
-            <a:off x="457200" y="1200151"/>
-            <a:ext cx="8229600" cy="3394472"/>
+            <a:off x="1834774" y="1166099"/>
+            <a:ext cx="5474452" cy="3360181"/>
           </a:xfrm>
+          <a:prstGeom prst="rect">
+            <a:avLst/>
+          </a:prstGeom>
+          <a:noFill/>
+          <a:ln w="9525">
+            <a:noFill/>
+            <a:headEnd/>
+            <a:tailEnd/>
+          </a:ln>
         </p:spPr>
-        <p:txBody>
-          <a:bodyPr/>
-          <a:lstStyle/>
-          <a:p>
-            <a:pPr lvl="0"/>
-            <a:r>
-              <a:rPr/>
-              <a:t>The from-scratch implementation agrees with scikit-learn’s </a:t>
-            </a:r>
-            <a:r>
-              <a:rPr>
-                <a:latin typeface="Courier"/>
-              </a:rPr>
-              <a:t>DecisionTreeClassifier</a:t>
-            </a:r>
-            <a:r>
-              <a:rPr/>
-              <a:t> to the </a:t>
-            </a:r>
-            <a:r>
-              <a:rPr b="1"/>
-              <a:t>fourth decimal place</a:t>
-            </a:r>
-            <a:r>
-              <a:rPr/>
-              <a:t> of resulting accuracy, at every depth tested</a:t>
-            </a:r>
-          </a:p>
-          <a:p>
-            <a:pPr lvl="0"/>
-            <a:r>
-              <a:rPr/>
-              <a:t>Not a coincidence: both search the same space by the same greedy rule</a:t>
-            </a:r>
-          </a:p>
-          <a:p>
-            <a:pPr lvl="0"/>
-            <a:r>
-              <a:rPr/>
-              <a:t>From here on, the notebooks use scikit-learn’s implementation: the same algorithm, compiled, not a different one</a:t>
-            </a:r>
-          </a:p>
-        </p:txBody>
-      </p:sp>
+      </p:pic>
     </p:spTree>
   </p:cSld>
 </p:sld>
@@ -9889,7 +10175,7 @@
             </a:pPr>
             <a:r>
               <a:rPr/>
-              <a:t>What greedy misses</a:t>
+              <a:t>Checked against scikit-learn</a:t>
             </a:r>
           </a:p>
         </p:txBody>
@@ -9917,29 +10203,39 @@
             <a:pPr lvl="0"/>
             <a:r>
               <a:rPr/>
-              <a:t>The search never asks “which pair of splits helps most together”: only “which single split helps most right now”</a:t>
+              <a:t>The from-scratch implementation agrees with scikit-learn’s </a:t>
+            </a:r>
+            <a:r>
+              <a:rPr>
+                <a:latin typeface="Courier"/>
+              </a:rPr>
+              <a:t>DecisionTreeClassifier</a:t>
+            </a:r>
+            <a:r>
+              <a:rPr/>
+              <a:t> to the </a:t>
+            </a:r>
+            <a:r>
+              <a:rPr b="1"/>
+              <a:t>fourth decimal place</a:t>
+            </a:r>
+            <a:r>
+              <a:rPr/>
+              <a:t> of resulting accuracy, at every depth tested</a:t>
             </a:r>
           </a:p>
           <a:p>
             <a:pPr lvl="0"/>
             <a:r>
               <a:rPr/>
-              <a:t>A feature that only pays off </a:t>
-            </a:r>
-            <a:r>
-              <a:rPr b="1"/>
-              <a:t>in combination</a:t>
-            </a:r>
-            <a:r>
-              <a:rPr/>
-              <a:t> with a later split can be invisible to a shallow tree</a:t>
+              <a:t>Not a coincidence: both search the same space by the same greedy rule</a:t>
             </a:r>
           </a:p>
           <a:p>
             <a:pPr lvl="0"/>
             <a:r>
               <a:rPr/>
-              <a:t>Exactly what happens to this dataset’s two interior “stressed” islands, covered next</a:t>
+              <a:t>From here on, the notebooks use scikit-learn’s implementation: the same algorithm, compiled, not a different one</a:t>
             </a:r>
           </a:p>
         </p:txBody>
@@ -9991,7 +10287,7 @@
             </a:pPr>
             <a:r>
               <a:rPr/>
-              <a:t>Depth is the bias-variance dial</a:t>
+              <a:t>What greedy misses</a:t>
             </a:r>
           </a:p>
         </p:txBody>
@@ -10018,44 +10314,30 @@
           <a:p>
             <a:pPr lvl="0"/>
             <a:r>
-              <a:rPr>
-                <a:latin typeface="Courier"/>
-              </a:rPr>
-              <a:t>max_depth</a:t>
-            </a:r>
-            <a:r>
-              <a:rPr/>
-              <a:t>: how many questions a tree may ask before a leaf must stop and vote by majority</a:t>
+              <a:rPr/>
+              <a:t>The search never asks “which pair of splits helps most together”: only “which single split helps most right now”</a:t>
             </a:r>
           </a:p>
           <a:p>
             <a:pPr lvl="0"/>
             <a:r>
+              <a:rPr/>
+              <a:t>A feature that only pays off </a:t>
+            </a:r>
+            <a:r>
               <a:rPr b="1"/>
-              <a:t>Shallow tree</a:t>
-            </a:r>
-            <a:r>
-              <a:rPr/>
-              <a:t>: few questions, only the coarsest structure. High bias, low variance</a:t>
+              <a:t>in combination</a:t>
+            </a:r>
+            <a:r>
+              <a:rPr/>
+              <a:t> with a later split can be invisible to a shallow tree</a:t>
             </a:r>
           </a:p>
           <a:p>
             <a:pPr lvl="0"/>
             <a:r>
-              <a:rPr b="1"/>
-              <a:t>Deep tree</a:t>
-            </a:r>
-            <a:r>
-              <a:rPr/>
-              <a:t>: enough questions to isolate almost any subset, down to single points. At full depth, training accuracy is </a:t>
-            </a:r>
-            <a:r>
-              <a:rPr b="1"/>
-              <a:t>exactly 1.000 on any dataset</a:t>
-            </a:r>
-            <a:r>
-              <a:rPr/>
-              <a:t>, including one with no structure at all</a:t>
+              <a:rPr/>
+              <a:t>Exactly what happens to this dataset’s two interior “stressed” islands, covered next</a:t>
             </a:r>
           </a:p>
         </p:txBody>
@@ -10066,6 +10348,122 @@
 </file>
 
 <file path=ppt/slides/slide18.xml><?xml version="1.0" encoding="utf-8"?>
+<p:sld xmlns:a="http://schemas.openxmlformats.org/drawingml/2006/main" xmlns:r="http://schemas.openxmlformats.org/officeDocument/2006/relationships" xmlns:p="http://schemas.openxmlformats.org/presentationml/2006/main">
+  <p:cSld>
+    <p:spTree>
+      <p:nvGrpSpPr>
+        <p:cNvPr id="1" name=""/>
+        <p:cNvGrpSpPr/>
+        <p:nvPr/>
+      </p:nvGrpSpPr>
+      <p:grpSpPr>
+        <a:xfrm>
+          <a:off x="0" y="0"/>
+          <a:ext cx="0" cy="0"/>
+          <a:chOff x="0" y="0"/>
+          <a:chExt cx="0" cy="0"/>
+        </a:xfrm>
+      </p:grpSpPr>
+      <p:sp>
+        <p:nvSpPr>
+          <p:cNvPr id="2" name="Title 1"/>
+          <p:cNvSpPr>
+            <a:spLocks noGrp="1"/>
+          </p:cNvSpPr>
+          <p:nvPr>
+            <p:ph type="title"/>
+          </p:nvPr>
+        </p:nvSpPr>
+        <p:spPr>
+          <a:xfrm>
+            <a:off x="457200" y="205979"/>
+            <a:ext cx="8229600" cy="857250"/>
+          </a:xfrm>
+        </p:spPr>
+        <p:txBody>
+          <a:bodyPr/>
+          <a:lstStyle/>
+          <a:p>
+            <a:pPr lvl="0" indent="0" marL="0">
+              <a:buNone/>
+            </a:pPr>
+            <a:r>
+              <a:rPr/>
+              <a:t>Depth is the bias-variance dial</a:t>
+            </a:r>
+          </a:p>
+        </p:txBody>
+      </p:sp>
+      <p:sp>
+        <p:nvSpPr>
+          <p:cNvPr id="3" name="Content Placeholder 2"/>
+          <p:cNvSpPr>
+            <a:spLocks noGrp="1"/>
+          </p:cNvSpPr>
+          <p:nvPr>
+            <p:ph idx="1"/>
+          </p:nvPr>
+        </p:nvSpPr>
+        <p:spPr>
+          <a:xfrm>
+            <a:off x="457200" y="1200151"/>
+            <a:ext cx="8229600" cy="3394472"/>
+          </a:xfrm>
+        </p:spPr>
+        <p:txBody>
+          <a:bodyPr/>
+          <a:lstStyle/>
+          <a:p>
+            <a:pPr lvl="0"/>
+            <a:r>
+              <a:rPr>
+                <a:latin typeface="Courier"/>
+              </a:rPr>
+              <a:t>max_depth</a:t>
+            </a:r>
+            <a:r>
+              <a:rPr/>
+              <a:t>: how many questions a tree may ask before a leaf must stop and vote by majority</a:t>
+            </a:r>
+          </a:p>
+          <a:p>
+            <a:pPr lvl="0"/>
+            <a:r>
+              <a:rPr b="1"/>
+              <a:t>Shallow tree</a:t>
+            </a:r>
+            <a:r>
+              <a:rPr/>
+              <a:t>: few questions, only the coarsest structure. High bias, low variance</a:t>
+            </a:r>
+          </a:p>
+          <a:p>
+            <a:pPr lvl="0"/>
+            <a:r>
+              <a:rPr b="1"/>
+              <a:t>Deep tree</a:t>
+            </a:r>
+            <a:r>
+              <a:rPr/>
+              <a:t>: enough questions to isolate almost any subset, down to single points. At full depth, training accuracy is </a:t>
+            </a:r>
+            <a:r>
+              <a:rPr b="1"/>
+              <a:t>exactly 1.000 on any dataset</a:t>
+            </a:r>
+            <a:r>
+              <a:rPr/>
+              <a:t>, including one with no structure at all</a:t>
+            </a:r>
+          </a:p>
+        </p:txBody>
+      </p:sp>
+    </p:spTree>
+  </p:cSld>
+</p:sld>
+</file>
+
+<file path=ppt/slides/slide19.xml><?xml version="1.0" encoding="utf-8"?>
 <p:sld xmlns:a="http://schemas.openxmlformats.org/drawingml/2006/main" xmlns:r="http://schemas.openxmlformats.org/officeDocument/2006/relationships" xmlns:p="http://schemas.openxmlformats.org/presentationml/2006/main">
   <p:cSld>
     <p:spTree>
@@ -10527,7 +10925,129 @@
 </p:sld>
 </file>
 
-<file path=ppt/slides/slide19.xml><?xml version="1.0" encoding="utf-8"?>
+<file path=ppt/slides/slide2.xml><?xml version="1.0" encoding="utf-8"?>
+<p:sld xmlns:a="http://schemas.openxmlformats.org/drawingml/2006/main" xmlns:r="http://schemas.openxmlformats.org/officeDocument/2006/relationships" xmlns:p="http://schemas.openxmlformats.org/presentationml/2006/main">
+  <p:cSld>
+    <p:spTree>
+      <p:nvGrpSpPr>
+        <p:cNvPr id="1" name=""/>
+        <p:cNvGrpSpPr/>
+        <p:nvPr/>
+      </p:nvGrpSpPr>
+      <p:grpSpPr>
+        <a:xfrm>
+          <a:off x="0" y="0"/>
+          <a:ext cx="0" cy="0"/>
+          <a:chOff x="0" y="0"/>
+          <a:chExt cx="0" cy="0"/>
+        </a:xfrm>
+      </p:grpSpPr>
+      <p:sp>
+        <p:nvSpPr>
+          <p:cNvPr id="2" name="Title 1"/>
+          <p:cNvSpPr>
+            <a:spLocks noGrp="1"/>
+          </p:cNvSpPr>
+          <p:nvPr>
+            <p:ph type="title"/>
+          </p:nvPr>
+        </p:nvSpPr>
+        <p:spPr>
+          <a:xfrm>
+            <a:off x="457200" y="205979"/>
+            <a:ext cx="8229600" cy="857250"/>
+          </a:xfrm>
+        </p:spPr>
+        <p:txBody>
+          <a:bodyPr/>
+          <a:lstStyle/>
+          <a:p>
+            <a:pPr lvl="0" indent="0" marL="0">
+              <a:buNone/>
+            </a:pPr>
+            <a:r>
+              <a:rPr/>
+              <a:t>Agenda</a:t>
+            </a:r>
+          </a:p>
+        </p:txBody>
+      </p:sp>
+      <p:sp>
+        <p:nvSpPr>
+          <p:cNvPr id="3" name="Content Placeholder 2"/>
+          <p:cNvSpPr>
+            <a:spLocks noGrp="1"/>
+          </p:cNvSpPr>
+          <p:nvPr>
+            <p:ph idx="1"/>
+          </p:nvPr>
+        </p:nvSpPr>
+        <p:spPr>
+          <a:xfrm>
+            <a:off x="457200" y="1200151"/>
+            <a:ext cx="8229600" cy="3394472"/>
+          </a:xfrm>
+        </p:spPr>
+        <p:txBody>
+          <a:bodyPr/>
+          <a:lstStyle/>
+          <a:p>
+            <a:pPr lvl="0"/>
+            <a:r>
+              <a:rPr/>
+              <a:t>A fourth family, built on a threshold</a:t>
+            </a:r>
+          </a:p>
+          <a:p>
+            <a:pPr lvl="0"/>
+            <a:r>
+              <a:rPr/>
+              <a:t>Decision trees, and why one alone is mediocre</a:t>
+            </a:r>
+          </a:p>
+          <a:p>
+            <a:pPr lvl="0"/>
+            <a:r>
+              <a:rPr/>
+              <a:t>Depth as the bias-variance dial, again</a:t>
+            </a:r>
+          </a:p>
+          <a:p>
+            <a:pPr lvl="0"/>
+            <a:r>
+              <a:rPr/>
+              <a:t>Bagging and random forests</a:t>
+            </a:r>
+          </a:p>
+          <a:p>
+            <a:pPr lvl="0"/>
+            <a:r>
+              <a:rPr/>
+              <a:t>Feature importance, and its limits</a:t>
+            </a:r>
+          </a:p>
+          <a:p>
+            <a:pPr lvl="0"/>
+            <a:r>
+              <a:rPr/>
+              <a:t>Gradient boosting</a:t>
+            </a:r>
+          </a:p>
+          <a:p>
+            <a:pPr lvl="0"/>
+            <a:r>
+              <a:rPr/>
+              <a:t>Choosing among trees, forests and boosting</a:t>
+            </a:r>
+          </a:p>
+        </p:txBody>
+      </p:sp>
+    </p:spTree>
+  </p:cSld>
+</p:sld>
+</file>
+
+<file path=ppt/slides/slide20.xml><?xml version="1.0" encoding="utf-8"?>
 <p:sld xmlns:a="http://schemas.openxmlformats.org/drawingml/2006/main" xmlns:r="http://schemas.openxmlformats.org/officeDocument/2006/relationships" xmlns:p="http://schemas.openxmlformats.org/presentationml/2006/main">
   <p:cSld>
     <p:spTree>
@@ -10609,129 +11129,7 @@
 </p:sld>
 </file>
 
-<file path=ppt/slides/slide2.xml><?xml version="1.0" encoding="utf-8"?>
-<p:sld xmlns:a="http://schemas.openxmlformats.org/drawingml/2006/main" xmlns:r="http://schemas.openxmlformats.org/officeDocument/2006/relationships" xmlns:p="http://schemas.openxmlformats.org/presentationml/2006/main">
-  <p:cSld>
-    <p:spTree>
-      <p:nvGrpSpPr>
-        <p:cNvPr id="1" name=""/>
-        <p:cNvGrpSpPr/>
-        <p:nvPr/>
-      </p:nvGrpSpPr>
-      <p:grpSpPr>
-        <a:xfrm>
-          <a:off x="0" y="0"/>
-          <a:ext cx="0" cy="0"/>
-          <a:chOff x="0" y="0"/>
-          <a:chExt cx="0" cy="0"/>
-        </a:xfrm>
-      </p:grpSpPr>
-      <p:sp>
-        <p:nvSpPr>
-          <p:cNvPr id="2" name="Title 1"/>
-          <p:cNvSpPr>
-            <a:spLocks noGrp="1"/>
-          </p:cNvSpPr>
-          <p:nvPr>
-            <p:ph type="title"/>
-          </p:nvPr>
-        </p:nvSpPr>
-        <p:spPr>
-          <a:xfrm>
-            <a:off x="457200" y="205979"/>
-            <a:ext cx="8229600" cy="857250"/>
-          </a:xfrm>
-        </p:spPr>
-        <p:txBody>
-          <a:bodyPr/>
-          <a:lstStyle/>
-          <a:p>
-            <a:pPr lvl="0" indent="0" marL="0">
-              <a:buNone/>
-            </a:pPr>
-            <a:r>
-              <a:rPr/>
-              <a:t>Agenda</a:t>
-            </a:r>
-          </a:p>
-        </p:txBody>
-      </p:sp>
-      <p:sp>
-        <p:nvSpPr>
-          <p:cNvPr id="3" name="Content Placeholder 2"/>
-          <p:cNvSpPr>
-            <a:spLocks noGrp="1"/>
-          </p:cNvSpPr>
-          <p:nvPr>
-            <p:ph idx="1"/>
-          </p:nvPr>
-        </p:nvSpPr>
-        <p:spPr>
-          <a:xfrm>
-            <a:off x="457200" y="1200151"/>
-            <a:ext cx="8229600" cy="3394472"/>
-          </a:xfrm>
-        </p:spPr>
-        <p:txBody>
-          <a:bodyPr/>
-          <a:lstStyle/>
-          <a:p>
-            <a:pPr lvl="0"/>
-            <a:r>
-              <a:rPr/>
-              <a:t>A fourth family, built on a threshold</a:t>
-            </a:r>
-          </a:p>
-          <a:p>
-            <a:pPr lvl="0"/>
-            <a:r>
-              <a:rPr/>
-              <a:t>Decision trees, and why one alone is mediocre</a:t>
-            </a:r>
-          </a:p>
-          <a:p>
-            <a:pPr lvl="0"/>
-            <a:r>
-              <a:rPr/>
-              <a:t>Depth as the bias-variance dial, again</a:t>
-            </a:r>
-          </a:p>
-          <a:p>
-            <a:pPr lvl="0"/>
-            <a:r>
-              <a:rPr/>
-              <a:t>Bagging and random forests</a:t>
-            </a:r>
-          </a:p>
-          <a:p>
-            <a:pPr lvl="0"/>
-            <a:r>
-              <a:rPr/>
-              <a:t>Feature importance, and its limits</a:t>
-            </a:r>
-          </a:p>
-          <a:p>
-            <a:pPr lvl="0"/>
-            <a:r>
-              <a:rPr/>
-              <a:t>Gradient boosting</a:t>
-            </a:r>
-          </a:p>
-          <a:p>
-            <a:pPr lvl="0"/>
-            <a:r>
-              <a:rPr/>
-              <a:t>Choosing among trees, forests and boosting</a:t>
-            </a:r>
-          </a:p>
-        </p:txBody>
-      </p:sp>
-    </p:spTree>
-  </p:cSld>
-</p:sld>
-</file>
-
-<file path=ppt/slides/slide20.xml><?xml version="1.0" encoding="utf-8"?>
+<file path=ppt/slides/slide21.xml><?xml version="1.0" encoding="utf-8"?>
 <p:sld xmlns:a="http://schemas.openxmlformats.org/drawingml/2006/main" xmlns:r="http://schemas.openxmlformats.org/officeDocument/2006/relationships" xmlns:p="http://schemas.openxmlformats.org/presentationml/2006/main">
   <p:cSld>
     <p:spTree>
@@ -10813,146 +11211,6 @@
 </p:sld>
 </file>
 
-<file path=ppt/slides/slide21.xml><?xml version="1.0" encoding="utf-8"?>
-<p:sld xmlns:a="http://schemas.openxmlformats.org/drawingml/2006/main" xmlns:r="http://schemas.openxmlformats.org/officeDocument/2006/relationships" xmlns:p="http://schemas.openxmlformats.org/presentationml/2006/main">
-  <p:cSld>
-    <p:spTree>
-      <p:nvGrpSpPr>
-        <p:cNvPr id="1" name=""/>
-        <p:cNvGrpSpPr/>
-        <p:nvPr/>
-      </p:nvGrpSpPr>
-      <p:grpSpPr>
-        <a:xfrm>
-          <a:off x="0" y="0"/>
-          <a:ext cx="0" cy="0"/>
-          <a:chOff x="0" y="0"/>
-          <a:chExt cx="0" cy="0"/>
-        </a:xfrm>
-      </p:grpSpPr>
-      <p:sp>
-        <p:nvSpPr>
-          <p:cNvPr id="2" name="Title 1"/>
-          <p:cNvSpPr>
-            <a:spLocks noGrp="1"/>
-          </p:cNvSpPr>
-          <p:nvPr>
-            <p:ph type="title"/>
-          </p:nvPr>
-        </p:nvSpPr>
-        <p:spPr>
-          <a:xfrm>
-            <a:off x="457200" y="205979"/>
-            <a:ext cx="8229600" cy="857250"/>
-          </a:xfrm>
-        </p:spPr>
-        <p:txBody>
-          <a:bodyPr/>
-          <a:lstStyle/>
-          <a:p>
-            <a:pPr lvl="0" indent="0" marL="0">
-              <a:buNone/>
-            </a:pPr>
-            <a:r>
-              <a:rPr/>
-              <a:t>Reading a tree, and the knob that keeps it small</a:t>
-            </a:r>
-          </a:p>
-        </p:txBody>
-      </p:sp>
-      <p:sp>
-        <p:nvSpPr>
-          <p:cNvPr id="3" name="Content Placeholder 2"/>
-          <p:cNvSpPr>
-            <a:spLocks noGrp="1"/>
-          </p:cNvSpPr>
-          <p:nvPr>
-            <p:ph idx="1"/>
-          </p:nvPr>
-        </p:nvSpPr>
-        <p:spPr>
-          <a:xfrm>
-            <a:off x="457200" y="1200151"/>
-            <a:ext cx="8229600" cy="3394472"/>
-          </a:xfrm>
-        </p:spPr>
-        <p:txBody>
-          <a:bodyPr/>
-          <a:lstStyle/>
-          <a:p>
-            <a:pPr lvl="0"/>
-            <a:r>
-              <a:rPr>
-                <a:latin typeface="Courier"/>
-              </a:rPr>
-              <a:t>max_depth</a:t>
-            </a:r>
-            <a:r>
-              <a:rPr/>
-              <a:t> grows the tree </a:t>
-            </a:r>
-            <a:r>
-              <a:rPr b="1"/>
-              <a:t>breadth-first</a:t>
-            </a:r>
-            <a:r>
-              <a:rPr/>
-              <a:t>: every leaf at level d splits before any leaf reaches d+1, useful or not</a:t>
-            </a:r>
-          </a:p>
-          <a:p>
-            <a:pPr lvl="0"/>
-            <a:r>
-              <a:rPr>
-                <a:latin typeface="Courier"/>
-              </a:rPr>
-              <a:t>max_leaf_nodes</a:t>
-            </a:r>
-            <a:r>
-              <a:rPr/>
-              <a:t> grows it </a:t>
-            </a:r>
-            <a:r>
-              <a:rPr b="1"/>
-              <a:t>best-first</a:t>
-            </a:r>
-            <a:r>
-              <a:rPr/>
-              <a:t>: always expanding whichever leaf offers the largest ΔG</a:t>
-            </a:r>
-          </a:p>
-          <a:p>
-            <a:pPr lvl="0"/>
-            <a:r>
-              <a:rPr/>
-              <a:t>With </a:t>
-            </a:r>
-            <a:r>
-              <a:rPr>
-                <a:latin typeface="Courier"/>
-              </a:rPr>
-              <a:t>max_leaf_nodes = 9</a:t>
-            </a:r>
-            <a:r>
-              <a:rPr/>
-              <a:t>: </a:t>
-            </a:r>
-            <a:r>
-              <a:rPr b="1"/>
-              <a:t>90.8%</a:t>
-            </a:r>
-            <a:r>
-              <a:rPr/>
-              <a:t> training accuracy, every threshold recognisable: 28 the income floor, 0.82 the debt ceiling</a:t>
-            </a:r>
-          </a:p>
-        </p:txBody>
-      </p:sp>
-    </p:spTree>
-  </p:cSld>
-</p:sld>
-</file>
-
 <file path=ppt/slides/slide22.xml><?xml version="1.0" encoding="utf-8"?>
 <p:sld xmlns:a="http://schemas.openxmlformats.org/drawingml/2006/main" xmlns:r="http://schemas.openxmlformats.org/officeDocument/2006/relationships" xmlns:p="http://schemas.openxmlformats.org/presentationml/2006/main">
   <p:cSld>
@@ -10995,7 +11253,7 @@
             </a:pPr>
             <a:r>
               <a:rPr/>
-              <a:t>A tree that doesn’t stay still</a:t>
+              <a:t>Reading a tree, and the knob that keeps it small</a:t>
             </a:r>
           </a:p>
         </p:txBody>
@@ -11022,59 +11280,68 @@
           <a:p>
             <a:pPr lvl="0"/>
             <a:r>
-              <a:rPr/>
-              <a:t>Two trees at </a:t>
-            </a:r>
-            <a:r>
               <a:rPr>
                 <a:latin typeface="Courier"/>
               </a:rPr>
-              <a:t>max_depth = 6</a:t>
-            </a:r>
-            <a:r>
-              <a:rPr/>
-              <a:t>, fit to independent 65% resamples of the same 1,200 applicants</a:t>
+              <a:t>max_depth</a:t>
+            </a:r>
+            <a:r>
+              <a:rPr/>
+              <a:t> grows the tree </a:t>
+            </a:r>
+            <a:r>
+              <a:rPr b="1"/>
+              <a:t>breadth-first</a:t>
+            </a:r>
+            <a:r>
+              <a:rPr/>
+              <a:t>: every leaf at level d splits before any leaf reaches d+1, useful or not</a:t>
             </a:r>
           </a:p>
           <a:p>
             <a:pPr lvl="0"/>
             <a:r>
-              <a:rPr/>
-              <a:t>The debt ceiling, the strongest split, agrees to within </a:t>
+              <a:rPr>
+                <a:latin typeface="Courier"/>
+              </a:rPr>
+              <a:t>max_leaf_nodes</a:t>
+            </a:r>
+            <a:r>
+              <a:rPr/>
+              <a:t> grows it </a:t>
             </a:r>
             <a:r>
               <a:rPr b="1"/>
-              <a:t>0.001</a:t>
+              <a:t>best-first</a:t>
+            </a:r>
+            <a:r>
+              <a:rPr/>
+              <a:t>: always expanding whichever leaf offers the largest ΔG</a:t>
             </a:r>
           </a:p>
           <a:p>
             <a:pPr lvl="0"/>
             <a:r>
               <a:rPr/>
-              <a:t>The trees grow </a:t>
+              <a:t>With </a:t>
+            </a:r>
+            <a:r>
+              <a:rPr>
+                <a:latin typeface="Courier"/>
+              </a:rPr>
+              <a:t>max_leaf_nodes = 9</a:t>
+            </a:r>
+            <a:r>
+              <a:rPr/>
+              <a:t>: </a:t>
             </a:r>
             <a:r>
               <a:rPr b="1"/>
-              <a:t>31 and 33 leaves</a:t>
-            </a:r>
-            <a:r>
-              <a:rPr/>
-              <a:t>, and </a:t>
-            </a:r>
-            <a:r>
-              <a:rPr b="1"/>
-              <a:t>disagree on 11.7%</a:t>
-            </a:r>
-            <a:r>
-              <a:rPr/>
-              <a:t> of predictions on the full dataset</a:t>
-            </a:r>
-          </a:p>
-          <a:p>
-            <a:pPr lvl="0"/>
-            <a:r>
-              <a:rPr/>
-              <a:t>The strongest split is stable; the many weaker ones are not, and they decide most of a tree’s shape</a:t>
+              <a:t>90.8%</a:t>
+            </a:r>
+            <a:r>
+              <a:rPr/>
+              <a:t> training accuracy, every threshold recognisable: 28 the income floor, 0.82 the debt ceiling</a:t>
             </a:r>
           </a:p>
         </p:txBody>
@@ -11126,7 +11393,7 @@
             </a:pPr>
             <a:r>
               <a:rPr/>
-              <a:t>Notebook 1, live</a:t>
+              <a:t>A tree that doesn’t stay still</a:t>
             </a:r>
           </a:p>
         </p:txBody>
@@ -11154,14 +11421,58 @@
             <a:pPr lvl="0"/>
             <a:r>
               <a:rPr/>
-              <a:t>Decision trees from scratch, checked against scikit-learn</a:t>
+              <a:t>Two trees at </a:t>
+            </a:r>
+            <a:r>
+              <a:rPr>
+                <a:latin typeface="Courier"/>
+              </a:rPr>
+              <a:t>max_depth = 6</a:t>
+            </a:r>
+            <a:r>
+              <a:rPr/>
+              <a:t>, fit to independent 65% resamples of the same 1,200 applicants</a:t>
             </a:r>
           </a:p>
           <a:p>
             <a:pPr lvl="0"/>
             <a:r>
               <a:rPr/>
-              <a:t>Depth swept, the two boundaries drawn, and the instability measured</a:t>
+              <a:t>The debt ceiling, the strongest split, agrees to within </a:t>
+            </a:r>
+            <a:r>
+              <a:rPr b="1"/>
+              <a:t>0.001</a:t>
+            </a:r>
+          </a:p>
+          <a:p>
+            <a:pPr lvl="0"/>
+            <a:r>
+              <a:rPr/>
+              <a:t>The trees grow </a:t>
+            </a:r>
+            <a:r>
+              <a:rPr b="1"/>
+              <a:t>31 and 33 leaves</a:t>
+            </a:r>
+            <a:r>
+              <a:rPr/>
+              <a:t>, and </a:t>
+            </a:r>
+            <a:r>
+              <a:rPr b="1"/>
+              <a:t>disagree on 11.7%</a:t>
+            </a:r>
+            <a:r>
+              <a:rPr/>
+              <a:t> of predictions on the full dataset</a:t>
+            </a:r>
+          </a:p>
+          <a:p>
+            <a:pPr lvl="0"/>
+            <a:r>
+              <a:rPr/>
+              <a:t>The strongest split is stable; the many weaker ones are not, and they decide most of a tree’s shape</a:t>
             </a:r>
           </a:p>
         </p:txBody>
@@ -11213,7 +11524,7 @@
             </a:pPr>
             <a:r>
               <a:rPr/>
-              <a:t>Break</a:t>
+              <a:t>Notebook 1, live</a:t>
             </a:r>
           </a:p>
         </p:txBody>
@@ -11241,7 +11552,14 @@
             <a:pPr lvl="0"/>
             <a:r>
               <a:rPr/>
-              <a:t>Twelve minutes</a:t>
+              <a:t>Decision trees from scratch, checked against scikit-learn</a:t>
+            </a:r>
+          </a:p>
+          <a:p>
+            <a:pPr lvl="0"/>
+            <a:r>
+              <a:rPr/>
+              <a:t>Depth swept, the two boundaries drawn, and the instability measured</a:t>
             </a:r>
           </a:p>
         </p:txBody>
@@ -11293,7 +11611,7 @@
             </a:pPr>
             <a:r>
               <a:rPr/>
-              <a:t>Bagging: averaging away the instability</a:t>
+              <a:t>Break</a:t>
             </a:r>
           </a:p>
         </p:txBody>
@@ -11321,66 +11639,7 @@
             <a:pPr lvl="0"/>
             <a:r>
               <a:rPr/>
-              <a:t>A tree’s mistakes differ across resamples, as just measured, so </a:t>
-            </a:r>
-            <a:r>
-              <a:rPr b="1"/>
-              <a:t>many trees, averaged</a:t>
-            </a:r>
-            <a:r>
-              <a:rPr/>
-              <a:t> should partly cancel out</a:t>
-            </a:r>
-          </a:p>
-          <a:p>
-            <a:pPr lvl="0"/>
-            <a:r>
-              <a:rPr/>
-              <a:t>Draw a </a:t>
-            </a:r>
-            <a:r>
-              <a:rPr b="1"/>
-              <a:t>bootstrap sample</a:t>
-            </a:r>
-            <a:r>
-              <a:rPr/>
-              <a:t>: m rows chosen </a:t>
-            </a:r>
-            <a:r>
-              <a:rPr b="1"/>
-              <a:t>with replacement</a:t>
-            </a:r>
-            <a:r>
-              <a:rPr/>
-              <a:t> from the m training rows</a:t>
-            </a:r>
-          </a:p>
-          <a:p>
-            <a:pPr lvl="0"/>
-            <a:r>
-              <a:rPr/>
-              <a:t>Fit a tree to it. Repeat </a:t>
-            </a:r>
-            <a:r>
-              <a:rPr>
-                <a:latin typeface="Courier"/>
-              </a:rPr>
-              <a:t>n_estimators</a:t>
-            </a:r>
-            <a:r>
-              <a:rPr/>
-              <a:t> times; predict by </a:t>
-            </a:r>
-            <a:r>
-              <a:rPr b="1"/>
-              <a:t>majority vote</a:t>
-            </a:r>
-          </a:p>
-          <a:p>
-            <a:pPr lvl="0"/>
-            <a:r>
-              <a:rPr/>
-              <a:t>The tree algorithm itself is unchanged, only what surrounds it is new</a:t>
+              <a:t>Twelve minutes</a:t>
             </a:r>
           </a:p>
         </p:txBody>
@@ -11432,7 +11691,7 @@
             </a:pPr>
             <a:r>
               <a:rPr/>
-              <a:t>How much data one bootstrap sample sees</a:t>
+              <a:t>Bagging: averaging away the instability</a:t>
             </a:r>
           </a:p>
         </p:txBody>
@@ -11460,48 +11719,66 @@
             <a:pPr lvl="0"/>
             <a:r>
               <a:rPr/>
-              <a:t>Each bootstrap sample is drawn from the same m rows, with replacement</a:t>
+              <a:t>A tree’s mistakes differ across resamples, as just measured, so </a:t>
+            </a:r>
+            <a:r>
+              <a:rPr b="1"/>
+              <a:t>many trees, averaged</a:t>
+            </a:r>
+            <a:r>
+              <a:rPr/>
+              <a:t> should partly cancel out</a:t>
             </a:r>
           </a:p>
           <a:p>
             <a:pPr lvl="0"/>
             <a:r>
               <a:rPr/>
-              <a:t>About </a:t>
+              <a:t>Draw a </a:t>
             </a:r>
             <a:r>
               <a:rPr b="1"/>
-              <a:t>63.2%</a:t>
-            </a:r>
-            <a:r>
-              <a:rPr/>
-              <a:t> of the distinct rows are drawn at least once</a:t>
+              <a:t>bootstrap sample</a:t>
+            </a:r>
+            <a:r>
+              <a:rPr/>
+              <a:t>: m rows chosen </a:t>
+            </a:r>
+            <a:r>
+              <a:rPr b="1"/>
+              <a:t>with replacement</a:t>
+            </a:r>
+            <a:r>
+              <a:rPr/>
+              <a:t> from the m training rows</a:t>
             </a:r>
           </a:p>
           <a:p>
             <a:pPr lvl="0"/>
             <a:r>
               <a:rPr/>
-              <a:t>The remaining </a:t>
+              <a:t>Fit a tree to it. Repeat </a:t>
+            </a:r>
+            <a:r>
+              <a:rPr>
+                <a:latin typeface="Courier"/>
+              </a:rPr>
+              <a:t>n_estimators</a:t>
+            </a:r>
+            <a:r>
+              <a:rPr/>
+              <a:t> times; predict by </a:t>
             </a:r>
             <a:r>
               <a:rPr b="1"/>
-              <a:t>36.8%</a:t>
-            </a:r>
-            <a:r>
-              <a:rPr/>
-              <a:t> are left out entirely: called </a:t>
-            </a:r>
-            <a:r>
-              <a:rPr b="1"/>
-              <a:t>out-of-bag (OOB)</a:t>
+              <a:t>majority vote</a:t>
             </a:r>
           </a:p>
           <a:p>
             <a:pPr lvl="0"/>
             <a:r>
               <a:rPr/>
-              <a:t>At m = 1,200: a single simulated draw left out 36.6% of rows, close to the limit</a:t>
+              <a:t>The tree algorithm itself is unchanged, only what surrounds it is new</a:t>
             </a:r>
           </a:p>
         </p:txBody>
@@ -11553,7 +11830,7 @@
             </a:pPr>
             <a:r>
               <a:rPr/>
-              <a:t>Out-of-bag: free validation</a:t>
+              <a:t>How much data one bootstrap sample sees</a:t>
             </a:r>
           </a:p>
         </p:txBody>
@@ -11581,56 +11858,48 @@
             <a:pPr lvl="0"/>
             <a:r>
               <a:rPr/>
-              <a:t>Every out-of-bag row is validation data for the tree that missed it</a:t>
+              <a:t>Each bootstrap sample is drawn from the same m rows, with replacement</a:t>
             </a:r>
           </a:p>
           <a:p>
             <a:pPr lvl="0"/>
             <a:r>
               <a:rPr/>
-              <a:t>Averaging them gives the </a:t>
+              <a:t>About </a:t>
             </a:r>
             <a:r>
               <a:rPr b="1"/>
-              <a:t>OOB score</a:t>
-            </a:r>
-            <a:r>
-              <a:rPr/>
-              <a:t>, at no extra split</a:t>
+              <a:t>63.2%</a:t>
+            </a:r>
+            <a:r>
+              <a:rPr/>
+              <a:t> of the distinct rows are drawn at least once</a:t>
             </a:r>
           </a:p>
           <a:p>
             <a:pPr lvl="0"/>
             <a:r>
               <a:rPr/>
-              <a:t>A 300-tree forest: OOB </a:t>
+              <a:t>The remaining </a:t>
             </a:r>
             <a:r>
               <a:rPr b="1"/>
-              <a:t>0.9117</a:t>
-            </a:r>
-            <a:r>
-              <a:rPr/>
-              <a:t>, 5-fold cross-validated </a:t>
+              <a:t>36.8%</a:t>
+            </a:r>
+            <a:r>
+              <a:rPr/>
+              <a:t> are left out entirely: called </a:t>
             </a:r>
             <a:r>
               <a:rPr b="1"/>
-              <a:t>0.9117 ± 0.021</a:t>
+              <a:t>out-of-bag (OOB)</a:t>
             </a:r>
           </a:p>
           <a:p>
             <a:pPr lvl="0"/>
             <a:r>
               <a:rPr/>
-              <a:t>That match to four decimals is </a:t>
-            </a:r>
-            <a:r>
-              <a:rPr b="1"/>
-              <a:t>this seed’s luck</a:t>
-            </a:r>
-            <a:r>
-              <a:rPr/>
-              <a:t>: over twelve seeds the gap is 0.003: agreement to within their own noise, not to every decimal</a:t>
+              <a:t>At m = 1,200: a single simulated draw left out 36.6% of rows, close to the limit</a:t>
             </a:r>
           </a:p>
         </p:txBody>
@@ -11682,7 +11951,89 @@
             </a:pPr>
             <a:r>
               <a:rPr/>
-              <a:t>Why averaging reduces variance</a:t>
+              <a:t>One bootstrap sample, counted</a:t>
+            </a:r>
+          </a:p>
+        </p:txBody>
+      </p:sp>
+      <p:pic>
+        <p:nvPicPr>
+          <p:cNvPr descr="bootstrap_counts.png" id="0" name="Picture 1"/>
+          <p:cNvPicPr>
+            <a:picLocks noGrp="1" noChangeAspect="1"/>
+          </p:cNvPicPr>
+          <p:nvPr/>
+        </p:nvPicPr>
+        <p:blipFill>
+          <a:blip r:embed="rId3"/>
+          <a:stretch>
+            <a:fillRect/>
+          </a:stretch>
+        </p:blipFill>
+        <p:spPr bwMode="auto">
+          <a:xfrm>
+            <a:off x="1652292" y="1166099"/>
+            <a:ext cx="5839415" cy="3360181"/>
+          </a:xfrm>
+          <a:prstGeom prst="rect">
+            <a:avLst/>
+          </a:prstGeom>
+          <a:noFill/>
+          <a:ln w="9525">
+            <a:noFill/>
+            <a:headEnd/>
+            <a:tailEnd/>
+          </a:ln>
+        </p:spPr>
+      </p:pic>
+    </p:spTree>
+  </p:cSld>
+</p:sld>
+</file>
+
+<file path=ppt/slides/slide29.xml><?xml version="1.0" encoding="utf-8"?>
+<p:sld xmlns:a="http://schemas.openxmlformats.org/drawingml/2006/main" xmlns:r="http://schemas.openxmlformats.org/officeDocument/2006/relationships" xmlns:p="http://schemas.openxmlformats.org/presentationml/2006/main">
+  <p:cSld>
+    <p:spTree>
+      <p:nvGrpSpPr>
+        <p:cNvPr id="1" name=""/>
+        <p:cNvGrpSpPr/>
+        <p:nvPr/>
+      </p:nvGrpSpPr>
+      <p:grpSpPr>
+        <a:xfrm>
+          <a:off x="0" y="0"/>
+          <a:ext cx="0" cy="0"/>
+          <a:chOff x="0" y="0"/>
+          <a:chExt cx="0" cy="0"/>
+        </a:xfrm>
+      </p:grpSpPr>
+      <p:sp>
+        <p:nvSpPr>
+          <p:cNvPr id="2" name="Title 1"/>
+          <p:cNvSpPr>
+            <a:spLocks noGrp="1"/>
+          </p:cNvSpPr>
+          <p:nvPr>
+            <p:ph type="title"/>
+          </p:nvPr>
+        </p:nvSpPr>
+        <p:spPr>
+          <a:xfrm>
+            <a:off x="457200" y="205979"/>
+            <a:ext cx="8229600" cy="857250"/>
+          </a:xfrm>
+        </p:spPr>
+        <p:txBody>
+          <a:bodyPr/>
+          <a:lstStyle/>
+          <a:p>
+            <a:pPr lvl="0" indent="0" marL="0">
+              <a:buNone/>
+            </a:pPr>
+            <a:r>
+              <a:rPr/>
+              <a:t>Out-of-bag: free validation</a:t>
             </a:r>
           </a:p>
         </p:txBody>
@@ -11710,45 +12061,56 @@
             <a:pPr lvl="0"/>
             <a:r>
               <a:rPr/>
-              <a:t>Model each tree’s prediction as noisy, with variance σ², and let ρ be the correlation between any two trees</a:t>
+              <a:t>Every out-of-bag row is validation data for the tree that missed it</a:t>
             </a:r>
           </a:p>
           <a:p>
             <a:pPr lvl="0"/>
             <a:r>
               <a:rPr/>
-              <a:t>Averaging B trees drives variance toward a </a:t>
+              <a:t>Averaging them gives the </a:t>
             </a:r>
             <a:r>
               <a:rPr b="1"/>
-              <a:t>floor</a:t>
-            </a:r>
-            <a:r>
-              <a:rPr/>
-              <a:t> of ρσ², </a:t>
+              <a:t>OOB score</a:t>
+            </a:r>
+            <a:r>
+              <a:rPr/>
+              <a:t>, at no extra split</a:t>
+            </a:r>
+          </a:p>
+          <a:p>
+            <a:pPr lvl="0"/>
+            <a:r>
+              <a:rPr/>
+              <a:t>A 300-tree forest: OOB </a:t>
             </a:r>
             <a:r>
               <a:rPr b="1"/>
-              <a:t>not zero</a:t>
-            </a:r>
-            <a:r>
-              <a:rPr/>
-              <a:t>: adding trees past that point buys almost nothing</a:t>
+              <a:t>0.9117</a:t>
+            </a:r>
+            <a:r>
+              <a:rPr/>
+              <a:t>, 5-fold cross-validated </a:t>
+            </a:r>
+            <a:r>
+              <a:rPr b="1"/>
+              <a:t>0.9117 ± 0.021</a:t>
             </a:r>
           </a:p>
           <a:p>
             <a:pPr lvl="0"/>
             <a:r>
               <a:rPr/>
-              <a:t>Averaging </a:t>
+              <a:t>That match to four decimals is </a:t>
             </a:r>
             <a:r>
               <a:rPr b="1"/>
-              <a:t>cannot fix bias</a:t>
-            </a:r>
-            <a:r>
-              <a:rPr/>
-              <a:t>: unbiased-but-noisy trees average to unbiased; trees sharing a systematic error keep that error exactly</a:t>
+              <a:t>this seed’s luck</a:t>
+            </a:r>
+            <a:r>
+              <a:rPr/>
+              <a:t>: over twelve seeds the gap is 0.003: agreement to within their own noise, not to every decimal</a:t>
             </a:r>
           </a:p>
         </p:txBody>
@@ -11758,7 +12120,317 @@
 </p:sld>
 </file>
 
-<file path=ppt/slides/slide29.xml><?xml version="1.0" encoding="utf-8"?>
+<file path=ppt/slides/slide3.xml><?xml version="1.0" encoding="utf-8"?>
+<p:sld xmlns:a="http://schemas.openxmlformats.org/drawingml/2006/main" xmlns:r="http://schemas.openxmlformats.org/officeDocument/2006/relationships" xmlns:p="http://schemas.openxmlformats.org/presentationml/2006/main">
+  <p:cSld>
+    <p:spTree>
+      <p:nvGrpSpPr>
+        <p:cNvPr id="1" name=""/>
+        <p:cNvGrpSpPr/>
+        <p:nvPr/>
+      </p:nvGrpSpPr>
+      <p:grpSpPr>
+        <a:xfrm>
+          <a:off x="0" y="0"/>
+          <a:ext cx="0" cy="0"/>
+          <a:chOff x="0" y="0"/>
+          <a:chExt cx="0" cy="0"/>
+        </a:xfrm>
+      </p:grpSpPr>
+      <p:sp>
+        <p:nvSpPr>
+          <p:cNvPr id="2" name="Title 1"/>
+          <p:cNvSpPr>
+            <a:spLocks noGrp="1"/>
+          </p:cNvSpPr>
+          <p:nvPr>
+            <p:ph type="title"/>
+          </p:nvPr>
+        </p:nvSpPr>
+        <p:spPr>
+          <a:xfrm>
+            <a:off x="457200" y="205979"/>
+            <a:ext cx="8229600" cy="857250"/>
+          </a:xfrm>
+        </p:spPr>
+        <p:txBody>
+          <a:bodyPr/>
+          <a:lstStyle/>
+          <a:p>
+            <a:pPr lvl="0" indent="0" marL="0">
+              <a:buNone/>
+            </a:pPr>
+            <a:r>
+              <a:rPr/>
+              <a:t>Exercise 6, before we start</a:t>
+            </a:r>
+          </a:p>
+        </p:txBody>
+      </p:sp>
+      <p:sp>
+        <p:nvSpPr>
+          <p:cNvPr id="3" name="Content Placeholder 2"/>
+          <p:cNvSpPr>
+            <a:spLocks noGrp="1"/>
+          </p:cNvSpPr>
+          <p:nvPr>
+            <p:ph idx="1"/>
+          </p:nvPr>
+        </p:nvSpPr>
+        <p:spPr>
+          <a:xfrm>
+            <a:off x="457200" y="1200151"/>
+            <a:ext cx="8229600" cy="3394472"/>
+          </a:xfrm>
+        </p:spPr>
+        <p:txBody>
+          <a:bodyPr/>
+          <a:lstStyle/>
+          <a:p>
+            <a:pPr lvl="0"/>
+            <a:r>
+              <a:rPr/>
+              <a:t>What counts is the </a:t>
+            </a:r>
+            <a:r>
+              <a:rPr b="1"/>
+              <a:t>defence of which family</a:t>
+            </a:r>
+            <a:r>
+              <a:rPr/>
+              <a:t>, not the winning score</a:t>
+            </a:r>
+          </a:p>
+          <a:p>
+            <a:pPr lvl="0"/>
+            <a:r>
+              <a:rPr/>
+              <a:t>The gap to watch for: a strong accuracy number with no check of </a:t>
+            </a:r>
+            <a:r>
+              <a:rPr i="1"/>
+              <a:t>why</a:t>
+            </a:r>
+            <a:r>
+              <a:rPr/>
+              <a:t> the assumption behind it held</a:t>
+            </a:r>
+          </a:p>
+          <a:p>
+            <a:pPr lvl="0"/>
+            <a:r>
+              <a:rPr/>
+              <a:t>Today’s models come with the same obligation</a:t>
+            </a:r>
+          </a:p>
+        </p:txBody>
+      </p:sp>
+    </p:spTree>
+  </p:cSld>
+</p:sld>
+</file>
+
+<file path=ppt/slides/slide30.xml><?xml version="1.0" encoding="utf-8"?>
+<p:sld xmlns:a="http://schemas.openxmlformats.org/drawingml/2006/main" xmlns:r="http://schemas.openxmlformats.org/officeDocument/2006/relationships" xmlns:p="http://schemas.openxmlformats.org/presentationml/2006/main">
+  <p:cSld>
+    <p:spTree>
+      <p:nvGrpSpPr>
+        <p:cNvPr id="1" name=""/>
+        <p:cNvGrpSpPr/>
+        <p:nvPr/>
+      </p:nvGrpSpPr>
+      <p:grpSpPr>
+        <a:xfrm>
+          <a:off x="0" y="0"/>
+          <a:ext cx="0" cy="0"/>
+          <a:chOff x="0" y="0"/>
+          <a:chExt cx="0" cy="0"/>
+        </a:xfrm>
+      </p:grpSpPr>
+      <p:sp>
+        <p:nvSpPr>
+          <p:cNvPr id="2" name="Title 1"/>
+          <p:cNvSpPr>
+            <a:spLocks noGrp="1"/>
+          </p:cNvSpPr>
+          <p:nvPr>
+            <p:ph type="title"/>
+          </p:nvPr>
+        </p:nvSpPr>
+        <p:spPr>
+          <a:xfrm>
+            <a:off x="457200" y="205979"/>
+            <a:ext cx="8229600" cy="857250"/>
+          </a:xfrm>
+        </p:spPr>
+        <p:txBody>
+          <a:bodyPr/>
+          <a:lstStyle/>
+          <a:p>
+            <a:pPr lvl="0" indent="0" marL="0">
+              <a:buNone/>
+            </a:pPr>
+            <a:r>
+              <a:rPr/>
+              <a:t>Why averaging reduces variance</a:t>
+            </a:r>
+          </a:p>
+        </p:txBody>
+      </p:sp>
+      <p:sp>
+        <p:nvSpPr>
+          <p:cNvPr id="3" name="Content Placeholder 2"/>
+          <p:cNvSpPr>
+            <a:spLocks noGrp="1"/>
+          </p:cNvSpPr>
+          <p:nvPr>
+            <p:ph idx="1"/>
+          </p:nvPr>
+        </p:nvSpPr>
+        <p:spPr>
+          <a:xfrm>
+            <a:off x="457200" y="1200151"/>
+            <a:ext cx="8229600" cy="3394472"/>
+          </a:xfrm>
+        </p:spPr>
+        <p:txBody>
+          <a:bodyPr/>
+          <a:lstStyle/>
+          <a:p>
+            <a:pPr lvl="0"/>
+            <a:r>
+              <a:rPr/>
+              <a:t>Model each tree’s prediction as noisy, with variance σ², and let ρ be the correlation between any two trees</a:t>
+            </a:r>
+          </a:p>
+          <a:p>
+            <a:pPr lvl="0"/>
+            <a:r>
+              <a:rPr/>
+              <a:t>Averaging B trees drives variance toward a </a:t>
+            </a:r>
+            <a:r>
+              <a:rPr b="1"/>
+              <a:t>floor</a:t>
+            </a:r>
+            <a:r>
+              <a:rPr/>
+              <a:t> of ρσ², </a:t>
+            </a:r>
+            <a:r>
+              <a:rPr b="1"/>
+              <a:t>not zero</a:t>
+            </a:r>
+            <a:r>
+              <a:rPr/>
+              <a:t>: adding trees past that point buys almost nothing</a:t>
+            </a:r>
+          </a:p>
+          <a:p>
+            <a:pPr lvl="0"/>
+            <a:r>
+              <a:rPr/>
+              <a:t>Averaging </a:t>
+            </a:r>
+            <a:r>
+              <a:rPr b="1"/>
+              <a:t>cannot fix bias</a:t>
+            </a:r>
+            <a:r>
+              <a:rPr/>
+              <a:t>: unbiased-but-noisy trees average to unbiased; trees sharing a systematic error keep that error exactly</a:t>
+            </a:r>
+          </a:p>
+        </p:txBody>
+      </p:sp>
+    </p:spTree>
+  </p:cSld>
+</p:sld>
+</file>
+
+<file path=ppt/slides/slide31.xml><?xml version="1.0" encoding="utf-8"?>
+<p:sld xmlns:a="http://schemas.openxmlformats.org/drawingml/2006/main" xmlns:r="http://schemas.openxmlformats.org/officeDocument/2006/relationships" xmlns:p="http://schemas.openxmlformats.org/presentationml/2006/main">
+  <p:cSld>
+    <p:spTree>
+      <p:nvGrpSpPr>
+        <p:cNvPr id="1" name=""/>
+        <p:cNvGrpSpPr/>
+        <p:nvPr/>
+      </p:nvGrpSpPr>
+      <p:grpSpPr>
+        <a:xfrm>
+          <a:off x="0" y="0"/>
+          <a:ext cx="0" cy="0"/>
+          <a:chOff x="0" y="0"/>
+          <a:chExt cx="0" cy="0"/>
+        </a:xfrm>
+      </p:grpSpPr>
+      <p:sp>
+        <p:nvSpPr>
+          <p:cNvPr id="2" name="Title 1"/>
+          <p:cNvSpPr>
+            <a:spLocks noGrp="1"/>
+          </p:cNvSpPr>
+          <p:nvPr>
+            <p:ph type="title"/>
+          </p:nvPr>
+        </p:nvSpPr>
+        <p:spPr>
+          <a:xfrm>
+            <a:off x="457200" y="205979"/>
+            <a:ext cx="8229600" cy="857250"/>
+          </a:xfrm>
+        </p:spPr>
+        <p:txBody>
+          <a:bodyPr/>
+          <a:lstStyle/>
+          <a:p>
+            <a:pPr lvl="0" indent="0" marL="0">
+              <a:buNone/>
+            </a:pPr>
+            <a:r>
+              <a:rPr/>
+              <a:t>Averaging stops at a floor</a:t>
+            </a:r>
+          </a:p>
+        </p:txBody>
+      </p:sp>
+      <p:pic>
+        <p:nvPicPr>
+          <p:cNvPr descr="variance_floor.png" id="0" name="Picture 1"/>
+          <p:cNvPicPr>
+            <a:picLocks noGrp="1" noChangeAspect="1"/>
+          </p:cNvPicPr>
+          <p:nvPr/>
+        </p:nvPicPr>
+        <p:blipFill>
+          <a:blip r:embed="rId3"/>
+          <a:stretch>
+            <a:fillRect/>
+          </a:stretch>
+        </p:blipFill>
+        <p:spPr bwMode="auto">
+          <a:xfrm>
+            <a:off x="1708924" y="1166099"/>
+            <a:ext cx="5726151" cy="3360181"/>
+          </a:xfrm>
+          <a:prstGeom prst="rect">
+            <a:avLst/>
+          </a:prstGeom>
+          <a:noFill/>
+          <a:ln w="9525">
+            <a:noFill/>
+            <a:headEnd/>
+            <a:tailEnd/>
+          </a:ln>
+        </p:spPr>
+      </p:pic>
+    </p:spTree>
+  </p:cSld>
+</p:sld>
+</file>
+
+<file path=ppt/slides/slide32.xml><?xml version="1.0" encoding="utf-8"?>
 <p:sld xmlns:a="http://schemas.openxmlformats.org/drawingml/2006/main" xmlns:r="http://schemas.openxmlformats.org/officeDocument/2006/relationships" xmlns:p="http://schemas.openxmlformats.org/presentationml/2006/main">
   <p:cSld>
     <p:spTree>
@@ -11983,7 +12655,7 @@
 </p:sld>
 </file>
 
-<file path=ppt/slides/slide3.xml><?xml version="1.0" encoding="utf-8"?>
+<file path=ppt/slides/slide33.xml><?xml version="1.0" encoding="utf-8"?>
 <p:sld xmlns:a="http://schemas.openxmlformats.org/drawingml/2006/main" xmlns:r="http://schemas.openxmlformats.org/officeDocument/2006/relationships" xmlns:p="http://schemas.openxmlformats.org/presentationml/2006/main">
   <p:cSld>
     <p:spTree>
@@ -12025,7 +12697,7 @@
             </a:pPr>
             <a:r>
               <a:rPr/>
-              <a:t>Exercise 6, before we start</a:t>
+              <a:t>Random forests: decorrelating the trees</a:t>
             </a:r>
           </a:p>
         </p:txBody>
@@ -12053,37 +12725,51 @@
             <a:pPr lvl="0"/>
             <a:r>
               <a:rPr/>
-              <a:t>What counts is the </a:t>
+              <a:t>The variance floor is ρσ²: lowering it further means making the trees agree </a:t>
             </a:r>
             <a:r>
               <a:rPr b="1"/>
-              <a:t>defence of which family</a:t>
-            </a:r>
-            <a:r>
-              <a:rPr/>
-              <a:t>, not the winning score</a:t>
+              <a:t>less</a:t>
             </a:r>
           </a:p>
           <a:p>
             <a:pPr lvl="0"/>
             <a:r>
               <a:rPr/>
-              <a:t>The gap to watch for: a strong accuracy number with no check of </a:t>
-            </a:r>
-            <a:r>
-              <a:rPr i="1"/>
-              <a:t>why</a:t>
-            </a:r>
-            <a:r>
-              <a:rPr/>
-              <a:t> the assumption behind it held</a:t>
+              <a:t>Bagged trees still see </a:t>
+            </a:r>
+            <a:r>
+              <a:rPr b="1"/>
+              <a:t>every feature</a:t>
+            </a:r>
+            <a:r>
+              <a:rPr/>
+              <a:t> at every split, so a strong feature pulls most of them towards splitting on it first</a:t>
             </a:r>
           </a:p>
           <a:p>
             <a:pPr lvl="0"/>
             <a:r>
               <a:rPr/>
-              <a:t>Today’s models come with the same obligation</a:t>
+              <a:t>A </a:t>
+            </a:r>
+            <a:r>
+              <a:rPr b="1"/>
+              <a:t>random forest</a:t>
+            </a:r>
+            <a:r>
+              <a:rPr/>
+              <a:t> restricts each split to a random subset of </a:t>
+            </a:r>
+            <a:r>
+              <a:rPr>
+                <a:latin typeface="Courier"/>
+              </a:rPr>
+              <a:t>max_features</a:t>
+            </a:r>
+            <a:r>
+              <a:rPr/>
+              <a:t> (default √n, rounded down): different trees see different features at the same point, lowering ρ</a:t>
             </a:r>
           </a:p>
         </p:txBody>
@@ -12093,131 +12779,7 @@
 </p:sld>
 </file>
 
-<file path=ppt/slides/slide30.xml><?xml version="1.0" encoding="utf-8"?>
-<p:sld xmlns:a="http://schemas.openxmlformats.org/drawingml/2006/main" xmlns:r="http://schemas.openxmlformats.org/officeDocument/2006/relationships" xmlns:p="http://schemas.openxmlformats.org/presentationml/2006/main">
-  <p:cSld>
-    <p:spTree>
-      <p:nvGrpSpPr>
-        <p:cNvPr id="1" name=""/>
-        <p:cNvGrpSpPr/>
-        <p:nvPr/>
-      </p:nvGrpSpPr>
-      <p:grpSpPr>
-        <a:xfrm>
-          <a:off x="0" y="0"/>
-          <a:ext cx="0" cy="0"/>
-          <a:chOff x="0" y="0"/>
-          <a:chExt cx="0" cy="0"/>
-        </a:xfrm>
-      </p:grpSpPr>
-      <p:sp>
-        <p:nvSpPr>
-          <p:cNvPr id="2" name="Title 1"/>
-          <p:cNvSpPr>
-            <a:spLocks noGrp="1"/>
-          </p:cNvSpPr>
-          <p:nvPr>
-            <p:ph type="title"/>
-          </p:nvPr>
-        </p:nvSpPr>
-        <p:spPr>
-          <a:xfrm>
-            <a:off x="457200" y="205979"/>
-            <a:ext cx="8229600" cy="857250"/>
-          </a:xfrm>
-        </p:spPr>
-        <p:txBody>
-          <a:bodyPr/>
-          <a:lstStyle/>
-          <a:p>
-            <a:pPr lvl="0" indent="0" marL="0">
-              <a:buNone/>
-            </a:pPr>
-            <a:r>
-              <a:rPr/>
-              <a:t>Random forests: decorrelating the trees</a:t>
-            </a:r>
-          </a:p>
-        </p:txBody>
-      </p:sp>
-      <p:sp>
-        <p:nvSpPr>
-          <p:cNvPr id="3" name="Content Placeholder 2"/>
-          <p:cNvSpPr>
-            <a:spLocks noGrp="1"/>
-          </p:cNvSpPr>
-          <p:nvPr>
-            <p:ph idx="1"/>
-          </p:nvPr>
-        </p:nvSpPr>
-        <p:spPr>
-          <a:xfrm>
-            <a:off x="457200" y="1200151"/>
-            <a:ext cx="8229600" cy="3394472"/>
-          </a:xfrm>
-        </p:spPr>
-        <p:txBody>
-          <a:bodyPr/>
-          <a:lstStyle/>
-          <a:p>
-            <a:pPr lvl="0"/>
-            <a:r>
-              <a:rPr/>
-              <a:t>The variance floor is ρσ²: lowering it further means making the trees agree </a:t>
-            </a:r>
-            <a:r>
-              <a:rPr b="1"/>
-              <a:t>less</a:t>
-            </a:r>
-          </a:p>
-          <a:p>
-            <a:pPr lvl="0"/>
-            <a:r>
-              <a:rPr/>
-              <a:t>Bagged trees still see </a:t>
-            </a:r>
-            <a:r>
-              <a:rPr b="1"/>
-              <a:t>every feature</a:t>
-            </a:r>
-            <a:r>
-              <a:rPr/>
-              <a:t> at every split, so a strong feature pulls most of them towards splitting on it first</a:t>
-            </a:r>
-          </a:p>
-          <a:p>
-            <a:pPr lvl="0"/>
-            <a:r>
-              <a:rPr/>
-              <a:t>A </a:t>
-            </a:r>
-            <a:r>
-              <a:rPr b="1"/>
-              <a:t>random forest</a:t>
-            </a:r>
-            <a:r>
-              <a:rPr/>
-              <a:t> restricts each split to a random subset of </a:t>
-            </a:r>
-            <a:r>
-              <a:rPr>
-                <a:latin typeface="Courier"/>
-              </a:rPr>
-              <a:t>max_features</a:t>
-            </a:r>
-            <a:r>
-              <a:rPr/>
-              <a:t> (default √n, rounded down): different trees see different features at the same point, lowering ρ</a:t>
-            </a:r>
-          </a:p>
-        </p:txBody>
-      </p:sp>
-    </p:spTree>
-  </p:cSld>
-</p:sld>
-</file>
-
-<file path=ppt/slides/slide31.xml><?xml version="1.0" encoding="utf-8"?>
+<file path=ppt/slides/slide34.xml><?xml version="1.0" encoding="utf-8"?>
 <p:sld xmlns:a="http://schemas.openxmlformats.org/drawingml/2006/main" xmlns:r="http://schemas.openxmlformats.org/officeDocument/2006/relationships" xmlns:p="http://schemas.openxmlformats.org/presentationml/2006/main">
   <p:cSld>
     <p:spTree>
@@ -12489,7 +13051,7 @@
 </p:sld>
 </file>
 
-<file path=ppt/slides/slide32.xml><?xml version="1.0" encoding="utf-8"?>
+<file path=ppt/slides/slide35.xml><?xml version="1.0" encoding="utf-8"?>
 <p:sld xmlns:a="http://schemas.openxmlformats.org/drawingml/2006/main" xmlns:r="http://schemas.openxmlformats.org/officeDocument/2006/relationships" xmlns:p="http://schemas.openxmlformats.org/presentationml/2006/main">
   <p:cSld>
     <p:spTree>
@@ -12599,7 +13161,7 @@
 </p:sld>
 </file>
 
-<file path=ppt/slides/slide33.xml><?xml version="1.0" encoding="utf-8"?>
+<file path=ppt/slides/slide36.xml><?xml version="1.0" encoding="utf-8"?>
 <p:sld xmlns:a="http://schemas.openxmlformats.org/drawingml/2006/main" xmlns:r="http://schemas.openxmlformats.org/officeDocument/2006/relationships" xmlns:p="http://schemas.openxmlformats.org/presentationml/2006/main">
   <p:cSld>
     <p:spTree>
@@ -12933,7 +13495,7 @@
 </p:sld>
 </file>
 
-<file path=ppt/slides/slide34.xml><?xml version="1.0" encoding="utf-8"?>
+<file path=ppt/slides/slide37.xml><?xml version="1.0" encoding="utf-8"?>
 <p:sld xmlns:a="http://schemas.openxmlformats.org/drawingml/2006/main" xmlns:r="http://schemas.openxmlformats.org/officeDocument/2006/relationships" xmlns:p="http://schemas.openxmlformats.org/presentationml/2006/main">
   <p:cSld>
     <p:spTree>
@@ -13027,7 +13589,7 @@
 </p:sld>
 </file>
 
-<file path=ppt/slides/slide35.xml><?xml version="1.0" encoding="utf-8"?>
+<file path=ppt/slides/slide38.xml><?xml version="1.0" encoding="utf-8"?>
 <p:sld xmlns:a="http://schemas.openxmlformats.org/drawingml/2006/main" xmlns:r="http://schemas.openxmlformats.org/officeDocument/2006/relationships" xmlns:p="http://schemas.openxmlformats.org/presentationml/2006/main">
   <p:cSld>
     <p:spTree>
@@ -13160,7 +13722,7 @@
 </p:sld>
 </file>
 
-<file path=ppt/slides/slide36.xml><?xml version="1.0" encoding="utf-8"?>
+<file path=ppt/slides/slide39.xml><?xml version="1.0" encoding="utf-8"?>
 <p:sld xmlns:a="http://schemas.openxmlformats.org/drawingml/2006/main" xmlns:r="http://schemas.openxmlformats.org/officeDocument/2006/relationships" xmlns:p="http://schemas.openxmlformats.org/presentationml/2006/main">
   <p:cSld>
     <p:spTree>
@@ -13242,7 +13804,7 @@
 </p:sld>
 </file>
 
-<file path=ppt/slides/slide37.xml><?xml version="1.0" encoding="utf-8"?>
+<file path=ppt/slides/slide4.xml><?xml version="1.0" encoding="utf-8"?>
 <p:sld xmlns:a="http://schemas.openxmlformats.org/drawingml/2006/main" xmlns:r="http://schemas.openxmlformats.org/officeDocument/2006/relationships" xmlns:p="http://schemas.openxmlformats.org/presentationml/2006/main">
   <p:cSld>
     <p:spTree>
@@ -13284,7 +13846,7 @@
             </a:pPr>
             <a:r>
               <a:rPr/>
-              <a:t>What each tree is fit to</a:t>
+              <a:t>1,200 loan applicants, two figures each</a:t>
             </a:r>
           </a:p>
         </p:txBody>
@@ -13312,37 +13874,45 @@
             <a:pPr lvl="0"/>
             <a:r>
               <a:rPr/>
-              <a:t>For squared-error regression, “what remains unexplained” has an exact name: the </a:t>
+              <a:t>Income in thousands of euros a year, debt-to-income ratio</a:t>
+            </a:r>
+          </a:p>
+          <a:p>
+            <a:pPr lvl="0"/>
+            <a:r>
+              <a:rPr/>
+              <a:t>Underwriting is a </a:t>
             </a:r>
             <a:r>
               <a:rPr b="1"/>
-              <a:t>residual</a:t>
-            </a:r>
-            <a:r>
-              <a:rPr/>
-              <a:t>, y - Fₜ₋₁(x)</a:t>
+              <a:t>checklist</a:t>
+            </a:r>
+            <a:r>
+              <a:rPr/>
+              <a:t>, not a formula: an income floor, a debt ceiling, and two “stressed” combinations in between</a:t>
             </a:r>
           </a:p>
           <a:p>
             <a:pPr lvl="0"/>
             <a:r>
-              <a:rPr/>
-              <a:t>This is a special case of a more general idea: </a:t>
-            </a:r>
-            <a:r>
               <a:rPr b="1"/>
-              <a:t>functional gradient descent</a:t>
-            </a:r>
-            <a:r>
-              <a:rPr/>
-              <a:t>: hₜ approximates the negative gradient of the loss with respect to Fₜ₋₁</a:t>
-            </a:r>
-          </a:p>
-          <a:p>
-            <a:pPr lvl="0"/>
-            <a:r>
-              <a:rPr/>
-              <a:t>For squared error, “fit the residual” and “fit the negative gradient” coincide exactly</a:t>
+              <a:t>7%</a:t>
+            </a:r>
+            <a:r>
+              <a:rPr/>
+              <a:t> of labels are deliberately flipped; </a:t>
+            </a:r>
+            <a:r>
+              <a:rPr b="1"/>
+              <a:t>38.7%</a:t>
+            </a:r>
+            <a:r>
+              <a:rPr/>
+              <a:t> of applicants defaulted, so the majority baseline is </a:t>
+            </a:r>
+            <a:r>
+              <a:rPr b="1"/>
+              <a:t>0.613</a:t>
             </a:r>
           </a:p>
         </p:txBody>
@@ -13352,7 +13922,117 @@
 </p:sld>
 </file>
 
-<file path=ppt/slides/slide38.xml><?xml version="1.0" encoding="utf-8"?>
+<file path=ppt/slides/slide40.xml><?xml version="1.0" encoding="utf-8"?>
+<p:sld xmlns:a="http://schemas.openxmlformats.org/drawingml/2006/main" xmlns:r="http://schemas.openxmlformats.org/officeDocument/2006/relationships" xmlns:p="http://schemas.openxmlformats.org/presentationml/2006/main">
+  <p:cSld>
+    <p:spTree>
+      <p:nvGrpSpPr>
+        <p:cNvPr id="1" name=""/>
+        <p:cNvGrpSpPr/>
+        <p:nvPr/>
+      </p:nvGrpSpPr>
+      <p:grpSpPr>
+        <a:xfrm>
+          <a:off x="0" y="0"/>
+          <a:ext cx="0" cy="0"/>
+          <a:chOff x="0" y="0"/>
+          <a:chExt cx="0" cy="0"/>
+        </a:xfrm>
+      </p:grpSpPr>
+      <p:sp>
+        <p:nvSpPr>
+          <p:cNvPr id="2" name="Title 1"/>
+          <p:cNvSpPr>
+            <a:spLocks noGrp="1"/>
+          </p:cNvSpPr>
+          <p:nvPr>
+            <p:ph type="title"/>
+          </p:nvPr>
+        </p:nvSpPr>
+        <p:spPr>
+          <a:xfrm>
+            <a:off x="457200" y="205979"/>
+            <a:ext cx="8229600" cy="857250"/>
+          </a:xfrm>
+        </p:spPr>
+        <p:txBody>
+          <a:bodyPr/>
+          <a:lstStyle/>
+          <a:p>
+            <a:pPr lvl="0" indent="0" marL="0">
+              <a:buNone/>
+            </a:pPr>
+            <a:r>
+              <a:rPr/>
+              <a:t>What each tree is fit to</a:t>
+            </a:r>
+          </a:p>
+        </p:txBody>
+      </p:sp>
+      <p:sp>
+        <p:nvSpPr>
+          <p:cNvPr id="3" name="Content Placeholder 2"/>
+          <p:cNvSpPr>
+            <a:spLocks noGrp="1"/>
+          </p:cNvSpPr>
+          <p:nvPr>
+            <p:ph idx="1"/>
+          </p:nvPr>
+        </p:nvSpPr>
+        <p:spPr>
+          <a:xfrm>
+            <a:off x="457200" y="1200151"/>
+            <a:ext cx="8229600" cy="3394472"/>
+          </a:xfrm>
+        </p:spPr>
+        <p:txBody>
+          <a:bodyPr/>
+          <a:lstStyle/>
+          <a:p>
+            <a:pPr lvl="0"/>
+            <a:r>
+              <a:rPr/>
+              <a:t>For squared-error regression, “what remains unexplained” has an exact name: the </a:t>
+            </a:r>
+            <a:r>
+              <a:rPr b="1"/>
+              <a:t>residual</a:t>
+            </a:r>
+            <a:r>
+              <a:rPr/>
+              <a:t>, y - Fₜ₋₁(x)</a:t>
+            </a:r>
+          </a:p>
+          <a:p>
+            <a:pPr lvl="0"/>
+            <a:r>
+              <a:rPr/>
+              <a:t>This is a special case of a more general idea: </a:t>
+            </a:r>
+            <a:r>
+              <a:rPr b="1"/>
+              <a:t>functional gradient descent</a:t>
+            </a:r>
+            <a:r>
+              <a:rPr/>
+              <a:t>: hₜ approximates the negative gradient of the loss with respect to Fₜ₋₁</a:t>
+            </a:r>
+          </a:p>
+          <a:p>
+            <a:pPr lvl="0"/>
+            <a:r>
+              <a:rPr/>
+              <a:t>For squared error, “fit the residual” and “fit the negative gradient” coincide exactly</a:t>
+            </a:r>
+          </a:p>
+        </p:txBody>
+      </p:sp>
+    </p:spTree>
+  </p:cSld>
+</p:sld>
+</file>
+
+<file path=ppt/slides/slide41.xml><?xml version="1.0" encoding="utf-8"?>
 <p:sld xmlns:a="http://schemas.openxmlformats.org/drawingml/2006/main" xmlns:r="http://schemas.openxmlformats.org/officeDocument/2006/relationships" xmlns:p="http://schemas.openxmlformats.org/presentationml/2006/main">
   <p:cSld>
     <p:spTree>
@@ -13434,7 +14114,7 @@
 </p:sld>
 </file>
 
-<file path=ppt/slides/slide39.xml><?xml version="1.0" encoding="utf-8"?>
+<file path=ppt/slides/slide42.xml><?xml version="1.0" encoding="utf-8"?>
 <p:sld xmlns:a="http://schemas.openxmlformats.org/drawingml/2006/main" xmlns:r="http://schemas.openxmlformats.org/officeDocument/2006/relationships" xmlns:p="http://schemas.openxmlformats.org/presentationml/2006/main">
   <p:cSld>
     <p:spTree>
@@ -13559,7 +14239,7 @@
 </p:sld>
 </file>
 
-<file path=ppt/slides/slide4.xml><?xml version="1.0" encoding="utf-8"?>
+<file path=ppt/slides/slide43.xml><?xml version="1.0" encoding="utf-8"?>
 <p:sld xmlns:a="http://schemas.openxmlformats.org/drawingml/2006/main" xmlns:r="http://schemas.openxmlformats.org/officeDocument/2006/relationships" xmlns:p="http://schemas.openxmlformats.org/presentationml/2006/main">
   <p:cSld>
     <p:spTree>
@@ -13601,7 +14281,7 @@
             </a:pPr>
             <a:r>
               <a:rPr/>
-              <a:t>1,200 loan applicants, two figures each</a:t>
+              <a:t>Classification: the same idea, a different gradient</a:t>
             </a:r>
           </a:p>
         </p:txBody>
@@ -13629,45 +14309,44 @@
             <a:pPr lvl="0"/>
             <a:r>
               <a:rPr/>
-              <a:t>Income in thousands of euros a year, debt-to-income ratio</a:t>
+              <a:t>The label y is 0 or 1; the ensemble’s output becomes a probability, p = σ(F)</a:t>
             </a:r>
           </a:p>
           <a:p>
             <a:pPr lvl="0"/>
             <a:r>
               <a:rPr/>
-              <a:t>Underwriting is a </a:t>
+              <a:t>The loss is </a:t>
             </a:r>
             <a:r>
               <a:rPr b="1"/>
-              <a:t>checklist</a:t>
-            </a:r>
-            <a:r>
-              <a:rPr/>
-              <a:t>, not a formula: an income floor, a debt ceiling, and two “stressed” combinations in between</a:t>
+              <a:t>log-loss</a:t>
+            </a:r>
+            <a:r>
+              <a:rPr/>
+              <a:t>: lesson 4’s loss for logistic regression</a:t>
             </a:r>
           </a:p>
           <a:p>
             <a:pPr lvl="0"/>
             <a:r>
+              <a:rPr/>
+              <a:t>The negative gradient, the </a:t>
+            </a:r>
+            <a:r>
               <a:rPr b="1"/>
-              <a:t>7%</a:t>
-            </a:r>
-            <a:r>
-              <a:rPr/>
-              <a:t> of labels are deliberately flipped; </a:t>
-            </a:r>
-            <a:r>
-              <a:rPr b="1"/>
-              <a:t>38.7%</a:t>
-            </a:r>
-            <a:r>
-              <a:rPr/>
-              <a:t> of applicants defaulted, so the majority baseline is </a:t>
-            </a:r>
-            <a:r>
-              <a:rPr b="1"/>
-              <a:t>0.613</a:t>
+              <a:t>pseudo-residual</a:t>
+            </a:r>
+            <a:r>
+              <a:rPr/>
+              <a:t> each tree fits, is y - p</a:t>
+            </a:r>
+          </a:p>
+          <a:p>
+            <a:pPr lvl="0"/>
+            <a:r>
+              <a:rPr/>
+              <a:t>True label minus predicted probability: lesson 4’s error term exactly</a:t>
             </a:r>
           </a:p>
         </p:txBody>
@@ -13677,7 +14356,7 @@
 </p:sld>
 </file>
 
-<file path=ppt/slides/slide40.xml><?xml version="1.0" encoding="utf-8"?>
+<file path=ppt/slides/slide44.xml><?xml version="1.0" encoding="utf-8"?>
 <p:sld xmlns:a="http://schemas.openxmlformats.org/drawingml/2006/main" xmlns:r="http://schemas.openxmlformats.org/officeDocument/2006/relationships" xmlns:p="http://schemas.openxmlformats.org/presentationml/2006/main">
   <p:cSld>
     <p:spTree>
@@ -13719,7 +14398,7 @@
             </a:pPr>
             <a:r>
               <a:rPr/>
-              <a:t>Classification: the same idea, a different gradient</a:t>
+              <a:t>On the loan data</a:t>
             </a:r>
           </a:p>
         </p:txBody>
@@ -13746,45 +14425,44 @@
           <a:p>
             <a:pPr lvl="0"/>
             <a:r>
-              <a:rPr/>
-              <a:t>The label y is 0 or 1; the ensemble’s output becomes a probability, p = σ(F)</a:t>
+              <a:rPr>
+                <a:latin typeface="Courier"/>
+              </a:rPr>
+              <a:t>GradientBoostingClassifier</a:t>
+            </a:r>
+            <a:r>
+              <a:rPr/>
+              <a:t>, defaults: </a:t>
+            </a:r>
+            <a:r>
+              <a:rPr b="1"/>
+              <a:t>100 trees</a:t>
+            </a:r>
+            <a:r>
+              <a:rPr/>
+              <a:t>, learning rate α = 0.1</a:t>
             </a:r>
           </a:p>
           <a:p>
             <a:pPr lvl="0"/>
             <a:r>
               <a:rPr/>
-              <a:t>The loss is </a:t>
+              <a:t>Reaches </a:t>
             </a:r>
             <a:r>
               <a:rPr b="1"/>
-              <a:t>log-loss</a:t>
-            </a:r>
-            <a:r>
-              <a:rPr/>
-              <a:t>: lesson 4’s loss for logistic regression</a:t>
+              <a:t>0.902 ± 0.020</a:t>
+            </a:r>
+            <a:r>
+              <a:rPr/>
+              <a:t> cross-validated accuracy</a:t>
             </a:r>
           </a:p>
           <a:p>
             <a:pPr lvl="0"/>
             <a:r>
               <a:rPr/>
-              <a:t>The negative gradient, the </a:t>
-            </a:r>
-            <a:r>
-              <a:rPr b="1"/>
-              <a:t>pseudo-residual</a:t>
-            </a:r>
-            <a:r>
-              <a:rPr/>
-              <a:t> each tree fits, is y - p</a:t>
-            </a:r>
-          </a:p>
-          <a:p>
-            <a:pPr lvl="0"/>
-            <a:r>
-              <a:rPr/>
-              <a:t>True label minus predicted probability: lesson 4’s error term exactly</a:t>
+              <a:t>Already ahead of any single tree from earlier in the lesson</a:t>
             </a:r>
           </a:p>
         </p:txBody>
@@ -13794,123 +14472,7 @@
 </p:sld>
 </file>
 
-<file path=ppt/slides/slide41.xml><?xml version="1.0" encoding="utf-8"?>
-<p:sld xmlns:a="http://schemas.openxmlformats.org/drawingml/2006/main" xmlns:r="http://schemas.openxmlformats.org/officeDocument/2006/relationships" xmlns:p="http://schemas.openxmlformats.org/presentationml/2006/main">
-  <p:cSld>
-    <p:spTree>
-      <p:nvGrpSpPr>
-        <p:cNvPr id="1" name=""/>
-        <p:cNvGrpSpPr/>
-        <p:nvPr/>
-      </p:nvGrpSpPr>
-      <p:grpSpPr>
-        <a:xfrm>
-          <a:off x="0" y="0"/>
-          <a:ext cx="0" cy="0"/>
-          <a:chOff x="0" y="0"/>
-          <a:chExt cx="0" cy="0"/>
-        </a:xfrm>
-      </p:grpSpPr>
-      <p:sp>
-        <p:nvSpPr>
-          <p:cNvPr id="2" name="Title 1"/>
-          <p:cNvSpPr>
-            <a:spLocks noGrp="1"/>
-          </p:cNvSpPr>
-          <p:nvPr>
-            <p:ph type="title"/>
-          </p:nvPr>
-        </p:nvSpPr>
-        <p:spPr>
-          <a:xfrm>
-            <a:off x="457200" y="205979"/>
-            <a:ext cx="8229600" cy="857250"/>
-          </a:xfrm>
-        </p:spPr>
-        <p:txBody>
-          <a:bodyPr/>
-          <a:lstStyle/>
-          <a:p>
-            <a:pPr lvl="0" indent="0" marL="0">
-              <a:buNone/>
-            </a:pPr>
-            <a:r>
-              <a:rPr/>
-              <a:t>On the loan data</a:t>
-            </a:r>
-          </a:p>
-        </p:txBody>
-      </p:sp>
-      <p:sp>
-        <p:nvSpPr>
-          <p:cNvPr id="3" name="Content Placeholder 2"/>
-          <p:cNvSpPr>
-            <a:spLocks noGrp="1"/>
-          </p:cNvSpPr>
-          <p:nvPr>
-            <p:ph idx="1"/>
-          </p:nvPr>
-        </p:nvSpPr>
-        <p:spPr>
-          <a:xfrm>
-            <a:off x="457200" y="1200151"/>
-            <a:ext cx="8229600" cy="3394472"/>
-          </a:xfrm>
-        </p:spPr>
-        <p:txBody>
-          <a:bodyPr/>
-          <a:lstStyle/>
-          <a:p>
-            <a:pPr lvl="0"/>
-            <a:r>
-              <a:rPr>
-                <a:latin typeface="Courier"/>
-              </a:rPr>
-              <a:t>GradientBoostingClassifier</a:t>
-            </a:r>
-            <a:r>
-              <a:rPr/>
-              <a:t>, defaults: </a:t>
-            </a:r>
-            <a:r>
-              <a:rPr b="1"/>
-              <a:t>100 trees</a:t>
-            </a:r>
-            <a:r>
-              <a:rPr/>
-              <a:t>, learning rate α = 0.1</a:t>
-            </a:r>
-          </a:p>
-          <a:p>
-            <a:pPr lvl="0"/>
-            <a:r>
-              <a:rPr/>
-              <a:t>Reaches </a:t>
-            </a:r>
-            <a:r>
-              <a:rPr b="1"/>
-              <a:t>0.902 ± 0.020</a:t>
-            </a:r>
-            <a:r>
-              <a:rPr/>
-              <a:t> cross-validated accuracy</a:t>
-            </a:r>
-          </a:p>
-          <a:p>
-            <a:pPr lvl="0"/>
-            <a:r>
-              <a:rPr/>
-              <a:t>Already ahead of any single tree from earlier in the lesson</a:t>
-            </a:r>
-          </a:p>
-        </p:txBody>
-      </p:sp>
-    </p:spTree>
-  </p:cSld>
-</p:sld>
-</file>
-
-<file path=ppt/slides/slide42.xml><?xml version="1.0" encoding="utf-8"?>
+<file path=ppt/slides/slide45.xml><?xml version="1.0" encoding="utf-8"?>
 <p:sld xmlns:a="http://schemas.openxmlformats.org/drawingml/2006/main" xmlns:r="http://schemas.openxmlformats.org/officeDocument/2006/relationships" xmlns:p="http://schemas.openxmlformats.org/presentationml/2006/main">
   <p:cSld>
     <p:spTree>
@@ -14220,7 +14782,7 @@
                       </a:pPr>
                       <a:r>
                         <a:rPr b="1"/>
-                        <a:t>0.898 ± 0.020</a:t>
+                        <a:t>0.897 ± 0.020</a:t>
                       </a:r>
                     </a:p>
                   </a:txBody>
@@ -14376,7 +14938,7 @@
 </p:sld>
 </file>
 
-<file path=ppt/slides/slide43.xml><?xml version="1.0" encoding="utf-8"?>
+<file path=ppt/slides/slide46.xml><?xml version="1.0" encoding="utf-8"?>
 <p:sld xmlns:a="http://schemas.openxmlformats.org/drawingml/2006/main" xmlns:r="http://schemas.openxmlformats.org/officeDocument/2006/relationships" xmlns:p="http://schemas.openxmlformats.org/presentationml/2006/main">
   <p:cSld>
     <p:spTree>
@@ -14458,7 +15020,7 @@
 </p:sld>
 </file>
 
-<file path=ppt/slides/slide44.xml><?xml version="1.0" encoding="utf-8"?>
+<file path=ppt/slides/slide47.xml><?xml version="1.0" encoding="utf-8"?>
 <p:sld xmlns:a="http://schemas.openxmlformats.org/drawingml/2006/main" xmlns:r="http://schemas.openxmlformats.org/officeDocument/2006/relationships" xmlns:p="http://schemas.openxmlformats.org/presentationml/2006/main">
   <p:cSld>
     <p:spTree>
@@ -14824,7 +15386,7 @@
 </p:sld>
 </file>
 
-<file path=ppt/slides/slide45.xml><?xml version="1.0" encoding="utf-8"?>
+<file path=ppt/slides/slide48.xml><?xml version="1.0" encoding="utf-8"?>
 <p:sld xmlns:a="http://schemas.openxmlformats.org/drawingml/2006/main" xmlns:r="http://schemas.openxmlformats.org/officeDocument/2006/relationships" xmlns:p="http://schemas.openxmlformats.org/presentationml/2006/main">
   <p:cSld>
     <p:spTree>
@@ -14911,7 +15473,7 @@
 </p:sld>
 </file>
 
-<file path=ppt/slides/slide46.xml><?xml version="1.0" encoding="utf-8"?>
+<file path=ppt/slides/slide49.xml><?xml version="1.0" encoding="utf-8"?>
 <p:sld xmlns:a="http://schemas.openxmlformats.org/drawingml/2006/main" xmlns:r="http://schemas.openxmlformats.org/officeDocument/2006/relationships" xmlns:p="http://schemas.openxmlformats.org/presentationml/2006/main">
   <p:cSld>
     <p:spTree>
@@ -15144,7 +15706,7 @@
                       </a:pPr>
                       <a:r>
                         <a:rPr/>
-                        <a:t>0.883</a:t>
+                        <a:t>0.882</a:t>
                       </a:r>
                     </a:p>
                   </a:txBody>
@@ -15176,7 +15738,7 @@
                       </a:pPr>
                       <a:r>
                         <a:rPr/>
-                        <a:t>0.898</a:t>
+                        <a:t>0.897</a:t>
                       </a:r>
                     </a:p>
                   </a:txBody>
@@ -15287,7 +15849,7 @@
 </p:sld>
 </file>
 
-<file path=ppt/slides/slide47.xml><?xml version="1.0" encoding="utf-8"?>
+<file path=ppt/slides/slide5.xml><?xml version="1.0" encoding="utf-8"?>
 <p:sld xmlns:a="http://schemas.openxmlformats.org/drawingml/2006/main" xmlns:r="http://schemas.openxmlformats.org/officeDocument/2006/relationships" xmlns:p="http://schemas.openxmlformats.org/presentationml/2006/main">
   <p:cSld>
     <p:spTree>
@@ -15329,6 +15891,88 @@
             </a:pPr>
             <a:r>
               <a:rPr/>
+              <a:t>Four disconnected risky regions</a:t>
+            </a:r>
+          </a:p>
+        </p:txBody>
+      </p:sp>
+      <p:pic>
+        <p:nvPicPr>
+          <p:cNvPr descr="loan_scatter.png" id="0" name="Picture 1"/>
+          <p:cNvPicPr>
+            <a:picLocks noGrp="1" noChangeAspect="1"/>
+          </p:cNvPicPr>
+          <p:nvPr/>
+        </p:nvPicPr>
+        <p:blipFill>
+          <a:blip r:embed="rId3"/>
+          <a:stretch>
+            <a:fillRect/>
+          </a:stretch>
+        </p:blipFill>
+        <p:spPr bwMode="auto">
+          <a:xfrm>
+            <a:off x="2445144" y="1166099"/>
+            <a:ext cx="4253712" cy="3360181"/>
+          </a:xfrm>
+          <a:prstGeom prst="rect">
+            <a:avLst/>
+          </a:prstGeom>
+          <a:noFill/>
+          <a:ln w="9525">
+            <a:noFill/>
+            <a:headEnd/>
+            <a:tailEnd/>
+          </a:ln>
+        </p:spPr>
+      </p:pic>
+    </p:spTree>
+  </p:cSld>
+</p:sld>
+</file>
+
+<file path=ppt/slides/slide50.xml><?xml version="1.0" encoding="utf-8"?>
+<p:sld xmlns:a="http://schemas.openxmlformats.org/drawingml/2006/main" xmlns:r="http://schemas.openxmlformats.org/officeDocument/2006/relationships" xmlns:p="http://schemas.openxmlformats.org/presentationml/2006/main">
+  <p:cSld>
+    <p:spTree>
+      <p:nvGrpSpPr>
+        <p:cNvPr id="1" name=""/>
+        <p:cNvGrpSpPr/>
+        <p:nvPr/>
+      </p:nvGrpSpPr>
+      <p:grpSpPr>
+        <a:xfrm>
+          <a:off x="0" y="0"/>
+          <a:ext cx="0" cy="0"/>
+          <a:chOff x="0" y="0"/>
+          <a:chExt cx="0" cy="0"/>
+        </a:xfrm>
+      </p:grpSpPr>
+      <p:sp>
+        <p:nvSpPr>
+          <p:cNvPr id="2" name="Title 1"/>
+          <p:cNvSpPr>
+            <a:spLocks noGrp="1"/>
+          </p:cNvSpPr>
+          <p:nvPr>
+            <p:ph type="title"/>
+          </p:nvPr>
+        </p:nvSpPr>
+        <p:spPr>
+          <a:xfrm>
+            <a:off x="457200" y="205979"/>
+            <a:ext cx="8229600" cy="857250"/>
+          </a:xfrm>
+        </p:spPr>
+        <p:txBody>
+          <a:bodyPr/>
+          <a:lstStyle/>
+          <a:p>
+            <a:pPr lvl="0" indent="0" marL="0">
+              <a:buNone/>
+            </a:pPr>
+            <a:r>
+              <a:rPr/>
               <a:t>Three findings</a:t>
             </a:r>
           </a:p>
@@ -15376,7 +16020,7 @@
             <a:pPr lvl="0"/>
             <a:r>
               <a:rPr/>
-              <a:t>The tuned single tree is close behind, 0.883 against 0.911, and the only model here a person can read</a:t>
+              <a:t>The tuned single tree is close behind, 0.882 against 0.911, and the only model here a person can read</a:t>
             </a:r>
           </a:p>
           <a:p>
@@ -15401,7 +16045,7 @@
 </p:sld>
 </file>
 
-<file path=ppt/slides/slide48.xml><?xml version="1.0" encoding="utf-8"?>
+<file path=ppt/slides/slide51.xml><?xml version="1.0" encoding="utf-8"?>
 <p:sld xmlns:a="http://schemas.openxmlformats.org/drawingml/2006/main" xmlns:r="http://schemas.openxmlformats.org/officeDocument/2006/relationships" xmlns:p="http://schemas.openxmlformats.org/presentationml/2006/main">
   <p:cSld>
     <p:spTree>
@@ -15675,7 +16319,7 @@
 </p:sld>
 </file>
 
-<file path=ppt/slides/slide49.xml><?xml version="1.0" encoding="utf-8"?>
+<file path=ppt/slides/slide52.xml><?xml version="1.0" encoding="utf-8"?>
 <p:sld xmlns:a="http://schemas.openxmlformats.org/drawingml/2006/main" xmlns:r="http://schemas.openxmlformats.org/officeDocument/2006/relationships" xmlns:p="http://schemas.openxmlformats.org/presentationml/2006/main">
   <p:cSld>
     <p:spTree>
@@ -15800,7 +16444,7 @@
 </p:sld>
 </file>
 
-<file path=ppt/slides/slide5.xml><?xml version="1.0" encoding="utf-8"?>
+<file path=ppt/slides/slide53.xml><?xml version="1.0" encoding="utf-8"?>
 <p:sld xmlns:a="http://schemas.openxmlformats.org/drawingml/2006/main" xmlns:r="http://schemas.openxmlformats.org/officeDocument/2006/relationships" xmlns:p="http://schemas.openxmlformats.org/presentationml/2006/main">
   <p:cSld>
     <p:spTree>
@@ -15842,88 +16486,6 @@
             </a:pPr>
             <a:r>
               <a:rPr/>
-              <a:t>Four disconnected risky regions</a:t>
-            </a:r>
-          </a:p>
-        </p:txBody>
-      </p:sp>
-      <p:pic>
-        <p:nvPicPr>
-          <p:cNvPr descr="loan_scatter.png" id="0" name="Picture 1"/>
-          <p:cNvPicPr>
-            <a:picLocks noGrp="1" noChangeAspect="1"/>
-          </p:cNvPicPr>
-          <p:nvPr/>
-        </p:nvPicPr>
-        <p:blipFill>
-          <a:blip r:embed="rId3"/>
-          <a:stretch>
-            <a:fillRect/>
-          </a:stretch>
-        </p:blipFill>
-        <p:spPr bwMode="auto">
-          <a:xfrm>
-            <a:off x="2445144" y="1166099"/>
-            <a:ext cx="4253712" cy="3360181"/>
-          </a:xfrm>
-          <a:prstGeom prst="rect">
-            <a:avLst/>
-          </a:prstGeom>
-          <a:noFill/>
-          <a:ln w="9525">
-            <a:noFill/>
-            <a:headEnd/>
-            <a:tailEnd/>
-          </a:ln>
-        </p:spPr>
-      </p:pic>
-    </p:spTree>
-  </p:cSld>
-</p:sld>
-</file>
-
-<file path=ppt/slides/slide50.xml><?xml version="1.0" encoding="utf-8"?>
-<p:sld xmlns:a="http://schemas.openxmlformats.org/drawingml/2006/main" xmlns:r="http://schemas.openxmlformats.org/officeDocument/2006/relationships" xmlns:p="http://schemas.openxmlformats.org/presentationml/2006/main">
-  <p:cSld>
-    <p:spTree>
-      <p:nvGrpSpPr>
-        <p:cNvPr id="1" name=""/>
-        <p:cNvGrpSpPr/>
-        <p:nvPr/>
-      </p:nvGrpSpPr>
-      <p:grpSpPr>
-        <a:xfrm>
-          <a:off x="0" y="0"/>
-          <a:ext cx="0" cy="0"/>
-          <a:chOff x="0" y="0"/>
-          <a:chExt cx="0" cy="0"/>
-        </a:xfrm>
-      </p:grpSpPr>
-      <p:sp>
-        <p:nvSpPr>
-          <p:cNvPr id="2" name="Title 1"/>
-          <p:cNvSpPr>
-            <a:spLocks noGrp="1"/>
-          </p:cNvSpPr>
-          <p:nvPr>
-            <p:ph type="title"/>
-          </p:nvPr>
-        </p:nvSpPr>
-        <p:spPr>
-          <a:xfrm>
-            <a:off x="457200" y="205979"/>
-            <a:ext cx="8229600" cy="857250"/>
-          </a:xfrm>
-        </p:spPr>
-        <p:txBody>
-          <a:bodyPr/>
-          <a:lstStyle/>
-          <a:p>
-            <a:pPr lvl="0" indent="0" marL="0">
-              <a:buNone/>
-            </a:pPr>
-            <a:r>
-              <a:rPr/>
               <a:t>What to take away</a:t>
             </a:r>
           </a:p>
@@ -15999,7 +16561,7 @@
 </p:sld>
 </file>
 
-<file path=ppt/slides/slide51.xml><?xml version="1.0" encoding="utf-8"?>
+<file path=ppt/slides/slide54.xml><?xml version="1.0" encoding="utf-8"?>
 <p:sld xmlns:a="http://schemas.openxmlformats.org/drawingml/2006/main" xmlns:r="http://schemas.openxmlformats.org/officeDocument/2006/relationships" xmlns:p="http://schemas.openxmlformats.org/presentationml/2006/main">
   <p:cSld>
     <p:spTree>

--- a/Lessons/07_trees_and_ensembles/Slides/trees_and_ensembles_slides.pptx
+++ b/Lessons/07_trees_and_ensembles/Slides/trees_and_ensembles_slides.pptx
@@ -5,7 +5,7 @@
     <p:sldMasterId id="2147483648" r:id="rId1"/>
   </p:sldMasterIdLst>
   <p:notesMasterIdLst>
-    <p:notesMasterId r:id="rId56"/>
+    <p:notesMasterId r:id="rId57"/>
   </p:notesMasterIdLst>
   <p:sldIdLst>
     <p:sldId id="256" r:id="rId2"/>
@@ -62,6 +62,7 @@
     <p:sldId id="307" r:id="rId53"/>
     <p:sldId id="308" r:id="rId54"/>
     <p:sldId id="309" r:id="rId55"/>
+    <p:sldId id="310" r:id="rId56"/>
   </p:sldIdLst>
   <p:sldSz cx="9144000" cy="5143500" type="screen16x9"/>
   <p:notesSz cx="6858000" cy="9144000"/>
@@ -687,29 +688,21 @@
             </a:pPr>
             <a:r>
               <a:rPr/>
-              <a:t>Set up the idea in words before the formula: a split is only useful if the two resulting groups are, taken together, purer than the one group was. The weighting matters because a split that isolates one awkward point while leaving the rest exactly as mixed as before should not score as well as one that improves the picture broadly.</a:t>
-            </a:r>
-          </a:p>
-          <a:p>
-            <a:pPr lvl="0" indent="0" marL="0">
-              <a:buNone/>
-            </a:pPr>
-          </a:p>
-          <a:p>
-            <a:pPr lvl="0" indent="0" marL="0">
-              <a:buNone/>
-            </a:pPr>
-            <a:r>
-              <a:rPr/>
-              <a:t>Ask what could go wrong if you </a:t>
-            </a:r>
-            <a:r>
-              <a:rPr i="1"/>
-              <a:t>didn’t</a:t>
-            </a:r>
-            <a:r>
-              <a:rPr/>
-              <a:t> weight by group size - the answer is that a tree would happily carve off tiny, perfectly pure single-point groups at every step, which is exactly the overfitting behaviour section 3 measures in a few minutes.</a:t>
+              <a:t>Two classes is the case that matters for this dataset, and the formula collapses to something with an obvious shape: zero at the extremes, a single peak at fifty-fifty. Ask the room to sanity-check the peak location before you confirm it - it is the point where a random guess is least useful.</a:t>
+            </a:r>
+          </a:p>
+          <a:p>
+            <a:pPr lvl="0" indent="0" marL="0">
+              <a:buNone/>
+            </a:pPr>
+          </a:p>
+          <a:p>
+            <a:pPr lvl="0" indent="0" marL="0">
+              <a:buNone/>
+            </a:pPr>
+            <a:r>
+              <a:rPr/>
+              <a:t>Give them the concrete number: on the full loan dataset, 38.7% defaulted, so p = 0.387 and G(parent) = 2 × 0.387 × 0.613 = 0.474. That is the impurity every candidate root split is measured against.</a:t>
             </a:r>
           </a:p>
           <a:p>
@@ -805,21 +798,43 @@
             </a:pPr>
             <a:r>
               <a:rPr/>
-              <a:t>Say what the subscripts are before reading the formula: P, L and R are the parent group and its two children, the same three the handout names in words, and the m terms are how many examples are in each. The two m terms are the sizes of the left and right children, and they add to the parent’s. Read it as: what the parent’s impurity was, minus what is left after the split, weighted by how the group was divided. The tree keeps whichever candidate split makes ΔG largest.</a:t>
-            </a:r>
-          </a:p>
-          <a:p>
-            <a:pPr lvl="0" indent="0" marL="0">
-              <a:buNone/>
-            </a:pPr>
-          </a:p>
-          <a:p>
-            <a:pPr lvl="0" indent="0" marL="0">
-              <a:buNone/>
-            </a:pPr>
-            <a:r>
-              <a:rPr/>
-              <a:t>No derivation needed here - the formula is exactly the weighted comparison the previous slide described in words. Handout section 2.2 has it worked through on the loan data’s actual root split.</a:t>
+              <a:t>Set up the idea in words before the formula: a split is only useful if the two resulting groups are, taken together, purer than the one group was. The weighting matters because a split that isolates one awkward point while leaving the rest exactly as mixed as before should not score as well as one that improves the picture broadly.</a:t>
+            </a:r>
+          </a:p>
+          <a:p>
+            <a:pPr lvl="0" indent="0" marL="0">
+              <a:buNone/>
+            </a:pPr>
+          </a:p>
+          <a:p>
+            <a:pPr lvl="0" indent="0" marL="0">
+              <a:buNone/>
+            </a:pPr>
+            <a:r>
+              <a:rPr/>
+              <a:t>Ask what could go wrong if you </a:t>
+            </a:r>
+            <a:r>
+              <a:rPr i="1"/>
+              <a:t>didn’t</a:t>
+            </a:r>
+            <a:r>
+              <a:rPr/>
+              <a:t> weight by group size - the answer is that a tree would happily carve off tiny, perfectly pure single-point groups at every step, which is exactly the overfitting behaviour section 3 measures in a few minutes.</a:t>
+            </a:r>
+          </a:p>
+          <a:p>
+            <a:pPr lvl="0" indent="0" marL="0">
+              <a:buNone/>
+            </a:pPr>
+          </a:p>
+          <a:p>
+            <a:pPr lvl="0" indent="0" marL="0">
+              <a:buNone/>
+            </a:pPr>
+            <a:r>
+              <a:rPr/>
+              <a:t>Handout section 2.2.</a:t>
             </a:r>
           </a:p>
         </p:txBody>
@@ -901,35 +916,21 @@
             </a:pPr>
             <a:r>
               <a:rPr/>
-              <a:t>This is the exhaustive-search part of the algorithm, and it is worth being concrete about the cost: every feature, every possible threshold, at every node, all the way down. It is brute force, and on a dataset this size it is cheap.</a:t>
-            </a:r>
-          </a:p>
-          <a:p>
-            <a:pPr lvl="0" indent="0" marL="0">
-              <a:buNone/>
-            </a:pPr>
-          </a:p>
-          <a:p>
-            <a:pPr lvl="0" indent="0" marL="0">
-              <a:buNone/>
-            </a:pPr>
-            <a:r>
-              <a:rPr/>
-              <a:t>The last bullet is the one to slow down on. A feature that only helps in combination with a second split further down the tree can be - and in this dataset’s two interior islands, is - invisible to a shallow search, because ΔG is never evaluated for two splits together.</a:t>
-            </a:r>
-          </a:p>
-          <a:p>
-            <a:pPr lvl="0" indent="0" marL="0">
-              <a:buNone/>
-            </a:pPr>
-          </a:p>
-          <a:p>
-            <a:pPr lvl="0" indent="0" marL="0">
-              <a:buNone/>
-            </a:pPr>
-            <a:r>
-              <a:rPr/>
-              <a:t>Handout section 2.2.</a:t>
+              <a:t>Say what the subscripts are before reading the formula: P, L and R are the parent group and its two children, the same three the handout names in words, and the m terms are how many examples are in each. The two m terms are the sizes of the left and right children, and they add to the parent’s. Read it as: what the parent’s impurity was, minus what is left after the split, weighted by how the group was divided. The tree keeps whichever candidate split makes ΔG largest.</a:t>
+            </a:r>
+          </a:p>
+          <a:p>
+            <a:pPr lvl="0" indent="0" marL="0">
+              <a:buNone/>
+            </a:pPr>
+          </a:p>
+          <a:p>
+            <a:pPr lvl="0" indent="0" marL="0">
+              <a:buNone/>
+            </a:pPr>
+            <a:r>
+              <a:rPr/>
+              <a:t>No derivation needed here - the formula is exactly the weighted comparison the previous slide described in words. Handout section 2.2 has it worked through on the loan data’s actual root split.</a:t>
             </a:r>
           </a:p>
         </p:txBody>
@@ -1011,21 +1012,21 @@
             </a:pPr>
             <a:r>
               <a:rPr/>
-              <a:t>Walk the numbers once: parent impurity 0.474, and the winning split is the debt ceiling, found by brute-force search with no hint about how the data was generated. That agreement with the known generating rule is the first piece of evidence that the algorithm is doing something sensible.</a:t>
-            </a:r>
-          </a:p>
-          <a:p>
-            <a:pPr lvl="0" indent="0" marL="0">
-              <a:buNone/>
-            </a:pPr>
-          </a:p>
-          <a:p>
-            <a:pPr lvl="0" indent="0" marL="0">
-              <a:buNone/>
-            </a:pPr>
-            <a:r>
-              <a:rPr/>
-              <a:t>Ask the room why finding the debt ceiling by blind search, with no knowledge of how the data was built, is a stronger check than it might first appear - the answer is that it rules out the split being an artefact of how the search was coded, since nothing in the algorithm knows the generating rule.</a:t>
+              <a:t>This is the exhaustive-search part of the algorithm, and it is worth being concrete about the cost: every feature, every possible threshold, at every node, all the way down. It is brute force, and on a dataset this size it is cheap.</a:t>
+            </a:r>
+          </a:p>
+          <a:p>
+            <a:pPr lvl="0" indent="0" marL="0">
+              <a:buNone/>
+            </a:pPr>
+          </a:p>
+          <a:p>
+            <a:pPr lvl="0" indent="0" marL="0">
+              <a:buNone/>
+            </a:pPr>
+            <a:r>
+              <a:rPr/>
+              <a:t>The last bullet is the one to slow down on. A feature that only helps in combination with a second split further down the tree can be - and in this dataset’s two interior islands, is - invisible to a shallow search, because ΔG is never evaluated for two splits together.</a:t>
             </a:r>
           </a:p>
           <a:p>
@@ -1121,21 +1122,35 @@
             </a:pPr>
             <a:r>
               <a:rPr/>
-              <a:t>The previous slide’s arithmetic, drawn. The curve is 2p(1-p): zero for a pure group, 0.5 for a fifty-fifty one. The black dot is all 1,200 applicants at p = 0.387, impurity 0.474. The split sends 971 left, at p = 0.256, and 229 right, at p = 0.939 - teal and rust.</a:t>
-            </a:r>
-          </a:p>
-          <a:p>
-            <a:pPr lvl="0" indent="0" marL="0">
-              <a:buNone/>
-            </a:pPr>
-          </a:p>
-          <a:p>
-            <a:pPr lvl="0" indent="0" marL="0">
-              <a:buNone/>
-            </a:pPr>
-            <a:r>
-              <a:rPr/>
-              <a:t>The gold square is the two children averaged by size, 0.3305, and it sits on the dotted straight line between them. Point at the bulge: the curve lies above every such line, so any split that separates the classes at all lowers the weighted impurity. The gap, 0.144, is the gain, and the tree takes whichever split makes it largest. Handout section 2.2.</a:t>
+              <a:t>Walk the numbers once: parent impurity 0.474, and the winning split is the debt ceiling, found by brute-force search with no hint about how the data was generated. That agreement with the known generating rule is the first piece of evidence that the algorithm is doing something sensible.</a:t>
+            </a:r>
+          </a:p>
+          <a:p>
+            <a:pPr lvl="0" indent="0" marL="0">
+              <a:buNone/>
+            </a:pPr>
+          </a:p>
+          <a:p>
+            <a:pPr lvl="0" indent="0" marL="0">
+              <a:buNone/>
+            </a:pPr>
+            <a:r>
+              <a:rPr/>
+              <a:t>Ask the room why finding the debt ceiling by blind search, with no knowledge of how the data was built, is a stronger check than it might first appear - the answer is that it rules out the split being an artefact of how the search was coded, since nothing in the algorithm knows the generating rule.</a:t>
+            </a:r>
+          </a:p>
+          <a:p>
+            <a:pPr lvl="0" indent="0" marL="0">
+              <a:buNone/>
+            </a:pPr>
+          </a:p>
+          <a:p>
+            <a:pPr lvl="0" indent="0" marL="0">
+              <a:buNone/>
+            </a:pPr>
+            <a:r>
+              <a:rPr/>
+              <a:t>Handout section 2.2.</a:t>
             </a:r>
           </a:p>
         </p:txBody>
@@ -1217,35 +1232,21 @@
             </a:pPr>
             <a:r>
               <a:rPr/>
-              <a:t>This is the check notebook 1 runs live, and it matters for trust rather than for novelty: once the from-scratch version is shown to agree with scikit-learn exactly, every later result in the lesson - obtained with scikit-learn - inherits that confidence.</a:t>
-            </a:r>
-          </a:p>
-          <a:p>
-            <a:pPr lvl="0" indent="0" marL="0">
-              <a:buNone/>
-            </a:pPr>
-          </a:p>
-          <a:p>
-            <a:pPr lvl="0" indent="0" marL="0">
-              <a:buNone/>
-            </a:pPr>
-            <a:r>
-              <a:rPr/>
-              <a:t>Point out the “Try this” box in the handout: computing Gini impurity for the income-floor subgroup alone and comparing it against the full dataset’s 0.474 is a two-line exercise that makes the impurity number concrete rather than abstract.</a:t>
-            </a:r>
-          </a:p>
-          <a:p>
-            <a:pPr lvl="0" indent="0" marL="0">
-              <a:buNone/>
-            </a:pPr>
-          </a:p>
-          <a:p>
-            <a:pPr lvl="0" indent="0" marL="0">
-              <a:buNone/>
-            </a:pPr>
-            <a:r>
-              <a:rPr/>
-              <a:t>Handout section 2.2, and the “Try this” box that follows it.</a:t>
+              <a:t>The previous slide’s arithmetic, drawn. The curve is 2p(1-p): zero for a pure group, 0.5 for a fifty-fifty one. The black dot is all 1,200 applicants at p = 0.387, impurity 0.474. The split sends 971 left, at p = 0.256, and 229 right, at p = 0.939 - teal and rust.</a:t>
+            </a:r>
+          </a:p>
+          <a:p>
+            <a:pPr lvl="0" indent="0" marL="0">
+              <a:buNone/>
+            </a:pPr>
+          </a:p>
+          <a:p>
+            <a:pPr lvl="0" indent="0" marL="0">
+              <a:buNone/>
+            </a:pPr>
+            <a:r>
+              <a:rPr/>
+              <a:t>The gold square is the two children averaged by size, 0.3305, and it sits on the dotted straight line between them. Point at the bulge: the curve lies above every such line, so any split that separates the classes at all lowers the weighted impurity. The gap, 0.144, is the gain, and the tree takes whichever split makes it largest. Handout section 2.2.</a:t>
             </a:r>
           </a:p>
         </p:txBody>
@@ -1327,43 +1328,35 @@
             </a:pPr>
             <a:r>
               <a:rPr/>
-              <a:t>Close the Gini segment with the limitation, because it sets up everything that follows. Ask the room: if the debt ceiling and the income floor are the two easiest wins, what happens to the two interior islands, which need </a:t>
-            </a:r>
-            <a:r>
-              <a:rPr i="1"/>
-              <a:t>two</a:t>
-            </a:r>
-            <a:r>
-              <a:rPr/>
-              <a:t> conditions at once to identify?</a:t>
-            </a:r>
-          </a:p>
-          <a:p>
-            <a:pPr lvl="0" indent="0" marL="0">
-              <a:buNone/>
-            </a:pPr>
-          </a:p>
-          <a:p>
-            <a:pPr lvl="0" indent="0" marL="0">
-              <a:buNone/>
-            </a:pPr>
-            <a:r>
-              <a:rPr/>
-              <a:t>The honest answer is that a shallow tree simply cannot see them - not because the information isn’t there, but because greedy search only ever commits to the best split available at each individual step. Depth is what buys the tree enough steps to eventually stumble onto them, which is exactly where the next segment goes.</a:t>
-            </a:r>
-          </a:p>
-          <a:p>
-            <a:pPr lvl="0" indent="0" marL="0">
-              <a:buNone/>
-            </a:pPr>
-          </a:p>
-          <a:p>
-            <a:pPr lvl="0" indent="0" marL="0">
-              <a:buNone/>
-            </a:pPr>
-            <a:r>
-              <a:rPr/>
-              <a:t>Handout sections 2.2 and 3.</a:t>
+              <a:t>This is the check notebook 1 runs live, and it matters for trust rather than for novelty: once the from-scratch version is shown to agree with scikit-learn exactly, every later result in the lesson - obtained with scikit-learn - inherits that confidence.</a:t>
+            </a:r>
+          </a:p>
+          <a:p>
+            <a:pPr lvl="0" indent="0" marL="0">
+              <a:buNone/>
+            </a:pPr>
+          </a:p>
+          <a:p>
+            <a:pPr lvl="0" indent="0" marL="0">
+              <a:buNone/>
+            </a:pPr>
+            <a:r>
+              <a:rPr/>
+              <a:t>Point out the “Try this” box in the handout: computing Gini impurity for the income-floor subgroup alone and comparing it against the full dataset’s 0.474 is a two-line exercise that makes the impurity number concrete rather than abstract.</a:t>
+            </a:r>
+          </a:p>
+          <a:p>
+            <a:pPr lvl="0" indent="0" marL="0">
+              <a:buNone/>
+            </a:pPr>
+          </a:p>
+          <a:p>
+            <a:pPr lvl="0" indent="0" marL="0">
+              <a:buNone/>
+            </a:pPr>
+            <a:r>
+              <a:rPr/>
+              <a:t>Handout section 2.2, and the “Try this” box that follows it.</a:t>
             </a:r>
           </a:p>
         </p:txBody>
@@ -1445,35 +1438,43 @@
             </a:pPr>
             <a:r>
               <a:rPr/>
-              <a:t>Name the dial explicitly and connect it to lesson 6: k in k-nearest neighbours traded bias against variance directly, and depth is a tree’s version of the same knob.</a:t>
-            </a:r>
-          </a:p>
-          <a:p>
-            <a:pPr lvl="0" indent="0" marL="0">
-              <a:buNone/>
-            </a:pPr>
-          </a:p>
-          <a:p>
-            <a:pPr lvl="0" indent="0" marL="0">
-              <a:buNone/>
-            </a:pPr>
-            <a:r>
-              <a:rPr/>
-              <a:t>The training-accuracy-1.000 claim is the one to make them justify. Ask why an unconstrained tree gets every training point right, always, on any data - the answer is that splitting never has to stop until every leaf holds one example, which it then “predicts” perfectly by definition. That number demonstrates the model class can memorise, not that anything has been learned - the same reading lesson 6 gave k = 1’s training accuracy.</a:t>
-            </a:r>
-          </a:p>
-          <a:p>
-            <a:pPr lvl="0" indent="0" marL="0">
-              <a:buNone/>
-            </a:pPr>
-          </a:p>
-          <a:p>
-            <a:pPr lvl="0" indent="0" marL="0">
-              <a:buNone/>
-            </a:pPr>
-            <a:r>
-              <a:rPr/>
-              <a:t>Handout section 3.</a:t>
+              <a:t>Close the Gini segment with the limitation, because it sets up everything that follows. Ask the room: if the debt ceiling and the income floor are the two easiest wins, what happens to the two interior islands, which need </a:t>
+            </a:r>
+            <a:r>
+              <a:rPr i="1"/>
+              <a:t>two</a:t>
+            </a:r>
+            <a:r>
+              <a:rPr/>
+              <a:t> conditions at once to identify?</a:t>
+            </a:r>
+          </a:p>
+          <a:p>
+            <a:pPr lvl="0" indent="0" marL="0">
+              <a:buNone/>
+            </a:pPr>
+          </a:p>
+          <a:p>
+            <a:pPr lvl="0" indent="0" marL="0">
+              <a:buNone/>
+            </a:pPr>
+            <a:r>
+              <a:rPr/>
+              <a:t>The honest answer is that a shallow tree simply cannot see them - not because the information isn’t there, but because greedy search only ever commits to the best split available at each individual step. Depth is what buys the tree enough steps to eventually stumble onto them, which is exactly where the next segment goes.</a:t>
+            </a:r>
+          </a:p>
+          <a:p>
+            <a:pPr lvl="0" indent="0" marL="0">
+              <a:buNone/>
+            </a:pPr>
+          </a:p>
+          <a:p>
+            <a:pPr lvl="0" indent="0" marL="0">
+              <a:buNone/>
+            </a:pPr>
+            <a:r>
+              <a:rPr/>
+              <a:t>Handout sections 2.2 and 3.</a:t>
             </a:r>
           </a:p>
         </p:txBody>
@@ -1555,43 +1556,35 @@
             </a:pPr>
             <a:r>
               <a:rPr/>
-              <a:t>Read the two columns against each other, never in isolation, exactly as lesson 5 taught. Training accuracy climbs monotonically towards 1.000. Cross-validated accuracy rises, peaks at depth 8, and then falls back - even though the model keeps getting strictly more flexible.</a:t>
-            </a:r>
-          </a:p>
-          <a:p>
-            <a:pPr lvl="0" indent="0" marL="0">
-              <a:buNone/>
-            </a:pPr>
-          </a:p>
-          <a:p>
-            <a:pPr lvl="0" indent="0" marL="0">
-              <a:buNone/>
-            </a:pPr>
-            <a:r>
-              <a:rPr/>
-              <a:t>Ask which column they would have picked a tree by, if they had only seen the training column. The far right, the unconstrained tree, looks unbeatable on that evidence and is in fact the worst honest model on this table.</a:t>
-            </a:r>
-          </a:p>
-          <a:p>
-            <a:pPr lvl="0" indent="0" marL="0">
-              <a:buNone/>
-            </a:pPr>
-          </a:p>
-          <a:p>
-            <a:pPr lvl="0" indent="0" marL="0">
-              <a:buNone/>
-            </a:pPr>
-            <a:r>
-              <a:rPr/>
-              <a:t>The unconstrained tree loses </a:t>
-            </a:r>
-            <a:r>
-              <a:rPr b="1"/>
-              <a:t>3 points</a:t>
-            </a:r>
-            <a:r>
-              <a:rPr/>
-              <a:t> of cross-validated accuracy relative to the depth-8 peak, for a training score nobody should have trusted in the first place. Handout section 3.</a:t>
+              <a:t>Name the dial explicitly and connect it to lesson 6: k in k-nearest neighbours traded bias against variance directly, and depth is a tree’s version of the same knob.</a:t>
+            </a:r>
+          </a:p>
+          <a:p>
+            <a:pPr lvl="0" indent="0" marL="0">
+              <a:buNone/>
+            </a:pPr>
+          </a:p>
+          <a:p>
+            <a:pPr lvl="0" indent="0" marL="0">
+              <a:buNone/>
+            </a:pPr>
+            <a:r>
+              <a:rPr/>
+              <a:t>The training-accuracy-1.000 claim is the one to make them justify. Ask why an unconstrained tree gets every training point right, always, on any data - the answer is that splitting never has to stop until every leaf holds one example, which it then “predicts” perfectly by definition. That number demonstrates the model class can memorise, not that anything has been learned - the same reading lesson 6 gave k = 1’s training accuracy.</a:t>
+            </a:r>
+          </a:p>
+          <a:p>
+            <a:pPr lvl="0" indent="0" marL="0">
+              <a:buNone/>
+            </a:pPr>
+          </a:p>
+          <a:p>
+            <a:pPr lvl="0" indent="0" marL="0">
+              <a:buNone/>
+            </a:pPr>
+            <a:r>
+              <a:rPr/>
+              <a:t>Handout section 3.</a:t>
             </a:r>
           </a:p>
         </p:txBody>
@@ -1673,35 +1666,43 @@
             </a:pPr>
             <a:r>
               <a:rPr/>
-              <a:t>Point at the two curves in order: training climbing steadily towards the top, cross-validated rising and then turning over. The peak is where the tree is deep enough to isolate both stressed islands and shallow enough to leave the flipped labels as errors rather than as leaves of their own.</a:t>
-            </a:r>
-          </a:p>
-          <a:p>
-            <a:pPr lvl="0" indent="0" marL="0">
-              <a:buNone/>
-            </a:pPr>
-          </a:p>
-          <a:p>
-            <a:pPr lvl="0" indent="0" marL="0">
-              <a:buNone/>
-            </a:pPr>
-            <a:r>
-              <a:rPr/>
-              <a:t>Say plainly what past the peak is buying: every extra split is spent fitting some of the 7% of labels this dataset deliberately flips, and a flipped label has no pattern to learn. A tree that classifies it “correctly” on training data has memorised it, not generalised.</a:t>
-            </a:r>
-          </a:p>
-          <a:p>
-            <a:pPr lvl="0" indent="0" marL="0">
-              <a:buNone/>
-            </a:pPr>
-          </a:p>
-          <a:p>
-            <a:pPr lvl="0" indent="0" marL="0">
-              <a:buNone/>
-            </a:pPr>
-            <a:r>
-              <a:rPr/>
-              <a:t>This is the second time this course has shown a curve bend this way - lesson 3’s Lasso penalty was the first. Handout section 3.</a:t>
+              <a:t>Read the two columns against each other, never in isolation, exactly as lesson 5 taught. Training accuracy climbs monotonically towards 1.000. Cross-validated accuracy rises, peaks at depth 8, and then falls back - even though the model keeps getting strictly more flexible.</a:t>
+            </a:r>
+          </a:p>
+          <a:p>
+            <a:pPr lvl="0" indent="0" marL="0">
+              <a:buNone/>
+            </a:pPr>
+          </a:p>
+          <a:p>
+            <a:pPr lvl="0" indent="0" marL="0">
+              <a:buNone/>
+            </a:pPr>
+            <a:r>
+              <a:rPr/>
+              <a:t>Ask which column they would have picked a tree by, if they had only seen the training column. The far right, the unconstrained tree, looks unbeatable on that evidence and is in fact the worst honest model on this table.</a:t>
+            </a:r>
+          </a:p>
+          <a:p>
+            <a:pPr lvl="0" indent="0" marL="0">
+              <a:buNone/>
+            </a:pPr>
+          </a:p>
+          <a:p>
+            <a:pPr lvl="0" indent="0" marL="0">
+              <a:buNone/>
+            </a:pPr>
+            <a:r>
+              <a:rPr/>
+              <a:t>The unconstrained tree loses </a:t>
+            </a:r>
+            <a:r>
+              <a:rPr b="1"/>
+              <a:t>3 points</a:t>
+            </a:r>
+            <a:r>
+              <a:rPr/>
+              <a:t> of cross-validated accuracy relative to the depth-8 peak, for a training score nobody should have trusted in the first place. Handout section 3.</a:t>
             </a:r>
           </a:p>
         </p:txBody>
@@ -1879,35 +1880,35 @@
             </a:pPr>
             <a:r>
               <a:rPr/>
-              <a:t>Left to right: at depth 2 the tree affords only the income floor and the debt ceiling - the two biggest, easiest-to-find regions - and neither interior island is visible at all. At depth 8 both islands appear as clean rectangles, close to the rule that generated the data. At full depth the boundary has grown a fringe of tiny rectangles chasing individual flipped labels.</a:t>
-            </a:r>
-          </a:p>
-          <a:p>
-            <a:pPr lvl="0" indent="0" marL="0">
-              <a:buNone/>
-            </a:pPr>
-          </a:p>
-          <a:p>
-            <a:pPr lvl="0" indent="0" marL="0">
-              <a:buNone/>
-            </a:pPr>
-            <a:r>
-              <a:rPr/>
-              <a:t>Make the point explicit: the full-depth boundary is not a smoother version of the depth-8 boundary. It is a noisier one, built out of the same mechanism that gave the unconstrained tree its perfect training score.</a:t>
-            </a:r>
-          </a:p>
-          <a:p>
-            <a:pPr lvl="0" indent="0" marL="0">
-              <a:buNone/>
-            </a:pPr>
-          </a:p>
-          <a:p>
-            <a:pPr lvl="0" indent="0" marL="0">
-              <a:buNone/>
-            </a:pPr>
-            <a:r>
-              <a:rPr/>
-              <a:t>Ask the room which of the three they would trust on a loan applicant they had never seen. Handout section 3.</a:t>
+              <a:t>Point at the two curves in order: training climbing steadily towards the top, cross-validated rising and then turning over. The peak is where the tree is deep enough to isolate both stressed islands and shallow enough to leave the flipped labels as errors rather than as leaves of their own.</a:t>
+            </a:r>
+          </a:p>
+          <a:p>
+            <a:pPr lvl="0" indent="0" marL="0">
+              <a:buNone/>
+            </a:pPr>
+          </a:p>
+          <a:p>
+            <a:pPr lvl="0" indent="0" marL="0">
+              <a:buNone/>
+            </a:pPr>
+            <a:r>
+              <a:rPr/>
+              <a:t>Say plainly what past the peak is buying: every extra split is spent fitting some of the 7% of labels this dataset deliberately flips, and a flipped label has no pattern to learn. A tree that classifies it “correctly” on training data has memorised it, not generalised.</a:t>
+            </a:r>
+          </a:p>
+          <a:p>
+            <a:pPr lvl="0" indent="0" marL="0">
+              <a:buNone/>
+            </a:pPr>
+          </a:p>
+          <a:p>
+            <a:pPr lvl="0" indent="0" marL="0">
+              <a:buNone/>
+            </a:pPr>
+            <a:r>
+              <a:rPr/>
+              <a:t>This is the second time this course has shown a curve bend this way - lesson 3’s Lasso penalty was the first. Handout section 3.</a:t>
             </a:r>
           </a:p>
         </p:txBody>
@@ -1989,35 +1990,35 @@
             </a:pPr>
             <a:r>
               <a:rPr/>
-              <a:t>This is the readability half of the story. For a tree meant to be read rather than merely scored, best-first growth is the better knob: a small budget of splits goes to the ones that matter most, instead of being spent uniformly across every branch regardless of whether it’s worth it.</a:t>
-            </a:r>
-          </a:p>
-          <a:p>
-            <a:pPr lvl="0" indent="0" marL="0">
-              <a:buNone/>
-            </a:pPr>
-          </a:p>
-          <a:p>
-            <a:pPr lvl="0" indent="0" marL="0">
-              <a:buNone/>
-            </a:pPr>
-            <a:r>
-              <a:rPr/>
-              <a:t>The nine-leaf tree is worth reading aloud as a sequence of if/else statements - that is the entire model, and it is the thing k-nearest neighbours and support vector machines cannot offer at all. For a decision that has to be justified to the person it affects, that can matter as much as accuracy.</a:t>
-            </a:r>
-          </a:p>
-          <a:p>
-            <a:pPr lvl="0" indent="0" marL="0">
-              <a:buNone/>
-            </a:pPr>
-          </a:p>
-          <a:p>
-            <a:pPr lvl="0" indent="0" marL="0">
-              <a:buNone/>
-            </a:pPr>
-            <a:r>
-              <a:rPr/>
-              <a:t>Handout section 4.</a:t>
+              <a:t>Left to right: at depth 2 the tree affords only the income floor and the debt ceiling - the two biggest, easiest-to-find regions - and neither interior island is visible at all. At depth 8 both islands appear as clean rectangles, close to the rule that generated the data. At full depth the boundary has grown a fringe of tiny rectangles chasing individual flipped labels.</a:t>
+            </a:r>
+          </a:p>
+          <a:p>
+            <a:pPr lvl="0" indent="0" marL="0">
+              <a:buNone/>
+            </a:pPr>
+          </a:p>
+          <a:p>
+            <a:pPr lvl="0" indent="0" marL="0">
+              <a:buNone/>
+            </a:pPr>
+            <a:r>
+              <a:rPr/>
+              <a:t>Make the point explicit: the full-depth boundary is not a smoother version of the depth-8 boundary. It is a noisier one, built out of the same mechanism that gave the unconstrained tree its perfect training score.</a:t>
+            </a:r>
+          </a:p>
+          <a:p>
+            <a:pPr lvl="0" indent="0" marL="0">
+              <a:buNone/>
+            </a:pPr>
+          </a:p>
+          <a:p>
+            <a:pPr lvl="0" indent="0" marL="0">
+              <a:buNone/>
+            </a:pPr>
+            <a:r>
+              <a:rPr/>
+              <a:t>Ask the room which of the three they would trust on a loan applicant they had never seen. Handout section 3.</a:t>
             </a:r>
           </a:p>
         </p:txBody>
@@ -2099,21 +2100,21 @@
             </a:pPr>
             <a:r>
               <a:rPr/>
-              <a:t>This is the instability that ensembles turn into raw material. The strongest split barely moves under resampling, because the evidence behind it - 1,200 points supporting the debt ceiling - is overwhelming. Everything weaker than that is supported by far fewer points, and those splits are what actually determine a tree’s shape.</a:t>
-            </a:r>
-          </a:p>
-          <a:p>
-            <a:pPr lvl="0" indent="0" marL="0">
-              <a:buNone/>
-            </a:pPr>
-          </a:p>
-          <a:p>
-            <a:pPr lvl="0" indent="0" marL="0">
-              <a:buNone/>
-            </a:pPr>
-            <a:r>
-              <a:rPr/>
-              <a:t>Ask the room what 11.7% disagreement between two trees fit to almost the same data implies about trusting any single tree’s exact boundary. The answer is the whole of the next segment: a single tree’s instability looks like a flaw, and it is about to become a strength.</a:t>
+              <a:t>This is the readability half of the story. For a tree meant to be read rather than merely scored, best-first growth is the better knob: a small budget of splits goes to the ones that matter most, instead of being spent uniformly across every branch regardless of whether it’s worth it.</a:t>
+            </a:r>
+          </a:p>
+          <a:p>
+            <a:pPr lvl="0" indent="0" marL="0">
+              <a:buNone/>
+            </a:pPr>
+          </a:p>
+          <a:p>
+            <a:pPr lvl="0" indent="0" marL="0">
+              <a:buNone/>
+            </a:pPr>
+            <a:r>
+              <a:rPr/>
+              <a:t>The nine-leaf tree is worth reading aloud as a sequence of if/else statements - that is the entire model, and it is the thing k-nearest neighbours and support vector machines cannot offer at all. For a decision that has to be justified to the person it affects, that can matter as much as accuracy.</a:t>
             </a:r>
           </a:p>
           <a:p>
@@ -2209,35 +2210,35 @@
             </a:pPr>
             <a:r>
               <a:rPr/>
-              <a:t>Run Notebooks/01_decision_trees_from_scratch.ipynb. Twenty minutes.</a:t>
-            </a:r>
-          </a:p>
-          <a:p>
-            <a:pPr lvl="0" indent="0" marL="0">
-              <a:buNone/>
-            </a:pPr>
-          </a:p>
-          <a:p>
-            <a:pPr lvl="0" indent="0" marL="0">
-              <a:buNone/>
-            </a:pPr>
-            <a:r>
-              <a:rPr/>
-              <a:t>Have them watch the from-scratch implementation confirm the debt-ceiling root split before scikit-learn’s version ever runs - the point is that the agreement is not assumed, it is checked, at every depth.</a:t>
-            </a:r>
-          </a:p>
-          <a:p>
-            <a:pPr lvl="0" indent="0" marL="0">
-              <a:buNone/>
-            </a:pPr>
-          </a:p>
-          <a:p>
-            <a:pPr lvl="0" indent="0" marL="0">
-              <a:buNone/>
-            </a:pPr>
-            <a:r>
-              <a:rPr/>
-              <a:t>The cell worth protecting if time is short is the two-tree resampling comparison at the end: printing the 11.7% disagreement figure themselves lands harder than reading it off a slide.</a:t>
+              <a:t>This is the instability that ensembles turn into raw material. The strongest split barely moves under resampling, because the evidence behind it - 1,200 points supporting the debt ceiling - is overwhelming. Everything weaker than that is supported by far fewer points, and those splits are what actually determine a tree’s shape.</a:t>
+            </a:r>
+          </a:p>
+          <a:p>
+            <a:pPr lvl="0" indent="0" marL="0">
+              <a:buNone/>
+            </a:pPr>
+          </a:p>
+          <a:p>
+            <a:pPr lvl="0" indent="0" marL="0">
+              <a:buNone/>
+            </a:pPr>
+            <a:r>
+              <a:rPr/>
+              <a:t>Ask the room what 11.7% disagreement between two trees fit to almost the same data implies about trusting any single tree’s exact boundary. The answer is the whole of the next segment: a single tree’s instability looks like a flaw, and it is about to become a strength.</a:t>
+            </a:r>
+          </a:p>
+          <a:p>
+            <a:pPr lvl="0" indent="0" marL="0">
+              <a:buNone/>
+            </a:pPr>
+          </a:p>
+          <a:p>
+            <a:pPr lvl="0" indent="0" marL="0">
+              <a:buNone/>
+            </a:pPr>
+            <a:r>
+              <a:rPr/>
+              <a:t>Handout section 4.</a:t>
             </a:r>
           </a:p>
         </p:txBody>
@@ -2319,7 +2320,35 @@
             </a:pPr>
             <a:r>
               <a:rPr/>
-              <a:t>Twelve minutes. The next segment is where the lesson’s real content starts - one tree’s instability, turned into an ensemble’s strength - so they need to come back with that framing fresh.</a:t>
+              <a:t>Run Notebooks/01_decision_trees_from_scratch.ipynb. Twenty minutes.</a:t>
+            </a:r>
+          </a:p>
+          <a:p>
+            <a:pPr lvl="0" indent="0" marL="0">
+              <a:buNone/>
+            </a:pPr>
+          </a:p>
+          <a:p>
+            <a:pPr lvl="0" indent="0" marL="0">
+              <a:buNone/>
+            </a:pPr>
+            <a:r>
+              <a:rPr/>
+              <a:t>Have them watch the from-scratch implementation confirm the debt-ceiling root split before scikit-learn’s version ever runs - the point is that the agreement is not assumed, it is checked, at every depth.</a:t>
+            </a:r>
+          </a:p>
+          <a:p>
+            <a:pPr lvl="0" indent="0" marL="0">
+              <a:buNone/>
+            </a:pPr>
+          </a:p>
+          <a:p>
+            <a:pPr lvl="0" indent="0" marL="0">
+              <a:buNone/>
+            </a:pPr>
+            <a:r>
+              <a:rPr/>
+              <a:t>The cell worth protecting if time is short is the two-tree resampling comparison at the end: printing the 11.7% disagreement figure themselves lands harder than reading it off a slide.</a:t>
             </a:r>
           </a:p>
         </p:txBody>
@@ -2401,35 +2430,7 @@
             </a:pPr>
             <a:r>
               <a:rPr/>
-              <a:t>State the logic before the name. Section 4 just measured that two trees on overlapping resamples disagree on more than a tenth of predictions. If those disagreements are close to random, averaging many such trees should cancel some of them out - that is the entire idea behind bagging, bootstrap aggregating.</a:t>
-            </a:r>
-          </a:p>
-          <a:p>
-            <a:pPr lvl="0" indent="0" marL="0">
-              <a:buNone/>
-            </a:pPr>
-          </a:p>
-          <a:p>
-            <a:pPr lvl="0" indent="0" marL="0">
-              <a:buNone/>
-            </a:pPr>
-            <a:r>
-              <a:rPr/>
-              <a:t>Be precise about “with replacement”: some rows appear more than once in a given sample, some not at all. That leftover fraction is not wasted - it becomes free validation data, on the next slide.</a:t>
-            </a:r>
-          </a:p>
-          <a:p>
-            <a:pPr lvl="0" indent="0" marL="0">
-              <a:buNone/>
-            </a:pPr>
-          </a:p>
-          <a:p>
-            <a:pPr lvl="0" indent="0" marL="0">
-              <a:buNone/>
-            </a:pPr>
-            <a:r>
-              <a:rPr/>
-              <a:t>Handout section 5.</a:t>
+              <a:t>Twelve minutes. The next segment is where the lesson’s real content starts - one tree’s instability, turned into an ensemble’s strength - so they need to come back with that framing fresh.</a:t>
             </a:r>
           </a:p>
         </p:txBody>
@@ -2511,35 +2512,35 @@
             </a:pPr>
             <a:r>
               <a:rPr/>
-              <a:t>State the result, do not derive it - the limit that gives 63.2%/36.8% is a standard exponential limit, worked out in full in the handout, and it does not belong on a slide. What matters here is the consequence: every bootstrap tree automatically leaves out over a third of the data it never saw, for free.</a:t>
-            </a:r>
-          </a:p>
-          <a:p>
-            <a:pPr lvl="0" indent="0" marL="0">
-              <a:buNone/>
-            </a:pPr>
-          </a:p>
-          <a:p>
-            <a:pPr lvl="0" indent="0" marL="0">
-              <a:buNone/>
-            </a:pPr>
-            <a:r>
-              <a:rPr/>
-              <a:t>Ask the room what that leftover third is good for. The answer is the next slide: it is validation data for exactly the one tree that never saw it.</a:t>
-            </a:r>
-          </a:p>
-          <a:p>
-            <a:pPr lvl="0" indent="0" marL="0">
-              <a:buNone/>
-            </a:pPr>
-          </a:p>
-          <a:p>
-            <a:pPr lvl="0" indent="0" marL="0">
-              <a:buNone/>
-            </a:pPr>
-            <a:r>
-              <a:rPr/>
-              <a:t>Handout section 5.1.</a:t>
+              <a:t>State the logic before the name. Section 4 just measured that two trees on overlapping resamples disagree on more than a tenth of predictions. If those disagreements are close to random, averaging many such trees should cancel some of them out - that is the entire idea behind bagging, bootstrap aggregating.</a:t>
+            </a:r>
+          </a:p>
+          <a:p>
+            <a:pPr lvl="0" indent="0" marL="0">
+              <a:buNone/>
+            </a:pPr>
+          </a:p>
+          <a:p>
+            <a:pPr lvl="0" indent="0" marL="0">
+              <a:buNone/>
+            </a:pPr>
+            <a:r>
+              <a:rPr/>
+              <a:t>Be precise about “with replacement”: some rows appear more than once in a given sample, some not at all. That leftover fraction is not wasted - it becomes free validation data, on the next slide.</a:t>
+            </a:r>
+          </a:p>
+          <a:p>
+            <a:pPr lvl="0" indent="0" marL="0">
+              <a:buNone/>
+            </a:pPr>
+          </a:p>
+          <a:p>
+            <a:pPr lvl="0" indent="0" marL="0">
+              <a:buNone/>
+            </a:pPr>
+            <a:r>
+              <a:rPr/>
+              <a:t>Handout section 5.</a:t>
             </a:r>
           </a:p>
         </p:txBody>
@@ -2621,21 +2622,35 @@
             </a:pPr>
             <a:r>
               <a:rPr/>
-              <a:t>How often each of the 1,200 loans turns up in one bootstrap sample, blue, against the limit e^-1 / k!, gold. The first bar is the out-of-bag share: 0.366 here, 0.368 in the limit. The rest are rows drawn once, twice, three times.</a:t>
-            </a:r>
-          </a:p>
-          <a:p>
-            <a:pPr lvl="0" indent="0" marL="0">
-              <a:buNone/>
-            </a:pPr>
-          </a:p>
-          <a:p>
-            <a:pPr lvl="0" indent="0" marL="0">
-              <a:buNone/>
-            </a:pPr>
-            <a:r>
-              <a:rPr/>
-              <a:t>The point to make: about one row in four appears two or more times. Every tree sees a different mix of repeats and absences, and that is where their disagreement - the raw material of bagging - comes from. Handout section 5.1.</a:t>
+              <a:t>State the result, do not derive it - the limit that gives 63.2%/36.8% is a standard exponential limit, worked out in full in the handout, and it does not belong on a slide. What matters here is the consequence: every bootstrap tree automatically leaves out over a third of the data it never saw, for free.</a:t>
+            </a:r>
+          </a:p>
+          <a:p>
+            <a:pPr lvl="0" indent="0" marL="0">
+              <a:buNone/>
+            </a:pPr>
+          </a:p>
+          <a:p>
+            <a:pPr lvl="0" indent="0" marL="0">
+              <a:buNone/>
+            </a:pPr>
+            <a:r>
+              <a:rPr/>
+              <a:t>Ask the room what that leftover third is good for. The answer is the next slide: it is validation data for exactly the one tree that never saw it.</a:t>
+            </a:r>
+          </a:p>
+          <a:p>
+            <a:pPr lvl="0" indent="0" marL="0">
+              <a:buNone/>
+            </a:pPr>
+          </a:p>
+          <a:p>
+            <a:pPr lvl="0" indent="0" marL="0">
+              <a:buNone/>
+            </a:pPr>
+            <a:r>
+              <a:rPr/>
+              <a:t>Handout section 5.1.</a:t>
             </a:r>
           </a:p>
         </p:txBody>
@@ -2717,65 +2732,21 @@
             </a:pPr>
             <a:r>
               <a:rPr/>
-              <a:t>The agreement is the point, but be careful how you sell it. On this seed the two numbers match to four decimal places, and that is luck: over twelve seeds the typical gap is 0.0026 and the worst is 0.0075. What is not luck is that they track each other well inside cross-validation’s own ±0.021 spread, because OOB score </a:t>
-            </a:r>
-            <a:r>
-              <a:rPr i="1"/>
-              <a:t>is</a:t>
-            </a:r>
-            <a:r>
-              <a:rPr/>
-              <a:t> cross-validation with different bookkeeping - each tree supplying its own held-out fold, the rows it never bootstrapped, instead of the dataset being split up front.</a:t>
-            </a:r>
-          </a:p>
-          <a:p>
-            <a:pPr lvl="0" indent="0" marL="0">
-              <a:buNone/>
-            </a:pPr>
-          </a:p>
-          <a:p>
-            <a:pPr lvl="0" indent="0" marL="0">
-              <a:buNone/>
-            </a:pPr>
-            <a:r>
-              <a:rPr/>
-              <a:t>Worth pausing on, because it is a habit rather than a fact: </a:t>
-            </a:r>
-            <a:r>
-              <a:rPr b="1"/>
-              <a:t>a single coincidence is not evidence of a law.</a:t>
-            </a:r>
-            <a:r>
-              <a:rPr/>
-              <a:t> If you catch yourself saying “exactly”, run it again with another seed. They will need that reflex in their own exercises, and it is cheaper to learn it here.</a:t>
-            </a:r>
-          </a:p>
-          <a:p>
-            <a:pPr lvl="0" indent="0" marL="0">
-              <a:buNone/>
-            </a:pPr>
-          </a:p>
-          <a:p>
-            <a:pPr lvl="0" indent="0" marL="0">
-              <a:buNone/>
-            </a:pPr>
-            <a:r>
-              <a:rPr/>
-              <a:t>Then make the practical consequence explicit: with a bagged ensemble you get a trustworthy estimate of generalisation for free, without setting aside a separate validation set at all - just not one to read to the fourth decimal.</a:t>
-            </a:r>
-          </a:p>
-          <a:p>
-            <a:pPr lvl="0" indent="0" marL="0">
-              <a:buNone/>
-            </a:pPr>
-          </a:p>
-          <a:p>
-            <a:pPr lvl="0" indent="0" marL="0">
-              <a:buNone/>
-            </a:pPr>
-            <a:r>
-              <a:rPr/>
-              <a:t>Handout section 5.1.</a:t>
+              <a:t>How often each of the 1,200 loans turns up in one bootstrap sample, blue, against the limit e^-1 / k!, gold. The first bar is the out-of-bag share: 0.366 here, 0.368 in the limit. The rest are rows drawn once, twice, three times.</a:t>
+            </a:r>
+          </a:p>
+          <a:p>
+            <a:pPr lvl="0" indent="0" marL="0">
+              <a:buNone/>
+            </a:pPr>
+          </a:p>
+          <a:p>
+            <a:pPr lvl="0" indent="0" marL="0">
+              <a:buNone/>
+            </a:pPr>
+            <a:r>
+              <a:rPr/>
+              <a:t>The point to make: about one row in four appears two or more times. Every tree sees a different mix of repeats and absences, and that is where their disagreement - the raw material of bagging - comes from. Handout section 5.1.</a:t>
             </a:r>
           </a:p>
         </p:txBody>
@@ -2857,35 +2828,65 @@
             </a:pPr>
             <a:r>
               <a:rPr/>
-              <a:t>State the headline, not the algebra - the covariance expansion behind this is in the handout, and it does not belong on a slide. The two consequences are what matter: there is a floor variance cannot fall below, set by how correlated the trees are with each other, and averaging is a variance tool only, powerless against a systematic mistake shared by every tree.</a:t>
-            </a:r>
-          </a:p>
-          <a:p>
-            <a:pPr lvl="0" indent="0" marL="0">
-              <a:buNone/>
-            </a:pPr>
-          </a:p>
-          <a:p>
-            <a:pPr lvl="0" indent="0" marL="0">
-              <a:buNone/>
-            </a:pPr>
-            <a:r>
-              <a:rPr/>
-              <a:t>That second point is worth a beat: bagging does nothing for a tree that is too shallow to represent the rule in the first place. It cleans up noise, it does not add capability.</a:t>
-            </a:r>
-          </a:p>
-          <a:p>
-            <a:pPr lvl="0" indent="0" marL="0">
-              <a:buNone/>
-            </a:pPr>
-          </a:p>
-          <a:p>
-            <a:pPr lvl="0" indent="0" marL="0">
-              <a:buNone/>
-            </a:pPr>
-            <a:r>
-              <a:rPr/>
-              <a:t>Handout section 5.2.</a:t>
+              <a:t>The agreement is the point, but be careful how you sell it. On this seed the two numbers match to four decimal places, and that is luck: over twelve seeds the typical gap is 0.0026 and the worst is 0.0075. What is not luck is that they track each other well inside cross-validation’s own ±0.021 spread, because OOB score </a:t>
+            </a:r>
+            <a:r>
+              <a:rPr i="1"/>
+              <a:t>is</a:t>
+            </a:r>
+            <a:r>
+              <a:rPr/>
+              <a:t> cross-validation with different bookkeeping - each tree supplying its own held-out fold, the rows it never bootstrapped, instead of the dataset being split up front.</a:t>
+            </a:r>
+          </a:p>
+          <a:p>
+            <a:pPr lvl="0" indent="0" marL="0">
+              <a:buNone/>
+            </a:pPr>
+          </a:p>
+          <a:p>
+            <a:pPr lvl="0" indent="0" marL="0">
+              <a:buNone/>
+            </a:pPr>
+            <a:r>
+              <a:rPr/>
+              <a:t>Worth pausing on, because it is a habit rather than a fact: </a:t>
+            </a:r>
+            <a:r>
+              <a:rPr b="1"/>
+              <a:t>a single coincidence is not evidence of a law.</a:t>
+            </a:r>
+            <a:r>
+              <a:rPr/>
+              <a:t> If you catch yourself saying “exactly”, run it again with another seed. They will need that reflex in their own exercises, and it is cheaper to learn it here.</a:t>
+            </a:r>
+          </a:p>
+          <a:p>
+            <a:pPr lvl="0" indent="0" marL="0">
+              <a:buNone/>
+            </a:pPr>
+          </a:p>
+          <a:p>
+            <a:pPr lvl="0" indent="0" marL="0">
+              <a:buNone/>
+            </a:pPr>
+            <a:r>
+              <a:rPr/>
+              <a:t>Then make the practical consequence explicit: with a bagged ensemble you get a trustworthy estimate of generalisation for free, without setting aside a separate validation set at all - just not one to read to the fourth decimal.</a:t>
+            </a:r>
+          </a:p>
+          <a:p>
+            <a:pPr lvl="0" indent="0" marL="0">
+              <a:buNone/>
+            </a:pPr>
+          </a:p>
+          <a:p>
+            <a:pPr lvl="0" indent="0" marL="0">
+              <a:buNone/>
+            </a:pPr>
+            <a:r>
+              <a:rPr/>
+              <a:t>Handout section 5.1.</a:t>
             </a:r>
           </a:p>
         </p:txBody>
@@ -3077,21 +3078,35 @@
             </a:pPr>
             <a:r>
               <a:rPr/>
-              <a:t>The previous slide’s formula as curves: the variance of an average of B trees, as a share of one tree’s, for rho = 0, 0.2, 0.5 and 0.8.</a:t>
-            </a:r>
-          </a:p>
-          <a:p>
-            <a:pPr lvl="0" indent="0" marL="0">
-              <a:buNone/>
-            </a:pPr>
-          </a:p>
-          <a:p>
-            <a:pPr lvl="0" indent="0" marL="0">
-              <a:buNone/>
-            </a:pPr>
-            <a:r>
-              <a:rPr/>
-              <a:t>Only the rho = 0 curve goes to zero. Every other one flattens onto its dotted floor: at rho = 0.5, ten trees keep 0.550 of one tree’s variance and a hundred keep 0.505. Ask the room what the curves say about adding trees past fifty - almost nothing - and what the only remaining lever is: lower rho. That is the random forest, two slides on. Handout section 5.2.</a:t>
+              <a:t>State the headline, not the algebra - the covariance expansion behind this is in the handout, and it does not belong on a slide. The two consequences are what matter: there is a floor variance cannot fall below, set by how correlated the trees are with each other, and averaging is a variance tool only, powerless against a systematic mistake shared by every tree.</a:t>
+            </a:r>
+          </a:p>
+          <a:p>
+            <a:pPr lvl="0" indent="0" marL="0">
+              <a:buNone/>
+            </a:pPr>
+          </a:p>
+          <a:p>
+            <a:pPr lvl="0" indent="0" marL="0">
+              <a:buNone/>
+            </a:pPr>
+            <a:r>
+              <a:rPr/>
+              <a:t>That second point is worth a beat: bagging does nothing for a tree that is too shallow to represent the rule in the first place. It cleans up noise, it does not add capability.</a:t>
+            </a:r>
+          </a:p>
+          <a:p>
+            <a:pPr lvl="0" indent="0" marL="0">
+              <a:buNone/>
+            </a:pPr>
+          </a:p>
+          <a:p>
+            <a:pPr lvl="0" indent="0" marL="0">
+              <a:buNone/>
+            </a:pPr>
+            <a:r>
+              <a:rPr/>
+              <a:t>Handout section 5.2.</a:t>
             </a:r>
           </a:p>
         </p:txBody>
@@ -3173,35 +3188,21 @@
             </a:pPr>
             <a:r>
               <a:rPr/>
-              <a:t>Across 30 independent 70/30 splits of the loan data, both numbers moved in the predicted direction. The mean rose, because bagging also averages out some of a deep tree’s overfitting; the spread fell, which is exactly what the previous slide’s formula says averaging correlated estimators should do.</a:t>
-            </a:r>
-          </a:p>
-          <a:p>
-            <a:pPr lvl="0" indent="0" marL="0">
-              <a:buNone/>
-            </a:pPr>
-          </a:p>
-          <a:p>
-            <a:pPr lvl="0" indent="0" marL="0">
-              <a:buNone/>
-            </a:pPr>
-            <a:r>
-              <a:rPr/>
-              <a:t>Ask the room to name which of the two changes matters more for trusting a single deployed model - the tighter spread, because it means the number you report is less likely to be a lucky split.</a:t>
-            </a:r>
-          </a:p>
-          <a:p>
-            <a:pPr lvl="0" indent="0" marL="0">
-              <a:buNone/>
-            </a:pPr>
-          </a:p>
-          <a:p>
-            <a:pPr lvl="0" indent="0" marL="0">
-              <a:buNone/>
-            </a:pPr>
-            <a:r>
-              <a:rPr/>
-              <a:t>Handout section 5.2.</a:t>
+              <a:t>The previous slide’s formula as curves: the variance of an average of B trees, as a share of one tree’s, for rho = 0, 0.2, 0.5 and 0.8.</a:t>
+            </a:r>
+          </a:p>
+          <a:p>
+            <a:pPr lvl="0" indent="0" marL="0">
+              <a:buNone/>
+            </a:pPr>
+          </a:p>
+          <a:p>
+            <a:pPr lvl="0" indent="0" marL="0">
+              <a:buNone/>
+            </a:pPr>
+            <a:r>
+              <a:rPr/>
+              <a:t>Only the rho = 0 curve goes to zero. Every other one flattens onto its dotted floor: at rho = 0.5, ten trees keep 0.550 of one tree’s variance and a hundred keep 0.505. Ask the room what the curves say about adding trees past fifty - almost nothing - and what the only remaining lever is: lower rho. That is the random forest, two slides on. Handout section 5.2.</a:t>
             </a:r>
           </a:p>
         </p:txBody>
@@ -3283,35 +3284,35 @@
             </a:pPr>
             <a:r>
               <a:rPr/>
-              <a:t>Connect this directly to the previous slide’s algebra: if the floor is ρσ², the only way to push it lower is to push ρ down, and bootstrap resampling alone only does that partially, because every bagged tree still gets to see the full feature list.</a:t>
-            </a:r>
-          </a:p>
-          <a:p>
-            <a:pPr lvl="0" indent="0" marL="0">
-              <a:buNone/>
-            </a:pPr>
-          </a:p>
-          <a:p>
-            <a:pPr lvl="0" indent="0" marL="0">
-              <a:buNone/>
-            </a:pPr>
-            <a:r>
-              <a:rPr/>
-              <a:t>The random forest’s one change is a restriction, not an addition: at each split, only a random handful of candidate features is even offered. That forces disagreement between trees at the same point in the tree, purely by denying them the same menu.</a:t>
-            </a:r>
-          </a:p>
-          <a:p>
-            <a:pPr lvl="0" indent="0" marL="0">
-              <a:buNone/>
-            </a:pPr>
-          </a:p>
-          <a:p>
-            <a:pPr lvl="0" indent="0" marL="0">
-              <a:buNone/>
-            </a:pPr>
-            <a:r>
-              <a:rPr/>
-              <a:t>Handout section 6.</a:t>
+              <a:t>Across 30 independent 70/30 splits of the loan data, both numbers moved in the predicted direction. The mean rose, because bagging also averages out some of a deep tree’s overfitting; the spread fell, which is exactly what the previous slide’s formula says averaging correlated estimators should do.</a:t>
+            </a:r>
+          </a:p>
+          <a:p>
+            <a:pPr lvl="0" indent="0" marL="0">
+              <a:buNone/>
+            </a:pPr>
+          </a:p>
+          <a:p>
+            <a:pPr lvl="0" indent="0" marL="0">
+              <a:buNone/>
+            </a:pPr>
+            <a:r>
+              <a:rPr/>
+              <a:t>Ask the room to name which of the two changes matters more for trusting a single deployed model - the tighter spread, because it means the number you report is less likely to be a lucky split.</a:t>
+            </a:r>
+          </a:p>
+          <a:p>
+            <a:pPr lvl="0" indent="0" marL="0">
+              <a:buNone/>
+            </a:pPr>
+          </a:p>
+          <a:p>
+            <a:pPr lvl="0" indent="0" marL="0">
+              <a:buNone/>
+            </a:pPr>
+            <a:r>
+              <a:rPr/>
+              <a:t>Handout section 5.2.</a:t>
             </a:r>
           </a:p>
         </p:txBody>
@@ -3393,21 +3394,21 @@
             </a:pPr>
             <a:r>
               <a:rPr/>
-              <a:t>Same 30 splits as the bagging comparison. The random forest beats plain bagging on both counts - a better mean and a tighter spread - consistent with ρ having fallen further, exactly as the restriction on the previous slide predicts.</a:t>
-            </a:r>
-          </a:p>
-          <a:p>
-            <a:pPr lvl="0" indent="0" marL="0">
-              <a:buNone/>
-            </a:pPr>
-          </a:p>
-          <a:p>
-            <a:pPr lvl="0" indent="0" marL="0">
-              <a:buNone/>
-            </a:pPr>
-            <a:r>
-              <a:rPr/>
-              <a:t>Say plainly what has and hasn’t changed: nothing about the splitting rule is different from section 2. The only change across all three rows of this table is what surrounds the tree - resampling, then also restricting the feature menu.</a:t>
+              <a:t>Connect this directly to the previous slide’s algebra: if the floor is ρσ², the only way to push it lower is to push ρ down, and bootstrap resampling alone only does that partially, because every bagged tree still gets to see the full feature list.</a:t>
+            </a:r>
+          </a:p>
+          <a:p>
+            <a:pPr lvl="0" indent="0" marL="0">
+              <a:buNone/>
+            </a:pPr>
+          </a:p>
+          <a:p>
+            <a:pPr lvl="0" indent="0" marL="0">
+              <a:buNone/>
+            </a:pPr>
+            <a:r>
+              <a:rPr/>
+              <a:t>The random forest’s one change is a restriction, not an addition: at each split, only a random handful of candidate features is even offered. That forces disagreement between trees at the same point in the tree, purely by denying them the same menu.</a:t>
             </a:r>
           </a:p>
           <a:p>
@@ -3503,45 +3504,35 @@
             </a:pPr>
             <a:r>
               <a:rPr/>
-              <a:t>State the definition plainly, then set up the experiment. With just income and debt ratio in the dataset, feature importance is a clean, correct answer - both real features get essentially all the credit, because there is nothing else to compete with them.</a:t>
-            </a:r>
-          </a:p>
-          <a:p>
-            <a:pPr lvl="0" indent="0" marL="0">
-              <a:buNone/>
-            </a:pPr>
-          </a:p>
-          <a:p>
-            <a:pPr lvl="0" indent="0" marL="0">
-              <a:buNone/>
-            </a:pPr>
-            <a:r>
-              <a:rPr/>
-              <a:t>Ask the room to predict what happens as you add columns of pure noise - </a:t>
-            </a:r>
-            <a:r>
-              <a:rPr>
-                <a:latin typeface="Courier"/>
-              </a:rPr>
-              <a:t>np.random.normal</a:t>
-            </a:r>
-            <a:r>
-              <a:rPr/>
-              <a:t>, wired to nothing. Most will predict the noise columns get close to zero importance, because averaging over hundreds of trees should wash out anything with no signal. Do not confirm or deny yet - the next slide is the answer.</a:t>
-            </a:r>
-          </a:p>
-          <a:p>
-            <a:pPr lvl="0" indent="0" marL="0">
-              <a:buNone/>
-            </a:pPr>
-          </a:p>
-          <a:p>
-            <a:pPr lvl="0" indent="0" marL="0">
-              <a:buNone/>
-            </a:pPr>
-            <a:r>
-              <a:rPr/>
-              <a:t>Handout section 7.</a:t>
+              <a:t>Same 30 splits as the bagging comparison. The random forest beats plain bagging on both counts - a better mean and a tighter spread - consistent with ρ having fallen further, exactly as the restriction on the previous slide predicts.</a:t>
+            </a:r>
+          </a:p>
+          <a:p>
+            <a:pPr lvl="0" indent="0" marL="0">
+              <a:buNone/>
+            </a:pPr>
+          </a:p>
+          <a:p>
+            <a:pPr lvl="0" indent="0" marL="0">
+              <a:buNone/>
+            </a:pPr>
+            <a:r>
+              <a:rPr/>
+              <a:t>Say plainly what has and hasn’t changed: nothing about the splitting rule is different from section 2. The only change across all three rows of this table is what surrounds the tree - resampling, then also restricting the feature menu.</a:t>
+            </a:r>
+          </a:p>
+          <a:p>
+            <a:pPr lvl="0" indent="0" marL="0">
+              <a:buNone/>
+            </a:pPr>
+          </a:p>
+          <a:p>
+            <a:pPr lvl="0" indent="0" marL="0">
+              <a:buNone/>
+            </a:pPr>
+            <a:r>
+              <a:rPr/>
+              <a:t>Handout section 6.</a:t>
             </a:r>
           </a:p>
         </p:txBody>
@@ -3623,7 +3614,21 @@
             </a:pPr>
             <a:r>
               <a:rPr/>
-              <a:t>Read down the last column, slowly, and let the bottom row sit before explaining anything. With 20 pure-noise columns against 2 real features, more than half of the forest’s own importance scores land on columns that are </a:t>
+              <a:t>State the definition plainly, then set up the experiment. With just income and debt ratio in the dataset, feature importance is a clean, correct answer - both real features get essentially all the credit, because there is nothing else to compete with them.</a:t>
+            </a:r>
+          </a:p>
+          <a:p>
+            <a:pPr lvl="0" indent="0" marL="0">
+              <a:buNone/>
+            </a:pPr>
+          </a:p>
+          <a:p>
+            <a:pPr lvl="0" indent="0" marL="0">
+              <a:buNone/>
+            </a:pPr>
+            <a:r>
+              <a:rPr/>
+              <a:t>Ask the room to predict what happens as you add columns of pure noise - </a:t>
             </a:r>
             <a:r>
               <a:rPr>
@@ -3633,43 +3638,21 @@
             </a:r>
             <a:r>
               <a:rPr/>
-              <a:t> noise by construction.</a:t>
-            </a:r>
-          </a:p>
-          <a:p>
-            <a:pPr lvl="0" indent="0" marL="0">
-              <a:buNone/>
-            </a:pPr>
-          </a:p>
-          <a:p>
-            <a:pPr lvl="0" indent="0" marL="0">
-              <a:buNone/>
-            </a:pPr>
-            <a:r>
-              <a:rPr/>
-              <a:t>Name the instinct this breaks, and defend it before moving on: expecting an average over hundreds of trees to wash out noise is entirely reasonable - the variance-reduction result from section 5.2 is real and measured, and it does point the same way. It reduces the variance of the </a:t>
-            </a:r>
-            <a:r>
-              <a:rPr i="1"/>
-              <a:t>prediction</a:t>
-            </a:r>
-            <a:r>
-              <a:rPr/>
-              <a:t>. It does not guarantee small importance for irrelevant columns, because the very restriction that decorrelates the trees - a random, incomplete menu at each split - is what occasionally hands a split to noise with nothing better on offer.</a:t>
-            </a:r>
-          </a:p>
-          <a:p>
-            <a:pPr lvl="0" indent="0" marL="0">
-              <a:buNone/>
-            </a:pPr>
-          </a:p>
-          <a:p>
-            <a:pPr lvl="0" indent="0" marL="0">
-              <a:buNone/>
-            </a:pPr>
-            <a:r>
-              <a:rPr/>
-              <a:t>The mechanism is exact and is in handout section 7. The practical consequence to leave them with: treat a random forest’s importances as suggestive, not definitive, when real features are few against many candidate columns.</a:t>
+              <a:t>, wired to nothing. Most will predict the noise columns get close to zero importance, because averaging over hundreds of trees should wash out anything with no signal. Do not confirm or deny yet - the next slide is the answer.</a:t>
+            </a:r>
+          </a:p>
+          <a:p>
+            <a:pPr lvl="0" indent="0" marL="0">
+              <a:buNone/>
+            </a:pPr>
+          </a:p>
+          <a:p>
+            <a:pPr lvl="0" indent="0" marL="0">
+              <a:buNone/>
+            </a:pPr>
+            <a:r>
+              <a:rPr/>
+              <a:t>Handout section 7.</a:t>
             </a:r>
           </a:p>
         </p:txBody>
@@ -3751,55 +3734,53 @@
             </a:pPr>
             <a:r>
               <a:rPr/>
-              <a:t>Run Notebooks/02_bagging_and_random_forests.ipynb. Eighteen minutes.</a:t>
-            </a:r>
-          </a:p>
-          <a:p>
-            <a:pPr lvl="0" indent="0" marL="0">
-              <a:buNone/>
-            </a:pPr>
-          </a:p>
-          <a:p>
-            <a:pPr lvl="0" indent="0" marL="0">
-              <a:buNone/>
-            </a:pPr>
-            <a:r>
-              <a:rPr/>
-              <a:t>The cell to protect is the noise-column sweep. Let them add the columns themselves and watch the importance share climb - reading the number off a slide does not land the same way as watching it happen.</a:t>
-            </a:r>
-          </a:p>
-          <a:p>
-            <a:pPr lvl="0" indent="0" marL="0">
-              <a:buNone/>
-            </a:pPr>
-          </a:p>
-          <a:p>
-            <a:pPr lvl="0" indent="0" marL="0">
-              <a:buNone/>
-            </a:pPr>
-            <a:r>
-              <a:rPr/>
-              <a:t>If time allows, have them try </a:t>
+              <a:t>Read down the last column, slowly, and let the bottom row sit before explaining anything. With 20 pure-noise columns against 2 real features, more than half of the forest’s own importance scores land on columns that are </a:t>
             </a:r>
             <a:r>
               <a:rPr>
                 <a:latin typeface="Courier"/>
               </a:rPr>
-              <a:t>max_features=None</a:t>
-            </a:r>
-            <a:r>
-              <a:rPr/>
-              <a:t> instead of the default </a:t>
-            </a:r>
-            <a:r>
-              <a:rPr>
-                <a:latin typeface="Courier"/>
-              </a:rPr>
-              <a:t>"sqrt"</a:t>
-            </a:r>
-            <a:r>
-              <a:rPr/>
-              <a:t> and predict what happens to the noise share before running it - it should fall, at the cost of the decorrelation that made the forest work in the first place.</a:t>
+              <a:t>np.random.normal</a:t>
+            </a:r>
+            <a:r>
+              <a:rPr/>
+              <a:t> noise by construction.</a:t>
+            </a:r>
+          </a:p>
+          <a:p>
+            <a:pPr lvl="0" indent="0" marL="0">
+              <a:buNone/>
+            </a:pPr>
+          </a:p>
+          <a:p>
+            <a:pPr lvl="0" indent="0" marL="0">
+              <a:buNone/>
+            </a:pPr>
+            <a:r>
+              <a:rPr/>
+              <a:t>Name the instinct this breaks, and defend it before moving on: expecting an average over hundreds of trees to wash out noise is entirely reasonable - the variance-reduction result from section 5.2 is real and measured, and it does point the same way. It reduces the variance of the </a:t>
+            </a:r>
+            <a:r>
+              <a:rPr i="1"/>
+              <a:t>prediction</a:t>
+            </a:r>
+            <a:r>
+              <a:rPr/>
+              <a:t>. It does not guarantee small importance for irrelevant columns, because the very restriction that decorrelates the trees - a random, incomplete menu at each split - is what occasionally hands a split to noise with nothing better on offer.</a:t>
+            </a:r>
+          </a:p>
+          <a:p>
+            <a:pPr lvl="0" indent="0" marL="0">
+              <a:buNone/>
+            </a:pPr>
+          </a:p>
+          <a:p>
+            <a:pPr lvl="0" indent="0" marL="0">
+              <a:buNone/>
+            </a:pPr>
+            <a:r>
+              <a:rPr/>
+              <a:t>The mechanism is exact and is in handout section 7. The practical consequence to leave them with: treat a random forest’s importances as suggestive, not definitive, when real features are few against many candidate columns.</a:t>
             </a:r>
           </a:p>
         </p:txBody>
@@ -3881,35 +3862,55 @@
             </a:pPr>
             <a:r>
               <a:rPr/>
-              <a:t>Contrast the two strategies directly, because the difference is the whole segment. Bagging and random forests are parallel: every tree is grown once, independently, and combined only at prediction time. Boosting is sequential: tree t exists specifically because of what trees 1 through t-1 still got wrong.</a:t>
-            </a:r>
-          </a:p>
-          <a:p>
-            <a:pPr lvl="0" indent="0" marL="0">
-              <a:buNone/>
-            </a:pPr>
-          </a:p>
-          <a:p>
-            <a:pPr lvl="0" indent="0" marL="0">
-              <a:buNone/>
-            </a:pPr>
-            <a:r>
-              <a:rPr/>
-              <a:t>Name α carefully and tie it to the course’s shared notation - this is the same symbol as lesson 3’s gradient descent learning rate, doing an analogous job: how large a step each correction takes.</a:t>
-            </a:r>
-          </a:p>
-          <a:p>
-            <a:pPr lvl="0" indent="0" marL="0">
-              <a:buNone/>
-            </a:pPr>
-          </a:p>
-          <a:p>
-            <a:pPr lvl="0" indent="0" marL="0">
-              <a:buNone/>
-            </a:pPr>
-            <a:r>
-              <a:rPr/>
-              <a:t>Handout section 8.</a:t>
+              <a:t>Run Notebooks/02_bagging_and_random_forests.ipynb. Eighteen minutes.</a:t>
+            </a:r>
+          </a:p>
+          <a:p>
+            <a:pPr lvl="0" indent="0" marL="0">
+              <a:buNone/>
+            </a:pPr>
+          </a:p>
+          <a:p>
+            <a:pPr lvl="0" indent="0" marL="0">
+              <a:buNone/>
+            </a:pPr>
+            <a:r>
+              <a:rPr/>
+              <a:t>The cell to protect is the noise-column sweep. Let them add the columns themselves and watch the importance share climb - reading the number off a slide does not land the same way as watching it happen.</a:t>
+            </a:r>
+          </a:p>
+          <a:p>
+            <a:pPr lvl="0" indent="0" marL="0">
+              <a:buNone/>
+            </a:pPr>
+          </a:p>
+          <a:p>
+            <a:pPr lvl="0" indent="0" marL="0">
+              <a:buNone/>
+            </a:pPr>
+            <a:r>
+              <a:rPr/>
+              <a:t>If time allows, have them try </a:t>
+            </a:r>
+            <a:r>
+              <a:rPr>
+                <a:latin typeface="Courier"/>
+              </a:rPr>
+              <a:t>max_features=None</a:t>
+            </a:r>
+            <a:r>
+              <a:rPr/>
+              <a:t> instead of the default </a:t>
+            </a:r>
+            <a:r>
+              <a:rPr>
+                <a:latin typeface="Courier"/>
+              </a:rPr>
+              <a:t>"sqrt"</a:t>
+            </a:r>
+            <a:r>
+              <a:rPr/>
+              <a:t> and predict what happens to the noise share before running it - it should fall, at the cost of the decorrelation that made the forest work in the first place.</a:t>
             </a:r>
           </a:p>
         </p:txBody>
@@ -3991,21 +3992,35 @@
             </a:pPr>
             <a:r>
               <a:rPr/>
-              <a:t>F₀ is the flat starting guess, the mean of the target. Each subsequent Fₜ is the previous ensemble plus a scaled correction from the newest tree, hₜ. Read it left to right: start flat, then keep adding small, scaled corrections.</a:t>
-            </a:r>
-          </a:p>
-          <a:p>
-            <a:pPr lvl="0" indent="0" marL="0">
-              <a:buNone/>
-            </a:pPr>
-          </a:p>
-          <a:p>
-            <a:pPr lvl="0" indent="0" marL="0">
-              <a:buNone/>
-            </a:pPr>
-            <a:r>
-              <a:rPr/>
-              <a:t>Do not derive anything further here - the next slide states what hₜ is actually fit to. Handout section 8.</a:t>
+              <a:t>Contrast the two strategies directly, because the difference is the whole segment. Bagging and random forests are parallel: every tree is grown once, independently, and combined only at prediction time. Boosting is sequential: tree t exists specifically because of what trees 1 through t-1 still got wrong.</a:t>
+            </a:r>
+          </a:p>
+          <a:p>
+            <a:pPr lvl="0" indent="0" marL="0">
+              <a:buNone/>
+            </a:pPr>
+          </a:p>
+          <a:p>
+            <a:pPr lvl="0" indent="0" marL="0">
+              <a:buNone/>
+            </a:pPr>
+            <a:r>
+              <a:rPr/>
+              <a:t>Name α carefully and tie it to the course’s shared notation - this is the same symbol as lesson 3’s gradient descent learning rate, doing an analogous job: how large a step each correction takes.</a:t>
+            </a:r>
+          </a:p>
+          <a:p>
+            <a:pPr lvl="0" indent="0" marL="0">
+              <a:buNone/>
+            </a:pPr>
+          </a:p>
+          <a:p>
+            <a:pPr lvl="0" indent="0" marL="0">
+              <a:buNone/>
+            </a:pPr>
+            <a:r>
+              <a:rPr/>
+              <a:t>Handout section 8.</a:t>
             </a:r>
           </a:p>
         </p:txBody>
@@ -4087,21 +4102,21 @@
             </a:pPr>
             <a:r>
               <a:rPr/>
-              <a:t>State the result without the calculus. For plain squared-error regression, what a new tree corrects is literally the residual - the gap between the truth and the ensemble’s current prediction. That is intuitive on its own and does not need a derivative to justify.</a:t>
-            </a:r>
-          </a:p>
-          <a:p>
-            <a:pPr lvl="0" indent="0" marL="0">
-              <a:buNone/>
-            </a:pPr>
-          </a:p>
-          <a:p>
-            <a:pPr lvl="0" indent="0" marL="0">
-              <a:buNone/>
-            </a:pPr>
-            <a:r>
-              <a:rPr/>
-              <a:t>The second bullet is the generalisation that pays off in the very next segment: the same recipe - fit a tree to the negative gradient of whatever loss you’re using - covers classification too, once the loss changes from squared error to something else. Handout section 8 has the one line of algebra connecting the two.</a:t>
+              <a:t>F₀ is the flat starting guess, the mean of the target. Each subsequent Fₜ is the previous ensemble plus a scaled correction from the newest tree, hₜ. Read it left to right: start flat, then keep adding small, scaled corrections.</a:t>
+            </a:r>
+          </a:p>
+          <a:p>
+            <a:pPr lvl="0" indent="0" marL="0">
+              <a:buNone/>
+            </a:pPr>
+          </a:p>
+          <a:p>
+            <a:pPr lvl="0" indent="0" marL="0">
+              <a:buNone/>
+            </a:pPr>
+            <a:r>
+              <a:rPr/>
+              <a:t>Do not derive anything further here - the next slide states what hₜ is actually fit to. Handout section 8.</a:t>
             </a:r>
           </a:p>
         </p:txBody>
@@ -4293,35 +4308,21 @@
             </a:pPr>
             <a:r>
               <a:rPr/>
-              <a:t>Sixty depth-2 trees, learning rate 0.3, fit to a step function plus a gentle sine wave, observed with noise. Walk through the panels in order.</a:t>
-            </a:r>
-          </a:p>
-          <a:p>
-            <a:pPr lvl="0" indent="0" marL="0">
-              <a:buNone/>
-            </a:pPr>
-          </a:p>
-          <a:p>
-            <a:pPr lvl="0" indent="0" marL="0">
-              <a:buNone/>
-            </a:pPr>
-            <a:r>
-              <a:rPr/>
-              <a:t>Say the numbers as you point: one tree barely moves the flat starting guess. Five trees sketch the coarse shape. Twenty trace the step function closely - the ensemble’s best point, on the next slide. By sixty, the ensemble is tracking individual noisy observations as well as the underlying shape.</a:t>
-            </a:r>
-          </a:p>
-          <a:p>
-            <a:pPr lvl="0" indent="0" marL="0">
-              <a:buNone/>
-            </a:pPr>
-          </a:p>
-          <a:p>
-            <a:pPr lvl="0" indent="0" marL="0">
-              <a:buNone/>
-            </a:pPr>
-            <a:r>
-              <a:rPr/>
-              <a:t>Handout section 8.</a:t>
+              <a:t>State the result without the calculus. For plain squared-error regression, what a new tree corrects is literally the residual - the gap between the truth and the ensemble’s current prediction. That is intuitive on its own and does not need a derivative to justify.</a:t>
+            </a:r>
+          </a:p>
+          <a:p>
+            <a:pPr lvl="0" indent="0" marL="0">
+              <a:buNone/>
+            </a:pPr>
+          </a:p>
+          <a:p>
+            <a:pPr lvl="0" indent="0" marL="0">
+              <a:buNone/>
+            </a:pPr>
+            <a:r>
+              <a:rPr/>
+              <a:t>The second bullet is the generalisation that pays off in the very next segment: the same recipe - fit a tree to the negative gradient of whatever loss you’re using - covers classification too, once the loss changes from squared error to something else. Handout section 8 has the one line of algebra connecting the two.</a:t>
             </a:r>
           </a:p>
         </p:txBody>
@@ -4403,29 +4404,21 @@
             </a:pPr>
             <a:r>
               <a:rPr/>
-              <a:t>Put a number on each panel of the previous slide. Twenty trees is the sweet spot; by sixty the error against the true, noise-free function has risen again, even though the ensemble is still adding trees that reduce error on the </a:t>
-            </a:r>
-            <a:r>
-              <a:rPr i="1"/>
-              <a:t>training</a:t>
-            </a:r>
-            <a:r>
-              <a:rPr/>
-              <a:t> residuals.</a:t>
-            </a:r>
-          </a:p>
-          <a:p>
-            <a:pPr lvl="0" indent="0" marL="0">
-              <a:buNone/>
-            </a:pPr>
-          </a:p>
-          <a:p>
-            <a:pPr lvl="0" indent="0" marL="0">
-              <a:buNone/>
-            </a:pPr>
-            <a:r>
-              <a:rPr/>
-              <a:t>Name what this is: the same overfitting story as the unconstrained single tree from section 3, reached by a completely different route - not one tree grown too deep, but too many shallow trees each chasing whatever residual noise is left.</a:t>
+              <a:t>Sixty depth-2 trees, learning rate 0.3, fit to a step function plus a gentle sine wave, observed with noise. Walk through the panels in order.</a:t>
+            </a:r>
+          </a:p>
+          <a:p>
+            <a:pPr lvl="0" indent="0" marL="0">
+              <a:buNone/>
+            </a:pPr>
+          </a:p>
+          <a:p>
+            <a:pPr lvl="0" indent="0" marL="0">
+              <a:buNone/>
+            </a:pPr>
+            <a:r>
+              <a:rPr/>
+              <a:t>Say the numbers as you point: one tree barely moves the flat starting guess. Five trees sketch the coarse shape. Twenty trace the step function closely - the ensemble’s best point, on the next slide. By sixty, the ensemble is tracking individual noisy observations as well as the underlying shape.</a:t>
             </a:r>
           </a:p>
           <a:p>
@@ -4521,49 +4514,43 @@
             </a:pPr>
             <a:r>
               <a:rPr/>
-              <a:t>State the result, not the chain rule behind it - the handout carries the full derivative. What matters for this course is the connection: boosting for classification fits a sequence of small trees to y - p, one correction at a time, rather than adjusting a fixed set of linear coefficients against the same quantity in one continuous descent.</a:t>
-            </a:r>
-          </a:p>
-          <a:p>
-            <a:pPr lvl="0" indent="0" marL="0">
-              <a:buNone/>
-            </a:pPr>
-          </a:p>
-          <a:p>
-            <a:pPr lvl="0" indent="0" marL="0">
-              <a:buNone/>
-            </a:pPr>
-            <a:r>
-              <a:rPr/>
-              <a:t>Ask the room to name what’s genuinely different between this and lesson 4’s logistic regression, given they’re descending against the same quantity. The answer: lesson 4 moves a fixed number of coefficients; boosting adds entirely new trees, so the model’s structure itself grows with training rather than staying fixed.</a:t>
-            </a:r>
-          </a:p>
-          <a:p>
-            <a:pPr lvl="0" indent="0" marL="0">
-              <a:buNone/>
-            </a:pPr>
-          </a:p>
-          <a:p>
-            <a:pPr lvl="0" indent="0" marL="0">
-              <a:buNone/>
-            </a:pPr>
-            <a:r>
-              <a:rPr/>
-              <a:t>Give them the first step in numbers, because it makes y - p concrete. The ensemble starts at the base rate’s log-odds, F0 = log(0.387 / 0.613) = -0.461, which predicts 0.387 for everyone. The first tree is fit to y - p: +0.613 for every applicant who defaulted, -0.387 for every one who repaid.</a:t>
-            </a:r>
-          </a:p>
-          <a:p>
-            <a:pPr lvl="0" indent="0" marL="0">
-              <a:buNone/>
-            </a:pPr>
-          </a:p>
-          <a:p>
-            <a:pPr lvl="0" indent="0" marL="0">
-              <a:buNone/>
-            </a:pPr>
-            <a:r>
-              <a:rPr/>
-              <a:t>Handout section 9.</a:t>
+              <a:t>Put a number on each panel of the previous slide. Twenty trees is the sweet spot; by sixty the error against the true, noise-free function has risen again, even though the ensemble is still adding trees that reduce error on the </a:t>
+            </a:r>
+            <a:r>
+              <a:rPr i="1"/>
+              <a:t>training</a:t>
+            </a:r>
+            <a:r>
+              <a:rPr/>
+              <a:t> residuals.</a:t>
+            </a:r>
+          </a:p>
+          <a:p>
+            <a:pPr lvl="0" indent="0" marL="0">
+              <a:buNone/>
+            </a:pPr>
+          </a:p>
+          <a:p>
+            <a:pPr lvl="0" indent="0" marL="0">
+              <a:buNone/>
+            </a:pPr>
+            <a:r>
+              <a:rPr/>
+              <a:t>Name what this is: the same overfitting story as the unconstrained single tree from section 3, reached by a completely different route - not one tree grown too deep, but too many shallow trees each chasing whatever residual noise is left.</a:t>
+            </a:r>
+          </a:p>
+          <a:p>
+            <a:pPr lvl="0" indent="0" marL="0">
+              <a:buNone/>
+            </a:pPr>
+          </a:p>
+          <a:p>
+            <a:pPr lvl="0" indent="0" marL="0">
+              <a:buNone/>
+            </a:pPr>
+            <a:r>
+              <a:rPr/>
+              <a:t>Handout section 8.</a:t>
             </a:r>
           </a:p>
         </p:txBody>
@@ -4645,29 +4632,35 @@
             </a:pPr>
             <a:r>
               <a:rPr/>
-              <a:t>Give the number and let it sit against everything shown so far this lesson: 0.902, from a method run at scikit-learn’s defaults, no tuning at all. Ask the room to recall the single tuned tree’s number from section 3 - 0.882 at depth 8 - and note that boosting has already passed it without being told anything about depth.</a:t>
-            </a:r>
-          </a:p>
-          <a:p>
-            <a:pPr lvl="0" indent="0" marL="0">
-              <a:buNone/>
-            </a:pPr>
-          </a:p>
-          <a:p>
-            <a:pPr lvl="0" indent="0" marL="0">
-              <a:buNone/>
-            </a:pPr>
-            <a:r>
-              <a:rPr/>
-              <a:t>The rest of this segment is what happens when boosting is </a:t>
-            </a:r>
-            <a:r>
-              <a:rPr i="1"/>
-              <a:t>not</a:t>
-            </a:r>
-            <a:r>
-              <a:rPr/>
-              <a:t> left at sensible defaults.</a:t>
+              <a:t>State the result, not the chain rule behind it - the handout carries the full derivative. What matters for this course is the connection: boosting for classification fits a sequence of small trees to y - p, one correction at a time, rather than adjusting a fixed set of linear coefficients against the same quantity in one continuous descent.</a:t>
+            </a:r>
+          </a:p>
+          <a:p>
+            <a:pPr lvl="0" indent="0" marL="0">
+              <a:buNone/>
+            </a:pPr>
+          </a:p>
+          <a:p>
+            <a:pPr lvl="0" indent="0" marL="0">
+              <a:buNone/>
+            </a:pPr>
+            <a:r>
+              <a:rPr/>
+              <a:t>Ask the room to name what’s genuinely different between this and lesson 4’s logistic regression, given they’re descending against the same quantity. The answer: lesson 4 moves a fixed number of coefficients; boosting adds entirely new trees, so the model’s structure itself grows with training rather than staying fixed.</a:t>
+            </a:r>
+          </a:p>
+          <a:p>
+            <a:pPr lvl="0" indent="0" marL="0">
+              <a:buNone/>
+            </a:pPr>
+          </a:p>
+          <a:p>
+            <a:pPr lvl="0" indent="0" marL="0">
+              <a:buNone/>
+            </a:pPr>
+            <a:r>
+              <a:rPr/>
+              <a:t>Give them the first step in numbers, because it makes y - p concrete. The ensemble starts at the base rate’s log-odds, F0 = log(0.387 / 0.613) = -0.461, which predicts 0.387 for everyone. The first tree is fit to y - p: +0.613 for every applicant who defaulted, -0.387 for every one who repaid.</a:t>
             </a:r>
           </a:p>
           <a:p>
@@ -4763,35 +4756,43 @@
             </a:pPr>
             <a:r>
               <a:rPr/>
-              <a:t>Unlike bagging, boosting keeps reducing training error for as long as it runs, because every new tree is built specifically to reduce what remains - including the 7% of labels that are noise by construction. There is nothing in the algorithm itself that says “stop”.</a:t>
-            </a:r>
-          </a:p>
-          <a:p>
-            <a:pPr lvl="0" indent="0" marL="0">
-              <a:buNone/>
-            </a:pPr>
-          </a:p>
-          <a:p>
-            <a:pPr lvl="0" indent="0" marL="0">
-              <a:buNone/>
-            </a:pPr>
-            <a:r>
-              <a:rPr/>
-              <a:t>Point at the peak, 30 trees, and then at 800: training accuracy has been at 1.000 since well before 200, and cross-validated accuracy has drifted down by about a point since the peak. Contrast the size of that drop with section 3’s unconstrained tree, which lost three points past its own peak - boosting’s overfitting is real but gentler.</a:t>
-            </a:r>
-          </a:p>
-          <a:p>
-            <a:pPr lvl="0" indent="0" marL="0">
-              <a:buNone/>
-            </a:pPr>
-          </a:p>
-          <a:p>
-            <a:pPr lvl="0" indent="0" marL="0">
-              <a:buNone/>
-            </a:pPr>
-            <a:r>
-              <a:rPr/>
-              <a:t>Handout section 10.</a:t>
+              <a:t>Give the number and let it sit against everything shown so far this lesson: 0.902, from a method run at scikit-learn’s defaults, no tuning at all. Ask the room to recall the single tuned tree’s number from section 3 - 0.882 at depth 8 - and note that boosting has already passed it without being told anything about depth.</a:t>
+            </a:r>
+          </a:p>
+          <a:p>
+            <a:pPr lvl="0" indent="0" marL="0">
+              <a:buNone/>
+            </a:pPr>
+          </a:p>
+          <a:p>
+            <a:pPr lvl="0" indent="0" marL="0">
+              <a:buNone/>
+            </a:pPr>
+            <a:r>
+              <a:rPr/>
+              <a:t>The rest of this segment is what happens when boosting is </a:t>
+            </a:r>
+            <a:r>
+              <a:rPr i="1"/>
+              <a:t>not</a:t>
+            </a:r>
+            <a:r>
+              <a:rPr/>
+              <a:t> left at sensible defaults.</a:t>
+            </a:r>
+          </a:p>
+          <a:p>
+            <a:pPr lvl="0" indent="0" marL="0">
+              <a:buNone/>
+            </a:pPr>
+          </a:p>
+          <a:p>
+            <a:pPr lvl="0" indent="0" marL="0">
+              <a:buNone/>
+            </a:pPr>
+            <a:r>
+              <a:rPr/>
+              <a:t>Handout section 9.</a:t>
             </a:r>
           </a:p>
         </p:txBody>
@@ -4873,21 +4874,21 @@
             </a:pPr>
             <a:r>
               <a:rPr/>
-              <a:t>Two curves again, the same shape of story as the depth curve earlier this lesson but reached by adding trees instead of depth. Training reaches 1.000 by around 200 trees and sits there. Cross-validated accuracy climbs quickly, peaks near 30 trees, and drifts down over the following 770.</a:t>
-            </a:r>
-          </a:p>
-          <a:p>
-            <a:pPr lvl="0" indent="0" marL="0">
-              <a:buNone/>
-            </a:pPr>
-          </a:p>
-          <a:p>
-            <a:pPr lvl="0" indent="0" marL="0">
-              <a:buNone/>
-            </a:pPr>
-            <a:r>
-              <a:rPr/>
-              <a:t>The point worth making explicit: the damage per added tree here is small and easy to miss on a single run - which is exactly why early stopping matters for boosting rather than being optional, even though the overfit is gentler than a single unconstrained tree’s.</a:t>
+              <a:t>Unlike bagging, boosting keeps reducing training error for as long as it runs, because every new tree is built specifically to reduce what remains - including the 7% of labels that are noise by construction. There is nothing in the algorithm itself that says “stop”.</a:t>
+            </a:r>
+          </a:p>
+          <a:p>
+            <a:pPr lvl="0" indent="0" marL="0">
+              <a:buNone/>
+            </a:pPr>
+          </a:p>
+          <a:p>
+            <a:pPr lvl="0" indent="0" marL="0">
+              <a:buNone/>
+            </a:pPr>
+            <a:r>
+              <a:rPr/>
+              <a:t>Point at the peak, 30 trees, and then at 800: training accuracy has been at 1.000 since well before 200, and cross-validated accuracy has drifted down by about a point since the peak. Contrast the size of that drop with section 3’s unconstrained tree, which lost three points past its own peak - boosting’s overfitting is real but gentler.</a:t>
             </a:r>
           </a:p>
           <a:p>
@@ -4983,29 +4984,21 @@
             </a:pPr>
             <a:r>
               <a:rPr/>
-              <a:t>Learning rate and tree count are not independent - both control how much total correction the ensemble applies, so they trade off against each other. At α = 0.02, 120 trees haven’t finished fitting the signal: training accuracy is still under 0.89. At α = 1.00, the ensemble has memorised the training set completely and given back several points of cross-validated accuracy for it.</a:t>
-            </a:r>
-          </a:p>
-          <a:p>
-            <a:pPr lvl="0" indent="0" marL="0">
-              <a:buNone/>
-            </a:pPr>
-          </a:p>
-          <a:p>
-            <a:pPr lvl="0" indent="0" marL="0">
-              <a:buNone/>
-            </a:pPr>
-            <a:r>
-              <a:rPr/>
-              <a:t>The best setting sits in between - large enough to make real progress within the tree budget, small enough that any one correction is easy to outvote if it turns out to be wrong. Ask the room which direction they’d guess is “more regularised” before revealing that it’s the </a:t>
-            </a:r>
-            <a:r>
-              <a:rPr i="1"/>
-              <a:t>small</a:t>
-            </a:r>
-            <a:r>
-              <a:rPr/>
-              <a:t> α side, the same kind of inverted-direction trap lesson 6’s C was.</a:t>
+              <a:t>Two curves again, the same shape of story as the depth curve earlier this lesson but reached by adding trees instead of depth. Training reaches 1.000 by around 200 trees and sits there. Cross-validated accuracy climbs quickly, peaks near 30 trees, and drifts down over the following 770.</a:t>
+            </a:r>
+          </a:p>
+          <a:p>
+            <a:pPr lvl="0" indent="0" marL="0">
+              <a:buNone/>
+            </a:pPr>
+          </a:p>
+          <a:p>
+            <a:pPr lvl="0" indent="0" marL="0">
+              <a:buNone/>
+            </a:pPr>
+            <a:r>
+              <a:rPr/>
+              <a:t>The point worth making explicit: the damage per added tree here is small and easy to miss on a single run - which is exactly why early stopping matters for boosting rather than being optional, even though the overfit is gentler than a single unconstrained tree’s.</a:t>
             </a:r>
           </a:p>
           <a:p>
@@ -5101,35 +5094,43 @@
             </a:pPr>
             <a:r>
               <a:rPr/>
-              <a:t>Run Notebooks/03_gradient_boosting.ipynb. Eighteen minutes.</a:t>
-            </a:r>
-          </a:p>
-          <a:p>
-            <a:pPr lvl="0" indent="0" marL="0">
-              <a:buNone/>
-            </a:pPr>
-          </a:p>
-          <a:p>
-            <a:pPr lvl="0" indent="0" marL="0">
-              <a:buNone/>
-            </a:pPr>
-            <a:r>
-              <a:rPr/>
-              <a:t>The cell to protect is the residual sweep at 1, 5, 20 and 60 trees - seeing the ensemble’s fit against the true function rise and then fall again, in real time, is the most direct experience of boosting’s overfitting available in this course.</a:t>
-            </a:r>
-          </a:p>
-          <a:p>
-            <a:pPr lvl="0" indent="0" marL="0">
-              <a:buNone/>
-            </a:pPr>
-          </a:p>
-          <a:p>
-            <a:pPr lvl="0" indent="0" marL="0">
-              <a:buNone/>
-            </a:pPr>
-            <a:r>
-              <a:rPr/>
-              <a:t>If time is short, skip the learning-rate sweep live and set it as reading - the table is in handout section 10.</a:t>
+              <a:t>Learning rate and tree count are not independent - both control how much total correction the ensemble applies, so they trade off against each other. At α = 0.02, 120 trees haven’t finished fitting the signal: training accuracy is still under 0.89. At α = 1.00, the ensemble has memorised the training set completely and given back several points of cross-validated accuracy for it.</a:t>
+            </a:r>
+          </a:p>
+          <a:p>
+            <a:pPr lvl="0" indent="0" marL="0">
+              <a:buNone/>
+            </a:pPr>
+          </a:p>
+          <a:p>
+            <a:pPr lvl="0" indent="0" marL="0">
+              <a:buNone/>
+            </a:pPr>
+            <a:r>
+              <a:rPr/>
+              <a:t>The best setting sits in between - large enough to make real progress within the tree budget, small enough that any one correction is easy to outvote if it turns out to be wrong. Ask the room which direction they’d guess is “more regularised” before revealing that it’s the </a:t>
+            </a:r>
+            <a:r>
+              <a:rPr i="1"/>
+              <a:t>small</a:t>
+            </a:r>
+            <a:r>
+              <a:rPr/>
+              <a:t> α side, the same kind of inverted-direction trap lesson 6’s C was.</a:t>
+            </a:r>
+          </a:p>
+          <a:p>
+            <a:pPr lvl="0" indent="0" marL="0">
+              <a:buNone/>
+            </a:pPr>
+          </a:p>
+          <a:p>
+            <a:pPr lvl="0" indent="0" marL="0">
+              <a:buNone/>
+            </a:pPr>
+            <a:r>
+              <a:rPr/>
+              <a:t>Handout section 10.</a:t>
             </a:r>
           </a:p>
         </p:txBody>
@@ -5211,35 +5212,35 @@
             </a:pPr>
             <a:r>
               <a:rPr/>
-              <a:t>Everything from this lesson, cross-validated the same way. Read down the column and let the pattern speak before naming it: every ensemble method - bagging, the random forest, gradient boosting - lands within about a point and a half of the others, and all three sit closer to the ceiling than either single tree.</a:t>
-            </a:r>
-          </a:p>
-          <a:p>
-            <a:pPr lvl="0" indent="0" marL="0">
-              <a:buNone/>
-            </a:pPr>
-          </a:p>
-          <a:p>
-            <a:pPr lvl="0" indent="0" marL="0">
-              <a:buNone/>
-            </a:pPr>
-            <a:r>
-              <a:rPr/>
-              <a:t>The ceiling itself: 1 minus the 7% of labels deliberately flipped. No method reaches it, and none should - a model that classified the flipped labels “correctly” would be modelling the noise, not the rule.</a:t>
-            </a:r>
-          </a:p>
-          <a:p>
-            <a:pPr lvl="0" indent="0" marL="0">
-              <a:buNone/>
-            </a:pPr>
-          </a:p>
-          <a:p>
-            <a:pPr lvl="0" indent="0" marL="0">
-              <a:buNone/>
-            </a:pPr>
-            <a:r>
-              <a:rPr/>
-              <a:t>Handout section 11.</a:t>
+              <a:t>Run Notebooks/03_gradient_boosting.ipynb. Eighteen minutes.</a:t>
+            </a:r>
+          </a:p>
+          <a:p>
+            <a:pPr lvl="0" indent="0" marL="0">
+              <a:buNone/>
+            </a:pPr>
+          </a:p>
+          <a:p>
+            <a:pPr lvl="0" indent="0" marL="0">
+              <a:buNone/>
+            </a:pPr>
+            <a:r>
+              <a:rPr/>
+              <a:t>The cell to protect is the residual sweep at 1, 5, 20 and 60 trees - seeing the ensemble’s fit against the true function rise and then fall again, in real time, is the most direct experience of boosting’s overfitting available in this course.</a:t>
+            </a:r>
+          </a:p>
+          <a:p>
+            <a:pPr lvl="0" indent="0" marL="0">
+              <a:buNone/>
+            </a:pPr>
+          </a:p>
+          <a:p>
+            <a:pPr lvl="0" indent="0" marL="0">
+              <a:buNone/>
+            </a:pPr>
+            <a:r>
+              <a:rPr/>
+              <a:t>If time is short, skip the learning-rate sweep live and set it as reading - the table is in handout section 10.</a:t>
             </a:r>
           </a:p>
         </p:txBody>
@@ -5321,21 +5322,21 @@
             </a:pPr>
             <a:r>
               <a:rPr/>
-              <a:t>Read the three findings as a set - together they are this lesson’s real content, more than any single accuracy number.</a:t>
-            </a:r>
-          </a:p>
-          <a:p>
-            <a:pPr lvl="0" indent="0" marL="0">
-              <a:buNone/>
-            </a:pPr>
-          </a:p>
-          <a:p>
-            <a:pPr lvl="0" indent="0" marL="0">
-              <a:buNone/>
-            </a:pPr>
-            <a:r>
-              <a:rPr/>
-              <a:t>The third finding is the one to land hardest, because it repeats a pattern they’ve now seen four times with four different methods: flexibility without a stopping rule is not an advantage. Ask the room to name the earlier three occurrences before you do - k = 1 in lesson 6, an unregularised fit in lesson 3, and today’s own unconstrained tree from section 3.</a:t>
+              <a:t>Everything from this lesson, cross-validated the same way. Read down the column and let the pattern speak before naming it: every ensemble method - bagging, the random forest, gradient boosting - lands within about a point and a half of the others, and all three sit closer to the ceiling than either single tree.</a:t>
+            </a:r>
+          </a:p>
+          <a:p>
+            <a:pPr lvl="0" indent="0" marL="0">
+              <a:buNone/>
+            </a:pPr>
+          </a:p>
+          <a:p>
+            <a:pPr lvl="0" indent="0" marL="0">
+              <a:buNone/>
+            </a:pPr>
+            <a:r>
+              <a:rPr/>
+              <a:t>The ceiling itself: 1 minus the 7% of labels deliberately flipped. No method reaches it, and none should - a model that classified the flipped labels “correctly” would be modelling the noise, not the rule.</a:t>
             </a:r>
           </a:p>
           <a:p>
@@ -5541,21 +5542,21 @@
             </a:pPr>
             <a:r>
               <a:rPr/>
-              <a:t>A table to photograph, exactly as lesson 6 closed with one. Work down it and attach today’s evidence to each row rather than leaving it as generic advice.</a:t>
-            </a:r>
-          </a:p>
-          <a:p>
-            <a:pPr lvl="0" indent="0" marL="0">
-              <a:buNone/>
-            </a:pPr>
-          </a:p>
-          <a:p>
-            <a:pPr lvl="0" indent="0" marL="0">
-              <a:buNone/>
-            </a:pPr>
-            <a:r>
-              <a:rPr/>
-              <a:t>The fourth row is worth a sentence of its own, tying back to the noise experiment: with few real features against many candidate columns, trust importances less as the column count grows past what the data can support.</a:t>
+              <a:t>Read the three findings as a set - together they are this lesson’s real content, more than any single accuracy number.</a:t>
+            </a:r>
+          </a:p>
+          <a:p>
+            <a:pPr lvl="0" indent="0" marL="0">
+              <a:buNone/>
+            </a:pPr>
+          </a:p>
+          <a:p>
+            <a:pPr lvl="0" indent="0" marL="0">
+              <a:buNone/>
+            </a:pPr>
+            <a:r>
+              <a:rPr/>
+              <a:t>The third finding is the one to land hardest, because it repeats a pattern they’ve now seen four times with four different methods: flexibility without a stopping rule is not an advantage. Ask the room to name the earlier three occurrences before you do - k = 1 in lesson 6, an unregularised fit in lesson 3, and today’s own unconstrained tree from section 3.</a:t>
             </a:r>
           </a:p>
           <a:p>
@@ -5651,35 +5652,35 @@
             </a:pPr>
             <a:r>
               <a:rPr/>
-              <a:t>This is the number to carry out of the room. Say it once more, slowly: with twenty pure-noise columns against two real features, more than half of a random forest’s importance mass sat on columns wired to nothing.</a:t>
-            </a:r>
-          </a:p>
-          <a:p>
-            <a:pPr lvl="0" indent="0" marL="0">
-              <a:buNone/>
-            </a:pPr>
-          </a:p>
-          <a:p>
-            <a:pPr lvl="0" indent="0" marL="0">
-              <a:buNone/>
-            </a:pPr>
-            <a:r>
-              <a:rPr/>
-              <a:t>Ask them to write it down - derivations fade, this kind of number tends not to. It is the fourth lesson this course has produced one of these: coin flip labels, borrowed test-set values, a coefficient of 365 where an unpenalised fit wanted billions, and now this.</a:t>
-            </a:r>
-          </a:p>
-          <a:p>
-            <a:pPr lvl="0" indent="0" marL="0">
-              <a:buNone/>
-            </a:pPr>
-          </a:p>
-          <a:p>
-            <a:pPr lvl="0" indent="0" marL="0">
-              <a:buNone/>
-            </a:pPr>
-            <a:r>
-              <a:rPr/>
-              <a:t>Handout section 7 has the full mechanism.</a:t>
+              <a:t>A table to photograph, exactly as lesson 6 closed with one. Work down it and attach today’s evidence to each row rather than leaving it as generic advice.</a:t>
+            </a:r>
+          </a:p>
+          <a:p>
+            <a:pPr lvl="0" indent="0" marL="0">
+              <a:buNone/>
+            </a:pPr>
+          </a:p>
+          <a:p>
+            <a:pPr lvl="0" indent="0" marL="0">
+              <a:buNone/>
+            </a:pPr>
+            <a:r>
+              <a:rPr/>
+              <a:t>The fourth row is worth a sentence of its own, tying back to the noise experiment: with few real features against many candidate columns, trust importances less as the column count grows past what the data can support.</a:t>
+            </a:r>
+          </a:p>
+          <a:p>
+            <a:pPr lvl="0" indent="0" marL="0">
+              <a:buNone/>
+            </a:pPr>
+          </a:p>
+          <a:p>
+            <a:pPr lvl="0" indent="0" marL="0">
+              <a:buNone/>
+            </a:pPr>
+            <a:r>
+              <a:rPr/>
+              <a:t>Handout section 11.</a:t>
             </a:r>
           </a:p>
         </p:txBody>
@@ -5761,49 +5762,35 @@
             </a:pPr>
             <a:r>
               <a:rPr/>
-              <a:t>Close on the same shape as lesson 6’s summary: a handful of numbers that carry the lesson’s argument without needing the mathematics behind them re-derived.</a:t>
-            </a:r>
-          </a:p>
-          <a:p>
-            <a:pPr lvl="0" indent="0" marL="0">
-              <a:buNone/>
-            </a:pPr>
-          </a:p>
-          <a:p>
-            <a:pPr lvl="0" indent="0" marL="0">
-              <a:buNone/>
-            </a:pPr>
-            <a:r>
-              <a:rPr/>
-              <a:t>If they remember one habit from today, make it this: before trusting a random forest’s importance ranking, ask how many candidate columns compete for attention at each split, because that number - not the accuracy score - is what decides how much noise gets credit it didn’t earn.</a:t>
-            </a:r>
-          </a:p>
-          <a:p>
-            <a:pPr lvl="0" indent="0" marL="0">
-              <a:buNone/>
-            </a:pPr>
-          </a:p>
-          <a:p>
-            <a:pPr lvl="0" indent="0" marL="0">
-              <a:buNone/>
-            </a:pPr>
-            <a:r>
-              <a:rPr/>
-              <a:t>Next lesson turns from labelled data to unlabelled data - a fourth question this course asks of a dataset, after “what’s the relationship”, “which class”, and “how do you know you’re not fooling yourself”: what structure is there when nobody has told you the answer at all.</a:t>
-            </a:r>
-          </a:p>
-          <a:p>
-            <a:pPr lvl="0" indent="0" marL="0">
-              <a:buNone/>
-            </a:pPr>
-          </a:p>
-          <a:p>
-            <a:pPr lvl="0" indent="0" marL="0">
-              <a:buNone/>
-            </a:pPr>
-            <a:r>
-              <a:rPr/>
-              <a:t>Handout summary and notation table.</a:t>
+              <a:t>This is the number to carry out of the room. Say it once more, slowly: with twenty pure-noise columns against two real features, more than half of a random forest’s importance mass sat on columns wired to nothing.</a:t>
+            </a:r>
+          </a:p>
+          <a:p>
+            <a:pPr lvl="0" indent="0" marL="0">
+              <a:buNone/>
+            </a:pPr>
+          </a:p>
+          <a:p>
+            <a:pPr lvl="0" indent="0" marL="0">
+              <a:buNone/>
+            </a:pPr>
+            <a:r>
+              <a:rPr/>
+              <a:t>Ask them to write it down - derivations fade, this kind of number tends not to. It is the fourth lesson this course has produced one of these: coin flip labels, borrowed test-set values, a coefficient of 365 where an unpenalised fit wanted billions, and now this.</a:t>
+            </a:r>
+          </a:p>
+          <a:p>
+            <a:pPr lvl="0" indent="0" marL="0">
+              <a:buNone/>
+            </a:pPr>
+          </a:p>
+          <a:p>
+            <a:pPr lvl="0" indent="0" marL="0">
+              <a:buNone/>
+            </a:pPr>
+            <a:r>
+              <a:rPr/>
+              <a:t>Handout section 7 has the full mechanism.</a:t>
             </a:r>
           </a:p>
         </p:txBody>
@@ -5885,35 +5872,49 @@
             </a:pPr>
             <a:r>
               <a:rPr/>
-              <a:t>Set it explicitly and say out loud when it comes back: the first ten minutes of lesson 8, Friday 20 November.</a:t>
-            </a:r>
-          </a:p>
-          <a:p>
-            <a:pPr lvl="0" indent="0" marL="0">
-              <a:buNone/>
-            </a:pPr>
-          </a:p>
-          <a:p>
-            <a:pPr lvl="0" indent="0" marL="0">
-              <a:buNone/>
-            </a:pPr>
-            <a:r>
-              <a:rPr/>
-              <a:t>Remind them of the standing rule from lesson 5: every reported number needs a cross-validated spread, and any feature-importance claim needs the check this lesson just demonstrated - a random forest’s importance ranking is a claim to be verified, not a fact to be quoted.</a:t>
-            </a:r>
-          </a:p>
-          <a:p>
-            <a:pPr lvl="0" indent="0" marL="0">
-              <a:buNone/>
-            </a:pPr>
-          </a:p>
-          <a:p>
-            <a:pPr lvl="0" indent="0" marL="0">
-              <a:buNone/>
-            </a:pPr>
-            <a:r>
-              <a:rPr/>
-              <a:t>Next week: unsupervised learning, the first lesson this course asks of data with no labels at all.</a:t>
+              <a:t>Close on the same shape as lesson 6’s summary: a handful of numbers that carry the lesson’s argument without needing the mathematics behind them re-derived.</a:t>
+            </a:r>
+          </a:p>
+          <a:p>
+            <a:pPr lvl="0" indent="0" marL="0">
+              <a:buNone/>
+            </a:pPr>
+          </a:p>
+          <a:p>
+            <a:pPr lvl="0" indent="0" marL="0">
+              <a:buNone/>
+            </a:pPr>
+            <a:r>
+              <a:rPr/>
+              <a:t>If they remember one habit from today, make it this: before trusting a random forest’s importance ranking, ask how many candidate columns compete for attention at each split, because that number - not the accuracy score - is what decides how much noise gets credit it didn’t earn.</a:t>
+            </a:r>
+          </a:p>
+          <a:p>
+            <a:pPr lvl="0" indent="0" marL="0">
+              <a:buNone/>
+            </a:pPr>
+          </a:p>
+          <a:p>
+            <a:pPr lvl="0" indent="0" marL="0">
+              <a:buNone/>
+            </a:pPr>
+            <a:r>
+              <a:rPr/>
+              <a:t>Next lesson turns from labelled data to unlabelled data - a fourth question this course asks of a dataset, after “what’s the relationship”, “which class”, and “how do you know you’re not fooling yourself”: what structure is there when nobody has told you the answer at all.</a:t>
+            </a:r>
+          </a:p>
+          <a:p>
+            <a:pPr lvl="0" indent="0" marL="0">
+              <a:buNone/>
+            </a:pPr>
+          </a:p>
+          <a:p>
+            <a:pPr lvl="0" indent="0" marL="0">
+              <a:buNone/>
+            </a:pPr>
+            <a:r>
+              <a:rPr/>
+              <a:t>Handout summary and notation table.</a:t>
             </a:r>
           </a:p>
         </p:txBody>
@@ -5936,6 +5937,116 @@
             <a:fld id="{18BDFEC3-8487-43E8-A154-7C12CBC1FFF2}" type="slidenum">
               <a:rPr lang="en-US"/>
               <a:t>54</a:t>
+            </a:fld>
+            <a:endParaRPr lang="en-US"/>
+          </a:p>
+        </p:txBody>
+      </p:sp>
+    </p:spTree>
+  </p:cSld>
+</p:notes>
+</file>
+
+<file path=ppt/notesSlides/notesSlide54.xml><?xml version="1.0" encoding="utf-8"?>
+<p:notes xmlns:a="http://schemas.openxmlformats.org/drawingml/2006/main" xmlns:r="http://schemas.openxmlformats.org/officeDocument/2006/relationships" xmlns:p="http://schemas.openxmlformats.org/presentationml/2006/main">
+  <p:cSld>
+    <p:spTree>
+      <p:nvGrpSpPr>
+        <p:cNvPr id="1" name=""/>
+        <p:cNvGrpSpPr/>
+        <p:nvPr/>
+      </p:nvGrpSpPr>
+      <p:grpSpPr>
+        <a:xfrm>
+          <a:off x="0" y="0"/>
+          <a:ext cx="0" cy="0"/>
+          <a:chOff x="0" y="0"/>
+          <a:chExt cx="0" cy="0"/>
+        </a:xfrm>
+      </p:grpSpPr>
+      <p:sp>
+        <p:nvSpPr>
+          <p:cNvPr id="2" name="Slide Image Placeholder 1"/>
+          <p:cNvSpPr>
+            <a:spLocks noGrp="1" noRot="1" noChangeAspect="1"/>
+          </p:cNvSpPr>
+          <p:nvPr>
+            <p:ph type="sldImg"/>
+          </p:nvPr>
+        </p:nvSpPr>
+        <p:spPr/>
+      </p:sp>
+      <p:sp>
+        <p:nvSpPr>
+          <p:cNvPr id="3" name="Notes Placeholder 2"/>
+          <p:cNvSpPr>
+            <a:spLocks noGrp="1"/>
+          </p:cNvSpPr>
+          <p:nvPr>
+            <p:ph type="body" idx="1"/>
+          </p:nvPr>
+        </p:nvSpPr>
+        <p:spPr/>
+        <p:txBody>
+          <a:bodyPr/>
+          <a:lstStyle/>
+          <a:p>
+            <a:pPr lvl="0" indent="0" marL="0">
+              <a:buNone/>
+            </a:pPr>
+            <a:r>
+              <a:rPr/>
+              <a:t>Set it explicitly and say out loud when it comes back: the first ten minutes of lesson 8, Friday 20 November.</a:t>
+            </a:r>
+          </a:p>
+          <a:p>
+            <a:pPr lvl="0" indent="0" marL="0">
+              <a:buNone/>
+            </a:pPr>
+          </a:p>
+          <a:p>
+            <a:pPr lvl="0" indent="0" marL="0">
+              <a:buNone/>
+            </a:pPr>
+            <a:r>
+              <a:rPr/>
+              <a:t>Remind them of the standing rule from lesson 5: every reported number needs a cross-validated spread, and any feature-importance claim needs the check this lesson just demonstrated - a random forest’s importance ranking is a claim to be verified, not a fact to be quoted.</a:t>
+            </a:r>
+          </a:p>
+          <a:p>
+            <a:pPr lvl="0" indent="0" marL="0">
+              <a:buNone/>
+            </a:pPr>
+          </a:p>
+          <a:p>
+            <a:pPr lvl="0" indent="0" marL="0">
+              <a:buNone/>
+            </a:pPr>
+            <a:r>
+              <a:rPr/>
+              <a:t>Next week: unsupervised learning, the first lesson this course asks of data with no labels at all.</a:t>
+            </a:r>
+          </a:p>
+        </p:txBody>
+      </p:sp>
+      <p:sp>
+        <p:nvSpPr>
+          <p:cNvPr id="4" name="Slide Number Placeholder 3"/>
+          <p:cNvSpPr>
+            <a:spLocks noGrp="1"/>
+          </p:cNvSpPr>
+          <p:nvPr>
+            <p:ph type="sldNum" sz="quarter" idx="10"/>
+          </p:nvPr>
+        </p:nvSpPr>
+        <p:spPr/>
+        <p:txBody>
+          <a:bodyPr/>
+          <a:lstStyle/>
+          <a:p>
+            <a:fld id="{18BDFEC3-8487-43E8-A154-7C12CBC1FFF2}" type="slidenum">
+              <a:rPr lang="en-US"/>
+              <a:t>55</a:t>
             </a:fld>
             <a:endParaRPr lang="en-US"/>
           </a:p>
@@ -6105,35 +6216,63 @@
             </a:pPr>
             <a:r>
               <a:rPr/>
-              <a:t>Before any symbol appears, ask the room what “pure” should mean for a group of examples. Most will land close to the right answer on their own: a group where everyone shares a label needs nothing further, and a fifty-fifty split is as bad as it gets.</a:t>
-            </a:r>
-          </a:p>
-          <a:p>
-            <a:pPr lvl="0" indent="0" marL="0">
-              <a:buNone/>
-            </a:pPr>
-          </a:p>
-          <a:p>
-            <a:pPr lvl="0" indent="0" marL="0">
-              <a:buNone/>
-            </a:pPr>
-            <a:r>
-              <a:rPr/>
-              <a:t>Say plainly that the standard choice for classification is called the Gini impurity, and that it is not a probability of misclassification - it is the probability that two examples drawn at random with replacement from the group, and labelled according to the group’s own class frequencies, would disagree.</a:t>
-            </a:r>
-          </a:p>
-          <a:p>
-            <a:pPr lvl="0" indent="0" marL="0">
-              <a:buNone/>
-            </a:pPr>
-          </a:p>
-          <a:p>
-            <a:pPr lvl="0" indent="0" marL="0">
-              <a:buNone/>
-            </a:pPr>
-            <a:r>
-              <a:rPr/>
-              <a:t>Handout section 2.2.</a:t>
+              <a:t>The previous slide’s sentence, run three times on the loan data. Each column is one more round; on top the cuts in the plane, the new ones in gold, and underneath the tree that asks the same questions. Point at the two halves of each column in turn: every gold line on top is a gold box underneath.</a:t>
+            </a:r>
+          </a:p>
+          <a:p>
+            <a:pPr lvl="0" indent="0" marL="0">
+              <a:buNone/>
+            </a:pPr>
+          </a:p>
+          <a:p>
+            <a:pPr lvl="0" indent="0" marL="0">
+              <a:buNone/>
+            </a:pPr>
+            <a:r>
+              <a:rPr/>
+              <a:t>Step 1: of every possible single question, debt ratio at or below 0.82 is the one that leaves the two groups purest - 971 applicants at 26% default against 229 at 94%. Do not say why it is the best yet; the next slides give the number that ranks it.</a:t>
+            </a:r>
+          </a:p>
+          <a:p>
+            <a:pPr lvl="0" indent="0" marL="0">
+              <a:buNone/>
+            </a:pPr>
+          </a:p>
+          <a:p>
+            <a:pPr lvl="0" indent="0" marL="0">
+              <a:buNone/>
+            </a:pPr>
+            <a:r>
+              <a:rPr/>
+              <a:t>Step 2 is the word “recursive” made visible. The tree now asks a question inside each group, and the two questions are different - income on the left, debt again on the right - because each group is searched on its own, without regard to the other. That is “independently” in the sentence.</a:t>
+            </a:r>
+          </a:p>
+          <a:p>
+            <a:pPr lvl="0" indent="0" marL="0">
+              <a:buNone/>
+            </a:pPr>
+          </a:p>
+          <a:p>
+            <a:pPr lvl="0" indent="0" marL="0">
+              <a:buNone/>
+            </a:pPr>
+            <a:r>
+              <a:rPr/>
+              <a:t>Step 3 is where to slow down, because it shows greed. On the right, one split sets aside a single applicant from 68 others; another divides 160 applicants into 90% and 97% default - both still predicted “default”, so the cut changes no decision at all. Each was the best available move at that node; the tree has no way to ask whether it was worth making. And neither interior island has appeared yet: three rounds were spent on the easy strips. Hold that thought - it is the “what greedy misses” slide in ten minutes.</a:t>
+            </a:r>
+          </a:p>
+          <a:p>
+            <a:pPr lvl="0" indent="0" marL="0">
+              <a:buNone/>
+            </a:pPr>
+          </a:p>
+          <a:p>
+            <a:pPr lvl="0" indent="0" marL="0">
+              <a:buNone/>
+            </a:pPr>
+            <a:r>
+              <a:rPr/>
+              <a:t>The printout of every node is in notebook 1, section 2. Handout section 2.1.</a:t>
             </a:r>
           </a:p>
         </p:txBody>
@@ -6215,43 +6354,35 @@
             </a:pPr>
             <a:r>
               <a:rPr/>
-              <a:t>Each p in the sum is the fraction of the group belonging to one class, across C classes. Do not derive anything here - state what it does: subtract, from one, the chance two examples share a class if drawn independently from the group’s own frequencies. A pure group scores zero; a maximally mixed one scores as high as the formula allows.</a:t>
-            </a:r>
-          </a:p>
-          <a:p>
-            <a:pPr lvl="0" indent="0" marL="0">
-              <a:buNone/>
-            </a:pPr>
-          </a:p>
-          <a:p>
-            <a:pPr lvl="0" indent="0" marL="0">
-              <a:buNone/>
-            </a:pPr>
-            <a:r>
-              <a:rPr/>
-              <a:t>Give them a moment to notice the formula asks nothing about </a:t>
-            </a:r>
-            <a:r>
-              <a:rPr i="1"/>
-              <a:t>which</a:t>
-            </a:r>
-            <a:r>
-              <a:rPr/>
-              <a:t> class is common, only about how mixed the group is - that symmetry matters later, when a split is chosen purely by how much it reduces this number.</a:t>
-            </a:r>
-          </a:p>
-          <a:p>
-            <a:pPr lvl="0" indent="0" marL="0">
-              <a:buNone/>
-            </a:pPr>
-          </a:p>
-          <a:p>
-            <a:pPr lvl="0" indent="0" marL="0">
-              <a:buNone/>
-            </a:pPr>
-            <a:r>
-              <a:rPr/>
-              <a:t>Handout section 2.2 has the full definition.</a:t>
+              <a:t>Before any symbol appears, ask the room what “pure” should mean for a group of examples. Most will land close to the right answer on their own: a group where everyone shares a label needs nothing further, and a fifty-fifty split is as bad as it gets.</a:t>
+            </a:r>
+          </a:p>
+          <a:p>
+            <a:pPr lvl="0" indent="0" marL="0">
+              <a:buNone/>
+            </a:pPr>
+          </a:p>
+          <a:p>
+            <a:pPr lvl="0" indent="0" marL="0">
+              <a:buNone/>
+            </a:pPr>
+            <a:r>
+              <a:rPr/>
+              <a:t>Say plainly that the standard choice for classification is called the Gini impurity, and that it is not a probability of misclassification - it is the probability that two examples drawn at random with replacement from the group, and labelled according to the group’s own class frequencies, would disagree.</a:t>
+            </a:r>
+          </a:p>
+          <a:p>
+            <a:pPr lvl="0" indent="0" marL="0">
+              <a:buNone/>
+            </a:pPr>
+          </a:p>
+          <a:p>
+            <a:pPr lvl="0" indent="0" marL="0">
+              <a:buNone/>
+            </a:pPr>
+            <a:r>
+              <a:rPr/>
+              <a:t>Handout section 2.2.</a:t>
             </a:r>
           </a:p>
         </p:txBody>
@@ -6333,35 +6464,43 @@
             </a:pPr>
             <a:r>
               <a:rPr/>
-              <a:t>Two classes is the case that matters for this dataset, and the formula collapses to something with an obvious shape: zero at the extremes, a single peak at fifty-fifty. Ask the room to sanity-check the peak location before you confirm it - it is the point where a random guess is least useful.</a:t>
-            </a:r>
-          </a:p>
-          <a:p>
-            <a:pPr lvl="0" indent="0" marL="0">
-              <a:buNone/>
-            </a:pPr>
-          </a:p>
-          <a:p>
-            <a:pPr lvl="0" indent="0" marL="0">
-              <a:buNone/>
-            </a:pPr>
-            <a:r>
-              <a:rPr/>
-              <a:t>Give them the concrete number: on the full loan dataset, 38.7% defaulted, so p = 0.387 and G(parent) = 2 × 0.387 × 0.613 = 0.474. That is the impurity every candidate root split is measured against.</a:t>
-            </a:r>
-          </a:p>
-          <a:p>
-            <a:pPr lvl="0" indent="0" marL="0">
-              <a:buNone/>
-            </a:pPr>
-          </a:p>
-          <a:p>
-            <a:pPr lvl="0" indent="0" marL="0">
-              <a:buNone/>
-            </a:pPr>
-            <a:r>
-              <a:rPr/>
-              <a:t>Handout section 2.2.</a:t>
+              <a:t>Each p in the sum is the fraction of the group belonging to one class, across C classes. Do not derive anything here - state what it does: subtract, from one, the chance two examples share a class if drawn independently from the group’s own frequencies. A pure group scores zero; a maximally mixed one scores as high as the formula allows.</a:t>
+            </a:r>
+          </a:p>
+          <a:p>
+            <a:pPr lvl="0" indent="0" marL="0">
+              <a:buNone/>
+            </a:pPr>
+          </a:p>
+          <a:p>
+            <a:pPr lvl="0" indent="0" marL="0">
+              <a:buNone/>
+            </a:pPr>
+            <a:r>
+              <a:rPr/>
+              <a:t>Give them a moment to notice the formula asks nothing about </a:t>
+            </a:r>
+            <a:r>
+              <a:rPr i="1"/>
+              <a:t>which</a:t>
+            </a:r>
+            <a:r>
+              <a:rPr/>
+              <a:t> class is common, only about how mixed the group is - that symmetry matters later, when a split is chosen purely by how much it reduces this number.</a:t>
+            </a:r>
+          </a:p>
+          <a:p>
+            <a:pPr lvl="0" indent="0" marL="0">
+              <a:buNone/>
+            </a:pPr>
+          </a:p>
+          <a:p>
+            <a:pPr lvl="0" indent="0" marL="0">
+              <a:buNone/>
+            </a:pPr>
+            <a:r>
+              <a:rPr/>
+              <a:t>Handout section 2.2 has the full definition.</a:t>
             </a:r>
           </a:p>
         </p:txBody>
@@ -9552,68 +9691,41 @@
             </a:pPr>
             <a:r>
               <a:rPr/>
-              <a:t>For two classes, one number</a:t>
-            </a:r>
-          </a:p>
-        </p:txBody>
-      </p:sp>
-      <p:sp>
-        <p:nvSpPr>
-          <p:cNvPr id="3" name="Content Placeholder 2"/>
-          <p:cNvSpPr>
-            <a:spLocks noGrp="1"/>
-          </p:cNvSpPr>
-          <p:nvPr>
-            <p:ph idx="1"/>
-          </p:nvPr>
-        </p:nvSpPr>
-        <p:spPr>
+              <a:t>Gini impurity</a:t>
+            </a:r>
+          </a:p>
+        </p:txBody>
+      </p:sp>
+      <p:pic>
+        <p:nvPicPr>
+          <p:cNvPr descr="eq_f823b12014.png" id="0" name="Picture 1"/>
+          <p:cNvPicPr>
+            <a:picLocks noGrp="1" noChangeAspect="1"/>
+          </p:cNvPicPr>
+          <p:nvPr/>
+        </p:nvPicPr>
+        <p:blipFill>
+          <a:blip r:embed="rId3"/>
+          <a:stretch>
+            <a:fillRect/>
+          </a:stretch>
+        </p:blipFill>
+        <p:spPr bwMode="auto">
           <a:xfrm>
-            <a:off x="457200" y="1200151"/>
-            <a:ext cx="8229600" cy="3394472"/>
+            <a:off x="2162991" y="1815411"/>
+            <a:ext cx="4818018" cy="2061556"/>
           </a:xfrm>
+          <a:prstGeom prst="rect">
+            <a:avLst/>
+          </a:prstGeom>
+          <a:noFill/>
+          <a:ln w="9525">
+            <a:noFill/>
+            <a:headEnd/>
+            <a:tailEnd/>
+          </a:ln>
         </p:spPr>
-        <p:txBody>
-          <a:bodyPr/>
-          <a:lstStyle/>
-          <a:p>
-            <a:pPr lvl="0"/>
-            <a:r>
-              <a:rPr/>
-              <a:t>G = 2p(1-p), where p is the fraction of one class</a:t>
-            </a:r>
-          </a:p>
-          <a:p>
-            <a:pPr lvl="0"/>
-            <a:r>
-              <a:rPr b="1"/>
-              <a:t>0</a:t>
-            </a:r>
-            <a:r>
-              <a:rPr/>
-              <a:t> when the group is pure (p = 0 or p = 1)</a:t>
-            </a:r>
-          </a:p>
-          <a:p>
-            <a:pPr lvl="0"/>
-            <a:r>
-              <a:rPr b="1"/>
-              <a:t>0.5</a:t>
-            </a:r>
-            <a:r>
-              <a:rPr/>
-              <a:t>, the maximum, at p = 0.5</a:t>
-            </a:r>
-          </a:p>
-          <a:p>
-            <a:pPr lvl="0"/>
-            <a:r>
-              <a:rPr/>
-              <a:t>On the full 1,200 applicants, p = 0.387 gives G = 0.474</a:t>
-            </a:r>
-          </a:p>
-        </p:txBody>
-      </p:sp>
+      </p:pic>
     </p:spTree>
   </p:cSld>
 </p:sld>
@@ -9661,7 +9773,7 @@
             </a:pPr>
             <a:r>
               <a:rPr/>
-              <a:t>The gain a split buys</a:t>
+              <a:t>For two classes, one number</a:t>
             </a:r>
           </a:p>
         </p:txBody>
@@ -9689,29 +9801,36 @@
             <a:pPr lvl="0"/>
             <a:r>
               <a:rPr/>
-              <a:t>A candidate split divides a group into a left and a right child</a:t>
+              <a:t>G = 2p(1-p), where p is the fraction of one class</a:t>
             </a:r>
           </a:p>
           <a:p>
             <a:pPr lvl="0"/>
             <a:r>
-              <a:rPr/>
-              <a:t>It is worth taking if the children are, </a:t>
-            </a:r>
-            <a:r>
               <a:rPr b="1"/>
-              <a:t>on average, purer</a:t>
-            </a:r>
-            <a:r>
-              <a:rPr/>
-              <a:t> than the parent was</a:t>
+              <a:t>0</a:t>
+            </a:r>
+            <a:r>
+              <a:rPr/>
+              <a:t> when the group is pure (p = 0 or p = 1)</a:t>
             </a:r>
           </a:p>
           <a:p>
             <a:pPr lvl="0"/>
             <a:r>
-              <a:rPr/>
-              <a:t>“On average” is weighted by how many examples land in each child: a split that purifies nine points and dumps one troublemaker into its own leaf is not free</a:t>
+              <a:rPr b="1"/>
+              <a:t>0.5</a:t>
+            </a:r>
+            <a:r>
+              <a:rPr/>
+              <a:t>, the maximum, at p = 0.5</a:t>
+            </a:r>
+          </a:p>
+          <a:p>
+            <a:pPr lvl="0"/>
+            <a:r>
+              <a:rPr/>
+              <a:t>On the full 1,200 applicants, p = 0.387 gives G = 0.474</a:t>
             </a:r>
           </a:p>
         </p:txBody>
@@ -9722,6 +9841,108 @@
 </file>
 
 <file path=ppt/slides/slide12.xml><?xml version="1.0" encoding="utf-8"?>
+<p:sld xmlns:a="http://schemas.openxmlformats.org/drawingml/2006/main" xmlns:r="http://schemas.openxmlformats.org/officeDocument/2006/relationships" xmlns:p="http://schemas.openxmlformats.org/presentationml/2006/main">
+  <p:cSld>
+    <p:spTree>
+      <p:nvGrpSpPr>
+        <p:cNvPr id="1" name=""/>
+        <p:cNvGrpSpPr/>
+        <p:nvPr/>
+      </p:nvGrpSpPr>
+      <p:grpSpPr>
+        <a:xfrm>
+          <a:off x="0" y="0"/>
+          <a:ext cx="0" cy="0"/>
+          <a:chOff x="0" y="0"/>
+          <a:chExt cx="0" cy="0"/>
+        </a:xfrm>
+      </p:grpSpPr>
+      <p:sp>
+        <p:nvSpPr>
+          <p:cNvPr id="2" name="Title 1"/>
+          <p:cNvSpPr>
+            <a:spLocks noGrp="1"/>
+          </p:cNvSpPr>
+          <p:nvPr>
+            <p:ph type="title"/>
+          </p:nvPr>
+        </p:nvSpPr>
+        <p:spPr>
+          <a:xfrm>
+            <a:off x="457200" y="205979"/>
+            <a:ext cx="8229600" cy="857250"/>
+          </a:xfrm>
+        </p:spPr>
+        <p:txBody>
+          <a:bodyPr/>
+          <a:lstStyle/>
+          <a:p>
+            <a:pPr lvl="0" indent="0" marL="0">
+              <a:buNone/>
+            </a:pPr>
+            <a:r>
+              <a:rPr/>
+              <a:t>The gain a split buys</a:t>
+            </a:r>
+          </a:p>
+        </p:txBody>
+      </p:sp>
+      <p:sp>
+        <p:nvSpPr>
+          <p:cNvPr id="3" name="Content Placeholder 2"/>
+          <p:cNvSpPr>
+            <a:spLocks noGrp="1"/>
+          </p:cNvSpPr>
+          <p:nvPr>
+            <p:ph idx="1"/>
+          </p:nvPr>
+        </p:nvSpPr>
+        <p:spPr>
+          <a:xfrm>
+            <a:off x="457200" y="1200151"/>
+            <a:ext cx="8229600" cy="3394472"/>
+          </a:xfrm>
+        </p:spPr>
+        <p:txBody>
+          <a:bodyPr/>
+          <a:lstStyle/>
+          <a:p>
+            <a:pPr lvl="0"/>
+            <a:r>
+              <a:rPr/>
+              <a:t>A candidate split divides a group into a left and a right child</a:t>
+            </a:r>
+          </a:p>
+          <a:p>
+            <a:pPr lvl="0"/>
+            <a:r>
+              <a:rPr/>
+              <a:t>It is worth taking if the children are, </a:t>
+            </a:r>
+            <a:r>
+              <a:rPr b="1"/>
+              <a:t>on average, purer</a:t>
+            </a:r>
+            <a:r>
+              <a:rPr/>
+              <a:t> than the parent was</a:t>
+            </a:r>
+          </a:p>
+          <a:p>
+            <a:pPr lvl="0"/>
+            <a:r>
+              <a:rPr/>
+              <a:t>“On average” is weighted by how many examples land in each child: a split that purifies nine points and dumps one troublemaker into its own leaf is not free</a:t>
+            </a:r>
+          </a:p>
+        </p:txBody>
+      </p:sp>
+    </p:spTree>
+  </p:cSld>
+</p:sld>
+</file>
+
+<file path=ppt/slides/slide13.xml><?xml version="1.0" encoding="utf-8"?>
 <p:sld xmlns:a="http://schemas.openxmlformats.org/drawingml/2006/main" xmlns:r="http://schemas.openxmlformats.org/officeDocument/2006/relationships" xmlns:p="http://schemas.openxmlformats.org/presentationml/2006/main">
   <p:cSld>
     <p:spTree>
@@ -9803,127 +10024,6 @@
 </p:sld>
 </file>
 
-<file path=ppt/slides/slide13.xml><?xml version="1.0" encoding="utf-8"?>
-<p:sld xmlns:a="http://schemas.openxmlformats.org/drawingml/2006/main" xmlns:r="http://schemas.openxmlformats.org/officeDocument/2006/relationships" xmlns:p="http://schemas.openxmlformats.org/presentationml/2006/main">
-  <p:cSld>
-    <p:spTree>
-      <p:nvGrpSpPr>
-        <p:cNvPr id="1" name=""/>
-        <p:cNvGrpSpPr/>
-        <p:nvPr/>
-      </p:nvGrpSpPr>
-      <p:grpSpPr>
-        <a:xfrm>
-          <a:off x="0" y="0"/>
-          <a:ext cx="0" cy="0"/>
-          <a:chOff x="0" y="0"/>
-          <a:chExt cx="0" cy="0"/>
-        </a:xfrm>
-      </p:grpSpPr>
-      <p:sp>
-        <p:nvSpPr>
-          <p:cNvPr id="2" name="Title 1"/>
-          <p:cNvSpPr>
-            <a:spLocks noGrp="1"/>
-          </p:cNvSpPr>
-          <p:nvPr>
-            <p:ph type="title"/>
-          </p:nvPr>
-        </p:nvSpPr>
-        <p:spPr>
-          <a:xfrm>
-            <a:off x="457200" y="205979"/>
-            <a:ext cx="8229600" cy="857250"/>
-          </a:xfrm>
-        </p:spPr>
-        <p:txBody>
-          <a:bodyPr/>
-          <a:lstStyle/>
-          <a:p>
-            <a:pPr lvl="0" indent="0" marL="0">
-              <a:buNone/>
-            </a:pPr>
-            <a:r>
-              <a:rPr/>
-              <a:t>Scanning for the best split</a:t>
-            </a:r>
-          </a:p>
-        </p:txBody>
-      </p:sp>
-      <p:sp>
-        <p:nvSpPr>
-          <p:cNvPr id="3" name="Content Placeholder 2"/>
-          <p:cNvSpPr>
-            <a:spLocks noGrp="1"/>
-          </p:cNvSpPr>
-          <p:nvPr>
-            <p:ph idx="1"/>
-          </p:nvPr>
-        </p:nvSpPr>
-        <p:spPr>
-          <a:xfrm>
-            <a:off x="457200" y="1200151"/>
-            <a:ext cx="8229600" cy="3394472"/>
-          </a:xfrm>
-        </p:spPr>
-        <p:txBody>
-          <a:bodyPr/>
-          <a:lstStyle/>
-          <a:p>
-            <a:pPr lvl="0"/>
-            <a:r>
-              <a:rPr/>
-              <a:t>For a continuous feature, scan </a:t>
-            </a:r>
-            <a:r>
-              <a:rPr b="1"/>
-              <a:t>every midpoint</a:t>
-            </a:r>
-            <a:r>
-              <a:rPr/>
-              <a:t> between adjacent sorted values as a candidate threshold</a:t>
-            </a:r>
-          </a:p>
-          <a:p>
-            <a:pPr lvl="0"/>
-            <a:r>
-              <a:rPr/>
-              <a:t>Do this for </a:t>
-            </a:r>
-            <a:r>
-              <a:rPr b="1"/>
-              <a:t>every feature</a:t>
-            </a:r>
-            <a:r>
-              <a:rPr/>
-              <a:t>; keep the best pair</a:t>
-            </a:r>
-          </a:p>
-          <a:p>
-            <a:pPr lvl="0"/>
-            <a:r>
-              <a:rPr/>
-              <a:t>Repeat the search inside each child</a:t>
-            </a:r>
-          </a:p>
-          <a:p>
-            <a:pPr lvl="0"/>
-            <a:r>
-              <a:rPr b="1"/>
-              <a:t>Greedy</a:t>
-            </a:r>
-            <a:r>
-              <a:rPr/>
-              <a:t>: ΔG is judged one split at a time, never jointly</a:t>
-            </a:r>
-          </a:p>
-        </p:txBody>
-      </p:sp>
-    </p:spTree>
-  </p:cSld>
-</p:sld>
-</file>
-
 <file path=ppt/slides/slide14.xml><?xml version="1.0" encoding="utf-8"?>
 <p:sld xmlns:a="http://schemas.openxmlformats.org/drawingml/2006/main" xmlns:r="http://schemas.openxmlformats.org/officeDocument/2006/relationships" xmlns:p="http://schemas.openxmlformats.org/presentationml/2006/main">
   <p:cSld>
@@ -9966,7 +10066,7 @@
             </a:pPr>
             <a:r>
               <a:rPr/>
-              <a:t>Worked example: the root split</a:t>
+              <a:t>Scanning for the best split</a:t>
             </a:r>
           </a:p>
         </p:txBody>
@@ -9994,54 +10094,48 @@
             <a:pPr lvl="0"/>
             <a:r>
               <a:rPr/>
-              <a:t>p = 0.387 defaulted, so the parent group’s impurity is </a:t>
+              <a:t>For a continuous feature, scan </a:t>
             </a:r>
             <a:r>
               <a:rPr b="1"/>
-              <a:t>0.474</a:t>
+              <a:t>every midpoint</a:t>
+            </a:r>
+            <a:r>
+              <a:rPr/>
+              <a:t> between adjacent sorted values as a candidate threshold</a:t>
             </a:r>
           </a:p>
           <a:p>
             <a:pPr lvl="0"/>
             <a:r>
               <a:rPr/>
-              <a:t>Exhaustive search finds </a:t>
-            </a:r>
-            <a:r>
-              <a:rPr>
-                <a:latin typeface="Courier"/>
-              </a:rPr>
-              <a:t>debt_ratio &lt;= 0.82</a:t>
-            </a:r>
-            <a:r>
-              <a:rPr/>
-              <a:t> as the best root split</a:t>
+              <a:t>Do this for </a:t>
+            </a:r>
+            <a:r>
+              <a:rPr b="1"/>
+              <a:t>every feature</a:t>
+            </a:r>
+            <a:r>
+              <a:rPr/>
+              <a:t>; keep the best pair</a:t>
             </a:r>
           </a:p>
           <a:p>
             <a:pPr lvl="0"/>
             <a:r>
               <a:rPr/>
-              <a:t>Recognisably the </a:t>
-            </a:r>
+              <a:t>Repeat the search inside each child</a:t>
+            </a:r>
+          </a:p>
+          <a:p>
+            <a:pPr lvl="0"/>
             <a:r>
               <a:rPr b="1"/>
-              <a:t>debt ceiling</a:t>
-            </a:r>
-            <a:r>
-              <a:rPr/>
-              <a:t> the data was built with</a:t>
-            </a:r>
-          </a:p>
-          <a:p>
-            <a:pPr lvl="0"/>
-            <a:r>
-              <a:rPr/>
-              <a:t>971 applicants left (0.256 defaulted), 229 right (0.939): gain </a:t>
-            </a:r>
-            <a:r>
-              <a:rPr b="1"/>
-              <a:t>0.144</a:t>
+              <a:t>Greedy</a:t>
+            </a:r>
+            <a:r>
+              <a:rPr/>
+              <a:t>: ΔG is judged one split at a time, never jointly</a:t>
             </a:r>
           </a:p>
         </p:txBody>
@@ -10052,6 +10146,133 @@
 </file>
 
 <file path=ppt/slides/slide15.xml><?xml version="1.0" encoding="utf-8"?>
+<p:sld xmlns:a="http://schemas.openxmlformats.org/drawingml/2006/main" xmlns:r="http://schemas.openxmlformats.org/officeDocument/2006/relationships" xmlns:p="http://schemas.openxmlformats.org/presentationml/2006/main">
+  <p:cSld>
+    <p:spTree>
+      <p:nvGrpSpPr>
+        <p:cNvPr id="1" name=""/>
+        <p:cNvGrpSpPr/>
+        <p:nvPr/>
+      </p:nvGrpSpPr>
+      <p:grpSpPr>
+        <a:xfrm>
+          <a:off x="0" y="0"/>
+          <a:ext cx="0" cy="0"/>
+          <a:chOff x="0" y="0"/>
+          <a:chExt cx="0" cy="0"/>
+        </a:xfrm>
+      </p:grpSpPr>
+      <p:sp>
+        <p:nvSpPr>
+          <p:cNvPr id="2" name="Title 1"/>
+          <p:cNvSpPr>
+            <a:spLocks noGrp="1"/>
+          </p:cNvSpPr>
+          <p:nvPr>
+            <p:ph type="title"/>
+          </p:nvPr>
+        </p:nvSpPr>
+        <p:spPr>
+          <a:xfrm>
+            <a:off x="457200" y="205979"/>
+            <a:ext cx="8229600" cy="857250"/>
+          </a:xfrm>
+        </p:spPr>
+        <p:txBody>
+          <a:bodyPr/>
+          <a:lstStyle/>
+          <a:p>
+            <a:pPr lvl="0" indent="0" marL="0">
+              <a:buNone/>
+            </a:pPr>
+            <a:r>
+              <a:rPr/>
+              <a:t>Worked example: the root split</a:t>
+            </a:r>
+          </a:p>
+        </p:txBody>
+      </p:sp>
+      <p:sp>
+        <p:nvSpPr>
+          <p:cNvPr id="3" name="Content Placeholder 2"/>
+          <p:cNvSpPr>
+            <a:spLocks noGrp="1"/>
+          </p:cNvSpPr>
+          <p:nvPr>
+            <p:ph idx="1"/>
+          </p:nvPr>
+        </p:nvSpPr>
+        <p:spPr>
+          <a:xfrm>
+            <a:off x="457200" y="1200151"/>
+            <a:ext cx="8229600" cy="3394472"/>
+          </a:xfrm>
+        </p:spPr>
+        <p:txBody>
+          <a:bodyPr/>
+          <a:lstStyle/>
+          <a:p>
+            <a:pPr lvl="0"/>
+            <a:r>
+              <a:rPr/>
+              <a:t>p = 0.387 defaulted, so the parent group’s impurity is </a:t>
+            </a:r>
+            <a:r>
+              <a:rPr b="1"/>
+              <a:t>0.474</a:t>
+            </a:r>
+          </a:p>
+          <a:p>
+            <a:pPr lvl="0"/>
+            <a:r>
+              <a:rPr/>
+              <a:t>Exhaustive search finds </a:t>
+            </a:r>
+            <a:r>
+              <a:rPr>
+                <a:latin typeface="Courier"/>
+              </a:rPr>
+              <a:t>debt_ratio &lt;= 0.82</a:t>
+            </a:r>
+            <a:r>
+              <a:rPr/>
+              <a:t> as the best root split</a:t>
+            </a:r>
+          </a:p>
+          <a:p>
+            <a:pPr lvl="0"/>
+            <a:r>
+              <a:rPr/>
+              <a:t>Recognisably the </a:t>
+            </a:r>
+            <a:r>
+              <a:rPr b="1"/>
+              <a:t>debt ceiling</a:t>
+            </a:r>
+            <a:r>
+              <a:rPr/>
+              <a:t> the data was built with</a:t>
+            </a:r>
+          </a:p>
+          <a:p>
+            <a:pPr lvl="0"/>
+            <a:r>
+              <a:rPr/>
+              <a:t>971 applicants left (0.256 defaulted), 229 right (0.939): gain </a:t>
+            </a:r>
+            <a:r>
+              <a:rPr b="1"/>
+              <a:t>0.144</a:t>
+            </a:r>
+          </a:p>
+        </p:txBody>
+      </p:sp>
+    </p:spTree>
+  </p:cSld>
+</p:sld>
+</file>
+
+<file path=ppt/slides/slide16.xml><?xml version="1.0" encoding="utf-8"?>
 <p:sld xmlns:a="http://schemas.openxmlformats.org/drawingml/2006/main" xmlns:r="http://schemas.openxmlformats.org/officeDocument/2006/relationships" xmlns:p="http://schemas.openxmlformats.org/presentationml/2006/main">
   <p:cSld>
     <p:spTree>
@@ -10133,118 +10354,6 @@
 </p:sld>
 </file>
 
-<file path=ppt/slides/slide16.xml><?xml version="1.0" encoding="utf-8"?>
-<p:sld xmlns:a="http://schemas.openxmlformats.org/drawingml/2006/main" xmlns:r="http://schemas.openxmlformats.org/officeDocument/2006/relationships" xmlns:p="http://schemas.openxmlformats.org/presentationml/2006/main">
-  <p:cSld>
-    <p:spTree>
-      <p:nvGrpSpPr>
-        <p:cNvPr id="1" name=""/>
-        <p:cNvGrpSpPr/>
-        <p:nvPr/>
-      </p:nvGrpSpPr>
-      <p:grpSpPr>
-        <a:xfrm>
-          <a:off x="0" y="0"/>
-          <a:ext cx="0" cy="0"/>
-          <a:chOff x="0" y="0"/>
-          <a:chExt cx="0" cy="0"/>
-        </a:xfrm>
-      </p:grpSpPr>
-      <p:sp>
-        <p:nvSpPr>
-          <p:cNvPr id="2" name="Title 1"/>
-          <p:cNvSpPr>
-            <a:spLocks noGrp="1"/>
-          </p:cNvSpPr>
-          <p:nvPr>
-            <p:ph type="title"/>
-          </p:nvPr>
-        </p:nvSpPr>
-        <p:spPr>
-          <a:xfrm>
-            <a:off x="457200" y="205979"/>
-            <a:ext cx="8229600" cy="857250"/>
-          </a:xfrm>
-        </p:spPr>
-        <p:txBody>
-          <a:bodyPr/>
-          <a:lstStyle/>
-          <a:p>
-            <a:pPr lvl="0" indent="0" marL="0">
-              <a:buNone/>
-            </a:pPr>
-            <a:r>
-              <a:rPr/>
-              <a:t>Checked against scikit-learn</a:t>
-            </a:r>
-          </a:p>
-        </p:txBody>
-      </p:sp>
-      <p:sp>
-        <p:nvSpPr>
-          <p:cNvPr id="3" name="Content Placeholder 2"/>
-          <p:cNvSpPr>
-            <a:spLocks noGrp="1"/>
-          </p:cNvSpPr>
-          <p:nvPr>
-            <p:ph idx="1"/>
-          </p:nvPr>
-        </p:nvSpPr>
-        <p:spPr>
-          <a:xfrm>
-            <a:off x="457200" y="1200151"/>
-            <a:ext cx="8229600" cy="3394472"/>
-          </a:xfrm>
-        </p:spPr>
-        <p:txBody>
-          <a:bodyPr/>
-          <a:lstStyle/>
-          <a:p>
-            <a:pPr lvl="0"/>
-            <a:r>
-              <a:rPr/>
-              <a:t>The from-scratch implementation agrees with scikit-learn’s </a:t>
-            </a:r>
-            <a:r>
-              <a:rPr>
-                <a:latin typeface="Courier"/>
-              </a:rPr>
-              <a:t>DecisionTreeClassifier</a:t>
-            </a:r>
-            <a:r>
-              <a:rPr/>
-              <a:t> to the </a:t>
-            </a:r>
-            <a:r>
-              <a:rPr b="1"/>
-              <a:t>fourth decimal place</a:t>
-            </a:r>
-            <a:r>
-              <a:rPr/>
-              <a:t> of resulting accuracy, at every depth tested</a:t>
-            </a:r>
-          </a:p>
-          <a:p>
-            <a:pPr lvl="0"/>
-            <a:r>
-              <a:rPr/>
-              <a:t>Not a coincidence: both search the same space by the same greedy rule</a:t>
-            </a:r>
-          </a:p>
-          <a:p>
-            <a:pPr lvl="0"/>
-            <a:r>
-              <a:rPr/>
-              <a:t>From here on, the notebooks use scikit-learn’s implementation: the same algorithm, compiled, not a different one</a:t>
-            </a:r>
-          </a:p>
-        </p:txBody>
-      </p:sp>
-    </p:spTree>
-  </p:cSld>
-</p:sld>
-</file>
-
 <file path=ppt/slides/slide17.xml><?xml version="1.0" encoding="utf-8"?>
 <p:sld xmlns:a="http://schemas.openxmlformats.org/drawingml/2006/main" xmlns:r="http://schemas.openxmlformats.org/officeDocument/2006/relationships" xmlns:p="http://schemas.openxmlformats.org/presentationml/2006/main">
   <p:cSld>
@@ -10287,7 +10396,7 @@
             </a:pPr>
             <a:r>
               <a:rPr/>
-              <a:t>What greedy misses</a:t>
+              <a:t>Checked against scikit-learn</a:t>
             </a:r>
           </a:p>
         </p:txBody>
@@ -10315,29 +10424,39 @@
             <a:pPr lvl="0"/>
             <a:r>
               <a:rPr/>
-              <a:t>The search never asks “which pair of splits helps most together”: only “which single split helps most right now”</a:t>
+              <a:t>The from-scratch implementation agrees with scikit-learn’s </a:t>
+            </a:r>
+            <a:r>
+              <a:rPr>
+                <a:latin typeface="Courier"/>
+              </a:rPr>
+              <a:t>DecisionTreeClassifier</a:t>
+            </a:r>
+            <a:r>
+              <a:rPr/>
+              <a:t> to the </a:t>
+            </a:r>
+            <a:r>
+              <a:rPr b="1"/>
+              <a:t>fourth decimal place</a:t>
+            </a:r>
+            <a:r>
+              <a:rPr/>
+              <a:t> of resulting accuracy, at every depth tested</a:t>
             </a:r>
           </a:p>
           <a:p>
             <a:pPr lvl="0"/>
             <a:r>
               <a:rPr/>
-              <a:t>A feature that only pays off </a:t>
-            </a:r>
-            <a:r>
-              <a:rPr b="1"/>
-              <a:t>in combination</a:t>
-            </a:r>
-            <a:r>
-              <a:rPr/>
-              <a:t> with a later split can be invisible to a shallow tree</a:t>
+              <a:t>Not a coincidence: both search the same space by the same greedy rule</a:t>
             </a:r>
           </a:p>
           <a:p>
             <a:pPr lvl="0"/>
             <a:r>
               <a:rPr/>
-              <a:t>Exactly what happens to this dataset’s two interior “stressed” islands, covered next</a:t>
+              <a:t>From here on, the notebooks use scikit-learn’s implementation: the same algorithm, compiled, not a different one</a:t>
             </a:r>
           </a:p>
         </p:txBody>
@@ -10389,7 +10508,7 @@
             </a:pPr>
             <a:r>
               <a:rPr/>
-              <a:t>Depth is the bias-variance dial</a:t>
+              <a:t>What greedy misses</a:t>
             </a:r>
           </a:p>
         </p:txBody>
@@ -10416,44 +10535,30 @@
           <a:p>
             <a:pPr lvl="0"/>
             <a:r>
-              <a:rPr>
-                <a:latin typeface="Courier"/>
-              </a:rPr>
-              <a:t>max_depth</a:t>
-            </a:r>
-            <a:r>
-              <a:rPr/>
-              <a:t>: how many questions a tree may ask before a leaf must stop and vote by majority</a:t>
+              <a:rPr/>
+              <a:t>The search never asks “which pair of splits helps most together”: only “which single split helps most right now”</a:t>
             </a:r>
           </a:p>
           <a:p>
             <a:pPr lvl="0"/>
             <a:r>
+              <a:rPr/>
+              <a:t>A feature that only pays off </a:t>
+            </a:r>
+            <a:r>
               <a:rPr b="1"/>
-              <a:t>Shallow tree</a:t>
-            </a:r>
-            <a:r>
-              <a:rPr/>
-              <a:t>: few questions, only the coarsest structure. High bias, low variance</a:t>
+              <a:t>in combination</a:t>
+            </a:r>
+            <a:r>
+              <a:rPr/>
+              <a:t> with a later split can be invisible to a shallow tree</a:t>
             </a:r>
           </a:p>
           <a:p>
             <a:pPr lvl="0"/>
             <a:r>
-              <a:rPr b="1"/>
-              <a:t>Deep tree</a:t>
-            </a:r>
-            <a:r>
-              <a:rPr/>
-              <a:t>: enough questions to isolate almost any subset, down to single points. At full depth, training accuracy is </a:t>
-            </a:r>
-            <a:r>
-              <a:rPr b="1"/>
-              <a:t>exactly 1.000 on any dataset</a:t>
-            </a:r>
-            <a:r>
-              <a:rPr/>
-              <a:t>, including one with no structure at all</a:t>
+              <a:rPr/>
+              <a:t>Exactly what happens to this dataset’s two interior “stressed” islands, covered next</a:t>
             </a:r>
           </a:p>
         </p:txBody>
@@ -10464,6 +10569,244 @@
 </file>
 
 <file path=ppt/slides/slide19.xml><?xml version="1.0" encoding="utf-8"?>
+<p:sld xmlns:a="http://schemas.openxmlformats.org/drawingml/2006/main" xmlns:r="http://schemas.openxmlformats.org/officeDocument/2006/relationships" xmlns:p="http://schemas.openxmlformats.org/presentationml/2006/main">
+  <p:cSld>
+    <p:spTree>
+      <p:nvGrpSpPr>
+        <p:cNvPr id="1" name=""/>
+        <p:cNvGrpSpPr/>
+        <p:nvPr/>
+      </p:nvGrpSpPr>
+      <p:grpSpPr>
+        <a:xfrm>
+          <a:off x="0" y="0"/>
+          <a:ext cx="0" cy="0"/>
+          <a:chOff x="0" y="0"/>
+          <a:chExt cx="0" cy="0"/>
+        </a:xfrm>
+      </p:grpSpPr>
+      <p:sp>
+        <p:nvSpPr>
+          <p:cNvPr id="2" name="Title 1"/>
+          <p:cNvSpPr>
+            <a:spLocks noGrp="1"/>
+          </p:cNvSpPr>
+          <p:nvPr>
+            <p:ph type="title"/>
+          </p:nvPr>
+        </p:nvSpPr>
+        <p:spPr>
+          <a:xfrm>
+            <a:off x="457200" y="205979"/>
+            <a:ext cx="8229600" cy="857250"/>
+          </a:xfrm>
+        </p:spPr>
+        <p:txBody>
+          <a:bodyPr/>
+          <a:lstStyle/>
+          <a:p>
+            <a:pPr lvl="0" indent="0" marL="0">
+              <a:buNone/>
+            </a:pPr>
+            <a:r>
+              <a:rPr/>
+              <a:t>Depth is the bias-variance dial</a:t>
+            </a:r>
+          </a:p>
+        </p:txBody>
+      </p:sp>
+      <p:sp>
+        <p:nvSpPr>
+          <p:cNvPr id="3" name="Content Placeholder 2"/>
+          <p:cNvSpPr>
+            <a:spLocks noGrp="1"/>
+          </p:cNvSpPr>
+          <p:nvPr>
+            <p:ph idx="1"/>
+          </p:nvPr>
+        </p:nvSpPr>
+        <p:spPr>
+          <a:xfrm>
+            <a:off x="457200" y="1200151"/>
+            <a:ext cx="8229600" cy="3394472"/>
+          </a:xfrm>
+        </p:spPr>
+        <p:txBody>
+          <a:bodyPr/>
+          <a:lstStyle/>
+          <a:p>
+            <a:pPr lvl="0"/>
+            <a:r>
+              <a:rPr>
+                <a:latin typeface="Courier"/>
+              </a:rPr>
+              <a:t>max_depth</a:t>
+            </a:r>
+            <a:r>
+              <a:rPr/>
+              <a:t>: how many questions a tree may ask before a leaf must stop and vote by majority</a:t>
+            </a:r>
+          </a:p>
+          <a:p>
+            <a:pPr lvl="0"/>
+            <a:r>
+              <a:rPr b="1"/>
+              <a:t>Shallow tree</a:t>
+            </a:r>
+            <a:r>
+              <a:rPr/>
+              <a:t>: few questions, only the coarsest structure. High bias, low variance</a:t>
+            </a:r>
+          </a:p>
+          <a:p>
+            <a:pPr lvl="0"/>
+            <a:r>
+              <a:rPr b="1"/>
+              <a:t>Deep tree</a:t>
+            </a:r>
+            <a:r>
+              <a:rPr/>
+              <a:t>: enough questions to isolate almost any subset, down to single points. At full depth, training accuracy is </a:t>
+            </a:r>
+            <a:r>
+              <a:rPr b="1"/>
+              <a:t>exactly 1.000 on any dataset</a:t>
+            </a:r>
+            <a:r>
+              <a:rPr/>
+              <a:t>, including one with no structure at all</a:t>
+            </a:r>
+          </a:p>
+        </p:txBody>
+      </p:sp>
+    </p:spTree>
+  </p:cSld>
+</p:sld>
+</file>
+
+<file path=ppt/slides/slide2.xml><?xml version="1.0" encoding="utf-8"?>
+<p:sld xmlns:a="http://schemas.openxmlformats.org/drawingml/2006/main" xmlns:r="http://schemas.openxmlformats.org/officeDocument/2006/relationships" xmlns:p="http://schemas.openxmlformats.org/presentationml/2006/main">
+  <p:cSld>
+    <p:spTree>
+      <p:nvGrpSpPr>
+        <p:cNvPr id="1" name=""/>
+        <p:cNvGrpSpPr/>
+        <p:nvPr/>
+      </p:nvGrpSpPr>
+      <p:grpSpPr>
+        <a:xfrm>
+          <a:off x="0" y="0"/>
+          <a:ext cx="0" cy="0"/>
+          <a:chOff x="0" y="0"/>
+          <a:chExt cx="0" cy="0"/>
+        </a:xfrm>
+      </p:grpSpPr>
+      <p:sp>
+        <p:nvSpPr>
+          <p:cNvPr id="2" name="Title 1"/>
+          <p:cNvSpPr>
+            <a:spLocks noGrp="1"/>
+          </p:cNvSpPr>
+          <p:nvPr>
+            <p:ph type="title"/>
+          </p:nvPr>
+        </p:nvSpPr>
+        <p:spPr>
+          <a:xfrm>
+            <a:off x="457200" y="205979"/>
+            <a:ext cx="8229600" cy="857250"/>
+          </a:xfrm>
+        </p:spPr>
+        <p:txBody>
+          <a:bodyPr/>
+          <a:lstStyle/>
+          <a:p>
+            <a:pPr lvl="0" indent="0" marL="0">
+              <a:buNone/>
+            </a:pPr>
+            <a:r>
+              <a:rPr/>
+              <a:t>Agenda</a:t>
+            </a:r>
+          </a:p>
+        </p:txBody>
+      </p:sp>
+      <p:sp>
+        <p:nvSpPr>
+          <p:cNvPr id="3" name="Content Placeholder 2"/>
+          <p:cNvSpPr>
+            <a:spLocks noGrp="1"/>
+          </p:cNvSpPr>
+          <p:nvPr>
+            <p:ph idx="1"/>
+          </p:nvPr>
+        </p:nvSpPr>
+        <p:spPr>
+          <a:xfrm>
+            <a:off x="457200" y="1200151"/>
+            <a:ext cx="8229600" cy="3394472"/>
+          </a:xfrm>
+        </p:spPr>
+        <p:txBody>
+          <a:bodyPr/>
+          <a:lstStyle/>
+          <a:p>
+            <a:pPr lvl="0"/>
+            <a:r>
+              <a:rPr/>
+              <a:t>A fourth family, built on a threshold</a:t>
+            </a:r>
+          </a:p>
+          <a:p>
+            <a:pPr lvl="0"/>
+            <a:r>
+              <a:rPr/>
+              <a:t>Decision trees, and why one alone is mediocre</a:t>
+            </a:r>
+          </a:p>
+          <a:p>
+            <a:pPr lvl="0"/>
+            <a:r>
+              <a:rPr/>
+              <a:t>Depth as the bias-variance dial, again</a:t>
+            </a:r>
+          </a:p>
+          <a:p>
+            <a:pPr lvl="0"/>
+            <a:r>
+              <a:rPr/>
+              <a:t>Bagging and random forests</a:t>
+            </a:r>
+          </a:p>
+          <a:p>
+            <a:pPr lvl="0"/>
+            <a:r>
+              <a:rPr/>
+              <a:t>Feature importance, and its limits</a:t>
+            </a:r>
+          </a:p>
+          <a:p>
+            <a:pPr lvl="0"/>
+            <a:r>
+              <a:rPr/>
+              <a:t>Gradient boosting</a:t>
+            </a:r>
+          </a:p>
+          <a:p>
+            <a:pPr lvl="0"/>
+            <a:r>
+              <a:rPr/>
+              <a:t>Choosing among trees, forests and boosting</a:t>
+            </a:r>
+          </a:p>
+        </p:txBody>
+      </p:sp>
+    </p:spTree>
+  </p:cSld>
+</p:sld>
+</file>
+
+<file path=ppt/slides/slide20.xml><?xml version="1.0" encoding="utf-8"?>
 <p:sld xmlns:a="http://schemas.openxmlformats.org/drawingml/2006/main" xmlns:r="http://schemas.openxmlformats.org/officeDocument/2006/relationships" xmlns:p="http://schemas.openxmlformats.org/presentationml/2006/main">
   <p:cSld>
     <p:spTree>
@@ -10925,129 +11268,7 @@
 </p:sld>
 </file>
 
-<file path=ppt/slides/slide2.xml><?xml version="1.0" encoding="utf-8"?>
-<p:sld xmlns:a="http://schemas.openxmlformats.org/drawingml/2006/main" xmlns:r="http://schemas.openxmlformats.org/officeDocument/2006/relationships" xmlns:p="http://schemas.openxmlformats.org/presentationml/2006/main">
-  <p:cSld>
-    <p:spTree>
-      <p:nvGrpSpPr>
-        <p:cNvPr id="1" name=""/>
-        <p:cNvGrpSpPr/>
-        <p:nvPr/>
-      </p:nvGrpSpPr>
-      <p:grpSpPr>
-        <a:xfrm>
-          <a:off x="0" y="0"/>
-          <a:ext cx="0" cy="0"/>
-          <a:chOff x="0" y="0"/>
-          <a:chExt cx="0" cy="0"/>
-        </a:xfrm>
-      </p:grpSpPr>
-      <p:sp>
-        <p:nvSpPr>
-          <p:cNvPr id="2" name="Title 1"/>
-          <p:cNvSpPr>
-            <a:spLocks noGrp="1"/>
-          </p:cNvSpPr>
-          <p:nvPr>
-            <p:ph type="title"/>
-          </p:nvPr>
-        </p:nvSpPr>
-        <p:spPr>
-          <a:xfrm>
-            <a:off x="457200" y="205979"/>
-            <a:ext cx="8229600" cy="857250"/>
-          </a:xfrm>
-        </p:spPr>
-        <p:txBody>
-          <a:bodyPr/>
-          <a:lstStyle/>
-          <a:p>
-            <a:pPr lvl="0" indent="0" marL="0">
-              <a:buNone/>
-            </a:pPr>
-            <a:r>
-              <a:rPr/>
-              <a:t>Agenda</a:t>
-            </a:r>
-          </a:p>
-        </p:txBody>
-      </p:sp>
-      <p:sp>
-        <p:nvSpPr>
-          <p:cNvPr id="3" name="Content Placeholder 2"/>
-          <p:cNvSpPr>
-            <a:spLocks noGrp="1"/>
-          </p:cNvSpPr>
-          <p:nvPr>
-            <p:ph idx="1"/>
-          </p:nvPr>
-        </p:nvSpPr>
-        <p:spPr>
-          <a:xfrm>
-            <a:off x="457200" y="1200151"/>
-            <a:ext cx="8229600" cy="3394472"/>
-          </a:xfrm>
-        </p:spPr>
-        <p:txBody>
-          <a:bodyPr/>
-          <a:lstStyle/>
-          <a:p>
-            <a:pPr lvl="0"/>
-            <a:r>
-              <a:rPr/>
-              <a:t>A fourth family, built on a threshold</a:t>
-            </a:r>
-          </a:p>
-          <a:p>
-            <a:pPr lvl="0"/>
-            <a:r>
-              <a:rPr/>
-              <a:t>Decision trees, and why one alone is mediocre</a:t>
-            </a:r>
-          </a:p>
-          <a:p>
-            <a:pPr lvl="0"/>
-            <a:r>
-              <a:rPr/>
-              <a:t>Depth as the bias-variance dial, again</a:t>
-            </a:r>
-          </a:p>
-          <a:p>
-            <a:pPr lvl="0"/>
-            <a:r>
-              <a:rPr/>
-              <a:t>Bagging and random forests</a:t>
-            </a:r>
-          </a:p>
-          <a:p>
-            <a:pPr lvl="0"/>
-            <a:r>
-              <a:rPr/>
-              <a:t>Feature importance, and its limits</a:t>
-            </a:r>
-          </a:p>
-          <a:p>
-            <a:pPr lvl="0"/>
-            <a:r>
-              <a:rPr/>
-              <a:t>Gradient boosting</a:t>
-            </a:r>
-          </a:p>
-          <a:p>
-            <a:pPr lvl="0"/>
-            <a:r>
-              <a:rPr/>
-              <a:t>Choosing among trees, forests and boosting</a:t>
-            </a:r>
-          </a:p>
-        </p:txBody>
-      </p:sp>
-    </p:spTree>
-  </p:cSld>
-</p:sld>
-</file>
-
-<file path=ppt/slides/slide20.xml><?xml version="1.0" encoding="utf-8"?>
+<file path=ppt/slides/slide21.xml><?xml version="1.0" encoding="utf-8"?>
 <p:sld xmlns:a="http://schemas.openxmlformats.org/drawingml/2006/main" xmlns:r="http://schemas.openxmlformats.org/officeDocument/2006/relationships" xmlns:p="http://schemas.openxmlformats.org/presentationml/2006/main">
   <p:cSld>
     <p:spTree>
@@ -11129,7 +11350,7 @@
 </p:sld>
 </file>
 
-<file path=ppt/slides/slide21.xml><?xml version="1.0" encoding="utf-8"?>
+<file path=ppt/slides/slide22.xml><?xml version="1.0" encoding="utf-8"?>
 <p:sld xmlns:a="http://schemas.openxmlformats.org/drawingml/2006/main" xmlns:r="http://schemas.openxmlformats.org/officeDocument/2006/relationships" xmlns:p="http://schemas.openxmlformats.org/presentationml/2006/main">
   <p:cSld>
     <p:spTree>
@@ -11211,146 +11432,6 @@
 </p:sld>
 </file>
 
-<file path=ppt/slides/slide22.xml><?xml version="1.0" encoding="utf-8"?>
-<p:sld xmlns:a="http://schemas.openxmlformats.org/drawingml/2006/main" xmlns:r="http://schemas.openxmlformats.org/officeDocument/2006/relationships" xmlns:p="http://schemas.openxmlformats.org/presentationml/2006/main">
-  <p:cSld>
-    <p:spTree>
-      <p:nvGrpSpPr>
-        <p:cNvPr id="1" name=""/>
-        <p:cNvGrpSpPr/>
-        <p:nvPr/>
-      </p:nvGrpSpPr>
-      <p:grpSpPr>
-        <a:xfrm>
-          <a:off x="0" y="0"/>
-          <a:ext cx="0" cy="0"/>
-          <a:chOff x="0" y="0"/>
-          <a:chExt cx="0" cy="0"/>
-        </a:xfrm>
-      </p:grpSpPr>
-      <p:sp>
-        <p:nvSpPr>
-          <p:cNvPr id="2" name="Title 1"/>
-          <p:cNvSpPr>
-            <a:spLocks noGrp="1"/>
-          </p:cNvSpPr>
-          <p:nvPr>
-            <p:ph type="title"/>
-          </p:nvPr>
-        </p:nvSpPr>
-        <p:spPr>
-          <a:xfrm>
-            <a:off x="457200" y="205979"/>
-            <a:ext cx="8229600" cy="857250"/>
-          </a:xfrm>
-        </p:spPr>
-        <p:txBody>
-          <a:bodyPr/>
-          <a:lstStyle/>
-          <a:p>
-            <a:pPr lvl="0" indent="0" marL="0">
-              <a:buNone/>
-            </a:pPr>
-            <a:r>
-              <a:rPr/>
-              <a:t>Reading a tree, and the knob that keeps it small</a:t>
-            </a:r>
-          </a:p>
-        </p:txBody>
-      </p:sp>
-      <p:sp>
-        <p:nvSpPr>
-          <p:cNvPr id="3" name="Content Placeholder 2"/>
-          <p:cNvSpPr>
-            <a:spLocks noGrp="1"/>
-          </p:cNvSpPr>
-          <p:nvPr>
-            <p:ph idx="1"/>
-          </p:nvPr>
-        </p:nvSpPr>
-        <p:spPr>
-          <a:xfrm>
-            <a:off x="457200" y="1200151"/>
-            <a:ext cx="8229600" cy="3394472"/>
-          </a:xfrm>
-        </p:spPr>
-        <p:txBody>
-          <a:bodyPr/>
-          <a:lstStyle/>
-          <a:p>
-            <a:pPr lvl="0"/>
-            <a:r>
-              <a:rPr>
-                <a:latin typeface="Courier"/>
-              </a:rPr>
-              <a:t>max_depth</a:t>
-            </a:r>
-            <a:r>
-              <a:rPr/>
-              <a:t> grows the tree </a:t>
-            </a:r>
-            <a:r>
-              <a:rPr b="1"/>
-              <a:t>breadth-first</a:t>
-            </a:r>
-            <a:r>
-              <a:rPr/>
-              <a:t>: every leaf at level d splits before any leaf reaches d+1, useful or not</a:t>
-            </a:r>
-          </a:p>
-          <a:p>
-            <a:pPr lvl="0"/>
-            <a:r>
-              <a:rPr>
-                <a:latin typeface="Courier"/>
-              </a:rPr>
-              <a:t>max_leaf_nodes</a:t>
-            </a:r>
-            <a:r>
-              <a:rPr/>
-              <a:t> grows it </a:t>
-            </a:r>
-            <a:r>
-              <a:rPr b="1"/>
-              <a:t>best-first</a:t>
-            </a:r>
-            <a:r>
-              <a:rPr/>
-              <a:t>: always expanding whichever leaf offers the largest ΔG</a:t>
-            </a:r>
-          </a:p>
-          <a:p>
-            <a:pPr lvl="0"/>
-            <a:r>
-              <a:rPr/>
-              <a:t>With </a:t>
-            </a:r>
-            <a:r>
-              <a:rPr>
-                <a:latin typeface="Courier"/>
-              </a:rPr>
-              <a:t>max_leaf_nodes = 9</a:t>
-            </a:r>
-            <a:r>
-              <a:rPr/>
-              <a:t>: </a:t>
-            </a:r>
-            <a:r>
-              <a:rPr b="1"/>
-              <a:t>90.8%</a:t>
-            </a:r>
-            <a:r>
-              <a:rPr/>
-              <a:t> training accuracy, every threshold recognisable: 28 the income floor, 0.82 the debt ceiling</a:t>
-            </a:r>
-          </a:p>
-        </p:txBody>
-      </p:sp>
-    </p:spTree>
-  </p:cSld>
-</p:sld>
-</file>
-
 <file path=ppt/slides/slide23.xml><?xml version="1.0" encoding="utf-8"?>
 <p:sld xmlns:a="http://schemas.openxmlformats.org/drawingml/2006/main" xmlns:r="http://schemas.openxmlformats.org/officeDocument/2006/relationships" xmlns:p="http://schemas.openxmlformats.org/presentationml/2006/main">
   <p:cSld>
@@ -11393,7 +11474,7 @@
             </a:pPr>
             <a:r>
               <a:rPr/>
-              <a:t>A tree that doesn’t stay still</a:t>
+              <a:t>Reading a tree, and the knob that keeps it small</a:t>
             </a:r>
           </a:p>
         </p:txBody>
@@ -11420,59 +11501,68 @@
           <a:p>
             <a:pPr lvl="0"/>
             <a:r>
-              <a:rPr/>
-              <a:t>Two trees at </a:t>
-            </a:r>
-            <a:r>
               <a:rPr>
                 <a:latin typeface="Courier"/>
               </a:rPr>
-              <a:t>max_depth = 6</a:t>
-            </a:r>
-            <a:r>
-              <a:rPr/>
-              <a:t>, fit to independent 65% resamples of the same 1,200 applicants</a:t>
+              <a:t>max_depth</a:t>
+            </a:r>
+            <a:r>
+              <a:rPr/>
+              <a:t> grows the tree </a:t>
+            </a:r>
+            <a:r>
+              <a:rPr b="1"/>
+              <a:t>breadth-first</a:t>
+            </a:r>
+            <a:r>
+              <a:rPr/>
+              <a:t>: every leaf at level d splits before any leaf reaches d+1, useful or not</a:t>
             </a:r>
           </a:p>
           <a:p>
             <a:pPr lvl="0"/>
             <a:r>
-              <a:rPr/>
-              <a:t>The debt ceiling, the strongest split, agrees to within </a:t>
+              <a:rPr>
+                <a:latin typeface="Courier"/>
+              </a:rPr>
+              <a:t>max_leaf_nodes</a:t>
+            </a:r>
+            <a:r>
+              <a:rPr/>
+              <a:t> grows it </a:t>
             </a:r>
             <a:r>
               <a:rPr b="1"/>
-              <a:t>0.001</a:t>
+              <a:t>best-first</a:t>
+            </a:r>
+            <a:r>
+              <a:rPr/>
+              <a:t>: always expanding whichever leaf offers the largest ΔG</a:t>
             </a:r>
           </a:p>
           <a:p>
             <a:pPr lvl="0"/>
             <a:r>
               <a:rPr/>
-              <a:t>The trees grow </a:t>
+              <a:t>With </a:t>
+            </a:r>
+            <a:r>
+              <a:rPr>
+                <a:latin typeface="Courier"/>
+              </a:rPr>
+              <a:t>max_leaf_nodes = 9</a:t>
+            </a:r>
+            <a:r>
+              <a:rPr/>
+              <a:t>: </a:t>
             </a:r>
             <a:r>
               <a:rPr b="1"/>
-              <a:t>31 and 33 leaves</a:t>
-            </a:r>
-            <a:r>
-              <a:rPr/>
-              <a:t>, and </a:t>
-            </a:r>
-            <a:r>
-              <a:rPr b="1"/>
-              <a:t>disagree on 11.7%</a:t>
-            </a:r>
-            <a:r>
-              <a:rPr/>
-              <a:t> of predictions on the full dataset</a:t>
-            </a:r>
-          </a:p>
-          <a:p>
-            <a:pPr lvl="0"/>
-            <a:r>
-              <a:rPr/>
-              <a:t>The strongest split is stable; the many weaker ones are not, and they decide most of a tree’s shape</a:t>
+              <a:t>90.8%</a:t>
+            </a:r>
+            <a:r>
+              <a:rPr/>
+              <a:t> training accuracy, every threshold recognisable: 28 the income floor, 0.82 the debt ceiling</a:t>
             </a:r>
           </a:p>
         </p:txBody>
@@ -11524,7 +11614,7 @@
             </a:pPr>
             <a:r>
               <a:rPr/>
-              <a:t>Notebook 1, live</a:t>
+              <a:t>A tree that doesn’t stay still</a:t>
             </a:r>
           </a:p>
         </p:txBody>
@@ -11552,14 +11642,58 @@
             <a:pPr lvl="0"/>
             <a:r>
               <a:rPr/>
-              <a:t>Decision trees from scratch, checked against scikit-learn</a:t>
+              <a:t>Two trees at </a:t>
+            </a:r>
+            <a:r>
+              <a:rPr>
+                <a:latin typeface="Courier"/>
+              </a:rPr>
+              <a:t>max_depth = 6</a:t>
+            </a:r>
+            <a:r>
+              <a:rPr/>
+              <a:t>, fit to independent 65% resamples of the same 1,200 applicants</a:t>
             </a:r>
           </a:p>
           <a:p>
             <a:pPr lvl="0"/>
             <a:r>
               <a:rPr/>
-              <a:t>Depth swept, the two boundaries drawn, and the instability measured</a:t>
+              <a:t>The debt ceiling, the strongest split, agrees to within </a:t>
+            </a:r>
+            <a:r>
+              <a:rPr b="1"/>
+              <a:t>0.001</a:t>
+            </a:r>
+          </a:p>
+          <a:p>
+            <a:pPr lvl="0"/>
+            <a:r>
+              <a:rPr/>
+              <a:t>The trees grow </a:t>
+            </a:r>
+            <a:r>
+              <a:rPr b="1"/>
+              <a:t>31 and 33 leaves</a:t>
+            </a:r>
+            <a:r>
+              <a:rPr/>
+              <a:t>, and </a:t>
+            </a:r>
+            <a:r>
+              <a:rPr b="1"/>
+              <a:t>disagree on 11.7%</a:t>
+            </a:r>
+            <a:r>
+              <a:rPr/>
+              <a:t> of predictions on the full dataset</a:t>
+            </a:r>
+          </a:p>
+          <a:p>
+            <a:pPr lvl="0"/>
+            <a:r>
+              <a:rPr/>
+              <a:t>The strongest split is stable; the many weaker ones are not, and they decide most of a tree’s shape</a:t>
             </a:r>
           </a:p>
         </p:txBody>
@@ -11611,7 +11745,7 @@
             </a:pPr>
             <a:r>
               <a:rPr/>
-              <a:t>Break</a:t>
+              <a:t>Notebook 1, live</a:t>
             </a:r>
           </a:p>
         </p:txBody>
@@ -11639,7 +11773,14 @@
             <a:pPr lvl="0"/>
             <a:r>
               <a:rPr/>
-              <a:t>Twelve minutes</a:t>
+              <a:t>Decision trees from scratch, checked against scikit-learn</a:t>
+            </a:r>
+          </a:p>
+          <a:p>
+            <a:pPr lvl="0"/>
+            <a:r>
+              <a:rPr/>
+              <a:t>Depth swept, the two boundaries drawn, and the instability measured</a:t>
             </a:r>
           </a:p>
         </p:txBody>
@@ -11691,7 +11832,7 @@
             </a:pPr>
             <a:r>
               <a:rPr/>
-              <a:t>Bagging: averaging away the instability</a:t>
+              <a:t>Break</a:t>
             </a:r>
           </a:p>
         </p:txBody>
@@ -11719,66 +11860,7 @@
             <a:pPr lvl="0"/>
             <a:r>
               <a:rPr/>
-              <a:t>A tree’s mistakes differ across resamples, as just measured, so </a:t>
-            </a:r>
-            <a:r>
-              <a:rPr b="1"/>
-              <a:t>many trees, averaged</a:t>
-            </a:r>
-            <a:r>
-              <a:rPr/>
-              <a:t> should partly cancel out</a:t>
-            </a:r>
-          </a:p>
-          <a:p>
-            <a:pPr lvl="0"/>
-            <a:r>
-              <a:rPr/>
-              <a:t>Draw a </a:t>
-            </a:r>
-            <a:r>
-              <a:rPr b="1"/>
-              <a:t>bootstrap sample</a:t>
-            </a:r>
-            <a:r>
-              <a:rPr/>
-              <a:t>: m rows chosen </a:t>
-            </a:r>
-            <a:r>
-              <a:rPr b="1"/>
-              <a:t>with replacement</a:t>
-            </a:r>
-            <a:r>
-              <a:rPr/>
-              <a:t> from the m training rows</a:t>
-            </a:r>
-          </a:p>
-          <a:p>
-            <a:pPr lvl="0"/>
-            <a:r>
-              <a:rPr/>
-              <a:t>Fit a tree to it. Repeat </a:t>
-            </a:r>
-            <a:r>
-              <a:rPr>
-                <a:latin typeface="Courier"/>
-              </a:rPr>
-              <a:t>n_estimators</a:t>
-            </a:r>
-            <a:r>
-              <a:rPr/>
-              <a:t> times; predict by </a:t>
-            </a:r>
-            <a:r>
-              <a:rPr b="1"/>
-              <a:t>majority vote</a:t>
-            </a:r>
-          </a:p>
-          <a:p>
-            <a:pPr lvl="0"/>
-            <a:r>
-              <a:rPr/>
-              <a:t>The tree algorithm itself is unchanged, only what surrounds it is new</a:t>
+              <a:t>Twelve minutes</a:t>
             </a:r>
           </a:p>
         </p:txBody>
@@ -11830,7 +11912,7 @@
             </a:pPr>
             <a:r>
               <a:rPr/>
-              <a:t>How much data one bootstrap sample sees</a:t>
+              <a:t>Bagging: averaging away the instability</a:t>
             </a:r>
           </a:p>
         </p:txBody>
@@ -11858,48 +11940,66 @@
             <a:pPr lvl="0"/>
             <a:r>
               <a:rPr/>
-              <a:t>Each bootstrap sample is drawn from the same m rows, with replacement</a:t>
+              <a:t>A tree’s mistakes differ across resamples, as just measured, so </a:t>
+            </a:r>
+            <a:r>
+              <a:rPr b="1"/>
+              <a:t>many trees, averaged</a:t>
+            </a:r>
+            <a:r>
+              <a:rPr/>
+              <a:t> should partly cancel out</a:t>
             </a:r>
           </a:p>
           <a:p>
             <a:pPr lvl="0"/>
             <a:r>
               <a:rPr/>
-              <a:t>About </a:t>
+              <a:t>Draw a </a:t>
             </a:r>
             <a:r>
               <a:rPr b="1"/>
-              <a:t>63.2%</a:t>
-            </a:r>
-            <a:r>
-              <a:rPr/>
-              <a:t> of the distinct rows are drawn at least once</a:t>
+              <a:t>bootstrap sample</a:t>
+            </a:r>
+            <a:r>
+              <a:rPr/>
+              <a:t>: m rows chosen </a:t>
+            </a:r>
+            <a:r>
+              <a:rPr b="1"/>
+              <a:t>with replacement</a:t>
+            </a:r>
+            <a:r>
+              <a:rPr/>
+              <a:t> from the m training rows</a:t>
             </a:r>
           </a:p>
           <a:p>
             <a:pPr lvl="0"/>
             <a:r>
               <a:rPr/>
-              <a:t>The remaining </a:t>
+              <a:t>Fit a tree to it. Repeat </a:t>
+            </a:r>
+            <a:r>
+              <a:rPr>
+                <a:latin typeface="Courier"/>
+              </a:rPr>
+              <a:t>n_estimators</a:t>
+            </a:r>
+            <a:r>
+              <a:rPr/>
+              <a:t> times; predict by </a:t>
             </a:r>
             <a:r>
               <a:rPr b="1"/>
-              <a:t>36.8%</a:t>
-            </a:r>
-            <a:r>
-              <a:rPr/>
-              <a:t> are left out entirely: called </a:t>
-            </a:r>
-            <a:r>
-              <a:rPr b="1"/>
-              <a:t>out-of-bag (OOB)</a:t>
+              <a:t>majority vote</a:t>
             </a:r>
           </a:p>
           <a:p>
             <a:pPr lvl="0"/>
             <a:r>
               <a:rPr/>
-              <a:t>At m = 1,200: a single simulated draw left out 36.6% of rows, close to the limit</a:t>
+              <a:t>The tree algorithm itself is unchanged, only what surrounds it is new</a:t>
             </a:r>
           </a:p>
         </p:txBody>
@@ -11910,6 +12010,127 @@
 </file>
 
 <file path=ppt/slides/slide28.xml><?xml version="1.0" encoding="utf-8"?>
+<p:sld xmlns:a="http://schemas.openxmlformats.org/drawingml/2006/main" xmlns:r="http://schemas.openxmlformats.org/officeDocument/2006/relationships" xmlns:p="http://schemas.openxmlformats.org/presentationml/2006/main">
+  <p:cSld>
+    <p:spTree>
+      <p:nvGrpSpPr>
+        <p:cNvPr id="1" name=""/>
+        <p:cNvGrpSpPr/>
+        <p:nvPr/>
+      </p:nvGrpSpPr>
+      <p:grpSpPr>
+        <a:xfrm>
+          <a:off x="0" y="0"/>
+          <a:ext cx="0" cy="0"/>
+          <a:chOff x="0" y="0"/>
+          <a:chExt cx="0" cy="0"/>
+        </a:xfrm>
+      </p:grpSpPr>
+      <p:sp>
+        <p:nvSpPr>
+          <p:cNvPr id="2" name="Title 1"/>
+          <p:cNvSpPr>
+            <a:spLocks noGrp="1"/>
+          </p:cNvSpPr>
+          <p:nvPr>
+            <p:ph type="title"/>
+          </p:nvPr>
+        </p:nvSpPr>
+        <p:spPr>
+          <a:xfrm>
+            <a:off x="457200" y="205979"/>
+            <a:ext cx="8229600" cy="857250"/>
+          </a:xfrm>
+        </p:spPr>
+        <p:txBody>
+          <a:bodyPr/>
+          <a:lstStyle/>
+          <a:p>
+            <a:pPr lvl="0" indent="0" marL="0">
+              <a:buNone/>
+            </a:pPr>
+            <a:r>
+              <a:rPr/>
+              <a:t>How much data one bootstrap sample sees</a:t>
+            </a:r>
+          </a:p>
+        </p:txBody>
+      </p:sp>
+      <p:sp>
+        <p:nvSpPr>
+          <p:cNvPr id="3" name="Content Placeholder 2"/>
+          <p:cNvSpPr>
+            <a:spLocks noGrp="1"/>
+          </p:cNvSpPr>
+          <p:nvPr>
+            <p:ph idx="1"/>
+          </p:nvPr>
+        </p:nvSpPr>
+        <p:spPr>
+          <a:xfrm>
+            <a:off x="457200" y="1200151"/>
+            <a:ext cx="8229600" cy="3394472"/>
+          </a:xfrm>
+        </p:spPr>
+        <p:txBody>
+          <a:bodyPr/>
+          <a:lstStyle/>
+          <a:p>
+            <a:pPr lvl="0"/>
+            <a:r>
+              <a:rPr/>
+              <a:t>Each bootstrap sample is drawn from the same m rows, with replacement</a:t>
+            </a:r>
+          </a:p>
+          <a:p>
+            <a:pPr lvl="0"/>
+            <a:r>
+              <a:rPr/>
+              <a:t>About </a:t>
+            </a:r>
+            <a:r>
+              <a:rPr b="1"/>
+              <a:t>63.2%</a:t>
+            </a:r>
+            <a:r>
+              <a:rPr/>
+              <a:t> of the distinct rows are drawn at least once</a:t>
+            </a:r>
+          </a:p>
+          <a:p>
+            <a:pPr lvl="0"/>
+            <a:r>
+              <a:rPr/>
+              <a:t>The remaining </a:t>
+            </a:r>
+            <a:r>
+              <a:rPr b="1"/>
+              <a:t>36.8%</a:t>
+            </a:r>
+            <a:r>
+              <a:rPr/>
+              <a:t> are left out entirely: called </a:t>
+            </a:r>
+            <a:r>
+              <a:rPr b="1"/>
+              <a:t>out-of-bag (OOB)</a:t>
+            </a:r>
+          </a:p>
+          <a:p>
+            <a:pPr lvl="0"/>
+            <a:r>
+              <a:rPr/>
+              <a:t>At m = 1,200: a single simulated draw left out 36.6% of rows, close to the limit</a:t>
+            </a:r>
+          </a:p>
+        </p:txBody>
+      </p:sp>
+    </p:spTree>
+  </p:cSld>
+</p:sld>
+</file>
+
+<file path=ppt/slides/slide29.xml><?xml version="1.0" encoding="utf-8"?>
 <p:sld xmlns:a="http://schemas.openxmlformats.org/drawingml/2006/main" xmlns:r="http://schemas.openxmlformats.org/officeDocument/2006/relationships" xmlns:p="http://schemas.openxmlformats.org/presentationml/2006/main">
   <p:cSld>
     <p:spTree>
@@ -11991,135 +12212,6 @@
 </p:sld>
 </file>
 
-<file path=ppt/slides/slide29.xml><?xml version="1.0" encoding="utf-8"?>
-<p:sld xmlns:a="http://schemas.openxmlformats.org/drawingml/2006/main" xmlns:r="http://schemas.openxmlformats.org/officeDocument/2006/relationships" xmlns:p="http://schemas.openxmlformats.org/presentationml/2006/main">
-  <p:cSld>
-    <p:spTree>
-      <p:nvGrpSpPr>
-        <p:cNvPr id="1" name=""/>
-        <p:cNvGrpSpPr/>
-        <p:nvPr/>
-      </p:nvGrpSpPr>
-      <p:grpSpPr>
-        <a:xfrm>
-          <a:off x="0" y="0"/>
-          <a:ext cx="0" cy="0"/>
-          <a:chOff x="0" y="0"/>
-          <a:chExt cx="0" cy="0"/>
-        </a:xfrm>
-      </p:grpSpPr>
-      <p:sp>
-        <p:nvSpPr>
-          <p:cNvPr id="2" name="Title 1"/>
-          <p:cNvSpPr>
-            <a:spLocks noGrp="1"/>
-          </p:cNvSpPr>
-          <p:nvPr>
-            <p:ph type="title"/>
-          </p:nvPr>
-        </p:nvSpPr>
-        <p:spPr>
-          <a:xfrm>
-            <a:off x="457200" y="205979"/>
-            <a:ext cx="8229600" cy="857250"/>
-          </a:xfrm>
-        </p:spPr>
-        <p:txBody>
-          <a:bodyPr/>
-          <a:lstStyle/>
-          <a:p>
-            <a:pPr lvl="0" indent="0" marL="0">
-              <a:buNone/>
-            </a:pPr>
-            <a:r>
-              <a:rPr/>
-              <a:t>Out-of-bag: free validation</a:t>
-            </a:r>
-          </a:p>
-        </p:txBody>
-      </p:sp>
-      <p:sp>
-        <p:nvSpPr>
-          <p:cNvPr id="3" name="Content Placeholder 2"/>
-          <p:cNvSpPr>
-            <a:spLocks noGrp="1"/>
-          </p:cNvSpPr>
-          <p:nvPr>
-            <p:ph idx="1"/>
-          </p:nvPr>
-        </p:nvSpPr>
-        <p:spPr>
-          <a:xfrm>
-            <a:off x="457200" y="1200151"/>
-            <a:ext cx="8229600" cy="3394472"/>
-          </a:xfrm>
-        </p:spPr>
-        <p:txBody>
-          <a:bodyPr/>
-          <a:lstStyle/>
-          <a:p>
-            <a:pPr lvl="0"/>
-            <a:r>
-              <a:rPr/>
-              <a:t>Every out-of-bag row is validation data for the tree that missed it</a:t>
-            </a:r>
-          </a:p>
-          <a:p>
-            <a:pPr lvl="0"/>
-            <a:r>
-              <a:rPr/>
-              <a:t>Averaging them gives the </a:t>
-            </a:r>
-            <a:r>
-              <a:rPr b="1"/>
-              <a:t>OOB score</a:t>
-            </a:r>
-            <a:r>
-              <a:rPr/>
-              <a:t>, at no extra split</a:t>
-            </a:r>
-          </a:p>
-          <a:p>
-            <a:pPr lvl="0"/>
-            <a:r>
-              <a:rPr/>
-              <a:t>A 300-tree forest: OOB </a:t>
-            </a:r>
-            <a:r>
-              <a:rPr b="1"/>
-              <a:t>0.9117</a:t>
-            </a:r>
-            <a:r>
-              <a:rPr/>
-              <a:t>, 5-fold cross-validated </a:t>
-            </a:r>
-            <a:r>
-              <a:rPr b="1"/>
-              <a:t>0.9117 ± 0.021</a:t>
-            </a:r>
-          </a:p>
-          <a:p>
-            <a:pPr lvl="0"/>
-            <a:r>
-              <a:rPr/>
-              <a:t>That match to four decimals is </a:t>
-            </a:r>
-            <a:r>
-              <a:rPr b="1"/>
-              <a:t>this seed’s luck</a:t>
-            </a:r>
-            <a:r>
-              <a:rPr/>
-              <a:t>: over twelve seeds the gap is 0.003: agreement to within their own noise, not to every decimal</a:t>
-            </a:r>
-          </a:p>
-        </p:txBody>
-      </p:sp>
-    </p:spTree>
-  </p:cSld>
-</p:sld>
-</file>
-
 <file path=ppt/slides/slide3.xml><?xml version="1.0" encoding="utf-8"?>
 <p:sld xmlns:a="http://schemas.openxmlformats.org/drawingml/2006/main" xmlns:r="http://schemas.openxmlformats.org/officeDocument/2006/relationships" xmlns:p="http://schemas.openxmlformats.org/presentationml/2006/main">
   <p:cSld>
@@ -12272,7 +12364,7 @@
             </a:pPr>
             <a:r>
               <a:rPr/>
-              <a:t>Why averaging reduces variance</a:t>
+              <a:t>Out-of-bag: free validation</a:t>
             </a:r>
           </a:p>
         </p:txBody>
@@ -12300,45 +12392,56 @@
             <a:pPr lvl="0"/>
             <a:r>
               <a:rPr/>
-              <a:t>Model each tree’s prediction as noisy, with variance σ², and let ρ be the correlation between any two trees</a:t>
+              <a:t>Every out-of-bag row is validation data for the tree that missed it</a:t>
             </a:r>
           </a:p>
           <a:p>
             <a:pPr lvl="0"/>
             <a:r>
               <a:rPr/>
-              <a:t>Averaging B trees drives variance toward a </a:t>
+              <a:t>Averaging them gives the </a:t>
             </a:r>
             <a:r>
               <a:rPr b="1"/>
-              <a:t>floor</a:t>
-            </a:r>
-            <a:r>
-              <a:rPr/>
-              <a:t> of ρσ², </a:t>
+              <a:t>OOB score</a:t>
+            </a:r>
+            <a:r>
+              <a:rPr/>
+              <a:t>, at no extra split</a:t>
+            </a:r>
+          </a:p>
+          <a:p>
+            <a:pPr lvl="0"/>
+            <a:r>
+              <a:rPr/>
+              <a:t>A 300-tree forest: OOB </a:t>
             </a:r>
             <a:r>
               <a:rPr b="1"/>
-              <a:t>not zero</a:t>
-            </a:r>
-            <a:r>
-              <a:rPr/>
-              <a:t>: adding trees past that point buys almost nothing</a:t>
+              <a:t>0.9117</a:t>
+            </a:r>
+            <a:r>
+              <a:rPr/>
+              <a:t>, 5-fold cross-validated </a:t>
+            </a:r>
+            <a:r>
+              <a:rPr b="1"/>
+              <a:t>0.9117 ± 0.021</a:t>
             </a:r>
           </a:p>
           <a:p>
             <a:pPr lvl="0"/>
             <a:r>
               <a:rPr/>
-              <a:t>Averaging </a:t>
+              <a:t>That match to four decimals is </a:t>
             </a:r>
             <a:r>
               <a:rPr b="1"/>
-              <a:t>cannot fix bias</a:t>
-            </a:r>
-            <a:r>
-              <a:rPr/>
-              <a:t>: unbiased-but-noisy trees average to unbiased; trees sharing a systematic error keep that error exactly</a:t>
+              <a:t>this seed’s luck</a:t>
+            </a:r>
+            <a:r>
+              <a:rPr/>
+              <a:t>: over twelve seeds the gap is 0.003: agreement to within their own noise, not to every decimal</a:t>
             </a:r>
           </a:p>
         </p:txBody>
@@ -12349,6 +12452,124 @@
 </file>
 
 <file path=ppt/slides/slide31.xml><?xml version="1.0" encoding="utf-8"?>
+<p:sld xmlns:a="http://schemas.openxmlformats.org/drawingml/2006/main" xmlns:r="http://schemas.openxmlformats.org/officeDocument/2006/relationships" xmlns:p="http://schemas.openxmlformats.org/presentationml/2006/main">
+  <p:cSld>
+    <p:spTree>
+      <p:nvGrpSpPr>
+        <p:cNvPr id="1" name=""/>
+        <p:cNvGrpSpPr/>
+        <p:nvPr/>
+      </p:nvGrpSpPr>
+      <p:grpSpPr>
+        <a:xfrm>
+          <a:off x="0" y="0"/>
+          <a:ext cx="0" cy="0"/>
+          <a:chOff x="0" y="0"/>
+          <a:chExt cx="0" cy="0"/>
+        </a:xfrm>
+      </p:grpSpPr>
+      <p:sp>
+        <p:nvSpPr>
+          <p:cNvPr id="2" name="Title 1"/>
+          <p:cNvSpPr>
+            <a:spLocks noGrp="1"/>
+          </p:cNvSpPr>
+          <p:nvPr>
+            <p:ph type="title"/>
+          </p:nvPr>
+        </p:nvSpPr>
+        <p:spPr>
+          <a:xfrm>
+            <a:off x="457200" y="205979"/>
+            <a:ext cx="8229600" cy="857250"/>
+          </a:xfrm>
+        </p:spPr>
+        <p:txBody>
+          <a:bodyPr/>
+          <a:lstStyle/>
+          <a:p>
+            <a:pPr lvl="0" indent="0" marL="0">
+              <a:buNone/>
+            </a:pPr>
+            <a:r>
+              <a:rPr/>
+              <a:t>Why averaging reduces variance</a:t>
+            </a:r>
+          </a:p>
+        </p:txBody>
+      </p:sp>
+      <p:sp>
+        <p:nvSpPr>
+          <p:cNvPr id="3" name="Content Placeholder 2"/>
+          <p:cNvSpPr>
+            <a:spLocks noGrp="1"/>
+          </p:cNvSpPr>
+          <p:nvPr>
+            <p:ph idx="1"/>
+          </p:nvPr>
+        </p:nvSpPr>
+        <p:spPr>
+          <a:xfrm>
+            <a:off x="457200" y="1200151"/>
+            <a:ext cx="8229600" cy="3394472"/>
+          </a:xfrm>
+        </p:spPr>
+        <p:txBody>
+          <a:bodyPr/>
+          <a:lstStyle/>
+          <a:p>
+            <a:pPr lvl="0"/>
+            <a:r>
+              <a:rPr/>
+              <a:t>Model each tree’s prediction as noisy, with variance σ², and let ρ be the correlation between any two trees</a:t>
+            </a:r>
+          </a:p>
+          <a:p>
+            <a:pPr lvl="0"/>
+            <a:r>
+              <a:rPr/>
+              <a:t>Averaging B trees drives variance toward a </a:t>
+            </a:r>
+            <a:r>
+              <a:rPr b="1"/>
+              <a:t>floor</a:t>
+            </a:r>
+            <a:r>
+              <a:rPr/>
+              <a:t> of ρσ², </a:t>
+            </a:r>
+            <a:r>
+              <a:rPr b="1"/>
+              <a:t>not zero</a:t>
+            </a:r>
+            <a:r>
+              <a:rPr/>
+              <a:t>: adding trees past that point buys almost nothing</a:t>
+            </a:r>
+          </a:p>
+          <a:p>
+            <a:pPr lvl="0"/>
+            <a:r>
+              <a:rPr/>
+              <a:t>Averaging </a:t>
+            </a:r>
+            <a:r>
+              <a:rPr b="1"/>
+              <a:t>cannot fix bias</a:t>
+            </a:r>
+            <a:r>
+              <a:rPr/>
+              <a:t>: unbiased-but-noisy trees average to unbiased; trees sharing a systematic error keep that error exactly</a:t>
+            </a:r>
+          </a:p>
+        </p:txBody>
+      </p:sp>
+    </p:spTree>
+  </p:cSld>
+</p:sld>
+</file>
+
+<file path=ppt/slides/slide32.xml><?xml version="1.0" encoding="utf-8"?>
 <p:sld xmlns:a="http://schemas.openxmlformats.org/drawingml/2006/main" xmlns:r="http://schemas.openxmlformats.org/officeDocument/2006/relationships" xmlns:p="http://schemas.openxmlformats.org/presentationml/2006/main">
   <p:cSld>
     <p:spTree>
@@ -12430,7 +12651,7 @@
 </p:sld>
 </file>
 
-<file path=ppt/slides/slide32.xml><?xml version="1.0" encoding="utf-8"?>
+<file path=ppt/slides/slide33.xml><?xml version="1.0" encoding="utf-8"?>
 <p:sld xmlns:a="http://schemas.openxmlformats.org/drawingml/2006/main" xmlns:r="http://schemas.openxmlformats.org/officeDocument/2006/relationships" xmlns:p="http://schemas.openxmlformats.org/presentationml/2006/main">
   <p:cSld>
     <p:spTree>
@@ -12655,7 +12876,7 @@
 </p:sld>
 </file>
 
-<file path=ppt/slides/slide33.xml><?xml version="1.0" encoding="utf-8"?>
+<file path=ppt/slides/slide34.xml><?xml version="1.0" encoding="utf-8"?>
 <p:sld xmlns:a="http://schemas.openxmlformats.org/drawingml/2006/main" xmlns:r="http://schemas.openxmlformats.org/officeDocument/2006/relationships" xmlns:p="http://schemas.openxmlformats.org/presentationml/2006/main">
   <p:cSld>
     <p:spTree>
@@ -12779,7 +13000,7 @@
 </p:sld>
 </file>
 
-<file path=ppt/slides/slide34.xml><?xml version="1.0" encoding="utf-8"?>
+<file path=ppt/slides/slide35.xml><?xml version="1.0" encoding="utf-8"?>
 <p:sld xmlns:a="http://schemas.openxmlformats.org/drawingml/2006/main" xmlns:r="http://schemas.openxmlformats.org/officeDocument/2006/relationships" xmlns:p="http://schemas.openxmlformats.org/presentationml/2006/main">
   <p:cSld>
     <p:spTree>
@@ -13051,7 +13272,7 @@
 </p:sld>
 </file>
 
-<file path=ppt/slides/slide35.xml><?xml version="1.0" encoding="utf-8"?>
+<file path=ppt/slides/slide36.xml><?xml version="1.0" encoding="utf-8"?>
 <p:sld xmlns:a="http://schemas.openxmlformats.org/drawingml/2006/main" xmlns:r="http://schemas.openxmlformats.org/officeDocument/2006/relationships" xmlns:p="http://schemas.openxmlformats.org/presentationml/2006/main">
   <p:cSld>
     <p:spTree>
@@ -13161,7 +13382,7 @@
 </p:sld>
 </file>
 
-<file path=ppt/slides/slide36.xml><?xml version="1.0" encoding="utf-8"?>
+<file path=ppt/slides/slide37.xml><?xml version="1.0" encoding="utf-8"?>
 <p:sld xmlns:a="http://schemas.openxmlformats.org/drawingml/2006/main" xmlns:r="http://schemas.openxmlformats.org/officeDocument/2006/relationships" xmlns:p="http://schemas.openxmlformats.org/presentationml/2006/main">
   <p:cSld>
     <p:spTree>
@@ -13495,100 +13716,6 @@
 </p:sld>
 </file>
 
-<file path=ppt/slides/slide37.xml><?xml version="1.0" encoding="utf-8"?>
-<p:sld xmlns:a="http://schemas.openxmlformats.org/drawingml/2006/main" xmlns:r="http://schemas.openxmlformats.org/officeDocument/2006/relationships" xmlns:p="http://schemas.openxmlformats.org/presentationml/2006/main">
-  <p:cSld>
-    <p:spTree>
-      <p:nvGrpSpPr>
-        <p:cNvPr id="1" name=""/>
-        <p:cNvGrpSpPr/>
-        <p:nvPr/>
-      </p:nvGrpSpPr>
-      <p:grpSpPr>
-        <a:xfrm>
-          <a:off x="0" y="0"/>
-          <a:ext cx="0" cy="0"/>
-          <a:chOff x="0" y="0"/>
-          <a:chExt cx="0" cy="0"/>
-        </a:xfrm>
-      </p:grpSpPr>
-      <p:sp>
-        <p:nvSpPr>
-          <p:cNvPr id="2" name="Title 1"/>
-          <p:cNvSpPr>
-            <a:spLocks noGrp="1"/>
-          </p:cNvSpPr>
-          <p:nvPr>
-            <p:ph type="title"/>
-          </p:nvPr>
-        </p:nvSpPr>
-        <p:spPr>
-          <a:xfrm>
-            <a:off x="457200" y="205979"/>
-            <a:ext cx="8229600" cy="857250"/>
-          </a:xfrm>
-        </p:spPr>
-        <p:txBody>
-          <a:bodyPr/>
-          <a:lstStyle/>
-          <a:p>
-            <a:pPr lvl="0" indent="0" marL="0">
-              <a:buNone/>
-            </a:pPr>
-            <a:r>
-              <a:rPr/>
-              <a:t>Notebook 2, live</a:t>
-            </a:r>
-          </a:p>
-        </p:txBody>
-      </p:sp>
-      <p:sp>
-        <p:nvSpPr>
-          <p:cNvPr id="3" name="Content Placeholder 2"/>
-          <p:cNvSpPr>
-            <a:spLocks noGrp="1"/>
-          </p:cNvSpPr>
-          <p:nvPr>
-            <p:ph idx="1"/>
-          </p:nvPr>
-        </p:nvSpPr>
-        <p:spPr>
-          <a:xfrm>
-            <a:off x="457200" y="1200151"/>
-            <a:ext cx="8229600" cy="3394472"/>
-          </a:xfrm>
-        </p:spPr>
-        <p:txBody>
-          <a:bodyPr/>
-          <a:lstStyle/>
-          <a:p>
-            <a:pPr lvl="0"/>
-            <a:r>
-              <a:rPr/>
-              <a:t>Bagging and random forests, from scratch and against scikit-learn</a:t>
-            </a:r>
-          </a:p>
-          <a:p>
-            <a:pPr lvl="0"/>
-            <a:r>
-              <a:rPr/>
-              <a:t>The out-of-bag score checked against cross-validation</a:t>
-            </a:r>
-          </a:p>
-          <a:p>
-            <a:pPr lvl="0"/>
-            <a:r>
-              <a:rPr/>
-              <a:t>The noise-column experiment, run live</a:t>
-            </a:r>
-          </a:p>
-        </p:txBody>
-      </p:sp>
-    </p:spTree>
-  </p:cSld>
-</p:sld>
-</file>
-
 <file path=ppt/slides/slide38.xml><?xml version="1.0" encoding="utf-8"?>
 <p:sld xmlns:a="http://schemas.openxmlformats.org/drawingml/2006/main" xmlns:r="http://schemas.openxmlformats.org/officeDocument/2006/relationships" xmlns:p="http://schemas.openxmlformats.org/presentationml/2006/main">
   <p:cSld>
@@ -13631,7 +13758,7 @@
             </a:pPr>
             <a:r>
               <a:rPr/>
-              <a:t>Gradient boosting: correcting mistakes in sequence</a:t>
+              <a:t>Notebook 2, live</a:t>
             </a:r>
           </a:p>
         </p:txBody>
@@ -13659,60 +13786,21 @@
             <a:pPr lvl="0"/>
             <a:r>
               <a:rPr/>
-              <a:t>Bagging and random forests build trees </a:t>
-            </a:r>
-            <a:r>
-              <a:rPr b="1"/>
-              <a:t>independently</a:t>
-            </a:r>
-            <a:r>
-              <a:rPr/>
-              <a:t> and average at the end</a:t>
+              <a:t>Bagging and random forests, from scratch and against scikit-learn</a:t>
             </a:r>
           </a:p>
           <a:p>
             <a:pPr lvl="0"/>
             <a:r>
-              <a:rPr b="1"/>
-              <a:t>Boosting</a:t>
-            </a:r>
-            <a:r>
-              <a:rPr/>
-              <a:t> builds trees </a:t>
-            </a:r>
-            <a:r>
-              <a:rPr b="1"/>
-              <a:t>in sequence</a:t>
-            </a:r>
-            <a:r>
-              <a:rPr/>
-              <a:t>: each new tree is fit specifically to correct what the trees so far got wrong</a:t>
+              <a:rPr/>
+              <a:t>The out-of-bag score checked against cross-validation</a:t>
             </a:r>
           </a:p>
           <a:p>
             <a:pPr lvl="0"/>
             <a:r>
               <a:rPr/>
-              <a:t>Each addition is a shallow tree: depth 2 or 3, a </a:t>
-            </a:r>
-            <a:r>
-              <a:rPr b="1"/>
-              <a:t>weak learner</a:t>
-            </a:r>
-          </a:p>
-          <a:p>
-            <a:pPr lvl="0"/>
-            <a:r>
-              <a:rPr/>
-              <a:t>The learning rate α sets </a:t>
-            </a:r>
-            <a:r>
-              <a:rPr b="1"/>
-              <a:t>how much</a:t>
-            </a:r>
-            <a:r>
-              <a:rPr/>
-              <a:t> of each new tree’s correction is actually applied</a:t>
+              <a:t>The noise-column experiment, run live</a:t>
             </a:r>
           </a:p>
         </p:txBody>
@@ -13723,6 +13811,257 @@
 </file>
 
 <file path=ppt/slides/slide39.xml><?xml version="1.0" encoding="utf-8"?>
+<p:sld xmlns:a="http://schemas.openxmlformats.org/drawingml/2006/main" xmlns:r="http://schemas.openxmlformats.org/officeDocument/2006/relationships" xmlns:p="http://schemas.openxmlformats.org/presentationml/2006/main">
+  <p:cSld>
+    <p:spTree>
+      <p:nvGrpSpPr>
+        <p:cNvPr id="1" name=""/>
+        <p:cNvGrpSpPr/>
+        <p:nvPr/>
+      </p:nvGrpSpPr>
+      <p:grpSpPr>
+        <a:xfrm>
+          <a:off x="0" y="0"/>
+          <a:ext cx="0" cy="0"/>
+          <a:chOff x="0" y="0"/>
+          <a:chExt cx="0" cy="0"/>
+        </a:xfrm>
+      </p:grpSpPr>
+      <p:sp>
+        <p:nvSpPr>
+          <p:cNvPr id="2" name="Title 1"/>
+          <p:cNvSpPr>
+            <a:spLocks noGrp="1"/>
+          </p:cNvSpPr>
+          <p:nvPr>
+            <p:ph type="title"/>
+          </p:nvPr>
+        </p:nvSpPr>
+        <p:spPr>
+          <a:xfrm>
+            <a:off x="457200" y="205979"/>
+            <a:ext cx="8229600" cy="857250"/>
+          </a:xfrm>
+        </p:spPr>
+        <p:txBody>
+          <a:bodyPr/>
+          <a:lstStyle/>
+          <a:p>
+            <a:pPr lvl="0" indent="0" marL="0">
+              <a:buNone/>
+            </a:pPr>
+            <a:r>
+              <a:rPr/>
+              <a:t>Gradient boosting: correcting mistakes in sequence</a:t>
+            </a:r>
+          </a:p>
+        </p:txBody>
+      </p:sp>
+      <p:sp>
+        <p:nvSpPr>
+          <p:cNvPr id="3" name="Content Placeholder 2"/>
+          <p:cNvSpPr>
+            <a:spLocks noGrp="1"/>
+          </p:cNvSpPr>
+          <p:nvPr>
+            <p:ph idx="1"/>
+          </p:nvPr>
+        </p:nvSpPr>
+        <p:spPr>
+          <a:xfrm>
+            <a:off x="457200" y="1200151"/>
+            <a:ext cx="8229600" cy="3394472"/>
+          </a:xfrm>
+        </p:spPr>
+        <p:txBody>
+          <a:bodyPr/>
+          <a:lstStyle/>
+          <a:p>
+            <a:pPr lvl="0"/>
+            <a:r>
+              <a:rPr/>
+              <a:t>Bagging and random forests build trees </a:t>
+            </a:r>
+            <a:r>
+              <a:rPr b="1"/>
+              <a:t>independently</a:t>
+            </a:r>
+            <a:r>
+              <a:rPr/>
+              <a:t> and average at the end</a:t>
+            </a:r>
+          </a:p>
+          <a:p>
+            <a:pPr lvl="0"/>
+            <a:r>
+              <a:rPr b="1"/>
+              <a:t>Boosting</a:t>
+            </a:r>
+            <a:r>
+              <a:rPr/>
+              <a:t> builds trees </a:t>
+            </a:r>
+            <a:r>
+              <a:rPr b="1"/>
+              <a:t>in sequence</a:t>
+            </a:r>
+            <a:r>
+              <a:rPr/>
+              <a:t>: each new tree is fit specifically to correct what the trees so far got wrong</a:t>
+            </a:r>
+          </a:p>
+          <a:p>
+            <a:pPr lvl="0"/>
+            <a:r>
+              <a:rPr/>
+              <a:t>Each addition is a shallow tree: depth 2 or 3, a </a:t>
+            </a:r>
+            <a:r>
+              <a:rPr b="1"/>
+              <a:t>weak learner</a:t>
+            </a:r>
+          </a:p>
+          <a:p>
+            <a:pPr lvl="0"/>
+            <a:r>
+              <a:rPr/>
+              <a:t>The learning rate α sets </a:t>
+            </a:r>
+            <a:r>
+              <a:rPr b="1"/>
+              <a:t>how much</a:t>
+            </a:r>
+            <a:r>
+              <a:rPr/>
+              <a:t> of each new tree’s correction is actually applied</a:t>
+            </a:r>
+          </a:p>
+        </p:txBody>
+      </p:sp>
+    </p:spTree>
+  </p:cSld>
+</p:sld>
+</file>
+
+<file path=ppt/slides/slide4.xml><?xml version="1.0" encoding="utf-8"?>
+<p:sld xmlns:a="http://schemas.openxmlformats.org/drawingml/2006/main" xmlns:r="http://schemas.openxmlformats.org/officeDocument/2006/relationships" xmlns:p="http://schemas.openxmlformats.org/presentationml/2006/main">
+  <p:cSld>
+    <p:spTree>
+      <p:nvGrpSpPr>
+        <p:cNvPr id="1" name=""/>
+        <p:cNvGrpSpPr/>
+        <p:nvPr/>
+      </p:nvGrpSpPr>
+      <p:grpSpPr>
+        <a:xfrm>
+          <a:off x="0" y="0"/>
+          <a:ext cx="0" cy="0"/>
+          <a:chOff x="0" y="0"/>
+          <a:chExt cx="0" cy="0"/>
+        </a:xfrm>
+      </p:grpSpPr>
+      <p:sp>
+        <p:nvSpPr>
+          <p:cNvPr id="2" name="Title 1"/>
+          <p:cNvSpPr>
+            <a:spLocks noGrp="1"/>
+          </p:cNvSpPr>
+          <p:nvPr>
+            <p:ph type="title"/>
+          </p:nvPr>
+        </p:nvSpPr>
+        <p:spPr>
+          <a:xfrm>
+            <a:off x="457200" y="205979"/>
+            <a:ext cx="8229600" cy="857250"/>
+          </a:xfrm>
+        </p:spPr>
+        <p:txBody>
+          <a:bodyPr/>
+          <a:lstStyle/>
+          <a:p>
+            <a:pPr lvl="0" indent="0" marL="0">
+              <a:buNone/>
+            </a:pPr>
+            <a:r>
+              <a:rPr/>
+              <a:t>1,200 loan applicants, two figures each</a:t>
+            </a:r>
+          </a:p>
+        </p:txBody>
+      </p:sp>
+      <p:sp>
+        <p:nvSpPr>
+          <p:cNvPr id="3" name="Content Placeholder 2"/>
+          <p:cNvSpPr>
+            <a:spLocks noGrp="1"/>
+          </p:cNvSpPr>
+          <p:nvPr>
+            <p:ph idx="1"/>
+          </p:nvPr>
+        </p:nvSpPr>
+        <p:spPr>
+          <a:xfrm>
+            <a:off x="457200" y="1200151"/>
+            <a:ext cx="8229600" cy="3394472"/>
+          </a:xfrm>
+        </p:spPr>
+        <p:txBody>
+          <a:bodyPr/>
+          <a:lstStyle/>
+          <a:p>
+            <a:pPr lvl="0"/>
+            <a:r>
+              <a:rPr/>
+              <a:t>Income in thousands of euros a year, debt-to-income ratio</a:t>
+            </a:r>
+          </a:p>
+          <a:p>
+            <a:pPr lvl="0"/>
+            <a:r>
+              <a:rPr/>
+              <a:t>Underwriting is a </a:t>
+            </a:r>
+            <a:r>
+              <a:rPr b="1"/>
+              <a:t>checklist</a:t>
+            </a:r>
+            <a:r>
+              <a:rPr/>
+              <a:t>, not a formula: an income floor, a debt ceiling, and two “stressed” combinations in between</a:t>
+            </a:r>
+          </a:p>
+          <a:p>
+            <a:pPr lvl="0"/>
+            <a:r>
+              <a:rPr b="1"/>
+              <a:t>7%</a:t>
+            </a:r>
+            <a:r>
+              <a:rPr/>
+              <a:t> of labels are deliberately flipped; </a:t>
+            </a:r>
+            <a:r>
+              <a:rPr b="1"/>
+              <a:t>38.7%</a:t>
+            </a:r>
+            <a:r>
+              <a:rPr/>
+              <a:t> of applicants defaulted, so the majority baseline is </a:t>
+            </a:r>
+            <a:r>
+              <a:rPr b="1"/>
+              <a:t>0.613</a:t>
+            </a:r>
+          </a:p>
+        </p:txBody>
+      </p:sp>
+    </p:spTree>
+  </p:cSld>
+</p:sld>
+</file>
+
+<file path=ppt/slides/slide40.xml><?xml version="1.0" encoding="utf-8"?>
 <p:sld xmlns:a="http://schemas.openxmlformats.org/drawingml/2006/main" xmlns:r="http://schemas.openxmlformats.org/officeDocument/2006/relationships" xmlns:p="http://schemas.openxmlformats.org/presentationml/2006/main">
   <p:cSld>
     <p:spTree>
@@ -13804,7 +14143,7 @@
 </p:sld>
 </file>
 
-<file path=ppt/slides/slide4.xml><?xml version="1.0" encoding="utf-8"?>
+<file path=ppt/slides/slide41.xml><?xml version="1.0" encoding="utf-8"?>
 <p:sld xmlns:a="http://schemas.openxmlformats.org/drawingml/2006/main" xmlns:r="http://schemas.openxmlformats.org/officeDocument/2006/relationships" xmlns:p="http://schemas.openxmlformats.org/presentationml/2006/main">
   <p:cSld>
     <p:spTree>
@@ -13846,7 +14185,7 @@
             </a:pPr>
             <a:r>
               <a:rPr/>
-              <a:t>1,200 loan applicants, two figures each</a:t>
+              <a:t>What each tree is fit to</a:t>
             </a:r>
           </a:p>
         </p:txBody>
@@ -13874,45 +14213,37 @@
             <a:pPr lvl="0"/>
             <a:r>
               <a:rPr/>
-              <a:t>Income in thousands of euros a year, debt-to-income ratio</a:t>
+              <a:t>For squared-error regression, “what remains unexplained” has an exact name: the </a:t>
+            </a:r>
+            <a:r>
+              <a:rPr b="1"/>
+              <a:t>residual</a:t>
+            </a:r>
+            <a:r>
+              <a:rPr/>
+              <a:t>, y - Fₜ₋₁(x)</a:t>
             </a:r>
           </a:p>
           <a:p>
             <a:pPr lvl="0"/>
             <a:r>
               <a:rPr/>
-              <a:t>Underwriting is a </a:t>
+              <a:t>This is a special case of a more general idea: </a:t>
             </a:r>
             <a:r>
               <a:rPr b="1"/>
-              <a:t>checklist</a:t>
-            </a:r>
-            <a:r>
-              <a:rPr/>
-              <a:t>, not a formula: an income floor, a debt ceiling, and two “stressed” combinations in between</a:t>
+              <a:t>functional gradient descent</a:t>
+            </a:r>
+            <a:r>
+              <a:rPr/>
+              <a:t>: hₜ approximates the negative gradient of the loss with respect to Fₜ₋₁</a:t>
             </a:r>
           </a:p>
           <a:p>
             <a:pPr lvl="0"/>
             <a:r>
-              <a:rPr b="1"/>
-              <a:t>7%</a:t>
-            </a:r>
-            <a:r>
-              <a:rPr/>
-              <a:t> of labels are deliberately flipped; </a:t>
-            </a:r>
-            <a:r>
-              <a:rPr b="1"/>
-              <a:t>38.7%</a:t>
-            </a:r>
-            <a:r>
-              <a:rPr/>
-              <a:t> of applicants defaulted, so the majority baseline is </a:t>
-            </a:r>
-            <a:r>
-              <a:rPr b="1"/>
-              <a:t>0.613</a:t>
+              <a:rPr/>
+              <a:t>For squared error, “fit the residual” and “fit the negative gradient” coincide exactly</a:t>
             </a:r>
           </a:p>
         </p:txBody>
@@ -13922,117 +14253,7 @@
 </p:sld>
 </file>
 
-<file path=ppt/slides/slide40.xml><?xml version="1.0" encoding="utf-8"?>
-<p:sld xmlns:a="http://schemas.openxmlformats.org/drawingml/2006/main" xmlns:r="http://schemas.openxmlformats.org/officeDocument/2006/relationships" xmlns:p="http://schemas.openxmlformats.org/presentationml/2006/main">
-  <p:cSld>
-    <p:spTree>
-      <p:nvGrpSpPr>
-        <p:cNvPr id="1" name=""/>
-        <p:cNvGrpSpPr/>
-        <p:nvPr/>
-      </p:nvGrpSpPr>
-      <p:grpSpPr>
-        <a:xfrm>
-          <a:off x="0" y="0"/>
-          <a:ext cx="0" cy="0"/>
-          <a:chOff x="0" y="0"/>
-          <a:chExt cx="0" cy="0"/>
-        </a:xfrm>
-      </p:grpSpPr>
-      <p:sp>
-        <p:nvSpPr>
-          <p:cNvPr id="2" name="Title 1"/>
-          <p:cNvSpPr>
-            <a:spLocks noGrp="1"/>
-          </p:cNvSpPr>
-          <p:nvPr>
-            <p:ph type="title"/>
-          </p:nvPr>
-        </p:nvSpPr>
-        <p:spPr>
-          <a:xfrm>
-            <a:off x="457200" y="205979"/>
-            <a:ext cx="8229600" cy="857250"/>
-          </a:xfrm>
-        </p:spPr>
-        <p:txBody>
-          <a:bodyPr/>
-          <a:lstStyle/>
-          <a:p>
-            <a:pPr lvl="0" indent="0" marL="0">
-              <a:buNone/>
-            </a:pPr>
-            <a:r>
-              <a:rPr/>
-              <a:t>What each tree is fit to</a:t>
-            </a:r>
-          </a:p>
-        </p:txBody>
-      </p:sp>
-      <p:sp>
-        <p:nvSpPr>
-          <p:cNvPr id="3" name="Content Placeholder 2"/>
-          <p:cNvSpPr>
-            <a:spLocks noGrp="1"/>
-          </p:cNvSpPr>
-          <p:nvPr>
-            <p:ph idx="1"/>
-          </p:nvPr>
-        </p:nvSpPr>
-        <p:spPr>
-          <a:xfrm>
-            <a:off x="457200" y="1200151"/>
-            <a:ext cx="8229600" cy="3394472"/>
-          </a:xfrm>
-        </p:spPr>
-        <p:txBody>
-          <a:bodyPr/>
-          <a:lstStyle/>
-          <a:p>
-            <a:pPr lvl="0"/>
-            <a:r>
-              <a:rPr/>
-              <a:t>For squared-error regression, “what remains unexplained” has an exact name: the </a:t>
-            </a:r>
-            <a:r>
-              <a:rPr b="1"/>
-              <a:t>residual</a:t>
-            </a:r>
-            <a:r>
-              <a:rPr/>
-              <a:t>, y - Fₜ₋₁(x)</a:t>
-            </a:r>
-          </a:p>
-          <a:p>
-            <a:pPr lvl="0"/>
-            <a:r>
-              <a:rPr/>
-              <a:t>This is a special case of a more general idea: </a:t>
-            </a:r>
-            <a:r>
-              <a:rPr b="1"/>
-              <a:t>functional gradient descent</a:t>
-            </a:r>
-            <a:r>
-              <a:rPr/>
-              <a:t>: hₜ approximates the negative gradient of the loss with respect to Fₜ₋₁</a:t>
-            </a:r>
-          </a:p>
-          <a:p>
-            <a:pPr lvl="0"/>
-            <a:r>
-              <a:rPr/>
-              <a:t>For squared error, “fit the residual” and “fit the negative gradient” coincide exactly</a:t>
-            </a:r>
-          </a:p>
-        </p:txBody>
-      </p:sp>
-    </p:spTree>
-  </p:cSld>
-</p:sld>
-</file>
-
-<file path=ppt/slides/slide41.xml><?xml version="1.0" encoding="utf-8"?>
+<file path=ppt/slides/slide42.xml><?xml version="1.0" encoding="utf-8"?>
 <p:sld xmlns:a="http://schemas.openxmlformats.org/drawingml/2006/main" xmlns:r="http://schemas.openxmlformats.org/officeDocument/2006/relationships" xmlns:p="http://schemas.openxmlformats.org/presentationml/2006/main">
   <p:cSld>
     <p:spTree>
@@ -14114,131 +14335,6 @@
 </p:sld>
 </file>
 
-<file path=ppt/slides/slide42.xml><?xml version="1.0" encoding="utf-8"?>
-<p:sld xmlns:a="http://schemas.openxmlformats.org/drawingml/2006/main" xmlns:r="http://schemas.openxmlformats.org/officeDocument/2006/relationships" xmlns:p="http://schemas.openxmlformats.org/presentationml/2006/main">
-  <p:cSld>
-    <p:spTree>
-      <p:nvGrpSpPr>
-        <p:cNvPr id="1" name=""/>
-        <p:cNvGrpSpPr/>
-        <p:nvPr/>
-      </p:nvGrpSpPr>
-      <p:grpSpPr>
-        <a:xfrm>
-          <a:off x="0" y="0"/>
-          <a:ext cx="0" cy="0"/>
-          <a:chOff x="0" y="0"/>
-          <a:chExt cx="0" cy="0"/>
-        </a:xfrm>
-      </p:grpSpPr>
-      <p:sp>
-        <p:nvSpPr>
-          <p:cNvPr id="2" name="Title 1"/>
-          <p:cNvSpPr>
-            <a:spLocks noGrp="1"/>
-          </p:cNvSpPr>
-          <p:nvPr>
-            <p:ph type="title"/>
-          </p:nvPr>
-        </p:nvSpPr>
-        <p:spPr>
-          <a:xfrm>
-            <a:off x="457200" y="205979"/>
-            <a:ext cx="8229600" cy="857250"/>
-          </a:xfrm>
-        </p:spPr>
-        <p:txBody>
-          <a:bodyPr/>
-          <a:lstStyle/>
-          <a:p>
-            <a:pPr lvl="0" indent="0" marL="0">
-              <a:buNone/>
-            </a:pPr>
-            <a:r>
-              <a:rPr/>
-              <a:t>Reading the picture</a:t>
-            </a:r>
-          </a:p>
-        </p:txBody>
-      </p:sp>
-      <p:sp>
-        <p:nvSpPr>
-          <p:cNvPr id="3" name="Content Placeholder 2"/>
-          <p:cNvSpPr>
-            <a:spLocks noGrp="1"/>
-          </p:cNvSpPr>
-          <p:nvPr>
-            <p:ph idx="1"/>
-          </p:nvPr>
-        </p:nvSpPr>
-        <p:spPr>
-          <a:xfrm>
-            <a:off x="457200" y="1200151"/>
-            <a:ext cx="8229600" cy="3394472"/>
-          </a:xfrm>
-        </p:spPr>
-        <p:txBody>
-          <a:bodyPr/>
-          <a:lstStyle/>
-          <a:p>
-            <a:pPr lvl="0"/>
-            <a:r>
-              <a:rPr b="1"/>
-              <a:t>1 tree</a:t>
-            </a:r>
-            <a:r>
-              <a:rPr/>
-              <a:t>: mean squared error (MSE) against the true function 0.395, barely moves the flat guess</a:t>
-            </a:r>
-          </a:p>
-          <a:p>
-            <a:pPr lvl="0"/>
-            <a:r>
-              <a:rPr b="1"/>
-              <a:t>5 trees</a:t>
-            </a:r>
-            <a:r>
-              <a:rPr/>
-              <a:t>: MSE 0.068, the coarse shape appears</a:t>
-            </a:r>
-          </a:p>
-          <a:p>
-            <a:pPr lvl="0"/>
-            <a:r>
-              <a:rPr b="1"/>
-              <a:t>20 trees</a:t>
-            </a:r>
-            <a:r>
-              <a:rPr/>
-              <a:t>: MSE </a:t>
-            </a:r>
-            <a:r>
-              <a:rPr b="1"/>
-              <a:t>0.012</a:t>
-            </a:r>
-            <a:r>
-              <a:rPr/>
-              <a:t>, the ensemble’s best point</a:t>
-            </a:r>
-          </a:p>
-          <a:p>
-            <a:pPr lvl="0"/>
-            <a:r>
-              <a:rPr b="1"/>
-              <a:t>60 trees</a:t>
-            </a:r>
-            <a:r>
-              <a:rPr/>
-              <a:t>: MSE rises back to 0.018, tracking noise, not signal</a:t>
-            </a:r>
-          </a:p>
-        </p:txBody>
-      </p:sp>
-    </p:spTree>
-  </p:cSld>
-</p:sld>
-</file>
-
 <file path=ppt/slides/slide43.xml><?xml version="1.0" encoding="utf-8"?>
 <p:sld xmlns:a="http://schemas.openxmlformats.org/drawingml/2006/main" xmlns:r="http://schemas.openxmlformats.org/officeDocument/2006/relationships" xmlns:p="http://schemas.openxmlformats.org/presentationml/2006/main">
   <p:cSld>
@@ -14281,7 +14377,7 @@
             </a:pPr>
             <a:r>
               <a:rPr/>
-              <a:t>Classification: the same idea, a different gradient</a:t>
+              <a:t>Reading the picture</a:t>
             </a:r>
           </a:p>
         </p:txBody>
@@ -14308,45 +14404,53 @@
           <a:p>
             <a:pPr lvl="0"/>
             <a:r>
-              <a:rPr/>
-              <a:t>The label y is 0 or 1; the ensemble’s output becomes a probability, p = σ(F)</a:t>
+              <a:rPr b="1"/>
+              <a:t>1 tree</a:t>
+            </a:r>
+            <a:r>
+              <a:rPr/>
+              <a:t>: mean squared error (MSE) against the true function 0.395, barely moves the flat guess</a:t>
             </a:r>
           </a:p>
           <a:p>
             <a:pPr lvl="0"/>
             <a:r>
-              <a:rPr/>
-              <a:t>The loss is </a:t>
-            </a:r>
-            <a:r>
               <a:rPr b="1"/>
-              <a:t>log-loss</a:t>
-            </a:r>
-            <a:r>
-              <a:rPr/>
-              <a:t>: lesson 4’s loss for logistic regression</a:t>
+              <a:t>5 trees</a:t>
+            </a:r>
+            <a:r>
+              <a:rPr/>
+              <a:t>: MSE 0.068, the coarse shape appears</a:t>
             </a:r>
           </a:p>
           <a:p>
             <a:pPr lvl="0"/>
             <a:r>
-              <a:rPr/>
-              <a:t>The negative gradient, the </a:t>
-            </a:r>
-            <a:r>
               <a:rPr b="1"/>
-              <a:t>pseudo-residual</a:t>
-            </a:r>
-            <a:r>
-              <a:rPr/>
-              <a:t> each tree fits, is y - p</a:t>
+              <a:t>20 trees</a:t>
+            </a:r>
+            <a:r>
+              <a:rPr/>
+              <a:t>: MSE </a:t>
+            </a:r>
+            <a:r>
+              <a:rPr b="1"/>
+              <a:t>0.012</a:t>
+            </a:r>
+            <a:r>
+              <a:rPr/>
+              <a:t>, the ensemble’s best point</a:t>
             </a:r>
           </a:p>
           <a:p>
             <a:pPr lvl="0"/>
             <a:r>
-              <a:rPr/>
-              <a:t>True label minus predicted probability: lesson 4’s error term exactly</a:t>
+              <a:rPr b="1"/>
+              <a:t>60 trees</a:t>
+            </a:r>
+            <a:r>
+              <a:rPr/>
+              <a:t>: MSE rises back to 0.018, tracking noise, not signal</a:t>
             </a:r>
           </a:p>
         </p:txBody>
@@ -14398,7 +14502,7 @@
             </a:pPr>
             <a:r>
               <a:rPr/>
-              <a:t>On the loan data</a:t>
+              <a:t>Classification: the same idea, a different gradient</a:t>
             </a:r>
           </a:p>
         </p:txBody>
@@ -14425,44 +14529,45 @@
           <a:p>
             <a:pPr lvl="0"/>
             <a:r>
-              <a:rPr>
-                <a:latin typeface="Courier"/>
-              </a:rPr>
-              <a:t>GradientBoostingClassifier</a:t>
-            </a:r>
-            <a:r>
-              <a:rPr/>
-              <a:t>, defaults: </a:t>
+              <a:rPr/>
+              <a:t>The label y is 0 or 1; the ensemble’s output becomes a probability, p = σ(F)</a:t>
+            </a:r>
+          </a:p>
+          <a:p>
+            <a:pPr lvl="0"/>
+            <a:r>
+              <a:rPr/>
+              <a:t>The loss is </a:t>
             </a:r>
             <a:r>
               <a:rPr b="1"/>
-              <a:t>100 trees</a:t>
-            </a:r>
-            <a:r>
-              <a:rPr/>
-              <a:t>, learning rate α = 0.1</a:t>
+              <a:t>log-loss</a:t>
+            </a:r>
+            <a:r>
+              <a:rPr/>
+              <a:t>: lesson 4’s loss for logistic regression</a:t>
             </a:r>
           </a:p>
           <a:p>
             <a:pPr lvl="0"/>
             <a:r>
               <a:rPr/>
-              <a:t>Reaches </a:t>
+              <a:t>The negative gradient, the </a:t>
             </a:r>
             <a:r>
               <a:rPr b="1"/>
-              <a:t>0.902 ± 0.020</a:t>
-            </a:r>
-            <a:r>
-              <a:rPr/>
-              <a:t> cross-validated accuracy</a:t>
+              <a:t>pseudo-residual</a:t>
+            </a:r>
+            <a:r>
+              <a:rPr/>
+              <a:t> each tree fits, is y - p</a:t>
             </a:r>
           </a:p>
           <a:p>
             <a:pPr lvl="0"/>
             <a:r>
               <a:rPr/>
-              <a:t>Already ahead of any single tree from earlier in the lesson</a:t>
+              <a:t>True label minus predicted probability: lesson 4’s error term exactly</a:t>
             </a:r>
           </a:p>
         </p:txBody>
@@ -14473,6 +14578,122 @@
 </file>
 
 <file path=ppt/slides/slide45.xml><?xml version="1.0" encoding="utf-8"?>
+<p:sld xmlns:a="http://schemas.openxmlformats.org/drawingml/2006/main" xmlns:r="http://schemas.openxmlformats.org/officeDocument/2006/relationships" xmlns:p="http://schemas.openxmlformats.org/presentationml/2006/main">
+  <p:cSld>
+    <p:spTree>
+      <p:nvGrpSpPr>
+        <p:cNvPr id="1" name=""/>
+        <p:cNvGrpSpPr/>
+        <p:nvPr/>
+      </p:nvGrpSpPr>
+      <p:grpSpPr>
+        <a:xfrm>
+          <a:off x="0" y="0"/>
+          <a:ext cx="0" cy="0"/>
+          <a:chOff x="0" y="0"/>
+          <a:chExt cx="0" cy="0"/>
+        </a:xfrm>
+      </p:grpSpPr>
+      <p:sp>
+        <p:nvSpPr>
+          <p:cNvPr id="2" name="Title 1"/>
+          <p:cNvSpPr>
+            <a:spLocks noGrp="1"/>
+          </p:cNvSpPr>
+          <p:nvPr>
+            <p:ph type="title"/>
+          </p:nvPr>
+        </p:nvSpPr>
+        <p:spPr>
+          <a:xfrm>
+            <a:off x="457200" y="205979"/>
+            <a:ext cx="8229600" cy="857250"/>
+          </a:xfrm>
+        </p:spPr>
+        <p:txBody>
+          <a:bodyPr/>
+          <a:lstStyle/>
+          <a:p>
+            <a:pPr lvl="0" indent="0" marL="0">
+              <a:buNone/>
+            </a:pPr>
+            <a:r>
+              <a:rPr/>
+              <a:t>On the loan data</a:t>
+            </a:r>
+          </a:p>
+        </p:txBody>
+      </p:sp>
+      <p:sp>
+        <p:nvSpPr>
+          <p:cNvPr id="3" name="Content Placeholder 2"/>
+          <p:cNvSpPr>
+            <a:spLocks noGrp="1"/>
+          </p:cNvSpPr>
+          <p:nvPr>
+            <p:ph idx="1"/>
+          </p:nvPr>
+        </p:nvSpPr>
+        <p:spPr>
+          <a:xfrm>
+            <a:off x="457200" y="1200151"/>
+            <a:ext cx="8229600" cy="3394472"/>
+          </a:xfrm>
+        </p:spPr>
+        <p:txBody>
+          <a:bodyPr/>
+          <a:lstStyle/>
+          <a:p>
+            <a:pPr lvl="0"/>
+            <a:r>
+              <a:rPr>
+                <a:latin typeface="Courier"/>
+              </a:rPr>
+              <a:t>GradientBoostingClassifier</a:t>
+            </a:r>
+            <a:r>
+              <a:rPr/>
+              <a:t>, defaults: </a:t>
+            </a:r>
+            <a:r>
+              <a:rPr b="1"/>
+              <a:t>100 trees</a:t>
+            </a:r>
+            <a:r>
+              <a:rPr/>
+              <a:t>, learning rate α = 0.1</a:t>
+            </a:r>
+          </a:p>
+          <a:p>
+            <a:pPr lvl="0"/>
+            <a:r>
+              <a:rPr/>
+              <a:t>Reaches </a:t>
+            </a:r>
+            <a:r>
+              <a:rPr b="1"/>
+              <a:t>0.902 ± 0.020</a:t>
+            </a:r>
+            <a:r>
+              <a:rPr/>
+              <a:t> cross-validated accuracy</a:t>
+            </a:r>
+          </a:p>
+          <a:p>
+            <a:pPr lvl="0"/>
+            <a:r>
+              <a:rPr/>
+              <a:t>Already ahead of any single tree from earlier in the lesson</a:t>
+            </a:r>
+          </a:p>
+        </p:txBody>
+      </p:sp>
+    </p:spTree>
+  </p:cSld>
+</p:sld>
+</file>
+
+<file path=ppt/slides/slide46.xml><?xml version="1.0" encoding="utf-8"?>
 <p:sld xmlns:a="http://schemas.openxmlformats.org/drawingml/2006/main" xmlns:r="http://schemas.openxmlformats.org/officeDocument/2006/relationships" xmlns:p="http://schemas.openxmlformats.org/presentationml/2006/main">
   <p:cSld>
     <p:spTree>
@@ -14938,7 +15159,7 @@
 </p:sld>
 </file>
 
-<file path=ppt/slides/slide46.xml><?xml version="1.0" encoding="utf-8"?>
+<file path=ppt/slides/slide47.xml><?xml version="1.0" encoding="utf-8"?>
 <p:sld xmlns:a="http://schemas.openxmlformats.org/drawingml/2006/main" xmlns:r="http://schemas.openxmlformats.org/officeDocument/2006/relationships" xmlns:p="http://schemas.openxmlformats.org/presentationml/2006/main">
   <p:cSld>
     <p:spTree>
@@ -15020,7 +15241,7 @@
 </p:sld>
 </file>
 
-<file path=ppt/slides/slide47.xml><?xml version="1.0" encoding="utf-8"?>
+<file path=ppt/slides/slide48.xml><?xml version="1.0" encoding="utf-8"?>
 <p:sld xmlns:a="http://schemas.openxmlformats.org/drawingml/2006/main" xmlns:r="http://schemas.openxmlformats.org/officeDocument/2006/relationships" xmlns:p="http://schemas.openxmlformats.org/presentationml/2006/main">
   <p:cSld>
     <p:spTree>
@@ -15386,7 +15607,7 @@
 </p:sld>
 </file>
 
-<file path=ppt/slides/slide48.xml><?xml version="1.0" encoding="utf-8"?>
+<file path=ppt/slides/slide49.xml><?xml version="1.0" encoding="utf-8"?>
 <p:sld xmlns:a="http://schemas.openxmlformats.org/drawingml/2006/main" xmlns:r="http://schemas.openxmlformats.org/officeDocument/2006/relationships" xmlns:p="http://schemas.openxmlformats.org/presentationml/2006/main">
   <p:cSld>
     <p:spTree>
@@ -15473,7 +15694,89 @@
 </p:sld>
 </file>
 
-<file path=ppt/slides/slide49.xml><?xml version="1.0" encoding="utf-8"?>
+<file path=ppt/slides/slide5.xml><?xml version="1.0" encoding="utf-8"?>
+<p:sld xmlns:a="http://schemas.openxmlformats.org/drawingml/2006/main" xmlns:r="http://schemas.openxmlformats.org/officeDocument/2006/relationships" xmlns:p="http://schemas.openxmlformats.org/presentationml/2006/main">
+  <p:cSld>
+    <p:spTree>
+      <p:nvGrpSpPr>
+        <p:cNvPr id="1" name=""/>
+        <p:cNvGrpSpPr/>
+        <p:nvPr/>
+      </p:nvGrpSpPr>
+      <p:grpSpPr>
+        <a:xfrm>
+          <a:off x="0" y="0"/>
+          <a:ext cx="0" cy="0"/>
+          <a:chOff x="0" y="0"/>
+          <a:chExt cx="0" cy="0"/>
+        </a:xfrm>
+      </p:grpSpPr>
+      <p:sp>
+        <p:nvSpPr>
+          <p:cNvPr id="2" name="Title 1"/>
+          <p:cNvSpPr>
+            <a:spLocks noGrp="1"/>
+          </p:cNvSpPr>
+          <p:nvPr>
+            <p:ph type="title"/>
+          </p:nvPr>
+        </p:nvSpPr>
+        <p:spPr>
+          <a:xfrm>
+            <a:off x="457200" y="205979"/>
+            <a:ext cx="8229600" cy="857250"/>
+          </a:xfrm>
+        </p:spPr>
+        <p:txBody>
+          <a:bodyPr/>
+          <a:lstStyle/>
+          <a:p>
+            <a:pPr lvl="0" indent="0" marL="0">
+              <a:buNone/>
+            </a:pPr>
+            <a:r>
+              <a:rPr/>
+              <a:t>Four disconnected risky regions</a:t>
+            </a:r>
+          </a:p>
+        </p:txBody>
+      </p:sp>
+      <p:pic>
+        <p:nvPicPr>
+          <p:cNvPr descr="loan_scatter.png" id="0" name="Picture 1"/>
+          <p:cNvPicPr>
+            <a:picLocks noGrp="1" noChangeAspect="1"/>
+          </p:cNvPicPr>
+          <p:nvPr/>
+        </p:nvPicPr>
+        <p:blipFill>
+          <a:blip r:embed="rId3"/>
+          <a:stretch>
+            <a:fillRect/>
+          </a:stretch>
+        </p:blipFill>
+        <p:spPr bwMode="auto">
+          <a:xfrm>
+            <a:off x="2445144" y="1166099"/>
+            <a:ext cx="4253712" cy="3360181"/>
+          </a:xfrm>
+          <a:prstGeom prst="rect">
+            <a:avLst/>
+          </a:prstGeom>
+          <a:noFill/>
+          <a:ln w="9525">
+            <a:noFill/>
+            <a:headEnd/>
+            <a:tailEnd/>
+          </a:ln>
+        </p:spPr>
+      </p:pic>
+    </p:spTree>
+  </p:cSld>
+</p:sld>
+</file>
+
+<file path=ppt/slides/slide50.xml><?xml version="1.0" encoding="utf-8"?>
 <p:sld xmlns:a="http://schemas.openxmlformats.org/drawingml/2006/main" xmlns:r="http://schemas.openxmlformats.org/officeDocument/2006/relationships" xmlns:p="http://schemas.openxmlformats.org/presentationml/2006/main">
   <p:cSld>
     <p:spTree>
@@ -15849,7 +16152,7 @@
 </p:sld>
 </file>
 
-<file path=ppt/slides/slide5.xml><?xml version="1.0" encoding="utf-8"?>
+<file path=ppt/slides/slide51.xml><?xml version="1.0" encoding="utf-8"?>
 <p:sld xmlns:a="http://schemas.openxmlformats.org/drawingml/2006/main" xmlns:r="http://schemas.openxmlformats.org/officeDocument/2006/relationships" xmlns:p="http://schemas.openxmlformats.org/presentationml/2006/main">
   <p:cSld>
     <p:spTree>
@@ -15891,88 +16194,6 @@
             </a:pPr>
             <a:r>
               <a:rPr/>
-              <a:t>Four disconnected risky regions</a:t>
-            </a:r>
-          </a:p>
-        </p:txBody>
-      </p:sp>
-      <p:pic>
-        <p:nvPicPr>
-          <p:cNvPr descr="loan_scatter.png" id="0" name="Picture 1"/>
-          <p:cNvPicPr>
-            <a:picLocks noGrp="1" noChangeAspect="1"/>
-          </p:cNvPicPr>
-          <p:nvPr/>
-        </p:nvPicPr>
-        <p:blipFill>
-          <a:blip r:embed="rId3"/>
-          <a:stretch>
-            <a:fillRect/>
-          </a:stretch>
-        </p:blipFill>
-        <p:spPr bwMode="auto">
-          <a:xfrm>
-            <a:off x="2445144" y="1166099"/>
-            <a:ext cx="4253712" cy="3360181"/>
-          </a:xfrm>
-          <a:prstGeom prst="rect">
-            <a:avLst/>
-          </a:prstGeom>
-          <a:noFill/>
-          <a:ln w="9525">
-            <a:noFill/>
-            <a:headEnd/>
-            <a:tailEnd/>
-          </a:ln>
-        </p:spPr>
-      </p:pic>
-    </p:spTree>
-  </p:cSld>
-</p:sld>
-</file>
-
-<file path=ppt/slides/slide50.xml><?xml version="1.0" encoding="utf-8"?>
-<p:sld xmlns:a="http://schemas.openxmlformats.org/drawingml/2006/main" xmlns:r="http://schemas.openxmlformats.org/officeDocument/2006/relationships" xmlns:p="http://schemas.openxmlformats.org/presentationml/2006/main">
-  <p:cSld>
-    <p:spTree>
-      <p:nvGrpSpPr>
-        <p:cNvPr id="1" name=""/>
-        <p:cNvGrpSpPr/>
-        <p:nvPr/>
-      </p:nvGrpSpPr>
-      <p:grpSpPr>
-        <a:xfrm>
-          <a:off x="0" y="0"/>
-          <a:ext cx="0" cy="0"/>
-          <a:chOff x="0" y="0"/>
-          <a:chExt cx="0" cy="0"/>
-        </a:xfrm>
-      </p:grpSpPr>
-      <p:sp>
-        <p:nvSpPr>
-          <p:cNvPr id="2" name="Title 1"/>
-          <p:cNvSpPr>
-            <a:spLocks noGrp="1"/>
-          </p:cNvSpPr>
-          <p:nvPr>
-            <p:ph type="title"/>
-          </p:nvPr>
-        </p:nvSpPr>
-        <p:spPr>
-          <a:xfrm>
-            <a:off x="457200" y="205979"/>
-            <a:ext cx="8229600" cy="857250"/>
-          </a:xfrm>
-        </p:spPr>
-        <p:txBody>
-          <a:bodyPr/>
-          <a:lstStyle/>
-          <a:p>
-            <a:pPr lvl="0" indent="0" marL="0">
-              <a:buNone/>
-            </a:pPr>
-            <a:r>
-              <a:rPr/>
               <a:t>Three findings</a:t>
             </a:r>
           </a:p>
@@ -16045,7 +16266,7 @@
 </p:sld>
 </file>
 
-<file path=ppt/slides/slide51.xml><?xml version="1.0" encoding="utf-8"?>
+<file path=ppt/slides/slide52.xml><?xml version="1.0" encoding="utf-8"?>
 <p:sld xmlns:a="http://schemas.openxmlformats.org/drawingml/2006/main" xmlns:r="http://schemas.openxmlformats.org/officeDocument/2006/relationships" xmlns:p="http://schemas.openxmlformats.org/presentationml/2006/main">
   <p:cSld>
     <p:spTree>
@@ -16319,131 +16540,6 @@
 </p:sld>
 </file>
 
-<file path=ppt/slides/slide52.xml><?xml version="1.0" encoding="utf-8"?>
-<p:sld xmlns:a="http://schemas.openxmlformats.org/drawingml/2006/main" xmlns:r="http://schemas.openxmlformats.org/officeDocument/2006/relationships" xmlns:p="http://schemas.openxmlformats.org/presentationml/2006/main">
-  <p:cSld>
-    <p:spTree>
-      <p:nvGrpSpPr>
-        <p:cNvPr id="1" name=""/>
-        <p:cNvGrpSpPr/>
-        <p:nvPr/>
-      </p:nvGrpSpPr>
-      <p:grpSpPr>
-        <a:xfrm>
-          <a:off x="0" y="0"/>
-          <a:ext cx="0" cy="0"/>
-          <a:chOff x="0" y="0"/>
-          <a:chExt cx="0" cy="0"/>
-        </a:xfrm>
-      </p:grpSpPr>
-      <p:sp>
-        <p:nvSpPr>
-          <p:cNvPr id="2" name="Title 1"/>
-          <p:cNvSpPr>
-            <a:spLocks noGrp="1"/>
-          </p:cNvSpPr>
-          <p:nvPr>
-            <p:ph type="title"/>
-          </p:nvPr>
-        </p:nvSpPr>
-        <p:spPr>
-          <a:xfrm>
-            <a:off x="457200" y="205979"/>
-            <a:ext cx="8229600" cy="857250"/>
-          </a:xfrm>
-        </p:spPr>
-        <p:txBody>
-          <a:bodyPr/>
-          <a:lstStyle/>
-          <a:p>
-            <a:pPr lvl="0" indent="0" marL="0">
-              <a:buNone/>
-            </a:pPr>
-            <a:r>
-              <a:rPr/>
-              <a:t>54% of the importance landed on noise</a:t>
-            </a:r>
-          </a:p>
-        </p:txBody>
-      </p:sp>
-      <p:sp>
-        <p:nvSpPr>
-          <p:cNvPr id="3" name="Content Placeholder 2"/>
-          <p:cNvSpPr>
-            <a:spLocks noGrp="1"/>
-          </p:cNvSpPr>
-          <p:nvPr>
-            <p:ph idx="1"/>
-          </p:nvPr>
-        </p:nvSpPr>
-        <p:spPr>
-          <a:xfrm>
-            <a:off x="457200" y="1200151"/>
-            <a:ext cx="8229600" cy="3394472"/>
-          </a:xfrm>
-        </p:spPr>
-        <p:txBody>
-          <a:bodyPr/>
-          <a:lstStyle/>
-          <a:p>
-            <a:pPr lvl="0"/>
-            <a:r>
-              <a:rPr/>
-              <a:t>20 noise columns, 2 real features: not a small effect, and not a bug</a:t>
-            </a:r>
-          </a:p>
-          <a:p>
-            <a:pPr lvl="0"/>
-            <a:r>
-              <a:rPr/>
-              <a:t>The same restriction that </a:t>
-            </a:r>
-            <a:r>
-              <a:rPr b="1"/>
-              <a:t>decorrelates</a:t>
-            </a:r>
-            <a:r>
-              <a:rPr/>
-              <a:t> the trees occasionally hands a split to noise instead</a:t>
-            </a:r>
-          </a:p>
-          <a:p>
-            <a:pPr lvl="0"/>
-            <a:r>
-              <a:rPr/>
-              <a:t>Averaging reduces </a:t>
-            </a:r>
-            <a:r>
-              <a:rPr b="1"/>
-              <a:t>variance of the prediction</a:t>
-            </a:r>
-            <a:r>
-              <a:rPr/>
-              <a:t>; it does </a:t>
-            </a:r>
-            <a:r>
-              <a:rPr b="1"/>
-              <a:t>not</a:t>
-            </a:r>
-            <a:r>
-              <a:rPr/>
-              <a:t> guarantee small importance for irrelevant columns</a:t>
-            </a:r>
-          </a:p>
-          <a:p>
-            <a:pPr lvl="0"/>
-            <a:r>
-              <a:rPr/>
-              <a:t>The fix: cross-check against permutation importance on held-out data</a:t>
-            </a:r>
-          </a:p>
-        </p:txBody>
-      </p:sp>
-    </p:spTree>
-  </p:cSld>
-</p:sld>
-</file>
-
 <file path=ppt/slides/slide53.xml><?xml version="1.0" encoding="utf-8"?>
 <p:sld xmlns:a="http://schemas.openxmlformats.org/drawingml/2006/main" xmlns:r="http://schemas.openxmlformats.org/officeDocument/2006/relationships" xmlns:p="http://schemas.openxmlformats.org/presentationml/2006/main">
   <p:cSld>
@@ -16486,7 +16582,7 @@
             </a:pPr>
             <a:r>
               <a:rPr/>
-              <a:t>What to take away</a:t>
+              <a:t>54% of the importance landed on noise</a:t>
             </a:r>
           </a:p>
         </p:txBody>
@@ -16514,44 +16610,52 @@
             <a:pPr lvl="0"/>
             <a:r>
               <a:rPr/>
-              <a:t>A tree splits greedily on Gini impurity, matching scikit-learn</a:t>
+              <a:t>20 noise columns, 2 real features: not a small effect, and not a bug</a:t>
             </a:r>
           </a:p>
           <a:p>
             <a:pPr lvl="0"/>
             <a:r>
               <a:rPr/>
-              <a:t>Depth is the bias-variance dial: accuracy peaked at </a:t>
+              <a:t>The same restriction that </a:t>
             </a:r>
             <a:r>
               <a:rPr b="1"/>
-              <a:t>depth 8</a:t>
+              <a:t>decorrelates</a:t>
+            </a:r>
+            <a:r>
+              <a:rPr/>
+              <a:t> the trees occasionally hands a split to noise instead</a:t>
             </a:r>
           </a:p>
           <a:p>
             <a:pPr lvl="0"/>
             <a:r>
               <a:rPr/>
-              <a:t>Bootstrap resampling leaves </a:t>
+              <a:t>Averaging reduces </a:t>
             </a:r>
             <a:r>
               <a:rPr b="1"/>
-              <a:t>36.8%</a:t>
-            </a:r>
-            <a:r>
-              <a:rPr/>
-              <a:t> of rows out-of-bag: free validation</a:t>
+              <a:t>variance of the prediction</a:t>
+            </a:r>
+            <a:r>
+              <a:rPr/>
+              <a:t>; it does </a:t>
+            </a:r>
+            <a:r>
+              <a:rPr b="1"/>
+              <a:t>not</a:t>
+            </a:r>
+            <a:r>
+              <a:rPr/>
+              <a:t> guarantee small importance for irrelevant columns</a:t>
             </a:r>
           </a:p>
           <a:p>
             <a:pPr lvl="0"/>
             <a:r>
-              <a:rPr b="1"/>
-              <a:t>54% of a random forest’s importance landed on 20 noise columns</a:t>
-            </a:r>
-            <a:r>
-              <a:rPr/>
-              <a:t>, today’s number</a:t>
+              <a:rPr/>
+              <a:t>The fix: cross-check against permutation importance on held-out data</a:t>
             </a:r>
           </a:p>
         </p:txBody>
@@ -16562,6 +16666,123 @@
 </file>
 
 <file path=ppt/slides/slide54.xml><?xml version="1.0" encoding="utf-8"?>
+<p:sld xmlns:a="http://schemas.openxmlformats.org/drawingml/2006/main" xmlns:r="http://schemas.openxmlformats.org/officeDocument/2006/relationships" xmlns:p="http://schemas.openxmlformats.org/presentationml/2006/main">
+  <p:cSld>
+    <p:spTree>
+      <p:nvGrpSpPr>
+        <p:cNvPr id="1" name=""/>
+        <p:cNvGrpSpPr/>
+        <p:nvPr/>
+      </p:nvGrpSpPr>
+      <p:grpSpPr>
+        <a:xfrm>
+          <a:off x="0" y="0"/>
+          <a:ext cx="0" cy="0"/>
+          <a:chOff x="0" y="0"/>
+          <a:chExt cx="0" cy="0"/>
+        </a:xfrm>
+      </p:grpSpPr>
+      <p:sp>
+        <p:nvSpPr>
+          <p:cNvPr id="2" name="Title 1"/>
+          <p:cNvSpPr>
+            <a:spLocks noGrp="1"/>
+          </p:cNvSpPr>
+          <p:nvPr>
+            <p:ph type="title"/>
+          </p:nvPr>
+        </p:nvSpPr>
+        <p:spPr>
+          <a:xfrm>
+            <a:off x="457200" y="205979"/>
+            <a:ext cx="8229600" cy="857250"/>
+          </a:xfrm>
+        </p:spPr>
+        <p:txBody>
+          <a:bodyPr/>
+          <a:lstStyle/>
+          <a:p>
+            <a:pPr lvl="0" indent="0" marL="0">
+              <a:buNone/>
+            </a:pPr>
+            <a:r>
+              <a:rPr/>
+              <a:t>What to take away</a:t>
+            </a:r>
+          </a:p>
+        </p:txBody>
+      </p:sp>
+      <p:sp>
+        <p:nvSpPr>
+          <p:cNvPr id="3" name="Content Placeholder 2"/>
+          <p:cNvSpPr>
+            <a:spLocks noGrp="1"/>
+          </p:cNvSpPr>
+          <p:nvPr>
+            <p:ph idx="1"/>
+          </p:nvPr>
+        </p:nvSpPr>
+        <p:spPr>
+          <a:xfrm>
+            <a:off x="457200" y="1200151"/>
+            <a:ext cx="8229600" cy="3394472"/>
+          </a:xfrm>
+        </p:spPr>
+        <p:txBody>
+          <a:bodyPr/>
+          <a:lstStyle/>
+          <a:p>
+            <a:pPr lvl="0"/>
+            <a:r>
+              <a:rPr/>
+              <a:t>A tree splits greedily on Gini impurity, matching scikit-learn</a:t>
+            </a:r>
+          </a:p>
+          <a:p>
+            <a:pPr lvl="0"/>
+            <a:r>
+              <a:rPr/>
+              <a:t>Depth is the bias-variance dial: accuracy peaked at </a:t>
+            </a:r>
+            <a:r>
+              <a:rPr b="1"/>
+              <a:t>depth 8</a:t>
+            </a:r>
+          </a:p>
+          <a:p>
+            <a:pPr lvl="0"/>
+            <a:r>
+              <a:rPr/>
+              <a:t>Bootstrap resampling leaves </a:t>
+            </a:r>
+            <a:r>
+              <a:rPr b="1"/>
+              <a:t>36.8%</a:t>
+            </a:r>
+            <a:r>
+              <a:rPr/>
+              <a:t> of rows out-of-bag: free validation</a:t>
+            </a:r>
+          </a:p>
+          <a:p>
+            <a:pPr lvl="0"/>
+            <a:r>
+              <a:rPr b="1"/>
+              <a:t>54% of a random forest’s importance landed on 20 noise columns</a:t>
+            </a:r>
+            <a:r>
+              <a:rPr/>
+              <a:t>, today’s number</a:t>
+            </a:r>
+          </a:p>
+        </p:txBody>
+      </p:sp>
+    </p:spTree>
+  </p:cSld>
+</p:sld>
+</file>
+
+<file path=ppt/slides/slide55.xml><?xml version="1.0" encoding="utf-8"?>
 <p:sld xmlns:a="http://schemas.openxmlformats.org/drawingml/2006/main" xmlns:r="http://schemas.openxmlformats.org/officeDocument/2006/relationships" xmlns:p="http://schemas.openxmlformats.org/presentationml/2006/main">
   <p:cSld>
     <p:spTree>
@@ -17002,57 +17223,41 @@
             </a:pPr>
             <a:r>
               <a:rPr/>
-              <a:t>How pure is a group of examples?</a:t>
-            </a:r>
-          </a:p>
-        </p:txBody>
-      </p:sp>
-      <p:sp>
-        <p:nvSpPr>
-          <p:cNvPr id="3" name="Content Placeholder 2"/>
-          <p:cNvSpPr>
-            <a:spLocks noGrp="1"/>
-          </p:cNvSpPr>
-          <p:nvPr>
-            <p:ph idx="1"/>
-          </p:nvPr>
-        </p:nvSpPr>
-        <p:spPr>
+              <a:t>The algorithm, drawn</a:t>
+            </a:r>
+          </a:p>
+        </p:txBody>
+      </p:sp>
+      <p:pic>
+        <p:nvPicPr>
+          <p:cNvPr descr="tree_growth.png" id="0" name="Picture 1"/>
+          <p:cNvPicPr>
+            <a:picLocks noGrp="1" noChangeAspect="1"/>
+          </p:cNvPicPr>
+          <p:nvPr/>
+        </p:nvPicPr>
+        <p:blipFill>
+          <a:blip r:embed="rId3"/>
+          <a:stretch>
+            <a:fillRect/>
+          </a:stretch>
+        </p:blipFill>
+        <p:spPr bwMode="auto">
           <a:xfrm>
-            <a:off x="457200" y="1200151"/>
-            <a:ext cx="8229600" cy="3394472"/>
+            <a:off x="1073385" y="1166099"/>
+            <a:ext cx="6997230" cy="3360181"/>
           </a:xfrm>
+          <a:prstGeom prst="rect">
+            <a:avLst/>
+          </a:prstGeom>
+          <a:noFill/>
+          <a:ln w="9525">
+            <a:noFill/>
+            <a:headEnd/>
+            <a:tailEnd/>
+          </a:ln>
         </p:spPr>
-        <p:txBody>
-          <a:bodyPr/>
-          <a:lstStyle/>
-          <a:p>
-            <a:pPr lvl="0"/>
-            <a:r>
-              <a:rPr/>
-              <a:t>A leaf that is all one class needs no more questions</a:t>
-            </a:r>
-          </a:p>
-          <a:p>
-            <a:pPr lvl="0"/>
-            <a:r>
-              <a:rPr/>
-              <a:t>A leaf split evenly between classes is the worst case: a coin flip</a:t>
-            </a:r>
-          </a:p>
-          <a:p>
-            <a:pPr lvl="0"/>
-            <a:r>
-              <a:rPr b="1"/>
-              <a:t>Impurity</a:t>
-            </a:r>
-            <a:r>
-              <a:rPr/>
-              <a:t> is a number that captures this, so “as pure as possible” has a target to maximise against</a:t>
-            </a:r>
-          </a:p>
-        </p:txBody>
-      </p:sp>
+      </p:pic>
     </p:spTree>
   </p:cSld>
 </p:sld>
@@ -17100,41 +17305,57 @@
             </a:pPr>
             <a:r>
               <a:rPr/>
-              <a:t>Gini impurity</a:t>
-            </a:r>
-          </a:p>
-        </p:txBody>
-      </p:sp>
-      <p:pic>
-        <p:nvPicPr>
-          <p:cNvPr descr="eq_f823b12014.png" id="0" name="Picture 1"/>
-          <p:cNvPicPr>
-            <a:picLocks noGrp="1" noChangeAspect="1"/>
-          </p:cNvPicPr>
-          <p:nvPr/>
-        </p:nvPicPr>
-        <p:blipFill>
-          <a:blip r:embed="rId3"/>
-          <a:stretch>
-            <a:fillRect/>
-          </a:stretch>
-        </p:blipFill>
-        <p:spPr bwMode="auto">
+              <a:t>How pure is a group of examples?</a:t>
+            </a:r>
+          </a:p>
+        </p:txBody>
+      </p:sp>
+      <p:sp>
+        <p:nvSpPr>
+          <p:cNvPr id="3" name="Content Placeholder 2"/>
+          <p:cNvSpPr>
+            <a:spLocks noGrp="1"/>
+          </p:cNvSpPr>
+          <p:nvPr>
+            <p:ph idx="1"/>
+          </p:nvPr>
+        </p:nvSpPr>
+        <p:spPr>
           <a:xfrm>
-            <a:off x="2162991" y="1815411"/>
-            <a:ext cx="4818018" cy="2061556"/>
+            <a:off x="457200" y="1200151"/>
+            <a:ext cx="8229600" cy="3394472"/>
           </a:xfrm>
-          <a:prstGeom prst="rect">
-            <a:avLst/>
-          </a:prstGeom>
-          <a:noFill/>
-          <a:ln w="9525">
-            <a:noFill/>
-            <a:headEnd/>
-            <a:tailEnd/>
-          </a:ln>
         </p:spPr>
-      </p:pic>
+        <p:txBody>
+          <a:bodyPr/>
+          <a:lstStyle/>
+          <a:p>
+            <a:pPr lvl="0"/>
+            <a:r>
+              <a:rPr/>
+              <a:t>A leaf that is all one class needs no more questions</a:t>
+            </a:r>
+          </a:p>
+          <a:p>
+            <a:pPr lvl="0"/>
+            <a:r>
+              <a:rPr/>
+              <a:t>A leaf split evenly between classes is the worst case: a coin flip</a:t>
+            </a:r>
+          </a:p>
+          <a:p>
+            <a:pPr lvl="0"/>
+            <a:r>
+              <a:rPr b="1"/>
+              <a:t>Impurity</a:t>
+            </a:r>
+            <a:r>
+              <a:rPr/>
+              <a:t> is a number that captures this, so “as pure as possible” has a target to maximise against</a:t>
+            </a:r>
+          </a:p>
+        </p:txBody>
+      </p:sp>
     </p:spTree>
   </p:cSld>
 </p:sld>

--- a/Lessons/07_trees_and_ensembles/Slides/trees_and_ensembles_slides.pptx
+++ b/Lessons/07_trees_and_ensembles/Slides/trees_and_ensembles_slides.pptx
@@ -6258,7 +6258,7 @@
             </a:pPr>
             <a:r>
               <a:rPr/>
-              <a:t>Step 3 is where to slow down, because it shows greed. On the right, one split sets aside a single applicant from 68 others; another divides 160 applicants into 90% and 97% default - both still predicted “default”, so the cut changes no decision at all. Each was the best available move at that node; the tree has no way to ask whether it was worth making. And neither interior island has appeared yet: three rounds were spent on the easy strips. Hold that thought - it is the “what greedy misses” slide in ten minutes.</a:t>
+              <a:t>Step 3 is where to slow down, because it shows greed. On the right, one split sets aside a single applicant from 68 others - the cut at 0.948, a thousandth above the 0.947 one, so in the plane the two gold lines lie on top of each other. Someone will ask why debt is asked twice: it is not the same question, and the tree spent a split on the one applicant between them who repaid; another divides 160 applicants into 90% and 97% default - both still predicted “default”, so the cut changes no decision at all. Each was the best available move at that node; the tree has no way to ask whether it was worth making. And neither interior island has appeared yet: three rounds were spent on the easy strips. Hold that thought - it is the “what greedy misses” slide in ten minutes.</a:t>
             </a:r>
           </a:p>
           <a:p>

--- a/Lessons/07_trees_and_ensembles/Slides/trees_and_ensembles_slides.pptx
+++ b/Lessons/07_trees_and_ensembles/Slides/trees_and_ensembles_slides.pptx
@@ -1329,6 +1329,20 @@
             <a:r>
               <a:rPr/>
               <a:t>This is the check notebook 1 runs live, and it matters for trust rather than for novelty: once the from-scratch version is shown to agree with scikit-learn exactly, every later result in the lesson - obtained with scikit-learn - inherits that confidence.</a:t>
+            </a:r>
+          </a:p>
+          <a:p>
+            <a:pPr lvl="0" indent="0" marL="0">
+              <a:buNone/>
+            </a:pPr>
+          </a:p>
+          <a:p>
+            <a:pPr lvl="0" indent="0" marL="0">
+              <a:buNone/>
+            </a:pPr>
+            <a:r>
+              <a:rPr/>
+              <a:t>Two questions to pre-empt. Why predictions and not accuracy? Because two different trees can get the same number of applicants wrong while getting different applicants wrong; identical predictions, one by one, rule that out. And why on the training data, after lesson 5? Because this checks the code, not the model: the question is whether two programs build the same tree from the same rows, and the rows they learned from are exactly the right ones to ask it on. No accuracy here is a claim about new applicants.</a:t>
             </a:r>
           </a:p>
           <a:p>
@@ -10424,7 +10438,7 @@
             <a:pPr lvl="0"/>
             <a:r>
               <a:rPr/>
-              <a:t>The from-scratch implementation agrees with scikit-learn’s </a:t>
+              <a:t>The from-scratch implementation and scikit-learn’s </a:t>
             </a:r>
             <a:r>
               <a:rPr>
@@ -10434,15 +10448,15 @@
             </a:r>
             <a:r>
               <a:rPr/>
-              <a:t> to the </a:t>
+              <a:t> make </a:t>
             </a:r>
             <a:r>
               <a:rPr b="1"/>
-              <a:t>fourth decimal place</a:t>
-            </a:r>
-            <a:r>
-              <a:rPr/>
-              <a:t> of resulting accuracy, at every depth tested</a:t>
+              <a:t>the same prediction for all 1,200 applicants</a:t>
+            </a:r>
+            <a:r>
+              <a:rPr/>
+              <a:t>, at every depth tested</a:t>
             </a:r>
           </a:p>
           <a:p>

--- a/Lessons/07_trees_and_ensembles/Slides/trees_and_ensembles_slides.pptx
+++ b/Lessons/07_trees_and_ensembles/Slides/trees_and_ensembles_slides.pptx
@@ -578,7 +578,7 @@
             </a:pPr>
             <a:r>
               <a:rPr/>
-              <a:t>Say what changes and what doesn’t. Lessons 3 and 4 fit a line. Lesson 6 offered three ways of bending a boundary a line cannot draw. Today adds a fourth primitive - a threshold, not a distance or an inner product - and then spends most of the three hours on a different question: not “does a tree work”, but “what happens when you build more than one”.</a:t>
+              <a:t>Say what changes and what doesn’t. Lessons 3 and 4 fit a line. Lesson 6 offered three ways of bending a boundary a line cannot draw. Today adds a fourth kind of model, built on a different basic step: comparing one feature with a threshold, where k-nearest neighbours measured distances and the support vector machine computed kernels. It then spends most of the three hours on a different question: not “does a tree work”, but “what happens when you build more than one”.</a:t>
             </a:r>
           </a:p>
           <a:p>
@@ -812,6 +812,20 @@
             </a:pPr>
             <a:r>
               <a:rPr/>
+              <a:t>Work the last bullet through. Cut a single example off a mixed group of 1,200. The one-example child is pure, impurity 0; the other child is as mixed as the parent was. A plain average of the two is half the parent’s impurity, so the split would look like a large gain. Weighted by size, the pure child counts for 1/1,200 of the average and the other child for the rest, so the average is almost exactly the parent’s impurity again, and the gain is close to zero.</a:t>
+            </a:r>
+          </a:p>
+          <a:p>
+            <a:pPr lvl="0" indent="0" marL="0">
+              <a:buNone/>
+            </a:pPr>
+          </a:p>
+          <a:p>
+            <a:pPr lvl="0" indent="0" marL="0">
+              <a:buNone/>
+            </a:pPr>
+            <a:r>
+              <a:rPr/>
               <a:t>Ask what could go wrong if you </a:t>
             </a:r>
             <a:r>
@@ -820,7 +834,7 @@
             </a:r>
             <a:r>
               <a:rPr/>
-              <a:t> weight by group size - the answer is that a tree would happily carve off tiny, perfectly pure single-point groups at every step, which is exactly the overfitting behaviour section 3 measures in a few minutes.</a:t>
+              <a:t> weight by group size - the answer is that a tree would happily carve off tiny, perfectly pure single-point groups at every step, which is exactly the overfitting behaviour the depth table shows in a few minutes.</a:t>
             </a:r>
           </a:p>
           <a:p>
@@ -916,7 +930,7 @@
             </a:pPr>
             <a:r>
               <a:rPr/>
-              <a:t>Say what the subscripts are before reading the formula: P, L and R are the parent group and its two children, the same three the handout names in words, and the m terms are how many examples are in each. The two m terms are the sizes of the left and right children, and they add to the parent’s. Read it as: what the parent’s impurity was, minus what is left after the split, weighted by how the group was divided. The tree keeps whichever candidate split makes ΔG largest.</a:t>
+              <a:t>Say what the symbols are before reading the formula: P, L and R are the parent group and its two children, as on the previous slide. Each G is the Gini impurity of one group, and each m is the number of examples in it; the two children’s m add up to the parent’s. Read it as: the parent’s impurity, minus the children’s impurities averaged with weights equal to the share of the parent that went to each child. ΔG (delta G) is the gain. The tree keeps whichever candidate split makes ΔG largest.</a:t>
             </a:r>
           </a:p>
           <a:p>
@@ -1122,7 +1136,7 @@
             </a:pPr>
             <a:r>
               <a:rPr/>
-              <a:t>Walk the numbers once: parent impurity 0.474, and the winning split is the debt ceiling, found by brute-force search with no hint about how the data was generated. That agreement with the known generating rule is the first piece of evidence that the algorithm is doing something sensible.</a:t>
+              <a:t>Walk the numbers once: parent impurity 0.474, and the winning split is the debt ceiling, found by brute-force search with no hint about how the data was generated. The children’s impurities, 2p(1 - p) at their own default rates, are 0.3814 for the left child and 0.1148 for the right. Their average weighted by size is 971/1,200 × 0.3814 + 229/1,200 × 0.1148 = 0.3305, and the gain is the parent’s 0.4743 minus that, 0.1438, which rounds to 0.144. Use four decimals if you work it on the board: with the impurities rounded to the slide’s 0.381 and 0.115, the weighted average comes out at 0.3302, and someone will notice. That agreement with the known generating rule is the first piece of evidence that the algorithm is doing something sensible.</a:t>
             </a:r>
           </a:p>
           <a:p>
@@ -1584,7 +1598,7 @@
             </a:pPr>
             <a:r>
               <a:rPr/>
-              <a:t>The training-accuracy-1.000 claim is the one to make them justify. Ask why an unconstrained tree gets every training point right, always, on any data - the answer is that splitting never has to stop until every leaf holds one example, which it then “predicts” perfectly by definition. That number demonstrates the model class can memorise, not that anything has been learned - the same reading lesson 6 gave k = 1’s training accuracy.</a:t>
+              <a:t>The training-accuracy-1.000 claim is the one to make them justify. Ask why an unconstrained tree gets every training point right - the answer is that splitting does not have to stop until every leaf is pure, at worst one example per leaf, which it then “predicts” perfectly by definition. The one exception is the condition on the slide: two applicants with identical income and debt but different outcomes can never be split apart, so one of them stays wrong. With two continuous features drawn at random, as here, that does not happen. That number demonstrates the model class can memorise, not that anything has been learned - the same reading lesson 6 gave k = 1’s training accuracy.</a:t>
             </a:r>
           </a:p>
           <a:p>
@@ -1922,7 +1936,21 @@
             </a:pPr>
             <a:r>
               <a:rPr/>
-              <a:t>This is the second time this course has shown a curve bend this way - lesson 3’s Lasso penalty was the first. Handout section 3.</a:t>
+              <a:t>The gold dashed line is the noise ceiling from the dataset slide, 0.93: one minus the 7% of flipped labels.</a:t>
+            </a:r>
+          </a:p>
+          <a:p>
+            <a:pPr lvl="0" indent="0" marL="0">
+              <a:buNone/>
+            </a:pPr>
+          </a:p>
+          <a:p>
+            <a:pPr lvl="0" indent="0" marL="0">
+              <a:buNone/>
+            </a:pPr>
+            <a:r>
+              <a:rPr/>
+              <a:t>This is not the first time this course has shown a curve bend this way: lesson 3’s test error turned back up as the polynomial degree grew, and lesson 6’s k-nearest neighbours did the same as k shrank towards 1. Handout section 3.</a:t>
             </a:r>
           </a:p>
         </p:txBody>
@@ -2224,21 +2252,21 @@
             </a:pPr>
             <a:r>
               <a:rPr/>
-              <a:t>This is the instability that ensembles turn into raw material. The strongest split barely moves under resampling, because the evidence behind it - 1,200 points supporting the debt ceiling - is overwhelming. Everything weaker than that is supported by far fewer points, and those splits are what actually determine a tree’s shape.</a:t>
-            </a:r>
-          </a:p>
-          <a:p>
-            <a:pPr lvl="0" indent="0" marL="0">
-              <a:buNone/>
-            </a:pPr>
-          </a:p>
-          <a:p>
-            <a:pPr lvl="0" indent="0" marL="0">
-              <a:buNone/>
-            </a:pPr>
-            <a:r>
-              <a:rPr/>
-              <a:t>Ask the room what 11.7% disagreement between two trees fit to almost the same data implies about trusting any single tree’s exact boundary. The answer is the whole of the next segment: a single tree’s instability looks like a flaw, and it is about to become a strength.</a:t>
+              <a:t>This is the instability that ensembles turn into raw material. The strongest split barely moves between the two samples, 0.820 against 0.819, because the evidence behind it is overwhelming: each tree sees 780 applicants, and on the full data the debt ceiling separates 26% default from 94%, a contrast no sample of that size can hide. Every later split is made inside a smaller group, supported by far fewer applicants, and those splits are what actually determine a tree’s shape.</a:t>
+            </a:r>
+          </a:p>
+          <a:p>
+            <a:pPr lvl="0" indent="0" marL="0">
+              <a:buNone/>
+            </a:pPr>
+          </a:p>
+          <a:p>
+            <a:pPr lvl="0" indent="0" marL="0">
+              <a:buNone/>
+            </a:pPr>
+            <a:r>
+              <a:rPr/>
+              <a:t>Ask the room what 11.7% disagreement between two trees fit to overlapping samples of the same applicants implies about trusting any single tree’s exact boundary. The answer is the whole of the next segment: a single tree’s instability looks like a flaw, and it is about to become a strength.</a:t>
             </a:r>
           </a:p>
           <a:p>
@@ -2334,6 +2362,20 @@
             </a:pPr>
             <a:r>
               <a:rPr/>
+              <a:t>The table is the notebook’s map: each section, the calls it makes, the slides that introduced the idea, and the number to come back with. Decision trees from scratch, checked against scikit-learn; depth swept, the boundaries drawn, and the instability measured.</a:t>
+            </a:r>
+          </a:p>
+          <a:p>
+            <a:pPr lvl="0" indent="0" marL="0">
+              <a:buNone/>
+            </a:pPr>
+          </a:p>
+          <a:p>
+            <a:pPr lvl="0" indent="0" marL="0">
+              <a:buNone/>
+            </a:pPr>
+            <a:r>
+              <a:rPr/>
               <a:t>Run Notebooks/01_decision_trees_from_scratch.ipynb. Twenty minutes.</a:t>
             </a:r>
           </a:p>
@@ -2362,7 +2404,7 @@
             </a:pPr>
             <a:r>
               <a:rPr/>
-              <a:t>The cell worth protecting if time is short is the two-tree resampling comparison at the end: printing the 11.7% disagreement figure themselves lands harder than reading it off a slide.</a:t>
+              <a:t>The cell worth protecting if time is short is the two-tree resampling comparison at the end: the notebook prints an agreement of 0.883, which is the 11.7% disagreement of the previous slide, and seeing it appear on their own screen lands harder than reading it off a slide.</a:t>
             </a:r>
           </a:p>
         </p:txBody>
@@ -2526,7 +2568,21 @@
             </a:pPr>
             <a:r>
               <a:rPr/>
-              <a:t>State the logic before the name. Section 4 just measured that two trees on overlapping resamples disagree on more than a tenth of predictions. If those disagreements are close to random, averaging many such trees should cancel some of them out - that is the entire idea behind bagging, bootstrap aggregating.</a:t>
+              <a:t>State the logic before the name. Two slides before the break measured that two trees fit to overlapping samples disagree on more than a tenth of predictions. If those disagreements are close to random, averaging many such trees should cancel some of them out - that is the entire idea behind bagging, bootstrap aggregating.</a:t>
+            </a:r>
+          </a:p>
+          <a:p>
+            <a:pPr lvl="0" indent="0" marL="0">
+              <a:buNone/>
+            </a:pPr>
+          </a:p>
+          <a:p>
+            <a:pPr lvl="0" indent="0" marL="0">
+              <a:buNone/>
+            </a:pPr>
+            <a:r>
+              <a:rPr/>
+              <a:t>Say that the tree algorithm itself is unchanged: bagging reuses the first hour’s tree as it is, and only what surrounds it is new.</a:t>
             </a:r>
           </a:p>
           <a:p>
@@ -2636,7 +2692,7 @@
             </a:pPr>
             <a:r>
               <a:rPr/>
-              <a:t>State the result, do not derive it - the limit that gives 63.2%/36.8% is a standard exponential limit, worked out in full in the handout, and it does not belong on a slide. What matters here is the consequence: every bootstrap tree automatically leaves out over a third of the data it never saw, for free.</a:t>
+              <a:t>Give the one line of reasoning, not the limit. Each draw misses a given row with probability 1 - 1/m, and the m draws are independent, so the row is missed by all of them with probability (1 - 1/m) to the power m. At m = 1,200 that is 0.3677; as m grows it tends to 1/e, 0.368, which is the standard exponential limit worked out in handout section 5.1. What matters here is the consequence: every bootstrap tree automatically leaves out over a third of the rows, and never sees them.</a:t>
             </a:r>
           </a:p>
           <a:p>
@@ -2760,6 +2816,20 @@
             </a:pPr>
             <a:r>
               <a:rPr/>
+              <a:t>Where the gold bars come from, if asked: the number of times one row is drawn counts successes in 1,200 draws, each with probability 1/1,200. As the number of draws grows with the chance kept at one per row, that count follows the Poisson distribution with mean 1, which gives a fraction e^-1 / k! of rows drawn exactly k times: 0.368 never, 0.368 once, 0.184 twice, 0.061 three times.</a:t>
+            </a:r>
+          </a:p>
+          <a:p>
+            <a:pPr lvl="0" indent="0" marL="0">
+              <a:buNone/>
+            </a:pPr>
+          </a:p>
+          <a:p>
+            <a:pPr lvl="0" indent="0" marL="0">
+              <a:buNone/>
+            </a:pPr>
+            <a:r>
+              <a:rPr/>
               <a:t>The point to make: about one row in four appears two or more times. Every tree sees a different mix of repeats and absences, and that is where their disagreement - the raw material of bagging - comes from. Handout section 5.1.</a:t>
             </a:r>
           </a:p>
@@ -2842,6 +2912,30 @@
             </a:pPr>
             <a:r>
               <a:rPr/>
+              <a:t>The forest here comes four slides before its definition: a random forest is bagging with one extra rule, which slide 34 gives, and scikit-learn computes the OOB score for it with </a:t>
+            </a:r>
+            <a:r>
+              <a:rPr>
+                <a:latin typeface="Courier"/>
+              </a:rPr>
+              <a:t>oob_score=True</a:t>
+            </a:r>
+            <a:r>
+              <a:rPr/>
+              <a:t>. For this slide, read it as “300 bagged trees”.</a:t>
+            </a:r>
+          </a:p>
+          <a:p>
+            <a:pPr lvl="0" indent="0" marL="0">
+              <a:buNone/>
+            </a:pPr>
+          </a:p>
+          <a:p>
+            <a:pPr lvl="0" indent="0" marL="0">
+              <a:buNone/>
+            </a:pPr>
+            <a:r>
+              <a:rPr/>
               <a:t>The agreement is the point, but be careful how you sell it. On this seed the two numbers match to four decimal places, and that is luck: over twelve seeds the typical gap is 0.0026 and the worst is 0.0075. What is not luck is that they track each other well inside cross-validation’s own ±0.021 spread, because OOB score </a:t>
             </a:r>
             <a:r>
@@ -3092,7 +3186,7 @@
             </a:pPr>
             <a:r>
               <a:rPr/>
-              <a:t>State the headline, not the algebra - the covariance expansion behind this is in the handout, and it does not belong on a slide. The two consequences are what matter: there is a floor variance cannot fall below, set by how correlated the trees are with each other, and averaging is a variance tool only, powerless against a systematic mistake shared by every tree.</a:t>
+              <a:t>State the headline, not the algebra - the covariance expansion behind this is in handout section 5.2, and it does not belong on a slide. Read the formula on the slide in two pieces: the first term, sigma squared over B, shrinks as trees are added; the second, (B - 1)/B times rho sigma squared, grows towards rho sigma squared and stays there. The two consequences are what matter: there is a floor variance cannot fall below, set by how correlated the trees are with each other, and averaging is a variance tool only, powerless against a systematic mistake shared by every tree.</a:t>
             </a:r>
           </a:p>
           <a:p>
@@ -3298,7 +3392,7 @@
             </a:pPr>
             <a:r>
               <a:rPr/>
-              <a:t>Across 30 independent 70/30 splits of the loan data, both numbers moved in the predicted direction. The mean rose, because bagging also averages out some of a deep tree’s overfitting; the spread fell, which is exactly what the previous slide’s formula says averaging correlated estimators should do.</a:t>
+              <a:t>Across 30 random 70/30 splits of the loan data, both numbers moved in the predicted direction. The mean rose, because bagging also averages out some of a deep tree’s overfitting; the spread fell, which is exactly what the previous slide’s formula says averaging correlated estimators should do.</a:t>
             </a:r>
           </a:p>
           <a:p>
@@ -3532,7 +3626,7 @@
             </a:pPr>
             <a:r>
               <a:rPr/>
-              <a:t>Say plainly what has and hasn’t changed: nothing about the splitting rule is different from section 2. The only change across all three rows of this table is what surrounds the tree - resampling, then also restricting the feature menu.</a:t>
+              <a:t>Say plainly what has and hasn’t changed: nothing about the splitting rule is different from the first hour’s trees. The only change across all three rows of this table is what surrounds the tree - resampling, then also restricting the feature menu.</a:t>
             </a:r>
           </a:p>
           <a:p>
@@ -3772,7 +3866,7 @@
             </a:pPr>
             <a:r>
               <a:rPr/>
-              <a:t>Name the instinct this breaks, and defend it before moving on: expecting an average over hundreds of trees to wash out noise is entirely reasonable - the variance-reduction result from section 5.2 is real and measured, and it does point the same way. It reduces the variance of the </a:t>
+              <a:t>Name the instinct this breaks, and defend it before moving on: expecting an average over hundreds of trees to wash out noise is entirely reasonable - the variance-reduction result of the averaging slides is real and measured, and it does point the same way. It reduces the variance of the </a:t>
             </a:r>
             <a:r>
               <a:rPr i="1"/>
@@ -3876,6 +3970,20 @@
             </a:pPr>
             <a:r>
               <a:rPr/>
+              <a:t>The table is the notebook’s map: bagging from scratch and against scikit-learn, the out-of-bag score checked against cross-validation, the variance measured over 30 splits, and the noise-column experiment. Section 4 of the notebook is reading only, which is why the table skips it.</a:t>
+            </a:r>
+          </a:p>
+          <a:p>
+            <a:pPr lvl="0" indent="0" marL="0">
+              <a:buNone/>
+            </a:pPr>
+          </a:p>
+          <a:p>
+            <a:pPr lvl="0" indent="0" marL="0">
+              <a:buNone/>
+            </a:pPr>
+            <a:r>
+              <a:rPr/>
               <a:t>Run Notebooks/02_bagging_and_random_forests.ipynb. Eighteen minutes.</a:t>
             </a:r>
           </a:p>
@@ -4020,6 +4128,30 @@
             </a:pPr>
             <a:r>
               <a:rPr/>
+              <a:t>Slow down on “regression tree”, because it is new. “Shallow” means depth 2 or 3 here. Everything so far this lesson was a classification tree: leaves vote, splits are scored by Gini. A boosted tree is fit to corrections, which are numbers like +0.613 or -0.387, not classes, so it is the regression version of the same algorithm: the same greedy search over features and thresholds, but each leaf predicts the average correction of the examples in it, and a split is scored by how much it lowers the squared error around those averages. Even </a:t>
+            </a:r>
+            <a:r>
+              <a:rPr>
+                <a:latin typeface="Courier"/>
+              </a:rPr>
+              <a:t>GradientBoostingClassifier</a:t>
+            </a:r>
+            <a:r>
+              <a:rPr/>
+              <a:t> grows regression trees inside.</a:t>
+            </a:r>
+          </a:p>
+          <a:p>
+            <a:pPr lvl="0" indent="0" marL="0">
+              <a:buNone/>
+            </a:pPr>
+          </a:p>
+          <a:p>
+            <a:pPr lvl="0" indent="0" marL="0">
+              <a:buNone/>
+            </a:pPr>
+            <a:r>
+              <a:rPr/>
               <a:t>Name α carefully and tie it to the course’s shared notation - this is the same symbol as lesson 3’s gradient descent learning rate, doing an analogous job: how large a step each correction takes.</a:t>
             </a:r>
           </a:p>
@@ -4322,6 +4454,20 @@
             </a:pPr>
             <a:r>
               <a:rPr/>
+              <a:t>The In code line is the whole from-scratch loop of notebook 3, section 1: fit a depth-2 regression tree to the residuals, add 0.3 times its predictions to the running prediction, repeat sixty times.</a:t>
+            </a:r>
+          </a:p>
+          <a:p>
+            <a:pPr lvl="0" indent="0" marL="0">
+              <a:buNone/>
+            </a:pPr>
+          </a:p>
+          <a:p>
+            <a:pPr lvl="0" indent="0" marL="0">
+              <a:buNone/>
+            </a:pPr>
+            <a:r>
+              <a:rPr/>
               <a:t>State the result without the calculus. For plain squared-error regression, what a new tree corrects is literally the residual - the gap between the truth and the ensemble’s current prediction. That is intuitive on its own and does not need a derivative to justify.</a:t>
             </a:r>
           </a:p>
@@ -4336,7 +4482,7 @@
             </a:pPr>
             <a:r>
               <a:rPr/>
-              <a:t>The second bullet is the generalisation that pays off in the very next segment: the same recipe - fit a tree to the negative gradient of whatever loss you’re using - covers classification too, once the loss changes from squared error to something else. Handout section 8 has the one line of algebra connecting the two.</a:t>
+              <a:t>The second bullet is the generalisation that pays off in the very next segment: the same recipe - fit a tree to the negative gradient of whatever loss you’re using - covers classification too, once the loss changes from squared error to something else. The one line of algebra connecting the two is on the slide; handout section 8 sets it out.</a:t>
             </a:r>
           </a:p>
         </p:txBody>
@@ -4418,7 +4564,7 @@
             </a:pPr>
             <a:r>
               <a:rPr/>
-              <a:t>Sixty depth-2 trees, learning rate 0.3, fit to a step function plus a gentle sine wave, observed with noise. Walk through the panels in order.</a:t>
+              <a:t>A new toy dataset, so say what it is before anything else: 200 points on one input x, whose true value is a three-level step function plus a gentle sine wave (the black line), observed with noise (the grey dots). Sixty depth-2 trees, learning rate 0.3, are fit to it. Walk through the coloured curves in order.</a:t>
             </a:r>
           </a:p>
           <a:p>
@@ -4528,7 +4674,7 @@
             </a:pPr>
             <a:r>
               <a:rPr/>
-              <a:t>Put a number on each panel of the previous slide. Twenty trees is the sweet spot; by sixty the error against the true, noise-free function has risen again, even though the ensemble is still adding trees that reduce error on the </a:t>
+              <a:t>Put a number on each curve of the previous slide. Twenty trees is the sweet spot; by sixty the error against the true, noise-free function has risen again, even though the ensemble is still adding trees that reduce error on the </a:t>
             </a:r>
             <a:r>
               <a:rPr i="1"/>
@@ -4550,7 +4696,7 @@
             </a:pPr>
             <a:r>
               <a:rPr/>
-              <a:t>Name what this is: the same overfitting story as the unconstrained single tree from section 3, reached by a completely different route - not one tree grown too deep, but too many shallow trees each chasing whatever residual noise is left.</a:t>
+              <a:t>Name what this is: the same overfitting story as the unconstrained single tree of the depth table, reached by a completely different route - not one tree grown too deep, but too many shallow trees each chasing whatever residual noise is left.</a:t>
             </a:r>
           </a:p>
           <a:p>
@@ -4674,7 +4820,21 @@
             </a:pPr>
             <a:r>
               <a:rPr/>
-              <a:t>Give them the first step in numbers, because it makes y - p concrete. The ensemble starts at the base rate’s log-odds, F0 = log(0.387 / 0.613) = -0.461, which predicts 0.387 for everyone. The first tree is fit to y - p: +0.613 for every applicant who defaulted, -0.387 for every one who repaid.</a:t>
+              <a:t>The sigma here is lesson 4’s logistic function, 1 / (1 + e^-F), not the sigma squared of the variance slides: say so once, since the same letter has just meant something else.</a:t>
+            </a:r>
+          </a:p>
+          <a:p>
+            <a:pPr lvl="0" indent="0" marL="0">
+              <a:buNone/>
+            </a:pPr>
+          </a:p>
+          <a:p>
+            <a:pPr lvl="0" indent="0" marL="0">
+              <a:buNone/>
+            </a:pPr>
+            <a:r>
+              <a:rPr/>
+              <a:t>Give them the first step in numbers, because it makes y - p concrete. The ensemble starts at the base rate’s log-odds: 464 of the 1,200 defaulted, so F0 = log(464 / 736) = -0.461, which the logistic function turns back into 0.387 for everyone. The first tree is fit to y - p: +0.613 for every applicant who defaulted, -0.387 for every one who repaid.</a:t>
             </a:r>
           </a:p>
           <a:p>
@@ -4770,7 +4930,7 @@
             </a:pPr>
             <a:r>
               <a:rPr/>
-              <a:t>Give the number and let it sit against everything shown so far this lesson: 0.902, from a method run at scikit-learn’s defaults, no tuning at all. Ask the room to recall the single tuned tree’s number from section 3 - 0.882 at depth 8 - and note that boosting has already passed it without being told anything about depth.</a:t>
+              <a:t>Give the number and let it sit against everything shown so far this lesson: 0.902, from a method run at scikit-learn’s defaults, no tuning at all. Ask the room to recall the single tuned tree’s number from the depth table, 0.882 at depth 8, and note that boosting has already passed it without being told anything about depth.</a:t>
             </a:r>
           </a:p>
           <a:p>
@@ -4902,7 +5062,7 @@
             </a:pPr>
             <a:r>
               <a:rPr/>
-              <a:t>Point at the peak, 30 trees, and then at 800: training accuracy has been at 1.000 since well before 200, and cross-validated accuracy has drifted down by about a point since the peak. Contrast the size of that drop with section 3’s unconstrained tree, which lost three points past its own peak - boosting’s overfitting is real but gentler.</a:t>
+              <a:t>Point at the peak, 30 trees, and then at 800: training accuracy reached 1.000 by 200 trees and stayed there, and cross-validated accuracy has drifted down from 0.897 to 0.890, under a point, since the peak. Contrast the size of that drop with the unconstrained single tree of the depth table, which lost three points past its own peak - boosting’s overfitting is real but gentler.</a:t>
             </a:r>
           </a:p>
           <a:p>
@@ -5012,7 +5172,27 @@
             </a:pPr>
             <a:r>
               <a:rPr/>
-              <a:t>The point worth making explicit: the damage per added tree here is small and easy to miss on a single run - which is exactly why early stopping matters for boosting rather than being optional, even though the overfit is gentler than a single unconstrained tree’s.</a:t>
+              <a:t>The point worth making explicit: the damage per added tree here is small and easy to miss on a single run - which is exactly why early stopping matters for boosting rather than being optional, even though the overfit is gentler than a single unconstrained tree’s. Say what early stopping is, since the deck has not: set aside part of the training data, watch the score on it as trees are added, and stop once it has not improved for a number of rounds. In scikit-learn that is the </a:t>
+            </a:r>
+            <a:r>
+              <a:rPr>
+                <a:latin typeface="Courier"/>
+              </a:rPr>
+              <a:t>n_iter_no_change</a:t>
+            </a:r>
+            <a:r>
+              <a:rPr/>
+              <a:t> argument of </a:t>
+            </a:r>
+            <a:r>
+              <a:rPr>
+                <a:latin typeface="Courier"/>
+              </a:rPr>
+              <a:t>GradientBoostingClassifier</a:t>
+            </a:r>
+            <a:r>
+              <a:rPr/>
+              <a:t>.</a:t>
             </a:r>
           </a:p>
           <a:p>
@@ -5108,7 +5288,7 @@
             </a:pPr>
             <a:r>
               <a:rPr/>
-              <a:t>Learning rate and tree count are not independent - both control how much total correction the ensemble applies, so they trade off against each other. At α = 0.02, 120 trees haven’t finished fitting the signal: training accuracy is still under 0.89. At α = 1.00, the ensemble has memorised the training set completely and given back several points of cross-validated accuracy for it.</a:t>
+              <a:t>Learning rate and tree count are not independent - both control how much total correction the ensemble applies, so they trade off against each other. At α = 0.02, 120 trees haven’t finished fitting the signal: training accuracy is still under 0.89. At α = 1.00, the ensemble has memorised the training set completely and given back more than two points of cross-validated accuracy for it, 0.902 down to 0.878.</a:t>
             </a:r>
           </a:p>
           <a:p>
@@ -5226,6 +5406,20 @@
             </a:pPr>
             <a:r>
               <a:rPr/>
+              <a:t>The table is the notebook’s map: boosting from scratch on the residuals, then scikit-learn’s classifier, the tree-count and learning-rate sweeps, and the leaderboard of the next slide.</a:t>
+            </a:r>
+          </a:p>
+          <a:p>
+            <a:pPr lvl="0" indent="0" marL="0">
+              <a:buNone/>
+            </a:pPr>
+          </a:p>
+          <a:p>
+            <a:pPr lvl="0" indent="0" marL="0">
+              <a:buNone/>
+            </a:pPr>
+            <a:r>
+              <a:rPr/>
               <a:t>Run Notebooks/03_gradient_boosting.ipynb. Eighteen minutes.</a:t>
             </a:r>
           </a:p>
@@ -5364,6 +5558,20 @@
             </a:pPr>
             <a:r>
               <a:rPr/>
+              <a:t>One honest caveat, in lesson 5’s terms. The depth of 8 and the 30 boosted trees were picked because they scored best on these same five folds, so those two rows are slightly optimistic; nested cross-validation would remove that. Bagging and the random forest ran at their defaults, chose nothing, and are not affected - and they are still on top.</a:t>
+            </a:r>
+          </a:p>
+          <a:p>
+            <a:pPr lvl="0" indent="0" marL="0">
+              <a:buNone/>
+            </a:pPr>
+          </a:p>
+          <a:p>
+            <a:pPr lvl="0" indent="0" marL="0">
+              <a:buNone/>
+            </a:pPr>
+            <a:r>
+              <a:rPr/>
               <a:t>Handout section 11.</a:t>
             </a:r>
           </a:p>
@@ -5446,7 +5654,7 @@
             </a:pPr>
             <a:r>
               <a:rPr/>
-              <a:t>Unlike lesson 6’s pumps, logistic regression clears the baseline by a wide margin here - it has learned something. Three of the four risky regions are monotonic in at least one feature, and a linear boundary handles monotonic effects reasonably well.</a:t>
+              <a:t>Unlike lesson 6’s pumps, logistic regression clears the baseline by a wide margin here - it has learned something. Two of the four risky regions, the low-income strip and the high-debt strip, get riskier steadily as one feature moves in one direction, and a straight boundary handles that kind of effect reasonably well.</a:t>
             </a:r>
           </a:p>
           <a:p>
@@ -5570,7 +5778,7 @@
             </a:pPr>
             <a:r>
               <a:rPr/>
-              <a:t>The third finding is the one to land hardest, because it repeats a pattern they’ve now seen four times with four different methods: flexibility without a stopping rule is not an advantage. Ask the room to name the earlier three occurrences before you do - k = 1 in lesson 6, an unregularised fit in lesson 3, and today’s own unconstrained tree from section 3.</a:t>
+              <a:t>The third finding is the one to land hardest, because it repeats a pattern they have now seen with several different methods: flexibility without a stopping rule is not an advantage. Ask the room to name the earlier occurrences before you do - the degree-12 polynomial in lesson 3, k = 1 in lesson 6, and, earlier today, the boosted ensemble that kept adding trees past its peak.</a:t>
             </a:r>
           </a:p>
           <a:p>
@@ -5666,21 +5874,21 @@
             </a:pPr>
             <a:r>
               <a:rPr/>
-              <a:t>A table to photograph, exactly as lesson 6 closed with one. Work down it and attach today’s evidence to each row rather than leaving it as generic advice.</a:t>
-            </a:r>
-          </a:p>
-          <a:p>
-            <a:pPr lvl="0" indent="0" marL="0">
-              <a:buNone/>
-            </a:pPr>
-          </a:p>
-          <a:p>
-            <a:pPr lvl="0" indent="0" marL="0">
-              <a:buNone/>
-            </a:pPr>
-            <a:r>
-              <a:rPr/>
-              <a:t>The fourth row is worth a sentence of its own, tying back to the noise experiment: with few real features against many candidate columns, trust importances less as the column count grows past what the data can support.</a:t>
+              <a:t>A table to photograph, exactly as lesson 6 closed with one. Work down it and attach today’s evidence to each row rather than leaving it as generic advice: the nine-leaf tree for the first row, the leaderboard for the second, the tree-count and learning-rate tables for the third, the noise experiment for the fourth, the out-of-bag slide for the fifth.</a:t>
+            </a:r>
+          </a:p>
+          <a:p>
+            <a:pPr lvl="0" indent="0" marL="0">
+              <a:buNone/>
+            </a:pPr>
+          </a:p>
+          <a:p>
+            <a:pPr lvl="0" indent="0" marL="0">
+              <a:buNone/>
+            </a:pPr>
+            <a:r>
+              <a:rPr/>
+              <a:t>The fourth row is worth a sentence of its own, tying back to the noise experiment: with two real features among 22 columns and 1,200 rows, more than half the importance already landed on noise. Many rows do not protect against it; what matters is how many useless columns compete at each split. Permutation importance is on the next slide.</a:t>
             </a:r>
           </a:p>
           <a:p>
@@ -5790,7 +5998,35 @@
             </a:pPr>
             <a:r>
               <a:rPr/>
-              <a:t>Ask them to write it down - derivations fade, this kind of number tends not to. It is the fourth lesson this course has produced one of these: coin flip labels, borrowed test-set values, a coefficient of 365 where an unpenalised fit wanted billions, and now this.</a:t>
+              <a:t>Ask them to write it down - derivations fade, this kind of number tends not to. Every lesson so far has left one of these - lesson 1’s 77% accuracy on coin-flip labels, lesson 3’s coefficient of 365 where an unpenalised fit wanted billions - and this is lesson 7’s.</a:t>
+            </a:r>
+          </a:p>
+          <a:p>
+            <a:pPr lvl="0" indent="0" marL="0">
+              <a:buNone/>
+            </a:pPr>
+          </a:p>
+          <a:p>
+            <a:pPr lvl="0" indent="0" marL="0">
+              <a:buNone/>
+            </a:pPr>
+            <a:r>
+              <a:rPr/>
+              <a:t>The second bullet is the mechanism in one number. The square root of 22, rounded down, is 4, so each split chooses among 4 random columns. The chance that all 4 come from the 20 noise columns is 4,845 / 7,315 = 0.662. At those splits the tree still has to pick something, and among 1,200 noisy rows some noise column always reduces the impurity a little, by chance.</a:t>
+            </a:r>
+          </a:p>
+          <a:p>
+            <a:pPr lvl="0" indent="0" marL="0">
+              <a:buNone/>
+            </a:pPr>
+          </a:p>
+          <a:p>
+            <a:pPr lvl="0" indent="0" marL="0">
+              <a:buNone/>
+            </a:pPr>
+            <a:r>
+              <a:rPr/>
+              <a:t>The last bullet, permutation importance, is the remedy the handout points to: a column the model really uses costs accuracy when its values are shuffled; a noise column costs nothing. It is measured on data the forest did not train on, so a column cannot earn credit by having been memorised.</a:t>
             </a:r>
           </a:p>
           <a:p>
@@ -5914,7 +6150,7 @@
             </a:pPr>
             <a:r>
               <a:rPr/>
-              <a:t>Next lesson turns from labelled data to unlabelled data - a fourth question this course asks of a dataset, after “what’s the relationship”, “which class”, and “how do you know you’re not fooling yourself”: what structure is there when nobody has told you the answer at all.</a:t>
+              <a:t>Next lesson turns from labelled data to unlabelled data. Every model so far learned from examples whose answer was known: a price, a class, a default. Lesson 8 asks what structure there is in data when nobody has given the answer at all.</a:t>
             </a:r>
           </a:p>
           <a:p>
@@ -6038,7 +6274,7 @@
             </a:pPr>
             <a:r>
               <a:rPr/>
-              <a:t>Next week: unsupervised learning, the first lesson this course asks of data with no labels at all.</a:t>
+              <a:t>Next week: unsupervised learning, the first lesson in which the data comes with no labels at all.</a:t>
             </a:r>
           </a:p>
         </p:txBody>
@@ -6272,7 +6508,7 @@
             </a:pPr>
             <a:r>
               <a:rPr/>
-              <a:t>Step 3 is where to slow down, because it shows greed. On the right, one split sets aside a single applicant from 68 others - the cut at 0.948, a thousandth above the 0.947 one, so in the plane the two gold lines lie on top of each other. Someone will ask why debt is asked twice: it is not the same question, and the tree spent a split on the one applicant between them who repaid; another divides 160 applicants into 90% and 97% default - both still predicted “default”, so the cut changes no decision at all. Each was the best available move at that node; the tree has no way to ask whether it was worth making. And neither interior island has appeared yet: three rounds were spent on the easy strips. Hold that thought - it is the “what greedy misses” slide in ten minutes.</a:t>
+              <a:t>Step 3 is where to slow down, because it shows greed. On the right, one split sets aside a single applicant from 68 others - the cut at 0.948, a thousandth above the 0.947 one, so in the plane the two gold lines lie on top of each other. Someone will ask why the tree asks about debt twice. The two thresholds are different questions: exactly one applicant has a debt ratio between 0.947 and 0.948, that applicant repaid, and the tree spent a whole split on separating them. Another split divides 160 applicants into groups at 90% and 97% default - both groups are still predicted “default”, so that cut changes no decision at all. Each was the best available move at that node; the tree has no way to ask whether it was worth making. And neither interior island has appeared yet: three rounds were spent on the easy strips. Hold that thought - it is the “what greedy misses” slide in ten minutes.</a:t>
             </a:r>
           </a:p>
           <a:p>
@@ -9924,14 +10160,22 @@
             <a:pPr lvl="0"/>
             <a:r>
               <a:rPr/>
-              <a:t>A candidate split divides a group into a left and a right child</a:t>
+              <a:t>A candidate split divides a parent group P into a left child L and a right child R; </a:t>
+            </a:r>
+            <a:r>
+              <a:rPr i="1"/>
+              <a:t>m</a:t>
+            </a:r>
+            <a:r>
+              <a:rPr/>
+              <a:t> counts the examples in each</a:t>
             </a:r>
           </a:p>
           <a:p>
             <a:pPr lvl="0"/>
             <a:r>
               <a:rPr/>
-              <a:t>It is worth taking if the children are, </a:t>
+              <a:t>Worth taking if the children are, </a:t>
             </a:r>
             <a:r>
               <a:rPr b="1"/>
@@ -9939,14 +10183,22 @@
             </a:r>
             <a:r>
               <a:rPr/>
-              <a:t> than the parent was</a:t>
+              <a:t> than the parent</a:t>
             </a:r>
           </a:p>
           <a:p>
             <a:pPr lvl="0"/>
             <a:r>
               <a:rPr/>
-              <a:t>“On average” is weighted by how many examples land in each child: a split that purifies nine points and dumps one troublemaker into its own leaf is not free</a:t>
+              <a:t>The average is </a:t>
+            </a:r>
+            <a:r>
+              <a:rPr b="1"/>
+              <a:t>weighted by size</a:t>
+            </a:r>
+            <a:r>
+              <a:rPr/>
+              <a:t>: one example cut off alone would halve a plain average, and barely moves a weighted one</a:t>
             </a:r>
           </a:p>
         </p:txBody>
@@ -10250,14 +10502,7 @@
             </a:r>
             <a:r>
               <a:rPr/>
-              <a:t> as the best root split</a:t>
-            </a:r>
-          </a:p>
-          <a:p>
-            <a:pPr lvl="0"/>
-            <a:r>
-              <a:rPr/>
-              <a:t>Recognisably the </a:t>
+              <a:t>: the </a:t>
             </a:r>
             <a:r>
               <a:rPr b="1"/>
@@ -10272,7 +10517,14 @@
             <a:pPr lvl="0"/>
             <a:r>
               <a:rPr/>
-              <a:t>971 applicants left (0.256 defaulted), 229 right (0.939): gain </a:t>
+              <a:t>971 applicants left (0.256 defaulted, impurity 0.381), 229 right (0.939, impurity 0.115)</a:t>
+            </a:r>
+          </a:p>
+          <a:p>
+            <a:pPr lvl="0"/>
+            <a:r>
+              <a:rPr/>
+              <a:t>Weighted by size, the children average 0.3305 against the parent’s 0.4743: gain </a:t>
             </a:r>
             <a:r>
               <a:rPr b="1"/>
@@ -10684,11 +10936,11 @@
             </a:r>
             <a:r>
               <a:rPr b="1"/>
-              <a:t>exactly 1.000 on any dataset</a:t>
-            </a:r>
-            <a:r>
-              <a:rPr/>
-              <a:t>, including one with no structure at all</a:t>
+              <a:t>exactly 1.000</a:t>
+            </a:r>
+            <a:r>
+              <a:rPr/>
+              <a:t>, even on data with no structure at all, unless two examples share every feature value but not the label</a:t>
             </a:r>
           </a:p>
         </p:txBody>
@@ -11530,7 +11782,7 @@
             </a:r>
             <a:r>
               <a:rPr/>
-              <a:t>: every leaf at level d splits before any leaf reaches d+1, useful or not</a:t>
+              <a:t>: every leaf at level d splits before any leaf reaches d+1</a:t>
             </a:r>
           </a:p>
           <a:p>
@@ -11551,15 +11803,11 @@
             </a:r>
             <a:r>
               <a:rPr/>
-              <a:t>: always expanding whichever leaf offers the largest ΔG</a:t>
+              <a:t>: always the leaf with the largest ΔG</a:t>
             </a:r>
           </a:p>
           <a:p>
             <a:pPr lvl="0"/>
-            <a:r>
-              <a:rPr/>
-              <a:t>With </a:t>
-            </a:r>
             <a:r>
               <a:rPr>
                 <a:latin typeface="Courier"/>
@@ -11576,7 +11824,24 @@
             </a:r>
             <a:r>
               <a:rPr/>
-              <a:t> training accuracy, every threshold recognisable: 28 the income floor, 0.82 the debt ceiling</a:t>
+              <a:t> training accuracy; thresholds 28, the income floor, and 0.82, the debt ceiling</a:t>
+            </a:r>
+          </a:p>
+          <a:p>
+            <a:pPr lvl="0"/>
+            <a:r>
+              <a:rPr/>
+              <a:t>In code: </a:t>
+            </a:r>
+            <a:r>
+              <a:rPr>
+                <a:latin typeface="Courier"/>
+              </a:rPr>
+              <a:t>export_text(tree)</a:t>
+            </a:r>
+            <a:r>
+              <a:rPr/>
+              <a:t> prints the tree as if/else rules</a:t>
             </a:r>
           </a:p>
         </p:txBody>
@@ -11666,7 +11931,7 @@
             </a:r>
             <a:r>
               <a:rPr/>
-              <a:t>, fit to independent 65% resamples of the same 1,200 applicants</a:t>
+              <a:t>, each on a random 65% of the applicants (no replacement)</a:t>
             </a:r>
           </a:p>
           <a:p>
@@ -11707,7 +11972,7 @@
             <a:pPr lvl="0"/>
             <a:r>
               <a:rPr/>
-              <a:t>The strongest split is stable; the many weaker ones are not, and they decide most of a tree’s shape</a:t>
+              <a:t>The strongest split is stable; the weaker ones, which shape most of the tree, are not</a:t>
             </a:r>
           </a:p>
         </p:txBody>
@@ -11764,41 +12029,274 @@
           </a:p>
         </p:txBody>
       </p:sp>
-      <p:sp>
-        <p:nvSpPr>
-          <p:cNvPr id="3" name="Content Placeholder 2"/>
-          <p:cNvSpPr>
-            <a:spLocks noGrp="1"/>
-          </p:cNvSpPr>
+      <p:graphicFrame>
+        <p:nvGraphicFramePr>
+          <p:cNvPr id="6" name="Content Placeholder 5"/>
+          <p:cNvGraphicFramePr>
+            <a:graphicFrameLocks noGrp="1"/>
+          </p:cNvGraphicFramePr>
           <p:nvPr>
             <p:ph idx="1"/>
           </p:nvPr>
-        </p:nvSpPr>
-        <p:spPr>
-          <a:xfrm>
-            <a:off x="457200" y="1200151"/>
-            <a:ext cx="8229600" cy="3394472"/>
-          </a:xfrm>
-        </p:spPr>
-        <p:txBody>
-          <a:bodyPr/>
-          <a:lstStyle/>
-          <a:p>
-            <a:pPr lvl="0"/>
-            <a:r>
-              <a:rPr/>
-              <a:t>Decision trees from scratch, checked against scikit-learn</a:t>
-            </a:r>
-          </a:p>
-          <a:p>
-            <a:pPr lvl="0"/>
-            <a:r>
-              <a:rPr/>
-              <a:t>Depth swept, the two boundaries drawn, and the instability measured</a:t>
-            </a:r>
-          </a:p>
-        </p:txBody>
-      </p:sp>
+        </p:nvGraphicFramePr>
+        <p:xfrm>
+          <a:off x="457200" y="1166099"/>
+          <a:ext cx="8229600" cy="3390900"/>
+        </p:xfrm>
+        <a:graphic>
+          <a:graphicData uri="http://schemas.openxmlformats.org/drawingml/2006/table">
+            <a:tbl>
+              <a:tblPr firstRow="1" bandRow="1">
+                <a:tableStyleId>{5C22544A-7EE6-4342-B048-85BDC9FD1C3A}</a:tableStyleId>
+              </a:tblPr>
+              <a:tblGrid>
+                <a:gridCol w="4114800"/>
+                <a:gridCol w="4114800"/>
+              </a:tblGrid>
+              <a:tr h="0">
+                <a:tc>
+                  <a:txBody>
+                    <a:bodyPr/>
+                    <a:lstStyle/>
+                    <a:p>
+                      <a:pPr lvl="0" indent="0" marL="0">
+                        <a:buNone/>
+                      </a:pPr>
+                      <a:r>
+                        <a:rPr/>
+                        <a:t>section, and its slides</a:t>
+                      </a:r>
+                    </a:p>
+                  </a:txBody>
+                  <a:tcPr/>
+                </a:tc>
+                <a:tc>
+                  <a:txBody>
+                    <a:bodyPr/>
+                    <a:lstStyle/>
+                    <a:p>
+                      <a:pPr lvl="0" indent="0" marL="0">
+                        <a:buNone/>
+                      </a:pPr>
+                      <a:r>
+                        <a:rPr/>
+                        <a:t>you call (→ the number to come back with)</a:t>
+                      </a:r>
+                    </a:p>
+                  </a:txBody>
+                  <a:tcPr/>
+                </a:tc>
+              </a:tr>
+              <a:tr h="0">
+                <a:tc>
+                  <a:txBody>
+                    <a:bodyPr/>
+                    <a:lstStyle/>
+                    <a:p>
+                      <a:pPr lvl="0" indent="0" marL="0">
+                        <a:buNone/>
+                      </a:pPr>
+                      <a:r>
+                        <a:rPr/>
+                        <a:t>1. look at it first, 4-6</a:t>
+                      </a:r>
+                    </a:p>
+                  </a:txBody>
+                </a:tc>
+                <a:tc>
+                  <a:txBody>
+                    <a:bodyPr/>
+                    <a:lstStyle/>
+                    <a:p>
+                      <a:pPr lvl="0" indent="0" marL="0">
+                        <a:buNone/>
+                      </a:pPr>
+                      <a:r>
+                        <a:rPr>
+                          <a:latin typeface="Courier"/>
+                        </a:rPr>
+                        <a:t>make_pipeline(StandardScaler(), LogisticRegression())</a:t>
+                      </a:r>
+                      <a:r>
+                        <a:rPr/>
+                        <a:t> in </a:t>
+                      </a:r>
+                      <a:r>
+                        <a:rPr>
+                          <a:latin typeface="Courier"/>
+                        </a:rPr>
+                        <a:t>cross_val_score(..., cv=StratifiedKFold(5))</a:t>
+                      </a:r>
+                      <a:r>
+                        <a:rPr/>
+                        <a:t> → 0.613 against 0.748</a:t>
+                      </a:r>
+                    </a:p>
+                  </a:txBody>
+                </a:tc>
+              </a:tr>
+              <a:tr h="0">
+                <a:tc>
+                  <a:txBody>
+                    <a:bodyPr/>
+                    <a:lstStyle/>
+                    <a:p>
+                      <a:pPr lvl="0" indent="0" marL="0">
+                        <a:buNone/>
+                      </a:pPr>
+                      <a:r>
+                        <a:rPr/>
+                        <a:t>2. a tree, split by split, 7-18</a:t>
+                      </a:r>
+                    </a:p>
+                  </a:txBody>
+                </a:tc>
+                <a:tc>
+                  <a:txBody>
+                    <a:bodyPr/>
+                    <a:lstStyle/>
+                    <a:p>
+                      <a:pPr lvl="0" indent="0" marL="0">
+                        <a:buNone/>
+                      </a:pPr>
+                      <a:r>
+                        <a:rPr/>
+                        <a:t>your own </a:t>
+                      </a:r>
+                      <a:r>
+                        <a:rPr>
+                          <a:latin typeface="Courier"/>
+                        </a:rPr>
+                        <a:t>gini</a:t>
+                      </a:r>
+                      <a:r>
+                        <a:rPr/>
+                        <a:t> and </a:t>
+                      </a:r>
+                      <a:r>
+                        <a:rPr>
+                          <a:latin typeface="Courier"/>
+                        </a:rPr>
+                        <a:t>best_split</a:t>
+                      </a:r>
+                      <a:r>
+                        <a:rPr/>
+                        <a:t>, then </a:t>
+                      </a:r>
+                      <a:r>
+                        <a:rPr>
+                          <a:latin typeface="Courier"/>
+                        </a:rPr>
+                        <a:t>DecisionTreeClassifier(max_depth=d)</a:t>
+                      </a:r>
+                      <a:r>
+                        <a:rPr/>
+                        <a:t> → 100.0% identical predictions; gain 0.1438</a:t>
+                      </a:r>
+                    </a:p>
+                  </a:txBody>
+                </a:tc>
+              </a:tr>
+              <a:tr h="0">
+                <a:tc>
+                  <a:txBody>
+                    <a:bodyPr/>
+                    <a:lstStyle/>
+                    <a:p>
+                      <a:pPr lvl="0" indent="0" marL="0">
+                        <a:buNone/>
+                      </a:pPr>
+                      <a:r>
+                        <a:rPr/>
+                        <a:t>3. the depth dial, 19-22</a:t>
+                      </a:r>
+                    </a:p>
+                  </a:txBody>
+                </a:tc>
+                <a:tc>
+                  <a:txBody>
+                    <a:bodyPr/>
+                    <a:lstStyle/>
+                    <a:p>
+                      <a:pPr lvl="0" indent="0" marL="0">
+                        <a:buNone/>
+                      </a:pPr>
+                      <a:r>
+                        <a:rPr>
+                          <a:latin typeface="Courier"/>
+                        </a:rPr>
+                        <a:t>DecisionTreeClassifier(max_depth=d)</a:t>
+                      </a:r>
+                      <a:r>
+                        <a:rPr/>
+                        <a:t> in </a:t>
+                      </a:r>
+                      <a:r>
+                        <a:rPr>
+                          <a:latin typeface="Courier"/>
+                        </a:rPr>
+                        <a:t>cross_val_score</a:t>
+                      </a:r>
+                      <a:r>
+                        <a:rPr/>
+                        <a:t> → peak 0.882 at depth 8</a:t>
+                      </a:r>
+                    </a:p>
+                  </a:txBody>
+                </a:tc>
+              </a:tr>
+              <a:tr h="0">
+                <a:tc>
+                  <a:txBody>
+                    <a:bodyPr/>
+                    <a:lstStyle/>
+                    <a:p>
+                      <a:pPr lvl="0" indent="0" marL="0">
+                        <a:buNone/>
+                      </a:pPr>
+                      <a:r>
+                        <a:rPr/>
+                        <a:t>4. what a tree costs, 23-24</a:t>
+                      </a:r>
+                    </a:p>
+                  </a:txBody>
+                </a:tc>
+                <a:tc>
+                  <a:txBody>
+                    <a:bodyPr/>
+                    <a:lstStyle/>
+                    <a:p>
+                      <a:pPr lvl="0" indent="0" marL="0">
+                        <a:buNone/>
+                      </a:pPr>
+                      <a:r>
+                        <a:rPr>
+                          <a:latin typeface="Courier"/>
+                        </a:rPr>
+                        <a:t>DecisionTreeClassifier(max_leaf_nodes=9)</a:t>
+                      </a:r>
+                      <a:r>
+                        <a:rPr/>
+                        <a:t>, </a:t>
+                      </a:r>
+                      <a:r>
+                        <a:rPr>
+                          <a:latin typeface="Courier"/>
+                        </a:rPr>
+                        <a:t>export_text</a:t>
+                      </a:r>
+                      <a:r>
+                        <a:rPr/>
+                        <a:t> → 0.908; two trees agree on 0.883</a:t>
+                      </a:r>
+                    </a:p>
+                  </a:txBody>
+                </a:tc>
+              </a:tr>
+            </a:tbl>
+          </a:graphicData>
+        </a:graphic>
+      </p:graphicFrame>
     </p:spTree>
   </p:cSld>
 </p:sld>
@@ -11954,7 +12452,7 @@
             <a:pPr lvl="0"/>
             <a:r>
               <a:rPr/>
-              <a:t>A tree’s mistakes differ across resamples, as just measured, so </a:t>
+              <a:t>Trees differ across samples, so </a:t>
             </a:r>
             <a:r>
               <a:rPr b="1"/>
@@ -11962,22 +12460,18 @@
             </a:r>
             <a:r>
               <a:rPr/>
-              <a:t> should partly cancel out</a:t>
+              <a:t> should partly cancel their mistakes</a:t>
             </a:r>
           </a:p>
           <a:p>
             <a:pPr lvl="0"/>
             <a:r>
-              <a:rPr/>
-              <a:t>Draw a </a:t>
-            </a:r>
-            <a:r>
               <a:rPr b="1"/>
-              <a:t>bootstrap sample</a:t>
-            </a:r>
-            <a:r>
-              <a:rPr/>
-              <a:t>: m rows chosen </a:t>
+              <a:t>Bootstrap sample</a:t>
+            </a:r>
+            <a:r>
+              <a:rPr/>
+              <a:t>: m rows drawn </a:t>
             </a:r>
             <a:r>
               <a:rPr b="1"/>
@@ -11992,7 +12486,7 @@
             <a:pPr lvl="0"/>
             <a:r>
               <a:rPr/>
-              <a:t>Fit a tree to it. Repeat </a:t>
+              <a:t>One tree per sample, </a:t>
             </a:r>
             <a:r>
               <a:rPr>
@@ -12008,12 +12502,34 @@
               <a:rPr b="1"/>
               <a:t>majority vote</a:t>
             </a:r>
+            <a:r>
+              <a:rPr/>
+              <a:t>. That is </a:t>
+            </a:r>
+            <a:r>
+              <a:rPr b="1"/>
+              <a:t>bagging</a:t>
+            </a:r>
+            <a:r>
+              <a:rPr/>
+              <a:t>: bootstrap aggregating</a:t>
+            </a:r>
           </a:p>
           <a:p>
             <a:pPr lvl="0"/>
             <a:r>
               <a:rPr/>
-              <a:t>The tree algorithm itself is unchanged, only what surrounds it is new</a:t>
+              <a:t>In code: </a:t>
+            </a:r>
+            <a:r>
+              <a:rPr>
+                <a:latin typeface="Courier"/>
+              </a:rPr>
+              <a:t>BaggingClassifier()</a:t>
+            </a:r>
+            <a:r>
+              <a:rPr/>
+              <a:t>, whose default model is a decision tree</a:t>
             </a:r>
           </a:p>
         </p:txBody>
@@ -12093,14 +12609,14 @@
             <a:pPr lvl="0"/>
             <a:r>
               <a:rPr/>
-              <a:t>Each bootstrap sample is drawn from the same m rows, with replacement</a:t>
+              <a:t>One row is missed by all m draws with probability (1 - 1/m)ᵐ, which tends to e⁻¹ ≈ 0.368 as m grows</a:t>
             </a:r>
           </a:p>
           <a:p>
             <a:pPr lvl="0"/>
             <a:r>
               <a:rPr/>
-              <a:t>About </a:t>
+              <a:t>So about </a:t>
             </a:r>
             <a:r>
               <a:rPr b="1"/>
@@ -12406,14 +12922,7 @@
             <a:pPr lvl="0"/>
             <a:r>
               <a:rPr/>
-              <a:t>Every out-of-bag row is validation data for the tree that missed it</a:t>
-            </a:r>
-          </a:p>
-          <a:p>
-            <a:pPr lvl="0"/>
-            <a:r>
-              <a:rPr/>
-              <a:t>Averaging them gives the </a:t>
+              <a:t>Predict each row by a vote of only the trees that never saw it: the accuracy of those votes is the </a:t>
             </a:r>
             <a:r>
               <a:rPr b="1"/>
@@ -12421,14 +12930,14 @@
             </a:r>
             <a:r>
               <a:rPr/>
-              <a:t>, at no extra split</a:t>
+              <a:t>, with no rows set aside</a:t>
             </a:r>
           </a:p>
           <a:p>
             <a:pPr lvl="0"/>
             <a:r>
               <a:rPr/>
-              <a:t>A 300-tree forest: OOB </a:t>
+              <a:t>A 300-tree random forest (bagged trees plus one rule, slide 34): OOB </a:t>
             </a:r>
             <a:r>
               <a:rPr b="1"/>
@@ -12436,7 +12945,7 @@
             </a:r>
             <a:r>
               <a:rPr/>
-              <a:t>, 5-fold cross-validated </a:t>
+              <a:t>; 5-fold cross-validation </a:t>
             </a:r>
             <a:r>
               <a:rPr b="1"/>
@@ -12447,15 +12956,15 @@
             <a:pPr lvl="0"/>
             <a:r>
               <a:rPr/>
-              <a:t>That match to four decimals is </a:t>
+              <a:t>The four-decimal match is </a:t>
             </a:r>
             <a:r>
               <a:rPr b="1"/>
-              <a:t>this seed’s luck</a:t>
-            </a:r>
-            <a:r>
-              <a:rPr/>
-              <a:t>: over twelve seeds the gap is 0.003: agreement to within their own noise, not to every decimal</a:t>
+              <a:t>luck</a:t>
+            </a:r>
+            <a:r>
+              <a:rPr/>
+              <a:t>: over twelve seeds the two differ by 0.0026 on average, well inside ±0.021</a:t>
             </a:r>
           </a:p>
         </p:txBody>
@@ -12535,14 +13044,14 @@
             <a:pPr lvl="0"/>
             <a:r>
               <a:rPr/>
-              <a:t>Model each tree’s prediction as noisy, with variance σ², and let ρ be the correlation between any two trees</a:t>
+              <a:t>Model each tree’s prediction as noisy, with variance σ² over the bootstrap sample it drew, and let ρ be the correlation between two trees</a:t>
             </a:r>
           </a:p>
           <a:p>
             <a:pPr lvl="0"/>
             <a:r>
               <a:rPr/>
-              <a:t>Averaging B trees drives variance toward a </a:t>
+              <a:t>The average of B trees has variance σ²/B + ρσ² (B-1)/B: a </a:t>
             </a:r>
             <a:r>
               <a:rPr b="1"/>
@@ -12558,7 +13067,7 @@
             </a:r>
             <a:r>
               <a:rPr/>
-              <a:t>: adding trees past that point buys almost nothing</a:t>
+              <a:t>: more trees soon buy little</a:t>
             </a:r>
           </a:p>
           <a:p>
@@ -12764,7 +13273,7 @@
                       </a:pPr>
                       <a:r>
                         <a:rPr/>
-                        <a:t>Mean test accuracy</a:t>
+                        <a:t>Mean test accuracy, 30 random 70/30 splits</a:t>
                       </a:r>
                     </a:p>
                   </a:txBody>
@@ -12780,7 +13289,7 @@
                       </a:pPr>
                       <a:r>
                         <a:rPr/>
-                        <a:t>Standard deviation</a:t>
+                        <a:t>Standard deviation across the 30</a:t>
                       </a:r>
                     </a:p>
                   </a:txBody>
@@ -12960,7 +13469,7 @@
             <a:pPr lvl="0"/>
             <a:r>
               <a:rPr/>
-              <a:t>The variance floor is ρσ²: lowering it further means making the trees agree </a:t>
+              <a:t>The floor is ρσ²: lowering it means making the trees agree </a:t>
             </a:r>
             <a:r>
               <a:rPr b="1"/>
@@ -12971,7 +13480,7 @@
             <a:pPr lvl="0"/>
             <a:r>
               <a:rPr/>
-              <a:t>Bagged trees still see </a:t>
+              <a:t>Bagged trees see </a:t>
             </a:r>
             <a:r>
               <a:rPr b="1"/>
@@ -12979,7 +13488,7 @@
             </a:r>
             <a:r>
               <a:rPr/>
-              <a:t> at every split, so a strong feature pulls most of them towards splitting on it first</a:t>
+              <a:t>, so a strong one pulls them all the same way</a:t>
             </a:r>
           </a:p>
           <a:p>
@@ -12994,7 +13503,7 @@
             </a:r>
             <a:r>
               <a:rPr/>
-              <a:t> restricts each split to a random subset of </a:t>
+              <a:t> offers each split a random subset of </a:t>
             </a:r>
             <a:r>
               <a:rPr>
@@ -13004,7 +13513,24 @@
             </a:r>
             <a:r>
               <a:rPr/>
-              <a:t> (default √n, rounded down): different trees see different features at the same point, lowering ρ</a:t>
+              <a:t> (default √n, rounded down), lowering ρ</a:t>
+            </a:r>
+          </a:p>
+          <a:p>
+            <a:pPr lvl="0"/>
+            <a:r>
+              <a:rPr/>
+              <a:t>In code: </a:t>
+            </a:r>
+            <a:r>
+              <a:rPr>
+                <a:latin typeface="Courier"/>
+              </a:rPr>
+              <a:t>RandomForestClassifier()</a:t>
+            </a:r>
+            <a:r>
+              <a:rPr/>
+              <a:t>, 100 trees by default</a:t>
             </a:r>
           </a:p>
         </p:txBody>
@@ -13113,7 +13639,7 @@
                       </a:pPr>
                       <a:r>
                         <a:rPr/>
-                        <a:t>Mean test accuracy</a:t>
+                        <a:t>Mean test accuracy, 30 random 70/30 splits</a:t>
                       </a:r>
                     </a:p>
                   </a:txBody>
@@ -13129,7 +13655,7 @@
                       </a:pPr>
                       <a:r>
                         <a:rPr/>
-                        <a:t>Standard deviation</a:t>
+                        <a:t>Standard deviation across the 30</a:t>
                       </a:r>
                     </a:p>
                   </a:txBody>
@@ -13355,38 +13881,39 @@
           <a:p>
             <a:pPr lvl="0"/>
             <a:r>
-              <a:rPr/>
-              <a:t>A random forest reports </a:t>
-            </a:r>
-            <a:r>
               <a:rPr b="1"/>
-              <a:t>feature importance</a:t>
-            </a:r>
-            <a:r>
-              <a:rPr/>
-              <a:t>: the impurity reduction each feature is responsible for, summed over every tree and split</a:t>
+              <a:t>Feature importance</a:t>
+            </a:r>
+            <a:r>
+              <a:rPr/>
+              <a:t>: the impurity reduction credited to each feature over every tree and split, scaled to add up to 1</a:t>
             </a:r>
           </a:p>
           <a:p>
             <a:pPr lvl="0"/>
             <a:r>
               <a:rPr/>
-              <a:t>Tempting to read as “the forest tells you which features matter” - and with only the two real features here, it does exactly that</a:t>
+              <a:t>With only the two real features here, it names exactly those two</a:t>
             </a:r>
           </a:p>
           <a:p>
             <a:pPr lvl="0"/>
             <a:r>
               <a:rPr/>
-              <a:t>The question: what happens once most of the columns carry </a:t>
-            </a:r>
-            <a:r>
-              <a:rPr b="1"/>
-              <a:t>nothing</a:t>
-            </a:r>
-            <a:r>
-              <a:rPr/>
-              <a:t>?</a:t>
+              <a:t>What happens once we add columns of random numbers, unrelated to default?</a:t>
+            </a:r>
+          </a:p>
+          <a:p>
+            <a:pPr lvl="0"/>
+            <a:r>
+              <a:rPr/>
+              <a:t>In code: </a:t>
+            </a:r>
+            <a:r>
+              <a:rPr>
+                <a:latin typeface="Courier"/>
+              </a:rPr>
+              <a:t>forest.feature_importances_</a:t>
             </a:r>
           </a:p>
         </p:txBody>
@@ -13777,48 +14304,278 @@
           </a:p>
         </p:txBody>
       </p:sp>
-      <p:sp>
-        <p:nvSpPr>
-          <p:cNvPr id="3" name="Content Placeholder 2"/>
-          <p:cNvSpPr>
-            <a:spLocks noGrp="1"/>
-          </p:cNvSpPr>
+      <p:graphicFrame>
+        <p:nvGraphicFramePr>
+          <p:cNvPr id="6" name="Content Placeholder 5"/>
+          <p:cNvGraphicFramePr>
+            <a:graphicFrameLocks noGrp="1"/>
+          </p:cNvGraphicFramePr>
           <p:nvPr>
             <p:ph idx="1"/>
           </p:nvPr>
-        </p:nvSpPr>
-        <p:spPr>
-          <a:xfrm>
-            <a:off x="457200" y="1200151"/>
-            <a:ext cx="8229600" cy="3394472"/>
-          </a:xfrm>
-        </p:spPr>
-        <p:txBody>
-          <a:bodyPr/>
-          <a:lstStyle/>
-          <a:p>
-            <a:pPr lvl="0"/>
-            <a:r>
-              <a:rPr/>
-              <a:t>Bagging and random forests, from scratch and against scikit-learn</a:t>
-            </a:r>
-          </a:p>
-          <a:p>
-            <a:pPr lvl="0"/>
-            <a:r>
-              <a:rPr/>
-              <a:t>The out-of-bag score checked against cross-validation</a:t>
-            </a:r>
-          </a:p>
-          <a:p>
-            <a:pPr lvl="0"/>
-            <a:r>
-              <a:rPr/>
-              <a:t>The noise-column experiment, run live</a:t>
-            </a:r>
-          </a:p>
-        </p:txBody>
-      </p:sp>
+        </p:nvGraphicFramePr>
+        <p:xfrm>
+          <a:off x="457200" y="1166099"/>
+          <a:ext cx="8229600" cy="3390900"/>
+        </p:xfrm>
+        <a:graphic>
+          <a:graphicData uri="http://schemas.openxmlformats.org/drawingml/2006/table">
+            <a:tbl>
+              <a:tblPr firstRow="1" bandRow="1">
+                <a:tableStyleId>{5C22544A-7EE6-4342-B048-85BDC9FD1C3A}</a:tableStyleId>
+              </a:tblPr>
+              <a:tblGrid>
+                <a:gridCol w="4114800"/>
+                <a:gridCol w="4114800"/>
+              </a:tblGrid>
+              <a:tr h="0">
+                <a:tc>
+                  <a:txBody>
+                    <a:bodyPr/>
+                    <a:lstStyle/>
+                    <a:p>
+                      <a:pPr lvl="0" indent="0" marL="0">
+                        <a:buNone/>
+                      </a:pPr>
+                      <a:r>
+                        <a:rPr/>
+                        <a:t>section, and its slides</a:t>
+                      </a:r>
+                    </a:p>
+                  </a:txBody>
+                  <a:tcPr/>
+                </a:tc>
+                <a:tc>
+                  <a:txBody>
+                    <a:bodyPr/>
+                    <a:lstStyle/>
+                    <a:p>
+                      <a:pPr lvl="0" indent="0" marL="0">
+                        <a:buNone/>
+                      </a:pPr>
+                      <a:r>
+                        <a:rPr/>
+                        <a:t>you call (→ the number to come back with)</a:t>
+                      </a:r>
+                    </a:p>
+                  </a:txBody>
+                  <a:tcPr/>
+                </a:tc>
+              </a:tr>
+              <a:tr h="0">
+                <a:tc>
+                  <a:txBody>
+                    <a:bodyPr/>
+                    <a:lstStyle/>
+                    <a:p>
+                      <a:pPr lvl="0" indent="0" marL="0">
+                        <a:buNone/>
+                      </a:pPr>
+                      <a:r>
+                        <a:rPr/>
+                        <a:t>1. bagging from scratch, 27</a:t>
+                      </a:r>
+                    </a:p>
+                  </a:txBody>
+                </a:tc>
+                <a:tc>
+                  <a:txBody>
+                    <a:bodyPr/>
+                    <a:lstStyle/>
+                    <a:p>
+                      <a:pPr lvl="0" indent="0" marL="0">
+                        <a:buNone/>
+                      </a:pPr>
+                      <a:r>
+                        <a:rPr>
+                          <a:latin typeface="Courier"/>
+                        </a:rPr>
+                        <a:t>train_test_split(..., test_size=0.3, stratify=y)</a:t>
+                      </a:r>
+                      <a:r>
+                        <a:rPr/>
+                        <a:t>, your own bagging against </a:t>
+                      </a:r>
+                      <a:r>
+                        <a:rPr>
+                          <a:latin typeface="Courier"/>
+                        </a:rPr>
+                        <a:t>BaggingClassifier</a:t>
+                      </a:r>
+                      <a:r>
+                        <a:rPr/>
+                        <a:t>, both scored by </a:t>
+                      </a:r>
+                      <a:r>
+                        <a:rPr>
+                          <a:latin typeface="Courier"/>
+                        </a:rPr>
+                        <a:t>accuracy_score</a:t>
+                      </a:r>
+                      <a:r>
+                        <a:rPr/>
+                        <a:t> → 0.872 and 0.872</a:t>
+                      </a:r>
+                    </a:p>
+                  </a:txBody>
+                </a:tc>
+              </a:tr>
+              <a:tr h="0">
+                <a:tc>
+                  <a:txBody>
+                    <a:bodyPr/>
+                    <a:lstStyle/>
+                    <a:p>
+                      <a:pPr lvl="0" indent="0" marL="0">
+                        <a:buNone/>
+                      </a:pPr>
+                      <a:r>
+                        <a:rPr/>
+                        <a:t>2. why averaging works, 28-32</a:t>
+                      </a:r>
+                    </a:p>
+                  </a:txBody>
+                </a:tc>
+                <a:tc>
+                  <a:txBody>
+                    <a:bodyPr/>
+                    <a:lstStyle/>
+                    <a:p>
+                      <a:pPr lvl="0" indent="0" marL="0">
+                        <a:buNone/>
+                      </a:pPr>
+                      <a:r>
+                        <a:rPr/>
+                        <a:t>a forest with </a:t>
+                      </a:r>
+                      <a:r>
+                        <a:rPr>
+                          <a:latin typeface="Courier"/>
+                        </a:rPr>
+                        <a:t>oob_score=True</a:t>
+                      </a:r>
+                      <a:r>
+                        <a:rPr/>
+                        <a:t>: its </a:t>
+                      </a:r>
+                      <a:r>
+                        <a:rPr>
+                          <a:latin typeface="Courier"/>
+                        </a:rPr>
+                        <a:t>.oob_score_</a:t>
+                      </a:r>
+                      <a:r>
+                        <a:rPr/>
+                        <a:t> against </a:t>
+                      </a:r>
+                      <a:r>
+                        <a:rPr>
+                          <a:latin typeface="Courier"/>
+                        </a:rPr>
+                        <a:t>cross_val_score</a:t>
+                      </a:r>
+                      <a:r>
+                        <a:rPr/>
+                        <a:t> → 0.9117 and 0.9117; 0.0026 over 12 seeds</a:t>
+                      </a:r>
+                    </a:p>
+                  </a:txBody>
+                </a:tc>
+              </a:tr>
+              <a:tr h="0">
+                <a:tc>
+                  <a:txBody>
+                    <a:bodyPr/>
+                    <a:lstStyle/>
+                    <a:p>
+                      <a:pPr lvl="0" indent="0" marL="0">
+                        <a:buNone/>
+                      </a:pPr>
+                      <a:r>
+                        <a:rPr/>
+                        <a:t>3. variance, measured, 33-35</a:t>
+                      </a:r>
+                    </a:p>
+                  </a:txBody>
+                </a:tc>
+                <a:tc>
+                  <a:txBody>
+                    <a:bodyPr/>
+                    <a:lstStyle/>
+                    <a:p>
+                      <a:pPr lvl="0" indent="0" marL="0">
+                        <a:buNone/>
+                      </a:pPr>
+                      <a:r>
+                        <a:rPr/>
+                        <a:t>a tree, </a:t>
+                      </a:r>
+                      <a:r>
+                        <a:rPr>
+                          <a:latin typeface="Courier"/>
+                        </a:rPr>
+                        <a:t>BaggingClassifier</a:t>
+                      </a:r>
+                      <a:r>
+                        <a:rPr/>
+                        <a:t>, </a:t>
+                      </a:r>
+                      <a:r>
+                        <a:rPr>
+                          <a:latin typeface="Courier"/>
+                        </a:rPr>
+                        <a:t>RandomForestClassifier</a:t>
+                      </a:r>
+                      <a:r>
+                        <a:rPr/>
+                        <a:t> on 30 splits → spread 0.0185, 0.0153, 0.0137</a:t>
+                      </a:r>
+                    </a:p>
+                  </a:txBody>
+                </a:tc>
+              </a:tr>
+              <a:tr h="0">
+                <a:tc>
+                  <a:txBody>
+                    <a:bodyPr/>
+                    <a:lstStyle/>
+                    <a:p>
+                      <a:pPr lvl="0" indent="0" marL="0">
+                        <a:buNone/>
+                      </a:pPr>
+                      <a:r>
+                        <a:rPr/>
+                        <a:t>5. feature importance, 36-37</a:t>
+                      </a:r>
+                    </a:p>
+                  </a:txBody>
+                </a:tc>
+                <a:tc>
+                  <a:txBody>
+                    <a:bodyPr/>
+                    <a:lstStyle/>
+                    <a:p>
+                      <a:pPr lvl="0" indent="0" marL="0">
+                        <a:buNone/>
+                      </a:pPr>
+                      <a:r>
+                        <a:rPr>
+                          <a:latin typeface="Courier"/>
+                        </a:rPr>
+                        <a:t>.feature_importances_</a:t>
+                      </a:r>
+                      <a:r>
+                        <a:rPr/>
+                        <a:t> with 0, 5 and 20 noise columns → 54.5% on noise</a:t>
+                      </a:r>
+                    </a:p>
+                  </a:txBody>
+                </a:tc>
+              </a:tr>
+            </a:tbl>
+          </a:graphicData>
+        </a:graphic>
+      </p:graphicFrame>
     </p:spTree>
   </p:cSld>
 </p:sld>
@@ -13902,7 +14659,7 @@
             </a:r>
             <a:r>
               <a:rPr/>
-              <a:t> and average at the end</a:t>
+              <a:t>, then average</a:t>
             </a:r>
           </a:p>
           <a:p>
@@ -13913,7 +14670,7 @@
             </a:r>
             <a:r>
               <a:rPr/>
-              <a:t> builds trees </a:t>
+              <a:t> builds them </a:t>
             </a:r>
             <a:r>
               <a:rPr b="1"/>
@@ -13921,19 +14678,31 @@
             </a:r>
             <a:r>
               <a:rPr/>
-              <a:t>: each new tree is fit specifically to correct what the trees so far got wrong</a:t>
+              <a:t>: each new tree corrects what the trees so far got wrong</a:t>
             </a:r>
           </a:p>
           <a:p>
             <a:pPr lvl="0"/>
             <a:r>
               <a:rPr/>
-              <a:t>Each addition is a shallow tree: depth 2 or 3, a </a:t>
+              <a:t>Each is a shallow </a:t>
+            </a:r>
+            <a:r>
+              <a:rPr b="1"/>
+              <a:t>regression tree</a:t>
+            </a:r>
+            <a:r>
+              <a:rPr/>
+              <a:t>, a </a:t>
             </a:r>
             <a:r>
               <a:rPr b="1"/>
               <a:t>weak learner</a:t>
             </a:r>
+            <a:r>
+              <a:rPr/>
+              <a:t>: leaves predict a mean, splits reduce squared error</a:t>
+            </a:r>
           </a:p>
           <a:p>
             <a:pPr lvl="0"/>
@@ -13947,7 +14716,7 @@
             </a:r>
             <a:r>
               <a:rPr/>
-              <a:t> of each new tree’s correction is actually applied</a:t>
+              <a:t> of each correction is applied</a:t>
             </a:r>
           </a:p>
         </p:txBody>
@@ -14027,7 +14796,7 @@
             <a:pPr lvl="0"/>
             <a:r>
               <a:rPr/>
-              <a:t>Income in thousands of euros a year, debt-to-income ratio</a:t>
+              <a:t>Income in thousands of euros a year, and debt-to-income ratio</a:t>
             </a:r>
           </a:p>
           <a:p>
@@ -14042,7 +14811,7 @@
             </a:r>
             <a:r>
               <a:rPr/>
-              <a:t>, not a formula: an income floor, a debt ceiling, and two “stressed” combinations in between</a:t>
+              <a:t>: an income floor, a debt ceiling, and two “stressed” combinations, each figure ordinary alone but risky together</a:t>
             </a:r>
           </a:p>
           <a:p>
@@ -14053,15 +14822,30 @@
             </a:r>
             <a:r>
               <a:rPr/>
-              <a:t> of labels are deliberately flipped; </a:t>
-            </a:r>
+              <a:t> of labels flipped: no honest model beats about </a:t>
+            </a:r>
+            <a:r>
+              <a:rPr b="1"/>
+              <a:t>0.93</a:t>
+            </a:r>
+            <a:r>
+              <a:rPr/>
+              <a:t>, the </a:t>
+            </a:r>
+            <a:r>
+              <a:rPr b="1"/>
+              <a:t>noise ceiling</a:t>
+            </a:r>
+          </a:p>
+          <a:p>
+            <a:pPr lvl="0"/>
             <a:r>
               <a:rPr b="1"/>
               <a:t>38.7%</a:t>
             </a:r>
             <a:r>
               <a:rPr/>
-              <a:t> of applicants defaulted, so the majority baseline is </a:t>
+              <a:t> defaulted, so the majority baseline is </a:t>
             </a:r>
             <a:r>
               <a:rPr b="1"/>
@@ -14227,7 +15011,7 @@
             <a:pPr lvl="0"/>
             <a:r>
               <a:rPr/>
-              <a:t>For squared-error regression, “what remains unexplained” has an exact name: the </a:t>
+              <a:t>For squared error, what remains unexplained is the </a:t>
             </a:r>
             <a:r>
               <a:rPr b="1"/>
@@ -14242,7 +15026,7 @@
             <a:pPr lvl="0"/>
             <a:r>
               <a:rPr/>
-              <a:t>This is a special case of a more general idea: </a:t>
+              <a:t>In general, </a:t>
             </a:r>
             <a:r>
               <a:rPr b="1"/>
@@ -14257,7 +15041,30 @@
             <a:pPr lvl="0"/>
             <a:r>
               <a:rPr/>
-              <a:t>For squared error, “fit the residual” and “fit the negative gradient” coincide exactly</a:t>
+              <a:t>With L = ½(y - F)², -∂L/∂F = y - F: the two coincide</a:t>
+            </a:r>
+          </a:p>
+          <a:p>
+            <a:pPr lvl="0"/>
+            <a:r>
+              <a:rPr/>
+              <a:t>In code: </a:t>
+            </a:r>
+            <a:r>
+              <a:rPr>
+                <a:latin typeface="Courier"/>
+              </a:rPr>
+              <a:t>DecisionTreeRegressor(max_depth=2)</a:t>
+            </a:r>
+            <a:r>
+              <a:rPr/>
+              <a:t>, fit to </a:t>
+            </a:r>
+            <a:r>
+              <a:rPr>
+                <a:latin typeface="Courier"/>
+              </a:rPr>
+              <a:t>y - prediction</a:t>
             </a:r>
           </a:p>
         </p:txBody>
@@ -14309,7 +15116,7 @@
             </a:pPr>
             <a:r>
               <a:rPr/>
-              <a:t>A sum of shallow trees converging on the residuals</a:t>
+              <a:t>A step plus a sine wave, fit by 60 shallow trees</a:t>
             </a:r>
           </a:p>
         </p:txBody>
@@ -14544,29 +15351,25 @@
             <a:pPr lvl="0"/>
             <a:r>
               <a:rPr/>
-              <a:t>The label y is 0 or 1; the ensemble’s output becomes a probability, p = σ(F)</a:t>
+              <a:t>y is 0 or 1; the score F becomes a probability through lesson 4’s logistic function, p = σ(F)</a:t>
             </a:r>
           </a:p>
           <a:p>
             <a:pPr lvl="0"/>
             <a:r>
               <a:rPr/>
-              <a:t>The loss is </a:t>
+              <a:t>The loss is lesson 4’s </a:t>
             </a:r>
             <a:r>
               <a:rPr b="1"/>
               <a:t>log-loss</a:t>
             </a:r>
-            <a:r>
-              <a:rPr/>
-              <a:t>: lesson 4’s loss for logistic regression</a:t>
-            </a:r>
           </a:p>
           <a:p>
             <a:pPr lvl="0"/>
             <a:r>
               <a:rPr/>
-              <a:t>The negative gradient, the </a:t>
+              <a:t>Each tree fits the </a:t>
             </a:r>
             <a:r>
               <a:rPr b="1"/>
@@ -14574,14 +15377,14 @@
             </a:r>
             <a:r>
               <a:rPr/>
-              <a:t> each tree fits, is y - p</a:t>
+              <a:t> y - p, the negative gradient: lesson 4’s error term</a:t>
             </a:r>
           </a:p>
           <a:p>
             <a:pPr lvl="0"/>
             <a:r>
               <a:rPr/>
-              <a:t>True label minus predicted probability: lesson 4’s error term exactly</a:t>
+              <a:t>Start: p = 0.387 for all, so the first tree fits +0.613 to defaulters and −0.387 to the rest</a:t>
             </a:r>
           </a:p>
         </p:txBody>
@@ -14796,7 +15599,7 @@
                       </a:r>
                       <a:r>
                         <a:rPr/>
-                        <a:t> (α = 0.3)</a:t>
+                        <a:t> (α = 0.3, depth 3)</a:t>
                       </a:r>
                     </a:p>
                   </a:txBody>
@@ -15668,41 +16471,300 @@
           </a:p>
         </p:txBody>
       </p:sp>
-      <p:sp>
-        <p:nvSpPr>
-          <p:cNvPr id="3" name="Content Placeholder 2"/>
-          <p:cNvSpPr>
-            <a:spLocks noGrp="1"/>
-          </p:cNvSpPr>
+      <p:graphicFrame>
+        <p:nvGraphicFramePr>
+          <p:cNvPr id="6" name="Content Placeholder 5"/>
+          <p:cNvGraphicFramePr>
+            <a:graphicFrameLocks noGrp="1"/>
+          </p:cNvGraphicFramePr>
           <p:nvPr>
             <p:ph idx="1"/>
           </p:nvPr>
-        </p:nvSpPr>
-        <p:spPr>
-          <a:xfrm>
-            <a:off x="457200" y="1200151"/>
-            <a:ext cx="8229600" cy="3394472"/>
-          </a:xfrm>
-        </p:spPr>
-        <p:txBody>
-          <a:bodyPr/>
-          <a:lstStyle/>
-          <a:p>
-            <a:pPr lvl="0"/>
-            <a:r>
-              <a:rPr/>
-              <a:t>Boosting from scratch on residuals, and against scikit-learn</a:t>
-            </a:r>
-          </a:p>
-          <a:p>
-            <a:pPr lvl="0"/>
-            <a:r>
-              <a:rPr/>
-              <a:t>The classification pseudo-residual, and the learning-rate sweep</a:t>
-            </a:r>
-          </a:p>
-        </p:txBody>
-      </p:sp>
+        </p:nvGraphicFramePr>
+        <p:xfrm>
+          <a:off x="457200" y="1166099"/>
+          <a:ext cx="8229600" cy="3390900"/>
+        </p:xfrm>
+        <a:graphic>
+          <a:graphicData uri="http://schemas.openxmlformats.org/drawingml/2006/table">
+            <a:tbl>
+              <a:tblPr firstRow="1" bandRow="1">
+                <a:tableStyleId>{5C22544A-7EE6-4342-B048-85BDC9FD1C3A}</a:tableStyleId>
+              </a:tblPr>
+              <a:tblGrid>
+                <a:gridCol w="4114800"/>
+                <a:gridCol w="4114800"/>
+              </a:tblGrid>
+              <a:tr h="0">
+                <a:tc>
+                  <a:txBody>
+                    <a:bodyPr/>
+                    <a:lstStyle/>
+                    <a:p>
+                      <a:pPr lvl="0" indent="0" marL="0">
+                        <a:buNone/>
+                      </a:pPr>
+                      <a:r>
+                        <a:rPr/>
+                        <a:t>section, and its slides</a:t>
+                      </a:r>
+                    </a:p>
+                  </a:txBody>
+                  <a:tcPr/>
+                </a:tc>
+                <a:tc>
+                  <a:txBody>
+                    <a:bodyPr/>
+                    <a:lstStyle/>
+                    <a:p>
+                      <a:pPr lvl="0" indent="0" marL="0">
+                        <a:buNone/>
+                      </a:pPr>
+                      <a:r>
+                        <a:rPr/>
+                        <a:t>you call (→ the number to come back with)</a:t>
+                      </a:r>
+                    </a:p>
+                  </a:txBody>
+                  <a:tcPr/>
+                </a:tc>
+              </a:tr>
+              <a:tr h="0">
+                <a:tc>
+                  <a:txBody>
+                    <a:bodyPr/>
+                    <a:lstStyle/>
+                    <a:p>
+                      <a:pPr lvl="0" indent="0" marL="0">
+                        <a:buNone/>
+                      </a:pPr>
+                      <a:r>
+                        <a:rPr/>
+                        <a:t>1. boosting from scratch, 39-43</a:t>
+                      </a:r>
+                    </a:p>
+                  </a:txBody>
+                </a:tc>
+                <a:tc>
+                  <a:txBody>
+                    <a:bodyPr/>
+                    <a:lstStyle/>
+                    <a:p>
+                      <a:pPr lvl="0" indent="0" marL="0">
+                        <a:buNone/>
+                      </a:pPr>
+                      <a:r>
+                        <a:rPr>
+                          <a:latin typeface="Courier"/>
+                        </a:rPr>
+                        <a:t>DecisionTreeRegressor(max_depth=2)</a:t>
+                      </a:r>
+                      <a:r>
+                        <a:rPr/>
+                        <a:t> on the residuals, 60 times → MSE 0.0119 at 20 trees</a:t>
+                      </a:r>
+                    </a:p>
+                  </a:txBody>
+                </a:tc>
+              </a:tr>
+              <a:tr h="0">
+                <a:tc>
+                  <a:txBody>
+                    <a:bodyPr/>
+                    <a:lstStyle/>
+                    <a:p>
+                      <a:pPr lvl="0" indent="0" marL="0">
+                        <a:buNone/>
+                      </a:pPr>
+                      <a:r>
+                        <a:rPr/>
+                        <a:t>2. classification, 44-45</a:t>
+                      </a:r>
+                    </a:p>
+                  </a:txBody>
+                </a:tc>
+                <a:tc>
+                  <a:txBody>
+                    <a:bodyPr/>
+                    <a:lstStyle/>
+                    <a:p>
+                      <a:pPr lvl="0" indent="0" marL="0">
+                        <a:buNone/>
+                      </a:pPr>
+                      <a:r>
+                        <a:rPr>
+                          <a:latin typeface="Courier"/>
+                        </a:rPr>
+                        <a:t>GradientBoostingClassifier()</a:t>
+                      </a:r>
+                      <a:r>
+                        <a:rPr/>
+                        <a:t> in </a:t>
+                      </a:r>
+                      <a:r>
+                        <a:rPr>
+                          <a:latin typeface="Courier"/>
+                        </a:rPr>
+                        <a:t>cross_val_score</a:t>
+                      </a:r>
+                      <a:r>
+                        <a:rPr/>
+                        <a:t> → F0 = −0.461; 0.902</a:t>
+                      </a:r>
+                    </a:p>
+                  </a:txBody>
+                </a:tc>
+              </a:tr>
+              <a:tr h="0">
+                <a:tc>
+                  <a:txBody>
+                    <a:bodyPr/>
+                    <a:lstStyle/>
+                    <a:p>
+                      <a:pPr lvl="0" indent="0" marL="0">
+                        <a:buNone/>
+                      </a:pPr>
+                      <a:r>
+                        <a:rPr/>
+                        <a:t>3. more trees, 46-47</a:t>
+                      </a:r>
+                    </a:p>
+                  </a:txBody>
+                </a:tc>
+                <a:tc>
+                  <a:txBody>
+                    <a:bodyPr/>
+                    <a:lstStyle/>
+                    <a:p>
+                      <a:pPr lvl="0" indent="0" marL="0">
+                        <a:buNone/>
+                      </a:pPr>
+                      <a:r>
+                        <a:rPr/>
+                        <a:t>the same, </a:t>
+                      </a:r>
+                      <a:r>
+                        <a:rPr>
+                          <a:latin typeface="Courier"/>
+                        </a:rPr>
+                        <a:t>learning_rate=0.3</a:t>
+                      </a:r>
+                      <a:r>
+                        <a:rPr/>
+                        <a:t>, </a:t>
+                      </a:r>
+                      <a:r>
+                        <a:rPr>
+                          <a:latin typeface="Courier"/>
+                        </a:rPr>
+                        <a:t>n_estimators</a:t>
+                      </a:r>
+                      <a:r>
+                        <a:rPr/>
+                        <a:t> from 5 to 800 → peak 0.897 at 30</a:t>
+                      </a:r>
+                    </a:p>
+                  </a:txBody>
+                </a:tc>
+              </a:tr>
+              <a:tr h="0">
+                <a:tc>
+                  <a:txBody>
+                    <a:bodyPr/>
+                    <a:lstStyle/>
+                    <a:p>
+                      <a:pPr lvl="0" indent="0" marL="0">
+                        <a:buNone/>
+                      </a:pPr>
+                      <a:r>
+                        <a:rPr/>
+                        <a:t>4. learning rate, 48</a:t>
+                      </a:r>
+                    </a:p>
+                  </a:txBody>
+                </a:tc>
+                <a:tc>
+                  <a:txBody>
+                    <a:bodyPr/>
+                    <a:lstStyle/>
+                    <a:p>
+                      <a:pPr lvl="0" indent="0" marL="0">
+                        <a:buNone/>
+                      </a:pPr>
+                      <a:r>
+                        <a:rPr/>
+                        <a:t>the same with </a:t>
+                      </a:r>
+                      <a:r>
+                        <a:rPr>
+                          <a:latin typeface="Courier"/>
+                        </a:rPr>
+                        <a:t>n_estimators=120</a:t>
+                      </a:r>
+                      <a:r>
+                        <a:rPr/>
+                        <a:t> and </a:t>
+                      </a:r>
+                      <a:r>
+                        <a:rPr>
+                          <a:latin typeface="Courier"/>
+                        </a:rPr>
+                        <a:t>learning_rate</a:t>
+                      </a:r>
+                      <a:r>
+                        <a:rPr/>
+                        <a:t> from 0.02 to 1.0 → best 0.902 at 0.1</a:t>
+                      </a:r>
+                    </a:p>
+                  </a:txBody>
+                </a:tc>
+              </a:tr>
+              <a:tr h="0">
+                <a:tc>
+                  <a:txBody>
+                    <a:bodyPr/>
+                    <a:lstStyle/>
+                    <a:p>
+                      <a:pPr lvl="0" indent="0" marL="0">
+                        <a:buNone/>
+                      </a:pPr>
+                      <a:r>
+                        <a:rPr/>
+                        <a:t>5. leaderboard, 50</a:t>
+                      </a:r>
+                    </a:p>
+                  </a:txBody>
+                </a:tc>
+                <a:tc>
+                  <a:txBody>
+                    <a:bodyPr/>
+                    <a:lstStyle/>
+                    <a:p>
+                      <a:pPr lvl="0" indent="0" marL="0">
+                        <a:buNone/>
+                      </a:pPr>
+                      <a:r>
+                        <a:rPr/>
+                        <a:t>every model in one </a:t>
+                      </a:r>
+                      <a:r>
+                        <a:rPr>
+                          <a:latin typeface="Courier"/>
+                        </a:rPr>
+                        <a:t>cross_val_score</a:t>
+                      </a:r>
+                      <a:r>
+                        <a:rPr/>
+                        <a:t> loop → random forest 0.911</a:t>
+                      </a:r>
+                    </a:p>
+                  </a:txBody>
+                </a:tc>
+              </a:tr>
+            </a:tbl>
+          </a:graphicData>
+        </a:graphic>
+      </p:graphicFrame>
     </p:spTree>
   </p:cSld>
 </p:sld>
@@ -16411,7 +17473,7 @@
                       </a:pPr>
                       <a:r>
                         <a:rPr/>
-                        <a:t>A single tree, depth-tuned, or nothing on this list</a:t>
+                        <a:t>A single tree, small enough to read; if even that is too opaque, none of these models</a:t>
                       </a:r>
                     </a:p>
                   </a:txBody>
@@ -16443,7 +17505,7 @@
                       </a:pPr>
                       <a:r>
                         <a:rPr/>
-                        <a:t>A random forest, as a strong and low-effort default</a:t>
+                        <a:t>A random forest: the best score here, at its default settings</a:t>
                       </a:r>
                     </a:p>
                   </a:txBody>
@@ -16460,7 +17522,7 @@
                       </a:pPr>
                       <a:r>
                         <a:rPr/>
-                        <a:t>Training time matters, or the signal needs sequential refinement</a:t>
+                        <a:t>Accuracy matters, and there is time to tune the number of trees and the learning rate together</a:t>
                       </a:r>
                     </a:p>
                   </a:txBody>
@@ -16475,7 +17537,7 @@
                       </a:pPr>
                       <a:r>
                         <a:rPr/>
-                        <a:t>Gradient boosting, tuned on a validation set</a:t>
+                        <a:t>Gradient boosting, tuned on validation data</a:t>
                       </a:r>
                     </a:p>
                   </a:txBody>
@@ -16492,7 +17554,7 @@
                       </a:pPr>
                       <a:r>
                         <a:rPr/>
-                        <a:t>Very high-dimensional, few informative columns</a:t>
+                        <a:t>Many columns, few of them informative</a:t>
                       </a:r>
                     </a:p>
                   </a:txBody>
@@ -16507,7 +17569,7 @@
                       </a:pPr>
                       <a:r>
                         <a:rPr/>
-                        <a:t>Any tree method, cautiously</a:t>
+                        <a:t>Any tree method, but check its importances by permutation</a:t>
                       </a:r>
                     </a:p>
                   </a:txBody>
@@ -16524,7 +17586,7 @@
                       </a:pPr>
                       <a:r>
                         <a:rPr/>
-                        <a:t>Rows only, and OOB score suffices for validation</a:t>
+                        <a:t>Too few rows to set a validation set aside</a:t>
                       </a:r>
                     </a:p>
                   </a:txBody>
@@ -16539,7 +17601,7 @@
                       </a:pPr>
                       <a:r>
                         <a:rPr/>
-                        <a:t>A random forest, no explicit train/test split needed</a:t>
+                        <a:t>A random forest, judged by its out-of-bag score</a:t>
                       </a:r>
                     </a:p>
                   </a:txBody>
@@ -16624,52 +17686,44 @@
             <a:pPr lvl="0"/>
             <a:r>
               <a:rPr/>
-              <a:t>20 noise columns, 2 real features: not a small effect, and not a bug</a:t>
+              <a:t>20 noise columns, 2 real features: not a small effect, not a bug</a:t>
             </a:r>
           </a:p>
           <a:p>
             <a:pPr lvl="0"/>
             <a:r>
               <a:rPr/>
-              <a:t>The same restriction that </a:t>
+              <a:t>Each split is offered 4 of the 22 columns: in two splits of three (0.662), neither real feature</a:t>
+            </a:r>
+          </a:p>
+          <a:p>
+            <a:pPr lvl="0"/>
+            <a:r>
+              <a:rPr/>
+              <a:t>Averaging shrinks the </a:t>
             </a:r>
             <a:r>
               <a:rPr b="1"/>
-              <a:t>decorrelates</a:t>
-            </a:r>
-            <a:r>
-              <a:rPr/>
-              <a:t> the trees occasionally hands a split to noise instead</a:t>
+              <a:t>prediction’s variance</a:t>
+            </a:r>
+            <a:r>
+              <a:rPr/>
+              <a:t>, not the credit given to noise</a:t>
             </a:r>
           </a:p>
           <a:p>
             <a:pPr lvl="0"/>
             <a:r>
               <a:rPr/>
-              <a:t>Averaging reduces </a:t>
+              <a:t>Check: </a:t>
             </a:r>
             <a:r>
               <a:rPr b="1"/>
-              <a:t>variance of the prediction</a:t>
-            </a:r>
-            <a:r>
-              <a:rPr/>
-              <a:t>; it does </a:t>
-            </a:r>
-            <a:r>
-              <a:rPr b="1"/>
-              <a:t>not</a:t>
-            </a:r>
-            <a:r>
-              <a:rPr/>
-              <a:t> guarantee small importance for irrelevant columns</a:t>
-            </a:r>
-          </a:p>
-          <a:p>
-            <a:pPr lvl="0"/>
-            <a:r>
-              <a:rPr/>
-              <a:t>The fix: cross-check against permutation importance on held-out data</a:t>
+              <a:t>permutation importance</a:t>
+            </a:r>
+            <a:r>
+              <a:rPr/>
+              <a:t>, the accuracy lost when a held-out column is shuffled</a:t>
             </a:r>
           </a:p>
         </p:txBody>
@@ -17141,7 +18195,7 @@
             <a:pPr lvl="0"/>
             <a:r>
               <a:rPr/>
-              <a:t>Find the single (feature, threshold) split that makes the two resulting groups </a:t>
+              <a:t>Find the (feature, threshold) split that makes the two groups </a:t>
             </a:r>
             <a:r>
               <a:rPr b="1"/>
@@ -17152,21 +18206,21 @@
             <a:pPr lvl="0"/>
             <a:r>
               <a:rPr/>
-              <a:t>Apply it. Repeat on each group, independently</a:t>
+              <a:t>Apply it; repeat on each group, independently</a:t>
             </a:r>
           </a:p>
           <a:p>
             <a:pPr lvl="0"/>
             <a:r>
               <a:rPr/>
-              <a:t>Stop when a stopping rule is met</a:t>
+              <a:t>Stop at a depth limit, a pure group, or too few examples to split</a:t>
             </a:r>
           </a:p>
           <a:p>
             <a:pPr lvl="0"/>
             <a:r>
               <a:rPr/>
-              <a:t>Nothing is estimated, no coefficient, no gradient with respect to a parameter vector</a:t>
+              <a:t>Nothing is estimated: no coefficient, no gradient</a:t>
             </a:r>
           </a:p>
           <a:p>
@@ -17365,7 +18419,7 @@
             </a:r>
             <a:r>
               <a:rPr/>
-              <a:t> is a number that captures this, so “as pure as possible” has a target to maximise against</a:t>
+              <a:t> is a number that captures this: 0 for a pure group, highest for an even mix. “As pure as possible” then means “with the lowest impurity”</a:t>
             </a:r>
           </a:p>
         </p:txBody>

--- a/Lessons/07_trees_and_ensembles/Slides/trees_and_ensembles_slides.pptx
+++ b/Lessons/07_trees_and_ensembles/Slides/trees_and_ensembles_slides.pptx
@@ -5,7 +5,7 @@
     <p:sldMasterId id="2147483648" r:id="rId1"/>
   </p:sldMasterIdLst>
   <p:notesMasterIdLst>
-    <p:notesMasterId r:id="rId57"/>
+    <p:notesMasterId r:id="rId58"/>
   </p:notesMasterIdLst>
   <p:sldIdLst>
     <p:sldId id="256" r:id="rId2"/>
@@ -63,6 +63,7 @@
     <p:sldId id="308" r:id="rId54"/>
     <p:sldId id="309" r:id="rId55"/>
     <p:sldId id="310" r:id="rId56"/>
+    <p:sldId id="311" r:id="rId57"/>
   </p:sldIdLst>
   <p:sldSz cx="9144000" cy="5143500" type="screen16x9"/>
   <p:notesSz cx="6858000" cy="9144000"/>
@@ -1356,7 +1357,7 @@
             </a:pPr>
             <a:r>
               <a:rPr/>
-              <a:t>Two questions to pre-empt. Why predictions and not accuracy? Because two different trees can get the same number of applicants wrong while getting different applicants wrong; identical predictions, one by one, rule that out. And why on the training data, after lesson 5? Because this checks the code, not the model: the question is whether two programs build the same tree from the same rows, and the rows they learned from are exactly the right ones to ask it on. No accuracy here is a claim about new applicants.</a:t>
+              <a:t>Two questions to pre-empt. Why predictions and not accuracy? Because two different trees can get the same number of applicants wrong while getting different applicants wrong; identical predictions, one by one, rule that out. Identical predictions do not by themselves prove the two trees are identical node by node - two different trees can agree on every row they are shown - but the notebook also prints the same root split, debt ratio at 0.82, from both. And why on the training data, after lesson 5? Because this checks the code, not the model: the question is whether two programs make the same decisions from the same rows, and the rows they learned from are exactly the right ones to ask it on. No accuracy here is a claim about new applicants.</a:t>
             </a:r>
           </a:p>
           <a:p>
@@ -2032,7 +2033,7 @@
             </a:pPr>
             <a:r>
               <a:rPr/>
-              <a:t>Left to right: at depth 2 the tree affords only the income floor and the debt ceiling - the two biggest, easiest-to-find regions - and neither interior island is visible at all. At depth 8 both islands appear as clean rectangles, close to the rule that generated the data. At full depth the boundary has grown a fringe of tiny rectangles chasing individual flipped labels.</a:t>
+              <a:t>Left to right: at depth 2 every applicant answers at most two questions. The tree asks three in all - it is exactly the tree of step 2 on slide 8 - but the third, on the right, splits 229 high-debt applicants into two groups that are both predicted “default”, so it changes no prediction and draws no line. What the boundary shows is the income floor and the debt ceiling - the two biggest, easiest-to-find regions - and neither interior island is visible at all. At depth 8 both islands appear as clean rectangles, close to the rule that generated the data. At full depth the boundary has grown a fringe of tiny rectangles chasing individual flipped labels.</a:t>
             </a:r>
           </a:p>
           <a:p>
@@ -2142,7 +2143,7 @@
             </a:pPr>
             <a:r>
               <a:rPr/>
-              <a:t>This is the readability half of the story. For a tree meant to be read rather than merely scored, best-first growth is the better knob: a small budget of splits goes to the ones that matter most, instead of being spent uniformly across every branch regardless of whether it’s worth it.</a:t>
+              <a:t>This is the readability half of the story. The two knobs limit different things. A depth cap limits how long any one path can be, and inside that cap every node that can be split is split - slide 22’s depth-2 tree spent one of its three questions on a split that changed no prediction. A leaf budget limits how many leaves the whole tree may have, and spends them one at a time on whichever leaf gains most. For a tree meant to be read rather than merely scored, the budget is the better knob: a small number of splits goes to the ones that matter most.</a:t>
             </a:r>
           </a:p>
           <a:p>
@@ -2596,7 +2597,31 @@
             </a:pPr>
             <a:r>
               <a:rPr/>
-              <a:t>Be precise about “with replacement”: some rows appear more than once in a given sample, some not at all. That leftover fraction is not wasted - it becomes free validation data, on the next slide.</a:t>
+              <a:t>Be precise about “with replacement”: some rows appear more than once in a given sample, some not at all. That leftover fraction is not wasted - it becomes free validation data, on slide 30.</a:t>
+            </a:r>
+          </a:p>
+          <a:p>
+            <a:pPr lvl="0" indent="0" marL="0">
+              <a:buNone/>
+            </a:pPr>
+          </a:p>
+          <a:p>
+            <a:pPr lvl="0" indent="0" marL="0">
+              <a:buNone/>
+            </a:pPr>
+            <a:r>
+              <a:rPr/>
+              <a:t>One detail of the In code line, if asked: scikit-learn’s </a:t>
+            </a:r>
+            <a:r>
+              <a:rPr>
+                <a:latin typeface="Courier"/>
+              </a:rPr>
+              <a:t>BaggingClassifier</a:t>
+            </a:r>
+            <a:r>
+              <a:rPr/>
+              <a:t> does not count votes, it averages the trees’ predicted probabilities. With fully grown trees the two are the same thing: every leaf is pure, so each tree’s probability is 0 or 1, and averaging 0s and 1s is counting votes. So notebook 2’s own majority-vote version and scikit-learn’s apply the same rule. They do not use the same trees - each draws its own bootstrap samples - and still they make the same prediction for all 360 test applicants, 0.872 both: with 100 trees, the luck of any one sample is outvoted.</a:t>
             </a:r>
           </a:p>
           <a:p>
@@ -2706,7 +2731,21 @@
             </a:pPr>
             <a:r>
               <a:rPr/>
-              <a:t>Ask the room what that leftover third is good for. The answer is the next slide: it is validation data for exactly the one tree that never saw it.</a:t>
+              <a:t>A predictable slip: “so each tree is trained on 63.2% of the data, 759 rows”. It is reasonable, because 63.2% is the number on the slide. But the sample still has 1,200 draws: about 759 different rows, and the other 441 draws are repeats of rows already drawn. The tree sees 1,200 rows, some of them twice or three times - the next slide counts them.</a:t>
+            </a:r>
+          </a:p>
+          <a:p>
+            <a:pPr lvl="0" indent="0" marL="0">
+              <a:buNone/>
+            </a:pPr>
+          </a:p>
+          <a:p>
+            <a:pPr lvl="0" indent="0" marL="0">
+              <a:buNone/>
+            </a:pPr>
+            <a:r>
+              <a:rPr/>
+              <a:t>Ask the room what that leftover third is good for. The answer is slide 30, after the counts: it is validation data for exactly the trees that never saw it.</a:t>
             </a:r>
           </a:p>
           <a:p>
@@ -2936,15 +2975,7 @@
             </a:pPr>
             <a:r>
               <a:rPr/>
-              <a:t>The agreement is the point, but be careful how you sell it. On this seed the two numbers match to four decimal places, and that is luck: over twelve seeds the typical gap is 0.0026 and the worst is 0.0075. What is not luck is that they track each other well inside cross-validation’s own ±0.021 spread, because OOB score </a:t>
-            </a:r>
-            <a:r>
-              <a:rPr i="1"/>
-              <a:t>is</a:t>
-            </a:r>
-            <a:r>
-              <a:rPr/>
-              <a:t> cross-validation with different bookkeeping - each tree supplying its own held-out fold, the rows it never bootstrapped, instead of the dataset being split up front.</a:t>
+              <a:t>The agreement is the point, but be careful how you sell it. On this seed the two numbers match to four decimal places, and that is luck: over twelve seeds the typical gap is 0.0026 and the worst is 0.0075. What is not luck is that they track each other well inside cross-validation’s own ±0.021 spread, because the OOB score works like cross-validation: every row is scored only by models that never saw it. The bookkeeping differs. In 5-fold cross-validation each fold is scored by a whole forest trained without that fold. Out-of-bag, each row is scored by the trees whose bootstrap sample missed it - about a third of the forest, and a different third for each row. There is no single out-of-bag set.</a:t>
             </a:r>
           </a:p>
           <a:p>
@@ -3104,6 +3135,20 @@
             </a:pPr>
             <a:r>
               <a:rPr/>
+              <a:t>Why “about” 0.93: each label is flipped with probability 7%, so 0.93 is what the true rule scores on average. In this particular sample 85 of the 1,200 labels were flipped, so the rule itself scores 1,115 / 1,200 = 0.929, and a cross-validated score can land a little either side of the ceiling by chance.</a:t>
+            </a:r>
+          </a:p>
+          <a:p>
+            <a:pPr lvl="0" indent="0" marL="0">
+              <a:buNone/>
+            </a:pPr>
+          </a:p>
+          <a:p>
+            <a:pPr lvl="0" indent="0" marL="0">
+              <a:buNone/>
+            </a:pPr>
+            <a:r>
+              <a:rPr/>
               <a:t>Handout section 1.1.</a:t>
             </a:r>
           </a:p>
@@ -3200,7 +3245,7 @@
             </a:pPr>
             <a:r>
               <a:rPr/>
-              <a:t>That second point is worth a beat: bagging does nothing for a tree that is too shallow to represent the rule in the first place. It cleans up noise, it does not add capability.</a:t>
+              <a:t>That second point is worth a beat: bagging does nothing for a tree that is too shallow to represent the rule in the first place. It cleans up noise, it does not add capability. The bullet is worded with care on purpose. For an average of numbers, averaging leaves the bias exactly where it was. A vote between classifiers is not an average of numbers, and it can change which side of the boundary a point falls on - which is why, two slides on, bagging raises the mean accuracy and not only narrows the spread. What no amount of voting can do is fix a mistake that every tree makes.</a:t>
             </a:r>
           </a:p>
           <a:p>
@@ -3392,7 +3437,7 @@
             </a:pPr>
             <a:r>
               <a:rPr/>
-              <a:t>Across 30 random 70/30 splits of the loan data, both numbers moved in the predicted direction. The mean rose, because bagging also averages out some of a deep tree’s overfitting; the spread fell, which is exactly what the previous slide’s formula says averaging correlated estimators should do.</a:t>
+              <a:t>Across 30 random 70/30 splits of the loan data, both numbers moved in the predicted direction. The mean rose, because bagging also averages out some of a deep tree’s overfitting; the spread fell, which is what the formula of slide 31 leads us to expect. Say precisely what was measured, because it is not the formula’s quantity: the formula is about the variance of one prediction over bootstrap samples, while this table is the spread of test accuracy over 30 different train/test splits, which also carries the luck of which applicants landed in each test set. The measurement is consistent with the formula, not a direct check of it.</a:t>
             </a:r>
           </a:p>
           <a:p>
@@ -3612,21 +3657,35 @@
             </a:pPr>
             <a:r>
               <a:rPr/>
-              <a:t>Same 30 splits as the bagging comparison. The random forest beats plain bagging on both counts - a better mean and a tighter spread - consistent with ρ having fallen further, exactly as the restriction on the previous slide predicts.</a:t>
-            </a:r>
-          </a:p>
-          <a:p>
-            <a:pPr lvl="0" indent="0" marL="0">
-              <a:buNone/>
-            </a:pPr>
-          </a:p>
-          <a:p>
-            <a:pPr lvl="0" indent="0" marL="0">
-              <a:buNone/>
-            </a:pPr>
-            <a:r>
-              <a:rPr/>
-              <a:t>Say plainly what has and hasn’t changed: nothing about the splitting rule is different from the first hour’s trees. The only change across all three rows of this table is what surrounds the tree - resampling, then also restricting the feature menu.</a:t>
+              <a:t>The same 30 random 70/30 splits as the bagging table, now with the random forest added and drawn rather than tabulated (notebook 2, section 3). Each dot is one split’s test accuracy; the box holds the middle half of the 30, the red line is the median.</a:t>
+            </a:r>
+          </a:p>
+          <a:p>
+            <a:pPr lvl="0" indent="0" marL="0">
+              <a:buNone/>
+            </a:pPr>
+          </a:p>
+          <a:p>
+            <a:pPr lvl="0" indent="0" marL="0">
+              <a:buNone/>
+            </a:pPr>
+            <a:r>
+              <a:rPr/>
+              <a:t>Read it left to right: the boxes rise and narrow together. In numbers, the means are 0.856, 0.902 and 0.908, and the standard deviations 0.0185, 0.0153 and 0.0137. The random forest beats plain bagging on both counts - a better mean and a tighter spread - consistent with ρ having fallen further, as the restriction on the previous slide predicts. The step from bagging to the forest is much smaller than the step from one tree to bagging: averaging did most of the work, decorrelating added a little more.</a:t>
+            </a:r>
+          </a:p>
+          <a:p>
+            <a:pPr lvl="0" indent="0" marL="0">
+              <a:buNone/>
+            </a:pPr>
+          </a:p>
+          <a:p>
+            <a:pPr lvl="0" indent="0" marL="0">
+              <a:buNone/>
+            </a:pPr>
+            <a:r>
+              <a:rPr/>
+              <a:t>Say plainly what has and hasn’t changed: nothing about the splitting rule is different from the first hour’s trees. The only change across the three boxes is what surrounds the tree - resampling, then also restricting the feature menu.</a:t>
             </a:r>
           </a:p>
           <a:p>
@@ -3842,7 +3901,21 @@
             </a:pPr>
             <a:r>
               <a:rPr/>
-              <a:t>Read down the last column, slowly, and let the bottom row sit before explaining anything. With 20 pure-noise columns against 2 real features, more than half of the forest’s own importance scores land on columns that are </a:t>
+              <a:t>Say what is plotted before pointing at it (notebook 2, section 5): a 300-tree random forest on the loan data with 0, 5 and 20 columns of random numbers added. Red, left axis: cross-validated accuracy. Blue, right axis: the share of the forest’s importance that lands on the noise columns.</a:t>
+            </a:r>
+          </a:p>
+          <a:p>
+            <a:pPr lvl="0" indent="0" marL="0">
+              <a:buNone/>
+            </a:pPr>
+          </a:p>
+          <a:p>
+            <a:pPr lvl="0" indent="0" marL="0">
+              <a:buNone/>
+            </a:pPr>
+            <a:r>
+              <a:rPr/>
+              <a:t>Follow the blue line, slowly, and let the last point sit before explaining anything: 0% with no noise, 33.9% with 5 columns, 54.5% with 20. With 20 pure-noise columns against 2 real features, more than half of the forest’s own importance scores land on columns that are </a:t>
             </a:r>
             <a:r>
               <a:rPr>
@@ -3852,7 +3925,7 @@
             </a:r>
             <a:r>
               <a:rPr/>
-              <a:t> noise by construction.</a:t>
+              <a:t> noise by construction. The red line falls at the same time, from 0.912 to 0.837, but gently: nothing in the accuracy warns that the importances have gone wrong.</a:t>
             </a:r>
           </a:p>
           <a:p>
@@ -3874,21 +3947,21 @@
             </a:r>
             <a:r>
               <a:rPr/>
-              <a:t>. It does not guarantee small importance for irrelevant columns, because the very restriction that decorrelates the trees - a random, incomplete menu at each split - is what occasionally hands a split to noise with nothing better on offer.</a:t>
-            </a:r>
-          </a:p>
-          <a:p>
-            <a:pPr lvl="0" indent="0" marL="0">
-              <a:buNone/>
-            </a:pPr>
-          </a:p>
-          <a:p>
-            <a:pPr lvl="0" indent="0" marL="0">
-              <a:buNone/>
-            </a:pPr>
-            <a:r>
-              <a:rPr/>
-              <a:t>The mechanism is exact and is in handout section 7. The practical consequence to leave them with: treat a random forest’s importances as suggestive, not definitive, when real features are few against many candidate columns.</a:t>
+              <a:t>. It does not guarantee small importance for irrelevant columns. Two things hand credit to noise, and slide 54 takes them apart: the random, incomplete menu at each split, and the deep splits on small groups, where some noise column always lowers the impurity a little by chance.</a:t>
+            </a:r>
+          </a:p>
+          <a:p>
+            <a:pPr lvl="0" indent="0" marL="0">
+              <a:buNone/>
+            </a:pPr>
+          </a:p>
+          <a:p>
+            <a:pPr lvl="0" indent="0" marL="0">
+              <a:buNone/>
+            </a:pPr>
+            <a:r>
+              <a:rPr/>
+              <a:t>The mechanism is in handout section 7. The practical consequence to leave them with: treat a random forest’s importances as suggestive, not definitive, when real features are few against many candidate columns - and check them, which is the next slide.</a:t>
             </a:r>
           </a:p>
         </p:txBody>
@@ -3970,69 +4043,57 @@
             </a:pPr>
             <a:r>
               <a:rPr/>
-              <a:t>The table is the notebook’s map: bagging from scratch and against scikit-learn, the out-of-bag score checked against cross-validation, the variance measured over 30 splits, and the noise-column experiment. Section 4 of the notebook is reading only, which is why the table skips it.</a:t>
-            </a:r>
-          </a:p>
-          <a:p>
-            <a:pPr lvl="0" indent="0" marL="0">
-              <a:buNone/>
-            </a:pPr>
-          </a:p>
-          <a:p>
-            <a:pPr lvl="0" indent="0" marL="0">
-              <a:buNone/>
-            </a:pPr>
-            <a:r>
-              <a:rPr/>
-              <a:t>Run Notebooks/02_bagging_and_random_forests.ipynb. Eighteen minutes.</a:t>
-            </a:r>
-          </a:p>
-          <a:p>
-            <a:pPr lvl="0" indent="0" marL="0">
-              <a:buNone/>
-            </a:pPr>
-          </a:p>
-          <a:p>
-            <a:pPr lvl="0" indent="0" marL="0">
-              <a:buNone/>
-            </a:pPr>
-            <a:r>
-              <a:rPr/>
-              <a:t>The cell to protect is the noise-column sweep. Let them add the columns themselves and watch the importance share climb - reading the number off a slide does not land the same way as watching it happen.</a:t>
-            </a:r>
-          </a:p>
-          <a:p>
-            <a:pPr lvl="0" indent="0" marL="0">
-              <a:buNone/>
-            </a:pPr>
-          </a:p>
-          <a:p>
-            <a:pPr lvl="0" indent="0" marL="0">
-              <a:buNone/>
-            </a:pPr>
-            <a:r>
-              <a:rPr/>
-              <a:t>If time allows, have them try </a:t>
-            </a:r>
-            <a:r>
-              <a:rPr>
-                <a:latin typeface="Courier"/>
-              </a:rPr>
-              <a:t>max_features=None</a:t>
-            </a:r>
-            <a:r>
-              <a:rPr/>
-              <a:t> instead of the default </a:t>
-            </a:r>
-            <a:r>
-              <a:rPr>
-                <a:latin typeface="Courier"/>
-              </a:rPr>
-              <a:t>"sqrt"</a:t>
-            </a:r>
-            <a:r>
-              <a:rPr/>
-              <a:t> and predict what happens to the noise share before running it - it should fall, at the cost of the decorrelation that made the forest work in the first place.</a:t>
+              <a:t>Name the method and say its recipe before pointing at the figure. </a:t>
+            </a:r>
+            <a:r>
+              <a:rPr b="1"/>
+              <a:t>Permutation importance</a:t>
+            </a:r>
+            <a:r>
+              <a:rPr/>
+              <a:t>: take a fitted model and data it was not trained on; shuffle the values of one column, so that column no longer says anything about the applicant in its row; score the model again. The accuracy lost is that column’s importance. Repeat for every column. If the model never really used a column, shuffling it costs nothing.</a:t>
+            </a:r>
+          </a:p>
+          <a:p>
+            <a:pPr lvl="0" indent="0" marL="0">
+              <a:buNone/>
+            </a:pPr>
+          </a:p>
+          <a:p>
+            <a:pPr lvl="0" indent="0" marL="0">
+              <a:buNone/>
+            </a:pPr>
+            <a:r>
+              <a:rPr/>
+              <a:t>The figure is the 20-noise-column forest, trained on 70% of the applicants and checked on the other 30% (notebook 2, section 6). Left, the importance the forest reports for itself: more than half of it on the twenty noise columns. Right, the same 22 columns by permutation: debt ratio costs 0.18 of accuracy when shuffled, income 0.09, and every noise column costs almost nothing - between 0.003 lost and 0.002 gained.</a:t>
+            </a:r>
+          </a:p>
+          <a:p>
+            <a:pPr lvl="0" indent="0" marL="0">
+              <a:buNone/>
+            </a:pPr>
+          </a:p>
+          <a:p>
+            <a:pPr lvl="0" indent="0" marL="0">
+              <a:buNone/>
+            </a:pPr>
+            <a:r>
+              <a:rPr/>
+              <a:t>Two things to stress. Almost nothing, not exactly nothing: shuffling is random and the test set is finite, so a useless column moves the score by a few thousandths either way. And held-out data is what makes the check honest: on the training rows a deep forest has memorised its noise columns, and shuffling them would cost something there.</a:t>
+            </a:r>
+          </a:p>
+          <a:p>
+            <a:pPr lvl="0" indent="0" marL="0">
+              <a:buNone/>
+            </a:pPr>
+          </a:p>
+          <a:p>
+            <a:pPr lvl="0" indent="0" marL="0">
+              <a:buNone/>
+            </a:pPr>
+            <a:r>
+              <a:rPr/>
+              <a:t>The check costs one function call. The lesson to leave: a ranking the model reports about itself is a claim; shuffling on held-out data is the test of it. Handout section 7.1.</a:t>
             </a:r>
           </a:p>
         </p:txBody>
@@ -4114,59 +4175,69 @@
             </a:pPr>
             <a:r>
               <a:rPr/>
-              <a:t>Contrast the two strategies directly, because the difference is the whole segment. Bagging and random forests are parallel: every tree is grown once, independently, and combined only at prediction time. Boosting is sequential: tree t exists specifically because of what trees 1 through t-1 still got wrong.</a:t>
-            </a:r>
-          </a:p>
-          <a:p>
-            <a:pPr lvl="0" indent="0" marL="0">
-              <a:buNone/>
-            </a:pPr>
-          </a:p>
-          <a:p>
-            <a:pPr lvl="0" indent="0" marL="0">
-              <a:buNone/>
-            </a:pPr>
-            <a:r>
-              <a:rPr/>
-              <a:t>Slow down on “regression tree”, because it is new. “Shallow” means depth 2 or 3 here. Everything so far this lesson was a classification tree: leaves vote, splits are scored by Gini. A boosted tree is fit to corrections, which are numbers like +0.613 or -0.387, not classes, so it is the regression version of the same algorithm: the same greedy search over features and thresholds, but each leaf predicts the average correction of the examples in it, and a split is scored by how much it lowers the squared error around those averages. Even </a:t>
+              <a:t>The table is the notebook’s map: bagging from scratch and against scikit-learn, the out-of-bag score checked against cross-validation, the variance measured over 30 splits, the noise-column experiment, and the permutation check of the previous slide. Section 4 of the notebook is reading only, which is why the table skips it.</a:t>
+            </a:r>
+          </a:p>
+          <a:p>
+            <a:pPr lvl="0" indent="0" marL="0">
+              <a:buNone/>
+            </a:pPr>
+          </a:p>
+          <a:p>
+            <a:pPr lvl="0" indent="0" marL="0">
+              <a:buNone/>
+            </a:pPr>
+            <a:r>
+              <a:rPr/>
+              <a:t>Run Notebooks/02_bagging_and_random_forests.ipynb. Eighteen minutes.</a:t>
+            </a:r>
+          </a:p>
+          <a:p>
+            <a:pPr lvl="0" indent="0" marL="0">
+              <a:buNone/>
+            </a:pPr>
+          </a:p>
+          <a:p>
+            <a:pPr lvl="0" indent="0" marL="0">
+              <a:buNone/>
+            </a:pPr>
+            <a:r>
+              <a:rPr/>
+              <a:t>The cell to protect is the noise-column sweep. Let them add the columns themselves and watch the importance share climb - reading the number off a slide does not land the same way as watching it happen.</a:t>
+            </a:r>
+          </a:p>
+          <a:p>
+            <a:pPr lvl="0" indent="0" marL="0">
+              <a:buNone/>
+            </a:pPr>
+          </a:p>
+          <a:p>
+            <a:pPr lvl="0" indent="0" marL="0">
+              <a:buNone/>
+            </a:pPr>
+            <a:r>
+              <a:rPr/>
+              <a:t>If time allows, section 6 also tries </a:t>
             </a:r>
             <a:r>
               <a:rPr>
                 <a:latin typeface="Courier"/>
               </a:rPr>
-              <a:t>GradientBoostingClassifier</a:t>
-            </a:r>
-            <a:r>
-              <a:rPr/>
-              <a:t> grows regression trees inside.</a:t>
-            </a:r>
-          </a:p>
-          <a:p>
-            <a:pPr lvl="0" indent="0" marL="0">
-              <a:buNone/>
-            </a:pPr>
-          </a:p>
-          <a:p>
-            <a:pPr lvl="0" indent="0" marL="0">
-              <a:buNone/>
-            </a:pPr>
-            <a:r>
-              <a:rPr/>
-              <a:t>Name α carefully and tie it to the course’s shared notation - this is the same symbol as lesson 3’s gradient descent learning rate, doing an analogous job: how large a step each correction takes.</a:t>
-            </a:r>
-          </a:p>
-          <a:p>
-            <a:pPr lvl="0" indent="0" marL="0">
-              <a:buNone/>
-            </a:pPr>
-          </a:p>
-          <a:p>
-            <a:pPr lvl="0" indent="0" marL="0">
-              <a:buNone/>
-            </a:pPr>
-            <a:r>
-              <a:rPr/>
-              <a:t>Handout section 8.</a:t>
+              <a:t>max_features=None</a:t>
+            </a:r>
+            <a:r>
+              <a:rPr/>
+              <a:t> instead of the default </a:t>
+            </a:r>
+            <a:r>
+              <a:rPr>
+                <a:latin typeface="Courier"/>
+              </a:rPr>
+              <a:t>"sqrt"</a:t>
+            </a:r>
+            <a:r>
+              <a:rPr/>
+              <a:t>: every split sees all 22 columns. Ask them to predict the noise share before running it. Most will say it falls to about zero, since the real features are now always on offer. It falls only to 28%, and the accuracy rises from 0.837 to 0.897. Slide 54 explains both.</a:t>
             </a:r>
           </a:p>
         </p:txBody>
@@ -4248,21 +4319,73 @@
             </a:pPr>
             <a:r>
               <a:rPr/>
-              <a:t>F₀ is the flat starting guess, the mean of the target. Each subsequent Fₜ is the previous ensemble plus a scaled correction from the newest tree, hₜ. Read it left to right: start flat, then keep adding small, scaled corrections.</a:t>
-            </a:r>
-          </a:p>
-          <a:p>
-            <a:pPr lvl="0" indent="0" marL="0">
-              <a:buNone/>
-            </a:pPr>
-          </a:p>
-          <a:p>
-            <a:pPr lvl="0" indent="0" marL="0">
-              <a:buNone/>
-            </a:pPr>
-            <a:r>
-              <a:rPr/>
-              <a:t>Do not derive anything further here - the next slide states what hₜ is actually fit to. Handout section 8.</a:t>
+              <a:t>Contrast the two strategies directly, because the difference is the whole segment. Bagging and random forests are parallel: every tree is grown once, independently, and combined only at prediction time. Boosting is sequential: tree t exists specifically because of what trees 1 through t-1 still got wrong.</a:t>
+            </a:r>
+          </a:p>
+          <a:p>
+            <a:pPr lvl="0" indent="0" marL="0">
+              <a:buNone/>
+            </a:pPr>
+          </a:p>
+          <a:p>
+            <a:pPr lvl="0" indent="0" marL="0">
+              <a:buNone/>
+            </a:pPr>
+            <a:r>
+              <a:rPr/>
+              <a:t>Slow down on “regression tree”, because it is new. “Shallow” means depth 2 or 3 here. Everything so far this lesson was a classification tree: leaves vote, splits are scored by Gini. A boosted tree is fit to corrections, which are numbers like +0.613 or -0.387, not classes, so it is the regression version of the same algorithm: the same greedy search over features and thresholds, but each leaf predicts the average correction of the examples in it, and a split is scored by how much it lowers the squared error around those averages. Even </a:t>
+            </a:r>
+            <a:r>
+              <a:rPr>
+                <a:latin typeface="Courier"/>
+              </a:rPr>
+              <a:t>GradientBoostingClassifier</a:t>
+            </a:r>
+            <a:r>
+              <a:rPr/>
+              <a:t> grows regression trees inside.</a:t>
+            </a:r>
+          </a:p>
+          <a:p>
+            <a:pPr lvl="0" indent="0" marL="0">
+              <a:buNone/>
+            </a:pPr>
+          </a:p>
+          <a:p>
+            <a:pPr lvl="0" indent="0" marL="0">
+              <a:buNone/>
+            </a:pPr>
+            <a:r>
+              <a:rPr/>
+              <a:t>A predictable slip, worth naming now: “the final task is classification, so each boosted tree votes default or repaid, like a tree in a forest”. It is reasonable - every ensemble so far was made of trees that vote. But a boosted tree never outputs a class. It outputs a correction that is added to a running score, and only the final score is turned into a class.</a:t>
+            </a:r>
+          </a:p>
+          <a:p>
+            <a:pPr lvl="0" indent="0" marL="0">
+              <a:buNone/>
+            </a:pPr>
+          </a:p>
+          <a:p>
+            <a:pPr lvl="0" indent="0" marL="0">
+              <a:buNone/>
+            </a:pPr>
+            <a:r>
+              <a:rPr/>
+              <a:t>Name α carefully and tie it to the course’s shared notation - this is the same symbol as lesson 3’s gradient descent learning rate, doing an analogous job: how large a step each correction takes.</a:t>
+            </a:r>
+          </a:p>
+          <a:p>
+            <a:pPr lvl="0" indent="0" marL="0">
+              <a:buNone/>
+            </a:pPr>
+          </a:p>
+          <a:p>
+            <a:pPr lvl="0" indent="0" marL="0">
+              <a:buNone/>
+            </a:pPr>
+            <a:r>
+              <a:rPr/>
+              <a:t>Handout section 8.</a:t>
             </a:r>
           </a:p>
         </p:txBody>
@@ -4454,35 +4577,21 @@
             </a:pPr>
             <a:r>
               <a:rPr/>
-              <a:t>The In code line is the whole from-scratch loop of notebook 3, section 1: fit a depth-2 regression tree to the residuals, add 0.3 times its predictions to the running prediction, repeat sixty times.</a:t>
-            </a:r>
-          </a:p>
-          <a:p>
-            <a:pPr lvl="0" indent="0" marL="0">
-              <a:buNone/>
-            </a:pPr>
-          </a:p>
-          <a:p>
-            <a:pPr lvl="0" indent="0" marL="0">
-              <a:buNone/>
-            </a:pPr>
-            <a:r>
-              <a:rPr/>
-              <a:t>State the result without the calculus. For plain squared-error regression, what a new tree corrects is literally the residual - the gap between the truth and the ensemble’s current prediction. That is intuitive on its own and does not need a derivative to justify.</a:t>
-            </a:r>
-          </a:p>
-          <a:p>
-            <a:pPr lvl="0" indent="0" marL="0">
-              <a:buNone/>
-            </a:pPr>
-          </a:p>
-          <a:p>
-            <a:pPr lvl="0" indent="0" marL="0">
-              <a:buNone/>
-            </a:pPr>
-            <a:r>
-              <a:rPr/>
-              <a:t>The second bullet is the generalisation that pays off in the very next segment: the same recipe - fit a tree to the negative gradient of whatever loss you’re using - covers classification too, once the loss changes from squared error to something else. The one line of algebra connecting the two is on the slide; handout section 8 sets it out.</a:t>
+              <a:t>F₀ is the flat starting guess: the best single constant for the loss being used. For squared error, as on this slide and the next three, that is the mean of the target; for classification it will be the log-odds of the base rate (slide 45). Each subsequent Fₜ is the previous ensemble plus a scaled correction from the newest tree, hₜ. Read it left to right: start flat, then keep adding small, scaled corrections.</a:t>
+            </a:r>
+          </a:p>
+          <a:p>
+            <a:pPr lvl="0" indent="0" marL="0">
+              <a:buNone/>
+            </a:pPr>
+          </a:p>
+          <a:p>
+            <a:pPr lvl="0" indent="0" marL="0">
+              <a:buNone/>
+            </a:pPr>
+            <a:r>
+              <a:rPr/>
+              <a:t>Do not derive anything further here - the next slide states what hₜ is actually fit to. Handout section 8.</a:t>
             </a:r>
           </a:p>
         </p:txBody>
@@ -4564,35 +4673,35 @@
             </a:pPr>
             <a:r>
               <a:rPr/>
-              <a:t>A new toy dataset, so say what it is before anything else: 200 points on one input x, whose true value is a three-level step function plus a gentle sine wave (the black line), observed with noise (the grey dots). Sixty depth-2 trees, learning rate 0.3, are fit to it. Walk through the coloured curves in order.</a:t>
-            </a:r>
-          </a:p>
-          <a:p>
-            <a:pPr lvl="0" indent="0" marL="0">
-              <a:buNone/>
-            </a:pPr>
-          </a:p>
-          <a:p>
-            <a:pPr lvl="0" indent="0" marL="0">
-              <a:buNone/>
-            </a:pPr>
-            <a:r>
-              <a:rPr/>
-              <a:t>Say the numbers as you point: one tree barely moves the flat starting guess. Five trees sketch the coarse shape. Twenty trace the step function closely - the ensemble’s best point, on the next slide. By sixty, the ensemble is tracking individual noisy observations as well as the underlying shape.</a:t>
-            </a:r>
-          </a:p>
-          <a:p>
-            <a:pPr lvl="0" indent="0" marL="0">
-              <a:buNone/>
-            </a:pPr>
-          </a:p>
-          <a:p>
-            <a:pPr lvl="0" indent="0" marL="0">
-              <a:buNone/>
-            </a:pPr>
-            <a:r>
-              <a:rPr/>
-              <a:t>Handout section 8.</a:t>
+              <a:t>The In code line is the whole from-scratch loop of notebook 3, section 1: fit a depth-2 regression tree to the residuals, add 0.3 times its predictions to the running prediction, repeat sixty times.</a:t>
+            </a:r>
+          </a:p>
+          <a:p>
+            <a:pPr lvl="0" indent="0" marL="0">
+              <a:buNone/>
+            </a:pPr>
+          </a:p>
+          <a:p>
+            <a:pPr lvl="0" indent="0" marL="0">
+              <a:buNone/>
+            </a:pPr>
+            <a:r>
+              <a:rPr/>
+              <a:t>State the result without the calculus. For plain squared-error regression, what a new tree corrects is literally the residual - the gap between the truth and the ensemble’s current prediction. That is intuitive on its own and does not need a derivative to justify.</a:t>
+            </a:r>
+          </a:p>
+          <a:p>
+            <a:pPr lvl="0" indent="0" marL="0">
+              <a:buNone/>
+            </a:pPr>
+          </a:p>
+          <a:p>
+            <a:pPr lvl="0" indent="0" marL="0">
+              <a:buNone/>
+            </a:pPr>
+            <a:r>
+              <a:rPr/>
+              <a:t>The second bullet is the generalisation that pays off in the very next segment: the same recipe - fit a tree to the negative gradient of whatever loss you’re using - covers classification too, once the loss changes from squared error to something else. The one line of algebra connecting the two is on the slide; handout section 8 sets it out.</a:t>
             </a:r>
           </a:p>
         </p:txBody>
@@ -4674,29 +4783,21 @@
             </a:pPr>
             <a:r>
               <a:rPr/>
-              <a:t>Put a number on each curve of the previous slide. Twenty trees is the sweet spot; by sixty the error against the true, noise-free function has risen again, even though the ensemble is still adding trees that reduce error on the </a:t>
-            </a:r>
-            <a:r>
-              <a:rPr i="1"/>
-              <a:t>training</a:t>
-            </a:r>
-            <a:r>
-              <a:rPr/>
-              <a:t> residuals.</a:t>
-            </a:r>
-          </a:p>
-          <a:p>
-            <a:pPr lvl="0" indent="0" marL="0">
-              <a:buNone/>
-            </a:pPr>
-          </a:p>
-          <a:p>
-            <a:pPr lvl="0" indent="0" marL="0">
-              <a:buNone/>
-            </a:pPr>
-            <a:r>
-              <a:rPr/>
-              <a:t>Name what this is: the same overfitting story as the unconstrained single tree of the depth table, reached by a completely different route - not one tree grown too deep, but too many shallow trees each chasing whatever residual noise is left.</a:t>
+              <a:t>A new toy dataset, so say what it is before anything else: 200 points on one input x, whose true value is a three-level step function plus a gentle sine wave (the black line), observed with noise (the grey dots). Sixty depth-2 trees, learning rate 0.3, are fit to it. Walk through the coloured curves in order.</a:t>
+            </a:r>
+          </a:p>
+          <a:p>
+            <a:pPr lvl="0" indent="0" marL="0">
+              <a:buNone/>
+            </a:pPr>
+          </a:p>
+          <a:p>
+            <a:pPr lvl="0" indent="0" marL="0">
+              <a:buNone/>
+            </a:pPr>
+            <a:r>
+              <a:rPr/>
+              <a:t>Say the numbers as you point: one tree barely moves the flat starting guess. Five trees sketch the coarse shape. Twenty trace the step function closely - the ensemble’s best point, on the next slide. By sixty, the ensemble is tracking individual noisy observations as well as the underlying shape.</a:t>
             </a:r>
           </a:p>
           <a:p>
@@ -4792,63 +4893,43 @@
             </a:pPr>
             <a:r>
               <a:rPr/>
-              <a:t>State the result, not the chain rule behind it - the handout carries the full derivative. What matters for this course is the connection: boosting for classification fits a sequence of small trees to y - p, one correction at a time, rather than adjusting a fixed set of linear coefficients against the same quantity in one continuous descent.</a:t>
-            </a:r>
-          </a:p>
-          <a:p>
-            <a:pPr lvl="0" indent="0" marL="0">
-              <a:buNone/>
-            </a:pPr>
-          </a:p>
-          <a:p>
-            <a:pPr lvl="0" indent="0" marL="0">
-              <a:buNone/>
-            </a:pPr>
-            <a:r>
-              <a:rPr/>
-              <a:t>Ask the room to name what’s genuinely different between this and lesson 4’s logistic regression, given they’re descending against the same quantity. The answer: lesson 4 moves a fixed number of coefficients; boosting adds entirely new trees, so the model’s structure itself grows with training rather than staying fixed.</a:t>
-            </a:r>
-          </a:p>
-          <a:p>
-            <a:pPr lvl="0" indent="0" marL="0">
-              <a:buNone/>
-            </a:pPr>
-          </a:p>
-          <a:p>
-            <a:pPr lvl="0" indent="0" marL="0">
-              <a:buNone/>
-            </a:pPr>
-            <a:r>
-              <a:rPr/>
-              <a:t>The sigma here is lesson 4’s logistic function, 1 / (1 + e^-F), not the sigma squared of the variance slides: say so once, since the same letter has just meant something else.</a:t>
-            </a:r>
-          </a:p>
-          <a:p>
-            <a:pPr lvl="0" indent="0" marL="0">
-              <a:buNone/>
-            </a:pPr>
-          </a:p>
-          <a:p>
-            <a:pPr lvl="0" indent="0" marL="0">
-              <a:buNone/>
-            </a:pPr>
-            <a:r>
-              <a:rPr/>
-              <a:t>Give them the first step in numbers, because it makes y - p concrete. The ensemble starts at the base rate’s log-odds: 464 of the 1,200 defaulted, so F0 = log(464 / 736) = -0.461, which the logistic function turns back into 0.387 for everyone. The first tree is fit to y - p: +0.613 for every applicant who defaulted, -0.387 for every one who repaid.</a:t>
-            </a:r>
-          </a:p>
-          <a:p>
-            <a:pPr lvl="0" indent="0" marL="0">
-              <a:buNone/>
-            </a:pPr>
-          </a:p>
-          <a:p>
-            <a:pPr lvl="0" indent="0" marL="0">
-              <a:buNone/>
-            </a:pPr>
-            <a:r>
-              <a:rPr/>
-              <a:t>Handout section 9.</a:t>
+              <a:t>Put a number on each curve of the previous slide. Twenty trees is the sweet spot; by sixty the error against the true, noise-free function has risen again, even though the ensemble is still adding trees that reduce error on the </a:t>
+            </a:r>
+            <a:r>
+              <a:rPr i="1"/>
+              <a:t>training</a:t>
+            </a:r>
+            <a:r>
+              <a:rPr/>
+              <a:t> residuals.</a:t>
+            </a:r>
+          </a:p>
+          <a:p>
+            <a:pPr lvl="0" indent="0" marL="0">
+              <a:buNone/>
+            </a:pPr>
+          </a:p>
+          <a:p>
+            <a:pPr lvl="0" indent="0" marL="0">
+              <a:buNone/>
+            </a:pPr>
+            <a:r>
+              <a:rPr/>
+              <a:t>Name what this is: the same overfitting story as the unconstrained single tree of the depth table, reached by a completely different route - not one tree grown too deep, but too many shallow trees each chasing whatever residual noise is left.</a:t>
+            </a:r>
+          </a:p>
+          <a:p>
+            <a:pPr lvl="0" indent="0" marL="0">
+              <a:buNone/>
+            </a:pPr>
+          </a:p>
+          <a:p>
+            <a:pPr lvl="0" indent="0" marL="0">
+              <a:buNone/>
+            </a:pPr>
+            <a:r>
+              <a:rPr/>
+              <a:t>Handout section 8.</a:t>
             </a:r>
           </a:p>
         </p:txBody>
@@ -4930,29 +5011,77 @@
             </a:pPr>
             <a:r>
               <a:rPr/>
-              <a:t>Give the number and let it sit against everything shown so far this lesson: 0.902, from a method run at scikit-learn’s defaults, no tuning at all. Ask the room to recall the single tuned tree’s number from the depth table, 0.882 at depth 8, and note that boosting has already passed it without being told anything about depth.</a:t>
-            </a:r>
-          </a:p>
-          <a:p>
-            <a:pPr lvl="0" indent="0" marL="0">
-              <a:buNone/>
-            </a:pPr>
-          </a:p>
-          <a:p>
-            <a:pPr lvl="0" indent="0" marL="0">
-              <a:buNone/>
-            </a:pPr>
-            <a:r>
-              <a:rPr/>
-              <a:t>The rest of this segment is what happens when boosting is </a:t>
-            </a:r>
-            <a:r>
-              <a:rPr i="1"/>
-              <a:t>not</a:t>
-            </a:r>
-            <a:r>
-              <a:rPr/>
-              <a:t> left at sensible defaults.</a:t>
+              <a:t>State the result, not the chain rule behind it - the handout carries the full derivative. What matters for this course is the connection: boosting for classification fits a sequence of small trees to y - p, one correction at a time, rather than adjusting a fixed set of linear coefficients against the same quantity in one continuous descent.</a:t>
+            </a:r>
+          </a:p>
+          <a:p>
+            <a:pPr lvl="0" indent="0" marL="0">
+              <a:buNone/>
+            </a:pPr>
+          </a:p>
+          <a:p>
+            <a:pPr lvl="0" indent="0" marL="0">
+              <a:buNone/>
+            </a:pPr>
+            <a:r>
+              <a:rPr/>
+              <a:t>Ask the room to name what’s genuinely different between this and lesson 4’s logistic regression, given they’re descending against the same quantity. The answer: lesson 4 moves a fixed number of coefficients; boosting adds entirely new trees, so the model’s structure itself grows with training rather than staying fixed.</a:t>
+            </a:r>
+          </a:p>
+          <a:p>
+            <a:pPr lvl="0" indent="0" marL="0">
+              <a:buNone/>
+            </a:pPr>
+          </a:p>
+          <a:p>
+            <a:pPr lvl="0" indent="0" marL="0">
+              <a:buNone/>
+            </a:pPr>
+            <a:r>
+              <a:rPr/>
+              <a:t>The sigma here is lesson 4’s logistic function, 1 / (1 + e^-F), not the sigma squared of the variance slides: the slide says so, say it aloud once too, since the same letter has just meant something else.</a:t>
+            </a:r>
+          </a:p>
+          <a:p>
+            <a:pPr lvl="0" indent="0" marL="0">
+              <a:buNone/>
+            </a:pPr>
+          </a:p>
+          <a:p>
+            <a:pPr lvl="0" indent="0" marL="0">
+              <a:buNone/>
+            </a:pPr>
+            <a:r>
+              <a:rPr/>
+              <a:t>Give them the first step in numbers, because it makes y - p concrete. The ensemble starts at the base rate’s log-odds: 464 of the 1,200 defaulted, so F0 = log(464 / 736) = -0.461, which the logistic function turns back into 0.387 for everyone. The first tree is fit to y - p: +0.613 for every applicant who defaulted, -0.387 for every one who repaid.</a:t>
+            </a:r>
+          </a:p>
+          <a:p>
+            <a:pPr lvl="0" indent="0" marL="0">
+              <a:buNone/>
+            </a:pPr>
+          </a:p>
+          <a:p>
+            <a:pPr lvl="0" indent="0" marL="0">
+              <a:buNone/>
+            </a:pPr>
+            <a:r>
+              <a:rPr/>
+              <a:t>A predictable slip: “so the update is p plus alpha times (y - p)”. It is reasonable, because y - p is a difference of probabilities. But the trees correct the score F, not p: F moves by alpha times the tree’s output, and only then does the logistic function turn the new F into a new p. That is what keeps p between 0 and 1 however large the corrections add up.</a:t>
+            </a:r>
+          </a:p>
+          <a:p>
+            <a:pPr lvl="0" indent="0" marL="0">
+              <a:buNone/>
+            </a:pPr>
+          </a:p>
+          <a:p>
+            <a:pPr lvl="0" indent="0" marL="0">
+              <a:buNone/>
+            </a:pPr>
+            <a:r>
+              <a:rPr/>
+              <a:t>One detail, if someone has read scikit-learn’s source. The tree’s splits are chosen on y - p exactly as described. The number written in each leaf is then recomputed: the sum of y - p over the leaf divided by the sum of p(1 - p), one Newton step on the log-loss rather than the plain mean. The splits come from the residuals; the size of each step takes the curvature of the loss into account. Handout section 9 has it in one sentence; nothing in the lesson depends on it.</a:t>
             </a:r>
           </a:p>
           <a:p>
@@ -5048,35 +5177,43 @@
             </a:pPr>
             <a:r>
               <a:rPr/>
-              <a:t>Unlike bagging, boosting keeps reducing training error for as long as it runs, because every new tree is built specifically to reduce what remains - including the 7% of labels that are noise by construction. There is nothing in the algorithm itself that says “stop”.</a:t>
-            </a:r>
-          </a:p>
-          <a:p>
-            <a:pPr lvl="0" indent="0" marL="0">
-              <a:buNone/>
-            </a:pPr>
-          </a:p>
-          <a:p>
-            <a:pPr lvl="0" indent="0" marL="0">
-              <a:buNone/>
-            </a:pPr>
-            <a:r>
-              <a:rPr/>
-              <a:t>Point at the peak, 30 trees, and then at 800: training accuracy reached 1.000 by 200 trees and stayed there, and cross-validated accuracy has drifted down from 0.897 to 0.890, under a point, since the peak. Contrast the size of that drop with the unconstrained single tree of the depth table, which lost three points past its own peak - boosting’s overfitting is real but gentler.</a:t>
-            </a:r>
-          </a:p>
-          <a:p>
-            <a:pPr lvl="0" indent="0" marL="0">
-              <a:buNone/>
-            </a:pPr>
-          </a:p>
-          <a:p>
-            <a:pPr lvl="0" indent="0" marL="0">
-              <a:buNone/>
-            </a:pPr>
-            <a:r>
-              <a:rPr/>
-              <a:t>Handout section 10.</a:t>
+              <a:t>Give the number and let it sit against everything shown so far this lesson: 0.902, from a method run at scikit-learn’s defaults, no tuning at all. Ask the room to recall the single tuned tree’s number from the depth table, 0.882 at depth 8, and note that boosting has already passed it without being told anything about depth.</a:t>
+            </a:r>
+          </a:p>
+          <a:p>
+            <a:pPr lvl="0" indent="0" marL="0">
+              <a:buNone/>
+            </a:pPr>
+          </a:p>
+          <a:p>
+            <a:pPr lvl="0" indent="0" marL="0">
+              <a:buNone/>
+            </a:pPr>
+            <a:r>
+              <a:rPr/>
+              <a:t>The rest of this segment is what happens when boosting is </a:t>
+            </a:r>
+            <a:r>
+              <a:rPr i="1"/>
+              <a:t>not</a:t>
+            </a:r>
+            <a:r>
+              <a:rPr/>
+              <a:t> left at sensible defaults.</a:t>
+            </a:r>
+          </a:p>
+          <a:p>
+            <a:pPr lvl="0" indent="0" marL="0">
+              <a:buNone/>
+            </a:pPr>
+          </a:p>
+          <a:p>
+            <a:pPr lvl="0" indent="0" marL="0">
+              <a:buNone/>
+            </a:pPr>
+            <a:r>
+              <a:rPr/>
+              <a:t>Handout section 9.</a:t>
             </a:r>
           </a:p>
         </p:txBody>
@@ -5158,41 +5295,21 @@
             </a:pPr>
             <a:r>
               <a:rPr/>
-              <a:t>Two curves again, the same shape of story as the depth curve earlier this lesson but reached by adding trees instead of depth. Training reaches 1.000 by around 200 trees and sits there. Cross-validated accuracy climbs quickly, peaks near 30 trees, and drifts down over the following 770.</a:t>
-            </a:r>
-          </a:p>
-          <a:p>
-            <a:pPr lvl="0" indent="0" marL="0">
-              <a:buNone/>
-            </a:pPr>
-          </a:p>
-          <a:p>
-            <a:pPr lvl="0" indent="0" marL="0">
-              <a:buNone/>
-            </a:pPr>
-            <a:r>
-              <a:rPr/>
-              <a:t>The point worth making explicit: the damage per added tree here is small and easy to miss on a single run - which is exactly why early stopping matters for boosting rather than being optional, even though the overfit is gentler than a single unconstrained tree’s. Say what early stopping is, since the deck has not: set aside part of the training data, watch the score on it as trees are added, and stop once it has not improved for a number of rounds. In scikit-learn that is the </a:t>
-            </a:r>
-            <a:r>
-              <a:rPr>
-                <a:latin typeface="Courier"/>
-              </a:rPr>
-              <a:t>n_iter_no_change</a:t>
-            </a:r>
-            <a:r>
-              <a:rPr/>
-              <a:t> argument of </a:t>
-            </a:r>
-            <a:r>
-              <a:rPr>
-                <a:latin typeface="Courier"/>
-              </a:rPr>
-              <a:t>GradientBoostingClassifier</a:t>
-            </a:r>
-            <a:r>
-              <a:rPr/>
-              <a:t>.</a:t>
+              <a:t>Unlike bagging, boosting keeps reducing its training loss for as long as it runs, because every new tree is built specifically to reduce what remains - including the 7% of labels that are noise by construction. There is nothing in the algorithm itself that says “stop”. Be exact about which quantity: the log-loss on the training data never goes up, while training accuracy only follows it on the whole - fit to all 1,200 applicants with 800 trees, it dips at a handful of individual steps, too small to show in this table (handout section 10).</a:t>
+            </a:r>
+          </a:p>
+          <a:p>
+            <a:pPr lvl="0" indent="0" marL="0">
+              <a:buNone/>
+            </a:pPr>
+          </a:p>
+          <a:p>
+            <a:pPr lvl="0" indent="0" marL="0">
+              <a:buNone/>
+            </a:pPr>
+            <a:r>
+              <a:rPr/>
+              <a:t>Point at the peak, 30 trees, and then at 800: training accuracy reached 1.000 by 200 trees and stayed there, and cross-validated accuracy has drifted down from 0.897 to 0.890, under a point, since the peak. Contrast the size of that drop with the unconstrained single tree of the depth table, which lost three points past its own peak - boosting’s overfitting is real but gentler.</a:t>
             </a:r>
           </a:p>
           <a:p>
@@ -5288,29 +5405,41 @@
             </a:pPr>
             <a:r>
               <a:rPr/>
-              <a:t>Learning rate and tree count are not independent - both control how much total correction the ensemble applies, so they trade off against each other. At α = 0.02, 120 trees haven’t finished fitting the signal: training accuracy is still under 0.89. At α = 1.00, the ensemble has memorised the training set completely and given back more than two points of cross-validated accuracy for it, 0.902 down to 0.878.</a:t>
-            </a:r>
-          </a:p>
-          <a:p>
-            <a:pPr lvl="0" indent="0" marL="0">
-              <a:buNone/>
-            </a:pPr>
-          </a:p>
-          <a:p>
-            <a:pPr lvl="0" indent="0" marL="0">
-              <a:buNone/>
-            </a:pPr>
-            <a:r>
-              <a:rPr/>
-              <a:t>The best setting sits in between - large enough to make real progress within the tree budget, small enough that any one correction is easy to outvote if it turns out to be wrong. Ask the room which direction they’d guess is “more regularised” before revealing that it’s the </a:t>
-            </a:r>
-            <a:r>
-              <a:rPr i="1"/>
-              <a:t>small</a:t>
-            </a:r>
-            <a:r>
-              <a:rPr/>
-              <a:t> α side, the same kind of inverted-direction trap lesson 6’s C was.</a:t>
+              <a:t>Two curves again, the same shape of story as the depth curve earlier this lesson but reached by adding trees instead of depth. Training reaches 1.000 by around 200 trees and sits there. Cross-validated accuracy climbs quickly, peaks near 30 trees, and drifts down over the following 770.</a:t>
+            </a:r>
+          </a:p>
+          <a:p>
+            <a:pPr lvl="0" indent="0" marL="0">
+              <a:buNone/>
+            </a:pPr>
+          </a:p>
+          <a:p>
+            <a:pPr lvl="0" indent="0" marL="0">
+              <a:buNone/>
+            </a:pPr>
+            <a:r>
+              <a:rPr/>
+              <a:t>The point worth making explicit: the damage per added tree here is small and easy to miss on a single run - which is why the number of trees has to be chosen on held-out data, never left to run, even though the overfit is gentler than a single unconstrained tree’s. There are two ways to choose it. This lesson cross-validated a list of tree counts and kept the best, 30. The other is early stopping, which the deck has not shown, so say what it is: set aside part of the training data, watch the score on it as trees are added, and stop once it has not improved for a number of rounds. In scikit-learn that is the </a:t>
+            </a:r>
+            <a:r>
+              <a:rPr>
+                <a:latin typeface="Courier"/>
+              </a:rPr>
+              <a:t>n_iter_no_change</a:t>
+            </a:r>
+            <a:r>
+              <a:rPr/>
+              <a:t> argument of </a:t>
+            </a:r>
+            <a:r>
+              <a:rPr>
+                <a:latin typeface="Courier"/>
+              </a:rPr>
+              <a:t>GradientBoostingClassifier</a:t>
+            </a:r>
+            <a:r>
+              <a:rPr/>
+              <a:t>.</a:t>
             </a:r>
           </a:p>
           <a:p>
@@ -5406,49 +5535,57 @@
             </a:pPr>
             <a:r>
               <a:rPr/>
-              <a:t>The table is the notebook’s map: boosting from scratch on the residuals, then scikit-learn’s classifier, the tree-count and learning-rate sweeps, and the leaderboard of the next slide.</a:t>
-            </a:r>
-          </a:p>
-          <a:p>
-            <a:pPr lvl="0" indent="0" marL="0">
-              <a:buNone/>
-            </a:pPr>
-          </a:p>
-          <a:p>
-            <a:pPr lvl="0" indent="0" marL="0">
-              <a:buNone/>
-            </a:pPr>
-            <a:r>
-              <a:rPr/>
-              <a:t>Run Notebooks/03_gradient_boosting.ipynb. Eighteen minutes.</a:t>
-            </a:r>
-          </a:p>
-          <a:p>
-            <a:pPr lvl="0" indent="0" marL="0">
-              <a:buNone/>
-            </a:pPr>
-          </a:p>
-          <a:p>
-            <a:pPr lvl="0" indent="0" marL="0">
-              <a:buNone/>
-            </a:pPr>
-            <a:r>
-              <a:rPr/>
-              <a:t>The cell to protect is the residual sweep at 1, 5, 20 and 60 trees - seeing the ensemble’s fit against the true function rise and then fall again, in real time, is the most direct experience of boosting’s overfitting available in this course.</a:t>
-            </a:r>
-          </a:p>
-          <a:p>
-            <a:pPr lvl="0" indent="0" marL="0">
-              <a:buNone/>
-            </a:pPr>
-          </a:p>
-          <a:p>
-            <a:pPr lvl="0" indent="0" marL="0">
-              <a:buNone/>
-            </a:pPr>
-            <a:r>
-              <a:rPr/>
-              <a:t>If time is short, skip the learning-rate sweep live and set it as reading - the table is in handout section 10.</a:t>
+              <a:t>Learning rate and tree count are not independent - both control how much total correction the ensemble applies, so they trade off against each other. At α = 0.02, 120 trees haven’t finished fitting the signal: training accuracy is still under 0.89. At α = 1.00, the ensemble has memorised the training set completely and given back more than two points of cross-validated accuracy for it, 0.902 down to 0.878.</a:t>
+            </a:r>
+          </a:p>
+          <a:p>
+            <a:pPr lvl="0" indent="0" marL="0">
+              <a:buNone/>
+            </a:pPr>
+          </a:p>
+          <a:p>
+            <a:pPr lvl="0" indent="0" marL="0">
+              <a:buNone/>
+            </a:pPr>
+            <a:r>
+              <a:rPr/>
+              <a:t>The best setting sits in between - large enough to make real progress within the tree budget, small enough that any one correction is easy to outvote if it turns out to be wrong. Ask the room which direction they’d guess is “more regularised” before revealing that it’s the </a:t>
+            </a:r>
+            <a:r>
+              <a:rPr i="1"/>
+              <a:t>small</a:t>
+            </a:r>
+            <a:r>
+              <a:rPr/>
+              <a:t> α side, the same kind of inverted-direction trap lesson 6’s C was.</a:t>
+            </a:r>
+          </a:p>
+          <a:p>
+            <a:pPr lvl="0" indent="0" marL="0">
+              <a:buNone/>
+            </a:pPr>
+          </a:p>
+          <a:p>
+            <a:pPr lvl="0" indent="0" marL="0">
+              <a:buNone/>
+            </a:pPr>
+            <a:r>
+              <a:rPr/>
+              <a:t>A predictable slip: “only alpha times the number of trees matters, so half the learning rate with twice the trees gives the same model”. It is reasonable - the notes above just said both knobs set the total correction. But they are not interchangeable: each tree is fit to what the ensemble before it still gets wrong, so many small steps follow a different path from a few large ones. A large step overshoots on the noisy labels and the next trees spend themselves undoing it; a small step lets later trees outvote an early mistake. The trade-off is real, the equivalence is not.</a:t>
+            </a:r>
+          </a:p>
+          <a:p>
+            <a:pPr lvl="0" indent="0" marL="0">
+              <a:buNone/>
+            </a:pPr>
+          </a:p>
+          <a:p>
+            <a:pPr lvl="0" indent="0" marL="0">
+              <a:buNone/>
+            </a:pPr>
+            <a:r>
+              <a:rPr/>
+              <a:t>Handout section 10.</a:t>
             </a:r>
           </a:p>
         </p:txBody>
@@ -5530,49 +5667,49 @@
             </a:pPr>
             <a:r>
               <a:rPr/>
-              <a:t>Everything from this lesson, cross-validated the same way. Read down the column and let the pattern speak before naming it: every ensemble method - bagging, the random forest, gradient boosting - lands within about a point and a half of the others, and all three sit closer to the ceiling than either single tree.</a:t>
-            </a:r>
-          </a:p>
-          <a:p>
-            <a:pPr lvl="0" indent="0" marL="0">
-              <a:buNone/>
-            </a:pPr>
-          </a:p>
-          <a:p>
-            <a:pPr lvl="0" indent="0" marL="0">
-              <a:buNone/>
-            </a:pPr>
-            <a:r>
-              <a:rPr/>
-              <a:t>The ceiling itself: 1 minus the 7% of labels deliberately flipped. No method reaches it, and none should - a model that classified the flipped labels “correctly” would be modelling the noise, not the rule.</a:t>
-            </a:r>
-          </a:p>
-          <a:p>
-            <a:pPr lvl="0" indent="0" marL="0">
-              <a:buNone/>
-            </a:pPr>
-          </a:p>
-          <a:p>
-            <a:pPr lvl="0" indent="0" marL="0">
-              <a:buNone/>
-            </a:pPr>
-            <a:r>
-              <a:rPr/>
-              <a:t>One honest caveat, in lesson 5’s terms. The depth of 8 and the 30 boosted trees were picked because they scored best on these same five folds, so those two rows are slightly optimistic; nested cross-validation would remove that. Bagging and the random forest ran at their defaults, chose nothing, and are not affected - and they are still on top.</a:t>
-            </a:r>
-          </a:p>
-          <a:p>
-            <a:pPr lvl="0" indent="0" marL="0">
-              <a:buNone/>
-            </a:pPr>
-          </a:p>
-          <a:p>
-            <a:pPr lvl="0" indent="0" marL="0">
-              <a:buNone/>
-            </a:pPr>
-            <a:r>
-              <a:rPr/>
-              <a:t>Handout section 11.</a:t>
+              <a:t>The table is the notebook’s map: boosting from scratch on the residuals, then scikit-learn’s classifier, the tree-count and learning-rate sweeps, and the leaderboard of the next slide.</a:t>
+            </a:r>
+          </a:p>
+          <a:p>
+            <a:pPr lvl="0" indent="0" marL="0">
+              <a:buNone/>
+            </a:pPr>
+          </a:p>
+          <a:p>
+            <a:pPr lvl="0" indent="0" marL="0">
+              <a:buNone/>
+            </a:pPr>
+            <a:r>
+              <a:rPr/>
+              <a:t>Run Notebooks/03_gradient_boosting.ipynb. Eighteen minutes.</a:t>
+            </a:r>
+          </a:p>
+          <a:p>
+            <a:pPr lvl="0" indent="0" marL="0">
+              <a:buNone/>
+            </a:pPr>
+          </a:p>
+          <a:p>
+            <a:pPr lvl="0" indent="0" marL="0">
+              <a:buNone/>
+            </a:pPr>
+            <a:r>
+              <a:rPr/>
+              <a:t>The cell to protect is the residual sweep at 1, 5, 20 and 60 trees - seeing the ensemble’s fit against the true function rise and then fall again, in real time, is the most direct experience of boosting’s overfitting available in this course.</a:t>
+            </a:r>
+          </a:p>
+          <a:p>
+            <a:pPr lvl="0" indent="0" marL="0">
+              <a:buNone/>
+            </a:pPr>
+          </a:p>
+          <a:p>
+            <a:pPr lvl="0" indent="0" marL="0">
+              <a:buNone/>
+            </a:pPr>
+            <a:r>
+              <a:rPr/>
+              <a:t>If time is short, skip the learning-rate sweep live and set it as reading - the table is in handout section 10.</a:t>
             </a:r>
           </a:p>
         </p:txBody>
@@ -5764,21 +5901,35 @@
             </a:pPr>
             <a:r>
               <a:rPr/>
-              <a:t>Read the three findings as a set - together they are this lesson’s real content, more than any single accuracy number.</a:t>
-            </a:r>
-          </a:p>
-          <a:p>
-            <a:pPr lvl="0" indent="0" marL="0">
-              <a:buNone/>
-            </a:pPr>
-          </a:p>
-          <a:p>
-            <a:pPr lvl="0" indent="0" marL="0">
-              <a:buNone/>
-            </a:pPr>
-            <a:r>
-              <a:rPr/>
-              <a:t>The third finding is the one to land hardest, because it repeats a pattern they have now seen with several different methods: flexibility without a stopping rule is not an advantage. Ask the room to name the earlier occurrences before you do - the degree-12 polynomial in lesson 3, k = 1 in lesson 6, and, earlier today, the boosted ensemble that kept adding trees past its peak.</a:t>
+              <a:t>Everything from this lesson, cross-validated the same way. Read down the column and let the pattern speak before naming it: every ensemble method - bagging, the random forest, gradient boosting - lands within about a point and a half of the others, and all three sit closer to the ceiling than either single tree.</a:t>
+            </a:r>
+          </a:p>
+          <a:p>
+            <a:pPr lvl="0" indent="0" marL="0">
+              <a:buNone/>
+            </a:pPr>
+          </a:p>
+          <a:p>
+            <a:pPr lvl="0" indent="0" marL="0">
+              <a:buNone/>
+            </a:pPr>
+            <a:r>
+              <a:rPr/>
+              <a:t>The ceiling itself: 1 minus the 7% of labels deliberately flipped. No method reaches it, and none should - a model that classified the flipped labels “correctly” would be modelling the noise, not the rule.</a:t>
+            </a:r>
+          </a:p>
+          <a:p>
+            <a:pPr lvl="0" indent="0" marL="0">
+              <a:buNone/>
+            </a:pPr>
+          </a:p>
+          <a:p>
+            <a:pPr lvl="0" indent="0" marL="0">
+              <a:buNone/>
+            </a:pPr>
+            <a:r>
+              <a:rPr/>
+              <a:t>One honest caveat, in lesson 5’s terms. The depth of 8 and the 30 boosted trees were picked because they scored best on these same five folds, so those two rows are slightly optimistic; nested cross-validation would remove that. Bagging and the random forest ran at their defaults, chose nothing, and are not affected - and they are still on top.</a:t>
             </a:r>
           </a:p>
           <a:p>
@@ -5874,21 +6025,21 @@
             </a:pPr>
             <a:r>
               <a:rPr/>
-              <a:t>A table to photograph, exactly as lesson 6 closed with one. Work down it and attach today’s evidence to each row rather than leaving it as generic advice: the nine-leaf tree for the first row, the leaderboard for the second, the tree-count and learning-rate tables for the third, the noise experiment for the fourth, the out-of-bag slide for the fifth.</a:t>
-            </a:r>
-          </a:p>
-          <a:p>
-            <a:pPr lvl="0" indent="0" marL="0">
-              <a:buNone/>
-            </a:pPr>
-          </a:p>
-          <a:p>
-            <a:pPr lvl="0" indent="0" marL="0">
-              <a:buNone/>
-            </a:pPr>
-            <a:r>
-              <a:rPr/>
-              <a:t>The fourth row is worth a sentence of its own, tying back to the noise experiment: with two real features among 22 columns and 1,200 rows, more than half the importance already landed on noise. Many rows do not protect against it; what matters is how many useless columns compete at each split. Permutation importance is on the next slide.</a:t>
+              <a:t>Read the three findings as a set - together they are this lesson’s real content, more than any single accuracy number.</a:t>
+            </a:r>
+          </a:p>
+          <a:p>
+            <a:pPr lvl="0" indent="0" marL="0">
+              <a:buNone/>
+            </a:pPr>
+          </a:p>
+          <a:p>
+            <a:pPr lvl="0" indent="0" marL="0">
+              <a:buNone/>
+            </a:pPr>
+            <a:r>
+              <a:rPr/>
+              <a:t>The third finding is the one to land hardest, because it repeats a pattern they have now seen with several different methods: flexibility without a stopping rule is not an advantage. Ask the room to name the earlier occurrences before you do - the degree-12 polynomial in lesson 3, k = 1 in lesson 6, and, earlier today, the boosted ensemble that kept adding trees past its peak.</a:t>
             </a:r>
           </a:p>
           <a:p>
@@ -5984,63 +6135,35 @@
             </a:pPr>
             <a:r>
               <a:rPr/>
-              <a:t>This is the number to carry out of the room. Say it once more, slowly: with twenty pure-noise columns against two real features, more than half of a random forest’s importance mass sat on columns wired to nothing.</a:t>
-            </a:r>
-          </a:p>
-          <a:p>
-            <a:pPr lvl="0" indent="0" marL="0">
-              <a:buNone/>
-            </a:pPr>
-          </a:p>
-          <a:p>
-            <a:pPr lvl="0" indent="0" marL="0">
-              <a:buNone/>
-            </a:pPr>
-            <a:r>
-              <a:rPr/>
-              <a:t>Ask them to write it down - derivations fade, this kind of number tends not to. Every lesson so far has left one of these - lesson 1’s 77% accuracy on coin-flip labels, lesson 3’s coefficient of 365 where an unpenalised fit wanted billions - and this is lesson 7’s.</a:t>
-            </a:r>
-          </a:p>
-          <a:p>
-            <a:pPr lvl="0" indent="0" marL="0">
-              <a:buNone/>
-            </a:pPr>
-          </a:p>
-          <a:p>
-            <a:pPr lvl="0" indent="0" marL="0">
-              <a:buNone/>
-            </a:pPr>
-            <a:r>
-              <a:rPr/>
-              <a:t>The second bullet is the mechanism in one number. The square root of 22, rounded down, is 4, so each split chooses among 4 random columns. The chance that all 4 come from the 20 noise columns is 4,845 / 7,315 = 0.662. At those splits the tree still has to pick something, and among 1,200 noisy rows some noise column always reduces the impurity a little, by chance.</a:t>
-            </a:r>
-          </a:p>
-          <a:p>
-            <a:pPr lvl="0" indent="0" marL="0">
-              <a:buNone/>
-            </a:pPr>
-          </a:p>
-          <a:p>
-            <a:pPr lvl="0" indent="0" marL="0">
-              <a:buNone/>
-            </a:pPr>
-            <a:r>
-              <a:rPr/>
-              <a:t>The last bullet, permutation importance, is the remedy the handout points to: a column the model really uses costs accuracy when its values are shuffled; a noise column costs nothing. It is measured on data the forest did not train on, so a column cannot earn credit by having been memorised.</a:t>
-            </a:r>
-          </a:p>
-          <a:p>
-            <a:pPr lvl="0" indent="0" marL="0">
-              <a:buNone/>
-            </a:pPr>
-          </a:p>
-          <a:p>
-            <a:pPr lvl="0" indent="0" marL="0">
-              <a:buNone/>
-            </a:pPr>
-            <a:r>
-              <a:rPr/>
-              <a:t>Handout section 7 has the full mechanism.</a:t>
+              <a:t>A table to photograph, exactly as lesson 6 closed with one. Work down it and attach today’s evidence to each row rather than leaving it as generic advice: the nine-leaf tree for the first row, the leaderboard for the second, the tree-count and learning-rate tables for the third, the noise experiment for the fourth, the out-of-bag slide for the fifth.</a:t>
+            </a:r>
+          </a:p>
+          <a:p>
+            <a:pPr lvl="0" indent="0" marL="0">
+              <a:buNone/>
+            </a:pPr>
+          </a:p>
+          <a:p>
+            <a:pPr lvl="0" indent="0" marL="0">
+              <a:buNone/>
+            </a:pPr>
+            <a:r>
+              <a:rPr/>
+              <a:t>The fourth row is worth a sentence of its own, tying back to the noise experiment: with two real features among 22 columns and 1,200 rows, more than half the importance already landed on noise. Many rows do not protect against it; what matters is how many useless columns compete at each split. Permutation importance, the check, was slide 38; the next slide comes back to it.</a:t>
+            </a:r>
+          </a:p>
+          <a:p>
+            <a:pPr lvl="0" indent="0" marL="0">
+              <a:buNone/>
+            </a:pPr>
+          </a:p>
+          <a:p>
+            <a:pPr lvl="0" indent="0" marL="0">
+              <a:buNone/>
+            </a:pPr>
+            <a:r>
+              <a:rPr/>
+              <a:t>Handout section 11.</a:t>
             </a:r>
           </a:p>
         </p:txBody>
@@ -6122,49 +6245,115 @@
             </a:pPr>
             <a:r>
               <a:rPr/>
-              <a:t>Close on the same shape as lesson 6’s summary: a handful of numbers that carry the lesson’s argument without needing the mathematics behind them re-derived.</a:t>
-            </a:r>
-          </a:p>
-          <a:p>
-            <a:pPr lvl="0" indent="0" marL="0">
-              <a:buNone/>
-            </a:pPr>
-          </a:p>
-          <a:p>
-            <a:pPr lvl="0" indent="0" marL="0">
-              <a:buNone/>
-            </a:pPr>
-            <a:r>
-              <a:rPr/>
-              <a:t>If they remember one habit from today, make it this: before trusting a random forest’s importance ranking, ask how many candidate columns compete for attention at each split, because that number - not the accuracy score - is what decides how much noise gets credit it didn’t earn.</a:t>
-            </a:r>
-          </a:p>
-          <a:p>
-            <a:pPr lvl="0" indent="0" marL="0">
-              <a:buNone/>
-            </a:pPr>
-          </a:p>
-          <a:p>
-            <a:pPr lvl="0" indent="0" marL="0">
-              <a:buNone/>
-            </a:pPr>
-            <a:r>
-              <a:rPr/>
-              <a:t>Next lesson turns from labelled data to unlabelled data. Every model so far learned from examples whose answer was known: a price, a class, a default. Lesson 8 asks what structure there is in data when nobody has given the answer at all.</a:t>
-            </a:r>
-          </a:p>
-          <a:p>
-            <a:pPr lvl="0" indent="0" marL="0">
-              <a:buNone/>
-            </a:pPr>
-          </a:p>
-          <a:p>
-            <a:pPr lvl="0" indent="0" marL="0">
-              <a:buNone/>
-            </a:pPr>
-            <a:r>
-              <a:rPr/>
-              <a:t>Handout summary and notation table.</a:t>
+              <a:t>This is the number to carry out of the room. Say it once more, slowly: with twenty pure-noise columns against two real features, more than half of a random forest’s importance mass sat on columns wired to nothing.</a:t>
+            </a:r>
+          </a:p>
+          <a:p>
+            <a:pPr lvl="0" indent="0" marL="0">
+              <a:buNone/>
+            </a:pPr>
+          </a:p>
+          <a:p>
+            <a:pPr lvl="0" indent="0" marL="0">
+              <a:buNone/>
+            </a:pPr>
+            <a:r>
+              <a:rPr/>
+              <a:t>Ask them to write it down - derivations fade, this kind of number tends not to. Every lesson so far has left one of these - lesson 1’s 77% accuracy on coin-flip labels, lesson 3’s coefficient of 365 where an unpenalised fit wanted billions - and this is lesson 7’s.</a:t>
+            </a:r>
+          </a:p>
+          <a:p>
+            <a:pPr lvl="0" indent="0" marL="0">
+              <a:buNone/>
+            </a:pPr>
+          </a:p>
+          <a:p>
+            <a:pPr lvl="0" indent="0" marL="0">
+              <a:buNone/>
+            </a:pPr>
+            <a:r>
+              <a:rPr/>
+              <a:t>The second and third bullets are the mechanism, and there are two causes, not one. Take them in order.</a:t>
+            </a:r>
+          </a:p>
+          <a:p>
+            <a:pPr lvl="0" indent="0" marL="0">
+              <a:buNone/>
+            </a:pPr>
+          </a:p>
+          <a:p>
+            <a:pPr lvl="0" indent="0" marL="0">
+              <a:buNone/>
+            </a:pPr>
+            <a:r>
+              <a:rPr/>
+              <a:t>The menu. The square root of 22, rounded down, is 4, so each split chooses among 4 random columns. The chance that all 4 come from the 20 noise columns is 4,845 / 7,315 = 0.662: two splits in three offer no real feature. At those splits the tree still has to pick something, and it picks the noise column that happens to separate the classes best.</a:t>
+            </a:r>
+          </a:p>
+          <a:p>
+            <a:pPr lvl="0" indent="0" marL="0">
+              <a:buNone/>
+            </a:pPr>
+          </a:p>
+          <a:p>
+            <a:pPr lvl="0" indent="0" marL="0">
+              <a:buNone/>
+            </a:pPr>
+            <a:r>
+              <a:rPr/>
+              <a:t>Small groups. The menu is not the whole story, and notebook 2 shows it: with </a:t>
+            </a:r>
+            <a:r>
+              <a:rPr>
+                <a:latin typeface="Courier"/>
+              </a:rPr>
+              <a:t>max_features=None</a:t>
+            </a:r>
+            <a:r>
+              <a:rPr/>
+              <a:t>, every split offered all 22 columns, the noise share falls from 54.5% to 28%, not to zero. Deep in a tree a node holds a handful of applicants, and among twenty columns of random numbers one will almost always separate a handful of applicants a little better than income or debt can, purely by chance. Every such split credits noise.</a:t>
+            </a:r>
+          </a:p>
+          <a:p>
+            <a:pPr lvl="0" indent="0" marL="0">
+              <a:buNone/>
+            </a:pPr>
+          </a:p>
+          <a:p>
+            <a:pPr lvl="0" indent="0" marL="0">
+              <a:buNone/>
+            </a:pPr>
+            <a:r>
+              <a:rPr/>
+              <a:t>Most will predict the noise share falls to zero with the full menu, and the reasoning is sound as far as it goes - a real feature is now always there to be chosen near the root. It is the bottom of the trees that it misses. The same run raised the accuracy from 0.837 to 0.897: with 20 useless columns out of 22, the random menu costs more accuracy than decorrelating the trees buys back. The default is a good default, not a law.</a:t>
+            </a:r>
+          </a:p>
+          <a:p>
+            <a:pPr lvl="0" indent="0" marL="0">
+              <a:buNone/>
+            </a:pPr>
+          </a:p>
+          <a:p>
+            <a:pPr lvl="0" indent="0" marL="0">
+              <a:buNone/>
+            </a:pPr>
+            <a:r>
+              <a:rPr/>
+              <a:t>The last bullet sends them back to the check of slide 38: shuffling a column on held-out data costs the two real features 0.09 and 0.18 of accuracy, and each noise column almost nothing.</a:t>
+            </a:r>
+          </a:p>
+          <a:p>
+            <a:pPr lvl="0" indent="0" marL="0">
+              <a:buNone/>
+            </a:pPr>
+          </a:p>
+          <a:p>
+            <a:pPr lvl="0" indent="0" marL="0">
+              <a:buNone/>
+            </a:pPr>
+            <a:r>
+              <a:rPr/>
+              <a:t>Handout section 7 has the full mechanism.</a:t>
             </a:r>
           </a:p>
         </p:txBody>
@@ -6246,35 +6435,49 @@
             </a:pPr>
             <a:r>
               <a:rPr/>
-              <a:t>Set it explicitly and say out loud when it comes back: the first ten minutes of lesson 8, Friday 20 November.</a:t>
-            </a:r>
-          </a:p>
-          <a:p>
-            <a:pPr lvl="0" indent="0" marL="0">
-              <a:buNone/>
-            </a:pPr>
-          </a:p>
-          <a:p>
-            <a:pPr lvl="0" indent="0" marL="0">
-              <a:buNone/>
-            </a:pPr>
-            <a:r>
-              <a:rPr/>
-              <a:t>Remind them of the standing rule from lesson 5: every reported number needs a cross-validated spread, and any feature-importance claim needs the check this lesson just demonstrated - a random forest’s importance ranking is a claim to be verified, not a fact to be quoted.</a:t>
-            </a:r>
-          </a:p>
-          <a:p>
-            <a:pPr lvl="0" indent="0" marL="0">
-              <a:buNone/>
-            </a:pPr>
-          </a:p>
-          <a:p>
-            <a:pPr lvl="0" indent="0" marL="0">
-              <a:buNone/>
-            </a:pPr>
-            <a:r>
-              <a:rPr/>
-              <a:t>Next week: unsupervised learning, the first lesson in which the data comes with no labels at all.</a:t>
+              <a:t>Close on the same shape as lesson 6’s summary: a handful of numbers that carry the lesson’s argument without needing the mathematics behind them re-derived.</a:t>
+            </a:r>
+          </a:p>
+          <a:p>
+            <a:pPr lvl="0" indent="0" marL="0">
+              <a:buNone/>
+            </a:pPr>
+          </a:p>
+          <a:p>
+            <a:pPr lvl="0" indent="0" marL="0">
+              <a:buNone/>
+            </a:pPr>
+            <a:r>
+              <a:rPr/>
+              <a:t>If they remember one habit from today, make it this: before trusting a random forest’s importance ranking, ask how many of the columns could plausibly matter at all - many useless columns are what hand credit to noise, and the accuracy score gives no warning - and then check the ranking by shuffling on held-out data, as slide 38 did.</a:t>
+            </a:r>
+          </a:p>
+          <a:p>
+            <a:pPr lvl="0" indent="0" marL="0">
+              <a:buNone/>
+            </a:pPr>
+          </a:p>
+          <a:p>
+            <a:pPr lvl="0" indent="0" marL="0">
+              <a:buNone/>
+            </a:pPr>
+            <a:r>
+              <a:rPr/>
+              <a:t>Next lesson turns from labelled data to unlabelled data. Every model so far learned from examples whose answer was known: a price, a class, a default. Lesson 8 asks what structure there is in data when nobody has given the answer at all.</a:t>
+            </a:r>
+          </a:p>
+          <a:p>
+            <a:pPr lvl="0" indent="0" marL="0">
+              <a:buNone/>
+            </a:pPr>
+          </a:p>
+          <a:p>
+            <a:pPr lvl="0" indent="0" marL="0">
+              <a:buNone/>
+            </a:pPr>
+            <a:r>
+              <a:rPr/>
+              <a:t>Handout summary and notation table.</a:t>
             </a:r>
           </a:p>
         </p:txBody>
@@ -6297,6 +6500,116 @@
             <a:fld id="{18BDFEC3-8487-43E8-A154-7C12CBC1FFF2}" type="slidenum">
               <a:rPr lang="en-US"/>
               <a:t>55</a:t>
+            </a:fld>
+            <a:endParaRPr lang="en-US"/>
+          </a:p>
+        </p:txBody>
+      </p:sp>
+    </p:spTree>
+  </p:cSld>
+</p:notes>
+</file>
+
+<file path=ppt/notesSlides/notesSlide55.xml><?xml version="1.0" encoding="utf-8"?>
+<p:notes xmlns:a="http://schemas.openxmlformats.org/drawingml/2006/main" xmlns:r="http://schemas.openxmlformats.org/officeDocument/2006/relationships" xmlns:p="http://schemas.openxmlformats.org/presentationml/2006/main">
+  <p:cSld>
+    <p:spTree>
+      <p:nvGrpSpPr>
+        <p:cNvPr id="1" name=""/>
+        <p:cNvGrpSpPr/>
+        <p:nvPr/>
+      </p:nvGrpSpPr>
+      <p:grpSpPr>
+        <a:xfrm>
+          <a:off x="0" y="0"/>
+          <a:ext cx="0" cy="0"/>
+          <a:chOff x="0" y="0"/>
+          <a:chExt cx="0" cy="0"/>
+        </a:xfrm>
+      </p:grpSpPr>
+      <p:sp>
+        <p:nvSpPr>
+          <p:cNvPr id="2" name="Slide Image Placeholder 1"/>
+          <p:cNvSpPr>
+            <a:spLocks noGrp="1" noRot="1" noChangeAspect="1"/>
+          </p:cNvSpPr>
+          <p:nvPr>
+            <p:ph type="sldImg"/>
+          </p:nvPr>
+        </p:nvSpPr>
+        <p:spPr/>
+      </p:sp>
+      <p:sp>
+        <p:nvSpPr>
+          <p:cNvPr id="3" name="Notes Placeholder 2"/>
+          <p:cNvSpPr>
+            <a:spLocks noGrp="1"/>
+          </p:cNvSpPr>
+          <p:nvPr>
+            <p:ph type="body" idx="1"/>
+          </p:nvPr>
+        </p:nvSpPr>
+        <p:spPr/>
+        <p:txBody>
+          <a:bodyPr/>
+          <a:lstStyle/>
+          <a:p>
+            <a:pPr lvl="0" indent="0" marL="0">
+              <a:buNone/>
+            </a:pPr>
+            <a:r>
+              <a:rPr/>
+              <a:t>Set it explicitly and say out loud when it comes back: the first ten minutes of lesson 8, Friday 20 November.</a:t>
+            </a:r>
+          </a:p>
+          <a:p>
+            <a:pPr lvl="0" indent="0" marL="0">
+              <a:buNone/>
+            </a:pPr>
+          </a:p>
+          <a:p>
+            <a:pPr lvl="0" indent="0" marL="0">
+              <a:buNone/>
+            </a:pPr>
+            <a:r>
+              <a:rPr/>
+              <a:t>Remind them of the standing rule from lesson 5: every reported number needs a cross-validated spread, and any feature-importance claim needs the check this lesson just demonstrated - a random forest’s importance ranking is a claim to be verified, not a fact to be quoted.</a:t>
+            </a:r>
+          </a:p>
+          <a:p>
+            <a:pPr lvl="0" indent="0" marL="0">
+              <a:buNone/>
+            </a:pPr>
+          </a:p>
+          <a:p>
+            <a:pPr lvl="0" indent="0" marL="0">
+              <a:buNone/>
+            </a:pPr>
+            <a:r>
+              <a:rPr/>
+              <a:t>Next week: unsupervised learning, the first lesson in which the data comes with no labels at all.</a:t>
+            </a:r>
+          </a:p>
+        </p:txBody>
+      </p:sp>
+      <p:sp>
+        <p:nvSpPr>
+          <p:cNvPr id="4" name="Slide Number Placeholder 3"/>
+          <p:cNvSpPr>
+            <a:spLocks noGrp="1"/>
+          </p:cNvSpPr>
+          <p:nvPr>
+            <p:ph type="sldNum" sz="quarter" idx="10"/>
+          </p:nvPr>
+        </p:nvSpPr>
+        <p:spPr/>
+        <p:txBody>
+          <a:bodyPr/>
+          <a:lstStyle/>
+          <a:p>
+            <a:fld id="{18BDFEC3-8487-43E8-A154-7C12CBC1FFF2}" type="slidenum">
+              <a:rPr lang="en-US"/>
+              <a:t>56</a:t>
             </a:fld>
             <a:endParaRPr lang="en-US"/>
           </a:p>
@@ -6356,7 +6669,7 @@
             </a:pPr>
             <a:r>
               <a:rPr/>
-              <a:t>Read the algorithm as one sentence and let it sit - it really is that short. Contrast it explicitly with lessons 3 and 4: no cost function is minimised over a continuous parameter, there is no gradient step. A tree is a sequence of yes/no questions, chosen one at a time.</a:t>
+              <a:t>Read the algorithm as one sentence and let it sit - it really is that short. Contrast it explicitly with lessons 3 and 4: no cost function is minimised over a continuous parameter, there is no gradient step. The tree still learns from the data - which feature to ask about and where to put each threshold - but it learns them by trying candidates and keeping the best, not by descending a slope. A tree is a sequence of yes/no questions, chosen one at a time.</a:t>
             </a:r>
           </a:p>
           <a:p>
@@ -10910,7 +11223,15 @@
             </a:r>
             <a:r>
               <a:rPr/>
-              <a:t>: how many questions a tree may ask before a leaf must stop and vote by majority</a:t>
+              <a:t>: the most questions </a:t>
+            </a:r>
+            <a:r>
+              <a:rPr b="1"/>
+              <a:t>one applicant</a:t>
+            </a:r>
+            <a:r>
+              <a:rPr/>
+              <a:t> answers</a:t>
             </a:r>
           </a:p>
           <a:p>
@@ -10932,7 +11253,7 @@
             </a:r>
             <a:r>
               <a:rPr/>
-              <a:t>: enough questions to isolate almost any subset, down to single points. At full depth, training accuracy is </a:t>
+              <a:t>: enough questions to isolate single points. Training accuracy </a:t>
             </a:r>
             <a:r>
               <a:rPr b="1"/>
@@ -10940,7 +11261,7 @@
             </a:r>
             <a:r>
               <a:rPr/>
-              <a:t>, even on data with no structure at all, unless two examples share every feature value but not the label</a:t>
+              <a:t>, even on data with no structure, unless two examples share every feature value but not the label</a:t>
             </a:r>
           </a:p>
         </p:txBody>
@@ -11774,15 +12095,15 @@
             </a:r>
             <a:r>
               <a:rPr/>
-              <a:t> grows the tree </a:t>
+              <a:t> </a:t>
             </a:r>
             <a:r>
               <a:rPr b="1"/>
-              <a:t>breadth-first</a:t>
-            </a:r>
-            <a:r>
-              <a:rPr/>
-              <a:t>: every leaf at level d splits before any leaf reaches d+1</a:t>
+              <a:t>caps every path</a:t>
+            </a:r>
+            <a:r>
+              <a:rPr/>
+              <a:t>: each node above the cap is split if it can be, worth it or not</a:t>
             </a:r>
           </a:p>
           <a:p>
@@ -11795,15 +12116,15 @@
             </a:r>
             <a:r>
               <a:rPr/>
-              <a:t> grows it </a:t>
+              <a:t> is a </a:t>
             </a:r>
             <a:r>
               <a:rPr b="1"/>
-              <a:t>best-first</a:t>
-            </a:r>
-            <a:r>
-              <a:rPr/>
-              <a:t>: always the leaf with the largest ΔG</a:t>
+              <a:t>budget of leaves</a:t>
+            </a:r>
+            <a:r>
+              <a:rPr/>
+              <a:t>, spent on the largest ΔG first</a:t>
             </a:r>
           </a:p>
           <a:p>
@@ -11824,7 +12145,7 @@
             </a:r>
             <a:r>
               <a:rPr/>
-              <a:t> training accuracy; thresholds 28, the income floor, and 0.82, the debt ceiling</a:t>
+              <a:t> training accuracy; thresholds 28 (income floor) and 0.82 (debt ceiling)</a:t>
             </a:r>
           </a:p>
           <a:p>
@@ -13078,11 +13399,11 @@
             </a:r>
             <a:r>
               <a:rPr b="1"/>
-              <a:t>cannot fix bias</a:t>
-            </a:r>
-            <a:r>
-              <a:rPr/>
-              <a:t>: unbiased-but-noisy trees average to unbiased; trees sharing a systematic error keep that error exactly</a:t>
+              <a:t>cannot repair an error every tree shares</a:t>
+            </a:r>
+            <a:r>
+              <a:rPr/>
+              <a:t>: trees too shallow for the rule stay too shallow, however many are averaged</a:t>
             </a:r>
           </a:p>
         </p:txBody>
@@ -13587,226 +13908,36 @@
           </a:p>
         </p:txBody>
       </p:sp>
-      <p:graphicFrame>
-        <p:nvGraphicFramePr>
-          <p:cNvPr id="6" name="Content Placeholder 5"/>
-          <p:cNvGraphicFramePr>
-            <a:graphicFrameLocks noGrp="1"/>
-          </p:cNvGraphicFramePr>
-          <p:nvPr>
-            <p:ph idx="1"/>
-          </p:nvPr>
-        </p:nvGraphicFramePr>
-        <p:xfrm>
-          <a:off x="457200" y="1166099"/>
-          <a:ext cx="8229600" cy="3390900"/>
-        </p:xfrm>
-        <a:graphic>
-          <a:graphicData uri="http://schemas.openxmlformats.org/drawingml/2006/table">
-            <a:tbl>
-              <a:tblPr firstRow="1" bandRow="1">
-                <a:tableStyleId>{5C22544A-7EE6-4342-B048-85BDC9FD1C3A}</a:tableStyleId>
-              </a:tblPr>
-              <a:tblGrid>
-                <a:gridCol w="2743200"/>
-                <a:gridCol w="2743200"/>
-                <a:gridCol w="2743200"/>
-              </a:tblGrid>
-              <a:tr h="0">
-                <a:tc>
-                  <a:txBody>
-                    <a:bodyPr/>
-                    <a:lstStyle/>
-                    <a:p>
-                      <a:pPr lvl="0" indent="0" marL="0">
-                        <a:buNone/>
-                      </a:pPr>
-                      <a:r>
-                        <a:rPr/>
-                        <a:t>Model</a:t>
-                      </a:r>
-                    </a:p>
-                  </a:txBody>
-                  <a:tcPr/>
-                </a:tc>
-                <a:tc>
-                  <a:txBody>
-                    <a:bodyPr/>
-                    <a:lstStyle/>
-                    <a:p>
-                      <a:pPr lvl="0" indent="0" marL="0">
-                        <a:buNone/>
-                      </a:pPr>
-                      <a:r>
-                        <a:rPr/>
-                        <a:t>Mean test accuracy, 30 random 70/30 splits</a:t>
-                      </a:r>
-                    </a:p>
-                  </a:txBody>
-                  <a:tcPr/>
-                </a:tc>
-                <a:tc>
-                  <a:txBody>
-                    <a:bodyPr/>
-                    <a:lstStyle/>
-                    <a:p>
-                      <a:pPr lvl="0" indent="0" marL="0">
-                        <a:buNone/>
-                      </a:pPr>
-                      <a:r>
-                        <a:rPr/>
-                        <a:t>Standard deviation across the 30</a:t>
-                      </a:r>
-                    </a:p>
-                  </a:txBody>
-                  <a:tcPr/>
-                </a:tc>
-              </a:tr>
-              <a:tr h="0">
-                <a:tc>
-                  <a:txBody>
-                    <a:bodyPr/>
-                    <a:lstStyle/>
-                    <a:p>
-                      <a:pPr lvl="0" indent="0" marL="0">
-                        <a:buNone/>
-                      </a:pPr>
-                      <a:r>
-                        <a:rPr/>
-                        <a:t>Single unconstrained tree</a:t>
-                      </a:r>
-                    </a:p>
-                  </a:txBody>
-                </a:tc>
-                <a:tc>
-                  <a:txBody>
-                    <a:bodyPr/>
-                    <a:lstStyle/>
-                    <a:p>
-                      <a:pPr lvl="0" indent="0" marL="0">
-                        <a:buNone/>
-                      </a:pPr>
-                      <a:r>
-                        <a:rPr/>
-                        <a:t>0.856</a:t>
-                      </a:r>
-                    </a:p>
-                  </a:txBody>
-                </a:tc>
-                <a:tc>
-                  <a:txBody>
-                    <a:bodyPr/>
-                    <a:lstStyle/>
-                    <a:p>
-                      <a:pPr lvl="0" indent="0" marL="0">
-                        <a:buNone/>
-                      </a:pPr>
-                      <a:r>
-                        <a:rPr/>
-                        <a:t>0.0185</a:t>
-                      </a:r>
-                    </a:p>
-                  </a:txBody>
-                </a:tc>
-              </a:tr>
-              <a:tr h="0">
-                <a:tc>
-                  <a:txBody>
-                    <a:bodyPr/>
-                    <a:lstStyle/>
-                    <a:p>
-                      <a:pPr lvl="0" indent="0" marL="0">
-                        <a:buNone/>
-                      </a:pPr>
-                      <a:r>
-                        <a:rPr/>
-                        <a:t>Bagging, 100 trees</a:t>
-                      </a:r>
-                    </a:p>
-                  </a:txBody>
-                </a:tc>
-                <a:tc>
-                  <a:txBody>
-                    <a:bodyPr/>
-                    <a:lstStyle/>
-                    <a:p>
-                      <a:pPr lvl="0" indent="0" marL="0">
-                        <a:buNone/>
-                      </a:pPr>
-                      <a:r>
-                        <a:rPr/>
-                        <a:t>0.902</a:t>
-                      </a:r>
-                    </a:p>
-                  </a:txBody>
-                </a:tc>
-                <a:tc>
-                  <a:txBody>
-                    <a:bodyPr/>
-                    <a:lstStyle/>
-                    <a:p>
-                      <a:pPr lvl="0" indent="0" marL="0">
-                        <a:buNone/>
-                      </a:pPr>
-                      <a:r>
-                        <a:rPr/>
-                        <a:t>0.0153</a:t>
-                      </a:r>
-                    </a:p>
-                  </a:txBody>
-                </a:tc>
-              </a:tr>
-              <a:tr h="0">
-                <a:tc>
-                  <a:txBody>
-                    <a:bodyPr/>
-                    <a:lstStyle/>
-                    <a:p>
-                      <a:pPr lvl="0" indent="0" marL="0">
-                        <a:buNone/>
-                      </a:pPr>
-                      <a:r>
-                        <a:rPr b="1"/>
-                        <a:t>Random forest, 100 trees</a:t>
-                      </a:r>
-                    </a:p>
-                  </a:txBody>
-                </a:tc>
-                <a:tc>
-                  <a:txBody>
-                    <a:bodyPr/>
-                    <a:lstStyle/>
-                    <a:p>
-                      <a:pPr lvl="0" indent="0" marL="0">
-                        <a:buNone/>
-                      </a:pPr>
-                      <a:r>
-                        <a:rPr b="1"/>
-                        <a:t>0.908</a:t>
-                      </a:r>
-                    </a:p>
-                  </a:txBody>
-                </a:tc>
-                <a:tc>
-                  <a:txBody>
-                    <a:bodyPr/>
-                    <a:lstStyle/>
-                    <a:p>
-                      <a:pPr lvl="0" indent="0" marL="0">
-                        <a:buNone/>
-                      </a:pPr>
-                      <a:r>
-                        <a:rPr b="1"/>
-                        <a:t>0.0137</a:t>
-                      </a:r>
-                    </a:p>
-                  </a:txBody>
-                </a:tc>
-              </a:tr>
-            </a:tbl>
-          </a:graphicData>
-        </a:graphic>
-      </p:graphicFrame>
+      <p:pic>
+        <p:nvPicPr>
+          <p:cNvPr descr="ensemble_variance.png" id="0" name="Picture 1"/>
+          <p:cNvPicPr>
+            <a:picLocks noGrp="1" noChangeAspect="1"/>
+          </p:cNvPicPr>
+          <p:nvPr/>
+        </p:nvPicPr>
+        <p:blipFill>
+          <a:blip r:embed="rId3"/>
+          <a:stretch>
+            <a:fillRect/>
+          </a:stretch>
+        </p:blipFill>
+        <p:spPr bwMode="auto">
+          <a:xfrm>
+            <a:off x="2029841" y="1166099"/>
+            <a:ext cx="5084318" cy="3360181"/>
+          </a:xfrm>
+          <a:prstGeom prst="rect">
+            <a:avLst/>
+          </a:prstGeom>
+          <a:noFill/>
+          <a:ln w="9525">
+            <a:noFill/>
+            <a:headEnd/>
+            <a:tailEnd/>
+          </a:ln>
+        </p:spPr>
+      </p:pic>
     </p:spTree>
   </p:cSld>
 </p:sld>
@@ -13970,294 +14101,124 @@
           </a:p>
         </p:txBody>
       </p:sp>
-      <p:graphicFrame>
-        <p:nvGraphicFramePr>
-          <p:cNvPr id="6" name="Content Placeholder 5"/>
-          <p:cNvGraphicFramePr>
-            <a:graphicFrameLocks noGrp="1"/>
-          </p:cNvGraphicFramePr>
-          <p:nvPr>
-            <p:ph idx="1"/>
-          </p:nvPr>
-        </p:nvGraphicFramePr>
-        <p:xfrm>
-          <a:off x="457200" y="1166099"/>
-          <a:ext cx="8229600" cy="3390900"/>
-        </p:xfrm>
-        <a:graphic>
-          <a:graphicData uri="http://schemas.openxmlformats.org/drawingml/2006/table">
-            <a:tbl>
-              <a:tblPr firstRow="1" bandRow="1">
-                <a:tableStyleId>{5C22544A-7EE6-4342-B048-85BDC9FD1C3A}</a:tableStyleId>
-              </a:tblPr>
-              <a:tblGrid>
-                <a:gridCol w="2057400"/>
-                <a:gridCol w="2057400"/>
-                <a:gridCol w="2057400"/>
-                <a:gridCol w="2057400"/>
-              </a:tblGrid>
-              <a:tr h="0">
-                <a:tc>
-                  <a:txBody>
-                    <a:bodyPr/>
-                    <a:lstStyle/>
-                    <a:p>
-                      <a:pPr lvl="0" indent="0" marL="0">
-                        <a:buNone/>
-                      </a:pPr>
-                      <a:r>
-                        <a:rPr/>
-                        <a:t>Noise columns added</a:t>
-                      </a:r>
-                    </a:p>
-                  </a:txBody>
-                  <a:tcPr/>
-                </a:tc>
-                <a:tc>
-                  <a:txBody>
-                    <a:bodyPr/>
-                    <a:lstStyle/>
-                    <a:p>
-                      <a:pPr lvl="0" indent="0" marL="0">
-                        <a:buNone/>
-                      </a:pPr>
-                      <a:r>
-                        <a:rPr/>
-                        <a:t>Total columns</a:t>
-                      </a:r>
-                    </a:p>
-                  </a:txBody>
-                  <a:tcPr/>
-                </a:tc>
-                <a:tc>
-                  <a:txBody>
-                    <a:bodyPr/>
-                    <a:lstStyle/>
-                    <a:p>
-                      <a:pPr lvl="0" indent="0" marL="0">
-                        <a:buNone/>
-                      </a:pPr>
-                      <a:r>
-                        <a:rPr/>
-                        <a:t>Cross-validated accuracy</a:t>
-                      </a:r>
-                    </a:p>
-                  </a:txBody>
-                  <a:tcPr/>
-                </a:tc>
-                <a:tc>
-                  <a:txBody>
-                    <a:bodyPr/>
-                    <a:lstStyle/>
-                    <a:p>
-                      <a:pPr lvl="0" indent="0" marL="0">
-                        <a:buNone/>
-                      </a:pPr>
-                      <a:r>
-                        <a:rPr/>
-                        <a:t>Importance on noise</a:t>
-                      </a:r>
-                    </a:p>
-                  </a:txBody>
-                  <a:tcPr/>
-                </a:tc>
-              </a:tr>
-              <a:tr h="0">
-                <a:tc>
-                  <a:txBody>
-                    <a:bodyPr/>
-                    <a:lstStyle/>
-                    <a:p>
-                      <a:pPr lvl="0" indent="0" marL="0">
-                        <a:buNone/>
-                      </a:pPr>
-                      <a:r>
-                        <a:rPr/>
-                        <a:t>0</a:t>
-                      </a:r>
-                    </a:p>
-                  </a:txBody>
-                </a:tc>
-                <a:tc>
-                  <a:txBody>
-                    <a:bodyPr/>
-                    <a:lstStyle/>
-                    <a:p>
-                      <a:pPr lvl="0" indent="0" marL="0">
-                        <a:buNone/>
-                      </a:pPr>
-                      <a:r>
-                        <a:rPr/>
-                        <a:t>2</a:t>
-                      </a:r>
-                    </a:p>
-                  </a:txBody>
-                </a:tc>
-                <a:tc>
-                  <a:txBody>
-                    <a:bodyPr/>
-                    <a:lstStyle/>
-                    <a:p>
-                      <a:pPr lvl="0" indent="0" marL="0">
-                        <a:buNone/>
-                      </a:pPr>
-                      <a:r>
-                        <a:rPr/>
-                        <a:t>0.912</a:t>
-                      </a:r>
-                    </a:p>
-                  </a:txBody>
-                </a:tc>
-                <a:tc>
-                  <a:txBody>
-                    <a:bodyPr/>
-                    <a:lstStyle/>
-                    <a:p>
-                      <a:pPr lvl="0" indent="0" marL="0">
-                        <a:buNone/>
-                      </a:pPr>
-                      <a:r>
-                        <a:rPr/>
-                        <a:t>0.0%</a:t>
-                      </a:r>
-                    </a:p>
-                  </a:txBody>
-                </a:tc>
-              </a:tr>
-              <a:tr h="0">
-                <a:tc>
-                  <a:txBody>
-                    <a:bodyPr/>
-                    <a:lstStyle/>
-                    <a:p>
-                      <a:pPr lvl="0" indent="0" marL="0">
-                        <a:buNone/>
-                      </a:pPr>
-                      <a:r>
-                        <a:rPr/>
-                        <a:t>5</a:t>
-                      </a:r>
-                    </a:p>
-                  </a:txBody>
-                </a:tc>
-                <a:tc>
-                  <a:txBody>
-                    <a:bodyPr/>
-                    <a:lstStyle/>
-                    <a:p>
-                      <a:pPr lvl="0" indent="0" marL="0">
-                        <a:buNone/>
-                      </a:pPr>
-                      <a:r>
-                        <a:rPr/>
-                        <a:t>7</a:t>
-                      </a:r>
-                    </a:p>
-                  </a:txBody>
-                </a:tc>
-                <a:tc>
-                  <a:txBody>
-                    <a:bodyPr/>
-                    <a:lstStyle/>
-                    <a:p>
-                      <a:pPr lvl="0" indent="0" marL="0">
-                        <a:buNone/>
-                      </a:pPr>
-                      <a:r>
-                        <a:rPr/>
-                        <a:t>0.874</a:t>
-                      </a:r>
-                    </a:p>
-                  </a:txBody>
-                </a:tc>
-                <a:tc>
-                  <a:txBody>
-                    <a:bodyPr/>
-                    <a:lstStyle/>
-                    <a:p>
-                      <a:pPr lvl="0" indent="0" marL="0">
-                        <a:buNone/>
-                      </a:pPr>
-                      <a:r>
-                        <a:rPr/>
-                        <a:t>33.9%</a:t>
-                      </a:r>
-                    </a:p>
-                  </a:txBody>
-                </a:tc>
-              </a:tr>
-              <a:tr h="0">
-                <a:tc>
-                  <a:txBody>
-                    <a:bodyPr/>
-                    <a:lstStyle/>
-                    <a:p>
-                      <a:pPr lvl="0" indent="0" marL="0">
-                        <a:buNone/>
-                      </a:pPr>
-                      <a:r>
-                        <a:rPr/>
-                        <a:t>20</a:t>
-                      </a:r>
-                    </a:p>
-                  </a:txBody>
-                </a:tc>
-                <a:tc>
-                  <a:txBody>
-                    <a:bodyPr/>
-                    <a:lstStyle/>
-                    <a:p>
-                      <a:pPr lvl="0" indent="0" marL="0">
-                        <a:buNone/>
-                      </a:pPr>
-                      <a:r>
-                        <a:rPr/>
-                        <a:t>22</a:t>
-                      </a:r>
-                    </a:p>
-                  </a:txBody>
-                </a:tc>
-                <a:tc>
-                  <a:txBody>
-                    <a:bodyPr/>
-                    <a:lstStyle/>
-                    <a:p>
-                      <a:pPr lvl="0" indent="0" marL="0">
-                        <a:buNone/>
-                      </a:pPr>
-                      <a:r>
-                        <a:rPr/>
-                        <a:t>0.837</a:t>
-                      </a:r>
-                    </a:p>
-                  </a:txBody>
-                </a:tc>
-                <a:tc>
-                  <a:txBody>
-                    <a:bodyPr/>
-                    <a:lstStyle/>
-                    <a:p>
-                      <a:pPr lvl="0" indent="0" marL="0">
-                        <a:buNone/>
-                      </a:pPr>
-                      <a:r>
-                        <a:rPr b="1"/>
-                        <a:t>54.5%</a:t>
-                      </a:r>
-                    </a:p>
-                  </a:txBody>
-                </a:tc>
-              </a:tr>
-            </a:tbl>
-          </a:graphicData>
-        </a:graphic>
-      </p:graphicFrame>
+      <p:pic>
+        <p:nvPicPr>
+          <p:cNvPr descr="noise_importance.png" id="0" name="Picture 1"/>
+          <p:cNvPicPr>
+            <a:picLocks noGrp="1" noChangeAspect="1"/>
+          </p:cNvPicPr>
+          <p:nvPr/>
+        </p:nvPicPr>
+        <p:blipFill>
+          <a:blip r:embed="rId3"/>
+          <a:stretch>
+            <a:fillRect/>
+          </a:stretch>
+        </p:blipFill>
+        <p:spPr bwMode="auto">
+          <a:xfrm>
+            <a:off x="2029841" y="1166099"/>
+            <a:ext cx="5084318" cy="3360181"/>
+          </a:xfrm>
+          <a:prstGeom prst="rect">
+            <a:avLst/>
+          </a:prstGeom>
+          <a:noFill/>
+          <a:ln w="9525">
+            <a:noFill/>
+            <a:headEnd/>
+            <a:tailEnd/>
+          </a:ln>
+        </p:spPr>
+      </p:pic>
     </p:spTree>
   </p:cSld>
 </p:sld>
 </file>
 
 <file path=ppt/slides/slide38.xml><?xml version="1.0" encoding="utf-8"?>
+<p:sld xmlns:a="http://schemas.openxmlformats.org/drawingml/2006/main" xmlns:r="http://schemas.openxmlformats.org/officeDocument/2006/relationships" xmlns:p="http://schemas.openxmlformats.org/presentationml/2006/main">
+  <p:cSld>
+    <p:spTree>
+      <p:nvGrpSpPr>
+        <p:cNvPr id="1" name=""/>
+        <p:cNvGrpSpPr/>
+        <p:nvPr/>
+      </p:nvGrpSpPr>
+      <p:grpSpPr>
+        <a:xfrm>
+          <a:off x="0" y="0"/>
+          <a:ext cx="0" cy="0"/>
+          <a:chOff x="0" y="0"/>
+          <a:chExt cx="0" cy="0"/>
+        </a:xfrm>
+      </p:grpSpPr>
+      <p:sp>
+        <p:nvSpPr>
+          <p:cNvPr id="2" name="Title 1"/>
+          <p:cNvSpPr>
+            <a:spLocks noGrp="1"/>
+          </p:cNvSpPr>
+          <p:nvPr>
+            <p:ph type="title"/>
+          </p:nvPr>
+        </p:nvSpPr>
+        <p:spPr>
+          <a:xfrm>
+            <a:off x="457200" y="205979"/>
+            <a:ext cx="8229600" cy="857250"/>
+          </a:xfrm>
+        </p:spPr>
+        <p:txBody>
+          <a:bodyPr/>
+          <a:lstStyle/>
+          <a:p>
+            <a:pPr lvl="0" indent="0" marL="0">
+              <a:buNone/>
+            </a:pPr>
+            <a:r>
+              <a:rPr/>
+              <a:t>Permutation importance</a:t>
+            </a:r>
+          </a:p>
+        </p:txBody>
+      </p:sp>
+      <p:pic>
+        <p:nvPicPr>
+          <p:cNvPr descr="permutation_importance.png" id="0" name="Picture 1"/>
+          <p:cNvPicPr>
+            <a:picLocks noGrp="1" noChangeAspect="1"/>
+          </p:cNvPicPr>
+          <p:nvPr/>
+        </p:nvPicPr>
+        <p:blipFill>
+          <a:blip r:embed="rId3"/>
+          <a:stretch>
+            <a:fillRect/>
+          </a:stretch>
+        </p:blipFill>
+        <p:spPr bwMode="auto">
+          <a:xfrm>
+            <a:off x="1771849" y="1166099"/>
+            <a:ext cx="5600301" cy="3360181"/>
+          </a:xfrm>
+          <a:prstGeom prst="rect">
+            <a:avLst/>
+          </a:prstGeom>
+          <a:noFill/>
+          <a:ln w="9525">
+            <a:noFill/>
+            <a:headEnd/>
+            <a:tailEnd/>
+          </a:ln>
+        </p:spPr>
+      </p:pic>
+    </p:spTree>
+  </p:cSld>
+</p:sld>
+</file>
+
+<file path=ppt/slides/slide39.xml><?xml version="1.0" encoding="utf-8"?>
 <p:sld xmlns:a="http://schemas.openxmlformats.org/drawingml/2006/main" xmlns:r="http://schemas.openxmlformats.org/officeDocument/2006/relationships" xmlns:p="http://schemas.openxmlformats.org/presentationml/2006/main">
   <p:cSld>
     <p:spTree>
@@ -14390,11 +14351,11 @@
                         <a:rPr>
                           <a:latin typeface="Courier"/>
                         </a:rPr>
-                        <a:t>train_test_split(..., test_size=0.3, stratify=y)</a:t>
+                        <a:t>train_test_split</a:t>
                       </a:r>
                       <a:r>
                         <a:rPr/>
-                        <a:t>, your own bagging against </a:t>
+                        <a:t>, your bagging against </a:t>
                       </a:r>
                       <a:r>
                         <a:rPr>
@@ -14404,7 +14365,7 @@
                       </a:r>
                       <a:r>
                         <a:rPr/>
-                        <a:t>, both scored by </a:t>
+                        <a:t>, </a:t>
                       </a:r>
                       <a:r>
                         <a:rPr>
@@ -14445,10 +14406,6 @@
                         <a:buNone/>
                       </a:pPr>
                       <a:r>
-                        <a:rPr/>
-                        <a:t>a forest with </a:t>
-                      </a:r>
-                      <a:r>
                         <a:rPr>
                           <a:latin typeface="Courier"/>
                         </a:rPr>
@@ -14456,7 +14413,7 @@
                       </a:r>
                       <a:r>
                         <a:rPr/>
-                        <a:t>: its </a:t>
+                        <a:t>: </a:t>
                       </a:r>
                       <a:r>
                         <a:rPr>
@@ -14476,7 +14433,7 @@
                       </a:r>
                       <a:r>
                         <a:rPr/>
-                        <a:t> → 0.9117 and 0.9117; 0.0026 over 12 seeds</a:t>
+                        <a:t> → 0.9117 both; 0.0026 over 12 seeds</a:t>
                       </a:r>
                     </a:p>
                   </a:txBody>
@@ -14508,7 +14465,7 @@
                       </a:pPr>
                       <a:r>
                         <a:rPr/>
-                        <a:t>a tree, </a:t>
+                        <a:t>tree, </a:t>
                       </a:r>
                       <a:r>
                         <a:rPr>
@@ -14528,7 +14485,7 @@
                       </a:r>
                       <a:r>
                         <a:rPr/>
-                        <a:t> on 30 splits → spread 0.0185, 0.0153, 0.0137</a:t>
+                        <a:t>, 30 splits → spread 0.0185, 0.0153, 0.0137</a:t>
                       </a:r>
                     </a:p>
                   </a:txBody>
@@ -14566,7 +14523,45 @@
                       </a:r>
                       <a:r>
                         <a:rPr/>
-                        <a:t> with 0, 5 and 20 noise columns → 54.5% on noise</a:t>
+                        <a:t>, 0 to 20 noise columns → 54.5% on noise</a:t>
+                      </a:r>
+                    </a:p>
+                  </a:txBody>
+                </a:tc>
+              </a:tr>
+              <a:tr h="0">
+                <a:tc>
+                  <a:txBody>
+                    <a:bodyPr/>
+                    <a:lstStyle/>
+                    <a:p>
+                      <a:pPr lvl="0" indent="0" marL="0">
+                        <a:buNone/>
+                      </a:pPr>
+                      <a:r>
+                        <a:rPr/>
+                        <a:t>6. checking the importances, 38</a:t>
+                      </a:r>
+                    </a:p>
+                  </a:txBody>
+                </a:tc>
+                <a:tc>
+                  <a:txBody>
+                    <a:bodyPr/>
+                    <a:lstStyle/>
+                    <a:p>
+                      <a:pPr lvl="0" indent="0" marL="0">
+                        <a:buNone/>
+                      </a:pPr>
+                      <a:r>
+                        <a:rPr>
+                          <a:latin typeface="Courier"/>
+                        </a:rPr>
+                        <a:t>permutation_importance</a:t>
+                      </a:r>
+                      <a:r>
+                        <a:rPr/>
+                        <a:t>, test split → real 0.09 and 0.18, noise ≈ 0</a:t>
                       </a:r>
                     </a:p>
                   </a:txBody>
@@ -14576,151 +14571,6 @@
           </a:graphicData>
         </a:graphic>
       </p:graphicFrame>
-    </p:spTree>
-  </p:cSld>
-</p:sld>
-</file>
-
-<file path=ppt/slides/slide39.xml><?xml version="1.0" encoding="utf-8"?>
-<p:sld xmlns:a="http://schemas.openxmlformats.org/drawingml/2006/main" xmlns:r="http://schemas.openxmlformats.org/officeDocument/2006/relationships" xmlns:p="http://schemas.openxmlformats.org/presentationml/2006/main">
-  <p:cSld>
-    <p:spTree>
-      <p:nvGrpSpPr>
-        <p:cNvPr id="1" name=""/>
-        <p:cNvGrpSpPr/>
-        <p:nvPr/>
-      </p:nvGrpSpPr>
-      <p:grpSpPr>
-        <a:xfrm>
-          <a:off x="0" y="0"/>
-          <a:ext cx="0" cy="0"/>
-          <a:chOff x="0" y="0"/>
-          <a:chExt cx="0" cy="0"/>
-        </a:xfrm>
-      </p:grpSpPr>
-      <p:sp>
-        <p:nvSpPr>
-          <p:cNvPr id="2" name="Title 1"/>
-          <p:cNvSpPr>
-            <a:spLocks noGrp="1"/>
-          </p:cNvSpPr>
-          <p:nvPr>
-            <p:ph type="title"/>
-          </p:nvPr>
-        </p:nvSpPr>
-        <p:spPr>
-          <a:xfrm>
-            <a:off x="457200" y="205979"/>
-            <a:ext cx="8229600" cy="857250"/>
-          </a:xfrm>
-        </p:spPr>
-        <p:txBody>
-          <a:bodyPr/>
-          <a:lstStyle/>
-          <a:p>
-            <a:pPr lvl="0" indent="0" marL="0">
-              <a:buNone/>
-            </a:pPr>
-            <a:r>
-              <a:rPr/>
-              <a:t>Gradient boosting: correcting mistakes in sequence</a:t>
-            </a:r>
-          </a:p>
-        </p:txBody>
-      </p:sp>
-      <p:sp>
-        <p:nvSpPr>
-          <p:cNvPr id="3" name="Content Placeholder 2"/>
-          <p:cNvSpPr>
-            <a:spLocks noGrp="1"/>
-          </p:cNvSpPr>
-          <p:nvPr>
-            <p:ph idx="1"/>
-          </p:nvPr>
-        </p:nvSpPr>
-        <p:spPr>
-          <a:xfrm>
-            <a:off x="457200" y="1200151"/>
-            <a:ext cx="8229600" cy="3394472"/>
-          </a:xfrm>
-        </p:spPr>
-        <p:txBody>
-          <a:bodyPr/>
-          <a:lstStyle/>
-          <a:p>
-            <a:pPr lvl="0"/>
-            <a:r>
-              <a:rPr/>
-              <a:t>Bagging and random forests build trees </a:t>
-            </a:r>
-            <a:r>
-              <a:rPr b="1"/>
-              <a:t>independently</a:t>
-            </a:r>
-            <a:r>
-              <a:rPr/>
-              <a:t>, then average</a:t>
-            </a:r>
-          </a:p>
-          <a:p>
-            <a:pPr lvl="0"/>
-            <a:r>
-              <a:rPr b="1"/>
-              <a:t>Boosting</a:t>
-            </a:r>
-            <a:r>
-              <a:rPr/>
-              <a:t> builds them </a:t>
-            </a:r>
-            <a:r>
-              <a:rPr b="1"/>
-              <a:t>in sequence</a:t>
-            </a:r>
-            <a:r>
-              <a:rPr/>
-              <a:t>: each new tree corrects what the trees so far got wrong</a:t>
-            </a:r>
-          </a:p>
-          <a:p>
-            <a:pPr lvl="0"/>
-            <a:r>
-              <a:rPr/>
-              <a:t>Each is a shallow </a:t>
-            </a:r>
-            <a:r>
-              <a:rPr b="1"/>
-              <a:t>regression tree</a:t>
-            </a:r>
-            <a:r>
-              <a:rPr/>
-              <a:t>, a </a:t>
-            </a:r>
-            <a:r>
-              <a:rPr b="1"/>
-              <a:t>weak learner</a:t>
-            </a:r>
-            <a:r>
-              <a:rPr/>
-              <a:t>: leaves predict a mean, splits reduce squared error</a:t>
-            </a:r>
-          </a:p>
-          <a:p>
-            <a:pPr lvl="0"/>
-            <a:r>
-              <a:rPr/>
-              <a:t>The learning rate α sets </a:t>
-            </a:r>
-            <a:r>
-              <a:rPr b="1"/>
-              <a:t>how much</a:t>
-            </a:r>
-            <a:r>
-              <a:rPr/>
-              <a:t> of each correction is applied</a:t>
-            </a:r>
-          </a:p>
-        </p:txBody>
-      </p:sp>
     </p:spTree>
   </p:cSld>
 </p:sld>
@@ -14901,7 +14751,152 @@
             </a:pPr>
             <a:r>
               <a:rPr/>
-              <a:t>Building the ensemble, one tree at a time</a:t>
+              <a:t>Gradient boosting: correcting mistakes in sequence</a:t>
+            </a:r>
+          </a:p>
+        </p:txBody>
+      </p:sp>
+      <p:sp>
+        <p:nvSpPr>
+          <p:cNvPr id="3" name="Content Placeholder 2"/>
+          <p:cNvSpPr>
+            <a:spLocks noGrp="1"/>
+          </p:cNvSpPr>
+          <p:nvPr>
+            <p:ph idx="1"/>
+          </p:nvPr>
+        </p:nvSpPr>
+        <p:spPr>
+          <a:xfrm>
+            <a:off x="457200" y="1200151"/>
+            <a:ext cx="8229600" cy="3394472"/>
+          </a:xfrm>
+        </p:spPr>
+        <p:txBody>
+          <a:bodyPr/>
+          <a:lstStyle/>
+          <a:p>
+            <a:pPr lvl="0"/>
+            <a:r>
+              <a:rPr/>
+              <a:t>Bagging and random forests build trees </a:t>
+            </a:r>
+            <a:r>
+              <a:rPr b="1"/>
+              <a:t>independently</a:t>
+            </a:r>
+            <a:r>
+              <a:rPr/>
+              <a:t>, then average</a:t>
+            </a:r>
+          </a:p>
+          <a:p>
+            <a:pPr lvl="0"/>
+            <a:r>
+              <a:rPr b="1"/>
+              <a:t>Boosting</a:t>
+            </a:r>
+            <a:r>
+              <a:rPr/>
+              <a:t> builds them </a:t>
+            </a:r>
+            <a:r>
+              <a:rPr b="1"/>
+              <a:t>in sequence</a:t>
+            </a:r>
+            <a:r>
+              <a:rPr/>
+              <a:t>: each new tree corrects what the trees so far got wrong</a:t>
+            </a:r>
+          </a:p>
+          <a:p>
+            <a:pPr lvl="0"/>
+            <a:r>
+              <a:rPr/>
+              <a:t>Each is a shallow </a:t>
+            </a:r>
+            <a:r>
+              <a:rPr b="1"/>
+              <a:t>regression tree</a:t>
+            </a:r>
+            <a:r>
+              <a:rPr/>
+              <a:t>, a </a:t>
+            </a:r>
+            <a:r>
+              <a:rPr b="1"/>
+              <a:t>weak learner</a:t>
+            </a:r>
+            <a:r>
+              <a:rPr/>
+              <a:t>: it predicts a number, a correction, not a class</a:t>
+            </a:r>
+          </a:p>
+          <a:p>
+            <a:pPr lvl="0"/>
+            <a:r>
+              <a:rPr/>
+              <a:t>The learning rate α sets </a:t>
+            </a:r>
+            <a:r>
+              <a:rPr b="1"/>
+              <a:t>how much</a:t>
+            </a:r>
+            <a:r>
+              <a:rPr/>
+              <a:t> of each correction is applied</a:t>
+            </a:r>
+          </a:p>
+        </p:txBody>
+      </p:sp>
+    </p:spTree>
+  </p:cSld>
+</p:sld>
+</file>
+
+<file path=ppt/slides/slide41.xml><?xml version="1.0" encoding="utf-8"?>
+<p:sld xmlns:a="http://schemas.openxmlformats.org/drawingml/2006/main" xmlns:r="http://schemas.openxmlformats.org/officeDocument/2006/relationships" xmlns:p="http://schemas.openxmlformats.org/presentationml/2006/main">
+  <p:cSld>
+    <p:spTree>
+      <p:nvGrpSpPr>
+        <p:cNvPr id="1" name=""/>
+        <p:cNvGrpSpPr/>
+        <p:nvPr/>
+      </p:nvGrpSpPr>
+      <p:grpSpPr>
+        <a:xfrm>
+          <a:off x="0" y="0"/>
+          <a:ext cx="0" cy="0"/>
+          <a:chOff x="0" y="0"/>
+          <a:chExt cx="0" cy="0"/>
+        </a:xfrm>
+      </p:grpSpPr>
+      <p:sp>
+        <p:nvSpPr>
+          <p:cNvPr id="2" name="Title 1"/>
+          <p:cNvSpPr>
+            <a:spLocks noGrp="1"/>
+          </p:cNvSpPr>
+          <p:nvPr>
+            <p:ph type="title"/>
+          </p:nvPr>
+        </p:nvSpPr>
+        <p:spPr>
+          <a:xfrm>
+            <a:off x="457200" y="205979"/>
+            <a:ext cx="8229600" cy="857250"/>
+          </a:xfrm>
+        </p:spPr>
+        <p:txBody>
+          <a:bodyPr/>
+          <a:lstStyle/>
+          <a:p>
+            <a:pPr lvl="0" indent="0" marL="0">
+              <a:buNone/>
+            </a:pPr>
+            <a:r>
+              <a:rPr/>
+              <a:t>Building the ensemble, one tree at a time, for squared error</a:t>
             </a:r>
           </a:p>
         </p:txBody>
@@ -14941,7 +14936,7 @@
 </p:sld>
 </file>
 
-<file path=ppt/slides/slide41.xml><?xml version="1.0" encoding="utf-8"?>
+<file path=ppt/slides/slide42.xml><?xml version="1.0" encoding="utf-8"?>
 <p:sld xmlns:a="http://schemas.openxmlformats.org/drawingml/2006/main" xmlns:r="http://schemas.openxmlformats.org/officeDocument/2006/relationships" xmlns:p="http://schemas.openxmlformats.org/presentationml/2006/main">
   <p:cSld>
     <p:spTree>
@@ -15074,7 +15069,7 @@
 </p:sld>
 </file>
 
-<file path=ppt/slides/slide42.xml><?xml version="1.0" encoding="utf-8"?>
+<file path=ppt/slides/slide43.xml><?xml version="1.0" encoding="utf-8"?>
 <p:sld xmlns:a="http://schemas.openxmlformats.org/drawingml/2006/main" xmlns:r="http://schemas.openxmlformats.org/officeDocument/2006/relationships" xmlns:p="http://schemas.openxmlformats.org/presentationml/2006/main">
   <p:cSld>
     <p:spTree>
@@ -15156,131 +15151,6 @@
 </p:sld>
 </file>
 
-<file path=ppt/slides/slide43.xml><?xml version="1.0" encoding="utf-8"?>
-<p:sld xmlns:a="http://schemas.openxmlformats.org/drawingml/2006/main" xmlns:r="http://schemas.openxmlformats.org/officeDocument/2006/relationships" xmlns:p="http://schemas.openxmlformats.org/presentationml/2006/main">
-  <p:cSld>
-    <p:spTree>
-      <p:nvGrpSpPr>
-        <p:cNvPr id="1" name=""/>
-        <p:cNvGrpSpPr/>
-        <p:nvPr/>
-      </p:nvGrpSpPr>
-      <p:grpSpPr>
-        <a:xfrm>
-          <a:off x="0" y="0"/>
-          <a:ext cx="0" cy="0"/>
-          <a:chOff x="0" y="0"/>
-          <a:chExt cx="0" cy="0"/>
-        </a:xfrm>
-      </p:grpSpPr>
-      <p:sp>
-        <p:nvSpPr>
-          <p:cNvPr id="2" name="Title 1"/>
-          <p:cNvSpPr>
-            <a:spLocks noGrp="1"/>
-          </p:cNvSpPr>
-          <p:nvPr>
-            <p:ph type="title"/>
-          </p:nvPr>
-        </p:nvSpPr>
-        <p:spPr>
-          <a:xfrm>
-            <a:off x="457200" y="205979"/>
-            <a:ext cx="8229600" cy="857250"/>
-          </a:xfrm>
-        </p:spPr>
-        <p:txBody>
-          <a:bodyPr/>
-          <a:lstStyle/>
-          <a:p>
-            <a:pPr lvl="0" indent="0" marL="0">
-              <a:buNone/>
-            </a:pPr>
-            <a:r>
-              <a:rPr/>
-              <a:t>Reading the picture</a:t>
-            </a:r>
-          </a:p>
-        </p:txBody>
-      </p:sp>
-      <p:sp>
-        <p:nvSpPr>
-          <p:cNvPr id="3" name="Content Placeholder 2"/>
-          <p:cNvSpPr>
-            <a:spLocks noGrp="1"/>
-          </p:cNvSpPr>
-          <p:nvPr>
-            <p:ph idx="1"/>
-          </p:nvPr>
-        </p:nvSpPr>
-        <p:spPr>
-          <a:xfrm>
-            <a:off x="457200" y="1200151"/>
-            <a:ext cx="8229600" cy="3394472"/>
-          </a:xfrm>
-        </p:spPr>
-        <p:txBody>
-          <a:bodyPr/>
-          <a:lstStyle/>
-          <a:p>
-            <a:pPr lvl="0"/>
-            <a:r>
-              <a:rPr b="1"/>
-              <a:t>1 tree</a:t>
-            </a:r>
-            <a:r>
-              <a:rPr/>
-              <a:t>: mean squared error (MSE) against the true function 0.395, barely moves the flat guess</a:t>
-            </a:r>
-          </a:p>
-          <a:p>
-            <a:pPr lvl="0"/>
-            <a:r>
-              <a:rPr b="1"/>
-              <a:t>5 trees</a:t>
-            </a:r>
-            <a:r>
-              <a:rPr/>
-              <a:t>: MSE 0.068, the coarse shape appears</a:t>
-            </a:r>
-          </a:p>
-          <a:p>
-            <a:pPr lvl="0"/>
-            <a:r>
-              <a:rPr b="1"/>
-              <a:t>20 trees</a:t>
-            </a:r>
-            <a:r>
-              <a:rPr/>
-              <a:t>: MSE </a:t>
-            </a:r>
-            <a:r>
-              <a:rPr b="1"/>
-              <a:t>0.012</a:t>
-            </a:r>
-            <a:r>
-              <a:rPr/>
-              <a:t>, the ensemble’s best point</a:t>
-            </a:r>
-          </a:p>
-          <a:p>
-            <a:pPr lvl="0"/>
-            <a:r>
-              <a:rPr b="1"/>
-              <a:t>60 trees</a:t>
-            </a:r>
-            <a:r>
-              <a:rPr/>
-              <a:t>: MSE rises back to 0.018, tracking noise, not signal</a:t>
-            </a:r>
-          </a:p>
-        </p:txBody>
-      </p:sp>
-    </p:spTree>
-  </p:cSld>
-</p:sld>
-</file>
-
 <file path=ppt/slides/slide44.xml><?xml version="1.0" encoding="utf-8"?>
 <p:sld xmlns:a="http://schemas.openxmlformats.org/drawingml/2006/main" xmlns:r="http://schemas.openxmlformats.org/officeDocument/2006/relationships" xmlns:p="http://schemas.openxmlformats.org/presentationml/2006/main">
   <p:cSld>
@@ -15323,7 +15193,7 @@
             </a:pPr>
             <a:r>
               <a:rPr/>
-              <a:t>Classification: the same idea, a different gradient</a:t>
+              <a:t>Reading the picture</a:t>
             </a:r>
           </a:p>
         </p:txBody>
@@ -15350,41 +15220,53 @@
           <a:p>
             <a:pPr lvl="0"/>
             <a:r>
-              <a:rPr/>
-              <a:t>y is 0 or 1; the score F becomes a probability through lesson 4’s logistic function, p = σ(F)</a:t>
+              <a:rPr b="1"/>
+              <a:t>1 tree</a:t>
+            </a:r>
+            <a:r>
+              <a:rPr/>
+              <a:t>: mean squared error (MSE) against the true function 0.395, barely moves the flat guess</a:t>
             </a:r>
           </a:p>
           <a:p>
             <a:pPr lvl="0"/>
             <a:r>
-              <a:rPr/>
-              <a:t>The loss is lesson 4’s </a:t>
-            </a:r>
-            <a:r>
               <a:rPr b="1"/>
-              <a:t>log-loss</a:t>
+              <a:t>5 trees</a:t>
+            </a:r>
+            <a:r>
+              <a:rPr/>
+              <a:t>: MSE 0.068, the coarse shape appears</a:t>
             </a:r>
           </a:p>
           <a:p>
             <a:pPr lvl="0"/>
             <a:r>
-              <a:rPr/>
-              <a:t>Each tree fits the </a:t>
-            </a:r>
-            <a:r>
               <a:rPr b="1"/>
-              <a:t>pseudo-residual</a:t>
-            </a:r>
-            <a:r>
-              <a:rPr/>
-              <a:t> y - p, the negative gradient: lesson 4’s error term</a:t>
+              <a:t>20 trees</a:t>
+            </a:r>
+            <a:r>
+              <a:rPr/>
+              <a:t>: MSE </a:t>
+            </a:r>
+            <a:r>
+              <a:rPr b="1"/>
+              <a:t>0.012</a:t>
+            </a:r>
+            <a:r>
+              <a:rPr/>
+              <a:t>, the ensemble’s best point</a:t>
             </a:r>
           </a:p>
           <a:p>
             <a:pPr lvl="0"/>
             <a:r>
-              <a:rPr/>
-              <a:t>Start: p = 0.387 for all, so the first tree fits +0.613 to defaulters and −0.387 to the rest</a:t>
+              <a:rPr b="1"/>
+              <a:t>60 trees</a:t>
+            </a:r>
+            <a:r>
+              <a:rPr/>
+              <a:t>: MSE rises back to 0.018, tracking noise, not signal</a:t>
             </a:r>
           </a:p>
         </p:txBody>
@@ -15436,7 +15318,7 @@
             </a:pPr>
             <a:r>
               <a:rPr/>
-              <a:t>On the loan data</a:t>
+              <a:t>Classification: the same idea, a different gradient</a:t>
             </a:r>
           </a:p>
         </p:txBody>
@@ -15463,44 +15345,41 @@
           <a:p>
             <a:pPr lvl="0"/>
             <a:r>
-              <a:rPr>
-                <a:latin typeface="Courier"/>
-              </a:rPr>
-              <a:t>GradientBoostingClassifier</a:t>
-            </a:r>
-            <a:r>
-              <a:rPr/>
-              <a:t>, defaults: </a:t>
+              <a:rPr/>
+              <a:t>y is 0 or 1; the score F becomes a probability through lesson 4’s logistic function, p = σ(F) (this σ is not the σ² of the variance slides)</a:t>
+            </a:r>
+          </a:p>
+          <a:p>
+            <a:pPr lvl="0"/>
+            <a:r>
+              <a:rPr/>
+              <a:t>The loss is lesson 4’s </a:t>
             </a:r>
             <a:r>
               <a:rPr b="1"/>
-              <a:t>100 trees</a:t>
-            </a:r>
-            <a:r>
-              <a:rPr/>
-              <a:t>, learning rate α = 0.1</a:t>
+              <a:t>log-loss</a:t>
             </a:r>
           </a:p>
           <a:p>
             <a:pPr lvl="0"/>
             <a:r>
               <a:rPr/>
-              <a:t>Reaches </a:t>
+              <a:t>Each tree fits the </a:t>
             </a:r>
             <a:r>
               <a:rPr b="1"/>
-              <a:t>0.902 ± 0.020</a:t>
-            </a:r>
-            <a:r>
-              <a:rPr/>
-              <a:t> cross-validated accuracy</a:t>
+              <a:t>pseudo-residual</a:t>
+            </a:r>
+            <a:r>
+              <a:rPr/>
+              <a:t> y - p, the negative gradient: lesson 4’s error term</a:t>
             </a:r>
           </a:p>
           <a:p>
             <a:pPr lvl="0"/>
             <a:r>
               <a:rPr/>
-              <a:t>Already ahead of any single tree from earlier in the lesson</a:t>
+              <a:t>Start: p = 0.387 for all, so the first tree fits +0.613 to defaulters and −0.387 to the rest</a:t>
             </a:r>
           </a:p>
         </p:txBody>
@@ -15511,6 +15390,122 @@
 </file>
 
 <file path=ppt/slides/slide46.xml><?xml version="1.0" encoding="utf-8"?>
+<p:sld xmlns:a="http://schemas.openxmlformats.org/drawingml/2006/main" xmlns:r="http://schemas.openxmlformats.org/officeDocument/2006/relationships" xmlns:p="http://schemas.openxmlformats.org/presentationml/2006/main">
+  <p:cSld>
+    <p:spTree>
+      <p:nvGrpSpPr>
+        <p:cNvPr id="1" name=""/>
+        <p:cNvGrpSpPr/>
+        <p:nvPr/>
+      </p:nvGrpSpPr>
+      <p:grpSpPr>
+        <a:xfrm>
+          <a:off x="0" y="0"/>
+          <a:ext cx="0" cy="0"/>
+          <a:chOff x="0" y="0"/>
+          <a:chExt cx="0" cy="0"/>
+        </a:xfrm>
+      </p:grpSpPr>
+      <p:sp>
+        <p:nvSpPr>
+          <p:cNvPr id="2" name="Title 1"/>
+          <p:cNvSpPr>
+            <a:spLocks noGrp="1"/>
+          </p:cNvSpPr>
+          <p:nvPr>
+            <p:ph type="title"/>
+          </p:nvPr>
+        </p:nvSpPr>
+        <p:spPr>
+          <a:xfrm>
+            <a:off x="457200" y="205979"/>
+            <a:ext cx="8229600" cy="857250"/>
+          </a:xfrm>
+        </p:spPr>
+        <p:txBody>
+          <a:bodyPr/>
+          <a:lstStyle/>
+          <a:p>
+            <a:pPr lvl="0" indent="0" marL="0">
+              <a:buNone/>
+            </a:pPr>
+            <a:r>
+              <a:rPr/>
+              <a:t>On the loan data</a:t>
+            </a:r>
+          </a:p>
+        </p:txBody>
+      </p:sp>
+      <p:sp>
+        <p:nvSpPr>
+          <p:cNvPr id="3" name="Content Placeholder 2"/>
+          <p:cNvSpPr>
+            <a:spLocks noGrp="1"/>
+          </p:cNvSpPr>
+          <p:nvPr>
+            <p:ph idx="1"/>
+          </p:nvPr>
+        </p:nvSpPr>
+        <p:spPr>
+          <a:xfrm>
+            <a:off x="457200" y="1200151"/>
+            <a:ext cx="8229600" cy="3394472"/>
+          </a:xfrm>
+        </p:spPr>
+        <p:txBody>
+          <a:bodyPr/>
+          <a:lstStyle/>
+          <a:p>
+            <a:pPr lvl="0"/>
+            <a:r>
+              <a:rPr>
+                <a:latin typeface="Courier"/>
+              </a:rPr>
+              <a:t>GradientBoostingClassifier</a:t>
+            </a:r>
+            <a:r>
+              <a:rPr/>
+              <a:t>, defaults: </a:t>
+            </a:r>
+            <a:r>
+              <a:rPr b="1"/>
+              <a:t>100 trees</a:t>
+            </a:r>
+            <a:r>
+              <a:rPr/>
+              <a:t>, learning rate α = 0.1</a:t>
+            </a:r>
+          </a:p>
+          <a:p>
+            <a:pPr lvl="0"/>
+            <a:r>
+              <a:rPr/>
+              <a:t>Reaches </a:t>
+            </a:r>
+            <a:r>
+              <a:rPr b="1"/>
+              <a:t>0.902 ± 0.020</a:t>
+            </a:r>
+            <a:r>
+              <a:rPr/>
+              <a:t> cross-validated accuracy</a:t>
+            </a:r>
+          </a:p>
+          <a:p>
+            <a:pPr lvl="0"/>
+            <a:r>
+              <a:rPr/>
+              <a:t>Already ahead of any single tree from earlier in the lesson</a:t>
+            </a:r>
+          </a:p>
+        </p:txBody>
+      </p:sp>
+    </p:spTree>
+  </p:cSld>
+</p:sld>
+</file>
+
+<file path=ppt/slides/slide47.xml><?xml version="1.0" encoding="utf-8"?>
 <p:sld xmlns:a="http://schemas.openxmlformats.org/drawingml/2006/main" xmlns:r="http://schemas.openxmlformats.org/officeDocument/2006/relationships" xmlns:p="http://schemas.openxmlformats.org/presentationml/2006/main">
   <p:cSld>
     <p:spTree>
@@ -15976,7 +15971,7 @@
 </p:sld>
 </file>
 
-<file path=ppt/slides/slide47.xml><?xml version="1.0" encoding="utf-8"?>
+<file path=ppt/slides/slide48.xml><?xml version="1.0" encoding="utf-8"?>
 <p:sld xmlns:a="http://schemas.openxmlformats.org/drawingml/2006/main" xmlns:r="http://schemas.openxmlformats.org/officeDocument/2006/relationships" xmlns:p="http://schemas.openxmlformats.org/presentationml/2006/main">
   <p:cSld>
     <p:spTree>
@@ -16058,7 +16053,7 @@
 </p:sld>
 </file>
 
-<file path=ppt/slides/slide48.xml><?xml version="1.0" encoding="utf-8"?>
+<file path=ppt/slides/slide49.xml><?xml version="1.0" encoding="utf-8"?>
 <p:sld xmlns:a="http://schemas.openxmlformats.org/drawingml/2006/main" xmlns:r="http://schemas.openxmlformats.org/officeDocument/2006/relationships" xmlns:p="http://schemas.openxmlformats.org/presentationml/2006/main">
   <p:cSld>
     <p:spTree>
@@ -16410,352 +16405,6 @@
                       <a:r>
                         <a:rPr/>
                         <a:t>0.878 ± 0.020</a:t>
-                      </a:r>
-                    </a:p>
-                  </a:txBody>
-                </a:tc>
-              </a:tr>
-            </a:tbl>
-          </a:graphicData>
-        </a:graphic>
-      </p:graphicFrame>
-    </p:spTree>
-  </p:cSld>
-</p:sld>
-</file>
-
-<file path=ppt/slides/slide49.xml><?xml version="1.0" encoding="utf-8"?>
-<p:sld xmlns:a="http://schemas.openxmlformats.org/drawingml/2006/main" xmlns:r="http://schemas.openxmlformats.org/officeDocument/2006/relationships" xmlns:p="http://schemas.openxmlformats.org/presentationml/2006/main">
-  <p:cSld>
-    <p:spTree>
-      <p:nvGrpSpPr>
-        <p:cNvPr id="1" name=""/>
-        <p:cNvGrpSpPr/>
-        <p:nvPr/>
-      </p:nvGrpSpPr>
-      <p:grpSpPr>
-        <a:xfrm>
-          <a:off x="0" y="0"/>
-          <a:ext cx="0" cy="0"/>
-          <a:chOff x="0" y="0"/>
-          <a:chExt cx="0" cy="0"/>
-        </a:xfrm>
-      </p:grpSpPr>
-      <p:sp>
-        <p:nvSpPr>
-          <p:cNvPr id="2" name="Title 1"/>
-          <p:cNvSpPr>
-            <a:spLocks noGrp="1"/>
-          </p:cNvSpPr>
-          <p:nvPr>
-            <p:ph type="title"/>
-          </p:nvPr>
-        </p:nvSpPr>
-        <p:spPr>
-          <a:xfrm>
-            <a:off x="457200" y="205979"/>
-            <a:ext cx="8229600" cy="857250"/>
-          </a:xfrm>
-        </p:spPr>
-        <p:txBody>
-          <a:bodyPr/>
-          <a:lstStyle/>
-          <a:p>
-            <a:pPr lvl="0" indent="0" marL="0">
-              <a:buNone/>
-            </a:pPr>
-            <a:r>
-              <a:rPr/>
-              <a:t>Notebook 3, live</a:t>
-            </a:r>
-          </a:p>
-        </p:txBody>
-      </p:sp>
-      <p:graphicFrame>
-        <p:nvGraphicFramePr>
-          <p:cNvPr id="6" name="Content Placeholder 5"/>
-          <p:cNvGraphicFramePr>
-            <a:graphicFrameLocks noGrp="1"/>
-          </p:cNvGraphicFramePr>
-          <p:nvPr>
-            <p:ph idx="1"/>
-          </p:nvPr>
-        </p:nvGraphicFramePr>
-        <p:xfrm>
-          <a:off x="457200" y="1166099"/>
-          <a:ext cx="8229600" cy="3390900"/>
-        </p:xfrm>
-        <a:graphic>
-          <a:graphicData uri="http://schemas.openxmlformats.org/drawingml/2006/table">
-            <a:tbl>
-              <a:tblPr firstRow="1" bandRow="1">
-                <a:tableStyleId>{5C22544A-7EE6-4342-B048-85BDC9FD1C3A}</a:tableStyleId>
-              </a:tblPr>
-              <a:tblGrid>
-                <a:gridCol w="4114800"/>
-                <a:gridCol w="4114800"/>
-              </a:tblGrid>
-              <a:tr h="0">
-                <a:tc>
-                  <a:txBody>
-                    <a:bodyPr/>
-                    <a:lstStyle/>
-                    <a:p>
-                      <a:pPr lvl="0" indent="0" marL="0">
-                        <a:buNone/>
-                      </a:pPr>
-                      <a:r>
-                        <a:rPr/>
-                        <a:t>section, and its slides</a:t>
-                      </a:r>
-                    </a:p>
-                  </a:txBody>
-                  <a:tcPr/>
-                </a:tc>
-                <a:tc>
-                  <a:txBody>
-                    <a:bodyPr/>
-                    <a:lstStyle/>
-                    <a:p>
-                      <a:pPr lvl="0" indent="0" marL="0">
-                        <a:buNone/>
-                      </a:pPr>
-                      <a:r>
-                        <a:rPr/>
-                        <a:t>you call (→ the number to come back with)</a:t>
-                      </a:r>
-                    </a:p>
-                  </a:txBody>
-                  <a:tcPr/>
-                </a:tc>
-              </a:tr>
-              <a:tr h="0">
-                <a:tc>
-                  <a:txBody>
-                    <a:bodyPr/>
-                    <a:lstStyle/>
-                    <a:p>
-                      <a:pPr lvl="0" indent="0" marL="0">
-                        <a:buNone/>
-                      </a:pPr>
-                      <a:r>
-                        <a:rPr/>
-                        <a:t>1. boosting from scratch, 39-43</a:t>
-                      </a:r>
-                    </a:p>
-                  </a:txBody>
-                </a:tc>
-                <a:tc>
-                  <a:txBody>
-                    <a:bodyPr/>
-                    <a:lstStyle/>
-                    <a:p>
-                      <a:pPr lvl="0" indent="0" marL="0">
-                        <a:buNone/>
-                      </a:pPr>
-                      <a:r>
-                        <a:rPr>
-                          <a:latin typeface="Courier"/>
-                        </a:rPr>
-                        <a:t>DecisionTreeRegressor(max_depth=2)</a:t>
-                      </a:r>
-                      <a:r>
-                        <a:rPr/>
-                        <a:t> on the residuals, 60 times → MSE 0.0119 at 20 trees</a:t>
-                      </a:r>
-                    </a:p>
-                  </a:txBody>
-                </a:tc>
-              </a:tr>
-              <a:tr h="0">
-                <a:tc>
-                  <a:txBody>
-                    <a:bodyPr/>
-                    <a:lstStyle/>
-                    <a:p>
-                      <a:pPr lvl="0" indent="0" marL="0">
-                        <a:buNone/>
-                      </a:pPr>
-                      <a:r>
-                        <a:rPr/>
-                        <a:t>2. classification, 44-45</a:t>
-                      </a:r>
-                    </a:p>
-                  </a:txBody>
-                </a:tc>
-                <a:tc>
-                  <a:txBody>
-                    <a:bodyPr/>
-                    <a:lstStyle/>
-                    <a:p>
-                      <a:pPr lvl="0" indent="0" marL="0">
-                        <a:buNone/>
-                      </a:pPr>
-                      <a:r>
-                        <a:rPr>
-                          <a:latin typeface="Courier"/>
-                        </a:rPr>
-                        <a:t>GradientBoostingClassifier()</a:t>
-                      </a:r>
-                      <a:r>
-                        <a:rPr/>
-                        <a:t> in </a:t>
-                      </a:r>
-                      <a:r>
-                        <a:rPr>
-                          <a:latin typeface="Courier"/>
-                        </a:rPr>
-                        <a:t>cross_val_score</a:t>
-                      </a:r>
-                      <a:r>
-                        <a:rPr/>
-                        <a:t> → F0 = −0.461; 0.902</a:t>
-                      </a:r>
-                    </a:p>
-                  </a:txBody>
-                </a:tc>
-              </a:tr>
-              <a:tr h="0">
-                <a:tc>
-                  <a:txBody>
-                    <a:bodyPr/>
-                    <a:lstStyle/>
-                    <a:p>
-                      <a:pPr lvl="0" indent="0" marL="0">
-                        <a:buNone/>
-                      </a:pPr>
-                      <a:r>
-                        <a:rPr/>
-                        <a:t>3. more trees, 46-47</a:t>
-                      </a:r>
-                    </a:p>
-                  </a:txBody>
-                </a:tc>
-                <a:tc>
-                  <a:txBody>
-                    <a:bodyPr/>
-                    <a:lstStyle/>
-                    <a:p>
-                      <a:pPr lvl="0" indent="0" marL="0">
-                        <a:buNone/>
-                      </a:pPr>
-                      <a:r>
-                        <a:rPr/>
-                        <a:t>the same, </a:t>
-                      </a:r>
-                      <a:r>
-                        <a:rPr>
-                          <a:latin typeface="Courier"/>
-                        </a:rPr>
-                        <a:t>learning_rate=0.3</a:t>
-                      </a:r>
-                      <a:r>
-                        <a:rPr/>
-                        <a:t>, </a:t>
-                      </a:r>
-                      <a:r>
-                        <a:rPr>
-                          <a:latin typeface="Courier"/>
-                        </a:rPr>
-                        <a:t>n_estimators</a:t>
-                      </a:r>
-                      <a:r>
-                        <a:rPr/>
-                        <a:t> from 5 to 800 → peak 0.897 at 30</a:t>
-                      </a:r>
-                    </a:p>
-                  </a:txBody>
-                </a:tc>
-              </a:tr>
-              <a:tr h="0">
-                <a:tc>
-                  <a:txBody>
-                    <a:bodyPr/>
-                    <a:lstStyle/>
-                    <a:p>
-                      <a:pPr lvl="0" indent="0" marL="0">
-                        <a:buNone/>
-                      </a:pPr>
-                      <a:r>
-                        <a:rPr/>
-                        <a:t>4. learning rate, 48</a:t>
-                      </a:r>
-                    </a:p>
-                  </a:txBody>
-                </a:tc>
-                <a:tc>
-                  <a:txBody>
-                    <a:bodyPr/>
-                    <a:lstStyle/>
-                    <a:p>
-                      <a:pPr lvl="0" indent="0" marL="0">
-                        <a:buNone/>
-                      </a:pPr>
-                      <a:r>
-                        <a:rPr/>
-                        <a:t>the same with </a:t>
-                      </a:r>
-                      <a:r>
-                        <a:rPr>
-                          <a:latin typeface="Courier"/>
-                        </a:rPr>
-                        <a:t>n_estimators=120</a:t>
-                      </a:r>
-                      <a:r>
-                        <a:rPr/>
-                        <a:t> and </a:t>
-                      </a:r>
-                      <a:r>
-                        <a:rPr>
-                          <a:latin typeface="Courier"/>
-                        </a:rPr>
-                        <a:t>learning_rate</a:t>
-                      </a:r>
-                      <a:r>
-                        <a:rPr/>
-                        <a:t> from 0.02 to 1.0 → best 0.902 at 0.1</a:t>
-                      </a:r>
-                    </a:p>
-                  </a:txBody>
-                </a:tc>
-              </a:tr>
-              <a:tr h="0">
-                <a:tc>
-                  <a:txBody>
-                    <a:bodyPr/>
-                    <a:lstStyle/>
-                    <a:p>
-                      <a:pPr lvl="0" indent="0" marL="0">
-                        <a:buNone/>
-                      </a:pPr>
-                      <a:r>
-                        <a:rPr/>
-                        <a:t>5. leaderboard, 50</a:t>
-                      </a:r>
-                    </a:p>
-                  </a:txBody>
-                </a:tc>
-                <a:tc>
-                  <a:txBody>
-                    <a:bodyPr/>
-                    <a:lstStyle/>
-                    <a:p>
-                      <a:pPr lvl="0" indent="0" marL="0">
-                        <a:buNone/>
-                      </a:pPr>
-                      <a:r>
-                        <a:rPr/>
-                        <a:t>every model in one </a:t>
-                      </a:r>
-                      <a:r>
-                        <a:rPr>
-                          <a:latin typeface="Courier"/>
-                        </a:rPr>
-                        <a:t>cross_val_score</a:t>
-                      </a:r>
-                      <a:r>
-                        <a:rPr/>
-                        <a:t> loop → random forest 0.911</a:t>
                       </a:r>
                     </a:p>
                   </a:txBody>
@@ -16894,7 +16543,7 @@
             </a:pPr>
             <a:r>
               <a:rPr/>
-              <a:t>Every method, on the same five folds</a:t>
+              <a:t>Notebook 3, live</a:t>
             </a:r>
           </a:p>
         </p:txBody>
@@ -16934,7 +16583,7 @@
                       </a:pPr>
                       <a:r>
                         <a:rPr/>
-                        <a:t>Model</a:t>
+                        <a:t>section, and its slides</a:t>
                       </a:r>
                     </a:p>
                   </a:txBody>
@@ -16950,7 +16599,7 @@
                       </a:pPr>
                       <a:r>
                         <a:rPr/>
-                        <a:t>Cross-validated accuracy</a:t>
+                        <a:t>you call (→ the number to come back with)</a:t>
                       </a:r>
                     </a:p>
                   </a:txBody>
@@ -16968,7 +16617,7 @@
                       </a:pPr>
                       <a:r>
                         <a:rPr/>
-                        <a:t>Majority baseline</a:t>
+                        <a:t>1. boosting from scratch, 40-44</a:t>
                       </a:r>
                     </a:p>
                   </a:txBody>
@@ -16982,8 +16631,14 @@
                         <a:buNone/>
                       </a:pPr>
                       <a:r>
+                        <a:rPr>
+                          <a:latin typeface="Courier"/>
+                        </a:rPr>
+                        <a:t>DecisionTreeRegressor(max_depth=2)</a:t>
+                      </a:r>
+                      <a:r>
                         <a:rPr/>
-                        <a:t>0.613</a:t>
+                        <a:t> on the residuals, 60 times → MSE 0.0119 at 20 trees</a:t>
                       </a:r>
                     </a:p>
                   </a:txBody>
@@ -17000,7 +16655,7 @@
                       </a:pPr>
                       <a:r>
                         <a:rPr/>
-                        <a:t>Logistic regression</a:t>
+                        <a:t>2. classification, 45-46</a:t>
                       </a:r>
                     </a:p>
                   </a:txBody>
@@ -17014,8 +16669,24 @@
                         <a:buNone/>
                       </a:pPr>
                       <a:r>
+                        <a:rPr>
+                          <a:latin typeface="Courier"/>
+                        </a:rPr>
+                        <a:t>GradientBoostingClassifier()</a:t>
+                      </a:r>
+                      <a:r>
                         <a:rPr/>
-                        <a:t>0.748</a:t>
+                        <a:t> in </a:t>
+                      </a:r>
+                      <a:r>
+                        <a:rPr>
+                          <a:latin typeface="Courier"/>
+                        </a:rPr>
+                        <a:t>cross_val_score</a:t>
+                      </a:r>
+                      <a:r>
+                        <a:rPr/>
+                        <a:t> → F0 = −0.461; 0.902</a:t>
                       </a:r>
                     </a:p>
                   </a:txBody>
@@ -17032,7 +16703,7 @@
                       </a:pPr>
                       <a:r>
                         <a:rPr/>
-                        <a:t>Single tree, unconstrained</a:t>
+                        <a:t>3. more trees, 47-48</a:t>
                       </a:r>
                     </a:p>
                   </a:txBody>
@@ -17047,7 +16718,27 @@
                       </a:pPr>
                       <a:r>
                         <a:rPr/>
-                        <a:t>0.852</a:t>
+                        <a:t>the same, </a:t>
+                      </a:r>
+                      <a:r>
+                        <a:rPr>
+                          <a:latin typeface="Courier"/>
+                        </a:rPr>
+                        <a:t>learning_rate=0.3</a:t>
+                      </a:r>
+                      <a:r>
+                        <a:rPr/>
+                        <a:t>, </a:t>
+                      </a:r>
+                      <a:r>
+                        <a:rPr>
+                          <a:latin typeface="Courier"/>
+                        </a:rPr>
+                        <a:t>n_estimators</a:t>
+                      </a:r>
+                      <a:r>
+                        <a:rPr/>
+                        <a:t> from 5 to 800 → peak 0.897 at 30</a:t>
                       </a:r>
                     </a:p>
                   </a:txBody>
@@ -17064,13 +16755,7 @@
                       </a:pPr>
                       <a:r>
                         <a:rPr/>
-                        <a:t>Single tree, </a:t>
-                      </a:r>
-                      <a:r>
-                        <a:rPr>
-                          <a:latin typeface="Courier"/>
-                        </a:rPr>
-                        <a:t>max_depth = 8</a:t>
+                        <a:t>4. learning rate, 49</a:t>
                       </a:r>
                     </a:p>
                   </a:txBody>
@@ -17085,7 +16770,27 @@
                       </a:pPr>
                       <a:r>
                         <a:rPr/>
-                        <a:t>0.882</a:t>
+                        <a:t>the same with </a:t>
+                      </a:r>
+                      <a:r>
+                        <a:rPr>
+                          <a:latin typeface="Courier"/>
+                        </a:rPr>
+                        <a:t>n_estimators=120</a:t>
+                      </a:r>
+                      <a:r>
+                        <a:rPr/>
+                        <a:t> and </a:t>
+                      </a:r>
+                      <a:r>
+                        <a:rPr>
+                          <a:latin typeface="Courier"/>
+                        </a:rPr>
+                        <a:t>learning_rate</a:t>
+                      </a:r>
+                      <a:r>
+                        <a:rPr/>
+                        <a:t> from 0.02 to 1.0 → best 0.902 at 0.1</a:t>
                       </a:r>
                     </a:p>
                   </a:txBody>
@@ -17102,7 +16807,7 @@
                       </a:pPr>
                       <a:r>
                         <a:rPr/>
-                        <a:t>Gradient boosting, 30 trees</a:t>
+                        <a:t>5. leaderboard, 51</a:t>
                       </a:r>
                     </a:p>
                   </a:txBody>
@@ -17117,103 +16822,17 @@
                       </a:pPr>
                       <a:r>
                         <a:rPr/>
-                        <a:t>0.897</a:t>
-                      </a:r>
-                    </a:p>
-                  </a:txBody>
-                </a:tc>
-              </a:tr>
-              <a:tr h="0">
-                <a:tc>
-                  <a:txBody>
-                    <a:bodyPr/>
-                    <a:lstStyle/>
-                    <a:p>
-                      <a:pPr lvl="0" indent="0" marL="0">
-                        <a:buNone/>
-                      </a:pPr>
+                        <a:t>every model in one </a:t>
+                      </a:r>
+                      <a:r>
+                        <a:rPr>
+                          <a:latin typeface="Courier"/>
+                        </a:rPr>
+                        <a:t>cross_val_score</a:t>
+                      </a:r>
                       <a:r>
                         <a:rPr/>
-                        <a:t>Bagging, 100 trees</a:t>
-                      </a:r>
-                    </a:p>
-                  </a:txBody>
-                </a:tc>
-                <a:tc>
-                  <a:txBody>
-                    <a:bodyPr/>
-                    <a:lstStyle/>
-                    <a:p>
-                      <a:pPr lvl="0" indent="0" marL="0">
-                        <a:buNone/>
-                      </a:pPr>
-                      <a:r>
-                        <a:rPr/>
-                        <a:t>0.904</a:t>
-                      </a:r>
-                    </a:p>
-                  </a:txBody>
-                </a:tc>
-              </a:tr>
-              <a:tr h="0">
-                <a:tc>
-                  <a:txBody>
-                    <a:bodyPr/>
-                    <a:lstStyle/>
-                    <a:p>
-                      <a:pPr lvl="0" indent="0" marL="0">
-                        <a:buNone/>
-                      </a:pPr>
-                      <a:r>
-                        <a:rPr b="1"/>
-                        <a:t>Random forest, 100 trees</a:t>
-                      </a:r>
-                    </a:p>
-                  </a:txBody>
-                </a:tc>
-                <a:tc>
-                  <a:txBody>
-                    <a:bodyPr/>
-                    <a:lstStyle/>
-                    <a:p>
-                      <a:pPr lvl="0" indent="0" marL="0">
-                        <a:buNone/>
-                      </a:pPr>
-                      <a:r>
-                        <a:rPr b="1"/>
-                        <a:t>0.911</a:t>
-                      </a:r>
-                    </a:p>
-                  </a:txBody>
-                </a:tc>
-              </a:tr>
-              <a:tr h="0">
-                <a:tc>
-                  <a:txBody>
-                    <a:bodyPr/>
-                    <a:lstStyle/>
-                    <a:p>
-                      <a:pPr lvl="0" indent="0" marL="0">
-                        <a:buNone/>
-                      </a:pPr>
-                      <a:r>
-                        <a:rPr i="1"/>
-                        <a:t>noise ceiling</a:t>
-                      </a:r>
-                    </a:p>
-                  </a:txBody>
-                </a:tc>
-                <a:tc>
-                  <a:txBody>
-                    <a:bodyPr/>
-                    <a:lstStyle/>
-                    <a:p>
-                      <a:pPr lvl="0" indent="0" marL="0">
-                        <a:buNone/>
-                      </a:pPr>
-                      <a:r>
-                        <a:rPr i="1"/>
-                        <a:t>≈ 0.93</a:t>
+                        <a:t> loop → random forest 0.911</a:t>
                       </a:r>
                     </a:p>
                   </a:txBody>
@@ -17270,121 +16889,7 @@
             </a:pPr>
             <a:r>
               <a:rPr/>
-              <a:t>Three findings</a:t>
-            </a:r>
-          </a:p>
-        </p:txBody>
-      </p:sp>
-      <p:sp>
-        <p:nvSpPr>
-          <p:cNvPr id="3" name="Content Placeholder 2"/>
-          <p:cNvSpPr>
-            <a:spLocks noGrp="1"/>
-          </p:cNvSpPr>
-          <p:nvPr>
-            <p:ph idx="1"/>
-          </p:nvPr>
-        </p:nvSpPr>
-        <p:spPr>
-          <a:xfrm>
-            <a:off x="457200" y="1200151"/>
-            <a:ext cx="8229600" cy="3394472"/>
-          </a:xfrm>
-        </p:spPr>
-        <p:txBody>
-          <a:bodyPr/>
-          <a:lstStyle/>
-          <a:p>
-            <a:pPr lvl="0"/>
-            <a:r>
-              <a:rPr/>
-              <a:t>Every ensemble lands within a point and a half of the others: </a:t>
-            </a:r>
-            <a:r>
-              <a:rPr b="1"/>
-              <a:t>which strategy</a:t>
-            </a:r>
-            <a:r>
-              <a:rPr/>
-              <a:t> matters far less than </a:t>
-            </a:r>
-            <a:r>
-              <a:rPr b="1"/>
-              <a:t>whether you ensemble at all</a:t>
-            </a:r>
-          </a:p>
-          <a:p>
-            <a:pPr lvl="0"/>
-            <a:r>
-              <a:rPr/>
-              <a:t>The tuned single tree is close behind, 0.882 against 0.911, and the only model here a person can read</a:t>
-            </a:r>
-          </a:p>
-          <a:p>
-            <a:pPr lvl="0"/>
-            <a:r>
-              <a:rPr/>
-              <a:t>The </a:t>
-            </a:r>
-            <a:r>
-              <a:rPr b="1"/>
-              <a:t>unconstrained tree is the worst model on the list</a:t>
-            </a:r>
-            <a:r>
-              <a:rPr/>
-              <a:t>, despite being the most flexible one</a:t>
-            </a:r>
-          </a:p>
-        </p:txBody>
-      </p:sp>
-    </p:spTree>
-  </p:cSld>
-</p:sld>
-</file>
-
-<file path=ppt/slides/slide52.xml><?xml version="1.0" encoding="utf-8"?>
-<p:sld xmlns:a="http://schemas.openxmlformats.org/drawingml/2006/main" xmlns:r="http://schemas.openxmlformats.org/officeDocument/2006/relationships" xmlns:p="http://schemas.openxmlformats.org/presentationml/2006/main">
-  <p:cSld>
-    <p:spTree>
-      <p:nvGrpSpPr>
-        <p:cNvPr id="1" name=""/>
-        <p:cNvGrpSpPr/>
-        <p:nvPr/>
-      </p:nvGrpSpPr>
-      <p:grpSpPr>
-        <a:xfrm>
-          <a:off x="0" y="0"/>
-          <a:ext cx="0" cy="0"/>
-          <a:chOff x="0" y="0"/>
-          <a:chExt cx="0" cy="0"/>
-        </a:xfrm>
-      </p:grpSpPr>
-      <p:sp>
-        <p:nvSpPr>
-          <p:cNvPr id="2" name="Title 1"/>
-          <p:cNvSpPr>
-            <a:spLocks noGrp="1"/>
-          </p:cNvSpPr>
-          <p:nvPr>
-            <p:ph type="title"/>
-          </p:nvPr>
-        </p:nvSpPr>
-        <p:spPr>
-          <a:xfrm>
-            <a:off x="457200" y="205979"/>
-            <a:ext cx="8229600" cy="857250"/>
-          </a:xfrm>
-        </p:spPr>
-        <p:txBody>
-          <a:bodyPr/>
-          <a:lstStyle/>
-          <a:p>
-            <a:pPr lvl="0" indent="0" marL="0">
-              <a:buNone/>
-            </a:pPr>
-            <a:r>
-              <a:rPr/>
-              <a:t>How to choose, in practice</a:t>
+              <a:t>Every method, on the same five folds</a:t>
             </a:r>
           </a:p>
         </p:txBody>
@@ -17424,7 +16929,7 @@
                       </a:pPr>
                       <a:r>
                         <a:rPr/>
-                        <a:t>Situation</a:t>
+                        <a:t>Model</a:t>
                       </a:r>
                     </a:p>
                   </a:txBody>
@@ -17440,7 +16945,7 @@
                       </a:pPr>
                       <a:r>
                         <a:rPr/>
-                        <a:t>Reach for</a:t>
+                        <a:t>Cross-validated accuracy</a:t>
                       </a:r>
                     </a:p>
                   </a:txBody>
@@ -17458,7 +16963,7 @@
                       </a:pPr>
                       <a:r>
                         <a:rPr/>
-                        <a:t>The decision must be explained to the person it affects</a:t>
+                        <a:t>Majority baseline</a:t>
                       </a:r>
                     </a:p>
                   </a:txBody>
@@ -17473,7 +16978,7 @@
                       </a:pPr>
                       <a:r>
                         <a:rPr/>
-                        <a:t>A single tree, small enough to read; if even that is too opaque, none of these models</a:t>
+                        <a:t>0.613</a:t>
                       </a:r>
                     </a:p>
                   </a:txBody>
@@ -17490,7 +16995,7 @@
                       </a:pPr>
                       <a:r>
                         <a:rPr/>
-                        <a:t>Tabular data, accuracy matters most, no explanation required</a:t>
+                        <a:t>Logistic regression</a:t>
                       </a:r>
                     </a:p>
                   </a:txBody>
@@ -17505,7 +17010,7 @@
                       </a:pPr>
                       <a:r>
                         <a:rPr/>
-                        <a:t>A random forest: the best score here, at its default settings</a:t>
+                        <a:t>0.748</a:t>
                       </a:r>
                     </a:p>
                   </a:txBody>
@@ -17522,7 +17027,7 @@
                       </a:pPr>
                       <a:r>
                         <a:rPr/>
-                        <a:t>Accuracy matters, and there is time to tune the number of trees and the learning rate together</a:t>
+                        <a:t>Single tree, unconstrained</a:t>
                       </a:r>
                     </a:p>
                   </a:txBody>
@@ -17537,7 +17042,7 @@
                       </a:pPr>
                       <a:r>
                         <a:rPr/>
-                        <a:t>Gradient boosting, tuned on validation data</a:t>
+                        <a:t>0.852</a:t>
                       </a:r>
                     </a:p>
                   </a:txBody>
@@ -17554,7 +17059,13 @@
                       </a:pPr>
                       <a:r>
                         <a:rPr/>
-                        <a:t>Many columns, few of them informative</a:t>
+                        <a:t>Single tree, </a:t>
+                      </a:r>
+                      <a:r>
+                        <a:rPr>
+                          <a:latin typeface="Courier"/>
+                        </a:rPr>
+                        <a:t>max_depth = 8</a:t>
                       </a:r>
                     </a:p>
                   </a:txBody>
@@ -17569,7 +17080,7 @@
                       </a:pPr>
                       <a:r>
                         <a:rPr/>
-                        <a:t>Any tree method, but check its importances by permutation</a:t>
+                        <a:t>0.882</a:t>
                       </a:r>
                     </a:p>
                   </a:txBody>
@@ -17586,7 +17097,7 @@
                       </a:pPr>
                       <a:r>
                         <a:rPr/>
-                        <a:t>Too few rows to set a validation set aside</a:t>
+                        <a:t>Gradient boosting, 30 trees</a:t>
                       </a:r>
                     </a:p>
                   </a:txBody>
@@ -17601,7 +17112,103 @@
                       </a:pPr>
                       <a:r>
                         <a:rPr/>
-                        <a:t>A random forest, judged by its out-of-bag score</a:t>
+                        <a:t>0.897</a:t>
+                      </a:r>
+                    </a:p>
+                  </a:txBody>
+                </a:tc>
+              </a:tr>
+              <a:tr h="0">
+                <a:tc>
+                  <a:txBody>
+                    <a:bodyPr/>
+                    <a:lstStyle/>
+                    <a:p>
+                      <a:pPr lvl="0" indent="0" marL="0">
+                        <a:buNone/>
+                      </a:pPr>
+                      <a:r>
+                        <a:rPr/>
+                        <a:t>Bagging, 100 trees</a:t>
+                      </a:r>
+                    </a:p>
+                  </a:txBody>
+                </a:tc>
+                <a:tc>
+                  <a:txBody>
+                    <a:bodyPr/>
+                    <a:lstStyle/>
+                    <a:p>
+                      <a:pPr lvl="0" indent="0" marL="0">
+                        <a:buNone/>
+                      </a:pPr>
+                      <a:r>
+                        <a:rPr/>
+                        <a:t>0.904</a:t>
+                      </a:r>
+                    </a:p>
+                  </a:txBody>
+                </a:tc>
+              </a:tr>
+              <a:tr h="0">
+                <a:tc>
+                  <a:txBody>
+                    <a:bodyPr/>
+                    <a:lstStyle/>
+                    <a:p>
+                      <a:pPr lvl="0" indent="0" marL="0">
+                        <a:buNone/>
+                      </a:pPr>
+                      <a:r>
+                        <a:rPr b="1"/>
+                        <a:t>Random forest, 100 trees</a:t>
+                      </a:r>
+                    </a:p>
+                  </a:txBody>
+                </a:tc>
+                <a:tc>
+                  <a:txBody>
+                    <a:bodyPr/>
+                    <a:lstStyle/>
+                    <a:p>
+                      <a:pPr lvl="0" indent="0" marL="0">
+                        <a:buNone/>
+                      </a:pPr>
+                      <a:r>
+                        <a:rPr b="1"/>
+                        <a:t>0.911</a:t>
+                      </a:r>
+                    </a:p>
+                  </a:txBody>
+                </a:tc>
+              </a:tr>
+              <a:tr h="0">
+                <a:tc>
+                  <a:txBody>
+                    <a:bodyPr/>
+                    <a:lstStyle/>
+                    <a:p>
+                      <a:pPr lvl="0" indent="0" marL="0">
+                        <a:buNone/>
+                      </a:pPr>
+                      <a:r>
+                        <a:rPr i="1"/>
+                        <a:t>noise ceiling</a:t>
+                      </a:r>
+                    </a:p>
+                  </a:txBody>
+                </a:tc>
+                <a:tc>
+                  <a:txBody>
+                    <a:bodyPr/>
+                    <a:lstStyle/>
+                    <a:p>
+                      <a:pPr lvl="0" indent="0" marL="0">
+                        <a:buNone/>
+                      </a:pPr>
+                      <a:r>
+                        <a:rPr i="1"/>
+                        <a:t>≈ 0.93</a:t>
                       </a:r>
                     </a:p>
                   </a:txBody>
@@ -17611,6 +17218,124 @@
           </a:graphicData>
         </a:graphic>
       </p:graphicFrame>
+    </p:spTree>
+  </p:cSld>
+</p:sld>
+</file>
+
+<file path=ppt/slides/slide52.xml><?xml version="1.0" encoding="utf-8"?>
+<p:sld xmlns:a="http://schemas.openxmlformats.org/drawingml/2006/main" xmlns:r="http://schemas.openxmlformats.org/officeDocument/2006/relationships" xmlns:p="http://schemas.openxmlformats.org/presentationml/2006/main">
+  <p:cSld>
+    <p:spTree>
+      <p:nvGrpSpPr>
+        <p:cNvPr id="1" name=""/>
+        <p:cNvGrpSpPr/>
+        <p:nvPr/>
+      </p:nvGrpSpPr>
+      <p:grpSpPr>
+        <a:xfrm>
+          <a:off x="0" y="0"/>
+          <a:ext cx="0" cy="0"/>
+          <a:chOff x="0" y="0"/>
+          <a:chExt cx="0" cy="0"/>
+        </a:xfrm>
+      </p:grpSpPr>
+      <p:sp>
+        <p:nvSpPr>
+          <p:cNvPr id="2" name="Title 1"/>
+          <p:cNvSpPr>
+            <a:spLocks noGrp="1"/>
+          </p:cNvSpPr>
+          <p:nvPr>
+            <p:ph type="title"/>
+          </p:nvPr>
+        </p:nvSpPr>
+        <p:spPr>
+          <a:xfrm>
+            <a:off x="457200" y="205979"/>
+            <a:ext cx="8229600" cy="857250"/>
+          </a:xfrm>
+        </p:spPr>
+        <p:txBody>
+          <a:bodyPr/>
+          <a:lstStyle/>
+          <a:p>
+            <a:pPr lvl="0" indent="0" marL="0">
+              <a:buNone/>
+            </a:pPr>
+            <a:r>
+              <a:rPr/>
+              <a:t>Three findings</a:t>
+            </a:r>
+          </a:p>
+        </p:txBody>
+      </p:sp>
+      <p:sp>
+        <p:nvSpPr>
+          <p:cNvPr id="3" name="Content Placeholder 2"/>
+          <p:cNvSpPr>
+            <a:spLocks noGrp="1"/>
+          </p:cNvSpPr>
+          <p:nvPr>
+            <p:ph idx="1"/>
+          </p:nvPr>
+        </p:nvSpPr>
+        <p:spPr>
+          <a:xfrm>
+            <a:off x="457200" y="1200151"/>
+            <a:ext cx="8229600" cy="3394472"/>
+          </a:xfrm>
+        </p:spPr>
+        <p:txBody>
+          <a:bodyPr/>
+          <a:lstStyle/>
+          <a:p>
+            <a:pPr lvl="0"/>
+            <a:r>
+              <a:rPr b="1"/>
+              <a:t>On this dataset</a:t>
+            </a:r>
+            <a:r>
+              <a:rPr/>
+              <a:t>, the ensembles land within 1.5 points of each other: </a:t>
+            </a:r>
+            <a:r>
+              <a:rPr b="1"/>
+              <a:t>whether you ensemble</a:t>
+            </a:r>
+            <a:r>
+              <a:rPr/>
+              <a:t> matters more than </a:t>
+            </a:r>
+            <a:r>
+              <a:rPr b="1"/>
+              <a:t>which</a:t>
+            </a:r>
+          </a:p>
+          <a:p>
+            <a:pPr lvl="0"/>
+            <a:r>
+              <a:rPr/>
+              <a:t>The tuned single tree is close behind, 0.882 against 0.911, and the only model here a person can read</a:t>
+            </a:r>
+          </a:p>
+          <a:p>
+            <a:pPr lvl="0"/>
+            <a:r>
+              <a:rPr/>
+              <a:t>The </a:t>
+            </a:r>
+            <a:r>
+              <a:rPr b="1"/>
+              <a:t>unconstrained tree is the worst</a:t>
+            </a:r>
+            <a:r>
+              <a:rPr/>
+              <a:t>, though the most flexible</a:t>
+            </a:r>
+          </a:p>
+        </p:txBody>
+      </p:sp>
     </p:spTree>
   </p:cSld>
 </p:sld>
@@ -17658,76 +17383,233 @@
             </a:pPr>
             <a:r>
               <a:rPr/>
-              <a:t>54% of the importance landed on noise</a:t>
-            </a:r>
-          </a:p>
-        </p:txBody>
-      </p:sp>
-      <p:sp>
-        <p:nvSpPr>
-          <p:cNvPr id="3" name="Content Placeholder 2"/>
-          <p:cNvSpPr>
-            <a:spLocks noGrp="1"/>
-          </p:cNvSpPr>
+              <a:t>How to choose, in practice</a:t>
+            </a:r>
+          </a:p>
+        </p:txBody>
+      </p:sp>
+      <p:graphicFrame>
+        <p:nvGraphicFramePr>
+          <p:cNvPr id="6" name="Content Placeholder 5"/>
+          <p:cNvGraphicFramePr>
+            <a:graphicFrameLocks noGrp="1"/>
+          </p:cNvGraphicFramePr>
           <p:nvPr>
             <p:ph idx="1"/>
           </p:nvPr>
-        </p:nvSpPr>
-        <p:spPr>
-          <a:xfrm>
-            <a:off x="457200" y="1200151"/>
-            <a:ext cx="8229600" cy="3394472"/>
-          </a:xfrm>
-        </p:spPr>
-        <p:txBody>
-          <a:bodyPr/>
-          <a:lstStyle/>
-          <a:p>
-            <a:pPr lvl="0"/>
-            <a:r>
-              <a:rPr/>
-              <a:t>20 noise columns, 2 real features: not a small effect, not a bug</a:t>
-            </a:r>
-          </a:p>
-          <a:p>
-            <a:pPr lvl="0"/>
-            <a:r>
-              <a:rPr/>
-              <a:t>Each split is offered 4 of the 22 columns: in two splits of three (0.662), neither real feature</a:t>
-            </a:r>
-          </a:p>
-          <a:p>
-            <a:pPr lvl="0"/>
-            <a:r>
-              <a:rPr/>
-              <a:t>Averaging shrinks the </a:t>
-            </a:r>
-            <a:r>
-              <a:rPr b="1"/>
-              <a:t>prediction’s variance</a:t>
-            </a:r>
-            <a:r>
-              <a:rPr/>
-              <a:t>, not the credit given to noise</a:t>
-            </a:r>
-          </a:p>
-          <a:p>
-            <a:pPr lvl="0"/>
-            <a:r>
-              <a:rPr/>
-              <a:t>Check: </a:t>
-            </a:r>
-            <a:r>
-              <a:rPr b="1"/>
-              <a:t>permutation importance</a:t>
-            </a:r>
-            <a:r>
-              <a:rPr/>
-              <a:t>, the accuracy lost when a held-out column is shuffled</a:t>
-            </a:r>
-          </a:p>
-        </p:txBody>
-      </p:sp>
+        </p:nvGraphicFramePr>
+        <p:xfrm>
+          <a:off x="457200" y="1166099"/>
+          <a:ext cx="8229600" cy="3390900"/>
+        </p:xfrm>
+        <a:graphic>
+          <a:graphicData uri="http://schemas.openxmlformats.org/drawingml/2006/table">
+            <a:tbl>
+              <a:tblPr firstRow="1" bandRow="1">
+                <a:tableStyleId>{5C22544A-7EE6-4342-B048-85BDC9FD1C3A}</a:tableStyleId>
+              </a:tblPr>
+              <a:tblGrid>
+                <a:gridCol w="4114800"/>
+                <a:gridCol w="4114800"/>
+              </a:tblGrid>
+              <a:tr h="0">
+                <a:tc>
+                  <a:txBody>
+                    <a:bodyPr/>
+                    <a:lstStyle/>
+                    <a:p>
+                      <a:pPr lvl="0" indent="0" marL="0">
+                        <a:buNone/>
+                      </a:pPr>
+                      <a:r>
+                        <a:rPr/>
+                        <a:t>Situation</a:t>
+                      </a:r>
+                    </a:p>
+                  </a:txBody>
+                  <a:tcPr/>
+                </a:tc>
+                <a:tc>
+                  <a:txBody>
+                    <a:bodyPr/>
+                    <a:lstStyle/>
+                    <a:p>
+                      <a:pPr lvl="0" indent="0" marL="0">
+                        <a:buNone/>
+                      </a:pPr>
+                      <a:r>
+                        <a:rPr/>
+                        <a:t>Reach for</a:t>
+                      </a:r>
+                    </a:p>
+                  </a:txBody>
+                  <a:tcPr/>
+                </a:tc>
+              </a:tr>
+              <a:tr h="0">
+                <a:tc>
+                  <a:txBody>
+                    <a:bodyPr/>
+                    <a:lstStyle/>
+                    <a:p>
+                      <a:pPr lvl="0" indent="0" marL="0">
+                        <a:buNone/>
+                      </a:pPr>
+                      <a:r>
+                        <a:rPr/>
+                        <a:t>The decision must be explained to the person it affects</a:t>
+                      </a:r>
+                    </a:p>
+                  </a:txBody>
+                </a:tc>
+                <a:tc>
+                  <a:txBody>
+                    <a:bodyPr/>
+                    <a:lstStyle/>
+                    <a:p>
+                      <a:pPr lvl="0" indent="0" marL="0">
+                        <a:buNone/>
+                      </a:pPr>
+                      <a:r>
+                        <a:rPr/>
+                        <a:t>A single tree, small enough to read; if even that is too opaque, none of these models</a:t>
+                      </a:r>
+                    </a:p>
+                  </a:txBody>
+                </a:tc>
+              </a:tr>
+              <a:tr h="0">
+                <a:tc>
+                  <a:txBody>
+                    <a:bodyPr/>
+                    <a:lstStyle/>
+                    <a:p>
+                      <a:pPr lvl="0" indent="0" marL="0">
+                        <a:buNone/>
+                      </a:pPr>
+                      <a:r>
+                        <a:rPr/>
+                        <a:t>Tabular data, accuracy matters most, no explanation required</a:t>
+                      </a:r>
+                    </a:p>
+                  </a:txBody>
+                </a:tc>
+                <a:tc>
+                  <a:txBody>
+                    <a:bodyPr/>
+                    <a:lstStyle/>
+                    <a:p>
+                      <a:pPr lvl="0" indent="0" marL="0">
+                        <a:buNone/>
+                      </a:pPr>
+                      <a:r>
+                        <a:rPr/>
+                        <a:t>A random forest: the best score here, at its default settings</a:t>
+                      </a:r>
+                    </a:p>
+                  </a:txBody>
+                </a:tc>
+              </a:tr>
+              <a:tr h="0">
+                <a:tc>
+                  <a:txBody>
+                    <a:bodyPr/>
+                    <a:lstStyle/>
+                    <a:p>
+                      <a:pPr lvl="0" indent="0" marL="0">
+                        <a:buNone/>
+                      </a:pPr>
+                      <a:r>
+                        <a:rPr/>
+                        <a:t>Accuracy matters, and there is time to tune the number of trees and the learning rate together</a:t>
+                      </a:r>
+                    </a:p>
+                  </a:txBody>
+                </a:tc>
+                <a:tc>
+                  <a:txBody>
+                    <a:bodyPr/>
+                    <a:lstStyle/>
+                    <a:p>
+                      <a:pPr lvl="0" indent="0" marL="0">
+                        <a:buNone/>
+                      </a:pPr>
+                      <a:r>
+                        <a:rPr/>
+                        <a:t>Gradient boosting, tuned on validation data</a:t>
+                      </a:r>
+                    </a:p>
+                  </a:txBody>
+                </a:tc>
+              </a:tr>
+              <a:tr h="0">
+                <a:tc>
+                  <a:txBody>
+                    <a:bodyPr/>
+                    <a:lstStyle/>
+                    <a:p>
+                      <a:pPr lvl="0" indent="0" marL="0">
+                        <a:buNone/>
+                      </a:pPr>
+                      <a:r>
+                        <a:rPr/>
+                        <a:t>Many columns, few of them informative</a:t>
+                      </a:r>
+                    </a:p>
+                  </a:txBody>
+                </a:tc>
+                <a:tc>
+                  <a:txBody>
+                    <a:bodyPr/>
+                    <a:lstStyle/>
+                    <a:p>
+                      <a:pPr lvl="0" indent="0" marL="0">
+                        <a:buNone/>
+                      </a:pPr>
+                      <a:r>
+                        <a:rPr/>
+                        <a:t>Any tree method, but check its importances by permutation</a:t>
+                      </a:r>
+                    </a:p>
+                  </a:txBody>
+                </a:tc>
+              </a:tr>
+              <a:tr h="0">
+                <a:tc>
+                  <a:txBody>
+                    <a:bodyPr/>
+                    <a:lstStyle/>
+                    <a:p>
+                      <a:pPr lvl="0" indent="0" marL="0">
+                        <a:buNone/>
+                      </a:pPr>
+                      <a:r>
+                        <a:rPr/>
+                        <a:t>Too few rows to set a validation set aside</a:t>
+                      </a:r>
+                    </a:p>
+                  </a:txBody>
+                </a:tc>
+                <a:tc>
+                  <a:txBody>
+                    <a:bodyPr/>
+                    <a:lstStyle/>
+                    <a:p>
+                      <a:pPr lvl="0" indent="0" marL="0">
+                        <a:buNone/>
+                      </a:pPr>
+                      <a:r>
+                        <a:rPr/>
+                        <a:t>A random forest, judged by its out-of-bag score</a:t>
+                      </a:r>
+                    </a:p>
+                  </a:txBody>
+                </a:tc>
+              </a:tr>
+            </a:tbl>
+          </a:graphicData>
+        </a:graphic>
+      </p:graphicFrame>
     </p:spTree>
   </p:cSld>
 </p:sld>
@@ -17775,7 +17657,7 @@
             </a:pPr>
             <a:r>
               <a:rPr/>
-              <a:t>What to take away</a:t>
+              <a:t>54% of the importance landed on noise</a:t>
             </a:r>
           </a:p>
         </p:txBody>
@@ -17803,44 +17685,52 @@
             <a:pPr lvl="0"/>
             <a:r>
               <a:rPr/>
-              <a:t>A tree splits greedily on Gini impurity, matching scikit-learn</a:t>
+              <a:t>20 noise columns, 2 real ones: not small, not a bug</a:t>
             </a:r>
           </a:p>
           <a:p>
             <a:pPr lvl="0"/>
             <a:r>
-              <a:rPr/>
-              <a:t>Depth is the bias-variance dial: accuracy peaked at </a:t>
-            </a:r>
-            <a:r>
               <a:rPr b="1"/>
-              <a:t>depth 8</a:t>
+              <a:t>The menu</a:t>
+            </a:r>
+            <a:r>
+              <a:rPr/>
+              <a:t>: 4 of 22 columns per split; in two splits of three (0.662), no real feature</a:t>
             </a:r>
           </a:p>
           <a:p>
             <a:pPr lvl="0"/>
             <a:r>
-              <a:rPr/>
-              <a:t>Bootstrap resampling leaves </a:t>
-            </a:r>
-            <a:r>
               <a:rPr b="1"/>
-              <a:t>36.8%</a:t>
-            </a:r>
-            <a:r>
-              <a:rPr/>
-              <a:t> of rows out-of-bag: free validation</a:t>
+              <a:t>Small groups</a:t>
+            </a:r>
+            <a:r>
+              <a:rPr/>
+              <a:t>: with all 22 on offer, noise still takes </a:t>
+            </a:r>
+            <a:r>
+              <a:rPr b="1"/>
+              <a:t>28%</a:t>
+            </a:r>
+            <a:r>
+              <a:rPr/>
+              <a:t>, from deep splits</a:t>
             </a:r>
           </a:p>
           <a:p>
             <a:pPr lvl="0"/>
             <a:r>
+              <a:rPr/>
+              <a:t>The check: </a:t>
+            </a:r>
+            <a:r>
               <a:rPr b="1"/>
-              <a:t>54% of a random forest’s importance landed on 20 noise columns</a:t>
-            </a:r>
-            <a:r>
-              <a:rPr/>
-              <a:t>, today’s number</a:t>
+              <a:t>permutation importance</a:t>
+            </a:r>
+            <a:r>
+              <a:rPr/>
+              <a:t>, slide 38</a:t>
             </a:r>
           </a:p>
         </p:txBody>
@@ -17851,6 +17741,123 @@
 </file>
 
 <file path=ppt/slides/slide55.xml><?xml version="1.0" encoding="utf-8"?>
+<p:sld xmlns:a="http://schemas.openxmlformats.org/drawingml/2006/main" xmlns:r="http://schemas.openxmlformats.org/officeDocument/2006/relationships" xmlns:p="http://schemas.openxmlformats.org/presentationml/2006/main">
+  <p:cSld>
+    <p:spTree>
+      <p:nvGrpSpPr>
+        <p:cNvPr id="1" name=""/>
+        <p:cNvGrpSpPr/>
+        <p:nvPr/>
+      </p:nvGrpSpPr>
+      <p:grpSpPr>
+        <a:xfrm>
+          <a:off x="0" y="0"/>
+          <a:ext cx="0" cy="0"/>
+          <a:chOff x="0" y="0"/>
+          <a:chExt cx="0" cy="0"/>
+        </a:xfrm>
+      </p:grpSpPr>
+      <p:sp>
+        <p:nvSpPr>
+          <p:cNvPr id="2" name="Title 1"/>
+          <p:cNvSpPr>
+            <a:spLocks noGrp="1"/>
+          </p:cNvSpPr>
+          <p:nvPr>
+            <p:ph type="title"/>
+          </p:nvPr>
+        </p:nvSpPr>
+        <p:spPr>
+          <a:xfrm>
+            <a:off x="457200" y="205979"/>
+            <a:ext cx="8229600" cy="857250"/>
+          </a:xfrm>
+        </p:spPr>
+        <p:txBody>
+          <a:bodyPr/>
+          <a:lstStyle/>
+          <a:p>
+            <a:pPr lvl="0" indent="0" marL="0">
+              <a:buNone/>
+            </a:pPr>
+            <a:r>
+              <a:rPr/>
+              <a:t>What to take away</a:t>
+            </a:r>
+          </a:p>
+        </p:txBody>
+      </p:sp>
+      <p:sp>
+        <p:nvSpPr>
+          <p:cNvPr id="3" name="Content Placeholder 2"/>
+          <p:cNvSpPr>
+            <a:spLocks noGrp="1"/>
+          </p:cNvSpPr>
+          <p:nvPr>
+            <p:ph idx="1"/>
+          </p:nvPr>
+        </p:nvSpPr>
+        <p:spPr>
+          <a:xfrm>
+            <a:off x="457200" y="1200151"/>
+            <a:ext cx="8229600" cy="3394472"/>
+          </a:xfrm>
+        </p:spPr>
+        <p:txBody>
+          <a:bodyPr/>
+          <a:lstStyle/>
+          <a:p>
+            <a:pPr lvl="0"/>
+            <a:r>
+              <a:rPr/>
+              <a:t>A tree splits greedily on Gini impurity, matching scikit-learn</a:t>
+            </a:r>
+          </a:p>
+          <a:p>
+            <a:pPr lvl="0"/>
+            <a:r>
+              <a:rPr/>
+              <a:t>Depth is the bias-variance dial: accuracy peaked at </a:t>
+            </a:r>
+            <a:r>
+              <a:rPr b="1"/>
+              <a:t>depth 8</a:t>
+            </a:r>
+          </a:p>
+          <a:p>
+            <a:pPr lvl="0"/>
+            <a:r>
+              <a:rPr/>
+              <a:t>Bootstrap resampling leaves </a:t>
+            </a:r>
+            <a:r>
+              <a:rPr b="1"/>
+              <a:t>36.8%</a:t>
+            </a:r>
+            <a:r>
+              <a:rPr/>
+              <a:t> of rows out-of-bag: free validation</a:t>
+            </a:r>
+          </a:p>
+          <a:p>
+            <a:pPr lvl="0"/>
+            <a:r>
+              <a:rPr b="1"/>
+              <a:t>54% of a random forest’s importance landed on 20 noise columns</a:t>
+            </a:r>
+            <a:r>
+              <a:rPr/>
+              <a:t>, today’s number</a:t>
+            </a:r>
+          </a:p>
+        </p:txBody>
+      </p:sp>
+    </p:spTree>
+  </p:cSld>
+</p:sld>
+</file>
+
+<file path=ppt/slides/slide56.xml><?xml version="1.0" encoding="utf-8"?>
 <p:sld xmlns:a="http://schemas.openxmlformats.org/drawingml/2006/main" xmlns:r="http://schemas.openxmlformats.org/officeDocument/2006/relationships" xmlns:p="http://schemas.openxmlformats.org/presentationml/2006/main">
   <p:cSld>
     <p:spTree>
@@ -18220,7 +18227,15 @@
             <a:pPr lvl="0"/>
             <a:r>
               <a:rPr/>
-              <a:t>Nothing is estimated: no coefficient, no gradient</a:t>
+              <a:t>No coefficients and no gradient: each threshold is chosen by </a:t>
+            </a:r>
+            <a:r>
+              <a:rPr b="1"/>
+              <a:t>searching</a:t>
+            </a:r>
+            <a:r>
+              <a:rPr/>
+              <a:t> the data</a:t>
             </a:r>
           </a:p>
           <a:p>

--- a/Lessons/07_trees_and_ensembles/Slides/trees_and_ensembles_slides.pptx
+++ b/Lessons/07_trees_and_ensembles/Slides/trees_and_ensembles_slides.pptx
@@ -6559,7 +6559,7 @@
             </a:pPr>
             <a:r>
               <a:rPr/>
-              <a:t>Set it explicitly and say out loud when it comes back: the first ten minutes of lesson 8, Friday 20 November.</a:t>
+              <a:t>Set it explicitly and say out loud when it comes back: the first ten minutes of lesson 8, Friday 27 November.</a:t>
             </a:r>
           </a:p>
           <a:p>
@@ -10202,7 +10202,7 @@
             </a:pPr>
             <a:r>
               <a:rPr/>
-              <a:t>13 November 2026</a:t>
+              <a:t>20 November 2026</a:t>
             </a:r>
           </a:p>
         </p:txBody>
@@ -17935,7 +17935,7 @@
             </a:r>
             <a:r>
               <a:rPr b="1"/>
-              <a:t>Friday 20 November</a:t>
+              <a:t>Friday 27 November</a:t>
             </a:r>
           </a:p>
           <a:p>

--- a/Lessons/07_trees_and_ensembles/Slides/trees_and_ensembles_slides.pptx
+++ b/Lessons/07_trees_and_ensembles/Slides/trees_and_ensembles_slides.pptx
@@ -5,7 +5,7 @@
     <p:sldMasterId id="2147483648" r:id="rId1"/>
   </p:sldMasterIdLst>
   <p:notesMasterIdLst>
-    <p:notesMasterId r:id="rId58"/>
+    <p:notesMasterId r:id="rId59"/>
   </p:notesMasterIdLst>
   <p:sldIdLst>
     <p:sldId id="256" r:id="rId2"/>
@@ -64,6 +64,7 @@
     <p:sldId id="309" r:id="rId55"/>
     <p:sldId id="310" r:id="rId56"/>
     <p:sldId id="311" r:id="rId57"/>
+    <p:sldId id="312" r:id="rId58"/>
   </p:sldIdLst>
   <p:sldSz cx="9144000" cy="5143500" type="screen16x9"/>
   <p:notesSz cx="6858000" cy="9144000"/>
@@ -1041,6 +1042,20 @@
             </a:pPr>
             <a:r>
               <a:rPr/>
+              <a:t>The second bullet answers the question someone will ask: a threshold is a real number, so are there not infinitely many to try? There are, but they make only finitely many different splits. At the root, two neighbouring debt ratios in the data are 0.8198 and 0.8205, with no applicant between them; a threshold of 0.8199, 0.8200 or 0.8204 sends the same 971 applicants left and the same 229 right. So one threshold per gap is enough, and the convention is the midpoint, (0.8198 + 0.8205) / 2 = 0.82015, printed 0.820 - halfway, so the threshold sits as far as possible from both values seen in training. Debt ratio has 1,139 distinct values in the data, so 1,138 gaps; income has 1,097, so 1,096. The search is exact, not an approximation. A predictable slip is to think it must be approximate because thresholds are continuous: the data are finite, so the splits are too.</a:t>
+            </a:r>
+          </a:p>
+          <a:p>
+            <a:pPr lvl="0" indent="0" marL="0">
+              <a:buNone/>
+            </a:pPr>
+          </a:p>
+          <a:p>
+            <a:pPr lvl="0" indent="0" marL="0">
+              <a:buNone/>
+            </a:pPr>
+            <a:r>
+              <a:rPr/>
               <a:t>The last bullet is the one to slow down on. A feature that only helps in combination with a second split further down the tree can be - and in this dataset’s two interior islands, is - invisible to a shallow search, because ΔG is never evaluated for two splits together.</a:t>
             </a:r>
           </a:p>
@@ -1137,35 +1152,49 @@
             </a:pPr>
             <a:r>
               <a:rPr/>
-              <a:t>Walk the numbers once: parent impurity 0.474, and the winning split is the debt ceiling, found by brute-force search with no hint about how the data was generated. The children’s impurities, 2p(1 - p) at their own default rates, are 0.3814 for the left child and 0.1148 for the right. Their average weighted by size is 971/1,200 × 0.3814 + 229/1,200 × 0.1148 = 0.3305, and the gain is the parent’s 0.4743 minus that, 0.1438, which rounds to 0.144. Use four decimals if you work it on the board: with the impurities rounded to the slide’s 0.381 and 0.115, the weighted average comes out at 0.3302, and someone will notice. That agreement with the known generating rule is the first piece of evidence that the algorithm is doing something sensible.</a:t>
-            </a:r>
-          </a:p>
-          <a:p>
-            <a:pPr lvl="0" indent="0" marL="0">
-              <a:buNone/>
-            </a:pPr>
-          </a:p>
-          <a:p>
-            <a:pPr lvl="0" indent="0" marL="0">
-              <a:buNone/>
-            </a:pPr>
-            <a:r>
-              <a:rPr/>
-              <a:t>Ask the room why finding the debt ceiling by blind search, with no knowledge of how the data was built, is a stronger check than it might first appear - the answer is that it rules out the split being an artefact of how the search was coded, since nothing in the algorithm knows the generating rule.</a:t>
-            </a:r>
-          </a:p>
-          <a:p>
-            <a:pPr lvl="0" indent="0" marL="0">
-              <a:buNone/>
-            </a:pPr>
-          </a:p>
-          <a:p>
-            <a:pPr lvl="0" indent="0" marL="0">
-              <a:buNone/>
-            </a:pPr>
-            <a:r>
-              <a:rPr/>
-              <a:t>Handout section 2.2.</a:t>
+              <a:t>The previous slide’s search, drawn at the root. Each point on a curve is one candidate threshold: on the left the 1,138 on debt ratio, on the right the 1,096 on income, 2,234 in all. Its height is the weighted Gini impurity of the two groups that threshold makes - each group’s 2p(1 - p), weighted by its share of the 1,200 applicants, so lower is purer. The dotted line at 0.474 is no split at all. The search keeps the lowest point on either curve: debt at 0.82, 0.330. The gain of slide 13 is the drop from the dotted line to that point, 0.474 - 0.330 = 0.144, worked out on the next slide.</a:t>
+            </a:r>
+          </a:p>
+          <a:p>
+            <a:pPr lvl="0" indent="0" marL="0">
+              <a:buNone/>
+            </a:pPr>
+          </a:p>
+          <a:p>
+            <a:pPr lvl="0" indent="0" marL="0">
+              <a:buNone/>
+            </a:pPr>
+            <a:r>
+              <a:rPr/>
+              <a:t>Point at the alternatives. Debt at 0.5 splits 627 applicants at 18% default from 573 at 61%: both groups stay mixed, 0.382. On income, the best threshold is close to the true floor of 28, but it scores only 0.418, because the low-income strip holds 111 applicants and leaves the other 1,089 mixed.</a:t>
+            </a:r>
+          </a:p>
+          <a:p>
+            <a:pPr lvl="0" indent="0" marL="0">
+              <a:buNone/>
+            </a:pPr>
+          </a:p>
+          <a:p>
+            <a:pPr lvl="0" indent="0" marL="0">
+              <a:buNone/>
+            </a:pPr>
+            <a:r>
+              <a:rPr/>
+              <a:t>A predictable slip: “the best split puts the most defaults on one side”. It is a natural reading of “purest”, but the score counts proportions, weighted by size, not numbers of defaults. Debt at 0.9 makes a right-hand group almost as pure as 0.82 does, 129 applicants at 92% default against 229 at 94%, yet scores 0.405 against 0.330, because it leaves the large left group more mixed: 1,071 at 32% against 971 at 26%. And a group pure in “repaid” counts exactly as much as one pure in “default”: the formula does not ask which class is common.</a:t>
+            </a:r>
+          </a:p>
+          <a:p>
+            <a:pPr lvl="0" indent="0" marL="0">
+              <a:buNone/>
+            </a:pPr>
+          </a:p>
+          <a:p>
+            <a:pPr lvl="0" indent="0" marL="0">
+              <a:buNone/>
+            </a:pPr>
+            <a:r>
+              <a:rPr/>
+              <a:t>Notebook 1, section 2, “Every threshold, scored”. Handout section 2.2.</a:t>
             </a:r>
           </a:p>
         </p:txBody>
@@ -1247,21 +1276,35 @@
             </a:pPr>
             <a:r>
               <a:rPr/>
-              <a:t>The previous slide’s arithmetic, drawn. The curve is 2p(1-p): zero for a pure group, 0.5 for a fifty-fifty one. The black dot is all 1,200 applicants at p = 0.387, impurity 0.474. The split sends 971 left, at p = 0.256, and 229 right, at p = 0.939 - teal and rust.</a:t>
-            </a:r>
-          </a:p>
-          <a:p>
-            <a:pPr lvl="0" indent="0" marL="0">
-              <a:buNone/>
-            </a:pPr>
-          </a:p>
-          <a:p>
-            <a:pPr lvl="0" indent="0" marL="0">
-              <a:buNone/>
-            </a:pPr>
-            <a:r>
-              <a:rPr/>
-              <a:t>The gold square is the two children averaged by size, 0.3305, and it sits on the dotted straight line between them. Point at the bulge: the curve lies above every such line, so any split that separates the classes at all lowers the weighted impurity. The gap, 0.144, is the gain, and the tree takes whichever split makes it largest. Handout section 2.2.</a:t>
+              <a:t>Walk the numbers once: parent impurity 0.474, and the winning split is the debt ceiling, found by brute-force search with no hint about how the data was generated. The children’s impurities, 2p(1 - p) at their own default rates, are 0.3814 for the left child and 0.1148 for the right. Their average weighted by size is 971/1,200 × 0.3814 + 229/1,200 × 0.1148 = 0.3305, and the gain is the parent’s 0.4743 minus that, 0.1438, which rounds to 0.144. Use four decimals if you work it on the board: with the impurities rounded to the slide’s 0.381 and 0.115, the weighted average comes out at 0.3302, and someone will notice. That agreement with the known generating rule is the first piece of evidence that the algorithm is doing something sensible.</a:t>
+            </a:r>
+          </a:p>
+          <a:p>
+            <a:pPr lvl="0" indent="0" marL="0">
+              <a:buNone/>
+            </a:pPr>
+          </a:p>
+          <a:p>
+            <a:pPr lvl="0" indent="0" marL="0">
+              <a:buNone/>
+            </a:pPr>
+            <a:r>
+              <a:rPr/>
+              <a:t>Ask the room why finding the debt ceiling by blind search, with no knowledge of how the data was built, is a stronger check than it might first appear - the answer is that it rules out the split being an artefact of how the search was coded, since nothing in the algorithm knows the generating rule.</a:t>
+            </a:r>
+          </a:p>
+          <a:p>
+            <a:pPr lvl="0" indent="0" marL="0">
+              <a:buNone/>
+            </a:pPr>
+          </a:p>
+          <a:p>
+            <a:pPr lvl="0" indent="0" marL="0">
+              <a:buNone/>
+            </a:pPr>
+            <a:r>
+              <a:rPr/>
+              <a:t>Handout section 2.2.</a:t>
             </a:r>
           </a:p>
         </p:txBody>
@@ -1343,49 +1386,21 @@
             </a:pPr>
             <a:r>
               <a:rPr/>
-              <a:t>This is the check notebook 1 runs live, and it matters for trust rather than for novelty: once the from-scratch version is shown to agree with scikit-learn exactly, every later result in the lesson - obtained with scikit-learn - inherits that confidence.</a:t>
-            </a:r>
-          </a:p>
-          <a:p>
-            <a:pPr lvl="0" indent="0" marL="0">
-              <a:buNone/>
-            </a:pPr>
-          </a:p>
-          <a:p>
-            <a:pPr lvl="0" indent="0" marL="0">
-              <a:buNone/>
-            </a:pPr>
-            <a:r>
-              <a:rPr/>
-              <a:t>Two questions to pre-empt. Why predictions and not accuracy? Because two different trees can get the same number of applicants wrong while getting different applicants wrong; identical predictions, one by one, rule that out. Identical predictions do not by themselves prove the two trees are identical node by node - two different trees can agree on every row they are shown - but the notebook also prints the same root split, debt ratio at 0.82, from both. And why on the training data, after lesson 5? Because this checks the code, not the model: the question is whether two programs make the same decisions from the same rows, and the rows they learned from are exactly the right ones to ask it on. No accuracy here is a claim about new applicants.</a:t>
-            </a:r>
-          </a:p>
-          <a:p>
-            <a:pPr lvl="0" indent="0" marL="0">
-              <a:buNone/>
-            </a:pPr>
-          </a:p>
-          <a:p>
-            <a:pPr lvl="0" indent="0" marL="0">
-              <a:buNone/>
-            </a:pPr>
-            <a:r>
-              <a:rPr/>
-              <a:t>Point out the “Try this” box in the handout: computing Gini impurity for the income-floor subgroup alone and comparing it against the full dataset’s 0.474 is a two-line exercise that makes the impurity number concrete rather than abstract.</a:t>
-            </a:r>
-          </a:p>
-          <a:p>
-            <a:pPr lvl="0" indent="0" marL="0">
-              <a:buNone/>
-            </a:pPr>
-          </a:p>
-          <a:p>
-            <a:pPr lvl="0" indent="0" marL="0">
-              <a:buNone/>
-            </a:pPr>
-            <a:r>
-              <a:rPr/>
-              <a:t>Handout section 2.2, and the “Try this” box that follows it.</a:t>
+              <a:t>The previous slide’s arithmetic, drawn. The curve is 2p(1-p): zero for a pure group, 0.5 for a fifty-fifty one. The black dot is all 1,200 applicants at p = 0.387, impurity 0.474. The split sends 971 left, at p = 0.256, and 229 right, at p = 0.939 - teal and rust.</a:t>
+            </a:r>
+          </a:p>
+          <a:p>
+            <a:pPr lvl="0" indent="0" marL="0">
+              <a:buNone/>
+            </a:pPr>
+          </a:p>
+          <a:p>
+            <a:pPr lvl="0" indent="0" marL="0">
+              <a:buNone/>
+            </a:pPr>
+            <a:r>
+              <a:rPr/>
+              <a:t>The gold square is the two children averaged by size, 0.3305, and it sits on the dotted straight line between them. Point at the bulge: the curve lies above every such line, so any split that separates the classes at all lowers the weighted impurity. The gap, 0.144, is the gain, and the tree takes whichever split makes it largest. Handout section 2.2.</a:t>
             </a:r>
           </a:p>
         </p:txBody>
@@ -1467,43 +1482,49 @@
             </a:pPr>
             <a:r>
               <a:rPr/>
-              <a:t>Close the Gini segment with the limitation, because it sets up everything that follows. Ask the room: if the debt ceiling and the income floor are the two easiest wins, what happens to the two interior islands, which need </a:t>
-            </a:r>
-            <a:r>
-              <a:rPr i="1"/>
-              <a:t>two</a:t>
-            </a:r>
-            <a:r>
-              <a:rPr/>
-              <a:t> conditions at once to identify?</a:t>
-            </a:r>
-          </a:p>
-          <a:p>
-            <a:pPr lvl="0" indent="0" marL="0">
-              <a:buNone/>
-            </a:pPr>
-          </a:p>
-          <a:p>
-            <a:pPr lvl="0" indent="0" marL="0">
-              <a:buNone/>
-            </a:pPr>
-            <a:r>
-              <a:rPr/>
-              <a:t>The honest answer is that a shallow tree simply cannot see them - not because the information isn’t there, but because greedy search only ever commits to the best split available at each individual step. Depth is what buys the tree enough steps to eventually stumble onto them, which is exactly where the next segment goes.</a:t>
-            </a:r>
-          </a:p>
-          <a:p>
-            <a:pPr lvl="0" indent="0" marL="0">
-              <a:buNone/>
-            </a:pPr>
-          </a:p>
-          <a:p>
-            <a:pPr lvl="0" indent="0" marL="0">
-              <a:buNone/>
-            </a:pPr>
-            <a:r>
-              <a:rPr/>
-              <a:t>Handout sections 2.2 and 3.</a:t>
+              <a:t>This is the check notebook 1 runs live, and it matters for trust rather than for novelty: once the from-scratch version is shown to agree with scikit-learn exactly, every later result in the lesson - obtained with scikit-learn - inherits that confidence.</a:t>
+            </a:r>
+          </a:p>
+          <a:p>
+            <a:pPr lvl="0" indent="0" marL="0">
+              <a:buNone/>
+            </a:pPr>
+          </a:p>
+          <a:p>
+            <a:pPr lvl="0" indent="0" marL="0">
+              <a:buNone/>
+            </a:pPr>
+            <a:r>
+              <a:rPr/>
+              <a:t>Two questions to pre-empt. Why predictions and not accuracy? Because two different trees can get the same number of applicants wrong while getting different applicants wrong; identical predictions, one by one, rule that out. Identical predictions do not by themselves prove the two trees are identical node by node - two different trees can agree on every row they are shown - but the notebook also prints the same root split, debt ratio at 0.82, from both. And why on the training data, after lesson 5? Because this checks the code, not the model: the question is whether two programs make the same decisions from the same rows, and the rows they learned from are exactly the right ones to ask it on. No accuracy here is a claim about new applicants.</a:t>
+            </a:r>
+          </a:p>
+          <a:p>
+            <a:pPr lvl="0" indent="0" marL="0">
+              <a:buNone/>
+            </a:pPr>
+          </a:p>
+          <a:p>
+            <a:pPr lvl="0" indent="0" marL="0">
+              <a:buNone/>
+            </a:pPr>
+            <a:r>
+              <a:rPr/>
+              <a:t>Point out the “Try this” box in the handout: computing Gini impurity for the income-floor subgroup alone and comparing it against the full dataset’s 0.474 is a two-line exercise that makes the impurity number concrete rather than abstract.</a:t>
+            </a:r>
+          </a:p>
+          <a:p>
+            <a:pPr lvl="0" indent="0" marL="0">
+              <a:buNone/>
+            </a:pPr>
+          </a:p>
+          <a:p>
+            <a:pPr lvl="0" indent="0" marL="0">
+              <a:buNone/>
+            </a:pPr>
+            <a:r>
+              <a:rPr/>
+              <a:t>Handout section 2.2, and the “Try this” box that follows it.</a:t>
             </a:r>
           </a:p>
         </p:txBody>
@@ -1585,35 +1606,43 @@
             </a:pPr>
             <a:r>
               <a:rPr/>
-              <a:t>Name the dial explicitly and connect it to lesson 6: k in k-nearest neighbours traded bias against variance directly, and depth is a tree’s version of the same knob.</a:t>
-            </a:r>
-          </a:p>
-          <a:p>
-            <a:pPr lvl="0" indent="0" marL="0">
-              <a:buNone/>
-            </a:pPr>
-          </a:p>
-          <a:p>
-            <a:pPr lvl="0" indent="0" marL="0">
-              <a:buNone/>
-            </a:pPr>
-            <a:r>
-              <a:rPr/>
-              <a:t>The training-accuracy-1.000 claim is the one to make them justify. Ask why an unconstrained tree gets every training point right - the answer is that splitting does not have to stop until every leaf is pure, at worst one example per leaf, which it then “predicts” perfectly by definition. The one exception is the condition on the slide: two applicants with identical income and debt but different outcomes can never be split apart, so one of them stays wrong. With two continuous features drawn at random, as here, that does not happen. That number demonstrates the model class can memorise, not that anything has been learned - the same reading lesson 6 gave k = 1’s training accuracy.</a:t>
-            </a:r>
-          </a:p>
-          <a:p>
-            <a:pPr lvl="0" indent="0" marL="0">
-              <a:buNone/>
-            </a:pPr>
-          </a:p>
-          <a:p>
-            <a:pPr lvl="0" indent="0" marL="0">
-              <a:buNone/>
-            </a:pPr>
-            <a:r>
-              <a:rPr/>
-              <a:t>Handout section 3.</a:t>
+              <a:t>Close the Gini segment with the limitation, because it sets up everything that follows. Ask the room: if the debt ceiling and the income floor are the two easiest wins, what happens to the two interior islands, which need </a:t>
+            </a:r>
+            <a:r>
+              <a:rPr i="1"/>
+              <a:t>two</a:t>
+            </a:r>
+            <a:r>
+              <a:rPr/>
+              <a:t> conditions at once to identify?</a:t>
+            </a:r>
+          </a:p>
+          <a:p>
+            <a:pPr lvl="0" indent="0" marL="0">
+              <a:buNone/>
+            </a:pPr>
+          </a:p>
+          <a:p>
+            <a:pPr lvl="0" indent="0" marL="0">
+              <a:buNone/>
+            </a:pPr>
+            <a:r>
+              <a:rPr/>
+              <a:t>The honest answer is that a shallow tree simply cannot see them - not because the information isn’t there, but because greedy search only ever commits to the best split available at each individual step. Depth is what buys the tree enough steps to eventually stumble onto them, which is exactly where the next segment goes.</a:t>
+            </a:r>
+          </a:p>
+          <a:p>
+            <a:pPr lvl="0" indent="0" marL="0">
+              <a:buNone/>
+            </a:pPr>
+          </a:p>
+          <a:p>
+            <a:pPr lvl="0" indent="0" marL="0">
+              <a:buNone/>
+            </a:pPr>
+            <a:r>
+              <a:rPr/>
+              <a:t>Handout sections 2.2 and 3.</a:t>
             </a:r>
           </a:p>
         </p:txBody>
@@ -1695,43 +1724,35 @@
             </a:pPr>
             <a:r>
               <a:rPr/>
-              <a:t>Read the two columns against each other, never in isolation, exactly as lesson 5 taught. Training accuracy climbs monotonically towards 1.000. Cross-validated accuracy rises, peaks at depth 8, and then falls back - even though the model keeps getting strictly more flexible.</a:t>
-            </a:r>
-          </a:p>
-          <a:p>
-            <a:pPr lvl="0" indent="0" marL="0">
-              <a:buNone/>
-            </a:pPr>
-          </a:p>
-          <a:p>
-            <a:pPr lvl="0" indent="0" marL="0">
-              <a:buNone/>
-            </a:pPr>
-            <a:r>
-              <a:rPr/>
-              <a:t>Ask which column they would have picked a tree by, if they had only seen the training column. The far right, the unconstrained tree, looks unbeatable on that evidence and is in fact the worst honest model on this table.</a:t>
-            </a:r>
-          </a:p>
-          <a:p>
-            <a:pPr lvl="0" indent="0" marL="0">
-              <a:buNone/>
-            </a:pPr>
-          </a:p>
-          <a:p>
-            <a:pPr lvl="0" indent="0" marL="0">
-              <a:buNone/>
-            </a:pPr>
-            <a:r>
-              <a:rPr/>
-              <a:t>The unconstrained tree loses </a:t>
-            </a:r>
-            <a:r>
-              <a:rPr b="1"/>
-              <a:t>3 points</a:t>
-            </a:r>
-            <a:r>
-              <a:rPr/>
-              <a:t> of cross-validated accuracy relative to the depth-8 peak, for a training score nobody should have trusted in the first place. Handout section 3.</a:t>
+              <a:t>Name the dial explicitly and connect it to lesson 6: k in k-nearest neighbours traded bias against variance directly, and depth is a tree’s version of the same knob.</a:t>
+            </a:r>
+          </a:p>
+          <a:p>
+            <a:pPr lvl="0" indent="0" marL="0">
+              <a:buNone/>
+            </a:pPr>
+          </a:p>
+          <a:p>
+            <a:pPr lvl="0" indent="0" marL="0">
+              <a:buNone/>
+            </a:pPr>
+            <a:r>
+              <a:rPr/>
+              <a:t>The training-accuracy-1.000 claim is the one to make them justify. Ask why an unconstrained tree gets every training point right - the answer is that splitting does not have to stop until every leaf is pure, at worst one example per leaf, which it then “predicts” perfectly by definition. The one exception is the condition on the slide: two applicants with identical income and debt but different outcomes can never be split apart, so one of them stays wrong. With two continuous features drawn at random, as here, that does not happen. That number demonstrates the model class can memorise, not that anything has been learned - the same reading lesson 6 gave k = 1’s training accuracy.</a:t>
+            </a:r>
+          </a:p>
+          <a:p>
+            <a:pPr lvl="0" indent="0" marL="0">
+              <a:buNone/>
+            </a:pPr>
+          </a:p>
+          <a:p>
+            <a:pPr lvl="0" indent="0" marL="0">
+              <a:buNone/>
+            </a:pPr>
+            <a:r>
+              <a:rPr/>
+              <a:t>Handout section 3.</a:t>
             </a:r>
           </a:p>
         </p:txBody>
@@ -1909,49 +1930,43 @@
             </a:pPr>
             <a:r>
               <a:rPr/>
-              <a:t>Point at the two curves in order: training climbing steadily towards the top, cross-validated rising and then turning over. The peak is where the tree is deep enough to isolate both stressed islands and shallow enough to leave the flipped labels as errors rather than as leaves of their own.</a:t>
-            </a:r>
-          </a:p>
-          <a:p>
-            <a:pPr lvl="0" indent="0" marL="0">
-              <a:buNone/>
-            </a:pPr>
-          </a:p>
-          <a:p>
-            <a:pPr lvl="0" indent="0" marL="0">
-              <a:buNone/>
-            </a:pPr>
-            <a:r>
-              <a:rPr/>
-              <a:t>Say plainly what past the peak is buying: every extra split is spent fitting some of the 7% of labels this dataset deliberately flips, and a flipped label has no pattern to learn. A tree that classifies it “correctly” on training data has memorised it, not generalised.</a:t>
-            </a:r>
-          </a:p>
-          <a:p>
-            <a:pPr lvl="0" indent="0" marL="0">
-              <a:buNone/>
-            </a:pPr>
-          </a:p>
-          <a:p>
-            <a:pPr lvl="0" indent="0" marL="0">
-              <a:buNone/>
-            </a:pPr>
-            <a:r>
-              <a:rPr/>
-              <a:t>The gold dashed line is the noise ceiling from the dataset slide, 0.93: one minus the 7% of flipped labels.</a:t>
-            </a:r>
-          </a:p>
-          <a:p>
-            <a:pPr lvl="0" indent="0" marL="0">
-              <a:buNone/>
-            </a:pPr>
-          </a:p>
-          <a:p>
-            <a:pPr lvl="0" indent="0" marL="0">
-              <a:buNone/>
-            </a:pPr>
-            <a:r>
-              <a:rPr/>
-              <a:t>This is not the first time this course has shown a curve bend this way: lesson 3’s test error turned back up as the polynomial degree grew, and lesson 6’s k-nearest neighbours did the same as k shrank towards 1. Handout section 3.</a:t>
+              <a:t>Read the two columns against each other, never in isolation, exactly as lesson 5 taught. Training accuracy climbs monotonically towards 1.000. Cross-validated accuracy rises, peaks at depth 8, and then falls back - even though the model keeps getting strictly more flexible.</a:t>
+            </a:r>
+          </a:p>
+          <a:p>
+            <a:pPr lvl="0" indent="0" marL="0">
+              <a:buNone/>
+            </a:pPr>
+          </a:p>
+          <a:p>
+            <a:pPr lvl="0" indent="0" marL="0">
+              <a:buNone/>
+            </a:pPr>
+            <a:r>
+              <a:rPr/>
+              <a:t>Ask which column they would have picked a tree by, if they had only seen the training column. The far right, the unconstrained tree, looks unbeatable on that evidence and is in fact the worst honest model on this table.</a:t>
+            </a:r>
+          </a:p>
+          <a:p>
+            <a:pPr lvl="0" indent="0" marL="0">
+              <a:buNone/>
+            </a:pPr>
+          </a:p>
+          <a:p>
+            <a:pPr lvl="0" indent="0" marL="0">
+              <a:buNone/>
+            </a:pPr>
+            <a:r>
+              <a:rPr/>
+              <a:t>The unconstrained tree loses </a:t>
+            </a:r>
+            <a:r>
+              <a:rPr b="1"/>
+              <a:t>3 points</a:t>
+            </a:r>
+            <a:r>
+              <a:rPr/>
+              <a:t> of cross-validated accuracy relative to the depth-8 peak, for a training score nobody should have trusted in the first place. Handout section 3.</a:t>
             </a:r>
           </a:p>
         </p:txBody>
@@ -2033,35 +2048,49 @@
             </a:pPr>
             <a:r>
               <a:rPr/>
-              <a:t>Left to right: at depth 2 every applicant answers at most two questions. The tree asks three in all - it is exactly the tree of step 2 on slide 8 - but the third, on the right, splits 229 high-debt applicants into two groups that are both predicted “default”, so it changes no prediction and draws no line. What the boundary shows is the income floor and the debt ceiling - the two biggest, easiest-to-find regions - and neither interior island is visible at all. At depth 8 both islands appear as clean rectangles, close to the rule that generated the data. At full depth the boundary has grown a fringe of tiny rectangles chasing individual flipped labels.</a:t>
-            </a:r>
-          </a:p>
-          <a:p>
-            <a:pPr lvl="0" indent="0" marL="0">
-              <a:buNone/>
-            </a:pPr>
-          </a:p>
-          <a:p>
-            <a:pPr lvl="0" indent="0" marL="0">
-              <a:buNone/>
-            </a:pPr>
-            <a:r>
-              <a:rPr/>
-              <a:t>Make the point explicit: the full-depth boundary is not a smoother version of the depth-8 boundary. It is a noisier one, built out of the same mechanism that gave the unconstrained tree its perfect training score.</a:t>
-            </a:r>
-          </a:p>
-          <a:p>
-            <a:pPr lvl="0" indent="0" marL="0">
-              <a:buNone/>
-            </a:pPr>
-          </a:p>
-          <a:p>
-            <a:pPr lvl="0" indent="0" marL="0">
-              <a:buNone/>
-            </a:pPr>
-            <a:r>
-              <a:rPr/>
-              <a:t>Ask the room which of the three they would trust on a loan applicant they had never seen. Handout section 3.</a:t>
+              <a:t>Point at the two curves in order: training climbing steadily towards the top, cross-validated rising and then turning over. The peak is where the tree is deep enough to isolate both stressed islands and shallow enough to leave the flipped labels as errors rather than as leaves of their own.</a:t>
+            </a:r>
+          </a:p>
+          <a:p>
+            <a:pPr lvl="0" indent="0" marL="0">
+              <a:buNone/>
+            </a:pPr>
+          </a:p>
+          <a:p>
+            <a:pPr lvl="0" indent="0" marL="0">
+              <a:buNone/>
+            </a:pPr>
+            <a:r>
+              <a:rPr/>
+              <a:t>Say plainly what past the peak is buying: every extra split is spent fitting some of the 7% of labels this dataset deliberately flips, and a flipped label has no pattern to learn. A tree that classifies it “correctly” on training data has memorised it, not generalised.</a:t>
+            </a:r>
+          </a:p>
+          <a:p>
+            <a:pPr lvl="0" indent="0" marL="0">
+              <a:buNone/>
+            </a:pPr>
+          </a:p>
+          <a:p>
+            <a:pPr lvl="0" indent="0" marL="0">
+              <a:buNone/>
+            </a:pPr>
+            <a:r>
+              <a:rPr/>
+              <a:t>The gold dashed line is the noise ceiling from the dataset slide, 0.93: one minus the 7% of flipped labels.</a:t>
+            </a:r>
+          </a:p>
+          <a:p>
+            <a:pPr lvl="0" indent="0" marL="0">
+              <a:buNone/>
+            </a:pPr>
+          </a:p>
+          <a:p>
+            <a:pPr lvl="0" indent="0" marL="0">
+              <a:buNone/>
+            </a:pPr>
+            <a:r>
+              <a:rPr/>
+              <a:t>This is not the first time this course has shown a curve bend this way: lesson 3’s test error turned back up as the polynomial degree grew, and lesson 6’s k-nearest neighbours did the same as k shrank towards 1. Handout section 3.</a:t>
             </a:r>
           </a:p>
         </p:txBody>
@@ -2143,35 +2172,35 @@
             </a:pPr>
             <a:r>
               <a:rPr/>
-              <a:t>This is the readability half of the story. The two knobs limit different things. A depth cap limits how long any one path can be, and inside that cap every node that can be split is split - slide 22’s depth-2 tree spent one of its three questions on a split that changed no prediction. A leaf budget limits how many leaves the whole tree may have, and spends them one at a time on whichever leaf gains most. For a tree meant to be read rather than merely scored, the budget is the better knob: a small number of splits goes to the ones that matter most.</a:t>
-            </a:r>
-          </a:p>
-          <a:p>
-            <a:pPr lvl="0" indent="0" marL="0">
-              <a:buNone/>
-            </a:pPr>
-          </a:p>
-          <a:p>
-            <a:pPr lvl="0" indent="0" marL="0">
-              <a:buNone/>
-            </a:pPr>
-            <a:r>
-              <a:rPr/>
-              <a:t>The nine-leaf tree is worth reading aloud as a sequence of if/else statements - that is the entire model, and it is the thing k-nearest neighbours and support vector machines cannot offer at all. For a decision that has to be justified to the person it affects, that can matter as much as accuracy.</a:t>
-            </a:r>
-          </a:p>
-          <a:p>
-            <a:pPr lvl="0" indent="0" marL="0">
-              <a:buNone/>
-            </a:pPr>
-          </a:p>
-          <a:p>
-            <a:pPr lvl="0" indent="0" marL="0">
-              <a:buNone/>
-            </a:pPr>
-            <a:r>
-              <a:rPr/>
-              <a:t>Handout section 4.</a:t>
+              <a:t>Left to right: at depth 2 every applicant answers at most two questions. The tree asks three in all - it is exactly the tree of step 2 on slide 8 - but the third, on the right, splits 229 high-debt applicants into two groups that are both predicted “default”, so it changes no prediction and draws no line. What the boundary shows is the income floor and the debt ceiling - the two biggest, easiest-to-find regions - and neither interior island is visible at all. At depth 8 both islands appear as clean rectangles, close to the rule that generated the data. At full depth the boundary has grown a fringe of tiny rectangles chasing individual flipped labels.</a:t>
+            </a:r>
+          </a:p>
+          <a:p>
+            <a:pPr lvl="0" indent="0" marL="0">
+              <a:buNone/>
+            </a:pPr>
+          </a:p>
+          <a:p>
+            <a:pPr lvl="0" indent="0" marL="0">
+              <a:buNone/>
+            </a:pPr>
+            <a:r>
+              <a:rPr/>
+              <a:t>Make the point explicit: the full-depth boundary is not a smoother version of the depth-8 boundary. It is a noisier one, built out of the same mechanism that gave the unconstrained tree its perfect training score.</a:t>
+            </a:r>
+          </a:p>
+          <a:p>
+            <a:pPr lvl="0" indent="0" marL="0">
+              <a:buNone/>
+            </a:pPr>
+          </a:p>
+          <a:p>
+            <a:pPr lvl="0" indent="0" marL="0">
+              <a:buNone/>
+            </a:pPr>
+            <a:r>
+              <a:rPr/>
+              <a:t>Ask the room which of the three they would trust on a loan applicant they had never seen. Handout section 3.</a:t>
             </a:r>
           </a:p>
         </p:txBody>
@@ -2253,21 +2282,21 @@
             </a:pPr>
             <a:r>
               <a:rPr/>
-              <a:t>This is the instability that ensembles turn into raw material. The strongest split barely moves between the two samples, 0.820 against 0.819, because the evidence behind it is overwhelming: each tree sees 780 applicants, and on the full data the debt ceiling separates 26% default from 94%, a contrast no sample of that size can hide. Every later split is made inside a smaller group, supported by far fewer applicants, and those splits are what actually determine a tree’s shape.</a:t>
-            </a:r>
-          </a:p>
-          <a:p>
-            <a:pPr lvl="0" indent="0" marL="0">
-              <a:buNone/>
-            </a:pPr>
-          </a:p>
-          <a:p>
-            <a:pPr lvl="0" indent="0" marL="0">
-              <a:buNone/>
-            </a:pPr>
-            <a:r>
-              <a:rPr/>
-              <a:t>Ask the room what 11.7% disagreement between two trees fit to overlapping samples of the same applicants implies about trusting any single tree’s exact boundary. The answer is the whole of the next segment: a single tree’s instability looks like a flaw, and it is about to become a strength.</a:t>
+              <a:t>This is the readability half of the story. The two knobs limit different things. A depth cap limits how long any one path can be, and inside that cap every node that can be split is split - slide 23’s depth-2 tree spent one of its three questions on a split that changed no prediction. A leaf budget limits how many leaves the whole tree may have, and spends them one at a time on whichever leaf gains most. For a tree meant to be read rather than merely scored, the budget is the better knob: a small number of splits goes to the ones that matter most.</a:t>
+            </a:r>
+          </a:p>
+          <a:p>
+            <a:pPr lvl="0" indent="0" marL="0">
+              <a:buNone/>
+            </a:pPr>
+          </a:p>
+          <a:p>
+            <a:pPr lvl="0" indent="0" marL="0">
+              <a:buNone/>
+            </a:pPr>
+            <a:r>
+              <a:rPr/>
+              <a:t>The nine-leaf tree is worth reading aloud as a sequence of if/else statements - that is the entire model, and it is the thing k-nearest neighbours and support vector machines cannot offer at all. For a decision that has to be justified to the person it affects, that can matter as much as accuracy.</a:t>
             </a:r>
           </a:p>
           <a:p>
@@ -2363,49 +2392,35 @@
             </a:pPr>
             <a:r>
               <a:rPr/>
-              <a:t>The table is the notebook’s map: each section, the calls it makes, the slides that introduced the idea, and the number to come back with. Decision trees from scratch, checked against scikit-learn; depth swept, the boundaries drawn, and the instability measured.</a:t>
-            </a:r>
-          </a:p>
-          <a:p>
-            <a:pPr lvl="0" indent="0" marL="0">
-              <a:buNone/>
-            </a:pPr>
-          </a:p>
-          <a:p>
-            <a:pPr lvl="0" indent="0" marL="0">
-              <a:buNone/>
-            </a:pPr>
-            <a:r>
-              <a:rPr/>
-              <a:t>Run Notebooks/01_decision_trees_from_scratch.ipynb. Twenty minutes.</a:t>
-            </a:r>
-          </a:p>
-          <a:p>
-            <a:pPr lvl="0" indent="0" marL="0">
-              <a:buNone/>
-            </a:pPr>
-          </a:p>
-          <a:p>
-            <a:pPr lvl="0" indent="0" marL="0">
-              <a:buNone/>
-            </a:pPr>
-            <a:r>
-              <a:rPr/>
-              <a:t>Have them watch the from-scratch implementation confirm the debt-ceiling root split before scikit-learn’s version ever runs - the point is that the agreement is not assumed, it is checked, at every depth.</a:t>
-            </a:r>
-          </a:p>
-          <a:p>
-            <a:pPr lvl="0" indent="0" marL="0">
-              <a:buNone/>
-            </a:pPr>
-          </a:p>
-          <a:p>
-            <a:pPr lvl="0" indent="0" marL="0">
-              <a:buNone/>
-            </a:pPr>
-            <a:r>
-              <a:rPr/>
-              <a:t>The cell worth protecting if time is short is the two-tree resampling comparison at the end: the notebook prints an agreement of 0.883, which is the 11.7% disagreement of the previous slide, and seeing it appear on their own screen lands harder than reading it off a slide.</a:t>
+              <a:t>This is the instability that ensembles turn into raw material. The strongest split barely moves between the two samples, 0.820 against 0.819, because the evidence behind it is overwhelming: each tree sees 780 applicants, and on the full data the debt ceiling separates 26% default from 94%, a contrast no sample of that size can hide. Every later split is made inside a smaller group, supported by far fewer applicants, and those splits are what actually determine a tree’s shape.</a:t>
+            </a:r>
+          </a:p>
+          <a:p>
+            <a:pPr lvl="0" indent="0" marL="0">
+              <a:buNone/>
+            </a:pPr>
+          </a:p>
+          <a:p>
+            <a:pPr lvl="0" indent="0" marL="0">
+              <a:buNone/>
+            </a:pPr>
+            <a:r>
+              <a:rPr/>
+              <a:t>Ask the room what 11.7% disagreement between two trees fit to overlapping samples of the same applicants implies about trusting any single tree’s exact boundary. The answer is the whole of the next segment: a single tree’s instability looks like a flaw, and it is about to become a strength.</a:t>
+            </a:r>
+          </a:p>
+          <a:p>
+            <a:pPr lvl="0" indent="0" marL="0">
+              <a:buNone/>
+            </a:pPr>
+          </a:p>
+          <a:p>
+            <a:pPr lvl="0" indent="0" marL="0">
+              <a:buNone/>
+            </a:pPr>
+            <a:r>
+              <a:rPr/>
+              <a:t>Handout section 4.</a:t>
             </a:r>
           </a:p>
         </p:txBody>
@@ -2487,7 +2502,49 @@
             </a:pPr>
             <a:r>
               <a:rPr/>
-              <a:t>Twelve minutes. The next segment is where the lesson’s real content starts - one tree’s instability, turned into an ensemble’s strength - so they need to come back with that framing fresh.</a:t>
+              <a:t>The table is the notebook’s map: each section, the calls it makes, the slides that introduced the idea, and the number to come back with. Decision trees from scratch, checked against scikit-learn; depth swept, the boundaries drawn, and the instability measured.</a:t>
+            </a:r>
+          </a:p>
+          <a:p>
+            <a:pPr lvl="0" indent="0" marL="0">
+              <a:buNone/>
+            </a:pPr>
+          </a:p>
+          <a:p>
+            <a:pPr lvl="0" indent="0" marL="0">
+              <a:buNone/>
+            </a:pPr>
+            <a:r>
+              <a:rPr/>
+              <a:t>Run Notebooks/01_decision_trees_from_scratch.ipynb. Twenty minutes.</a:t>
+            </a:r>
+          </a:p>
+          <a:p>
+            <a:pPr lvl="0" indent="0" marL="0">
+              <a:buNone/>
+            </a:pPr>
+          </a:p>
+          <a:p>
+            <a:pPr lvl="0" indent="0" marL="0">
+              <a:buNone/>
+            </a:pPr>
+            <a:r>
+              <a:rPr/>
+              <a:t>Have them watch the from-scratch implementation confirm the debt-ceiling root split before scikit-learn’s version ever runs - the point is that the agreement is not assumed, it is checked, at every depth.</a:t>
+            </a:r>
+          </a:p>
+          <a:p>
+            <a:pPr lvl="0" indent="0" marL="0">
+              <a:buNone/>
+            </a:pPr>
+          </a:p>
+          <a:p>
+            <a:pPr lvl="0" indent="0" marL="0">
+              <a:buNone/>
+            </a:pPr>
+            <a:r>
+              <a:rPr/>
+              <a:t>The cell worth protecting if time is short is the two-tree resampling comparison at the end: the notebook prints an agreement of 0.883, which is the 11.7% disagreement of the previous slide, and seeing it appear on their own screen lands harder than reading it off a slide.</a:t>
             </a:r>
           </a:p>
         </p:txBody>
@@ -2569,73 +2626,7 @@
             </a:pPr>
             <a:r>
               <a:rPr/>
-              <a:t>State the logic before the name. Two slides before the break measured that two trees fit to overlapping samples disagree on more than a tenth of predictions. If those disagreements are close to random, averaging many such trees should cancel some of them out - that is the entire idea behind bagging, bootstrap aggregating.</a:t>
-            </a:r>
-          </a:p>
-          <a:p>
-            <a:pPr lvl="0" indent="0" marL="0">
-              <a:buNone/>
-            </a:pPr>
-          </a:p>
-          <a:p>
-            <a:pPr lvl="0" indent="0" marL="0">
-              <a:buNone/>
-            </a:pPr>
-            <a:r>
-              <a:rPr/>
-              <a:t>Say that the tree algorithm itself is unchanged: bagging reuses the first hour’s tree as it is, and only what surrounds it is new.</a:t>
-            </a:r>
-          </a:p>
-          <a:p>
-            <a:pPr lvl="0" indent="0" marL="0">
-              <a:buNone/>
-            </a:pPr>
-          </a:p>
-          <a:p>
-            <a:pPr lvl="0" indent="0" marL="0">
-              <a:buNone/>
-            </a:pPr>
-            <a:r>
-              <a:rPr/>
-              <a:t>Be precise about “with replacement”: some rows appear more than once in a given sample, some not at all. That leftover fraction is not wasted - it becomes free validation data, on slide 30.</a:t>
-            </a:r>
-          </a:p>
-          <a:p>
-            <a:pPr lvl="0" indent="0" marL="0">
-              <a:buNone/>
-            </a:pPr>
-          </a:p>
-          <a:p>
-            <a:pPr lvl="0" indent="0" marL="0">
-              <a:buNone/>
-            </a:pPr>
-            <a:r>
-              <a:rPr/>
-              <a:t>One detail of the In code line, if asked: scikit-learn’s </a:t>
-            </a:r>
-            <a:r>
-              <a:rPr>
-                <a:latin typeface="Courier"/>
-              </a:rPr>
-              <a:t>BaggingClassifier</a:t>
-            </a:r>
-            <a:r>
-              <a:rPr/>
-              <a:t> does not count votes, it averages the trees’ predicted probabilities. With fully grown trees the two are the same thing: every leaf is pure, so each tree’s probability is 0 or 1, and averaging 0s and 1s is counting votes. So notebook 2’s own majority-vote version and scikit-learn’s apply the same rule. They do not use the same trees - each draws its own bootstrap samples - and still they make the same prediction for all 360 test applicants, 0.872 both: with 100 trees, the luck of any one sample is outvoted.</a:t>
-            </a:r>
-          </a:p>
-          <a:p>
-            <a:pPr lvl="0" indent="0" marL="0">
-              <a:buNone/>
-            </a:pPr>
-          </a:p>
-          <a:p>
-            <a:pPr lvl="0" indent="0" marL="0">
-              <a:buNone/>
-            </a:pPr>
-            <a:r>
-              <a:rPr/>
-              <a:t>Handout section 5.</a:t>
+              <a:t>Twelve minutes. The next segment is where the lesson’s real content starts - one tree’s instability, turned into an ensemble’s strength - so they need to come back with that framing fresh.</a:t>
             </a:r>
           </a:p>
         </p:txBody>
@@ -2717,49 +2708,73 @@
             </a:pPr>
             <a:r>
               <a:rPr/>
-              <a:t>Give the one line of reasoning, not the limit. Each draw misses a given row with probability 1 - 1/m, and the m draws are independent, so the row is missed by all of them with probability (1 - 1/m) to the power m. At m = 1,200 that is 0.3677; as m grows it tends to 1/e, 0.368, which is the standard exponential limit worked out in handout section 5.1. What matters here is the consequence: every bootstrap tree automatically leaves out over a third of the rows, and never sees them.</a:t>
-            </a:r>
-          </a:p>
-          <a:p>
-            <a:pPr lvl="0" indent="0" marL="0">
-              <a:buNone/>
-            </a:pPr>
-          </a:p>
-          <a:p>
-            <a:pPr lvl="0" indent="0" marL="0">
-              <a:buNone/>
-            </a:pPr>
-            <a:r>
-              <a:rPr/>
-              <a:t>A predictable slip: “so each tree is trained on 63.2% of the data, 759 rows”. It is reasonable, because 63.2% is the number on the slide. But the sample still has 1,200 draws: about 759 different rows, and the other 441 draws are repeats of rows already drawn. The tree sees 1,200 rows, some of them twice or three times - the next slide counts them.</a:t>
-            </a:r>
-          </a:p>
-          <a:p>
-            <a:pPr lvl="0" indent="0" marL="0">
-              <a:buNone/>
-            </a:pPr>
-          </a:p>
-          <a:p>
-            <a:pPr lvl="0" indent="0" marL="0">
-              <a:buNone/>
-            </a:pPr>
-            <a:r>
-              <a:rPr/>
-              <a:t>Ask the room what that leftover third is good for. The answer is slide 30, after the counts: it is validation data for exactly the trees that never saw it.</a:t>
-            </a:r>
-          </a:p>
-          <a:p>
-            <a:pPr lvl="0" indent="0" marL="0">
-              <a:buNone/>
-            </a:pPr>
-          </a:p>
-          <a:p>
-            <a:pPr lvl="0" indent="0" marL="0">
-              <a:buNone/>
-            </a:pPr>
-            <a:r>
-              <a:rPr/>
-              <a:t>Handout section 5.1.</a:t>
+              <a:t>State the logic before the name. Two slides before the break measured that two trees fit to overlapping samples disagree on more than a tenth of predictions. If those disagreements are close to random, averaging many such trees should cancel some of them out - that is the entire idea behind bagging, bootstrap aggregating.</a:t>
+            </a:r>
+          </a:p>
+          <a:p>
+            <a:pPr lvl="0" indent="0" marL="0">
+              <a:buNone/>
+            </a:pPr>
+          </a:p>
+          <a:p>
+            <a:pPr lvl="0" indent="0" marL="0">
+              <a:buNone/>
+            </a:pPr>
+            <a:r>
+              <a:rPr/>
+              <a:t>Say that the tree algorithm itself is unchanged: bagging reuses the first hour’s tree as it is, and only what surrounds it is new.</a:t>
+            </a:r>
+          </a:p>
+          <a:p>
+            <a:pPr lvl="0" indent="0" marL="0">
+              <a:buNone/>
+            </a:pPr>
+          </a:p>
+          <a:p>
+            <a:pPr lvl="0" indent="0" marL="0">
+              <a:buNone/>
+            </a:pPr>
+            <a:r>
+              <a:rPr/>
+              <a:t>Be precise about “with replacement”: some rows appear more than once in a given sample, some not at all. That leftover fraction is not wasted - it becomes free validation data, on slide 31.</a:t>
+            </a:r>
+          </a:p>
+          <a:p>
+            <a:pPr lvl="0" indent="0" marL="0">
+              <a:buNone/>
+            </a:pPr>
+          </a:p>
+          <a:p>
+            <a:pPr lvl="0" indent="0" marL="0">
+              <a:buNone/>
+            </a:pPr>
+            <a:r>
+              <a:rPr/>
+              <a:t>One detail of the In code line, if asked: scikit-learn’s </a:t>
+            </a:r>
+            <a:r>
+              <a:rPr>
+                <a:latin typeface="Courier"/>
+              </a:rPr>
+              <a:t>BaggingClassifier</a:t>
+            </a:r>
+            <a:r>
+              <a:rPr/>
+              <a:t> does not count votes, it averages the trees’ predicted probabilities. With fully grown trees the two are the same thing: every leaf is pure, so each tree’s probability is 0 or 1, and averaging 0s and 1s is counting votes. So notebook 2’s own majority-vote version and scikit-learn’s apply the same rule. They do not use the same trees - each draws its own bootstrap samples - and still they make the same prediction for all 360 test applicants, 0.872 both: with 100 trees, the luck of any one sample is outvoted.</a:t>
+            </a:r>
+          </a:p>
+          <a:p>
+            <a:pPr lvl="0" indent="0" marL="0">
+              <a:buNone/>
+            </a:pPr>
+          </a:p>
+          <a:p>
+            <a:pPr lvl="0" indent="0" marL="0">
+              <a:buNone/>
+            </a:pPr>
+            <a:r>
+              <a:rPr/>
+              <a:t>Handout section 5.</a:t>
             </a:r>
           </a:p>
         </p:txBody>
@@ -2841,35 +2856,49 @@
             </a:pPr>
             <a:r>
               <a:rPr/>
-              <a:t>How often each of the 1,200 loans turns up in one bootstrap sample, blue, against the limit e^-1 / k!, gold. The first bar is the out-of-bag share: 0.366 here, 0.368 in the limit. The rest are rows drawn once, twice, three times.</a:t>
-            </a:r>
-          </a:p>
-          <a:p>
-            <a:pPr lvl="0" indent="0" marL="0">
-              <a:buNone/>
-            </a:pPr>
-          </a:p>
-          <a:p>
-            <a:pPr lvl="0" indent="0" marL="0">
-              <a:buNone/>
-            </a:pPr>
-            <a:r>
-              <a:rPr/>
-              <a:t>Where the gold bars come from, if asked: the number of times one row is drawn counts successes in 1,200 draws, each with probability 1/1,200. As the number of draws grows with the chance kept at one per row, that count follows the Poisson distribution with mean 1, which gives a fraction e^-1 / k! of rows drawn exactly k times: 0.368 never, 0.368 once, 0.184 twice, 0.061 three times.</a:t>
-            </a:r>
-          </a:p>
-          <a:p>
-            <a:pPr lvl="0" indent="0" marL="0">
-              <a:buNone/>
-            </a:pPr>
-          </a:p>
-          <a:p>
-            <a:pPr lvl="0" indent="0" marL="0">
-              <a:buNone/>
-            </a:pPr>
-            <a:r>
-              <a:rPr/>
-              <a:t>The point to make: about one row in four appears two or more times. Every tree sees a different mix of repeats and absences, and that is where their disagreement - the raw material of bagging - comes from. Handout section 5.1.</a:t>
+              <a:t>Give the one line of reasoning, not the limit. Each draw misses a given row with probability 1 - 1/m, and the m draws are independent, so the row is missed by all of them with probability (1 - 1/m) to the power m. At m = 1,200 that is 0.3677; as m grows it tends to 1/e, 0.368, which is the standard exponential limit worked out in handout section 5.1. What matters here is the consequence: every bootstrap tree automatically leaves out over a third of the rows, and never sees them.</a:t>
+            </a:r>
+          </a:p>
+          <a:p>
+            <a:pPr lvl="0" indent="0" marL="0">
+              <a:buNone/>
+            </a:pPr>
+          </a:p>
+          <a:p>
+            <a:pPr lvl="0" indent="0" marL="0">
+              <a:buNone/>
+            </a:pPr>
+            <a:r>
+              <a:rPr/>
+              <a:t>A predictable slip: “so each tree is trained on 63.2% of the data, 759 rows”. It is reasonable, because 63.2% is the number on the slide. But the sample still has 1,200 draws: about 759 different rows, and the other 441 draws are repeats of rows already drawn. The tree sees 1,200 rows, some of them twice or three times - the next slide counts them.</a:t>
+            </a:r>
+          </a:p>
+          <a:p>
+            <a:pPr lvl="0" indent="0" marL="0">
+              <a:buNone/>
+            </a:pPr>
+          </a:p>
+          <a:p>
+            <a:pPr lvl="0" indent="0" marL="0">
+              <a:buNone/>
+            </a:pPr>
+            <a:r>
+              <a:rPr/>
+              <a:t>Ask the room what that leftover third is good for. The answer is slide 31, after the counts: it is validation data for exactly the trees that never saw it.</a:t>
+            </a:r>
+          </a:p>
+          <a:p>
+            <a:pPr lvl="0" indent="0" marL="0">
+              <a:buNone/>
+            </a:pPr>
+          </a:p>
+          <a:p>
+            <a:pPr lvl="0" indent="0" marL="0">
+              <a:buNone/>
+            </a:pPr>
+            <a:r>
+              <a:rPr/>
+              <a:t>Handout section 5.1.</a:t>
             </a:r>
           </a:p>
         </p:txBody>
@@ -2951,81 +2980,35 @@
             </a:pPr>
             <a:r>
               <a:rPr/>
-              <a:t>The forest here comes four slides before its definition: a random forest is bagging with one extra rule, which slide 34 gives, and scikit-learn computes the OOB score for it with </a:t>
-            </a:r>
-            <a:r>
-              <a:rPr>
-                <a:latin typeface="Courier"/>
-              </a:rPr>
-              <a:t>oob_score=True</a:t>
-            </a:r>
-            <a:r>
-              <a:rPr/>
-              <a:t>. For this slide, read it as “300 bagged trees”.</a:t>
-            </a:r>
-          </a:p>
-          <a:p>
-            <a:pPr lvl="0" indent="0" marL="0">
-              <a:buNone/>
-            </a:pPr>
-          </a:p>
-          <a:p>
-            <a:pPr lvl="0" indent="0" marL="0">
-              <a:buNone/>
-            </a:pPr>
-            <a:r>
-              <a:rPr/>
-              <a:t>The agreement is the point, but be careful how you sell it. On this seed the two numbers match to four decimal places, and that is luck: over twelve seeds the typical gap is 0.0026 and the worst is 0.0075. What is not luck is that they track each other well inside cross-validation’s own ±0.021 spread, because the OOB score works like cross-validation: every row is scored only by models that never saw it. The bookkeeping differs. In 5-fold cross-validation each fold is scored by a whole forest trained without that fold. Out-of-bag, each row is scored by the trees whose bootstrap sample missed it - about a third of the forest, and a different third for each row. There is no single out-of-bag set.</a:t>
-            </a:r>
-          </a:p>
-          <a:p>
-            <a:pPr lvl="0" indent="0" marL="0">
-              <a:buNone/>
-            </a:pPr>
-          </a:p>
-          <a:p>
-            <a:pPr lvl="0" indent="0" marL="0">
-              <a:buNone/>
-            </a:pPr>
-            <a:r>
-              <a:rPr/>
-              <a:t>Worth pausing on, because it is a habit rather than a fact: </a:t>
-            </a:r>
-            <a:r>
-              <a:rPr b="1"/>
-              <a:t>a single coincidence is not evidence of a law.</a:t>
-            </a:r>
-            <a:r>
-              <a:rPr/>
-              <a:t> If you catch yourself saying “exactly”, run it again with another seed. They will need that reflex in their own exercises, and it is cheaper to learn it here.</a:t>
-            </a:r>
-          </a:p>
-          <a:p>
-            <a:pPr lvl="0" indent="0" marL="0">
-              <a:buNone/>
-            </a:pPr>
-          </a:p>
-          <a:p>
-            <a:pPr lvl="0" indent="0" marL="0">
-              <a:buNone/>
-            </a:pPr>
-            <a:r>
-              <a:rPr/>
-              <a:t>Then make the practical consequence explicit: with a bagged ensemble you get a trustworthy estimate of generalisation for free, without setting aside a separate validation set at all - just not one to read to the fourth decimal.</a:t>
-            </a:r>
-          </a:p>
-          <a:p>
-            <a:pPr lvl="0" indent="0" marL="0">
-              <a:buNone/>
-            </a:pPr>
-          </a:p>
-          <a:p>
-            <a:pPr lvl="0" indent="0" marL="0">
-              <a:buNone/>
-            </a:pPr>
-            <a:r>
-              <a:rPr/>
-              <a:t>Handout section 5.1.</a:t>
+              <a:t>How often each of the 1,200 loans turns up in one bootstrap sample, blue, against the limit e^-1 / k!, gold. The first bar is the out-of-bag share: 0.366 here, 0.368 in the limit. The rest are rows drawn once, twice, three times.</a:t>
+            </a:r>
+          </a:p>
+          <a:p>
+            <a:pPr lvl="0" indent="0" marL="0">
+              <a:buNone/>
+            </a:pPr>
+          </a:p>
+          <a:p>
+            <a:pPr lvl="0" indent="0" marL="0">
+              <a:buNone/>
+            </a:pPr>
+            <a:r>
+              <a:rPr/>
+              <a:t>Where the gold bars come from, if asked: the number of times one row is drawn counts successes in 1,200 draws, each with probability 1/1,200. As the number of draws grows with the chance kept at one per row, that count follows the Poisson distribution with mean 1, which gives a fraction e^-1 / k! of rows drawn exactly k times: 0.368 never, 0.368 once, 0.184 twice, 0.061 three times.</a:t>
+            </a:r>
+          </a:p>
+          <a:p>
+            <a:pPr lvl="0" indent="0" marL="0">
+              <a:buNone/>
+            </a:pPr>
+          </a:p>
+          <a:p>
+            <a:pPr lvl="0" indent="0" marL="0">
+              <a:buNone/>
+            </a:pPr>
+            <a:r>
+              <a:rPr/>
+              <a:t>The point to make: about one row in four appears two or more times. Every tree sees a different mix of repeats and absences, and that is where their disagreement - the raw material of bagging - comes from. Handout section 5.1.</a:t>
             </a:r>
           </a:p>
         </p:txBody>
@@ -3231,35 +3214,81 @@
             </a:pPr>
             <a:r>
               <a:rPr/>
-              <a:t>State the headline, not the algebra - the covariance expansion behind this is in handout section 5.2, and it does not belong on a slide. Read the formula on the slide in two pieces: the first term, sigma squared over B, shrinks as trees are added; the second, (B - 1)/B times rho sigma squared, grows towards rho sigma squared and stays there. The two consequences are what matter: there is a floor variance cannot fall below, set by how correlated the trees are with each other, and averaging is a variance tool only, powerless against a systematic mistake shared by every tree.</a:t>
-            </a:r>
-          </a:p>
-          <a:p>
-            <a:pPr lvl="0" indent="0" marL="0">
-              <a:buNone/>
-            </a:pPr>
-          </a:p>
-          <a:p>
-            <a:pPr lvl="0" indent="0" marL="0">
-              <a:buNone/>
-            </a:pPr>
-            <a:r>
-              <a:rPr/>
-              <a:t>That second point is worth a beat: bagging does nothing for a tree that is too shallow to represent the rule in the first place. It cleans up noise, it does not add capability. The bullet is worded with care on purpose. For an average of numbers, averaging leaves the bias exactly where it was. A vote between classifiers is not an average of numbers, and it can change which side of the boundary a point falls on - which is why, two slides on, bagging raises the mean accuracy and not only narrows the spread. What no amount of voting can do is fix a mistake that every tree makes.</a:t>
-            </a:r>
-          </a:p>
-          <a:p>
-            <a:pPr lvl="0" indent="0" marL="0">
-              <a:buNone/>
-            </a:pPr>
-          </a:p>
-          <a:p>
-            <a:pPr lvl="0" indent="0" marL="0">
-              <a:buNone/>
-            </a:pPr>
-            <a:r>
-              <a:rPr/>
-              <a:t>Handout section 5.2.</a:t>
+              <a:t>The forest here comes four slides before its definition: a random forest is bagging with one extra rule, which slide 35 gives, and scikit-learn computes the OOB score for it with </a:t>
+            </a:r>
+            <a:r>
+              <a:rPr>
+                <a:latin typeface="Courier"/>
+              </a:rPr>
+              <a:t>oob_score=True</a:t>
+            </a:r>
+            <a:r>
+              <a:rPr/>
+              <a:t>. For this slide, read it as “300 bagged trees”.</a:t>
+            </a:r>
+          </a:p>
+          <a:p>
+            <a:pPr lvl="0" indent="0" marL="0">
+              <a:buNone/>
+            </a:pPr>
+          </a:p>
+          <a:p>
+            <a:pPr lvl="0" indent="0" marL="0">
+              <a:buNone/>
+            </a:pPr>
+            <a:r>
+              <a:rPr/>
+              <a:t>The agreement is the point, but be careful how you sell it. On this seed the two numbers match to four decimal places, and that is luck: over twelve seeds the typical gap is 0.0026 and the worst is 0.0075. What is not luck is that they track each other well inside cross-validation’s own ±0.021 spread, because the OOB score works like cross-validation: every row is scored only by models that never saw it. The bookkeeping differs. In 5-fold cross-validation each fold is scored by a whole forest trained without that fold. Out-of-bag, each row is scored by the trees whose bootstrap sample missed it - about a third of the forest, and a different third for each row. There is no single out-of-bag set.</a:t>
+            </a:r>
+          </a:p>
+          <a:p>
+            <a:pPr lvl="0" indent="0" marL="0">
+              <a:buNone/>
+            </a:pPr>
+          </a:p>
+          <a:p>
+            <a:pPr lvl="0" indent="0" marL="0">
+              <a:buNone/>
+            </a:pPr>
+            <a:r>
+              <a:rPr/>
+              <a:t>Worth pausing on, because it is a habit rather than a fact: </a:t>
+            </a:r>
+            <a:r>
+              <a:rPr b="1"/>
+              <a:t>a single coincidence is not evidence of a law.</a:t>
+            </a:r>
+            <a:r>
+              <a:rPr/>
+              <a:t> If you catch yourself saying “exactly”, run it again with another seed. They will need that reflex in their own exercises, and it is cheaper to learn it here.</a:t>
+            </a:r>
+          </a:p>
+          <a:p>
+            <a:pPr lvl="0" indent="0" marL="0">
+              <a:buNone/>
+            </a:pPr>
+          </a:p>
+          <a:p>
+            <a:pPr lvl="0" indent="0" marL="0">
+              <a:buNone/>
+            </a:pPr>
+            <a:r>
+              <a:rPr/>
+              <a:t>Then make the practical consequence explicit: with a bagged ensemble you get a trustworthy estimate of generalisation for free, without setting aside a separate validation set at all - just not one to read to the fourth decimal.</a:t>
+            </a:r>
+          </a:p>
+          <a:p>
+            <a:pPr lvl="0" indent="0" marL="0">
+              <a:buNone/>
+            </a:pPr>
+          </a:p>
+          <a:p>
+            <a:pPr lvl="0" indent="0" marL="0">
+              <a:buNone/>
+            </a:pPr>
+            <a:r>
+              <a:rPr/>
+              <a:t>Handout section 5.1.</a:t>
             </a:r>
           </a:p>
         </p:txBody>
@@ -3341,21 +3370,35 @@
             </a:pPr>
             <a:r>
               <a:rPr/>
-              <a:t>The previous slide’s formula as curves: the variance of an average of B trees, as a share of one tree’s, for rho = 0, 0.2, 0.5 and 0.8.</a:t>
-            </a:r>
-          </a:p>
-          <a:p>
-            <a:pPr lvl="0" indent="0" marL="0">
-              <a:buNone/>
-            </a:pPr>
-          </a:p>
-          <a:p>
-            <a:pPr lvl="0" indent="0" marL="0">
-              <a:buNone/>
-            </a:pPr>
-            <a:r>
-              <a:rPr/>
-              <a:t>Only the rho = 0 curve goes to zero. Every other one flattens onto its dotted floor: at rho = 0.5, ten trees keep 0.550 of one tree’s variance and a hundred keep 0.505. Ask the room what the curves say about adding trees past fifty - almost nothing - and what the only remaining lever is: lower rho. That is the random forest, two slides on. Handout section 5.2.</a:t>
+              <a:t>State the headline, not the algebra - the covariance expansion behind this is in handout section 5.2, and it does not belong on a slide. Read the formula on the slide in two pieces: the first term, sigma squared over B, shrinks as trees are added; the second, (B - 1)/B times rho sigma squared, grows towards rho sigma squared and stays there. The two consequences are what matter: there is a floor variance cannot fall below, set by how correlated the trees are with each other, and averaging is a variance tool only, powerless against a systematic mistake shared by every tree.</a:t>
+            </a:r>
+          </a:p>
+          <a:p>
+            <a:pPr lvl="0" indent="0" marL="0">
+              <a:buNone/>
+            </a:pPr>
+          </a:p>
+          <a:p>
+            <a:pPr lvl="0" indent="0" marL="0">
+              <a:buNone/>
+            </a:pPr>
+            <a:r>
+              <a:rPr/>
+              <a:t>That second point is worth a beat: bagging does nothing for a tree that is too shallow to represent the rule in the first place. It cleans up noise, it does not add capability. The bullet is worded with care on purpose. For an average of numbers, averaging leaves the bias exactly where it was. A vote between classifiers is not an average of numbers, and it can change which side of the boundary a point falls on - which is why, two slides on, bagging raises the mean accuracy and not only narrows the spread. What no amount of voting can do is fix a mistake that every tree makes.</a:t>
+            </a:r>
+          </a:p>
+          <a:p>
+            <a:pPr lvl="0" indent="0" marL="0">
+              <a:buNone/>
+            </a:pPr>
+          </a:p>
+          <a:p>
+            <a:pPr lvl="0" indent="0" marL="0">
+              <a:buNone/>
+            </a:pPr>
+            <a:r>
+              <a:rPr/>
+              <a:t>Handout section 5.2.</a:t>
             </a:r>
           </a:p>
         </p:txBody>
@@ -3437,35 +3480,21 @@
             </a:pPr>
             <a:r>
               <a:rPr/>
-              <a:t>Across 30 random 70/30 splits of the loan data, both numbers moved in the predicted direction. The mean rose, because bagging also averages out some of a deep tree’s overfitting; the spread fell, which is what the formula of slide 31 leads us to expect. Say precisely what was measured, because it is not the formula’s quantity: the formula is about the variance of one prediction over bootstrap samples, while this table is the spread of test accuracy over 30 different train/test splits, which also carries the luck of which applicants landed in each test set. The measurement is consistent with the formula, not a direct check of it.</a:t>
-            </a:r>
-          </a:p>
-          <a:p>
-            <a:pPr lvl="0" indent="0" marL="0">
-              <a:buNone/>
-            </a:pPr>
-          </a:p>
-          <a:p>
-            <a:pPr lvl="0" indent="0" marL="0">
-              <a:buNone/>
-            </a:pPr>
-            <a:r>
-              <a:rPr/>
-              <a:t>Ask the room to name which of the two changes matters more for trusting a single deployed model - the tighter spread, because it means the number you report is less likely to be a lucky split.</a:t>
-            </a:r>
-          </a:p>
-          <a:p>
-            <a:pPr lvl="0" indent="0" marL="0">
-              <a:buNone/>
-            </a:pPr>
-          </a:p>
-          <a:p>
-            <a:pPr lvl="0" indent="0" marL="0">
-              <a:buNone/>
-            </a:pPr>
-            <a:r>
-              <a:rPr/>
-              <a:t>Handout section 5.2.</a:t>
+              <a:t>The previous slide’s formula as curves: the variance of an average of B trees, as a share of one tree’s, for rho = 0, 0.2, 0.5 and 0.8.</a:t>
+            </a:r>
+          </a:p>
+          <a:p>
+            <a:pPr lvl="0" indent="0" marL="0">
+              <a:buNone/>
+            </a:pPr>
+          </a:p>
+          <a:p>
+            <a:pPr lvl="0" indent="0" marL="0">
+              <a:buNone/>
+            </a:pPr>
+            <a:r>
+              <a:rPr/>
+              <a:t>Only the rho = 0 curve goes to zero. Every other one flattens onto its dotted floor: at rho = 0.5, ten trees keep 0.550 of one tree’s variance and a hundred keep 0.505. Ask the room what the curves say about adding trees past fifty - almost nothing - and what the only remaining lever is: lower rho. That is the random forest, two slides on. Handout section 5.2.</a:t>
             </a:r>
           </a:p>
         </p:txBody>
@@ -3547,35 +3576,35 @@
             </a:pPr>
             <a:r>
               <a:rPr/>
-              <a:t>Connect this directly to the previous slide’s algebra: if the floor is ρσ², the only way to push it lower is to push ρ down, and bootstrap resampling alone only does that partially, because every bagged tree still gets to see the full feature list.</a:t>
-            </a:r>
-          </a:p>
-          <a:p>
-            <a:pPr lvl="0" indent="0" marL="0">
-              <a:buNone/>
-            </a:pPr>
-          </a:p>
-          <a:p>
-            <a:pPr lvl="0" indent="0" marL="0">
-              <a:buNone/>
-            </a:pPr>
-            <a:r>
-              <a:rPr/>
-              <a:t>The random forest’s one change is a restriction, not an addition: at each split, only a random handful of candidate features is even offered. That forces disagreement between trees at the same point in the tree, purely by denying them the same menu.</a:t>
-            </a:r>
-          </a:p>
-          <a:p>
-            <a:pPr lvl="0" indent="0" marL="0">
-              <a:buNone/>
-            </a:pPr>
-          </a:p>
-          <a:p>
-            <a:pPr lvl="0" indent="0" marL="0">
-              <a:buNone/>
-            </a:pPr>
-            <a:r>
-              <a:rPr/>
-              <a:t>Handout section 6.</a:t>
+              <a:t>Across 30 random 70/30 splits of the loan data, both numbers moved in the predicted direction. The mean rose, because bagging also averages out some of a deep tree’s overfitting; the spread fell, which is what the formula of slide 32 leads us to expect. Say precisely what was measured, because it is not the formula’s quantity: the formula is about the variance of one prediction over bootstrap samples, while this table is the spread of test accuracy over 30 different train/test splits, which also carries the luck of which applicants landed in each test set. The measurement is consistent with the formula, not a direct check of it.</a:t>
+            </a:r>
+          </a:p>
+          <a:p>
+            <a:pPr lvl="0" indent="0" marL="0">
+              <a:buNone/>
+            </a:pPr>
+          </a:p>
+          <a:p>
+            <a:pPr lvl="0" indent="0" marL="0">
+              <a:buNone/>
+            </a:pPr>
+            <a:r>
+              <a:rPr/>
+              <a:t>Ask the room to name which of the two changes matters more for trusting a single deployed model - the tighter spread, because it means the number you report is less likely to be a lucky split.</a:t>
+            </a:r>
+          </a:p>
+          <a:p>
+            <a:pPr lvl="0" indent="0" marL="0">
+              <a:buNone/>
+            </a:pPr>
+          </a:p>
+          <a:p>
+            <a:pPr lvl="0" indent="0" marL="0">
+              <a:buNone/>
+            </a:pPr>
+            <a:r>
+              <a:rPr/>
+              <a:t>Handout section 5.2.</a:t>
             </a:r>
           </a:p>
         </p:txBody>
@@ -3657,35 +3686,21 @@
             </a:pPr>
             <a:r>
               <a:rPr/>
-              <a:t>The same 30 random 70/30 splits as the bagging table, now with the random forest added and drawn rather than tabulated (notebook 2, section 3). Each dot is one split’s test accuracy; the box holds the middle half of the 30, the red line is the median.</a:t>
-            </a:r>
-          </a:p>
-          <a:p>
-            <a:pPr lvl="0" indent="0" marL="0">
-              <a:buNone/>
-            </a:pPr>
-          </a:p>
-          <a:p>
-            <a:pPr lvl="0" indent="0" marL="0">
-              <a:buNone/>
-            </a:pPr>
-            <a:r>
-              <a:rPr/>
-              <a:t>Read it left to right: the boxes rise and narrow together. In numbers, the means are 0.856, 0.902 and 0.908, and the standard deviations 0.0185, 0.0153 and 0.0137. The random forest beats plain bagging on both counts - a better mean and a tighter spread - consistent with ρ having fallen further, as the restriction on the previous slide predicts. The step from bagging to the forest is much smaller than the step from one tree to bagging: averaging did most of the work, decorrelating added a little more.</a:t>
-            </a:r>
-          </a:p>
-          <a:p>
-            <a:pPr lvl="0" indent="0" marL="0">
-              <a:buNone/>
-            </a:pPr>
-          </a:p>
-          <a:p>
-            <a:pPr lvl="0" indent="0" marL="0">
-              <a:buNone/>
-            </a:pPr>
-            <a:r>
-              <a:rPr/>
-              <a:t>Say plainly what has and hasn’t changed: nothing about the splitting rule is different from the first hour’s trees. The only change across the three boxes is what surrounds the tree - resampling, then also restricting the feature menu.</a:t>
+              <a:t>Connect this directly to the previous slide’s algebra: if the floor is ρσ², the only way to push it lower is to push ρ down, and bootstrap resampling alone only does that partially, because every bagged tree still gets to see the full feature list.</a:t>
+            </a:r>
+          </a:p>
+          <a:p>
+            <a:pPr lvl="0" indent="0" marL="0">
+              <a:buNone/>
+            </a:pPr>
+          </a:p>
+          <a:p>
+            <a:pPr lvl="0" indent="0" marL="0">
+              <a:buNone/>
+            </a:pPr>
+            <a:r>
+              <a:rPr/>
+              <a:t>The random forest’s one change is a restriction, not an addition: at each split, only a random handful of candidate features is even offered. That forces disagreement between trees at the same point in the tree, purely by denying them the same menu.</a:t>
             </a:r>
           </a:p>
           <a:p>
@@ -3781,45 +3796,49 @@
             </a:pPr>
             <a:r>
               <a:rPr/>
-              <a:t>State the definition plainly, then set up the experiment. With just income and debt ratio in the dataset, feature importance is a clean, correct answer - both real features get essentially all the credit, because there is nothing else to compete with them.</a:t>
-            </a:r>
-          </a:p>
-          <a:p>
-            <a:pPr lvl="0" indent="0" marL="0">
-              <a:buNone/>
-            </a:pPr>
-          </a:p>
-          <a:p>
-            <a:pPr lvl="0" indent="0" marL="0">
-              <a:buNone/>
-            </a:pPr>
-            <a:r>
-              <a:rPr/>
-              <a:t>Ask the room to predict what happens as you add columns of pure noise - </a:t>
-            </a:r>
-            <a:r>
-              <a:rPr>
-                <a:latin typeface="Courier"/>
-              </a:rPr>
-              <a:t>np.random.normal</a:t>
-            </a:r>
-            <a:r>
-              <a:rPr/>
-              <a:t>, wired to nothing. Most will predict the noise columns get close to zero importance, because averaging over hundreds of trees should wash out anything with no signal. Do not confirm or deny yet - the next slide is the answer.</a:t>
-            </a:r>
-          </a:p>
-          <a:p>
-            <a:pPr lvl="0" indent="0" marL="0">
-              <a:buNone/>
-            </a:pPr>
-          </a:p>
-          <a:p>
-            <a:pPr lvl="0" indent="0" marL="0">
-              <a:buNone/>
-            </a:pPr>
-            <a:r>
-              <a:rPr/>
-              <a:t>Handout section 7.</a:t>
+              <a:t>The same 30 random 70/30 splits as the bagging table, now with the random forest added and drawn rather than tabulated (notebook 2, section 3). Each dot is one split’s test accuracy; the box holds the middle half of the 30, the red line is the median.</a:t>
+            </a:r>
+          </a:p>
+          <a:p>
+            <a:pPr lvl="0" indent="0" marL="0">
+              <a:buNone/>
+            </a:pPr>
+          </a:p>
+          <a:p>
+            <a:pPr lvl="0" indent="0" marL="0">
+              <a:buNone/>
+            </a:pPr>
+            <a:r>
+              <a:rPr/>
+              <a:t>Read it left to right: the boxes rise and narrow together. In numbers, the means are 0.856, 0.902 and 0.908, and the standard deviations 0.0185, 0.0153 and 0.0137. The random forest beats plain bagging on both counts - a better mean and a tighter spread - consistent with ρ having fallen further, as the restriction on the previous slide predicts. The step from bagging to the forest is much smaller than the step from one tree to bagging: averaging did most of the work, decorrelating added a little more.</a:t>
+            </a:r>
+          </a:p>
+          <a:p>
+            <a:pPr lvl="0" indent="0" marL="0">
+              <a:buNone/>
+            </a:pPr>
+          </a:p>
+          <a:p>
+            <a:pPr lvl="0" indent="0" marL="0">
+              <a:buNone/>
+            </a:pPr>
+            <a:r>
+              <a:rPr/>
+              <a:t>Say plainly what has and hasn’t changed: nothing about the splitting rule is different from the first hour’s trees. The only change across the three boxes is what surrounds the tree - resampling, then also restricting the feature menu.</a:t>
+            </a:r>
+          </a:p>
+          <a:p>
+            <a:pPr lvl="0" indent="0" marL="0">
+              <a:buNone/>
+            </a:pPr>
+          </a:p>
+          <a:p>
+            <a:pPr lvl="0" indent="0" marL="0">
+              <a:buNone/>
+            </a:pPr>
+            <a:r>
+              <a:rPr/>
+              <a:t>Handout section 6.</a:t>
             </a:r>
           </a:p>
         </p:txBody>
@@ -3901,21 +3920,21 @@
             </a:pPr>
             <a:r>
               <a:rPr/>
-              <a:t>Say what is plotted before pointing at it (notebook 2, section 5): a 300-tree random forest on the loan data with 0, 5 and 20 columns of random numbers added. Red, left axis: cross-validated accuracy. Blue, right axis: the share of the forest’s importance that lands on the noise columns.</a:t>
-            </a:r>
-          </a:p>
-          <a:p>
-            <a:pPr lvl="0" indent="0" marL="0">
-              <a:buNone/>
-            </a:pPr>
-          </a:p>
-          <a:p>
-            <a:pPr lvl="0" indent="0" marL="0">
-              <a:buNone/>
-            </a:pPr>
-            <a:r>
-              <a:rPr/>
-              <a:t>Follow the blue line, slowly, and let the last point sit before explaining anything: 0% with no noise, 33.9% with 5 columns, 54.5% with 20. With 20 pure-noise columns against 2 real features, more than half of the forest’s own importance scores land on columns that are </a:t>
+              <a:t>State the definition plainly, then set up the experiment. With just income and debt ratio in the dataset, feature importance is a clean, correct answer - both real features get essentially all the credit, because there is nothing else to compete with them.</a:t>
+            </a:r>
+          </a:p>
+          <a:p>
+            <a:pPr lvl="0" indent="0" marL="0">
+              <a:buNone/>
+            </a:pPr>
+          </a:p>
+          <a:p>
+            <a:pPr lvl="0" indent="0" marL="0">
+              <a:buNone/>
+            </a:pPr>
+            <a:r>
+              <a:rPr/>
+              <a:t>Ask the room to predict what happens as you add columns of pure noise - </a:t>
             </a:r>
             <a:r>
               <a:rPr>
@@ -3925,43 +3944,21 @@
             </a:r>
             <a:r>
               <a:rPr/>
-              <a:t> noise by construction. The red line falls at the same time, from 0.912 to 0.837, but gently: nothing in the accuracy warns that the importances have gone wrong.</a:t>
-            </a:r>
-          </a:p>
-          <a:p>
-            <a:pPr lvl="0" indent="0" marL="0">
-              <a:buNone/>
-            </a:pPr>
-          </a:p>
-          <a:p>
-            <a:pPr lvl="0" indent="0" marL="0">
-              <a:buNone/>
-            </a:pPr>
-            <a:r>
-              <a:rPr/>
-              <a:t>Name the instinct this breaks, and defend it before moving on: expecting an average over hundreds of trees to wash out noise is entirely reasonable - the variance-reduction result of the averaging slides is real and measured, and it does point the same way. It reduces the variance of the </a:t>
-            </a:r>
-            <a:r>
-              <a:rPr i="1"/>
-              <a:t>prediction</a:t>
-            </a:r>
-            <a:r>
-              <a:rPr/>
-              <a:t>. It does not guarantee small importance for irrelevant columns. Two things hand credit to noise, and slide 54 takes them apart: the random, incomplete menu at each split, and the deep splits on small groups, where some noise column always lowers the impurity a little by chance.</a:t>
-            </a:r>
-          </a:p>
-          <a:p>
-            <a:pPr lvl="0" indent="0" marL="0">
-              <a:buNone/>
-            </a:pPr>
-          </a:p>
-          <a:p>
-            <a:pPr lvl="0" indent="0" marL="0">
-              <a:buNone/>
-            </a:pPr>
-            <a:r>
-              <a:rPr/>
-              <a:t>The mechanism is in handout section 7. The practical consequence to leave them with: treat a random forest’s importances as suggestive, not definitive, when real features are few against many candidate columns - and check them, which is the next slide.</a:t>
+              <a:t>, wired to nothing. Most will predict the noise columns get close to zero importance, because averaging over hundreds of trees should wash out anything with no signal. Do not confirm or deny yet - the next slide is the answer.</a:t>
+            </a:r>
+          </a:p>
+          <a:p>
+            <a:pPr lvl="0" indent="0" marL="0">
+              <a:buNone/>
+            </a:pPr>
+          </a:p>
+          <a:p>
+            <a:pPr lvl="0" indent="0" marL="0">
+              <a:buNone/>
+            </a:pPr>
+            <a:r>
+              <a:rPr/>
+              <a:t>Handout section 7.</a:t>
             </a:r>
           </a:p>
         </p:txBody>
@@ -4043,57 +4040,67 @@
             </a:pPr>
             <a:r>
               <a:rPr/>
-              <a:t>Name the method and say its recipe before pointing at the figure. </a:t>
-            </a:r>
-            <a:r>
-              <a:rPr b="1"/>
-              <a:t>Permutation importance</a:t>
-            </a:r>
-            <a:r>
-              <a:rPr/>
-              <a:t>: take a fitted model and data it was not trained on; shuffle the values of one column, so that column no longer says anything about the applicant in its row; score the model again. The accuracy lost is that column’s importance. Repeat for every column. If the model never really used a column, shuffling it costs nothing.</a:t>
-            </a:r>
-          </a:p>
-          <a:p>
-            <a:pPr lvl="0" indent="0" marL="0">
-              <a:buNone/>
-            </a:pPr>
-          </a:p>
-          <a:p>
-            <a:pPr lvl="0" indent="0" marL="0">
-              <a:buNone/>
-            </a:pPr>
-            <a:r>
-              <a:rPr/>
-              <a:t>The figure is the 20-noise-column forest, trained on 70% of the applicants and checked on the other 30% (notebook 2, section 6). Left, the importance the forest reports for itself: more than half of it on the twenty noise columns. Right, the same 22 columns by permutation: debt ratio costs 0.18 of accuracy when shuffled, income 0.09, and every noise column costs almost nothing - between 0.003 lost and 0.002 gained.</a:t>
-            </a:r>
-          </a:p>
-          <a:p>
-            <a:pPr lvl="0" indent="0" marL="0">
-              <a:buNone/>
-            </a:pPr>
-          </a:p>
-          <a:p>
-            <a:pPr lvl="0" indent="0" marL="0">
-              <a:buNone/>
-            </a:pPr>
-            <a:r>
-              <a:rPr/>
-              <a:t>Two things to stress. Almost nothing, not exactly nothing: shuffling is random and the test set is finite, so a useless column moves the score by a few thousandths either way. And held-out data is what makes the check honest: on the training rows a deep forest has memorised its noise columns, and shuffling them would cost something there.</a:t>
-            </a:r>
-          </a:p>
-          <a:p>
-            <a:pPr lvl="0" indent="0" marL="0">
-              <a:buNone/>
-            </a:pPr>
-          </a:p>
-          <a:p>
-            <a:pPr lvl="0" indent="0" marL="0">
-              <a:buNone/>
-            </a:pPr>
-            <a:r>
-              <a:rPr/>
-              <a:t>The check costs one function call. The lesson to leave: a ranking the model reports about itself is a claim; shuffling on held-out data is the test of it. Handout section 7.1.</a:t>
+              <a:t>Say what is plotted before pointing at it (notebook 2, section 5): a 300-tree random forest on the loan data with 0, 5 and 20 columns of random numbers added. Red, left axis: cross-validated accuracy. Blue, right axis: the share of the forest’s importance that lands on the noise columns.</a:t>
+            </a:r>
+          </a:p>
+          <a:p>
+            <a:pPr lvl="0" indent="0" marL="0">
+              <a:buNone/>
+            </a:pPr>
+          </a:p>
+          <a:p>
+            <a:pPr lvl="0" indent="0" marL="0">
+              <a:buNone/>
+            </a:pPr>
+            <a:r>
+              <a:rPr/>
+              <a:t>Follow the blue line, slowly, and let the last point sit before explaining anything: 0% with no noise, 33.9% with 5 columns, 54.5% with 20. With 20 pure-noise columns against 2 real features, more than half of the forest’s own importance scores land on columns that are </a:t>
+            </a:r>
+            <a:r>
+              <a:rPr>
+                <a:latin typeface="Courier"/>
+              </a:rPr>
+              <a:t>np.random.normal</a:t>
+            </a:r>
+            <a:r>
+              <a:rPr/>
+              <a:t> noise by construction. The red line falls at the same time, from 0.912 to 0.837, but gently: nothing in the accuracy warns that the importances have gone wrong.</a:t>
+            </a:r>
+          </a:p>
+          <a:p>
+            <a:pPr lvl="0" indent="0" marL="0">
+              <a:buNone/>
+            </a:pPr>
+          </a:p>
+          <a:p>
+            <a:pPr lvl="0" indent="0" marL="0">
+              <a:buNone/>
+            </a:pPr>
+            <a:r>
+              <a:rPr/>
+              <a:t>Name the instinct this breaks, and defend it before moving on: expecting an average over hundreds of trees to wash out noise is entirely reasonable - the variance-reduction result of the averaging slides is real and measured, and it does point the same way. It reduces the variance of the </a:t>
+            </a:r>
+            <a:r>
+              <a:rPr i="1"/>
+              <a:t>prediction</a:t>
+            </a:r>
+            <a:r>
+              <a:rPr/>
+              <a:t>. It does not guarantee small importance for irrelevant columns. Two things hand credit to noise, and slide 55 takes them apart: the random, incomplete menu at each split, and the deep splits on small groups, where some noise column always lowers the impurity a little by chance.</a:t>
+            </a:r>
+          </a:p>
+          <a:p>
+            <a:pPr lvl="0" indent="0" marL="0">
+              <a:buNone/>
+            </a:pPr>
+          </a:p>
+          <a:p>
+            <a:pPr lvl="0" indent="0" marL="0">
+              <a:buNone/>
+            </a:pPr>
+            <a:r>
+              <a:rPr/>
+              <a:t>The mechanism is in handout section 7. The practical consequence to leave them with: treat a random forest’s importances as suggestive, not definitive, when real features are few against many candidate columns - and check them, which is the next slide.</a:t>
             </a:r>
           </a:p>
         </p:txBody>
@@ -4175,69 +4182,57 @@
             </a:pPr>
             <a:r>
               <a:rPr/>
-              <a:t>The table is the notebook’s map: bagging from scratch and against scikit-learn, the out-of-bag score checked against cross-validation, the variance measured over 30 splits, the noise-column experiment, and the permutation check of the previous slide. Section 4 of the notebook is reading only, which is why the table skips it.</a:t>
-            </a:r>
-          </a:p>
-          <a:p>
-            <a:pPr lvl="0" indent="0" marL="0">
-              <a:buNone/>
-            </a:pPr>
-          </a:p>
-          <a:p>
-            <a:pPr lvl="0" indent="0" marL="0">
-              <a:buNone/>
-            </a:pPr>
-            <a:r>
-              <a:rPr/>
-              <a:t>Run Notebooks/02_bagging_and_random_forests.ipynb. Eighteen minutes.</a:t>
-            </a:r>
-          </a:p>
-          <a:p>
-            <a:pPr lvl="0" indent="0" marL="0">
-              <a:buNone/>
-            </a:pPr>
-          </a:p>
-          <a:p>
-            <a:pPr lvl="0" indent="0" marL="0">
-              <a:buNone/>
-            </a:pPr>
-            <a:r>
-              <a:rPr/>
-              <a:t>The cell to protect is the noise-column sweep. Let them add the columns themselves and watch the importance share climb - reading the number off a slide does not land the same way as watching it happen.</a:t>
-            </a:r>
-          </a:p>
-          <a:p>
-            <a:pPr lvl="0" indent="0" marL="0">
-              <a:buNone/>
-            </a:pPr>
-          </a:p>
-          <a:p>
-            <a:pPr lvl="0" indent="0" marL="0">
-              <a:buNone/>
-            </a:pPr>
-            <a:r>
-              <a:rPr/>
-              <a:t>If time allows, section 6 also tries </a:t>
-            </a:r>
-            <a:r>
-              <a:rPr>
-                <a:latin typeface="Courier"/>
-              </a:rPr>
-              <a:t>max_features=None</a:t>
-            </a:r>
-            <a:r>
-              <a:rPr/>
-              <a:t> instead of the default </a:t>
-            </a:r>
-            <a:r>
-              <a:rPr>
-                <a:latin typeface="Courier"/>
-              </a:rPr>
-              <a:t>"sqrt"</a:t>
-            </a:r>
-            <a:r>
-              <a:rPr/>
-              <a:t>: every split sees all 22 columns. Ask them to predict the noise share before running it. Most will say it falls to about zero, since the real features are now always on offer. It falls only to 28%, and the accuracy rises from 0.837 to 0.897. Slide 54 explains both.</a:t>
+              <a:t>Name the method and say its recipe before pointing at the figure. </a:t>
+            </a:r>
+            <a:r>
+              <a:rPr b="1"/>
+              <a:t>Permutation importance</a:t>
+            </a:r>
+            <a:r>
+              <a:rPr/>
+              <a:t>: take a fitted model and data it was not trained on; shuffle the values of one column, so that column no longer says anything about the applicant in its row; score the model again. The accuracy lost is that column’s importance. Repeat for every column. If the model never really used a column, shuffling it costs nothing.</a:t>
+            </a:r>
+          </a:p>
+          <a:p>
+            <a:pPr lvl="0" indent="0" marL="0">
+              <a:buNone/>
+            </a:pPr>
+          </a:p>
+          <a:p>
+            <a:pPr lvl="0" indent="0" marL="0">
+              <a:buNone/>
+            </a:pPr>
+            <a:r>
+              <a:rPr/>
+              <a:t>The figure is the 20-noise-column forest, trained on 70% of the applicants and checked on the other 30% (notebook 2, section 6). Left, the importance the forest reports for itself: more than half of it on the twenty noise columns. Right, the same 22 columns by permutation: debt ratio costs 0.18 of accuracy when shuffled, income 0.09, and every noise column costs almost nothing - between 0.003 lost and 0.002 gained.</a:t>
+            </a:r>
+          </a:p>
+          <a:p>
+            <a:pPr lvl="0" indent="0" marL="0">
+              <a:buNone/>
+            </a:pPr>
+          </a:p>
+          <a:p>
+            <a:pPr lvl="0" indent="0" marL="0">
+              <a:buNone/>
+            </a:pPr>
+            <a:r>
+              <a:rPr/>
+              <a:t>Two things to stress. Almost nothing, not exactly nothing: shuffling is random and the test set is finite, so a useless column moves the score by a few thousandths either way. And held-out data is what makes the check honest: on the training rows a deep forest has memorised its noise columns, and shuffling them would cost something there.</a:t>
+            </a:r>
+          </a:p>
+          <a:p>
+            <a:pPr lvl="0" indent="0" marL="0">
+              <a:buNone/>
+            </a:pPr>
+          </a:p>
+          <a:p>
+            <a:pPr lvl="0" indent="0" marL="0">
+              <a:buNone/>
+            </a:pPr>
+            <a:r>
+              <a:rPr/>
+              <a:t>The check costs one function call. The lesson to leave: a ranking the model reports about itself is a claim; shuffling on held-out data is the test of it. Handout section 7.1.</a:t>
             </a:r>
           </a:p>
         </p:txBody>
@@ -4319,73 +4314,69 @@
             </a:pPr>
             <a:r>
               <a:rPr/>
-              <a:t>Contrast the two strategies directly, because the difference is the whole segment. Bagging and random forests are parallel: every tree is grown once, independently, and combined only at prediction time. Boosting is sequential: tree t exists specifically because of what trees 1 through t-1 still got wrong.</a:t>
-            </a:r>
-          </a:p>
-          <a:p>
-            <a:pPr lvl="0" indent="0" marL="0">
-              <a:buNone/>
-            </a:pPr>
-          </a:p>
-          <a:p>
-            <a:pPr lvl="0" indent="0" marL="0">
-              <a:buNone/>
-            </a:pPr>
-            <a:r>
-              <a:rPr/>
-              <a:t>Slow down on “regression tree”, because it is new. “Shallow” means depth 2 or 3 here. Everything so far this lesson was a classification tree: leaves vote, splits are scored by Gini. A boosted tree is fit to corrections, which are numbers like +0.613 or -0.387, not classes, so it is the regression version of the same algorithm: the same greedy search over features and thresholds, but each leaf predicts the average correction of the examples in it, and a split is scored by how much it lowers the squared error around those averages. Even </a:t>
+              <a:t>The table is the notebook’s map: bagging from scratch and against scikit-learn, the out-of-bag score checked against cross-validation, the variance measured over 30 splits, the noise-column experiment, and the permutation check of the previous slide. Section 4 of the notebook is reading only, which is why the table skips it.</a:t>
+            </a:r>
+          </a:p>
+          <a:p>
+            <a:pPr lvl="0" indent="0" marL="0">
+              <a:buNone/>
+            </a:pPr>
+          </a:p>
+          <a:p>
+            <a:pPr lvl="0" indent="0" marL="0">
+              <a:buNone/>
+            </a:pPr>
+            <a:r>
+              <a:rPr/>
+              <a:t>Run Notebooks/02_bagging_and_random_forests.ipynb. Eighteen minutes.</a:t>
+            </a:r>
+          </a:p>
+          <a:p>
+            <a:pPr lvl="0" indent="0" marL="0">
+              <a:buNone/>
+            </a:pPr>
+          </a:p>
+          <a:p>
+            <a:pPr lvl="0" indent="0" marL="0">
+              <a:buNone/>
+            </a:pPr>
+            <a:r>
+              <a:rPr/>
+              <a:t>The cell to protect is the noise-column sweep. Let them add the columns themselves and watch the importance share climb - reading the number off a slide does not land the same way as watching it happen.</a:t>
+            </a:r>
+          </a:p>
+          <a:p>
+            <a:pPr lvl="0" indent="0" marL="0">
+              <a:buNone/>
+            </a:pPr>
+          </a:p>
+          <a:p>
+            <a:pPr lvl="0" indent="0" marL="0">
+              <a:buNone/>
+            </a:pPr>
+            <a:r>
+              <a:rPr/>
+              <a:t>If time allows, section 6 also tries </a:t>
             </a:r>
             <a:r>
               <a:rPr>
                 <a:latin typeface="Courier"/>
               </a:rPr>
-              <a:t>GradientBoostingClassifier</a:t>
-            </a:r>
-            <a:r>
-              <a:rPr/>
-              <a:t> grows regression trees inside.</a:t>
-            </a:r>
-          </a:p>
-          <a:p>
-            <a:pPr lvl="0" indent="0" marL="0">
-              <a:buNone/>
-            </a:pPr>
-          </a:p>
-          <a:p>
-            <a:pPr lvl="0" indent="0" marL="0">
-              <a:buNone/>
-            </a:pPr>
-            <a:r>
-              <a:rPr/>
-              <a:t>A predictable slip, worth naming now: “the final task is classification, so each boosted tree votes default or repaid, like a tree in a forest”. It is reasonable - every ensemble so far was made of trees that vote. But a boosted tree never outputs a class. It outputs a correction that is added to a running score, and only the final score is turned into a class.</a:t>
-            </a:r>
-          </a:p>
-          <a:p>
-            <a:pPr lvl="0" indent="0" marL="0">
-              <a:buNone/>
-            </a:pPr>
-          </a:p>
-          <a:p>
-            <a:pPr lvl="0" indent="0" marL="0">
-              <a:buNone/>
-            </a:pPr>
-            <a:r>
-              <a:rPr/>
-              <a:t>Name α carefully and tie it to the course’s shared notation - this is the same symbol as lesson 3’s gradient descent learning rate, doing an analogous job: how large a step each correction takes.</a:t>
-            </a:r>
-          </a:p>
-          <a:p>
-            <a:pPr lvl="0" indent="0" marL="0">
-              <a:buNone/>
-            </a:pPr>
-          </a:p>
-          <a:p>
-            <a:pPr lvl="0" indent="0" marL="0">
-              <a:buNone/>
-            </a:pPr>
-            <a:r>
-              <a:rPr/>
-              <a:t>Handout section 8.</a:t>
+              <a:t>max_features=None</a:t>
+            </a:r>
+            <a:r>
+              <a:rPr/>
+              <a:t> instead of the default </a:t>
+            </a:r>
+            <a:r>
+              <a:rPr>
+                <a:latin typeface="Courier"/>
+              </a:rPr>
+              <a:t>"sqrt"</a:t>
+            </a:r>
+            <a:r>
+              <a:rPr/>
+              <a:t>: every split sees all 22 columns. Ask them to predict the noise share before running it. Most will say it falls to about zero, since the real features are now always on offer. It falls only to 28%, and the accuracy rises from 0.837 to 0.897. Slide 55 explains both.</a:t>
             </a:r>
           </a:p>
         </p:txBody>
@@ -4467,7 +4458,21 @@
             </a:pPr>
             <a:r>
               <a:rPr/>
-              <a:t>Let it sit for a moment before pointing anything out. Then trace the shape out loud: a strip of low income on one edge, a strip of high debt on another, and two disconnected rectangles in the interior where neither reading alone is remarkable.</a:t>
+              <a:t>Let it sit for a moment before pointing anything out. Then trace the shape out loud. Four rules make an applicant risky: income below a floor, or debt above a ceiling, or income and debt inside one of two “stressed” rectangles, where neither reading alone is remarkable. The low-income strip runs up the left edge and the high-debt strip along the top, and they meet in the top-left corner, so together they are one L-shaped region. The two rectangles stand apart, in the interior. Four rules, then, but three separate regions.</a:t>
+            </a:r>
+          </a:p>
+          <a:p>
+            <a:pPr lvl="0" indent="0" marL="0">
+              <a:buNone/>
+            </a:pPr>
+          </a:p>
+          <a:p>
+            <a:pPr lvl="0" indent="0" marL="0">
+              <a:buNone/>
+            </a:pPr>
+            <a:r>
+              <a:rPr/>
+              <a:t>A predictable slip: reading the floor and the ceiling as “low income AND high debt”, one corner of the plane, instead of “low income OR high debt”, the whole L. It is a reasonable reading, because the two stressed rectangles really are an AND of two ranges; the floor and the ceiling are not, each applies on its own.</a:t>
             </a:r>
           </a:p>
           <a:p>
@@ -4577,21 +4582,73 @@
             </a:pPr>
             <a:r>
               <a:rPr/>
-              <a:t>F₀ is the flat starting guess: the best single constant for the loss being used. For squared error, as on this slide and the next three, that is the mean of the target; for classification it will be the log-odds of the base rate (slide 45). Each subsequent Fₜ is the previous ensemble plus a scaled correction from the newest tree, hₜ. Read it left to right: start flat, then keep adding small, scaled corrections.</a:t>
-            </a:r>
-          </a:p>
-          <a:p>
-            <a:pPr lvl="0" indent="0" marL="0">
-              <a:buNone/>
-            </a:pPr>
-          </a:p>
-          <a:p>
-            <a:pPr lvl="0" indent="0" marL="0">
-              <a:buNone/>
-            </a:pPr>
-            <a:r>
-              <a:rPr/>
-              <a:t>Do not derive anything further here - the next slide states what hₜ is actually fit to. Handout section 8.</a:t>
+              <a:t>Contrast the two strategies directly, because the difference is the whole segment. Bagging and random forests are parallel: every tree is grown once, independently, and combined only at prediction time. Boosting is sequential: tree t exists specifically because of what trees 1 through t-1 still got wrong.</a:t>
+            </a:r>
+          </a:p>
+          <a:p>
+            <a:pPr lvl="0" indent="0" marL="0">
+              <a:buNone/>
+            </a:pPr>
+          </a:p>
+          <a:p>
+            <a:pPr lvl="0" indent="0" marL="0">
+              <a:buNone/>
+            </a:pPr>
+            <a:r>
+              <a:rPr/>
+              <a:t>Slow down on “regression tree”, because it is new. “Shallow” means depth 2 or 3 here. Everything so far this lesson was a classification tree: leaves vote, splits are scored by Gini. A boosted tree is fit to corrections, which are numbers like +0.613 or -0.387, not classes, so it is the regression version of the same algorithm: the same greedy search over features and thresholds, but each leaf predicts the average correction of the examples in it, and a split is scored by how much it lowers the squared error around those averages. Even </a:t>
+            </a:r>
+            <a:r>
+              <a:rPr>
+                <a:latin typeface="Courier"/>
+              </a:rPr>
+              <a:t>GradientBoostingClassifier</a:t>
+            </a:r>
+            <a:r>
+              <a:rPr/>
+              <a:t> grows regression trees inside.</a:t>
+            </a:r>
+          </a:p>
+          <a:p>
+            <a:pPr lvl="0" indent="0" marL="0">
+              <a:buNone/>
+            </a:pPr>
+          </a:p>
+          <a:p>
+            <a:pPr lvl="0" indent="0" marL="0">
+              <a:buNone/>
+            </a:pPr>
+            <a:r>
+              <a:rPr/>
+              <a:t>A predictable slip, worth naming now: “the final task is classification, so each boosted tree votes default or repaid, like a tree in a forest”. It is reasonable - every ensemble so far was made of trees that vote. But a boosted tree never outputs a class. It outputs a correction that is added to a running score, and only the final score is turned into a class.</a:t>
+            </a:r>
+          </a:p>
+          <a:p>
+            <a:pPr lvl="0" indent="0" marL="0">
+              <a:buNone/>
+            </a:pPr>
+          </a:p>
+          <a:p>
+            <a:pPr lvl="0" indent="0" marL="0">
+              <a:buNone/>
+            </a:pPr>
+            <a:r>
+              <a:rPr/>
+              <a:t>Name α carefully and tie it to the course’s shared notation - this is the same symbol as lesson 3’s gradient descent learning rate, doing an analogous job: how large a step each correction takes.</a:t>
+            </a:r>
+          </a:p>
+          <a:p>
+            <a:pPr lvl="0" indent="0" marL="0">
+              <a:buNone/>
+            </a:pPr>
+          </a:p>
+          <a:p>
+            <a:pPr lvl="0" indent="0" marL="0">
+              <a:buNone/>
+            </a:pPr>
+            <a:r>
+              <a:rPr/>
+              <a:t>Handout section 8.</a:t>
             </a:r>
           </a:p>
         </p:txBody>
@@ -4673,35 +4730,21 @@
             </a:pPr>
             <a:r>
               <a:rPr/>
-              <a:t>The In code line is the whole from-scratch loop of notebook 3, section 1: fit a depth-2 regression tree to the residuals, add 0.3 times its predictions to the running prediction, repeat sixty times.</a:t>
-            </a:r>
-          </a:p>
-          <a:p>
-            <a:pPr lvl="0" indent="0" marL="0">
-              <a:buNone/>
-            </a:pPr>
-          </a:p>
-          <a:p>
-            <a:pPr lvl="0" indent="0" marL="0">
-              <a:buNone/>
-            </a:pPr>
-            <a:r>
-              <a:rPr/>
-              <a:t>State the result without the calculus. For plain squared-error regression, what a new tree corrects is literally the residual - the gap between the truth and the ensemble’s current prediction. That is intuitive on its own and does not need a derivative to justify.</a:t>
-            </a:r>
-          </a:p>
-          <a:p>
-            <a:pPr lvl="0" indent="0" marL="0">
-              <a:buNone/>
-            </a:pPr>
-          </a:p>
-          <a:p>
-            <a:pPr lvl="0" indent="0" marL="0">
-              <a:buNone/>
-            </a:pPr>
-            <a:r>
-              <a:rPr/>
-              <a:t>The second bullet is the generalisation that pays off in the very next segment: the same recipe - fit a tree to the negative gradient of whatever loss you’re using - covers classification too, once the loss changes from squared error to something else. The one line of algebra connecting the two is on the slide; handout section 8 sets it out.</a:t>
+              <a:t>F₀ is the flat starting guess: the best single constant for the loss being used. For squared error, as on this slide and the next three, that is the mean of the target; for classification it will be the log-odds of the base rate (slide 46). Each subsequent Fₜ is the previous ensemble plus a scaled correction from the newest tree, hₜ. Read it left to right: start flat, then keep adding small, scaled corrections.</a:t>
+            </a:r>
+          </a:p>
+          <a:p>
+            <a:pPr lvl="0" indent="0" marL="0">
+              <a:buNone/>
+            </a:pPr>
+          </a:p>
+          <a:p>
+            <a:pPr lvl="0" indent="0" marL="0">
+              <a:buNone/>
+            </a:pPr>
+            <a:r>
+              <a:rPr/>
+              <a:t>Do not derive anything further here - the next slide states what hₜ is actually fit to. Handout section 8.</a:t>
             </a:r>
           </a:p>
         </p:txBody>
@@ -4783,35 +4826,35 @@
             </a:pPr>
             <a:r>
               <a:rPr/>
-              <a:t>A new toy dataset, so say what it is before anything else: 200 points on one input x, whose true value is a three-level step function plus a gentle sine wave (the black line), observed with noise (the grey dots). Sixty depth-2 trees, learning rate 0.3, are fit to it. Walk through the coloured curves in order.</a:t>
-            </a:r>
-          </a:p>
-          <a:p>
-            <a:pPr lvl="0" indent="0" marL="0">
-              <a:buNone/>
-            </a:pPr>
-          </a:p>
-          <a:p>
-            <a:pPr lvl="0" indent="0" marL="0">
-              <a:buNone/>
-            </a:pPr>
-            <a:r>
-              <a:rPr/>
-              <a:t>Say the numbers as you point: one tree barely moves the flat starting guess. Five trees sketch the coarse shape. Twenty trace the step function closely - the ensemble’s best point, on the next slide. By sixty, the ensemble is tracking individual noisy observations as well as the underlying shape.</a:t>
-            </a:r>
-          </a:p>
-          <a:p>
-            <a:pPr lvl="0" indent="0" marL="0">
-              <a:buNone/>
-            </a:pPr>
-          </a:p>
-          <a:p>
-            <a:pPr lvl="0" indent="0" marL="0">
-              <a:buNone/>
-            </a:pPr>
-            <a:r>
-              <a:rPr/>
-              <a:t>Handout section 8.</a:t>
+              <a:t>The In code line is the whole from-scratch loop of notebook 3, section 1: fit a depth-2 regression tree to the residuals, add 0.3 times its predictions to the running prediction, repeat sixty times.</a:t>
+            </a:r>
+          </a:p>
+          <a:p>
+            <a:pPr lvl="0" indent="0" marL="0">
+              <a:buNone/>
+            </a:pPr>
+          </a:p>
+          <a:p>
+            <a:pPr lvl="0" indent="0" marL="0">
+              <a:buNone/>
+            </a:pPr>
+            <a:r>
+              <a:rPr/>
+              <a:t>State the result without the calculus. For plain squared-error regression, what a new tree corrects is literally the residual - the gap between the truth and the ensemble’s current prediction. That is intuitive on its own and does not need a derivative to justify.</a:t>
+            </a:r>
+          </a:p>
+          <a:p>
+            <a:pPr lvl="0" indent="0" marL="0">
+              <a:buNone/>
+            </a:pPr>
+          </a:p>
+          <a:p>
+            <a:pPr lvl="0" indent="0" marL="0">
+              <a:buNone/>
+            </a:pPr>
+            <a:r>
+              <a:rPr/>
+              <a:t>The second bullet is the generalisation that pays off in the very next segment: the same recipe - fit a tree to the negative gradient of whatever loss you’re using - covers classification too, once the loss changes from squared error to something else. The one line of algebra connecting the two is on the slide; handout section 8 sets it out.</a:t>
             </a:r>
           </a:p>
         </p:txBody>
@@ -4893,29 +4936,21 @@
             </a:pPr>
             <a:r>
               <a:rPr/>
-              <a:t>Put a number on each curve of the previous slide. Twenty trees is the sweet spot; by sixty the error against the true, noise-free function has risen again, even though the ensemble is still adding trees that reduce error on the </a:t>
-            </a:r>
-            <a:r>
-              <a:rPr i="1"/>
-              <a:t>training</a:t>
-            </a:r>
-            <a:r>
-              <a:rPr/>
-              <a:t> residuals.</a:t>
-            </a:r>
-          </a:p>
-          <a:p>
-            <a:pPr lvl="0" indent="0" marL="0">
-              <a:buNone/>
-            </a:pPr>
-          </a:p>
-          <a:p>
-            <a:pPr lvl="0" indent="0" marL="0">
-              <a:buNone/>
-            </a:pPr>
-            <a:r>
-              <a:rPr/>
-              <a:t>Name what this is: the same overfitting story as the unconstrained single tree of the depth table, reached by a completely different route - not one tree grown too deep, but too many shallow trees each chasing whatever residual noise is left.</a:t>
+              <a:t>A new toy dataset, so say what it is before anything else: 200 points on one input x, whose true value is a three-level step function plus a gentle sine wave (the black line), observed with noise (the grey dots). Sixty depth-2 trees, learning rate 0.3, are fit to it. Walk through the coloured curves in order.</a:t>
+            </a:r>
+          </a:p>
+          <a:p>
+            <a:pPr lvl="0" indent="0" marL="0">
+              <a:buNone/>
+            </a:pPr>
+          </a:p>
+          <a:p>
+            <a:pPr lvl="0" indent="0" marL="0">
+              <a:buNone/>
+            </a:pPr>
+            <a:r>
+              <a:rPr/>
+              <a:t>Say the numbers as you point: one tree barely moves the flat starting guess. Five trees sketch the coarse shape. Twenty trace the step function closely - the ensemble’s best point, on the next slide. By sixty, the ensemble is tracking individual noisy observations as well as the underlying shape.</a:t>
             </a:r>
           </a:p>
           <a:p>
@@ -5011,91 +5046,43 @@
             </a:pPr>
             <a:r>
               <a:rPr/>
-              <a:t>State the result, not the chain rule behind it - the handout carries the full derivative. What matters for this course is the connection: boosting for classification fits a sequence of small trees to y - p, one correction at a time, rather than adjusting a fixed set of linear coefficients against the same quantity in one continuous descent.</a:t>
-            </a:r>
-          </a:p>
-          <a:p>
-            <a:pPr lvl="0" indent="0" marL="0">
-              <a:buNone/>
-            </a:pPr>
-          </a:p>
-          <a:p>
-            <a:pPr lvl="0" indent="0" marL="0">
-              <a:buNone/>
-            </a:pPr>
-            <a:r>
-              <a:rPr/>
-              <a:t>Ask the room to name what’s genuinely different between this and lesson 4’s logistic regression, given they’re descending against the same quantity. The answer: lesson 4 moves a fixed number of coefficients; boosting adds entirely new trees, so the model’s structure itself grows with training rather than staying fixed.</a:t>
-            </a:r>
-          </a:p>
-          <a:p>
-            <a:pPr lvl="0" indent="0" marL="0">
-              <a:buNone/>
-            </a:pPr>
-          </a:p>
-          <a:p>
-            <a:pPr lvl="0" indent="0" marL="0">
-              <a:buNone/>
-            </a:pPr>
-            <a:r>
-              <a:rPr/>
-              <a:t>The sigma here is lesson 4’s logistic function, 1 / (1 + e^-F), not the sigma squared of the variance slides: the slide says so, say it aloud once too, since the same letter has just meant something else.</a:t>
-            </a:r>
-          </a:p>
-          <a:p>
-            <a:pPr lvl="0" indent="0" marL="0">
-              <a:buNone/>
-            </a:pPr>
-          </a:p>
-          <a:p>
-            <a:pPr lvl="0" indent="0" marL="0">
-              <a:buNone/>
-            </a:pPr>
-            <a:r>
-              <a:rPr/>
-              <a:t>Give them the first step in numbers, because it makes y - p concrete. The ensemble starts at the base rate’s log-odds: 464 of the 1,200 defaulted, so F0 = log(464 / 736) = -0.461, which the logistic function turns back into 0.387 for everyone. The first tree is fit to y - p: +0.613 for every applicant who defaulted, -0.387 for every one who repaid.</a:t>
-            </a:r>
-          </a:p>
-          <a:p>
-            <a:pPr lvl="0" indent="0" marL="0">
-              <a:buNone/>
-            </a:pPr>
-          </a:p>
-          <a:p>
-            <a:pPr lvl="0" indent="0" marL="0">
-              <a:buNone/>
-            </a:pPr>
-            <a:r>
-              <a:rPr/>
-              <a:t>A predictable slip: “so the update is p plus alpha times (y - p)”. It is reasonable, because y - p is a difference of probabilities. But the trees correct the score F, not p: F moves by alpha times the tree’s output, and only then does the logistic function turn the new F into a new p. That is what keeps p between 0 and 1 however large the corrections add up.</a:t>
-            </a:r>
-          </a:p>
-          <a:p>
-            <a:pPr lvl="0" indent="0" marL="0">
-              <a:buNone/>
-            </a:pPr>
-          </a:p>
-          <a:p>
-            <a:pPr lvl="0" indent="0" marL="0">
-              <a:buNone/>
-            </a:pPr>
-            <a:r>
-              <a:rPr/>
-              <a:t>One detail, if someone has read scikit-learn’s source. The tree’s splits are chosen on y - p exactly as described. The number written in each leaf is then recomputed: the sum of y - p over the leaf divided by the sum of p(1 - p), one Newton step on the log-loss rather than the plain mean. The splits come from the residuals; the size of each step takes the curvature of the loss into account. Handout section 9 has it in one sentence; nothing in the lesson depends on it.</a:t>
-            </a:r>
-          </a:p>
-          <a:p>
-            <a:pPr lvl="0" indent="0" marL="0">
-              <a:buNone/>
-            </a:pPr>
-          </a:p>
-          <a:p>
-            <a:pPr lvl="0" indent="0" marL="0">
-              <a:buNone/>
-            </a:pPr>
-            <a:r>
-              <a:rPr/>
-              <a:t>Handout section 9.</a:t>
+              <a:t>Put a number on each curve of the previous slide. Twenty trees is the sweet spot; by sixty the error against the true, noise-free function has risen again, even though the ensemble is still adding trees that reduce error on the </a:t>
+            </a:r>
+            <a:r>
+              <a:rPr i="1"/>
+              <a:t>training</a:t>
+            </a:r>
+            <a:r>
+              <a:rPr/>
+              <a:t> residuals.</a:t>
+            </a:r>
+          </a:p>
+          <a:p>
+            <a:pPr lvl="0" indent="0" marL="0">
+              <a:buNone/>
+            </a:pPr>
+          </a:p>
+          <a:p>
+            <a:pPr lvl="0" indent="0" marL="0">
+              <a:buNone/>
+            </a:pPr>
+            <a:r>
+              <a:rPr/>
+              <a:t>Name what this is: the same overfitting story as the unconstrained single tree of the depth table, reached by a completely different route - not one tree grown too deep, but too many shallow trees each chasing whatever residual noise is left.</a:t>
+            </a:r>
+          </a:p>
+          <a:p>
+            <a:pPr lvl="0" indent="0" marL="0">
+              <a:buNone/>
+            </a:pPr>
+          </a:p>
+          <a:p>
+            <a:pPr lvl="0" indent="0" marL="0">
+              <a:buNone/>
+            </a:pPr>
+            <a:r>
+              <a:rPr/>
+              <a:t>Handout section 8.</a:t>
             </a:r>
           </a:p>
         </p:txBody>
@@ -5177,29 +5164,77 @@
             </a:pPr>
             <a:r>
               <a:rPr/>
-              <a:t>Give the number and let it sit against everything shown so far this lesson: 0.902, from a method run at scikit-learn’s defaults, no tuning at all. Ask the room to recall the single tuned tree’s number from the depth table, 0.882 at depth 8, and note that boosting has already passed it without being told anything about depth.</a:t>
-            </a:r>
-          </a:p>
-          <a:p>
-            <a:pPr lvl="0" indent="0" marL="0">
-              <a:buNone/>
-            </a:pPr>
-          </a:p>
-          <a:p>
-            <a:pPr lvl="0" indent="0" marL="0">
-              <a:buNone/>
-            </a:pPr>
-            <a:r>
-              <a:rPr/>
-              <a:t>The rest of this segment is what happens when boosting is </a:t>
-            </a:r>
-            <a:r>
-              <a:rPr i="1"/>
-              <a:t>not</a:t>
-            </a:r>
-            <a:r>
-              <a:rPr/>
-              <a:t> left at sensible defaults.</a:t>
+              <a:t>State the result, not the chain rule behind it - the handout carries the full derivative. What matters for this course is the connection: boosting for classification fits a sequence of small trees to y - p, one correction at a time, rather than adjusting a fixed set of linear coefficients against the same quantity in one continuous descent.</a:t>
+            </a:r>
+          </a:p>
+          <a:p>
+            <a:pPr lvl="0" indent="0" marL="0">
+              <a:buNone/>
+            </a:pPr>
+          </a:p>
+          <a:p>
+            <a:pPr lvl="0" indent="0" marL="0">
+              <a:buNone/>
+            </a:pPr>
+            <a:r>
+              <a:rPr/>
+              <a:t>Ask the room to name what’s genuinely different between this and lesson 4’s logistic regression, given they’re descending against the same quantity. The answer: lesson 4 moves a fixed number of coefficients; boosting adds entirely new trees, so the model’s structure itself grows with training rather than staying fixed.</a:t>
+            </a:r>
+          </a:p>
+          <a:p>
+            <a:pPr lvl="0" indent="0" marL="0">
+              <a:buNone/>
+            </a:pPr>
+          </a:p>
+          <a:p>
+            <a:pPr lvl="0" indent="0" marL="0">
+              <a:buNone/>
+            </a:pPr>
+            <a:r>
+              <a:rPr/>
+              <a:t>The sigma here is lesson 4’s logistic function, 1 / (1 + e^-F), not the sigma squared of the variance slides: the slide says so, say it aloud once too, since the same letter has just meant something else.</a:t>
+            </a:r>
+          </a:p>
+          <a:p>
+            <a:pPr lvl="0" indent="0" marL="0">
+              <a:buNone/>
+            </a:pPr>
+          </a:p>
+          <a:p>
+            <a:pPr lvl="0" indent="0" marL="0">
+              <a:buNone/>
+            </a:pPr>
+            <a:r>
+              <a:rPr/>
+              <a:t>Give them the first step in numbers, because it makes y - p concrete. The ensemble starts at the base rate’s log-odds: 464 of the 1,200 defaulted, so F0 = log(464 / 736) = -0.461, which the logistic function turns back into 0.387 for everyone. The first tree is fit to y - p: +0.613 for every applicant who defaulted, -0.387 for every one who repaid.</a:t>
+            </a:r>
+          </a:p>
+          <a:p>
+            <a:pPr lvl="0" indent="0" marL="0">
+              <a:buNone/>
+            </a:pPr>
+          </a:p>
+          <a:p>
+            <a:pPr lvl="0" indent="0" marL="0">
+              <a:buNone/>
+            </a:pPr>
+            <a:r>
+              <a:rPr/>
+              <a:t>A predictable slip: “so the update is p plus alpha times (y - p)”. It is reasonable, because y - p is a difference of probabilities. But the trees correct the score F, not p: F moves by alpha times the tree’s output, and only then does the logistic function turn the new F into a new p. That is what keeps p between 0 and 1 however large the corrections add up.</a:t>
+            </a:r>
+          </a:p>
+          <a:p>
+            <a:pPr lvl="0" indent="0" marL="0">
+              <a:buNone/>
+            </a:pPr>
+          </a:p>
+          <a:p>
+            <a:pPr lvl="0" indent="0" marL="0">
+              <a:buNone/>
+            </a:pPr>
+            <a:r>
+              <a:rPr/>
+              <a:t>One detail, if someone has read scikit-learn’s source. The tree’s splits are chosen on y - p exactly as described. The number written in each leaf is then recomputed: the sum of y - p over the leaf divided by the sum of p(1 - p), one Newton step on the log-loss rather than the plain mean. The splits come from the residuals; the size of each step takes the curvature of the loss into account. Handout section 9 has it in one sentence; nothing in the lesson depends on it.</a:t>
             </a:r>
           </a:p>
           <a:p>
@@ -5295,35 +5330,43 @@
             </a:pPr>
             <a:r>
               <a:rPr/>
-              <a:t>Unlike bagging, boosting keeps reducing its training loss for as long as it runs, because every new tree is built specifically to reduce what remains - including the 7% of labels that are noise by construction. There is nothing in the algorithm itself that says “stop”. Be exact about which quantity: the log-loss on the training data never goes up, while training accuracy only follows it on the whole - fit to all 1,200 applicants with 800 trees, it dips at a handful of individual steps, too small to show in this table (handout section 10).</a:t>
-            </a:r>
-          </a:p>
-          <a:p>
-            <a:pPr lvl="0" indent="0" marL="0">
-              <a:buNone/>
-            </a:pPr>
-          </a:p>
-          <a:p>
-            <a:pPr lvl="0" indent="0" marL="0">
-              <a:buNone/>
-            </a:pPr>
-            <a:r>
-              <a:rPr/>
-              <a:t>Point at the peak, 30 trees, and then at 800: training accuracy reached 1.000 by 200 trees and stayed there, and cross-validated accuracy has drifted down from 0.897 to 0.890, under a point, since the peak. Contrast the size of that drop with the unconstrained single tree of the depth table, which lost three points past its own peak - boosting’s overfitting is real but gentler.</a:t>
-            </a:r>
-          </a:p>
-          <a:p>
-            <a:pPr lvl="0" indent="0" marL="0">
-              <a:buNone/>
-            </a:pPr>
-          </a:p>
-          <a:p>
-            <a:pPr lvl="0" indent="0" marL="0">
-              <a:buNone/>
-            </a:pPr>
-            <a:r>
-              <a:rPr/>
-              <a:t>Handout section 10.</a:t>
+              <a:t>Give the number and let it sit against everything shown so far this lesson: 0.902, from a method run at scikit-learn’s defaults, no tuning at all. Ask the room to recall the single tuned tree’s number from the depth table, 0.882 at depth 8, and note that boosting has already passed it without being told anything about depth.</a:t>
+            </a:r>
+          </a:p>
+          <a:p>
+            <a:pPr lvl="0" indent="0" marL="0">
+              <a:buNone/>
+            </a:pPr>
+          </a:p>
+          <a:p>
+            <a:pPr lvl="0" indent="0" marL="0">
+              <a:buNone/>
+            </a:pPr>
+            <a:r>
+              <a:rPr/>
+              <a:t>The rest of this segment is what happens when boosting is </a:t>
+            </a:r>
+            <a:r>
+              <a:rPr i="1"/>
+              <a:t>not</a:t>
+            </a:r>
+            <a:r>
+              <a:rPr/>
+              <a:t> left at sensible defaults.</a:t>
+            </a:r>
+          </a:p>
+          <a:p>
+            <a:pPr lvl="0" indent="0" marL="0">
+              <a:buNone/>
+            </a:pPr>
+          </a:p>
+          <a:p>
+            <a:pPr lvl="0" indent="0" marL="0">
+              <a:buNone/>
+            </a:pPr>
+            <a:r>
+              <a:rPr/>
+              <a:t>Handout section 9.</a:t>
             </a:r>
           </a:p>
         </p:txBody>
@@ -5405,41 +5448,21 @@
             </a:pPr>
             <a:r>
               <a:rPr/>
-              <a:t>Two curves again, the same shape of story as the depth curve earlier this lesson but reached by adding trees instead of depth. Training reaches 1.000 by around 200 trees and sits there. Cross-validated accuracy climbs quickly, peaks near 30 trees, and drifts down over the following 770.</a:t>
-            </a:r>
-          </a:p>
-          <a:p>
-            <a:pPr lvl="0" indent="0" marL="0">
-              <a:buNone/>
-            </a:pPr>
-          </a:p>
-          <a:p>
-            <a:pPr lvl="0" indent="0" marL="0">
-              <a:buNone/>
-            </a:pPr>
-            <a:r>
-              <a:rPr/>
-              <a:t>The point worth making explicit: the damage per added tree here is small and easy to miss on a single run - which is why the number of trees has to be chosen on held-out data, never left to run, even though the overfit is gentler than a single unconstrained tree’s. There are two ways to choose it. This lesson cross-validated a list of tree counts and kept the best, 30. The other is early stopping, which the deck has not shown, so say what it is: set aside part of the training data, watch the score on it as trees are added, and stop once it has not improved for a number of rounds. In scikit-learn that is the </a:t>
-            </a:r>
-            <a:r>
-              <a:rPr>
-                <a:latin typeface="Courier"/>
-              </a:rPr>
-              <a:t>n_iter_no_change</a:t>
-            </a:r>
-            <a:r>
-              <a:rPr/>
-              <a:t> argument of </a:t>
-            </a:r>
-            <a:r>
-              <a:rPr>
-                <a:latin typeface="Courier"/>
-              </a:rPr>
-              <a:t>GradientBoostingClassifier</a:t>
-            </a:r>
-            <a:r>
-              <a:rPr/>
-              <a:t>.</a:t>
+              <a:t>Unlike bagging, boosting keeps reducing its training loss for as long as it runs, because every new tree is built specifically to reduce what remains - including the 7% of labels that are noise by construction. There is nothing in the algorithm itself that says “stop”. Be exact about which quantity: the log-loss on the training data never goes up, while training accuracy only follows it on the whole - fit to all 1,200 applicants with 800 trees, it dips at a handful of individual steps, too small to show in this table (handout section 10).</a:t>
+            </a:r>
+          </a:p>
+          <a:p>
+            <a:pPr lvl="0" indent="0" marL="0">
+              <a:buNone/>
+            </a:pPr>
+          </a:p>
+          <a:p>
+            <a:pPr lvl="0" indent="0" marL="0">
+              <a:buNone/>
+            </a:pPr>
+            <a:r>
+              <a:rPr/>
+              <a:t>Point at the peak, 30 trees, and then at 800: training accuracy reached 1.000 by 200 trees and stayed there, and cross-validated accuracy has drifted down from 0.897 to 0.890, under a point, since the peak. Contrast the size of that drop with the unconstrained single tree of the depth table, which lost three points past its own peak - boosting’s overfitting is real but gentler.</a:t>
             </a:r>
           </a:p>
           <a:p>
@@ -5535,43 +5558,41 @@
             </a:pPr>
             <a:r>
               <a:rPr/>
-              <a:t>Learning rate and tree count are not independent - both control how much total correction the ensemble applies, so they trade off against each other. At α = 0.02, 120 trees haven’t finished fitting the signal: training accuracy is still under 0.89. At α = 1.00, the ensemble has memorised the training set completely and given back more than two points of cross-validated accuracy for it, 0.902 down to 0.878.</a:t>
-            </a:r>
-          </a:p>
-          <a:p>
-            <a:pPr lvl="0" indent="0" marL="0">
-              <a:buNone/>
-            </a:pPr>
-          </a:p>
-          <a:p>
-            <a:pPr lvl="0" indent="0" marL="0">
-              <a:buNone/>
-            </a:pPr>
-            <a:r>
-              <a:rPr/>
-              <a:t>The best setting sits in between - large enough to make real progress within the tree budget, small enough that any one correction is easy to outvote if it turns out to be wrong. Ask the room which direction they’d guess is “more regularised” before revealing that it’s the </a:t>
-            </a:r>
-            <a:r>
-              <a:rPr i="1"/>
-              <a:t>small</a:t>
-            </a:r>
-            <a:r>
-              <a:rPr/>
-              <a:t> α side, the same kind of inverted-direction trap lesson 6’s C was.</a:t>
-            </a:r>
-          </a:p>
-          <a:p>
-            <a:pPr lvl="0" indent="0" marL="0">
-              <a:buNone/>
-            </a:pPr>
-          </a:p>
-          <a:p>
-            <a:pPr lvl="0" indent="0" marL="0">
-              <a:buNone/>
-            </a:pPr>
-            <a:r>
-              <a:rPr/>
-              <a:t>A predictable slip: “only alpha times the number of trees matters, so half the learning rate with twice the trees gives the same model”. It is reasonable - the notes above just said both knobs set the total correction. But they are not interchangeable: each tree is fit to what the ensemble before it still gets wrong, so many small steps follow a different path from a few large ones. A large step overshoots on the noisy labels and the next trees spend themselves undoing it; a small step lets later trees outvote an early mistake. The trade-off is real, the equivalence is not.</a:t>
+              <a:t>Two curves again, the same shape of story as the depth curve earlier this lesson but reached by adding trees instead of depth. Training reaches 1.000 by around 200 trees and sits there. Cross-validated accuracy climbs quickly, peaks near 30 trees, and drifts down over the following 770.</a:t>
+            </a:r>
+          </a:p>
+          <a:p>
+            <a:pPr lvl="0" indent="0" marL="0">
+              <a:buNone/>
+            </a:pPr>
+          </a:p>
+          <a:p>
+            <a:pPr lvl="0" indent="0" marL="0">
+              <a:buNone/>
+            </a:pPr>
+            <a:r>
+              <a:rPr/>
+              <a:t>The point worth making explicit: the damage per added tree here is small and easy to miss on a single run - which is why the number of trees has to be chosen on held-out data, never left to run, even though the overfit is gentler than a single unconstrained tree’s. There are two ways to choose it. This lesson cross-validated a list of tree counts and kept the best, 30. The other is early stopping, which the deck has not shown, so say what it is: set aside part of the training data, watch the score on it as trees are added, and stop once it has not improved for a number of rounds. In scikit-learn that is the </a:t>
+            </a:r>
+            <a:r>
+              <a:rPr>
+                <a:latin typeface="Courier"/>
+              </a:rPr>
+              <a:t>n_iter_no_change</a:t>
+            </a:r>
+            <a:r>
+              <a:rPr/>
+              <a:t> argument of </a:t>
+            </a:r>
+            <a:r>
+              <a:rPr>
+                <a:latin typeface="Courier"/>
+              </a:rPr>
+              <a:t>GradientBoostingClassifier</a:t>
+            </a:r>
+            <a:r>
+              <a:rPr/>
+              <a:t>.</a:t>
             </a:r>
           </a:p>
           <a:p>
@@ -5667,49 +5688,57 @@
             </a:pPr>
             <a:r>
               <a:rPr/>
-              <a:t>The table is the notebook’s map: boosting from scratch on the residuals, then scikit-learn’s classifier, the tree-count and learning-rate sweeps, and the leaderboard of the next slide.</a:t>
-            </a:r>
-          </a:p>
-          <a:p>
-            <a:pPr lvl="0" indent="0" marL="0">
-              <a:buNone/>
-            </a:pPr>
-          </a:p>
-          <a:p>
-            <a:pPr lvl="0" indent="0" marL="0">
-              <a:buNone/>
-            </a:pPr>
-            <a:r>
-              <a:rPr/>
-              <a:t>Run Notebooks/03_gradient_boosting.ipynb. Eighteen minutes.</a:t>
-            </a:r>
-          </a:p>
-          <a:p>
-            <a:pPr lvl="0" indent="0" marL="0">
-              <a:buNone/>
-            </a:pPr>
-          </a:p>
-          <a:p>
-            <a:pPr lvl="0" indent="0" marL="0">
-              <a:buNone/>
-            </a:pPr>
-            <a:r>
-              <a:rPr/>
-              <a:t>The cell to protect is the residual sweep at 1, 5, 20 and 60 trees - seeing the ensemble’s fit against the true function rise and then fall again, in real time, is the most direct experience of boosting’s overfitting available in this course.</a:t>
-            </a:r>
-          </a:p>
-          <a:p>
-            <a:pPr lvl="0" indent="0" marL="0">
-              <a:buNone/>
-            </a:pPr>
-          </a:p>
-          <a:p>
-            <a:pPr lvl="0" indent="0" marL="0">
-              <a:buNone/>
-            </a:pPr>
-            <a:r>
-              <a:rPr/>
-              <a:t>If time is short, skip the learning-rate sweep live and set it as reading - the table is in handout section 10.</a:t>
+              <a:t>Learning rate and tree count are not independent - both control how much total correction the ensemble applies, so they trade off against each other. At α = 0.02, 120 trees haven’t finished fitting the signal: training accuracy is still under 0.89. At α = 1.00, the ensemble has memorised the training set completely and given back more than two points of cross-validated accuracy for it, 0.902 down to 0.878.</a:t>
+            </a:r>
+          </a:p>
+          <a:p>
+            <a:pPr lvl="0" indent="0" marL="0">
+              <a:buNone/>
+            </a:pPr>
+          </a:p>
+          <a:p>
+            <a:pPr lvl="0" indent="0" marL="0">
+              <a:buNone/>
+            </a:pPr>
+            <a:r>
+              <a:rPr/>
+              <a:t>The best setting sits in between - large enough to make real progress within the tree budget, small enough that any one correction is easy to outvote if it turns out to be wrong. Ask the room which direction they’d guess is “more regularised” before revealing that it’s the </a:t>
+            </a:r>
+            <a:r>
+              <a:rPr i="1"/>
+              <a:t>small</a:t>
+            </a:r>
+            <a:r>
+              <a:rPr/>
+              <a:t> α side, the same kind of inverted-direction trap lesson 6’s C was.</a:t>
+            </a:r>
+          </a:p>
+          <a:p>
+            <a:pPr lvl="0" indent="0" marL="0">
+              <a:buNone/>
+            </a:pPr>
+          </a:p>
+          <a:p>
+            <a:pPr lvl="0" indent="0" marL="0">
+              <a:buNone/>
+            </a:pPr>
+            <a:r>
+              <a:rPr/>
+              <a:t>A predictable slip: “only alpha times the number of trees matters, so half the learning rate with twice the trees gives the same model”. It is reasonable - the notes above just said both knobs set the total correction. But they are not interchangeable: each tree is fit to what the ensemble before it still gets wrong, so many small steps follow a different path from a few large ones. A large step overshoots on the noisy labels and the next trees spend themselves undoing it; a small step lets later trees outvote an early mistake. The trade-off is real, the equivalence is not.</a:t>
+            </a:r>
+          </a:p>
+          <a:p>
+            <a:pPr lvl="0" indent="0" marL="0">
+              <a:buNone/>
+            </a:pPr>
+          </a:p>
+          <a:p>
+            <a:pPr lvl="0" indent="0" marL="0">
+              <a:buNone/>
+            </a:pPr>
+            <a:r>
+              <a:rPr/>
+              <a:t>Handout section 10.</a:t>
             </a:r>
           </a:p>
         </p:txBody>
@@ -5791,21 +5820,35 @@
             </a:pPr>
             <a:r>
               <a:rPr/>
-              <a:t>Unlike lesson 6’s pumps, logistic regression clears the baseline by a wide margin here - it has learned something. Two of the four risky regions, the low-income strip and the high-debt strip, get riskier steadily as one feature moves in one direction, and a straight boundary handles that kind of effect reasonably well.</a:t>
-            </a:r>
-          </a:p>
-          <a:p>
-            <a:pPr lvl="0" indent="0" marL="0">
-              <a:buNone/>
-            </a:pPr>
-          </a:p>
-          <a:p>
-            <a:pPr lvl="0" indent="0" marL="0">
-              <a:buNone/>
-            </a:pPr>
-            <a:r>
-              <a:rPr/>
-              <a:t>What it cannot do is wall off the two interior islands without cutting into healthy territory everywhere else. Ask the room what kind of boundary could close that gap, and let a few guesses land before moving on - a threshold rule, applied more than once, is exactly the answer the rest of the lesson builds.</a:t>
+              <a:t>The figure is the line logistic regression actually draws, fitted on all 1,200 applicants: above it the model predicts default, below it repaid. It runs from a debt ratio of 0.40 at an income of 20 thousand euros to 0.88 at 100 thousand (notebook 1, section 1). The dashed outlines are the true risky regions, the L and the two islands.</a:t>
+            </a:r>
+          </a:p>
+          <a:p>
+            <a:pPr lvl="0" indent="0" marL="0">
+              <a:buNone/>
+            </a:pPr>
+          </a:p>
+          <a:p>
+            <a:pPr lvl="0" indent="0" marL="0">
+              <a:buNone/>
+            </a:pPr>
+            <a:r>
+              <a:rPr/>
+              <a:t>The title carries the two numbers to compare. Always predicting the majority class, “repaid”, scores 0.613, because 38.7% defaulted and 1 - 0.387 = 0.613. Logistic regression scores 0.748 ± 0.030 in five-fold cross-validation (the ± is the standard deviation across the five folds). Unlike lesson 6’s pumps, it clears the baseline by a wide margin: it has learned something. Most of the high-debt strip lies above the line, and the risk there rises steadily as one feature moves in one direction, which a straight boundary handles well.</a:t>
+            </a:r>
+          </a:p>
+          <a:p>
+            <a:pPr lvl="0" indent="0" marL="0">
+              <a:buNone/>
+            </a:pPr>
+          </a:p>
+          <a:p>
+            <a:pPr lvl="0" indent="0" marL="0">
+              <a:buNone/>
+            </a:pPr>
+            <a:r>
+              <a:rPr/>
+              <a:t>Then point at where the line goes wrong. Bottom left: income below the floor with low debt is risky, but it lies below the line; of the 87 applicants there, the model predicts 50 as repaid. Far right: at high income the line climbs above the ceiling, so debt between 0.82 and 0.88 is predicted repaid. And the line cuts straight through both islands, calling part of each healthy and the healthy territory beside them risky. Ask the room what kind of boundary could close those gaps, and let a few guesses land before moving on - a threshold rule, applied more than once, is exactly the answer the rest of the lesson builds.</a:t>
             </a:r>
           </a:p>
           <a:p>
@@ -5901,49 +5944,49 @@
             </a:pPr>
             <a:r>
               <a:rPr/>
-              <a:t>Everything from this lesson, cross-validated the same way. Read down the column and let the pattern speak before naming it: every ensemble method - bagging, the random forest, gradient boosting - lands within about a point and a half of the others, and all three sit closer to the ceiling than either single tree.</a:t>
-            </a:r>
-          </a:p>
-          <a:p>
-            <a:pPr lvl="0" indent="0" marL="0">
-              <a:buNone/>
-            </a:pPr>
-          </a:p>
-          <a:p>
-            <a:pPr lvl="0" indent="0" marL="0">
-              <a:buNone/>
-            </a:pPr>
-            <a:r>
-              <a:rPr/>
-              <a:t>The ceiling itself: 1 minus the 7% of labels deliberately flipped. No method reaches it, and none should - a model that classified the flipped labels “correctly” would be modelling the noise, not the rule.</a:t>
-            </a:r>
-          </a:p>
-          <a:p>
-            <a:pPr lvl="0" indent="0" marL="0">
-              <a:buNone/>
-            </a:pPr>
-          </a:p>
-          <a:p>
-            <a:pPr lvl="0" indent="0" marL="0">
-              <a:buNone/>
-            </a:pPr>
-            <a:r>
-              <a:rPr/>
-              <a:t>One honest caveat, in lesson 5’s terms. The depth of 8 and the 30 boosted trees were picked because they scored best on these same five folds, so those two rows are slightly optimistic; nested cross-validation would remove that. Bagging and the random forest ran at their defaults, chose nothing, and are not affected - and they are still on top.</a:t>
-            </a:r>
-          </a:p>
-          <a:p>
-            <a:pPr lvl="0" indent="0" marL="0">
-              <a:buNone/>
-            </a:pPr>
-          </a:p>
-          <a:p>
-            <a:pPr lvl="0" indent="0" marL="0">
-              <a:buNone/>
-            </a:pPr>
-            <a:r>
-              <a:rPr/>
-              <a:t>Handout section 11.</a:t>
+              <a:t>The table is the notebook’s map: boosting from scratch on the residuals, then scikit-learn’s classifier, the tree-count and learning-rate sweeps, and the leaderboard of the next slide.</a:t>
+            </a:r>
+          </a:p>
+          <a:p>
+            <a:pPr lvl="0" indent="0" marL="0">
+              <a:buNone/>
+            </a:pPr>
+          </a:p>
+          <a:p>
+            <a:pPr lvl="0" indent="0" marL="0">
+              <a:buNone/>
+            </a:pPr>
+            <a:r>
+              <a:rPr/>
+              <a:t>Run Notebooks/03_gradient_boosting.ipynb. Eighteen minutes.</a:t>
+            </a:r>
+          </a:p>
+          <a:p>
+            <a:pPr lvl="0" indent="0" marL="0">
+              <a:buNone/>
+            </a:pPr>
+          </a:p>
+          <a:p>
+            <a:pPr lvl="0" indent="0" marL="0">
+              <a:buNone/>
+            </a:pPr>
+            <a:r>
+              <a:rPr/>
+              <a:t>The cell to protect is the residual sweep at 1, 5, 20 and 60 trees - seeing the ensemble’s fit against the true function rise and then fall again, in real time, is the most direct experience of boosting’s overfitting available in this course.</a:t>
+            </a:r>
+          </a:p>
+          <a:p>
+            <a:pPr lvl="0" indent="0" marL="0">
+              <a:buNone/>
+            </a:pPr>
+          </a:p>
+          <a:p>
+            <a:pPr lvl="0" indent="0" marL="0">
+              <a:buNone/>
+            </a:pPr>
+            <a:r>
+              <a:rPr/>
+              <a:t>If time is short, skip the learning-rate sweep live and set it as reading - the table is in handout section 10.</a:t>
             </a:r>
           </a:p>
         </p:txBody>
@@ -6025,21 +6068,35 @@
             </a:pPr>
             <a:r>
               <a:rPr/>
-              <a:t>Read the three findings as a set - together they are this lesson’s real content, more than any single accuracy number.</a:t>
-            </a:r>
-          </a:p>
-          <a:p>
-            <a:pPr lvl="0" indent="0" marL="0">
-              <a:buNone/>
-            </a:pPr>
-          </a:p>
-          <a:p>
-            <a:pPr lvl="0" indent="0" marL="0">
-              <a:buNone/>
-            </a:pPr>
-            <a:r>
-              <a:rPr/>
-              <a:t>The third finding is the one to land hardest, because it repeats a pattern they have now seen with several different methods: flexibility without a stopping rule is not an advantage. Ask the room to name the earlier occurrences before you do - the degree-12 polynomial in lesson 3, k = 1 in lesson 6, and, earlier today, the boosted ensemble that kept adding trees past its peak.</a:t>
+              <a:t>Everything from this lesson, cross-validated the same way. Read down the column and let the pattern speak before naming it: every ensemble method - bagging, the random forest, gradient boosting - lands within about a point and a half of the others, and all three sit closer to the ceiling than either single tree.</a:t>
+            </a:r>
+          </a:p>
+          <a:p>
+            <a:pPr lvl="0" indent="0" marL="0">
+              <a:buNone/>
+            </a:pPr>
+          </a:p>
+          <a:p>
+            <a:pPr lvl="0" indent="0" marL="0">
+              <a:buNone/>
+            </a:pPr>
+            <a:r>
+              <a:rPr/>
+              <a:t>The ceiling itself: 1 minus the 7% of labels deliberately flipped. No method reaches it, and none should - a model that classified the flipped labels “correctly” would be modelling the noise, not the rule.</a:t>
+            </a:r>
+          </a:p>
+          <a:p>
+            <a:pPr lvl="0" indent="0" marL="0">
+              <a:buNone/>
+            </a:pPr>
+          </a:p>
+          <a:p>
+            <a:pPr lvl="0" indent="0" marL="0">
+              <a:buNone/>
+            </a:pPr>
+            <a:r>
+              <a:rPr/>
+              <a:t>One honest caveat, in lesson 5’s terms. The depth of 8 and the 30 boosted trees were picked because they scored best on these same five folds, so those two rows are slightly optimistic; nested cross-validation would remove that. Bagging and the random forest ran at their defaults, chose nothing, and are not affected - and they are still on top.</a:t>
             </a:r>
           </a:p>
           <a:p>
@@ -6135,21 +6192,21 @@
             </a:pPr>
             <a:r>
               <a:rPr/>
-              <a:t>A table to photograph, exactly as lesson 6 closed with one. Work down it and attach today’s evidence to each row rather than leaving it as generic advice: the nine-leaf tree for the first row, the leaderboard for the second, the tree-count and learning-rate tables for the third, the noise experiment for the fourth, the out-of-bag slide for the fifth.</a:t>
-            </a:r>
-          </a:p>
-          <a:p>
-            <a:pPr lvl="0" indent="0" marL="0">
-              <a:buNone/>
-            </a:pPr>
-          </a:p>
-          <a:p>
-            <a:pPr lvl="0" indent="0" marL="0">
-              <a:buNone/>
-            </a:pPr>
-            <a:r>
-              <a:rPr/>
-              <a:t>The fourth row is worth a sentence of its own, tying back to the noise experiment: with two real features among 22 columns and 1,200 rows, more than half the importance already landed on noise. Many rows do not protect against it; what matters is how many useless columns compete at each split. Permutation importance, the check, was slide 38; the next slide comes back to it.</a:t>
+              <a:t>Read the three findings as a set - together they are this lesson’s real content, more than any single accuracy number.</a:t>
+            </a:r>
+          </a:p>
+          <a:p>
+            <a:pPr lvl="0" indent="0" marL="0">
+              <a:buNone/>
+            </a:pPr>
+          </a:p>
+          <a:p>
+            <a:pPr lvl="0" indent="0" marL="0">
+              <a:buNone/>
+            </a:pPr>
+            <a:r>
+              <a:rPr/>
+              <a:t>The third finding is the one to land hardest, because it repeats a pattern they have now seen with several different methods: flexibility without a stopping rule is not an advantage. Ask the room to name the earlier occurrences before you do - the degree-12 polynomial in lesson 3, k = 1 in lesson 6, and, earlier today, the boosted ensemble that kept adding trees past its peak.</a:t>
             </a:r>
           </a:p>
           <a:p>
@@ -6245,115 +6302,35 @@
             </a:pPr>
             <a:r>
               <a:rPr/>
-              <a:t>This is the number to carry out of the room. Say it once more, slowly: with twenty pure-noise columns against two real features, more than half of a random forest’s importance mass sat on columns wired to nothing.</a:t>
-            </a:r>
-          </a:p>
-          <a:p>
-            <a:pPr lvl="0" indent="0" marL="0">
-              <a:buNone/>
-            </a:pPr>
-          </a:p>
-          <a:p>
-            <a:pPr lvl="0" indent="0" marL="0">
-              <a:buNone/>
-            </a:pPr>
-            <a:r>
-              <a:rPr/>
-              <a:t>Ask them to write it down - derivations fade, this kind of number tends not to. Every lesson so far has left one of these - lesson 1’s 77% accuracy on coin-flip labels, lesson 3’s coefficient of 365 where an unpenalised fit wanted billions - and this is lesson 7’s.</a:t>
-            </a:r>
-          </a:p>
-          <a:p>
-            <a:pPr lvl="0" indent="0" marL="0">
-              <a:buNone/>
-            </a:pPr>
-          </a:p>
-          <a:p>
-            <a:pPr lvl="0" indent="0" marL="0">
-              <a:buNone/>
-            </a:pPr>
-            <a:r>
-              <a:rPr/>
-              <a:t>The second and third bullets are the mechanism, and there are two causes, not one. Take them in order.</a:t>
-            </a:r>
-          </a:p>
-          <a:p>
-            <a:pPr lvl="0" indent="0" marL="0">
-              <a:buNone/>
-            </a:pPr>
-          </a:p>
-          <a:p>
-            <a:pPr lvl="0" indent="0" marL="0">
-              <a:buNone/>
-            </a:pPr>
-            <a:r>
-              <a:rPr/>
-              <a:t>The menu. The square root of 22, rounded down, is 4, so each split chooses among 4 random columns. The chance that all 4 come from the 20 noise columns is 4,845 / 7,315 = 0.662: two splits in three offer no real feature. At those splits the tree still has to pick something, and it picks the noise column that happens to separate the classes best.</a:t>
-            </a:r>
-          </a:p>
-          <a:p>
-            <a:pPr lvl="0" indent="0" marL="0">
-              <a:buNone/>
-            </a:pPr>
-          </a:p>
-          <a:p>
-            <a:pPr lvl="0" indent="0" marL="0">
-              <a:buNone/>
-            </a:pPr>
-            <a:r>
-              <a:rPr/>
-              <a:t>Small groups. The menu is not the whole story, and notebook 2 shows it: with </a:t>
-            </a:r>
-            <a:r>
-              <a:rPr>
-                <a:latin typeface="Courier"/>
-              </a:rPr>
-              <a:t>max_features=None</a:t>
-            </a:r>
-            <a:r>
-              <a:rPr/>
-              <a:t>, every split offered all 22 columns, the noise share falls from 54.5% to 28%, not to zero. Deep in a tree a node holds a handful of applicants, and among twenty columns of random numbers one will almost always separate a handful of applicants a little better than income or debt can, purely by chance. Every such split credits noise.</a:t>
-            </a:r>
-          </a:p>
-          <a:p>
-            <a:pPr lvl="0" indent="0" marL="0">
-              <a:buNone/>
-            </a:pPr>
-          </a:p>
-          <a:p>
-            <a:pPr lvl="0" indent="0" marL="0">
-              <a:buNone/>
-            </a:pPr>
-            <a:r>
-              <a:rPr/>
-              <a:t>Most will predict the noise share falls to zero with the full menu, and the reasoning is sound as far as it goes - a real feature is now always there to be chosen near the root. It is the bottom of the trees that it misses. The same run raised the accuracy from 0.837 to 0.897: with 20 useless columns out of 22, the random menu costs more accuracy than decorrelating the trees buys back. The default is a good default, not a law.</a:t>
-            </a:r>
-          </a:p>
-          <a:p>
-            <a:pPr lvl="0" indent="0" marL="0">
-              <a:buNone/>
-            </a:pPr>
-          </a:p>
-          <a:p>
-            <a:pPr lvl="0" indent="0" marL="0">
-              <a:buNone/>
-            </a:pPr>
-            <a:r>
-              <a:rPr/>
-              <a:t>The last bullet sends them back to the check of slide 38: shuffling a column on held-out data costs the two real features 0.09 and 0.18 of accuracy, and each noise column almost nothing.</a:t>
-            </a:r>
-          </a:p>
-          <a:p>
-            <a:pPr lvl="0" indent="0" marL="0">
-              <a:buNone/>
-            </a:pPr>
-          </a:p>
-          <a:p>
-            <a:pPr lvl="0" indent="0" marL="0">
-              <a:buNone/>
-            </a:pPr>
-            <a:r>
-              <a:rPr/>
-              <a:t>Handout section 7 has the full mechanism.</a:t>
+              <a:t>A table to photograph, exactly as lesson 6 closed with one. Work down it and attach today’s evidence to each row rather than leaving it as generic advice: the nine-leaf tree for the first row, the leaderboard for the second, the tree-count and learning-rate tables for the third, the noise experiment for the fourth, the out-of-bag slide for the fifth.</a:t>
+            </a:r>
+          </a:p>
+          <a:p>
+            <a:pPr lvl="0" indent="0" marL="0">
+              <a:buNone/>
+            </a:pPr>
+          </a:p>
+          <a:p>
+            <a:pPr lvl="0" indent="0" marL="0">
+              <a:buNone/>
+            </a:pPr>
+            <a:r>
+              <a:rPr/>
+              <a:t>The fourth row is worth a sentence of its own, tying back to the noise experiment: with two real features among 22 columns and 1,200 rows, more than half the importance already landed on noise. Many rows do not protect against it; what matters is how many useless columns compete at each split. Permutation importance, the check, was slide 39; the next slide comes back to it.</a:t>
+            </a:r>
+          </a:p>
+          <a:p>
+            <a:pPr lvl="0" indent="0" marL="0">
+              <a:buNone/>
+            </a:pPr>
+          </a:p>
+          <a:p>
+            <a:pPr lvl="0" indent="0" marL="0">
+              <a:buNone/>
+            </a:pPr>
+            <a:r>
+              <a:rPr/>
+              <a:t>Handout section 11.</a:t>
             </a:r>
           </a:p>
         </p:txBody>
@@ -6435,49 +6412,115 @@
             </a:pPr>
             <a:r>
               <a:rPr/>
-              <a:t>Close on the same shape as lesson 6’s summary: a handful of numbers that carry the lesson’s argument without needing the mathematics behind them re-derived.</a:t>
-            </a:r>
-          </a:p>
-          <a:p>
-            <a:pPr lvl="0" indent="0" marL="0">
-              <a:buNone/>
-            </a:pPr>
-          </a:p>
-          <a:p>
-            <a:pPr lvl="0" indent="0" marL="0">
-              <a:buNone/>
-            </a:pPr>
-            <a:r>
-              <a:rPr/>
-              <a:t>If they remember one habit from today, make it this: before trusting a random forest’s importance ranking, ask how many of the columns could plausibly matter at all - many useless columns are what hand credit to noise, and the accuracy score gives no warning - and then check the ranking by shuffling on held-out data, as slide 38 did.</a:t>
-            </a:r>
-          </a:p>
-          <a:p>
-            <a:pPr lvl="0" indent="0" marL="0">
-              <a:buNone/>
-            </a:pPr>
-          </a:p>
-          <a:p>
-            <a:pPr lvl="0" indent="0" marL="0">
-              <a:buNone/>
-            </a:pPr>
-            <a:r>
-              <a:rPr/>
-              <a:t>Next lesson turns from labelled data to unlabelled data. Every model so far learned from examples whose answer was known: a price, a class, a default. Lesson 8 asks what structure there is in data when nobody has given the answer at all.</a:t>
-            </a:r>
-          </a:p>
-          <a:p>
-            <a:pPr lvl="0" indent="0" marL="0">
-              <a:buNone/>
-            </a:pPr>
-          </a:p>
-          <a:p>
-            <a:pPr lvl="0" indent="0" marL="0">
-              <a:buNone/>
-            </a:pPr>
-            <a:r>
-              <a:rPr/>
-              <a:t>Handout summary and notation table.</a:t>
+              <a:t>This is the number to carry out of the room. Say it once more, slowly: with twenty pure-noise columns against two real features, more than half of a random forest’s importance mass sat on columns wired to nothing.</a:t>
+            </a:r>
+          </a:p>
+          <a:p>
+            <a:pPr lvl="0" indent="0" marL="0">
+              <a:buNone/>
+            </a:pPr>
+          </a:p>
+          <a:p>
+            <a:pPr lvl="0" indent="0" marL="0">
+              <a:buNone/>
+            </a:pPr>
+            <a:r>
+              <a:rPr/>
+              <a:t>Ask them to write it down - derivations fade, this kind of number tends not to. Every lesson so far has left one of these - lesson 1’s 77% accuracy on coin-flip labels, lesson 3’s coefficient of 365 where an unpenalised fit wanted billions - and this is lesson 7’s.</a:t>
+            </a:r>
+          </a:p>
+          <a:p>
+            <a:pPr lvl="0" indent="0" marL="0">
+              <a:buNone/>
+            </a:pPr>
+          </a:p>
+          <a:p>
+            <a:pPr lvl="0" indent="0" marL="0">
+              <a:buNone/>
+            </a:pPr>
+            <a:r>
+              <a:rPr/>
+              <a:t>The second and third bullets are the mechanism, and there are two causes, not one. Take them in order.</a:t>
+            </a:r>
+          </a:p>
+          <a:p>
+            <a:pPr lvl="0" indent="0" marL="0">
+              <a:buNone/>
+            </a:pPr>
+          </a:p>
+          <a:p>
+            <a:pPr lvl="0" indent="0" marL="0">
+              <a:buNone/>
+            </a:pPr>
+            <a:r>
+              <a:rPr/>
+              <a:t>The menu. The square root of 22, rounded down, is 4, so each split chooses among 4 random columns. The chance that all 4 come from the 20 noise columns is 4,845 / 7,315 = 0.662: two splits in three offer no real feature. At those splits the tree still has to pick something, and it picks the noise column that happens to separate the classes best.</a:t>
+            </a:r>
+          </a:p>
+          <a:p>
+            <a:pPr lvl="0" indent="0" marL="0">
+              <a:buNone/>
+            </a:pPr>
+          </a:p>
+          <a:p>
+            <a:pPr lvl="0" indent="0" marL="0">
+              <a:buNone/>
+            </a:pPr>
+            <a:r>
+              <a:rPr/>
+              <a:t>Small groups. The menu is not the whole story, and notebook 2 shows it: with </a:t>
+            </a:r>
+            <a:r>
+              <a:rPr>
+                <a:latin typeface="Courier"/>
+              </a:rPr>
+              <a:t>max_features=None</a:t>
+            </a:r>
+            <a:r>
+              <a:rPr/>
+              <a:t>, every split offered all 22 columns, the noise share falls from 54.5% to 28%, not to zero. Deep in a tree a node holds a handful of applicants, and among twenty columns of random numbers one will almost always separate a handful of applicants a little better than income or debt can, purely by chance. Every such split credits noise.</a:t>
+            </a:r>
+          </a:p>
+          <a:p>
+            <a:pPr lvl="0" indent="0" marL="0">
+              <a:buNone/>
+            </a:pPr>
+          </a:p>
+          <a:p>
+            <a:pPr lvl="0" indent="0" marL="0">
+              <a:buNone/>
+            </a:pPr>
+            <a:r>
+              <a:rPr/>
+              <a:t>Most will predict the noise share falls to zero with the full menu, and the reasoning is sound as far as it goes - a real feature is now always there to be chosen near the root. It is the bottom of the trees that it misses. The same run raised the accuracy from 0.837 to 0.897: with 20 useless columns out of 22, the random menu costs more accuracy than decorrelating the trees buys back. The default is a good default, not a law.</a:t>
+            </a:r>
+          </a:p>
+          <a:p>
+            <a:pPr lvl="0" indent="0" marL="0">
+              <a:buNone/>
+            </a:pPr>
+          </a:p>
+          <a:p>
+            <a:pPr lvl="0" indent="0" marL="0">
+              <a:buNone/>
+            </a:pPr>
+            <a:r>
+              <a:rPr/>
+              <a:t>The last bullet sends them back to the check of slide 39: shuffling a column on held-out data costs the two real features 0.09 and 0.18 of accuracy, and each noise column almost nothing.</a:t>
+            </a:r>
+          </a:p>
+          <a:p>
+            <a:pPr lvl="0" indent="0" marL="0">
+              <a:buNone/>
+            </a:pPr>
+          </a:p>
+          <a:p>
+            <a:pPr lvl="0" indent="0" marL="0">
+              <a:buNone/>
+            </a:pPr>
+            <a:r>
+              <a:rPr/>
+              <a:t>Handout section 7 has the full mechanism.</a:t>
             </a:r>
           </a:p>
         </p:txBody>
@@ -6559,35 +6602,49 @@
             </a:pPr>
             <a:r>
               <a:rPr/>
-              <a:t>Set it explicitly and say out loud when it comes back: the first ten minutes of lesson 8, Friday 27 November.</a:t>
-            </a:r>
-          </a:p>
-          <a:p>
-            <a:pPr lvl="0" indent="0" marL="0">
-              <a:buNone/>
-            </a:pPr>
-          </a:p>
-          <a:p>
-            <a:pPr lvl="0" indent="0" marL="0">
-              <a:buNone/>
-            </a:pPr>
-            <a:r>
-              <a:rPr/>
-              <a:t>Remind them of the standing rule from lesson 5: every reported number needs a cross-validated spread, and any feature-importance claim needs the check this lesson just demonstrated - a random forest’s importance ranking is a claim to be verified, not a fact to be quoted.</a:t>
-            </a:r>
-          </a:p>
-          <a:p>
-            <a:pPr lvl="0" indent="0" marL="0">
-              <a:buNone/>
-            </a:pPr>
-          </a:p>
-          <a:p>
-            <a:pPr lvl="0" indent="0" marL="0">
-              <a:buNone/>
-            </a:pPr>
-            <a:r>
-              <a:rPr/>
-              <a:t>Next week: unsupervised learning, the first lesson in which the data comes with no labels at all.</a:t>
+              <a:t>Close on the same shape as lesson 6’s summary: a handful of numbers that carry the lesson’s argument without needing the mathematics behind them re-derived.</a:t>
+            </a:r>
+          </a:p>
+          <a:p>
+            <a:pPr lvl="0" indent="0" marL="0">
+              <a:buNone/>
+            </a:pPr>
+          </a:p>
+          <a:p>
+            <a:pPr lvl="0" indent="0" marL="0">
+              <a:buNone/>
+            </a:pPr>
+            <a:r>
+              <a:rPr/>
+              <a:t>If they remember one habit from today, make it this: before trusting a random forest’s importance ranking, ask how many of the columns could plausibly matter at all - many useless columns are what hand credit to noise, and the accuracy score gives no warning - and then check the ranking by shuffling on held-out data, as slide 39 did.</a:t>
+            </a:r>
+          </a:p>
+          <a:p>
+            <a:pPr lvl="0" indent="0" marL="0">
+              <a:buNone/>
+            </a:pPr>
+          </a:p>
+          <a:p>
+            <a:pPr lvl="0" indent="0" marL="0">
+              <a:buNone/>
+            </a:pPr>
+            <a:r>
+              <a:rPr/>
+              <a:t>Next lesson turns from labelled data to unlabelled data. Every model so far learned from examples whose answer was known: a price, a class, a default. Lesson 8 asks what structure there is in data when nobody has given the answer at all.</a:t>
+            </a:r>
+          </a:p>
+          <a:p>
+            <a:pPr lvl="0" indent="0" marL="0">
+              <a:buNone/>
+            </a:pPr>
+          </a:p>
+          <a:p>
+            <a:pPr lvl="0" indent="0" marL="0">
+              <a:buNone/>
+            </a:pPr>
+            <a:r>
+              <a:rPr/>
+              <a:t>Handout summary and notation table.</a:t>
             </a:r>
           </a:p>
         </p:txBody>
@@ -6610,6 +6667,116 @@
             <a:fld id="{18BDFEC3-8487-43E8-A154-7C12CBC1FFF2}" type="slidenum">
               <a:rPr lang="en-US"/>
               <a:t>56</a:t>
+            </a:fld>
+            <a:endParaRPr lang="en-US"/>
+          </a:p>
+        </p:txBody>
+      </p:sp>
+    </p:spTree>
+  </p:cSld>
+</p:notes>
+</file>
+
+<file path=ppt/notesSlides/notesSlide56.xml><?xml version="1.0" encoding="utf-8"?>
+<p:notes xmlns:a="http://schemas.openxmlformats.org/drawingml/2006/main" xmlns:r="http://schemas.openxmlformats.org/officeDocument/2006/relationships" xmlns:p="http://schemas.openxmlformats.org/presentationml/2006/main">
+  <p:cSld>
+    <p:spTree>
+      <p:nvGrpSpPr>
+        <p:cNvPr id="1" name=""/>
+        <p:cNvGrpSpPr/>
+        <p:nvPr/>
+      </p:nvGrpSpPr>
+      <p:grpSpPr>
+        <a:xfrm>
+          <a:off x="0" y="0"/>
+          <a:ext cx="0" cy="0"/>
+          <a:chOff x="0" y="0"/>
+          <a:chExt cx="0" cy="0"/>
+        </a:xfrm>
+      </p:grpSpPr>
+      <p:sp>
+        <p:nvSpPr>
+          <p:cNvPr id="2" name="Slide Image Placeholder 1"/>
+          <p:cNvSpPr>
+            <a:spLocks noGrp="1" noRot="1" noChangeAspect="1"/>
+          </p:cNvSpPr>
+          <p:nvPr>
+            <p:ph type="sldImg"/>
+          </p:nvPr>
+        </p:nvSpPr>
+        <p:spPr/>
+      </p:sp>
+      <p:sp>
+        <p:nvSpPr>
+          <p:cNvPr id="3" name="Notes Placeholder 2"/>
+          <p:cNvSpPr>
+            <a:spLocks noGrp="1"/>
+          </p:cNvSpPr>
+          <p:nvPr>
+            <p:ph type="body" idx="1"/>
+          </p:nvPr>
+        </p:nvSpPr>
+        <p:spPr/>
+        <p:txBody>
+          <a:bodyPr/>
+          <a:lstStyle/>
+          <a:p>
+            <a:pPr lvl="0" indent="0" marL="0">
+              <a:buNone/>
+            </a:pPr>
+            <a:r>
+              <a:rPr/>
+              <a:t>Set it explicitly and say out loud when it comes back: the first ten minutes of lesson 8, Friday 27 November.</a:t>
+            </a:r>
+          </a:p>
+          <a:p>
+            <a:pPr lvl="0" indent="0" marL="0">
+              <a:buNone/>
+            </a:pPr>
+          </a:p>
+          <a:p>
+            <a:pPr lvl="0" indent="0" marL="0">
+              <a:buNone/>
+            </a:pPr>
+            <a:r>
+              <a:rPr/>
+              <a:t>Remind them of the standing rule from lesson 5: every reported number needs a cross-validated spread, and any feature-importance claim needs the check this lesson just demonstrated - a random forest’s importance ranking is a claim to be verified, not a fact to be quoted.</a:t>
+            </a:r>
+          </a:p>
+          <a:p>
+            <a:pPr lvl="0" indent="0" marL="0">
+              <a:buNone/>
+            </a:pPr>
+          </a:p>
+          <a:p>
+            <a:pPr lvl="0" indent="0" marL="0">
+              <a:buNone/>
+            </a:pPr>
+            <a:r>
+              <a:rPr/>
+              <a:t>Next week: unsupervised learning, the first lesson in which the data comes with no labels at all.</a:t>
+            </a:r>
+          </a:p>
+        </p:txBody>
+      </p:sp>
+      <p:sp>
+        <p:nvSpPr>
+          <p:cNvPr id="4" name="Slide Number Placeholder 3"/>
+          <p:cNvSpPr>
+            <a:spLocks noGrp="1"/>
+          </p:cNvSpPr>
+          <p:nvPr>
+            <p:ph type="sldNum" sz="quarter" idx="10"/>
+          </p:nvPr>
+        </p:nvSpPr>
+        <p:spPr/>
+        <p:txBody>
+          <a:bodyPr/>
+          <a:lstStyle/>
+          <a:p>
+            <a:fld id="{18BDFEC3-8487-43E8-A154-7C12CBC1FFF2}" type="slidenum">
+              <a:rPr lang="en-US"/>
+              <a:t>57</a:t>
             </a:fld>
             <a:endParaRPr lang="en-US"/>
           </a:p>
@@ -6669,7 +6836,7 @@
             </a:pPr>
             <a:r>
               <a:rPr/>
-              <a:t>Read the algorithm as one sentence and let it sit - it really is that short. Contrast it explicitly with lessons 3 and 4: no cost function is minimised over a continuous parameter, there is no gradient step. The tree still learns from the data - which feature to ask about and where to put each threshold - but it learns them by trying candidates and keeping the best, not by descending a slope. A tree is a sequence of yes/no questions, chosen one at a time.</a:t>
+              <a:t>Read the algorithm as one sentence and let it sit - it really is that short. The first bullet is the one students compress: nobody chooses the feature first. At every node the tree tries every feature and every threshold and keeps the best pair; how “best” is scored comes on slides 9 to 16. Contrast it explicitly with lessons 3 and 4: no cost function is minimised over a continuous parameter, there is no gradient step. The tree still learns from the data - which feature to ask about and where to put each threshold - but it learns them by trying candidates and keeping the best, not by descending a slope. A tree is a sequence of yes/no questions, chosen one at a time.</a:t>
             </a:r>
           </a:p>
           <a:p>
@@ -6684,6 +6851,20 @@
             <a:r>
               <a:rPr/>
               <a:t>The word to stress is “greedy”. At every step the tree takes whichever split helps most immediately, with no mechanism for looking two levels ahead. Tell them to hold onto that word - it is what explains, later this hour, why a shallow tree can miss the interior islands entirely even though the information to find them is right there in the data.</a:t>
+            </a:r>
+          </a:p>
+          <a:p>
+            <a:pPr lvl="0" indent="0" marL="0">
+              <a:buNone/>
+            </a:pPr>
+          </a:p>
+          <a:p>
+            <a:pPr lvl="0" indent="0" marL="0">
+              <a:buNone/>
+            </a:pPr>
+            <a:r>
+              <a:rPr/>
+              <a:t>A predictable slip: “one feature per level, applied to all the applicants, then the next feature”. It is a natural reading, because a drawn tree looks like a fixed sequence of questions and the first question really is asked of everyone. It is wrong in two ways. After the first split each group is searched on its own, so the two groups can get different questions; and nothing forbids a feature from coming back - the next slide asks about debt three times on one path.</a:t>
             </a:r>
           </a:p>
           <a:p>
@@ -6779,35 +6960,35 @@
             </a:pPr>
             <a:r>
               <a:rPr/>
-              <a:t>The previous slide’s sentence, run three times on the loan data. Each column is one more round; on top the cuts in the plane, the new ones in gold, and underneath the tree that asks the same questions. Point at the two halves of each column in turn: every gold line on top is a gold box underneath.</a:t>
-            </a:r>
-          </a:p>
-          <a:p>
-            <a:pPr lvl="0" indent="0" marL="0">
-              <a:buNone/>
-            </a:pPr>
-          </a:p>
-          <a:p>
-            <a:pPr lvl="0" indent="0" marL="0">
-              <a:buNone/>
-            </a:pPr>
-            <a:r>
-              <a:rPr/>
-              <a:t>Step 1: of every possible single question, debt ratio at or below 0.82 is the one that leaves the two groups purest - 971 applicants at 26% default against 229 at 94%. Do not say why it is the best yet; the next slides give the number that ranks it.</a:t>
-            </a:r>
-          </a:p>
-          <a:p>
-            <a:pPr lvl="0" indent="0" marL="0">
-              <a:buNone/>
-            </a:pPr>
-          </a:p>
-          <a:p>
-            <a:pPr lvl="0" indent="0" marL="0">
-              <a:buNone/>
-            </a:pPr>
-            <a:r>
-              <a:rPr/>
-              <a:t>Step 2 is the word “recursive” made visible. The tree now asks a question inside each group, and the two questions are different - income on the left, debt again on the right - because each group is searched on its own, without regard to the other. That is “independently” in the sentence.</a:t>
+              <a:t>The previous slide’s sentence, run three times on the loan data. Each column is one more round; on top the cuts in the plane, the new ones in gold, and underneath the tree that asks the same questions. Point at the two halves of each column in turn: every gold line on top is a gold box underneath. The legend at the bottom gives the colours: gold, a question added in this step; white, a question from an earlier step; teal or rust, a group not split yet. Every box, question or group, shows its applicants and the share who defaulted.</a:t>
+            </a:r>
+          </a:p>
+          <a:p>
+            <a:pPr lvl="0" indent="0" marL="0">
+              <a:buNone/>
+            </a:pPr>
+          </a:p>
+          <a:p>
+            <a:pPr lvl="0" indent="0" marL="0">
+              <a:buNone/>
+            </a:pPr>
+            <a:r>
+              <a:rPr/>
+              <a:t>Step 1: every possible single question was tried - every threshold on income and every threshold on debt, 2,234 candidates - and debt ratio at or below 0.82 is the one that leaves the two groups purest: 971 applicants at 26% default against 229 at 94%. Do not say why it is the best yet; slides 9 to 16 give the number that ranks it, and slide 15 draws all 2,234 candidates scored.</a:t>
+            </a:r>
+          </a:p>
+          <a:p>
+            <a:pPr lvl="0" indent="0" marL="0">
+              <a:buNone/>
+            </a:pPr>
+          </a:p>
+          <a:p>
+            <a:pPr lvl="0" indent="0" marL="0">
+              <a:buNone/>
+            </a:pPr>
+            <a:r>
+              <a:rPr/>
+              <a:t>Step 2 is the word “recursive” made visible, and the place where a student asks where the two groups of step 1 went. They are still there: each group’s box has become the question asked of it. The 971 now reads “income ≤ 28?” with 971 · 26% under it, and splits into 87 + 884 = 971; the 229 reads “debt ≤ 0.947?” and splits into 160 + 69 = 229. A leaf that is split becomes a question; its applicants do not go anywhere. The two questions are different - income on the left, debt again on the right - because each group is searched on its own, without regard to the other. That is “independently” in the sentence.</a:t>
             </a:r>
           </a:p>
           <a:p>
@@ -10673,22 +10854,37 @@
             <a:pPr lvl="0"/>
             <a:r>
               <a:rPr/>
-              <a:t>For a continuous feature, scan </a:t>
+              <a:t>Sort a feature’s values: every </a:t>
             </a:r>
             <a:r>
               <a:rPr b="1"/>
-              <a:t>every midpoint</a:t>
-            </a:r>
-            <a:r>
-              <a:rPr/>
-              <a:t> between adjacent sorted values as a candidate threshold</a:t>
+              <a:t>midpoint</a:t>
+            </a:r>
+            <a:r>
+              <a:rPr/>
+              <a:t> between neighbours is a candidate threshold</a:t>
             </a:r>
           </a:p>
           <a:p>
             <a:pPr lvl="0"/>
             <a:r>
               <a:rPr/>
-              <a:t>Do this for </a:t>
+              <a:t>Infinitely many thresholds, but </a:t>
+            </a:r>
+            <a:r>
+              <a:rPr b="1"/>
+              <a:t>finitely many splits</a:t>
+            </a:r>
+            <a:r>
+              <a:rPr/>
+              <a:t>: any threshold between the same two neighbours makes the same two groups</a:t>
+            </a:r>
+          </a:p>
+          <a:p>
+            <a:pPr lvl="0"/>
+            <a:r>
+              <a:rPr/>
+              <a:t>Score every candidate on </a:t>
             </a:r>
             <a:r>
               <a:rPr b="1"/>
@@ -10696,14 +10892,7 @@
             </a:r>
             <a:r>
               <a:rPr/>
-              <a:t>; keep the best pair</a:t>
-            </a:r>
-          </a:p>
-          <a:p>
-            <a:pPr lvl="0"/>
-            <a:r>
-              <a:rPr/>
-              <a:t>Repeat the search inside each child</a:t>
+              <a:t>; keep the best pair, then repeat inside each child</a:t>
             </a:r>
           </a:p>
           <a:p>
@@ -10766,6 +10955,88 @@
             </a:pPr>
             <a:r>
               <a:rPr/>
+              <a:t>Every threshold, scored</a:t>
+            </a:r>
+          </a:p>
+        </p:txBody>
+      </p:sp>
+      <p:pic>
+        <p:nvPicPr>
+          <p:cNvPr descr="threshold_scan.png" id="0" name="Picture 1"/>
+          <p:cNvPicPr>
+            <a:picLocks noGrp="1" noChangeAspect="1"/>
+          </p:cNvPicPr>
+          <p:nvPr/>
+        </p:nvPicPr>
+        <p:blipFill>
+          <a:blip r:embed="rId3"/>
+          <a:stretch>
+            <a:fillRect/>
+          </a:stretch>
+        </p:blipFill>
+        <p:spPr bwMode="auto">
+          <a:xfrm>
+            <a:off x="544817" y="1166099"/>
+            <a:ext cx="8054366" cy="3360181"/>
+          </a:xfrm>
+          <a:prstGeom prst="rect">
+            <a:avLst/>
+          </a:prstGeom>
+          <a:noFill/>
+          <a:ln w="9525">
+            <a:noFill/>
+            <a:headEnd/>
+            <a:tailEnd/>
+          </a:ln>
+        </p:spPr>
+      </p:pic>
+    </p:spTree>
+  </p:cSld>
+</p:sld>
+</file>
+
+<file path=ppt/slides/slide16.xml><?xml version="1.0" encoding="utf-8"?>
+<p:sld xmlns:a="http://schemas.openxmlformats.org/drawingml/2006/main" xmlns:r="http://schemas.openxmlformats.org/officeDocument/2006/relationships" xmlns:p="http://schemas.openxmlformats.org/presentationml/2006/main">
+  <p:cSld>
+    <p:spTree>
+      <p:nvGrpSpPr>
+        <p:cNvPr id="1" name=""/>
+        <p:cNvGrpSpPr/>
+        <p:nvPr/>
+      </p:nvGrpSpPr>
+      <p:grpSpPr>
+        <a:xfrm>
+          <a:off x="0" y="0"/>
+          <a:ext cx="0" cy="0"/>
+          <a:chOff x="0" y="0"/>
+          <a:chExt cx="0" cy="0"/>
+        </a:xfrm>
+      </p:grpSpPr>
+      <p:sp>
+        <p:nvSpPr>
+          <p:cNvPr id="2" name="Title 1"/>
+          <p:cNvSpPr>
+            <a:spLocks noGrp="1"/>
+          </p:cNvSpPr>
+          <p:nvPr>
+            <p:ph type="title"/>
+          </p:nvPr>
+        </p:nvSpPr>
+        <p:spPr>
+          <a:xfrm>
+            <a:off x="457200" y="205979"/>
+            <a:ext cx="8229600" cy="857250"/>
+          </a:xfrm>
+        </p:spPr>
+        <p:txBody>
+          <a:bodyPr/>
+          <a:lstStyle/>
+          <a:p>
+            <a:pPr lvl="0" indent="0" marL="0">
+              <a:buNone/>
+            </a:pPr>
+            <a:r>
+              <a:rPr/>
               <a:t>Worked example: the root split</a:t>
             </a:r>
           </a:p>
@@ -10851,7 +11122,7 @@
 </p:sld>
 </file>
 
-<file path=ppt/slides/slide16.xml><?xml version="1.0" encoding="utf-8"?>
+<file path=ppt/slides/slide17.xml><?xml version="1.0" encoding="utf-8"?>
 <p:sld xmlns:a="http://schemas.openxmlformats.org/drawingml/2006/main" xmlns:r="http://schemas.openxmlformats.org/officeDocument/2006/relationships" xmlns:p="http://schemas.openxmlformats.org/presentationml/2006/main">
   <p:cSld>
     <p:spTree>
@@ -10933,118 +11204,6 @@
 </p:sld>
 </file>
 
-<file path=ppt/slides/slide17.xml><?xml version="1.0" encoding="utf-8"?>
-<p:sld xmlns:a="http://schemas.openxmlformats.org/drawingml/2006/main" xmlns:r="http://schemas.openxmlformats.org/officeDocument/2006/relationships" xmlns:p="http://schemas.openxmlformats.org/presentationml/2006/main">
-  <p:cSld>
-    <p:spTree>
-      <p:nvGrpSpPr>
-        <p:cNvPr id="1" name=""/>
-        <p:cNvGrpSpPr/>
-        <p:nvPr/>
-      </p:nvGrpSpPr>
-      <p:grpSpPr>
-        <a:xfrm>
-          <a:off x="0" y="0"/>
-          <a:ext cx="0" cy="0"/>
-          <a:chOff x="0" y="0"/>
-          <a:chExt cx="0" cy="0"/>
-        </a:xfrm>
-      </p:grpSpPr>
-      <p:sp>
-        <p:nvSpPr>
-          <p:cNvPr id="2" name="Title 1"/>
-          <p:cNvSpPr>
-            <a:spLocks noGrp="1"/>
-          </p:cNvSpPr>
-          <p:nvPr>
-            <p:ph type="title"/>
-          </p:nvPr>
-        </p:nvSpPr>
-        <p:spPr>
-          <a:xfrm>
-            <a:off x="457200" y="205979"/>
-            <a:ext cx="8229600" cy="857250"/>
-          </a:xfrm>
-        </p:spPr>
-        <p:txBody>
-          <a:bodyPr/>
-          <a:lstStyle/>
-          <a:p>
-            <a:pPr lvl="0" indent="0" marL="0">
-              <a:buNone/>
-            </a:pPr>
-            <a:r>
-              <a:rPr/>
-              <a:t>Checked against scikit-learn</a:t>
-            </a:r>
-          </a:p>
-        </p:txBody>
-      </p:sp>
-      <p:sp>
-        <p:nvSpPr>
-          <p:cNvPr id="3" name="Content Placeholder 2"/>
-          <p:cNvSpPr>
-            <a:spLocks noGrp="1"/>
-          </p:cNvSpPr>
-          <p:nvPr>
-            <p:ph idx="1"/>
-          </p:nvPr>
-        </p:nvSpPr>
-        <p:spPr>
-          <a:xfrm>
-            <a:off x="457200" y="1200151"/>
-            <a:ext cx="8229600" cy="3394472"/>
-          </a:xfrm>
-        </p:spPr>
-        <p:txBody>
-          <a:bodyPr/>
-          <a:lstStyle/>
-          <a:p>
-            <a:pPr lvl="0"/>
-            <a:r>
-              <a:rPr/>
-              <a:t>The from-scratch implementation and scikit-learn’s </a:t>
-            </a:r>
-            <a:r>
-              <a:rPr>
-                <a:latin typeface="Courier"/>
-              </a:rPr>
-              <a:t>DecisionTreeClassifier</a:t>
-            </a:r>
-            <a:r>
-              <a:rPr/>
-              <a:t> make </a:t>
-            </a:r>
-            <a:r>
-              <a:rPr b="1"/>
-              <a:t>the same prediction for all 1,200 applicants</a:t>
-            </a:r>
-            <a:r>
-              <a:rPr/>
-              <a:t>, at every depth tested</a:t>
-            </a:r>
-          </a:p>
-          <a:p>
-            <a:pPr lvl="0"/>
-            <a:r>
-              <a:rPr/>
-              <a:t>Not a coincidence: both search the same space by the same greedy rule</a:t>
-            </a:r>
-          </a:p>
-          <a:p>
-            <a:pPr lvl="0"/>
-            <a:r>
-              <a:rPr/>
-              <a:t>From here on, the notebooks use scikit-learn’s implementation: the same algorithm, compiled, not a different one</a:t>
-            </a:r>
-          </a:p>
-        </p:txBody>
-      </p:sp>
-    </p:spTree>
-  </p:cSld>
-</p:sld>
-</file>
-
 <file path=ppt/slides/slide18.xml><?xml version="1.0" encoding="utf-8"?>
 <p:sld xmlns:a="http://schemas.openxmlformats.org/drawingml/2006/main" xmlns:r="http://schemas.openxmlformats.org/officeDocument/2006/relationships" xmlns:p="http://schemas.openxmlformats.org/presentationml/2006/main">
   <p:cSld>
@@ -11087,7 +11246,7 @@
             </a:pPr>
             <a:r>
               <a:rPr/>
-              <a:t>What greedy misses</a:t>
+              <a:t>Checked against scikit-learn</a:t>
             </a:r>
           </a:p>
         </p:txBody>
@@ -11115,29 +11274,39 @@
             <a:pPr lvl="0"/>
             <a:r>
               <a:rPr/>
-              <a:t>The search never asks “which pair of splits helps most together”: only “which single split helps most right now”</a:t>
+              <a:t>The from-scratch implementation and scikit-learn’s </a:t>
+            </a:r>
+            <a:r>
+              <a:rPr>
+                <a:latin typeface="Courier"/>
+              </a:rPr>
+              <a:t>DecisionTreeClassifier</a:t>
+            </a:r>
+            <a:r>
+              <a:rPr/>
+              <a:t> make </a:t>
+            </a:r>
+            <a:r>
+              <a:rPr b="1"/>
+              <a:t>the same prediction for all 1,200 applicants</a:t>
+            </a:r>
+            <a:r>
+              <a:rPr/>
+              <a:t>, at every depth tested</a:t>
             </a:r>
           </a:p>
           <a:p>
             <a:pPr lvl="0"/>
             <a:r>
               <a:rPr/>
-              <a:t>A feature that only pays off </a:t>
-            </a:r>
-            <a:r>
-              <a:rPr b="1"/>
-              <a:t>in combination</a:t>
-            </a:r>
-            <a:r>
-              <a:rPr/>
-              <a:t> with a later split can be invisible to a shallow tree</a:t>
+              <a:t>Not a coincidence: both search the same space by the same greedy rule</a:t>
             </a:r>
           </a:p>
           <a:p>
             <a:pPr lvl="0"/>
             <a:r>
               <a:rPr/>
-              <a:t>Exactly what happens to this dataset’s two interior “stressed” islands, covered next</a:t>
+              <a:t>From here on, the notebooks use scikit-learn’s implementation: the same algorithm, compiled, not a different one</a:t>
             </a:r>
           </a:p>
         </p:txBody>
@@ -11189,7 +11358,7 @@
             </a:pPr>
             <a:r>
               <a:rPr/>
-              <a:t>Depth is the bias-variance dial</a:t>
+              <a:t>What greedy misses</a:t>
             </a:r>
           </a:p>
         </p:txBody>
@@ -11216,52 +11385,30 @@
           <a:p>
             <a:pPr lvl="0"/>
             <a:r>
-              <a:rPr>
-                <a:latin typeface="Courier"/>
-              </a:rPr>
-              <a:t>max_depth</a:t>
-            </a:r>
-            <a:r>
-              <a:rPr/>
-              <a:t>: the most questions </a:t>
+              <a:rPr/>
+              <a:t>The search never asks “which pair of splits helps most together”: only “which single split helps most right now”</a:t>
+            </a:r>
+          </a:p>
+          <a:p>
+            <a:pPr lvl="0"/>
+            <a:r>
+              <a:rPr/>
+              <a:t>A feature that only pays off </a:t>
             </a:r>
             <a:r>
               <a:rPr b="1"/>
-              <a:t>one applicant</a:t>
-            </a:r>
-            <a:r>
-              <a:rPr/>
-              <a:t> answers</a:t>
+              <a:t>in combination</a:t>
+            </a:r>
+            <a:r>
+              <a:rPr/>
+              <a:t> with a later split can be invisible to a shallow tree</a:t>
             </a:r>
           </a:p>
           <a:p>
             <a:pPr lvl="0"/>
             <a:r>
-              <a:rPr b="1"/>
-              <a:t>Shallow tree</a:t>
-            </a:r>
-            <a:r>
-              <a:rPr/>
-              <a:t>: few questions, only the coarsest structure. High bias, low variance</a:t>
-            </a:r>
-          </a:p>
-          <a:p>
-            <a:pPr lvl="0"/>
-            <a:r>
-              <a:rPr b="1"/>
-              <a:t>Deep tree</a:t>
-            </a:r>
-            <a:r>
-              <a:rPr/>
-              <a:t>: enough questions to isolate single points. Training accuracy </a:t>
-            </a:r>
-            <a:r>
-              <a:rPr b="1"/>
-              <a:t>exactly 1.000</a:t>
-            </a:r>
-            <a:r>
-              <a:rPr/>
-              <a:t>, even on data with no structure, unless two examples share every feature value but not the label</a:t>
+              <a:rPr/>
+              <a:t>Exactly what happens to this dataset’s two interior “stressed” islands, covered next</a:t>
             </a:r>
           </a:p>
         </p:txBody>
@@ -11394,6 +11541,130 @@
 </file>
 
 <file path=ppt/slides/slide20.xml><?xml version="1.0" encoding="utf-8"?>
+<p:sld xmlns:a="http://schemas.openxmlformats.org/drawingml/2006/main" xmlns:r="http://schemas.openxmlformats.org/officeDocument/2006/relationships" xmlns:p="http://schemas.openxmlformats.org/presentationml/2006/main">
+  <p:cSld>
+    <p:spTree>
+      <p:nvGrpSpPr>
+        <p:cNvPr id="1" name=""/>
+        <p:cNvGrpSpPr/>
+        <p:nvPr/>
+      </p:nvGrpSpPr>
+      <p:grpSpPr>
+        <a:xfrm>
+          <a:off x="0" y="0"/>
+          <a:ext cx="0" cy="0"/>
+          <a:chOff x="0" y="0"/>
+          <a:chExt cx="0" cy="0"/>
+        </a:xfrm>
+      </p:grpSpPr>
+      <p:sp>
+        <p:nvSpPr>
+          <p:cNvPr id="2" name="Title 1"/>
+          <p:cNvSpPr>
+            <a:spLocks noGrp="1"/>
+          </p:cNvSpPr>
+          <p:nvPr>
+            <p:ph type="title"/>
+          </p:nvPr>
+        </p:nvSpPr>
+        <p:spPr>
+          <a:xfrm>
+            <a:off x="457200" y="205979"/>
+            <a:ext cx="8229600" cy="857250"/>
+          </a:xfrm>
+        </p:spPr>
+        <p:txBody>
+          <a:bodyPr/>
+          <a:lstStyle/>
+          <a:p>
+            <a:pPr lvl="0" indent="0" marL="0">
+              <a:buNone/>
+            </a:pPr>
+            <a:r>
+              <a:rPr/>
+              <a:t>Depth is the bias-variance dial</a:t>
+            </a:r>
+          </a:p>
+        </p:txBody>
+      </p:sp>
+      <p:sp>
+        <p:nvSpPr>
+          <p:cNvPr id="3" name="Content Placeholder 2"/>
+          <p:cNvSpPr>
+            <a:spLocks noGrp="1"/>
+          </p:cNvSpPr>
+          <p:nvPr>
+            <p:ph idx="1"/>
+          </p:nvPr>
+        </p:nvSpPr>
+        <p:spPr>
+          <a:xfrm>
+            <a:off x="457200" y="1200151"/>
+            <a:ext cx="8229600" cy="3394472"/>
+          </a:xfrm>
+        </p:spPr>
+        <p:txBody>
+          <a:bodyPr/>
+          <a:lstStyle/>
+          <a:p>
+            <a:pPr lvl="0"/>
+            <a:r>
+              <a:rPr>
+                <a:latin typeface="Courier"/>
+              </a:rPr>
+              <a:t>max_depth</a:t>
+            </a:r>
+            <a:r>
+              <a:rPr/>
+              <a:t>: the most questions </a:t>
+            </a:r>
+            <a:r>
+              <a:rPr b="1"/>
+              <a:t>one applicant</a:t>
+            </a:r>
+            <a:r>
+              <a:rPr/>
+              <a:t> answers</a:t>
+            </a:r>
+          </a:p>
+          <a:p>
+            <a:pPr lvl="0"/>
+            <a:r>
+              <a:rPr b="1"/>
+              <a:t>Shallow tree</a:t>
+            </a:r>
+            <a:r>
+              <a:rPr/>
+              <a:t>: few questions, only the coarsest structure. High bias, low variance</a:t>
+            </a:r>
+          </a:p>
+          <a:p>
+            <a:pPr lvl="0"/>
+            <a:r>
+              <a:rPr b="1"/>
+              <a:t>Deep tree</a:t>
+            </a:r>
+            <a:r>
+              <a:rPr/>
+              <a:t>: enough questions to isolate single points. Training accuracy </a:t>
+            </a:r>
+            <a:r>
+              <a:rPr b="1"/>
+              <a:t>exactly 1.000</a:t>
+            </a:r>
+            <a:r>
+              <a:rPr/>
+              <a:t>, even on data with no structure, unless two examples share every feature value but not the label</a:t>
+            </a:r>
+          </a:p>
+        </p:txBody>
+      </p:sp>
+    </p:spTree>
+  </p:cSld>
+</p:sld>
+</file>
+
+<file path=ppt/slides/slide21.xml><?xml version="1.0" encoding="utf-8"?>
 <p:sld xmlns:a="http://schemas.openxmlformats.org/drawingml/2006/main" xmlns:r="http://schemas.openxmlformats.org/officeDocument/2006/relationships" xmlns:p="http://schemas.openxmlformats.org/presentationml/2006/main">
   <p:cSld>
     <p:spTree>
@@ -11855,7 +12126,7 @@
 </p:sld>
 </file>
 
-<file path=ppt/slides/slide21.xml><?xml version="1.0" encoding="utf-8"?>
+<file path=ppt/slides/slide22.xml><?xml version="1.0" encoding="utf-8"?>
 <p:sld xmlns:a="http://schemas.openxmlformats.org/drawingml/2006/main" xmlns:r="http://schemas.openxmlformats.org/officeDocument/2006/relationships" xmlns:p="http://schemas.openxmlformats.org/presentationml/2006/main">
   <p:cSld>
     <p:spTree>
@@ -11937,7 +12208,7 @@
 </p:sld>
 </file>
 
-<file path=ppt/slides/slide22.xml><?xml version="1.0" encoding="utf-8"?>
+<file path=ppt/slides/slide23.xml><?xml version="1.0" encoding="utf-8"?>
 <p:sld xmlns:a="http://schemas.openxmlformats.org/drawingml/2006/main" xmlns:r="http://schemas.openxmlformats.org/officeDocument/2006/relationships" xmlns:p="http://schemas.openxmlformats.org/presentationml/2006/main">
   <p:cSld>
     <p:spTree>
@@ -12019,159 +12290,6 @@
 </p:sld>
 </file>
 
-<file path=ppt/slides/slide23.xml><?xml version="1.0" encoding="utf-8"?>
-<p:sld xmlns:a="http://schemas.openxmlformats.org/drawingml/2006/main" xmlns:r="http://schemas.openxmlformats.org/officeDocument/2006/relationships" xmlns:p="http://schemas.openxmlformats.org/presentationml/2006/main">
-  <p:cSld>
-    <p:spTree>
-      <p:nvGrpSpPr>
-        <p:cNvPr id="1" name=""/>
-        <p:cNvGrpSpPr/>
-        <p:nvPr/>
-      </p:nvGrpSpPr>
-      <p:grpSpPr>
-        <a:xfrm>
-          <a:off x="0" y="0"/>
-          <a:ext cx="0" cy="0"/>
-          <a:chOff x="0" y="0"/>
-          <a:chExt cx="0" cy="0"/>
-        </a:xfrm>
-      </p:grpSpPr>
-      <p:sp>
-        <p:nvSpPr>
-          <p:cNvPr id="2" name="Title 1"/>
-          <p:cNvSpPr>
-            <a:spLocks noGrp="1"/>
-          </p:cNvSpPr>
-          <p:nvPr>
-            <p:ph type="title"/>
-          </p:nvPr>
-        </p:nvSpPr>
-        <p:spPr>
-          <a:xfrm>
-            <a:off x="457200" y="205979"/>
-            <a:ext cx="8229600" cy="857250"/>
-          </a:xfrm>
-        </p:spPr>
-        <p:txBody>
-          <a:bodyPr/>
-          <a:lstStyle/>
-          <a:p>
-            <a:pPr lvl="0" indent="0" marL="0">
-              <a:buNone/>
-            </a:pPr>
-            <a:r>
-              <a:rPr/>
-              <a:t>Reading a tree, and the knob that keeps it small</a:t>
-            </a:r>
-          </a:p>
-        </p:txBody>
-      </p:sp>
-      <p:sp>
-        <p:nvSpPr>
-          <p:cNvPr id="3" name="Content Placeholder 2"/>
-          <p:cNvSpPr>
-            <a:spLocks noGrp="1"/>
-          </p:cNvSpPr>
-          <p:nvPr>
-            <p:ph idx="1"/>
-          </p:nvPr>
-        </p:nvSpPr>
-        <p:spPr>
-          <a:xfrm>
-            <a:off x="457200" y="1200151"/>
-            <a:ext cx="8229600" cy="3394472"/>
-          </a:xfrm>
-        </p:spPr>
-        <p:txBody>
-          <a:bodyPr/>
-          <a:lstStyle/>
-          <a:p>
-            <a:pPr lvl="0"/>
-            <a:r>
-              <a:rPr>
-                <a:latin typeface="Courier"/>
-              </a:rPr>
-              <a:t>max_depth</a:t>
-            </a:r>
-            <a:r>
-              <a:rPr/>
-              <a:t> </a:t>
-            </a:r>
-            <a:r>
-              <a:rPr b="1"/>
-              <a:t>caps every path</a:t>
-            </a:r>
-            <a:r>
-              <a:rPr/>
-              <a:t>: each node above the cap is split if it can be, worth it or not</a:t>
-            </a:r>
-          </a:p>
-          <a:p>
-            <a:pPr lvl="0"/>
-            <a:r>
-              <a:rPr>
-                <a:latin typeface="Courier"/>
-              </a:rPr>
-              <a:t>max_leaf_nodes</a:t>
-            </a:r>
-            <a:r>
-              <a:rPr/>
-              <a:t> is a </a:t>
-            </a:r>
-            <a:r>
-              <a:rPr b="1"/>
-              <a:t>budget of leaves</a:t>
-            </a:r>
-            <a:r>
-              <a:rPr/>
-              <a:t>, spent on the largest ΔG first</a:t>
-            </a:r>
-          </a:p>
-          <a:p>
-            <a:pPr lvl="0"/>
-            <a:r>
-              <a:rPr>
-                <a:latin typeface="Courier"/>
-              </a:rPr>
-              <a:t>max_leaf_nodes = 9</a:t>
-            </a:r>
-            <a:r>
-              <a:rPr/>
-              <a:t>: </a:t>
-            </a:r>
-            <a:r>
-              <a:rPr b="1"/>
-              <a:t>90.8%</a:t>
-            </a:r>
-            <a:r>
-              <a:rPr/>
-              <a:t> training accuracy; thresholds 28 (income floor) and 0.82 (debt ceiling)</a:t>
-            </a:r>
-          </a:p>
-          <a:p>
-            <a:pPr lvl="0"/>
-            <a:r>
-              <a:rPr/>
-              <a:t>In code: </a:t>
-            </a:r>
-            <a:r>
-              <a:rPr>
-                <a:latin typeface="Courier"/>
-              </a:rPr>
-              <a:t>export_text(tree)</a:t>
-            </a:r>
-            <a:r>
-              <a:rPr/>
-              <a:t> prints the tree as if/else rules</a:t>
-            </a:r>
-          </a:p>
-        </p:txBody>
-      </p:sp>
-    </p:spTree>
-  </p:cSld>
-</p:sld>
-</file>
-
 <file path=ppt/slides/slide24.xml><?xml version="1.0" encoding="utf-8"?>
 <p:sld xmlns:a="http://schemas.openxmlformats.org/drawingml/2006/main" xmlns:r="http://schemas.openxmlformats.org/officeDocument/2006/relationships" xmlns:p="http://schemas.openxmlformats.org/presentationml/2006/main">
   <p:cSld>
@@ -12214,7 +12332,7 @@
             </a:pPr>
             <a:r>
               <a:rPr/>
-              <a:t>A tree that doesn’t stay still</a:t>
+              <a:t>Reading a tree, and the knob that keeps it small</a:t>
             </a:r>
           </a:p>
         </p:txBody>
@@ -12241,59 +12359,81 @@
           <a:p>
             <a:pPr lvl="0"/>
             <a:r>
-              <a:rPr/>
-              <a:t>Two trees at </a:t>
-            </a:r>
-            <a:r>
               <a:rPr>
                 <a:latin typeface="Courier"/>
               </a:rPr>
-              <a:t>max_depth = 6</a:t>
-            </a:r>
-            <a:r>
-              <a:rPr/>
-              <a:t>, each on a random 65% of the applicants (no replacement)</a:t>
+              <a:t>max_depth</a:t>
+            </a:r>
+            <a:r>
+              <a:rPr/>
+              <a:t> </a:t>
+            </a:r>
+            <a:r>
+              <a:rPr b="1"/>
+              <a:t>caps every path</a:t>
+            </a:r>
+            <a:r>
+              <a:rPr/>
+              <a:t>: each node above the cap is split if it can be, worth it or not</a:t>
             </a:r>
           </a:p>
           <a:p>
             <a:pPr lvl="0"/>
             <a:r>
-              <a:rPr/>
-              <a:t>The debt ceiling, the strongest split, agrees to within </a:t>
+              <a:rPr>
+                <a:latin typeface="Courier"/>
+              </a:rPr>
+              <a:t>max_leaf_nodes</a:t>
+            </a:r>
+            <a:r>
+              <a:rPr/>
+              <a:t> is a </a:t>
             </a:r>
             <a:r>
               <a:rPr b="1"/>
-              <a:t>0.001</a:t>
+              <a:t>budget of leaves</a:t>
+            </a:r>
+            <a:r>
+              <a:rPr/>
+              <a:t>, spent on the largest ΔG first</a:t>
             </a:r>
           </a:p>
           <a:p>
             <a:pPr lvl="0"/>
             <a:r>
-              <a:rPr/>
-              <a:t>The trees grow </a:t>
+              <a:rPr>
+                <a:latin typeface="Courier"/>
+              </a:rPr>
+              <a:t>max_leaf_nodes = 9</a:t>
+            </a:r>
+            <a:r>
+              <a:rPr/>
+              <a:t>: </a:t>
             </a:r>
             <a:r>
               <a:rPr b="1"/>
-              <a:t>31 and 33 leaves</a:t>
-            </a:r>
-            <a:r>
-              <a:rPr/>
-              <a:t>, and </a:t>
-            </a:r>
-            <a:r>
-              <a:rPr b="1"/>
-              <a:t>disagree on 11.7%</a:t>
-            </a:r>
-            <a:r>
-              <a:rPr/>
-              <a:t> of predictions on the full dataset</a:t>
+              <a:t>90.8%</a:t>
+            </a:r>
+            <a:r>
+              <a:rPr/>
+              <a:t> training accuracy; thresholds 28 (income floor) and 0.82 (debt ceiling)</a:t>
             </a:r>
           </a:p>
           <a:p>
             <a:pPr lvl="0"/>
             <a:r>
               <a:rPr/>
-              <a:t>The strongest split is stable; the weaker ones, which shape most of the tree, are not</a:t>
+              <a:t>In code: </a:t>
+            </a:r>
+            <a:r>
+              <a:rPr>
+                <a:latin typeface="Courier"/>
+              </a:rPr>
+              <a:t>export_text(tree)</a:t>
+            </a:r>
+            <a:r>
+              <a:rPr/>
+              <a:t> prints the tree as if/else rules</a:t>
             </a:r>
           </a:p>
         </p:txBody>
@@ -12304,6 +12444,137 @@
 </file>
 
 <file path=ppt/slides/slide25.xml><?xml version="1.0" encoding="utf-8"?>
+<p:sld xmlns:a="http://schemas.openxmlformats.org/drawingml/2006/main" xmlns:r="http://schemas.openxmlformats.org/officeDocument/2006/relationships" xmlns:p="http://schemas.openxmlformats.org/presentationml/2006/main">
+  <p:cSld>
+    <p:spTree>
+      <p:nvGrpSpPr>
+        <p:cNvPr id="1" name=""/>
+        <p:cNvGrpSpPr/>
+        <p:nvPr/>
+      </p:nvGrpSpPr>
+      <p:grpSpPr>
+        <a:xfrm>
+          <a:off x="0" y="0"/>
+          <a:ext cx="0" cy="0"/>
+          <a:chOff x="0" y="0"/>
+          <a:chExt cx="0" cy="0"/>
+        </a:xfrm>
+      </p:grpSpPr>
+      <p:sp>
+        <p:nvSpPr>
+          <p:cNvPr id="2" name="Title 1"/>
+          <p:cNvSpPr>
+            <a:spLocks noGrp="1"/>
+          </p:cNvSpPr>
+          <p:nvPr>
+            <p:ph type="title"/>
+          </p:nvPr>
+        </p:nvSpPr>
+        <p:spPr>
+          <a:xfrm>
+            <a:off x="457200" y="205979"/>
+            <a:ext cx="8229600" cy="857250"/>
+          </a:xfrm>
+        </p:spPr>
+        <p:txBody>
+          <a:bodyPr/>
+          <a:lstStyle/>
+          <a:p>
+            <a:pPr lvl="0" indent="0" marL="0">
+              <a:buNone/>
+            </a:pPr>
+            <a:r>
+              <a:rPr/>
+              <a:t>A tree that doesn’t stay still</a:t>
+            </a:r>
+          </a:p>
+        </p:txBody>
+      </p:sp>
+      <p:sp>
+        <p:nvSpPr>
+          <p:cNvPr id="3" name="Content Placeholder 2"/>
+          <p:cNvSpPr>
+            <a:spLocks noGrp="1"/>
+          </p:cNvSpPr>
+          <p:nvPr>
+            <p:ph idx="1"/>
+          </p:nvPr>
+        </p:nvSpPr>
+        <p:spPr>
+          <a:xfrm>
+            <a:off x="457200" y="1200151"/>
+            <a:ext cx="8229600" cy="3394472"/>
+          </a:xfrm>
+        </p:spPr>
+        <p:txBody>
+          <a:bodyPr/>
+          <a:lstStyle/>
+          <a:p>
+            <a:pPr lvl="0"/>
+            <a:r>
+              <a:rPr/>
+              <a:t>Two trees at </a:t>
+            </a:r>
+            <a:r>
+              <a:rPr>
+                <a:latin typeface="Courier"/>
+              </a:rPr>
+              <a:t>max_depth = 6</a:t>
+            </a:r>
+            <a:r>
+              <a:rPr/>
+              <a:t>, each on a random 65% of the applicants (no replacement)</a:t>
+            </a:r>
+          </a:p>
+          <a:p>
+            <a:pPr lvl="0"/>
+            <a:r>
+              <a:rPr/>
+              <a:t>The debt ceiling, the strongest split, agrees to within </a:t>
+            </a:r>
+            <a:r>
+              <a:rPr b="1"/>
+              <a:t>0.001</a:t>
+            </a:r>
+          </a:p>
+          <a:p>
+            <a:pPr lvl="0"/>
+            <a:r>
+              <a:rPr/>
+              <a:t>The trees grow </a:t>
+            </a:r>
+            <a:r>
+              <a:rPr b="1"/>
+              <a:t>31 and 33 leaves</a:t>
+            </a:r>
+            <a:r>
+              <a:rPr/>
+              <a:t>, and </a:t>
+            </a:r>
+            <a:r>
+              <a:rPr b="1"/>
+              <a:t>disagree on 11.7%</a:t>
+            </a:r>
+            <a:r>
+              <a:rPr/>
+              <a:t> of predictions on the full dataset</a:t>
+            </a:r>
+          </a:p>
+          <a:p>
+            <a:pPr lvl="0"/>
+            <a:r>
+              <a:rPr/>
+              <a:t>The strongest split is stable; the weaker ones, which shape most of the tree, are not</a:t>
+            </a:r>
+          </a:p>
+        </p:txBody>
+      </p:sp>
+    </p:spTree>
+  </p:cSld>
+</p:sld>
+</file>
+
+<file path=ppt/slides/slide26.xml><?xml version="1.0" encoding="utf-8"?>
 <p:sld xmlns:a="http://schemas.openxmlformats.org/drawingml/2006/main" xmlns:r="http://schemas.openxmlformats.org/officeDocument/2006/relationships" xmlns:p="http://schemas.openxmlformats.org/presentationml/2006/main">
   <p:cSld>
     <p:spTree>
@@ -12467,7 +12738,7 @@
                       </a:pPr>
                       <a:r>
                         <a:rPr/>
-                        <a:t>2. a tree, split by split, 7-18</a:t>
+                        <a:t>2. a tree, split by split, 7-19</a:t>
                       </a:r>
                     </a:p>
                   </a:txBody>
@@ -12529,7 +12800,7 @@
                       </a:pPr>
                       <a:r>
                         <a:rPr/>
-                        <a:t>3. the depth dial, 19-22</a:t>
+                        <a:t>3. the depth dial, 20-23</a:t>
                       </a:r>
                     </a:p>
                   </a:txBody>
@@ -12577,7 +12848,7 @@
                       </a:pPr>
                       <a:r>
                         <a:rPr/>
-                        <a:t>4. what a tree costs, 23-24</a:t>
+                        <a:t>4. what a tree costs, 24-25</a:t>
                       </a:r>
                     </a:p>
                   </a:txBody>
@@ -12623,86 +12894,6 @@
 </p:sld>
 </file>
 
-<file path=ppt/slides/slide26.xml><?xml version="1.0" encoding="utf-8"?>
-<p:sld xmlns:a="http://schemas.openxmlformats.org/drawingml/2006/main" xmlns:r="http://schemas.openxmlformats.org/officeDocument/2006/relationships" xmlns:p="http://schemas.openxmlformats.org/presentationml/2006/main">
-  <p:cSld>
-    <p:spTree>
-      <p:nvGrpSpPr>
-        <p:cNvPr id="1" name=""/>
-        <p:cNvGrpSpPr/>
-        <p:nvPr/>
-      </p:nvGrpSpPr>
-      <p:grpSpPr>
-        <a:xfrm>
-          <a:off x="0" y="0"/>
-          <a:ext cx="0" cy="0"/>
-          <a:chOff x="0" y="0"/>
-          <a:chExt cx="0" cy="0"/>
-        </a:xfrm>
-      </p:grpSpPr>
-      <p:sp>
-        <p:nvSpPr>
-          <p:cNvPr id="2" name="Title 1"/>
-          <p:cNvSpPr>
-            <a:spLocks noGrp="1"/>
-          </p:cNvSpPr>
-          <p:nvPr>
-            <p:ph type="title"/>
-          </p:nvPr>
-        </p:nvSpPr>
-        <p:spPr>
-          <a:xfrm>
-            <a:off x="457200" y="205979"/>
-            <a:ext cx="8229600" cy="857250"/>
-          </a:xfrm>
-        </p:spPr>
-        <p:txBody>
-          <a:bodyPr/>
-          <a:lstStyle/>
-          <a:p>
-            <a:pPr lvl="0" indent="0" marL="0">
-              <a:buNone/>
-            </a:pPr>
-            <a:r>
-              <a:rPr/>
-              <a:t>Break</a:t>
-            </a:r>
-          </a:p>
-        </p:txBody>
-      </p:sp>
-      <p:sp>
-        <p:nvSpPr>
-          <p:cNvPr id="3" name="Content Placeholder 2"/>
-          <p:cNvSpPr>
-            <a:spLocks noGrp="1"/>
-          </p:cNvSpPr>
-          <p:nvPr>
-            <p:ph idx="1"/>
-          </p:nvPr>
-        </p:nvSpPr>
-        <p:spPr>
-          <a:xfrm>
-            <a:off x="457200" y="1200151"/>
-            <a:ext cx="8229600" cy="3394472"/>
-          </a:xfrm>
-        </p:spPr>
-        <p:txBody>
-          <a:bodyPr/>
-          <a:lstStyle/>
-          <a:p>
-            <a:pPr lvl="0"/>
-            <a:r>
-              <a:rPr/>
-              <a:t>Twelve minutes</a:t>
-            </a:r>
-          </a:p>
-        </p:txBody>
-      </p:sp>
-    </p:spTree>
-  </p:cSld>
-</p:sld>
-</file>
-
 <file path=ppt/slides/slide27.xml><?xml version="1.0" encoding="utf-8"?>
 <p:sld xmlns:a="http://schemas.openxmlformats.org/drawingml/2006/main" xmlns:r="http://schemas.openxmlformats.org/officeDocument/2006/relationships" xmlns:p="http://schemas.openxmlformats.org/presentationml/2006/main">
   <p:cSld>
@@ -12745,7 +12936,7 @@
             </a:pPr>
             <a:r>
               <a:rPr/>
-              <a:t>Bagging: averaging away the instability</a:t>
+              <a:t>Break</a:t>
             </a:r>
           </a:p>
         </p:txBody>
@@ -12773,84 +12964,7 @@
             <a:pPr lvl="0"/>
             <a:r>
               <a:rPr/>
-              <a:t>Trees differ across samples, so </a:t>
-            </a:r>
-            <a:r>
-              <a:rPr b="1"/>
-              <a:t>many trees, averaged</a:t>
-            </a:r>
-            <a:r>
-              <a:rPr/>
-              <a:t> should partly cancel their mistakes</a:t>
-            </a:r>
-          </a:p>
-          <a:p>
-            <a:pPr lvl="0"/>
-            <a:r>
-              <a:rPr b="1"/>
-              <a:t>Bootstrap sample</a:t>
-            </a:r>
-            <a:r>
-              <a:rPr/>
-              <a:t>: m rows drawn </a:t>
-            </a:r>
-            <a:r>
-              <a:rPr b="1"/>
-              <a:t>with replacement</a:t>
-            </a:r>
-            <a:r>
-              <a:rPr/>
-              <a:t> from the m training rows</a:t>
-            </a:r>
-          </a:p>
-          <a:p>
-            <a:pPr lvl="0"/>
-            <a:r>
-              <a:rPr/>
-              <a:t>One tree per sample, </a:t>
-            </a:r>
-            <a:r>
-              <a:rPr>
-                <a:latin typeface="Courier"/>
-              </a:rPr>
-              <a:t>n_estimators</a:t>
-            </a:r>
-            <a:r>
-              <a:rPr/>
-              <a:t> times; predict by </a:t>
-            </a:r>
-            <a:r>
-              <a:rPr b="1"/>
-              <a:t>majority vote</a:t>
-            </a:r>
-            <a:r>
-              <a:rPr/>
-              <a:t>. That is </a:t>
-            </a:r>
-            <a:r>
-              <a:rPr b="1"/>
-              <a:t>bagging</a:t>
-            </a:r>
-            <a:r>
-              <a:rPr/>
-              <a:t>: bootstrap aggregating</a:t>
-            </a:r>
-          </a:p>
-          <a:p>
-            <a:pPr lvl="0"/>
-            <a:r>
-              <a:rPr/>
-              <a:t>In code: </a:t>
-            </a:r>
-            <a:r>
-              <a:rPr>
-                <a:latin typeface="Courier"/>
-              </a:rPr>
-              <a:t>BaggingClassifier()</a:t>
-            </a:r>
-            <a:r>
-              <a:rPr/>
-              <a:t>, whose default model is a decision tree</a:t>
+              <a:t>Twelve minutes</a:t>
             </a:r>
           </a:p>
         </p:txBody>
@@ -12902,7 +13016,7 @@
             </a:pPr>
             <a:r>
               <a:rPr/>
-              <a:t>How much data one bootstrap sample sees</a:t>
+              <a:t>Bagging: averaging away the instability</a:t>
             </a:r>
           </a:p>
         </p:txBody>
@@ -12930,48 +13044,84 @@
             <a:pPr lvl="0"/>
             <a:r>
               <a:rPr/>
-              <a:t>One row is missed by all m draws with probability (1 - 1/m)ᵐ, which tends to e⁻¹ ≈ 0.368 as m grows</a:t>
+              <a:t>Trees differ across samples, so </a:t>
+            </a:r>
+            <a:r>
+              <a:rPr b="1"/>
+              <a:t>many trees, averaged</a:t>
+            </a:r>
+            <a:r>
+              <a:rPr/>
+              <a:t> should partly cancel their mistakes</a:t>
             </a:r>
           </a:p>
           <a:p>
             <a:pPr lvl="0"/>
             <a:r>
-              <a:rPr/>
-              <a:t>So about </a:t>
-            </a:r>
-            <a:r>
               <a:rPr b="1"/>
-              <a:t>63.2%</a:t>
-            </a:r>
-            <a:r>
-              <a:rPr/>
-              <a:t> of the distinct rows are drawn at least once</a:t>
+              <a:t>Bootstrap sample</a:t>
+            </a:r>
+            <a:r>
+              <a:rPr/>
+              <a:t>: m rows drawn </a:t>
+            </a:r>
+            <a:r>
+              <a:rPr b="1"/>
+              <a:t>with replacement</a:t>
+            </a:r>
+            <a:r>
+              <a:rPr/>
+              <a:t> from the m training rows</a:t>
             </a:r>
           </a:p>
           <a:p>
             <a:pPr lvl="0"/>
             <a:r>
               <a:rPr/>
-              <a:t>The remaining </a:t>
+              <a:t>One tree per sample, </a:t>
+            </a:r>
+            <a:r>
+              <a:rPr>
+                <a:latin typeface="Courier"/>
+              </a:rPr>
+              <a:t>n_estimators</a:t>
+            </a:r>
+            <a:r>
+              <a:rPr/>
+              <a:t> times; predict by </a:t>
             </a:r>
             <a:r>
               <a:rPr b="1"/>
-              <a:t>36.8%</a:t>
-            </a:r>
-            <a:r>
-              <a:rPr/>
-              <a:t> are left out entirely: called </a:t>
+              <a:t>majority vote</a:t>
+            </a:r>
+            <a:r>
+              <a:rPr/>
+              <a:t>. That is </a:t>
             </a:r>
             <a:r>
               <a:rPr b="1"/>
-              <a:t>out-of-bag (OOB)</a:t>
+              <a:t>bagging</a:t>
+            </a:r>
+            <a:r>
+              <a:rPr/>
+              <a:t>: bootstrap aggregating</a:t>
             </a:r>
           </a:p>
           <a:p>
             <a:pPr lvl="0"/>
             <a:r>
               <a:rPr/>
-              <a:t>At m = 1,200: a single simulated draw left out 36.6% of rows, close to the limit</a:t>
+              <a:t>In code: </a:t>
+            </a:r>
+            <a:r>
+              <a:rPr>
+                <a:latin typeface="Courier"/>
+              </a:rPr>
+              <a:t>BaggingClassifier()</a:t>
+            </a:r>
+            <a:r>
+              <a:rPr/>
+              <a:t>, whose default model is a decision tree</a:t>
             </a:r>
           </a:p>
         </p:txBody>
@@ -12982,6 +13132,237 @@
 </file>
 
 <file path=ppt/slides/slide29.xml><?xml version="1.0" encoding="utf-8"?>
+<p:sld xmlns:a="http://schemas.openxmlformats.org/drawingml/2006/main" xmlns:r="http://schemas.openxmlformats.org/officeDocument/2006/relationships" xmlns:p="http://schemas.openxmlformats.org/presentationml/2006/main">
+  <p:cSld>
+    <p:spTree>
+      <p:nvGrpSpPr>
+        <p:cNvPr id="1" name=""/>
+        <p:cNvGrpSpPr/>
+        <p:nvPr/>
+      </p:nvGrpSpPr>
+      <p:grpSpPr>
+        <a:xfrm>
+          <a:off x="0" y="0"/>
+          <a:ext cx="0" cy="0"/>
+          <a:chOff x="0" y="0"/>
+          <a:chExt cx="0" cy="0"/>
+        </a:xfrm>
+      </p:grpSpPr>
+      <p:sp>
+        <p:nvSpPr>
+          <p:cNvPr id="2" name="Title 1"/>
+          <p:cNvSpPr>
+            <a:spLocks noGrp="1"/>
+          </p:cNvSpPr>
+          <p:nvPr>
+            <p:ph type="title"/>
+          </p:nvPr>
+        </p:nvSpPr>
+        <p:spPr>
+          <a:xfrm>
+            <a:off x="457200" y="205979"/>
+            <a:ext cx="8229600" cy="857250"/>
+          </a:xfrm>
+        </p:spPr>
+        <p:txBody>
+          <a:bodyPr/>
+          <a:lstStyle/>
+          <a:p>
+            <a:pPr lvl="0" indent="0" marL="0">
+              <a:buNone/>
+            </a:pPr>
+            <a:r>
+              <a:rPr/>
+              <a:t>How much data one bootstrap sample sees</a:t>
+            </a:r>
+          </a:p>
+        </p:txBody>
+      </p:sp>
+      <p:sp>
+        <p:nvSpPr>
+          <p:cNvPr id="3" name="Content Placeholder 2"/>
+          <p:cNvSpPr>
+            <a:spLocks noGrp="1"/>
+          </p:cNvSpPr>
+          <p:nvPr>
+            <p:ph idx="1"/>
+          </p:nvPr>
+        </p:nvSpPr>
+        <p:spPr>
+          <a:xfrm>
+            <a:off x="457200" y="1200151"/>
+            <a:ext cx="8229600" cy="3394472"/>
+          </a:xfrm>
+        </p:spPr>
+        <p:txBody>
+          <a:bodyPr/>
+          <a:lstStyle/>
+          <a:p>
+            <a:pPr lvl="0"/>
+            <a:r>
+              <a:rPr/>
+              <a:t>One row is missed by all m draws with probability (1 - 1/m)ᵐ, which tends to e⁻¹ ≈ 0.368 as m grows</a:t>
+            </a:r>
+          </a:p>
+          <a:p>
+            <a:pPr lvl="0"/>
+            <a:r>
+              <a:rPr/>
+              <a:t>So about </a:t>
+            </a:r>
+            <a:r>
+              <a:rPr b="1"/>
+              <a:t>63.2%</a:t>
+            </a:r>
+            <a:r>
+              <a:rPr/>
+              <a:t> of the distinct rows are drawn at least once</a:t>
+            </a:r>
+          </a:p>
+          <a:p>
+            <a:pPr lvl="0"/>
+            <a:r>
+              <a:rPr/>
+              <a:t>The remaining </a:t>
+            </a:r>
+            <a:r>
+              <a:rPr b="1"/>
+              <a:t>36.8%</a:t>
+            </a:r>
+            <a:r>
+              <a:rPr/>
+              <a:t> are left out entirely: called </a:t>
+            </a:r>
+            <a:r>
+              <a:rPr b="1"/>
+              <a:t>out-of-bag (OOB)</a:t>
+            </a:r>
+          </a:p>
+          <a:p>
+            <a:pPr lvl="0"/>
+            <a:r>
+              <a:rPr/>
+              <a:t>At m = 1,200: a single simulated draw left out 36.6% of rows, close to the limit</a:t>
+            </a:r>
+          </a:p>
+        </p:txBody>
+      </p:sp>
+    </p:spTree>
+  </p:cSld>
+</p:sld>
+</file>
+
+<file path=ppt/slides/slide3.xml><?xml version="1.0" encoding="utf-8"?>
+<p:sld xmlns:a="http://schemas.openxmlformats.org/drawingml/2006/main" xmlns:r="http://schemas.openxmlformats.org/officeDocument/2006/relationships" xmlns:p="http://schemas.openxmlformats.org/presentationml/2006/main">
+  <p:cSld>
+    <p:spTree>
+      <p:nvGrpSpPr>
+        <p:cNvPr id="1" name=""/>
+        <p:cNvGrpSpPr/>
+        <p:nvPr/>
+      </p:nvGrpSpPr>
+      <p:grpSpPr>
+        <a:xfrm>
+          <a:off x="0" y="0"/>
+          <a:ext cx="0" cy="0"/>
+          <a:chOff x="0" y="0"/>
+          <a:chExt cx="0" cy="0"/>
+        </a:xfrm>
+      </p:grpSpPr>
+      <p:sp>
+        <p:nvSpPr>
+          <p:cNvPr id="2" name="Title 1"/>
+          <p:cNvSpPr>
+            <a:spLocks noGrp="1"/>
+          </p:cNvSpPr>
+          <p:nvPr>
+            <p:ph type="title"/>
+          </p:nvPr>
+        </p:nvSpPr>
+        <p:spPr>
+          <a:xfrm>
+            <a:off x="457200" y="205979"/>
+            <a:ext cx="8229600" cy="857250"/>
+          </a:xfrm>
+        </p:spPr>
+        <p:txBody>
+          <a:bodyPr/>
+          <a:lstStyle/>
+          <a:p>
+            <a:pPr lvl="0" indent="0" marL="0">
+              <a:buNone/>
+            </a:pPr>
+            <a:r>
+              <a:rPr/>
+              <a:t>Exercise 6, before we start</a:t>
+            </a:r>
+          </a:p>
+        </p:txBody>
+      </p:sp>
+      <p:sp>
+        <p:nvSpPr>
+          <p:cNvPr id="3" name="Content Placeholder 2"/>
+          <p:cNvSpPr>
+            <a:spLocks noGrp="1"/>
+          </p:cNvSpPr>
+          <p:nvPr>
+            <p:ph idx="1"/>
+          </p:nvPr>
+        </p:nvSpPr>
+        <p:spPr>
+          <a:xfrm>
+            <a:off x="457200" y="1200151"/>
+            <a:ext cx="8229600" cy="3394472"/>
+          </a:xfrm>
+        </p:spPr>
+        <p:txBody>
+          <a:bodyPr/>
+          <a:lstStyle/>
+          <a:p>
+            <a:pPr lvl="0"/>
+            <a:r>
+              <a:rPr/>
+              <a:t>What counts is the </a:t>
+            </a:r>
+            <a:r>
+              <a:rPr b="1"/>
+              <a:t>defence of which family</a:t>
+            </a:r>
+            <a:r>
+              <a:rPr/>
+              <a:t>, not the winning score</a:t>
+            </a:r>
+          </a:p>
+          <a:p>
+            <a:pPr lvl="0"/>
+            <a:r>
+              <a:rPr/>
+              <a:t>The gap to watch for: a strong accuracy number with no check of </a:t>
+            </a:r>
+            <a:r>
+              <a:rPr i="1"/>
+              <a:t>why</a:t>
+            </a:r>
+            <a:r>
+              <a:rPr/>
+              <a:t> the assumption behind it held</a:t>
+            </a:r>
+          </a:p>
+          <a:p>
+            <a:pPr lvl="0"/>
+            <a:r>
+              <a:rPr/>
+              <a:t>Today’s models come with the same obligation</a:t>
+            </a:r>
+          </a:p>
+        </p:txBody>
+      </p:sp>
+    </p:spTree>
+  </p:cSld>
+</p:sld>
+</file>
+
+<file path=ppt/slides/slide30.xml><?xml version="1.0" encoding="utf-8"?>
 <p:sld xmlns:a="http://schemas.openxmlformats.org/drawingml/2006/main" xmlns:r="http://schemas.openxmlformats.org/officeDocument/2006/relationships" xmlns:p="http://schemas.openxmlformats.org/presentationml/2006/main">
   <p:cSld>
     <p:spTree>
@@ -13063,238 +13444,6 @@
 </p:sld>
 </file>
 
-<file path=ppt/slides/slide3.xml><?xml version="1.0" encoding="utf-8"?>
-<p:sld xmlns:a="http://schemas.openxmlformats.org/drawingml/2006/main" xmlns:r="http://schemas.openxmlformats.org/officeDocument/2006/relationships" xmlns:p="http://schemas.openxmlformats.org/presentationml/2006/main">
-  <p:cSld>
-    <p:spTree>
-      <p:nvGrpSpPr>
-        <p:cNvPr id="1" name=""/>
-        <p:cNvGrpSpPr/>
-        <p:nvPr/>
-      </p:nvGrpSpPr>
-      <p:grpSpPr>
-        <a:xfrm>
-          <a:off x="0" y="0"/>
-          <a:ext cx="0" cy="0"/>
-          <a:chOff x="0" y="0"/>
-          <a:chExt cx="0" cy="0"/>
-        </a:xfrm>
-      </p:grpSpPr>
-      <p:sp>
-        <p:nvSpPr>
-          <p:cNvPr id="2" name="Title 1"/>
-          <p:cNvSpPr>
-            <a:spLocks noGrp="1"/>
-          </p:cNvSpPr>
-          <p:nvPr>
-            <p:ph type="title"/>
-          </p:nvPr>
-        </p:nvSpPr>
-        <p:spPr>
-          <a:xfrm>
-            <a:off x="457200" y="205979"/>
-            <a:ext cx="8229600" cy="857250"/>
-          </a:xfrm>
-        </p:spPr>
-        <p:txBody>
-          <a:bodyPr/>
-          <a:lstStyle/>
-          <a:p>
-            <a:pPr lvl="0" indent="0" marL="0">
-              <a:buNone/>
-            </a:pPr>
-            <a:r>
-              <a:rPr/>
-              <a:t>Exercise 6, before we start</a:t>
-            </a:r>
-          </a:p>
-        </p:txBody>
-      </p:sp>
-      <p:sp>
-        <p:nvSpPr>
-          <p:cNvPr id="3" name="Content Placeholder 2"/>
-          <p:cNvSpPr>
-            <a:spLocks noGrp="1"/>
-          </p:cNvSpPr>
-          <p:nvPr>
-            <p:ph idx="1"/>
-          </p:nvPr>
-        </p:nvSpPr>
-        <p:spPr>
-          <a:xfrm>
-            <a:off x="457200" y="1200151"/>
-            <a:ext cx="8229600" cy="3394472"/>
-          </a:xfrm>
-        </p:spPr>
-        <p:txBody>
-          <a:bodyPr/>
-          <a:lstStyle/>
-          <a:p>
-            <a:pPr lvl="0"/>
-            <a:r>
-              <a:rPr/>
-              <a:t>What counts is the </a:t>
-            </a:r>
-            <a:r>
-              <a:rPr b="1"/>
-              <a:t>defence of which family</a:t>
-            </a:r>
-            <a:r>
-              <a:rPr/>
-              <a:t>, not the winning score</a:t>
-            </a:r>
-          </a:p>
-          <a:p>
-            <a:pPr lvl="0"/>
-            <a:r>
-              <a:rPr/>
-              <a:t>The gap to watch for: a strong accuracy number with no check of </a:t>
-            </a:r>
-            <a:r>
-              <a:rPr i="1"/>
-              <a:t>why</a:t>
-            </a:r>
-            <a:r>
-              <a:rPr/>
-              <a:t> the assumption behind it held</a:t>
-            </a:r>
-          </a:p>
-          <a:p>
-            <a:pPr lvl="0"/>
-            <a:r>
-              <a:rPr/>
-              <a:t>Today’s models come with the same obligation</a:t>
-            </a:r>
-          </a:p>
-        </p:txBody>
-      </p:sp>
-    </p:spTree>
-  </p:cSld>
-</p:sld>
-</file>
-
-<file path=ppt/slides/slide30.xml><?xml version="1.0" encoding="utf-8"?>
-<p:sld xmlns:a="http://schemas.openxmlformats.org/drawingml/2006/main" xmlns:r="http://schemas.openxmlformats.org/officeDocument/2006/relationships" xmlns:p="http://schemas.openxmlformats.org/presentationml/2006/main">
-  <p:cSld>
-    <p:spTree>
-      <p:nvGrpSpPr>
-        <p:cNvPr id="1" name=""/>
-        <p:cNvGrpSpPr/>
-        <p:nvPr/>
-      </p:nvGrpSpPr>
-      <p:grpSpPr>
-        <a:xfrm>
-          <a:off x="0" y="0"/>
-          <a:ext cx="0" cy="0"/>
-          <a:chOff x="0" y="0"/>
-          <a:chExt cx="0" cy="0"/>
-        </a:xfrm>
-      </p:grpSpPr>
-      <p:sp>
-        <p:nvSpPr>
-          <p:cNvPr id="2" name="Title 1"/>
-          <p:cNvSpPr>
-            <a:spLocks noGrp="1"/>
-          </p:cNvSpPr>
-          <p:nvPr>
-            <p:ph type="title"/>
-          </p:nvPr>
-        </p:nvSpPr>
-        <p:spPr>
-          <a:xfrm>
-            <a:off x="457200" y="205979"/>
-            <a:ext cx="8229600" cy="857250"/>
-          </a:xfrm>
-        </p:spPr>
-        <p:txBody>
-          <a:bodyPr/>
-          <a:lstStyle/>
-          <a:p>
-            <a:pPr lvl="0" indent="0" marL="0">
-              <a:buNone/>
-            </a:pPr>
-            <a:r>
-              <a:rPr/>
-              <a:t>Out-of-bag: free validation</a:t>
-            </a:r>
-          </a:p>
-        </p:txBody>
-      </p:sp>
-      <p:sp>
-        <p:nvSpPr>
-          <p:cNvPr id="3" name="Content Placeholder 2"/>
-          <p:cNvSpPr>
-            <a:spLocks noGrp="1"/>
-          </p:cNvSpPr>
-          <p:nvPr>
-            <p:ph idx="1"/>
-          </p:nvPr>
-        </p:nvSpPr>
-        <p:spPr>
-          <a:xfrm>
-            <a:off x="457200" y="1200151"/>
-            <a:ext cx="8229600" cy="3394472"/>
-          </a:xfrm>
-        </p:spPr>
-        <p:txBody>
-          <a:bodyPr/>
-          <a:lstStyle/>
-          <a:p>
-            <a:pPr lvl="0"/>
-            <a:r>
-              <a:rPr/>
-              <a:t>Predict each row by a vote of only the trees that never saw it: the accuracy of those votes is the </a:t>
-            </a:r>
-            <a:r>
-              <a:rPr b="1"/>
-              <a:t>OOB score</a:t>
-            </a:r>
-            <a:r>
-              <a:rPr/>
-              <a:t>, with no rows set aside</a:t>
-            </a:r>
-          </a:p>
-          <a:p>
-            <a:pPr lvl="0"/>
-            <a:r>
-              <a:rPr/>
-              <a:t>A 300-tree random forest (bagged trees plus one rule, slide 34): OOB </a:t>
-            </a:r>
-            <a:r>
-              <a:rPr b="1"/>
-              <a:t>0.9117</a:t>
-            </a:r>
-            <a:r>
-              <a:rPr/>
-              <a:t>; 5-fold cross-validation </a:t>
-            </a:r>
-            <a:r>
-              <a:rPr b="1"/>
-              <a:t>0.9117 ± 0.021</a:t>
-            </a:r>
-          </a:p>
-          <a:p>
-            <a:pPr lvl="0"/>
-            <a:r>
-              <a:rPr/>
-              <a:t>The four-decimal match is </a:t>
-            </a:r>
-            <a:r>
-              <a:rPr b="1"/>
-              <a:t>luck</a:t>
-            </a:r>
-            <a:r>
-              <a:rPr/>
-              <a:t>: over twelve seeds the two differ by 0.0026 on average, well inside ±0.021</a:t>
-            </a:r>
-          </a:p>
-        </p:txBody>
-      </p:sp>
-    </p:spTree>
-  </p:cSld>
-</p:sld>
-</file>
-
 <file path=ppt/slides/slide31.xml><?xml version="1.0" encoding="utf-8"?>
 <p:sld xmlns:a="http://schemas.openxmlformats.org/drawingml/2006/main" xmlns:r="http://schemas.openxmlformats.org/officeDocument/2006/relationships" xmlns:p="http://schemas.openxmlformats.org/presentationml/2006/main">
   <p:cSld>
@@ -13337,7 +13486,7 @@
             </a:pPr>
             <a:r>
               <a:rPr/>
-              <a:t>Why averaging reduces variance</a:t>
+              <a:t>Out-of-bag: free validation</a:t>
             </a:r>
           </a:p>
         </p:txBody>
@@ -13365,45 +13514,49 @@
             <a:pPr lvl="0"/>
             <a:r>
               <a:rPr/>
-              <a:t>Model each tree’s prediction as noisy, with variance σ² over the bootstrap sample it drew, and let ρ be the correlation between two trees</a:t>
+              <a:t>Predict each row by a vote of only the trees that never saw it: the accuracy of those votes is the </a:t>
+            </a:r>
+            <a:r>
+              <a:rPr b="1"/>
+              <a:t>OOB score</a:t>
+            </a:r>
+            <a:r>
+              <a:rPr/>
+              <a:t>, with no rows set aside</a:t>
             </a:r>
           </a:p>
           <a:p>
             <a:pPr lvl="0"/>
             <a:r>
               <a:rPr/>
-              <a:t>The average of B trees has variance σ²/B + ρσ² (B-1)/B: a </a:t>
+              <a:t>A 300-tree random forest (bagged trees plus one rule, slide 35): OOB </a:t>
             </a:r>
             <a:r>
               <a:rPr b="1"/>
-              <a:t>floor</a:t>
-            </a:r>
-            <a:r>
-              <a:rPr/>
-              <a:t> of ρσ², </a:t>
+              <a:t>0.9117</a:t>
+            </a:r>
+            <a:r>
+              <a:rPr/>
+              <a:t>; 5-fold cross-validation </a:t>
             </a:r>
             <a:r>
               <a:rPr b="1"/>
-              <a:t>not zero</a:t>
-            </a:r>
-            <a:r>
-              <a:rPr/>
-              <a:t>: more trees soon buy little</a:t>
+              <a:t>0.9117 ± 0.021</a:t>
             </a:r>
           </a:p>
           <a:p>
             <a:pPr lvl="0"/>
             <a:r>
               <a:rPr/>
-              <a:t>Averaging </a:t>
+              <a:t>The four-decimal match is </a:t>
             </a:r>
             <a:r>
               <a:rPr b="1"/>
-              <a:t>cannot repair an error every tree shares</a:t>
-            </a:r>
-            <a:r>
-              <a:rPr/>
-              <a:t>: trees too shallow for the rule stay too shallow, however many are averaged</a:t>
+              <a:t>luck</a:t>
+            </a:r>
+            <a:r>
+              <a:rPr/>
+              <a:t>: over twelve seeds the two differ by 0.0026 on average, well inside ±0.021</a:t>
             </a:r>
           </a:p>
         </p:txBody>
@@ -13414,6 +13567,124 @@
 </file>
 
 <file path=ppt/slides/slide32.xml><?xml version="1.0" encoding="utf-8"?>
+<p:sld xmlns:a="http://schemas.openxmlformats.org/drawingml/2006/main" xmlns:r="http://schemas.openxmlformats.org/officeDocument/2006/relationships" xmlns:p="http://schemas.openxmlformats.org/presentationml/2006/main">
+  <p:cSld>
+    <p:spTree>
+      <p:nvGrpSpPr>
+        <p:cNvPr id="1" name=""/>
+        <p:cNvGrpSpPr/>
+        <p:nvPr/>
+      </p:nvGrpSpPr>
+      <p:grpSpPr>
+        <a:xfrm>
+          <a:off x="0" y="0"/>
+          <a:ext cx="0" cy="0"/>
+          <a:chOff x="0" y="0"/>
+          <a:chExt cx="0" cy="0"/>
+        </a:xfrm>
+      </p:grpSpPr>
+      <p:sp>
+        <p:nvSpPr>
+          <p:cNvPr id="2" name="Title 1"/>
+          <p:cNvSpPr>
+            <a:spLocks noGrp="1"/>
+          </p:cNvSpPr>
+          <p:nvPr>
+            <p:ph type="title"/>
+          </p:nvPr>
+        </p:nvSpPr>
+        <p:spPr>
+          <a:xfrm>
+            <a:off x="457200" y="205979"/>
+            <a:ext cx="8229600" cy="857250"/>
+          </a:xfrm>
+        </p:spPr>
+        <p:txBody>
+          <a:bodyPr/>
+          <a:lstStyle/>
+          <a:p>
+            <a:pPr lvl="0" indent="0" marL="0">
+              <a:buNone/>
+            </a:pPr>
+            <a:r>
+              <a:rPr/>
+              <a:t>Why averaging reduces variance</a:t>
+            </a:r>
+          </a:p>
+        </p:txBody>
+      </p:sp>
+      <p:sp>
+        <p:nvSpPr>
+          <p:cNvPr id="3" name="Content Placeholder 2"/>
+          <p:cNvSpPr>
+            <a:spLocks noGrp="1"/>
+          </p:cNvSpPr>
+          <p:nvPr>
+            <p:ph idx="1"/>
+          </p:nvPr>
+        </p:nvSpPr>
+        <p:spPr>
+          <a:xfrm>
+            <a:off x="457200" y="1200151"/>
+            <a:ext cx="8229600" cy="3394472"/>
+          </a:xfrm>
+        </p:spPr>
+        <p:txBody>
+          <a:bodyPr/>
+          <a:lstStyle/>
+          <a:p>
+            <a:pPr lvl="0"/>
+            <a:r>
+              <a:rPr/>
+              <a:t>Model each tree’s prediction as noisy, with variance σ² over the bootstrap sample it drew, and let ρ be the correlation between two trees</a:t>
+            </a:r>
+          </a:p>
+          <a:p>
+            <a:pPr lvl="0"/>
+            <a:r>
+              <a:rPr/>
+              <a:t>The average of B trees has variance σ²/B + ρσ² (B-1)/B: a </a:t>
+            </a:r>
+            <a:r>
+              <a:rPr b="1"/>
+              <a:t>floor</a:t>
+            </a:r>
+            <a:r>
+              <a:rPr/>
+              <a:t> of ρσ², </a:t>
+            </a:r>
+            <a:r>
+              <a:rPr b="1"/>
+              <a:t>not zero</a:t>
+            </a:r>
+            <a:r>
+              <a:rPr/>
+              <a:t>: more trees soon buy little</a:t>
+            </a:r>
+          </a:p>
+          <a:p>
+            <a:pPr lvl="0"/>
+            <a:r>
+              <a:rPr/>
+              <a:t>Averaging </a:t>
+            </a:r>
+            <a:r>
+              <a:rPr b="1"/>
+              <a:t>cannot repair an error every tree shares</a:t>
+            </a:r>
+            <a:r>
+              <a:rPr/>
+              <a:t>: trees too shallow for the rule stay too shallow, however many are averaged</a:t>
+            </a:r>
+          </a:p>
+        </p:txBody>
+      </p:sp>
+    </p:spTree>
+  </p:cSld>
+</p:sld>
+</file>
+
+<file path=ppt/slides/slide33.xml><?xml version="1.0" encoding="utf-8"?>
 <p:sld xmlns:a="http://schemas.openxmlformats.org/drawingml/2006/main" xmlns:r="http://schemas.openxmlformats.org/officeDocument/2006/relationships" xmlns:p="http://schemas.openxmlformats.org/presentationml/2006/main">
   <p:cSld>
     <p:spTree>
@@ -13495,7 +13766,7 @@
 </p:sld>
 </file>
 
-<file path=ppt/slides/slide33.xml><?xml version="1.0" encoding="utf-8"?>
+<file path=ppt/slides/slide34.xml><?xml version="1.0" encoding="utf-8"?>
 <p:sld xmlns:a="http://schemas.openxmlformats.org/drawingml/2006/main" xmlns:r="http://schemas.openxmlformats.org/officeDocument/2006/relationships" xmlns:p="http://schemas.openxmlformats.org/presentationml/2006/main">
   <p:cSld>
     <p:spTree>
@@ -13720,7 +13991,7 @@
 </p:sld>
 </file>
 
-<file path=ppt/slides/slide34.xml><?xml version="1.0" encoding="utf-8"?>
+<file path=ppt/slides/slide35.xml><?xml version="1.0" encoding="utf-8"?>
 <p:sld xmlns:a="http://schemas.openxmlformats.org/drawingml/2006/main" xmlns:r="http://schemas.openxmlformats.org/officeDocument/2006/relationships" xmlns:p="http://schemas.openxmlformats.org/presentationml/2006/main">
   <p:cSld>
     <p:spTree>
@@ -13861,7 +14132,7 @@
 </p:sld>
 </file>
 
-<file path=ppt/slides/slide35.xml><?xml version="1.0" encoding="utf-8"?>
+<file path=ppt/slides/slide36.xml><?xml version="1.0" encoding="utf-8"?>
 <p:sld xmlns:a="http://schemas.openxmlformats.org/drawingml/2006/main" xmlns:r="http://schemas.openxmlformats.org/officeDocument/2006/relationships" xmlns:p="http://schemas.openxmlformats.org/presentationml/2006/main">
   <p:cSld>
     <p:spTree>
@@ -13943,7 +14214,7 @@
 </p:sld>
 </file>
 
-<file path=ppt/slides/slide36.xml><?xml version="1.0" encoding="utf-8"?>
+<file path=ppt/slides/slide37.xml><?xml version="1.0" encoding="utf-8"?>
 <p:sld xmlns:a="http://schemas.openxmlformats.org/drawingml/2006/main" xmlns:r="http://schemas.openxmlformats.org/officeDocument/2006/relationships" xmlns:p="http://schemas.openxmlformats.org/presentationml/2006/main">
   <p:cSld>
     <p:spTree>
@@ -14054,7 +14325,7 @@
 </p:sld>
 </file>
 
-<file path=ppt/slides/slide37.xml><?xml version="1.0" encoding="utf-8"?>
+<file path=ppt/slides/slide38.xml><?xml version="1.0" encoding="utf-8"?>
 <p:sld xmlns:a="http://schemas.openxmlformats.org/drawingml/2006/main" xmlns:r="http://schemas.openxmlformats.org/officeDocument/2006/relationships" xmlns:p="http://schemas.openxmlformats.org/presentationml/2006/main">
   <p:cSld>
     <p:spTree>
@@ -14136,7 +14407,7 @@
 </p:sld>
 </file>
 
-<file path=ppt/slides/slide38.xml><?xml version="1.0" encoding="utf-8"?>
+<file path=ppt/slides/slide39.xml><?xml version="1.0" encoding="utf-8"?>
 <p:sld xmlns:a="http://schemas.openxmlformats.org/drawingml/2006/main" xmlns:r="http://schemas.openxmlformats.org/officeDocument/2006/relationships" xmlns:p="http://schemas.openxmlformats.org/presentationml/2006/main">
   <p:cSld>
     <p:spTree>
@@ -14218,7 +14489,140 @@
 </p:sld>
 </file>
 
-<file path=ppt/slides/slide39.xml><?xml version="1.0" encoding="utf-8"?>
+<file path=ppt/slides/slide4.xml><?xml version="1.0" encoding="utf-8"?>
+<p:sld xmlns:a="http://schemas.openxmlformats.org/drawingml/2006/main" xmlns:r="http://schemas.openxmlformats.org/officeDocument/2006/relationships" xmlns:p="http://schemas.openxmlformats.org/presentationml/2006/main">
+  <p:cSld>
+    <p:spTree>
+      <p:nvGrpSpPr>
+        <p:cNvPr id="1" name=""/>
+        <p:cNvGrpSpPr/>
+        <p:nvPr/>
+      </p:nvGrpSpPr>
+      <p:grpSpPr>
+        <a:xfrm>
+          <a:off x="0" y="0"/>
+          <a:ext cx="0" cy="0"/>
+          <a:chOff x="0" y="0"/>
+          <a:chExt cx="0" cy="0"/>
+        </a:xfrm>
+      </p:grpSpPr>
+      <p:sp>
+        <p:nvSpPr>
+          <p:cNvPr id="2" name="Title 1"/>
+          <p:cNvSpPr>
+            <a:spLocks noGrp="1"/>
+          </p:cNvSpPr>
+          <p:nvPr>
+            <p:ph type="title"/>
+          </p:nvPr>
+        </p:nvSpPr>
+        <p:spPr>
+          <a:xfrm>
+            <a:off x="457200" y="205979"/>
+            <a:ext cx="8229600" cy="857250"/>
+          </a:xfrm>
+        </p:spPr>
+        <p:txBody>
+          <a:bodyPr/>
+          <a:lstStyle/>
+          <a:p>
+            <a:pPr lvl="0" indent="0" marL="0">
+              <a:buNone/>
+            </a:pPr>
+            <a:r>
+              <a:rPr/>
+              <a:t>1,200 loan applicants, two figures each</a:t>
+            </a:r>
+          </a:p>
+        </p:txBody>
+      </p:sp>
+      <p:sp>
+        <p:nvSpPr>
+          <p:cNvPr id="3" name="Content Placeholder 2"/>
+          <p:cNvSpPr>
+            <a:spLocks noGrp="1"/>
+          </p:cNvSpPr>
+          <p:nvPr>
+            <p:ph idx="1"/>
+          </p:nvPr>
+        </p:nvSpPr>
+        <p:spPr>
+          <a:xfrm>
+            <a:off x="457200" y="1200151"/>
+            <a:ext cx="8229600" cy="3394472"/>
+          </a:xfrm>
+        </p:spPr>
+        <p:txBody>
+          <a:bodyPr/>
+          <a:lstStyle/>
+          <a:p>
+            <a:pPr lvl="0"/>
+            <a:r>
+              <a:rPr/>
+              <a:t>Income in thousands of euros a year, and debt-to-income ratio</a:t>
+            </a:r>
+          </a:p>
+          <a:p>
+            <a:pPr lvl="0"/>
+            <a:r>
+              <a:rPr/>
+              <a:t>Underwriting is a </a:t>
+            </a:r>
+            <a:r>
+              <a:rPr b="1"/>
+              <a:t>checklist</a:t>
+            </a:r>
+            <a:r>
+              <a:rPr/>
+              <a:t>: an income floor, a debt ceiling, and two “stressed” combinations, each figure ordinary alone but risky together</a:t>
+            </a:r>
+          </a:p>
+          <a:p>
+            <a:pPr lvl="0"/>
+            <a:r>
+              <a:rPr b="1"/>
+              <a:t>7%</a:t>
+            </a:r>
+            <a:r>
+              <a:rPr/>
+              <a:t> of labels flipped: no honest model beats about </a:t>
+            </a:r>
+            <a:r>
+              <a:rPr b="1"/>
+              <a:t>0.93</a:t>
+            </a:r>
+            <a:r>
+              <a:rPr/>
+              <a:t>, the </a:t>
+            </a:r>
+            <a:r>
+              <a:rPr b="1"/>
+              <a:t>noise ceiling</a:t>
+            </a:r>
+          </a:p>
+          <a:p>
+            <a:pPr lvl="0"/>
+            <a:r>
+              <a:rPr b="1"/>
+              <a:t>38.7%</a:t>
+            </a:r>
+            <a:r>
+              <a:rPr/>
+              <a:t> defaulted, so the majority baseline is </a:t>
+            </a:r>
+            <a:r>
+              <a:rPr b="1"/>
+              <a:t>0.613</a:t>
+            </a:r>
+          </a:p>
+        </p:txBody>
+      </p:sp>
+    </p:spTree>
+  </p:cSld>
+</p:sld>
+</file>
+
+<file path=ppt/slides/slide40.xml><?xml version="1.0" encoding="utf-8"?>
 <p:sld xmlns:a="http://schemas.openxmlformats.org/drawingml/2006/main" xmlns:r="http://schemas.openxmlformats.org/officeDocument/2006/relationships" xmlns:p="http://schemas.openxmlformats.org/presentationml/2006/main">
   <p:cSld>
     <p:spTree>
@@ -14334,7 +14738,7 @@
                       </a:pPr>
                       <a:r>
                         <a:rPr/>
-                        <a:t>1. bagging from scratch, 27</a:t>
+                        <a:t>1. bagging from scratch, 28</a:t>
                       </a:r>
                     </a:p>
                   </a:txBody>
@@ -14392,7 +14796,7 @@
                       </a:pPr>
                       <a:r>
                         <a:rPr/>
-                        <a:t>2. why averaging works, 28-32</a:t>
+                        <a:t>2. why averaging works, 29-33</a:t>
                       </a:r>
                     </a:p>
                   </a:txBody>
@@ -14450,7 +14854,7 @@
                       </a:pPr>
                       <a:r>
                         <a:rPr/>
-                        <a:t>3. variance, measured, 33-35</a:t>
+                        <a:t>3. variance, measured, 34-36</a:t>
                       </a:r>
                     </a:p>
                   </a:txBody>
@@ -14502,7 +14906,7 @@
                       </a:pPr>
                       <a:r>
                         <a:rPr/>
-                        <a:t>5. feature importance, 36-37</a:t>
+                        <a:t>5. feature importance, 37-38</a:t>
                       </a:r>
                     </a:p>
                   </a:txBody>
@@ -14540,7 +14944,7 @@
                       </a:pPr>
                       <a:r>
                         <a:rPr/>
-                        <a:t>6. checking the importances, 38</a:t>
+                        <a:t>6. checking the importances, 39</a:t>
                       </a:r>
                     </a:p>
                   </a:txBody>
@@ -14576,7 +14980,7 @@
 </p:sld>
 </file>
 
-<file path=ppt/slides/slide4.xml><?xml version="1.0" encoding="utf-8"?>
+<file path=ppt/slides/slide41.xml><?xml version="1.0" encoding="utf-8"?>
 <p:sld xmlns:a="http://schemas.openxmlformats.org/drawingml/2006/main" xmlns:r="http://schemas.openxmlformats.org/officeDocument/2006/relationships" xmlns:p="http://schemas.openxmlformats.org/presentationml/2006/main">
   <p:cSld>
     <p:spTree>
@@ -14618,7 +15022,7 @@
             </a:pPr>
             <a:r>
               <a:rPr/>
-              <a:t>1,200 loan applicants, two figures each</a:t>
+              <a:t>Gradient boosting: correcting mistakes in sequence</a:t>
             </a:r>
           </a:p>
         </p:txBody>
@@ -14646,60 +15050,72 @@
             <a:pPr lvl="0"/>
             <a:r>
               <a:rPr/>
-              <a:t>Income in thousands of euros a year, and debt-to-income ratio</a:t>
+              <a:t>Bagging and random forests build trees </a:t>
+            </a:r>
+            <a:r>
+              <a:rPr b="1"/>
+              <a:t>independently</a:t>
+            </a:r>
+            <a:r>
+              <a:rPr/>
+              <a:t>, then average</a:t>
             </a:r>
           </a:p>
           <a:p>
             <a:pPr lvl="0"/>
             <a:r>
-              <a:rPr/>
-              <a:t>Underwriting is a </a:t>
-            </a:r>
-            <a:r>
               <a:rPr b="1"/>
-              <a:t>checklist</a:t>
-            </a:r>
-            <a:r>
-              <a:rPr/>
-              <a:t>: an income floor, a debt ceiling, and two “stressed” combinations, each figure ordinary alone but risky together</a:t>
+              <a:t>Boosting</a:t>
+            </a:r>
+            <a:r>
+              <a:rPr/>
+              <a:t> builds them </a:t>
+            </a:r>
+            <a:r>
+              <a:rPr b="1"/>
+              <a:t>in sequence</a:t>
+            </a:r>
+            <a:r>
+              <a:rPr/>
+              <a:t>: each new tree corrects what the trees so far got wrong</a:t>
             </a:r>
           </a:p>
           <a:p>
             <a:pPr lvl="0"/>
             <a:r>
+              <a:rPr/>
+              <a:t>Each is a shallow </a:t>
+            </a:r>
+            <a:r>
               <a:rPr b="1"/>
-              <a:t>7%</a:t>
-            </a:r>
-            <a:r>
-              <a:rPr/>
-              <a:t> of labels flipped: no honest model beats about </a:t>
+              <a:t>regression tree</a:t>
+            </a:r>
+            <a:r>
+              <a:rPr/>
+              <a:t>, a </a:t>
             </a:r>
             <a:r>
               <a:rPr b="1"/>
-              <a:t>0.93</a:t>
-            </a:r>
-            <a:r>
-              <a:rPr/>
-              <a:t>, the </a:t>
+              <a:t>weak learner</a:t>
+            </a:r>
+            <a:r>
+              <a:rPr/>
+              <a:t>: it predicts a number, a correction, not a class</a:t>
+            </a:r>
+          </a:p>
+          <a:p>
+            <a:pPr lvl="0"/>
+            <a:r>
+              <a:rPr/>
+              <a:t>The learning rate α sets </a:t>
             </a:r>
             <a:r>
               <a:rPr b="1"/>
-              <a:t>noise ceiling</a:t>
-            </a:r>
-          </a:p>
-          <a:p>
-            <a:pPr lvl="0"/>
-            <a:r>
-              <a:rPr b="1"/>
-              <a:t>38.7%</a:t>
-            </a:r>
-            <a:r>
-              <a:rPr/>
-              <a:t> defaulted, so the majority baseline is </a:t>
-            </a:r>
-            <a:r>
-              <a:rPr b="1"/>
-              <a:t>0.613</a:t>
+              <a:t>how much</a:t>
+            </a:r>
+            <a:r>
+              <a:rPr/>
+              <a:t> of each correction is applied</a:t>
             </a:r>
           </a:p>
         </p:txBody>
@@ -14709,152 +15125,7 @@
 </p:sld>
 </file>
 
-<file path=ppt/slides/slide40.xml><?xml version="1.0" encoding="utf-8"?>
-<p:sld xmlns:a="http://schemas.openxmlformats.org/drawingml/2006/main" xmlns:r="http://schemas.openxmlformats.org/officeDocument/2006/relationships" xmlns:p="http://schemas.openxmlformats.org/presentationml/2006/main">
-  <p:cSld>
-    <p:spTree>
-      <p:nvGrpSpPr>
-        <p:cNvPr id="1" name=""/>
-        <p:cNvGrpSpPr/>
-        <p:nvPr/>
-      </p:nvGrpSpPr>
-      <p:grpSpPr>
-        <a:xfrm>
-          <a:off x="0" y="0"/>
-          <a:ext cx="0" cy="0"/>
-          <a:chOff x="0" y="0"/>
-          <a:chExt cx="0" cy="0"/>
-        </a:xfrm>
-      </p:grpSpPr>
-      <p:sp>
-        <p:nvSpPr>
-          <p:cNvPr id="2" name="Title 1"/>
-          <p:cNvSpPr>
-            <a:spLocks noGrp="1"/>
-          </p:cNvSpPr>
-          <p:nvPr>
-            <p:ph type="title"/>
-          </p:nvPr>
-        </p:nvSpPr>
-        <p:spPr>
-          <a:xfrm>
-            <a:off x="457200" y="205979"/>
-            <a:ext cx="8229600" cy="857250"/>
-          </a:xfrm>
-        </p:spPr>
-        <p:txBody>
-          <a:bodyPr/>
-          <a:lstStyle/>
-          <a:p>
-            <a:pPr lvl="0" indent="0" marL="0">
-              <a:buNone/>
-            </a:pPr>
-            <a:r>
-              <a:rPr/>
-              <a:t>Gradient boosting: correcting mistakes in sequence</a:t>
-            </a:r>
-          </a:p>
-        </p:txBody>
-      </p:sp>
-      <p:sp>
-        <p:nvSpPr>
-          <p:cNvPr id="3" name="Content Placeholder 2"/>
-          <p:cNvSpPr>
-            <a:spLocks noGrp="1"/>
-          </p:cNvSpPr>
-          <p:nvPr>
-            <p:ph idx="1"/>
-          </p:nvPr>
-        </p:nvSpPr>
-        <p:spPr>
-          <a:xfrm>
-            <a:off x="457200" y="1200151"/>
-            <a:ext cx="8229600" cy="3394472"/>
-          </a:xfrm>
-        </p:spPr>
-        <p:txBody>
-          <a:bodyPr/>
-          <a:lstStyle/>
-          <a:p>
-            <a:pPr lvl="0"/>
-            <a:r>
-              <a:rPr/>
-              <a:t>Bagging and random forests build trees </a:t>
-            </a:r>
-            <a:r>
-              <a:rPr b="1"/>
-              <a:t>independently</a:t>
-            </a:r>
-            <a:r>
-              <a:rPr/>
-              <a:t>, then average</a:t>
-            </a:r>
-          </a:p>
-          <a:p>
-            <a:pPr lvl="0"/>
-            <a:r>
-              <a:rPr b="1"/>
-              <a:t>Boosting</a:t>
-            </a:r>
-            <a:r>
-              <a:rPr/>
-              <a:t> builds them </a:t>
-            </a:r>
-            <a:r>
-              <a:rPr b="1"/>
-              <a:t>in sequence</a:t>
-            </a:r>
-            <a:r>
-              <a:rPr/>
-              <a:t>: each new tree corrects what the trees so far got wrong</a:t>
-            </a:r>
-          </a:p>
-          <a:p>
-            <a:pPr lvl="0"/>
-            <a:r>
-              <a:rPr/>
-              <a:t>Each is a shallow </a:t>
-            </a:r>
-            <a:r>
-              <a:rPr b="1"/>
-              <a:t>regression tree</a:t>
-            </a:r>
-            <a:r>
-              <a:rPr/>
-              <a:t>, a </a:t>
-            </a:r>
-            <a:r>
-              <a:rPr b="1"/>
-              <a:t>weak learner</a:t>
-            </a:r>
-            <a:r>
-              <a:rPr/>
-              <a:t>: it predicts a number, a correction, not a class</a:t>
-            </a:r>
-          </a:p>
-          <a:p>
-            <a:pPr lvl="0"/>
-            <a:r>
-              <a:rPr/>
-              <a:t>The learning rate α sets </a:t>
-            </a:r>
-            <a:r>
-              <a:rPr b="1"/>
-              <a:t>how much</a:t>
-            </a:r>
-            <a:r>
-              <a:rPr/>
-              <a:t> of each correction is applied</a:t>
-            </a:r>
-          </a:p>
-        </p:txBody>
-      </p:sp>
-    </p:spTree>
-  </p:cSld>
-</p:sld>
-</file>
-
-<file path=ppt/slides/slide41.xml><?xml version="1.0" encoding="utf-8"?>
+<file path=ppt/slides/slide42.xml><?xml version="1.0" encoding="utf-8"?>
 <p:sld xmlns:a="http://schemas.openxmlformats.org/drawingml/2006/main" xmlns:r="http://schemas.openxmlformats.org/officeDocument/2006/relationships" xmlns:p="http://schemas.openxmlformats.org/presentationml/2006/main">
   <p:cSld>
     <p:spTree>
@@ -14936,7 +15207,7 @@
 </p:sld>
 </file>
 
-<file path=ppt/slides/slide42.xml><?xml version="1.0" encoding="utf-8"?>
+<file path=ppt/slides/slide43.xml><?xml version="1.0" encoding="utf-8"?>
 <p:sld xmlns:a="http://schemas.openxmlformats.org/drawingml/2006/main" xmlns:r="http://schemas.openxmlformats.org/officeDocument/2006/relationships" xmlns:p="http://schemas.openxmlformats.org/presentationml/2006/main">
   <p:cSld>
     <p:spTree>
@@ -15069,7 +15340,7 @@
 </p:sld>
 </file>
 
-<file path=ppt/slides/slide43.xml><?xml version="1.0" encoding="utf-8"?>
+<file path=ppt/slides/slide44.xml><?xml version="1.0" encoding="utf-8"?>
 <p:sld xmlns:a="http://schemas.openxmlformats.org/drawingml/2006/main" xmlns:r="http://schemas.openxmlformats.org/officeDocument/2006/relationships" xmlns:p="http://schemas.openxmlformats.org/presentationml/2006/main">
   <p:cSld>
     <p:spTree>
@@ -15151,131 +15422,6 @@
 </p:sld>
 </file>
 
-<file path=ppt/slides/slide44.xml><?xml version="1.0" encoding="utf-8"?>
-<p:sld xmlns:a="http://schemas.openxmlformats.org/drawingml/2006/main" xmlns:r="http://schemas.openxmlformats.org/officeDocument/2006/relationships" xmlns:p="http://schemas.openxmlformats.org/presentationml/2006/main">
-  <p:cSld>
-    <p:spTree>
-      <p:nvGrpSpPr>
-        <p:cNvPr id="1" name=""/>
-        <p:cNvGrpSpPr/>
-        <p:nvPr/>
-      </p:nvGrpSpPr>
-      <p:grpSpPr>
-        <a:xfrm>
-          <a:off x="0" y="0"/>
-          <a:ext cx="0" cy="0"/>
-          <a:chOff x="0" y="0"/>
-          <a:chExt cx="0" cy="0"/>
-        </a:xfrm>
-      </p:grpSpPr>
-      <p:sp>
-        <p:nvSpPr>
-          <p:cNvPr id="2" name="Title 1"/>
-          <p:cNvSpPr>
-            <a:spLocks noGrp="1"/>
-          </p:cNvSpPr>
-          <p:nvPr>
-            <p:ph type="title"/>
-          </p:nvPr>
-        </p:nvSpPr>
-        <p:spPr>
-          <a:xfrm>
-            <a:off x="457200" y="205979"/>
-            <a:ext cx="8229600" cy="857250"/>
-          </a:xfrm>
-        </p:spPr>
-        <p:txBody>
-          <a:bodyPr/>
-          <a:lstStyle/>
-          <a:p>
-            <a:pPr lvl="0" indent="0" marL="0">
-              <a:buNone/>
-            </a:pPr>
-            <a:r>
-              <a:rPr/>
-              <a:t>Reading the picture</a:t>
-            </a:r>
-          </a:p>
-        </p:txBody>
-      </p:sp>
-      <p:sp>
-        <p:nvSpPr>
-          <p:cNvPr id="3" name="Content Placeholder 2"/>
-          <p:cNvSpPr>
-            <a:spLocks noGrp="1"/>
-          </p:cNvSpPr>
-          <p:nvPr>
-            <p:ph idx="1"/>
-          </p:nvPr>
-        </p:nvSpPr>
-        <p:spPr>
-          <a:xfrm>
-            <a:off x="457200" y="1200151"/>
-            <a:ext cx="8229600" cy="3394472"/>
-          </a:xfrm>
-        </p:spPr>
-        <p:txBody>
-          <a:bodyPr/>
-          <a:lstStyle/>
-          <a:p>
-            <a:pPr lvl="0"/>
-            <a:r>
-              <a:rPr b="1"/>
-              <a:t>1 tree</a:t>
-            </a:r>
-            <a:r>
-              <a:rPr/>
-              <a:t>: mean squared error (MSE) against the true function 0.395, barely moves the flat guess</a:t>
-            </a:r>
-          </a:p>
-          <a:p>
-            <a:pPr lvl="0"/>
-            <a:r>
-              <a:rPr b="1"/>
-              <a:t>5 trees</a:t>
-            </a:r>
-            <a:r>
-              <a:rPr/>
-              <a:t>: MSE 0.068, the coarse shape appears</a:t>
-            </a:r>
-          </a:p>
-          <a:p>
-            <a:pPr lvl="0"/>
-            <a:r>
-              <a:rPr b="1"/>
-              <a:t>20 trees</a:t>
-            </a:r>
-            <a:r>
-              <a:rPr/>
-              <a:t>: MSE </a:t>
-            </a:r>
-            <a:r>
-              <a:rPr b="1"/>
-              <a:t>0.012</a:t>
-            </a:r>
-            <a:r>
-              <a:rPr/>
-              <a:t>, the ensemble’s best point</a:t>
-            </a:r>
-          </a:p>
-          <a:p>
-            <a:pPr lvl="0"/>
-            <a:r>
-              <a:rPr b="1"/>
-              <a:t>60 trees</a:t>
-            </a:r>
-            <a:r>
-              <a:rPr/>
-              <a:t>: MSE rises back to 0.018, tracking noise, not signal</a:t>
-            </a:r>
-          </a:p>
-        </p:txBody>
-      </p:sp>
-    </p:spTree>
-  </p:cSld>
-</p:sld>
-</file>
-
 <file path=ppt/slides/slide45.xml><?xml version="1.0" encoding="utf-8"?>
 <p:sld xmlns:a="http://schemas.openxmlformats.org/drawingml/2006/main" xmlns:r="http://schemas.openxmlformats.org/officeDocument/2006/relationships" xmlns:p="http://schemas.openxmlformats.org/presentationml/2006/main">
   <p:cSld>
@@ -15318,7 +15464,7 @@
             </a:pPr>
             <a:r>
               <a:rPr/>
-              <a:t>Classification: the same idea, a different gradient</a:t>
+              <a:t>Reading the picture</a:t>
             </a:r>
           </a:p>
         </p:txBody>
@@ -15345,41 +15491,53 @@
           <a:p>
             <a:pPr lvl="0"/>
             <a:r>
-              <a:rPr/>
-              <a:t>y is 0 or 1; the score F becomes a probability through lesson 4’s logistic function, p = σ(F) (this σ is not the σ² of the variance slides)</a:t>
+              <a:rPr b="1"/>
+              <a:t>1 tree</a:t>
+            </a:r>
+            <a:r>
+              <a:rPr/>
+              <a:t>: mean squared error (MSE) against the true function 0.395, barely moves the flat guess</a:t>
             </a:r>
           </a:p>
           <a:p>
             <a:pPr lvl="0"/>
             <a:r>
-              <a:rPr/>
-              <a:t>The loss is lesson 4’s </a:t>
-            </a:r>
-            <a:r>
               <a:rPr b="1"/>
-              <a:t>log-loss</a:t>
+              <a:t>5 trees</a:t>
+            </a:r>
+            <a:r>
+              <a:rPr/>
+              <a:t>: MSE 0.068, the coarse shape appears</a:t>
             </a:r>
           </a:p>
           <a:p>
             <a:pPr lvl="0"/>
             <a:r>
-              <a:rPr/>
-              <a:t>Each tree fits the </a:t>
-            </a:r>
-            <a:r>
               <a:rPr b="1"/>
-              <a:t>pseudo-residual</a:t>
-            </a:r>
-            <a:r>
-              <a:rPr/>
-              <a:t> y - p, the negative gradient: lesson 4’s error term</a:t>
+              <a:t>20 trees</a:t>
+            </a:r>
+            <a:r>
+              <a:rPr/>
+              <a:t>: MSE </a:t>
+            </a:r>
+            <a:r>
+              <a:rPr b="1"/>
+              <a:t>0.012</a:t>
+            </a:r>
+            <a:r>
+              <a:rPr/>
+              <a:t>, the ensemble’s best point</a:t>
             </a:r>
           </a:p>
           <a:p>
             <a:pPr lvl="0"/>
             <a:r>
-              <a:rPr/>
-              <a:t>Start: p = 0.387 for all, so the first tree fits +0.613 to defaulters and −0.387 to the rest</a:t>
+              <a:rPr b="1"/>
+              <a:t>60 trees</a:t>
+            </a:r>
+            <a:r>
+              <a:rPr/>
+              <a:t>: MSE rises back to 0.018, tracking noise, not signal</a:t>
             </a:r>
           </a:p>
         </p:txBody>
@@ -15431,7 +15589,7 @@
             </a:pPr>
             <a:r>
               <a:rPr/>
-              <a:t>On the loan data</a:t>
+              <a:t>Classification: the same idea, a different gradient</a:t>
             </a:r>
           </a:p>
         </p:txBody>
@@ -15458,44 +15616,41 @@
           <a:p>
             <a:pPr lvl="0"/>
             <a:r>
-              <a:rPr>
-                <a:latin typeface="Courier"/>
-              </a:rPr>
-              <a:t>GradientBoostingClassifier</a:t>
-            </a:r>
-            <a:r>
-              <a:rPr/>
-              <a:t>, defaults: </a:t>
+              <a:rPr/>
+              <a:t>y is 0 or 1; the score F becomes a probability through lesson 4’s logistic function, p = σ(F) (this σ is not the σ² of the variance slides)</a:t>
+            </a:r>
+          </a:p>
+          <a:p>
+            <a:pPr lvl="0"/>
+            <a:r>
+              <a:rPr/>
+              <a:t>The loss is lesson 4’s </a:t>
             </a:r>
             <a:r>
               <a:rPr b="1"/>
-              <a:t>100 trees</a:t>
-            </a:r>
-            <a:r>
-              <a:rPr/>
-              <a:t>, learning rate α = 0.1</a:t>
+              <a:t>log-loss</a:t>
             </a:r>
           </a:p>
           <a:p>
             <a:pPr lvl="0"/>
             <a:r>
               <a:rPr/>
-              <a:t>Reaches </a:t>
+              <a:t>Each tree fits the </a:t>
             </a:r>
             <a:r>
               <a:rPr b="1"/>
-              <a:t>0.902 ± 0.020</a:t>
-            </a:r>
-            <a:r>
-              <a:rPr/>
-              <a:t> cross-validated accuracy</a:t>
+              <a:t>pseudo-residual</a:t>
+            </a:r>
+            <a:r>
+              <a:rPr/>
+              <a:t> y - p, the negative gradient: lesson 4’s error term</a:t>
             </a:r>
           </a:p>
           <a:p>
             <a:pPr lvl="0"/>
             <a:r>
               <a:rPr/>
-              <a:t>Already ahead of any single tree from earlier in the lesson</a:t>
+              <a:t>Start: p = 0.387 for all, so the first tree fits +0.613 to defaulters and −0.387 to the rest</a:t>
             </a:r>
           </a:p>
         </p:txBody>
@@ -15506,6 +15661,122 @@
 </file>
 
 <file path=ppt/slides/slide47.xml><?xml version="1.0" encoding="utf-8"?>
+<p:sld xmlns:a="http://schemas.openxmlformats.org/drawingml/2006/main" xmlns:r="http://schemas.openxmlformats.org/officeDocument/2006/relationships" xmlns:p="http://schemas.openxmlformats.org/presentationml/2006/main">
+  <p:cSld>
+    <p:spTree>
+      <p:nvGrpSpPr>
+        <p:cNvPr id="1" name=""/>
+        <p:cNvGrpSpPr/>
+        <p:nvPr/>
+      </p:nvGrpSpPr>
+      <p:grpSpPr>
+        <a:xfrm>
+          <a:off x="0" y="0"/>
+          <a:ext cx="0" cy="0"/>
+          <a:chOff x="0" y="0"/>
+          <a:chExt cx="0" cy="0"/>
+        </a:xfrm>
+      </p:grpSpPr>
+      <p:sp>
+        <p:nvSpPr>
+          <p:cNvPr id="2" name="Title 1"/>
+          <p:cNvSpPr>
+            <a:spLocks noGrp="1"/>
+          </p:cNvSpPr>
+          <p:nvPr>
+            <p:ph type="title"/>
+          </p:nvPr>
+        </p:nvSpPr>
+        <p:spPr>
+          <a:xfrm>
+            <a:off x="457200" y="205979"/>
+            <a:ext cx="8229600" cy="857250"/>
+          </a:xfrm>
+        </p:spPr>
+        <p:txBody>
+          <a:bodyPr/>
+          <a:lstStyle/>
+          <a:p>
+            <a:pPr lvl="0" indent="0" marL="0">
+              <a:buNone/>
+            </a:pPr>
+            <a:r>
+              <a:rPr/>
+              <a:t>On the loan data</a:t>
+            </a:r>
+          </a:p>
+        </p:txBody>
+      </p:sp>
+      <p:sp>
+        <p:nvSpPr>
+          <p:cNvPr id="3" name="Content Placeholder 2"/>
+          <p:cNvSpPr>
+            <a:spLocks noGrp="1"/>
+          </p:cNvSpPr>
+          <p:nvPr>
+            <p:ph idx="1"/>
+          </p:nvPr>
+        </p:nvSpPr>
+        <p:spPr>
+          <a:xfrm>
+            <a:off x="457200" y="1200151"/>
+            <a:ext cx="8229600" cy="3394472"/>
+          </a:xfrm>
+        </p:spPr>
+        <p:txBody>
+          <a:bodyPr/>
+          <a:lstStyle/>
+          <a:p>
+            <a:pPr lvl="0"/>
+            <a:r>
+              <a:rPr>
+                <a:latin typeface="Courier"/>
+              </a:rPr>
+              <a:t>GradientBoostingClassifier</a:t>
+            </a:r>
+            <a:r>
+              <a:rPr/>
+              <a:t>, defaults: </a:t>
+            </a:r>
+            <a:r>
+              <a:rPr b="1"/>
+              <a:t>100 trees</a:t>
+            </a:r>
+            <a:r>
+              <a:rPr/>
+              <a:t>, learning rate α = 0.1</a:t>
+            </a:r>
+          </a:p>
+          <a:p>
+            <a:pPr lvl="0"/>
+            <a:r>
+              <a:rPr/>
+              <a:t>Reaches </a:t>
+            </a:r>
+            <a:r>
+              <a:rPr b="1"/>
+              <a:t>0.902 ± 0.020</a:t>
+            </a:r>
+            <a:r>
+              <a:rPr/>
+              <a:t> cross-validated accuracy</a:t>
+            </a:r>
+          </a:p>
+          <a:p>
+            <a:pPr lvl="0"/>
+            <a:r>
+              <a:rPr/>
+              <a:t>Already ahead of any single tree from earlier in the lesson</a:t>
+            </a:r>
+          </a:p>
+        </p:txBody>
+      </p:sp>
+    </p:spTree>
+  </p:cSld>
+</p:sld>
+</file>
+
+<file path=ppt/slides/slide48.xml><?xml version="1.0" encoding="utf-8"?>
 <p:sld xmlns:a="http://schemas.openxmlformats.org/drawingml/2006/main" xmlns:r="http://schemas.openxmlformats.org/officeDocument/2006/relationships" xmlns:p="http://schemas.openxmlformats.org/presentationml/2006/main">
   <p:cSld>
     <p:spTree>
@@ -15971,7 +16242,7 @@
 </p:sld>
 </file>
 
-<file path=ppt/slides/slide48.xml><?xml version="1.0" encoding="utf-8"?>
+<file path=ppt/slides/slide49.xml><?xml version="1.0" encoding="utf-8"?>
 <p:sld xmlns:a="http://schemas.openxmlformats.org/drawingml/2006/main" xmlns:r="http://schemas.openxmlformats.org/officeDocument/2006/relationships" xmlns:p="http://schemas.openxmlformats.org/presentationml/2006/main">
   <p:cSld>
     <p:spTree>
@@ -16053,7 +16324,89 @@
 </p:sld>
 </file>
 
-<file path=ppt/slides/slide49.xml><?xml version="1.0" encoding="utf-8"?>
+<file path=ppt/slides/slide5.xml><?xml version="1.0" encoding="utf-8"?>
+<p:sld xmlns:a="http://schemas.openxmlformats.org/drawingml/2006/main" xmlns:r="http://schemas.openxmlformats.org/officeDocument/2006/relationships" xmlns:p="http://schemas.openxmlformats.org/presentationml/2006/main">
+  <p:cSld>
+    <p:spTree>
+      <p:nvGrpSpPr>
+        <p:cNvPr id="1" name=""/>
+        <p:cNvGrpSpPr/>
+        <p:nvPr/>
+      </p:nvGrpSpPr>
+      <p:grpSpPr>
+        <a:xfrm>
+          <a:off x="0" y="0"/>
+          <a:ext cx="0" cy="0"/>
+          <a:chOff x="0" y="0"/>
+          <a:chExt cx="0" cy="0"/>
+        </a:xfrm>
+      </p:grpSpPr>
+      <p:sp>
+        <p:nvSpPr>
+          <p:cNvPr id="2" name="Title 1"/>
+          <p:cNvSpPr>
+            <a:spLocks noGrp="1"/>
+          </p:cNvSpPr>
+          <p:nvPr>
+            <p:ph type="title"/>
+          </p:nvPr>
+        </p:nvSpPr>
+        <p:spPr>
+          <a:xfrm>
+            <a:off x="457200" y="205979"/>
+            <a:ext cx="8229600" cy="857250"/>
+          </a:xfrm>
+        </p:spPr>
+        <p:txBody>
+          <a:bodyPr/>
+          <a:lstStyle/>
+          <a:p>
+            <a:pPr lvl="0" indent="0" marL="0">
+              <a:buNone/>
+            </a:pPr>
+            <a:r>
+              <a:rPr/>
+              <a:t>Four risky rules, three risky regions</a:t>
+            </a:r>
+          </a:p>
+        </p:txBody>
+      </p:sp>
+      <p:pic>
+        <p:nvPicPr>
+          <p:cNvPr descr="loan_scatter.png" id="0" name="Picture 1"/>
+          <p:cNvPicPr>
+            <a:picLocks noGrp="1" noChangeAspect="1"/>
+          </p:cNvPicPr>
+          <p:nvPr/>
+        </p:nvPicPr>
+        <p:blipFill>
+          <a:blip r:embed="rId3"/>
+          <a:stretch>
+            <a:fillRect/>
+          </a:stretch>
+        </p:blipFill>
+        <p:spPr bwMode="auto">
+          <a:xfrm>
+            <a:off x="2445144" y="1166099"/>
+            <a:ext cx="4253712" cy="3360181"/>
+          </a:xfrm>
+          <a:prstGeom prst="rect">
+            <a:avLst/>
+          </a:prstGeom>
+          <a:noFill/>
+          <a:ln w="9525">
+            <a:noFill/>
+            <a:headEnd/>
+            <a:tailEnd/>
+          </a:ln>
+        </p:spPr>
+      </p:pic>
+    </p:spTree>
+  </p:cSld>
+</p:sld>
+</file>
+
+<file path=ppt/slides/slide50.xml><?xml version="1.0" encoding="utf-8"?>
 <p:sld xmlns:a="http://schemas.openxmlformats.org/drawingml/2006/main" xmlns:r="http://schemas.openxmlformats.org/officeDocument/2006/relationships" xmlns:p="http://schemas.openxmlformats.org/presentationml/2006/main">
   <p:cSld>
     <p:spTree>
@@ -16419,89 +16772,7 @@
 </p:sld>
 </file>
 
-<file path=ppt/slides/slide5.xml><?xml version="1.0" encoding="utf-8"?>
-<p:sld xmlns:a="http://schemas.openxmlformats.org/drawingml/2006/main" xmlns:r="http://schemas.openxmlformats.org/officeDocument/2006/relationships" xmlns:p="http://schemas.openxmlformats.org/presentationml/2006/main">
-  <p:cSld>
-    <p:spTree>
-      <p:nvGrpSpPr>
-        <p:cNvPr id="1" name=""/>
-        <p:cNvGrpSpPr/>
-        <p:nvPr/>
-      </p:nvGrpSpPr>
-      <p:grpSpPr>
-        <a:xfrm>
-          <a:off x="0" y="0"/>
-          <a:ext cx="0" cy="0"/>
-          <a:chOff x="0" y="0"/>
-          <a:chExt cx="0" cy="0"/>
-        </a:xfrm>
-      </p:grpSpPr>
-      <p:sp>
-        <p:nvSpPr>
-          <p:cNvPr id="2" name="Title 1"/>
-          <p:cNvSpPr>
-            <a:spLocks noGrp="1"/>
-          </p:cNvSpPr>
-          <p:nvPr>
-            <p:ph type="title"/>
-          </p:nvPr>
-        </p:nvSpPr>
-        <p:spPr>
-          <a:xfrm>
-            <a:off x="457200" y="205979"/>
-            <a:ext cx="8229600" cy="857250"/>
-          </a:xfrm>
-        </p:spPr>
-        <p:txBody>
-          <a:bodyPr/>
-          <a:lstStyle/>
-          <a:p>
-            <a:pPr lvl="0" indent="0" marL="0">
-              <a:buNone/>
-            </a:pPr>
-            <a:r>
-              <a:rPr/>
-              <a:t>Four disconnected risky regions</a:t>
-            </a:r>
-          </a:p>
-        </p:txBody>
-      </p:sp>
-      <p:pic>
-        <p:nvPicPr>
-          <p:cNvPr descr="loan_scatter.png" id="0" name="Picture 1"/>
-          <p:cNvPicPr>
-            <a:picLocks noGrp="1" noChangeAspect="1"/>
-          </p:cNvPicPr>
-          <p:nvPr/>
-        </p:nvPicPr>
-        <p:blipFill>
-          <a:blip r:embed="rId3"/>
-          <a:stretch>
-            <a:fillRect/>
-          </a:stretch>
-        </p:blipFill>
-        <p:spPr bwMode="auto">
-          <a:xfrm>
-            <a:off x="2445144" y="1166099"/>
-            <a:ext cx="4253712" cy="3360181"/>
-          </a:xfrm>
-          <a:prstGeom prst="rect">
-            <a:avLst/>
-          </a:prstGeom>
-          <a:noFill/>
-          <a:ln w="9525">
-            <a:noFill/>
-            <a:headEnd/>
-            <a:tailEnd/>
-          </a:ln>
-        </p:spPr>
-      </p:pic>
-    </p:spTree>
-  </p:cSld>
-</p:sld>
-</file>
-
-<file path=ppt/slides/slide50.xml><?xml version="1.0" encoding="utf-8"?>
+<file path=ppt/slides/slide51.xml><?xml version="1.0" encoding="utf-8"?>
 <p:sld xmlns:a="http://schemas.openxmlformats.org/drawingml/2006/main" xmlns:r="http://schemas.openxmlformats.org/officeDocument/2006/relationships" xmlns:p="http://schemas.openxmlformats.org/presentationml/2006/main">
   <p:cSld>
     <p:spTree>
@@ -16617,7 +16888,7 @@
                       </a:pPr>
                       <a:r>
                         <a:rPr/>
-                        <a:t>1. boosting from scratch, 40-44</a:t>
+                        <a:t>1. boosting from scratch, 41-45</a:t>
                       </a:r>
                     </a:p>
                   </a:txBody>
@@ -16655,7 +16926,7 @@
                       </a:pPr>
                       <a:r>
                         <a:rPr/>
-                        <a:t>2. classification, 45-46</a:t>
+                        <a:t>2. classification, 46-47</a:t>
                       </a:r>
                     </a:p>
                   </a:txBody>
@@ -16703,7 +16974,7 @@
                       </a:pPr>
                       <a:r>
                         <a:rPr/>
-                        <a:t>3. more trees, 47-48</a:t>
+                        <a:t>3. more trees, 48-49</a:t>
                       </a:r>
                     </a:p>
                   </a:txBody>
@@ -16755,7 +17026,7 @@
                       </a:pPr>
                       <a:r>
                         <a:rPr/>
-                        <a:t>4. learning rate, 49</a:t>
+                        <a:t>4. learning rate, 50</a:t>
                       </a:r>
                     </a:p>
                   </a:txBody>
@@ -16807,7 +17078,7 @@
                       </a:pPr>
                       <a:r>
                         <a:rPr/>
-                        <a:t>5. leaderboard, 51</a:t>
+                        <a:t>5. leaderboard, 52</a:t>
                       </a:r>
                     </a:p>
                   </a:txBody>
@@ -16847,7 +17118,7 @@
 </p:sld>
 </file>
 
-<file path=ppt/slides/slide51.xml><?xml version="1.0" encoding="utf-8"?>
+<file path=ppt/slides/slide52.xml><?xml version="1.0" encoding="utf-8"?>
 <p:sld xmlns:a="http://schemas.openxmlformats.org/drawingml/2006/main" xmlns:r="http://schemas.openxmlformats.org/officeDocument/2006/relationships" xmlns:p="http://schemas.openxmlformats.org/presentationml/2006/main">
   <p:cSld>
     <p:spTree>
@@ -17223,7 +17494,7 @@
 </p:sld>
 </file>
 
-<file path=ppt/slides/slide52.xml><?xml version="1.0" encoding="utf-8"?>
+<file path=ppt/slides/slide53.xml><?xml version="1.0" encoding="utf-8"?>
 <p:sld xmlns:a="http://schemas.openxmlformats.org/drawingml/2006/main" xmlns:r="http://schemas.openxmlformats.org/officeDocument/2006/relationships" xmlns:p="http://schemas.openxmlformats.org/presentationml/2006/main">
   <p:cSld>
     <p:spTree>
@@ -17341,7 +17612,7 @@
 </p:sld>
 </file>
 
-<file path=ppt/slides/slide53.xml><?xml version="1.0" encoding="utf-8"?>
+<file path=ppt/slides/slide54.xml><?xml version="1.0" encoding="utf-8"?>
 <p:sld xmlns:a="http://schemas.openxmlformats.org/drawingml/2006/main" xmlns:r="http://schemas.openxmlformats.org/officeDocument/2006/relationships" xmlns:p="http://schemas.openxmlformats.org/presentationml/2006/main">
   <p:cSld>
     <p:spTree>
@@ -17615,131 +17886,6 @@
 </p:sld>
 </file>
 
-<file path=ppt/slides/slide54.xml><?xml version="1.0" encoding="utf-8"?>
-<p:sld xmlns:a="http://schemas.openxmlformats.org/drawingml/2006/main" xmlns:r="http://schemas.openxmlformats.org/officeDocument/2006/relationships" xmlns:p="http://schemas.openxmlformats.org/presentationml/2006/main">
-  <p:cSld>
-    <p:spTree>
-      <p:nvGrpSpPr>
-        <p:cNvPr id="1" name=""/>
-        <p:cNvGrpSpPr/>
-        <p:nvPr/>
-      </p:nvGrpSpPr>
-      <p:grpSpPr>
-        <a:xfrm>
-          <a:off x="0" y="0"/>
-          <a:ext cx="0" cy="0"/>
-          <a:chOff x="0" y="0"/>
-          <a:chExt cx="0" cy="0"/>
-        </a:xfrm>
-      </p:grpSpPr>
-      <p:sp>
-        <p:nvSpPr>
-          <p:cNvPr id="2" name="Title 1"/>
-          <p:cNvSpPr>
-            <a:spLocks noGrp="1"/>
-          </p:cNvSpPr>
-          <p:nvPr>
-            <p:ph type="title"/>
-          </p:nvPr>
-        </p:nvSpPr>
-        <p:spPr>
-          <a:xfrm>
-            <a:off x="457200" y="205979"/>
-            <a:ext cx="8229600" cy="857250"/>
-          </a:xfrm>
-        </p:spPr>
-        <p:txBody>
-          <a:bodyPr/>
-          <a:lstStyle/>
-          <a:p>
-            <a:pPr lvl="0" indent="0" marL="0">
-              <a:buNone/>
-            </a:pPr>
-            <a:r>
-              <a:rPr/>
-              <a:t>54% of the importance landed on noise</a:t>
-            </a:r>
-          </a:p>
-        </p:txBody>
-      </p:sp>
-      <p:sp>
-        <p:nvSpPr>
-          <p:cNvPr id="3" name="Content Placeholder 2"/>
-          <p:cNvSpPr>
-            <a:spLocks noGrp="1"/>
-          </p:cNvSpPr>
-          <p:nvPr>
-            <p:ph idx="1"/>
-          </p:nvPr>
-        </p:nvSpPr>
-        <p:spPr>
-          <a:xfrm>
-            <a:off x="457200" y="1200151"/>
-            <a:ext cx="8229600" cy="3394472"/>
-          </a:xfrm>
-        </p:spPr>
-        <p:txBody>
-          <a:bodyPr/>
-          <a:lstStyle/>
-          <a:p>
-            <a:pPr lvl="0"/>
-            <a:r>
-              <a:rPr/>
-              <a:t>20 noise columns, 2 real ones: not small, not a bug</a:t>
-            </a:r>
-          </a:p>
-          <a:p>
-            <a:pPr lvl="0"/>
-            <a:r>
-              <a:rPr b="1"/>
-              <a:t>The menu</a:t>
-            </a:r>
-            <a:r>
-              <a:rPr/>
-              <a:t>: 4 of 22 columns per split; in two splits of three (0.662), no real feature</a:t>
-            </a:r>
-          </a:p>
-          <a:p>
-            <a:pPr lvl="0"/>
-            <a:r>
-              <a:rPr b="1"/>
-              <a:t>Small groups</a:t>
-            </a:r>
-            <a:r>
-              <a:rPr/>
-              <a:t>: with all 22 on offer, noise still takes </a:t>
-            </a:r>
-            <a:r>
-              <a:rPr b="1"/>
-              <a:t>28%</a:t>
-            </a:r>
-            <a:r>
-              <a:rPr/>
-              <a:t>, from deep splits</a:t>
-            </a:r>
-          </a:p>
-          <a:p>
-            <a:pPr lvl="0"/>
-            <a:r>
-              <a:rPr/>
-              <a:t>The check: </a:t>
-            </a:r>
-            <a:r>
-              <a:rPr b="1"/>
-              <a:t>permutation importance</a:t>
-            </a:r>
-            <a:r>
-              <a:rPr/>
-              <a:t>, slide 38</a:t>
-            </a:r>
-          </a:p>
-        </p:txBody>
-      </p:sp>
-    </p:spTree>
-  </p:cSld>
-</p:sld>
-</file>
-
 <file path=ppt/slides/slide55.xml><?xml version="1.0" encoding="utf-8"?>
 <p:sld xmlns:a="http://schemas.openxmlformats.org/drawingml/2006/main" xmlns:r="http://schemas.openxmlformats.org/officeDocument/2006/relationships" xmlns:p="http://schemas.openxmlformats.org/presentationml/2006/main">
   <p:cSld>
@@ -17782,7 +17928,7 @@
             </a:pPr>
             <a:r>
               <a:rPr/>
-              <a:t>What to take away</a:t>
+              <a:t>54% of the importance landed on noise</a:t>
             </a:r>
           </a:p>
         </p:txBody>
@@ -17810,44 +17956,52 @@
             <a:pPr lvl="0"/>
             <a:r>
               <a:rPr/>
-              <a:t>A tree splits greedily on Gini impurity, matching scikit-learn</a:t>
+              <a:t>20 noise columns, 2 real ones: not small, not a bug</a:t>
             </a:r>
           </a:p>
           <a:p>
             <a:pPr lvl="0"/>
             <a:r>
-              <a:rPr/>
-              <a:t>Depth is the bias-variance dial: accuracy peaked at </a:t>
-            </a:r>
-            <a:r>
               <a:rPr b="1"/>
-              <a:t>depth 8</a:t>
+              <a:t>The menu</a:t>
+            </a:r>
+            <a:r>
+              <a:rPr/>
+              <a:t>: 4 of 22 columns per split; in two splits of three (0.662), no real feature</a:t>
             </a:r>
           </a:p>
           <a:p>
             <a:pPr lvl="0"/>
             <a:r>
-              <a:rPr/>
-              <a:t>Bootstrap resampling leaves </a:t>
-            </a:r>
-            <a:r>
               <a:rPr b="1"/>
-              <a:t>36.8%</a:t>
-            </a:r>
-            <a:r>
-              <a:rPr/>
-              <a:t> of rows out-of-bag: free validation</a:t>
+              <a:t>Small groups</a:t>
+            </a:r>
+            <a:r>
+              <a:rPr/>
+              <a:t>: with all 22 on offer, noise still takes </a:t>
+            </a:r>
+            <a:r>
+              <a:rPr b="1"/>
+              <a:t>28%</a:t>
+            </a:r>
+            <a:r>
+              <a:rPr/>
+              <a:t>, from deep splits</a:t>
             </a:r>
           </a:p>
           <a:p>
             <a:pPr lvl="0"/>
             <a:r>
+              <a:rPr/>
+              <a:t>The check: </a:t>
+            </a:r>
+            <a:r>
               <a:rPr b="1"/>
-              <a:t>54% of a random forest’s importance landed on 20 noise columns</a:t>
-            </a:r>
-            <a:r>
-              <a:rPr/>
-              <a:t>, today’s number</a:t>
+              <a:t>permutation importance</a:t>
+            </a:r>
+            <a:r>
+              <a:rPr/>
+              <a:t>, slide 39</a:t>
             </a:r>
           </a:p>
         </p:txBody>
@@ -17899,6 +18053,123 @@
             </a:pPr>
             <a:r>
               <a:rPr/>
+              <a:t>What to take away</a:t>
+            </a:r>
+          </a:p>
+        </p:txBody>
+      </p:sp>
+      <p:sp>
+        <p:nvSpPr>
+          <p:cNvPr id="3" name="Content Placeholder 2"/>
+          <p:cNvSpPr>
+            <a:spLocks noGrp="1"/>
+          </p:cNvSpPr>
+          <p:nvPr>
+            <p:ph idx="1"/>
+          </p:nvPr>
+        </p:nvSpPr>
+        <p:spPr>
+          <a:xfrm>
+            <a:off x="457200" y="1200151"/>
+            <a:ext cx="8229600" cy="3394472"/>
+          </a:xfrm>
+        </p:spPr>
+        <p:txBody>
+          <a:bodyPr/>
+          <a:lstStyle/>
+          <a:p>
+            <a:pPr lvl="0"/>
+            <a:r>
+              <a:rPr/>
+              <a:t>A tree splits greedily on Gini impurity, matching scikit-learn</a:t>
+            </a:r>
+          </a:p>
+          <a:p>
+            <a:pPr lvl="0"/>
+            <a:r>
+              <a:rPr/>
+              <a:t>Depth is the bias-variance dial: accuracy peaked at </a:t>
+            </a:r>
+            <a:r>
+              <a:rPr b="1"/>
+              <a:t>depth 8</a:t>
+            </a:r>
+          </a:p>
+          <a:p>
+            <a:pPr lvl="0"/>
+            <a:r>
+              <a:rPr/>
+              <a:t>Bootstrap resampling leaves </a:t>
+            </a:r>
+            <a:r>
+              <a:rPr b="1"/>
+              <a:t>36.8%</a:t>
+            </a:r>
+            <a:r>
+              <a:rPr/>
+              <a:t> of rows out-of-bag: free validation</a:t>
+            </a:r>
+          </a:p>
+          <a:p>
+            <a:pPr lvl="0"/>
+            <a:r>
+              <a:rPr b="1"/>
+              <a:t>54% of a random forest’s importance landed on 20 noise columns</a:t>
+            </a:r>
+            <a:r>
+              <a:rPr/>
+              <a:t>, today’s number</a:t>
+            </a:r>
+          </a:p>
+        </p:txBody>
+      </p:sp>
+    </p:spTree>
+  </p:cSld>
+</p:sld>
+</file>
+
+<file path=ppt/slides/slide57.xml><?xml version="1.0" encoding="utf-8"?>
+<p:sld xmlns:a="http://schemas.openxmlformats.org/drawingml/2006/main" xmlns:r="http://schemas.openxmlformats.org/officeDocument/2006/relationships" xmlns:p="http://schemas.openxmlformats.org/presentationml/2006/main">
+  <p:cSld>
+    <p:spTree>
+      <p:nvGrpSpPr>
+        <p:cNvPr id="1" name=""/>
+        <p:cNvGrpSpPr/>
+        <p:nvPr/>
+      </p:nvGrpSpPr>
+      <p:grpSpPr>
+        <a:xfrm>
+          <a:off x="0" y="0"/>
+          <a:ext cx="0" cy="0"/>
+          <a:chOff x="0" y="0"/>
+          <a:chExt cx="0" cy="0"/>
+        </a:xfrm>
+      </p:grpSpPr>
+      <p:sp>
+        <p:nvSpPr>
+          <p:cNvPr id="2" name="Title 1"/>
+          <p:cNvSpPr>
+            <a:spLocks noGrp="1"/>
+          </p:cNvSpPr>
+          <p:nvPr>
+            <p:ph type="title"/>
+          </p:nvPr>
+        </p:nvSpPr>
+        <p:spPr>
+          <a:xfrm>
+            <a:off x="457200" y="205979"/>
+            <a:ext cx="8229600" cy="857250"/>
+          </a:xfrm>
+        </p:spPr>
+        <p:txBody>
+          <a:bodyPr/>
+          <a:lstStyle/>
+          <a:p>
+            <a:pPr lvl="0" indent="0" marL="0">
+              <a:buNone/>
+            </a:pPr>
+            <a:r>
+              <a:rPr/>
               <a:t>Homework</a:t>
             </a:r>
           </a:p>
@@ -18001,132 +18272,36 @@
           </a:p>
         </p:txBody>
       </p:sp>
-      <p:graphicFrame>
-        <p:nvGraphicFramePr>
-          <p:cNvPr id="6" name="Content Placeholder 5"/>
-          <p:cNvGraphicFramePr>
-            <a:graphicFrameLocks noGrp="1"/>
-          </p:cNvGraphicFramePr>
-          <p:nvPr>
-            <p:ph idx="1"/>
-          </p:nvPr>
-        </p:nvGraphicFramePr>
-        <p:xfrm>
-          <a:off x="457200" y="1166099"/>
-          <a:ext cx="8229600" cy="3390900"/>
-        </p:xfrm>
-        <a:graphic>
-          <a:graphicData uri="http://schemas.openxmlformats.org/drawingml/2006/table">
-            <a:tbl>
-              <a:tblPr firstRow="1" bandRow="1">
-                <a:tableStyleId>{5C22544A-7EE6-4342-B048-85BDC9FD1C3A}</a:tableStyleId>
-              </a:tblPr>
-              <a:tblGrid>
-                <a:gridCol w="4114800"/>
-                <a:gridCol w="4114800"/>
-              </a:tblGrid>
-              <a:tr h="0">
-                <a:tc>
-                  <a:txBody>
-                    <a:bodyPr/>
-                    <a:lstStyle/>
-                    <a:p>
-                      <a:pPr lvl="0" indent="0" marL="0">
-                        <a:buNone/>
-                      </a:pPr>
-                      <a:r>
-                        <a:rPr/>
-                        <a:t>Model</a:t>
-                      </a:r>
-                    </a:p>
-                  </a:txBody>
-                  <a:tcPr/>
-                </a:tc>
-                <a:tc>
-                  <a:txBody>
-                    <a:bodyPr/>
-                    <a:lstStyle/>
-                    <a:p>
-                      <a:pPr lvl="0" indent="0" marL="0">
-                        <a:buNone/>
-                      </a:pPr>
-                      <a:r>
-                        <a:rPr/>
-                        <a:t>Cross-validated accuracy</a:t>
-                      </a:r>
-                    </a:p>
-                  </a:txBody>
-                  <a:tcPr/>
-                </a:tc>
-              </a:tr>
-              <a:tr h="0">
-                <a:tc>
-                  <a:txBody>
-                    <a:bodyPr/>
-                    <a:lstStyle/>
-                    <a:p>
-                      <a:pPr lvl="0" indent="0" marL="0">
-                        <a:buNone/>
-                      </a:pPr>
-                      <a:r>
-                        <a:rPr/>
-                        <a:t>Always predict the majority class</a:t>
-                      </a:r>
-                    </a:p>
-                  </a:txBody>
-                </a:tc>
-                <a:tc>
-                  <a:txBody>
-                    <a:bodyPr/>
-                    <a:lstStyle/>
-                    <a:p>
-                      <a:pPr lvl="0" indent="0" marL="0">
-                        <a:buNone/>
-                      </a:pPr>
-                      <a:r>
-                        <a:rPr/>
-                        <a:t>0.613</a:t>
-                      </a:r>
-                    </a:p>
-                  </a:txBody>
-                </a:tc>
-              </a:tr>
-              <a:tr h="0">
-                <a:tc>
-                  <a:txBody>
-                    <a:bodyPr/>
-                    <a:lstStyle/>
-                    <a:p>
-                      <a:pPr lvl="0" indent="0" marL="0">
-                        <a:buNone/>
-                      </a:pPr>
-                      <a:r>
-                        <a:rPr/>
-                        <a:t>Logistic regression</a:t>
-                      </a:r>
-                    </a:p>
-                  </a:txBody>
-                </a:tc>
-                <a:tc>
-                  <a:txBody>
-                    <a:bodyPr/>
-                    <a:lstStyle/>
-                    <a:p>
-                      <a:pPr lvl="0" indent="0" marL="0">
-                        <a:buNone/>
-                      </a:pPr>
-                      <a:r>
-                        <a:rPr b="1"/>
-                        <a:t>0.748 ± 0.030</a:t>
-                      </a:r>
-                    </a:p>
-                  </a:txBody>
-                </a:tc>
-              </a:tr>
-            </a:tbl>
-          </a:graphicData>
-        </a:graphic>
-      </p:graphicFrame>
+      <p:pic>
+        <p:nvPicPr>
+          <p:cNvPr descr="loan_logistic.png" id="0" name="Picture 1"/>
+          <p:cNvPicPr>
+            <a:picLocks noGrp="1" noChangeAspect="1"/>
+          </p:cNvPicPr>
+          <p:nvPr/>
+        </p:nvPicPr>
+        <p:blipFill>
+          <a:blip r:embed="rId3"/>
+          <a:stretch>
+            <a:fillRect/>
+          </a:stretch>
+        </p:blipFill>
+        <p:spPr bwMode="auto">
+          <a:xfrm>
+            <a:off x="2338172" y="1166099"/>
+            <a:ext cx="4467656" cy="3360181"/>
+          </a:xfrm>
+          <a:prstGeom prst="rect">
+            <a:avLst/>
+          </a:prstGeom>
+          <a:noFill/>
+          <a:ln w="9525">
+            <a:noFill/>
+            <a:headEnd/>
+            <a:tailEnd/>
+          </a:ln>
+        </p:spPr>
+      </p:pic>
     </p:spTree>
   </p:cSld>
 </p:sld>
@@ -18202,11 +18377,23 @@
             <a:pPr lvl="0"/>
             <a:r>
               <a:rPr/>
-              <a:t>Find the (feature, threshold) split that makes the two groups </a:t>
+              <a:t>Try </a:t>
             </a:r>
             <a:r>
               <a:rPr b="1"/>
-              <a:t>as pure as possible</a:t>
+              <a:t>every feature and every threshold</a:t>
+            </a:r>
+            <a:r>
+              <a:rPr/>
+              <a:t>; keep the split leaving the </a:t>
+            </a:r>
+            <a:r>
+              <a:rPr b="1"/>
+              <a:t>purest</a:t>
+            </a:r>
+            <a:r>
+              <a:rPr/>
+              <a:t> two groups</a:t>
             </a:r>
           </a:p>
           <a:p>
@@ -18227,15 +18414,11 @@
             <a:pPr lvl="0"/>
             <a:r>
               <a:rPr/>
-              <a:t>No coefficients and no gradient: each threshold is chosen by </a:t>
+              <a:t>No coefficients, no gradient: thresholds are found by </a:t>
             </a:r>
             <a:r>
               <a:rPr b="1"/>
               <a:t>searching</a:t>
-            </a:r>
-            <a:r>
-              <a:rPr/>
-              <a:t> the data</a:t>
             </a:r>
           </a:p>
           <a:p>
@@ -18327,8 +18510,8 @@
         </p:blipFill>
         <p:spPr bwMode="auto">
           <a:xfrm>
-            <a:off x="1073385" y="1166099"/>
-            <a:ext cx="6997230" cy="3360181"/>
+            <a:off x="1130017" y="1166099"/>
+            <a:ext cx="6883966" cy="3360181"/>
           </a:xfrm>
           <a:prstGeom prst="rect">
             <a:avLst/>

--- a/Lessons/07_trees_and_ensembles/Slides/trees_and_ensembles_slides.pptx
+++ b/Lessons/07_trees_and_ensembles/Slides/trees_and_ensembles_slides.pptx
@@ -5,7 +5,7 @@
     <p:sldMasterId id="2147483648" r:id="rId1"/>
   </p:sldMasterIdLst>
   <p:notesMasterIdLst>
-    <p:notesMasterId r:id="rId59"/>
+    <p:notesMasterId r:id="rId60"/>
   </p:notesMasterIdLst>
   <p:sldIdLst>
     <p:sldId id="256" r:id="rId2"/>
@@ -65,6 +65,7 @@
     <p:sldId id="310" r:id="rId56"/>
     <p:sldId id="311" r:id="rId57"/>
     <p:sldId id="312" r:id="rId58"/>
+    <p:sldId id="313" r:id="rId59"/>
   </p:sldIdLst>
   <p:sldSz cx="9144000" cy="5143500" type="screen16x9"/>
   <p:notesSz cx="6858000" cy="9144000"/>
@@ -690,7 +691,7 @@
             </a:pPr>
             <a:r>
               <a:rPr/>
-              <a:t>Two classes is the case that matters for this dataset, and the formula collapses to something with an obvious shape: zero at the extremes, a single peak at fifty-fifty. Ask the room to sanity-check the peak location before you confirm it - it is the point where a random guess is least useful.</a:t>
+              <a:t>Two classes is the case that matters for this dataset, and the formula collapses: with shares p and 1 - p, 1 - (p² + (1 - p)²) = 1 - p² - (1 - 2p + p²) = 2p - 2p² = 2p(1 - p). Write that line on the board; it is the only algebra in this segment. The result has an obvious shape: zero at the extremes, a single peak at fifty-fifty. Ask the room to sanity-check the peak location before you confirm it - it is the point where a random guess is least useful.</a:t>
             </a:r>
           </a:p>
           <a:p>
@@ -800,7 +801,7 @@
             </a:pPr>
             <a:r>
               <a:rPr/>
-              <a:t>Set up the idea in words before the formula: a split is only useful if the two resulting groups are, taken together, purer than the one group was. The weighting matters because a split that isolates one awkward point while leaving the rest exactly as mixed as before should not score as well as one that improves the picture broadly.</a:t>
+              <a:t>Set up the idea in words before the formula: a split is only useful if the two resulting groups are, taken together, purer than the one group was. At the root the parent’s impurity is 0.474; the left child’s is 2 × 0.256 × 0.744 = 0.381 (249 of 971 defaulted), the right child’s 2 × 0.939 × 0.061 = 0.115 (215 of 229); averaged with weights 971/1,200 = 0.809 and 229/1,200 = 0.191, 0.308 + 0.022 = 0.330, lower than 0.474. The weighting matters because a split that isolates one awkward point while leaving the rest exactly as mixed as before should not score as well as one that improves the picture broadly.</a:t>
             </a:r>
           </a:p>
           <a:p>
@@ -1482,49 +1483,55 @@
             </a:pPr>
             <a:r>
               <a:rPr/>
-              <a:t>This is the check notebook 1 runs live, and it matters for trust rather than for novelty: once the from-scratch version is shown to agree with scikit-learn exactly, every later result in the lesson - obtained with scikit-learn - inherits that confidence.</a:t>
-            </a:r>
-          </a:p>
-          <a:p>
-            <a:pPr lvl="0" indent="0" marL="0">
-              <a:buNone/>
-            </a:pPr>
-          </a:p>
-          <a:p>
-            <a:pPr lvl="0" indent="0" marL="0">
-              <a:buNone/>
-            </a:pPr>
-            <a:r>
-              <a:rPr/>
-              <a:t>Two questions to pre-empt. Why predictions and not accuracy? Because two different trees can get the same number of applicants wrong while getting different applicants wrong; identical predictions, one by one, rule that out. Identical predictions do not by themselves prove the two trees are identical node by node - two different trees can agree on every row they are shown - but the notebook also prints the same root split, debt ratio at 0.82, from both. And why on the training data, after lesson 5? Because this checks the code, not the model: the question is whether two programs make the same decisions from the same rows, and the rows they learned from are exactly the right ones to ask it on. No accuracy here is a claim about new applicants.</a:t>
-            </a:r>
-          </a:p>
-          <a:p>
-            <a:pPr lvl="0" indent="0" marL="0">
-              <a:buNone/>
-            </a:pPr>
-          </a:p>
-          <a:p>
-            <a:pPr lvl="0" indent="0" marL="0">
-              <a:buNone/>
-            </a:pPr>
-            <a:r>
-              <a:rPr/>
-              <a:t>Point out the “Try this” box in the handout: computing Gini impurity for the income-floor subgroup alone and comparing it against the full dataset’s 0.474 is a two-line exercise that makes the impurity number concrete rather than abstract.</a:t>
-            </a:r>
-          </a:p>
-          <a:p>
-            <a:pPr lvl="0" indent="0" marL="0">
-              <a:buNone/>
-            </a:pPr>
-          </a:p>
-          <a:p>
-            <a:pPr lvl="0" indent="0" marL="0">
-              <a:buNone/>
-            </a:pPr>
-            <a:r>
-              <a:rPr/>
-              <a:t>Handout section 2.2, and the “Try this” box that follows it.</a:t>
+              <a:t>Slides 7 to 17 in one place, as the code of notebook 1 runs it (</a:t>
+            </a:r>
+            <a:r>
+              <a:rPr>
+                <a:latin typeface="Courier"/>
+              </a:rPr>
+              <a:t>build_tree</a:t>
+            </a:r>
+            <a:r>
+              <a:rPr/>
+              <a:t> and </a:t>
+            </a:r>
+            <a:r>
+              <a:rPr>
+                <a:latin typeface="Courier"/>
+              </a:rPr>
+              <a:t>best_split</a:t>
+            </a:r>
+            <a:r>
+              <a:rPr/>
+              <a:t>, section 2). The names, line by line: g is the group being grown; stop(g) is true when the group sits at the depth limit, is pure, or has fewer than 2 examples (slide 7); leaf(g) is a leaf that predicts the group’s majority class; splits(g) lists every candidate, a feature with one of its midpoint thresholds (slide 14); ΔG(g, c) is slide 13’s formula on the two groups candidate c would make; max with key=gain.get picks the candidate with the largest gain; split makes the two groups, L and R as on slide 12; node keeps the question and its two subtrees. Read it top to bottom with the room and point at where ΔG does its two jobs, both at one node at a time. It ranks that node’s candidates - the largest wins. And it decides whether to split at all - if nothing gains, the node is a leaf.</a:t>
+            </a:r>
+          </a:p>
+          <a:p>
+            <a:pPr lvl="0" indent="0" marL="0">
+              <a:buNone/>
+            </a:pPr>
+          </a:p>
+          <a:p>
+            <a:pPr lvl="0" indent="0" marL="0">
+              <a:buNone/>
+            </a:pPr>
+            <a:r>
+              <a:rPr/>
+              <a:t>Then the recursion, which is the line students skip: each child calls grow on its own examples, with its own G as the parent’s and its own size as m. ΔG is never added up across nodes or compared between them. Walk slide 8’s tree through it: the root, 2,234 candidates, the best gains 0.1438; the left group of 971 runs the loop again and its best gains 0.0836; the right group of 229 runs it and its best gains 0.0026, small but above 0, so the split is made; at depth 3 every call stops on the first line.</a:t>
+            </a:r>
+          </a:p>
+          <a:p>
+            <a:pPr lvl="0" indent="0" marL="0">
+              <a:buNone/>
+            </a:pPr>
+          </a:p>
+          <a:p>
+            <a:pPr lvl="0" indent="0" marL="0">
+              <a:buNone/>
+            </a:pPr>
+            <a:r>
+              <a:rPr/>
+              <a:t>Handout section 2.1.</a:t>
             </a:r>
           </a:p>
         </p:txBody>
@@ -1606,43 +1613,49 @@
             </a:pPr>
             <a:r>
               <a:rPr/>
-              <a:t>Close the Gini segment with the limitation, because it sets up everything that follows. Ask the room: if the debt ceiling and the income floor are the two easiest wins, what happens to the two interior islands, which need </a:t>
-            </a:r>
-            <a:r>
-              <a:rPr i="1"/>
-              <a:t>two</a:t>
-            </a:r>
-            <a:r>
-              <a:rPr/>
-              <a:t> conditions at once to identify?</a:t>
-            </a:r>
-          </a:p>
-          <a:p>
-            <a:pPr lvl="0" indent="0" marL="0">
-              <a:buNone/>
-            </a:pPr>
-          </a:p>
-          <a:p>
-            <a:pPr lvl="0" indent="0" marL="0">
-              <a:buNone/>
-            </a:pPr>
-            <a:r>
-              <a:rPr/>
-              <a:t>The honest answer is that a shallow tree simply cannot see them - not because the information isn’t there, but because greedy search only ever commits to the best split available at each individual step. Depth is what buys the tree enough steps to eventually stumble onto them, which is exactly where the next segment goes.</a:t>
-            </a:r>
-          </a:p>
-          <a:p>
-            <a:pPr lvl="0" indent="0" marL="0">
-              <a:buNone/>
-            </a:pPr>
-          </a:p>
-          <a:p>
-            <a:pPr lvl="0" indent="0" marL="0">
-              <a:buNone/>
-            </a:pPr>
-            <a:r>
-              <a:rPr/>
-              <a:t>Handout sections 2.2 and 3.</a:t>
+              <a:t>This is the check notebook 1 runs live, and it matters for trust rather than for novelty: once the from-scratch version is shown to agree with scikit-learn exactly, every later result in the lesson - obtained with scikit-learn - inherits that confidence.</a:t>
+            </a:r>
+          </a:p>
+          <a:p>
+            <a:pPr lvl="0" indent="0" marL="0">
+              <a:buNone/>
+            </a:pPr>
+          </a:p>
+          <a:p>
+            <a:pPr lvl="0" indent="0" marL="0">
+              <a:buNone/>
+            </a:pPr>
+            <a:r>
+              <a:rPr/>
+              <a:t>Two questions to pre-empt. Why predictions and not accuracy? Because two different trees can get the same number of applicants wrong while getting different applicants wrong; identical predictions, one by one, rule that out. Identical predictions do not by themselves prove the two trees are identical node by node - two different trees can agree on every row they are shown - but the notebook also prints the same root split, debt ratio at 0.82, from both. And why on the training data, after lesson 5? Because this checks the code, not the model: the question is whether two programs make the same decisions from the same rows, and the rows they learned from are exactly the right ones to ask it on. No accuracy here is a claim about new applicants.</a:t>
+            </a:r>
+          </a:p>
+          <a:p>
+            <a:pPr lvl="0" indent="0" marL="0">
+              <a:buNone/>
+            </a:pPr>
+          </a:p>
+          <a:p>
+            <a:pPr lvl="0" indent="0" marL="0">
+              <a:buNone/>
+            </a:pPr>
+            <a:r>
+              <a:rPr/>
+              <a:t>Point out the “Try this” box in the handout: computing Gini impurity for the income-floor subgroup alone and comparing it against the full dataset’s 0.474 is a two-line exercise that makes the impurity number concrete rather than abstract.</a:t>
+            </a:r>
+          </a:p>
+          <a:p>
+            <a:pPr lvl="0" indent="0" marL="0">
+              <a:buNone/>
+            </a:pPr>
+          </a:p>
+          <a:p>
+            <a:pPr lvl="0" indent="0" marL="0">
+              <a:buNone/>
+            </a:pPr>
+            <a:r>
+              <a:rPr/>
+              <a:t>Handout section 2.2, and the “Try this” box that follows it.</a:t>
             </a:r>
           </a:p>
         </p:txBody>
@@ -1724,35 +1737,43 @@
             </a:pPr>
             <a:r>
               <a:rPr/>
-              <a:t>Name the dial explicitly and connect it to lesson 6: k in k-nearest neighbours traded bias against variance directly, and depth is a tree’s version of the same knob.</a:t>
-            </a:r>
-          </a:p>
-          <a:p>
-            <a:pPr lvl="0" indent="0" marL="0">
-              <a:buNone/>
-            </a:pPr>
-          </a:p>
-          <a:p>
-            <a:pPr lvl="0" indent="0" marL="0">
-              <a:buNone/>
-            </a:pPr>
-            <a:r>
-              <a:rPr/>
-              <a:t>The training-accuracy-1.000 claim is the one to make them justify. Ask why an unconstrained tree gets every training point right - the answer is that splitting does not have to stop until every leaf is pure, at worst one example per leaf, which it then “predicts” perfectly by definition. The one exception is the condition on the slide: two applicants with identical income and debt but different outcomes can never be split apart, so one of them stays wrong. With two continuous features drawn at random, as here, that does not happen. That number demonstrates the model class can memorise, not that anything has been learned - the same reading lesson 6 gave k = 1’s training accuracy.</a:t>
-            </a:r>
-          </a:p>
-          <a:p>
-            <a:pPr lvl="0" indent="0" marL="0">
-              <a:buNone/>
-            </a:pPr>
-          </a:p>
-          <a:p>
-            <a:pPr lvl="0" indent="0" marL="0">
-              <a:buNone/>
-            </a:pPr>
-            <a:r>
-              <a:rPr/>
-              <a:t>Handout section 3.</a:t>
+              <a:t>Close the Gini segment with the limitation, because it sets up everything that follows. Ask the room: if the debt ceiling and the income floor are the two easiest wins, what happens to the two interior islands, which need </a:t>
+            </a:r>
+            <a:r>
+              <a:rPr i="1"/>
+              <a:t>two</a:t>
+            </a:r>
+            <a:r>
+              <a:rPr/>
+              <a:t> conditions at once to identify?</a:t>
+            </a:r>
+          </a:p>
+          <a:p>
+            <a:pPr lvl="0" indent="0" marL="0">
+              <a:buNone/>
+            </a:pPr>
+          </a:p>
+          <a:p>
+            <a:pPr lvl="0" indent="0" marL="0">
+              <a:buNone/>
+            </a:pPr>
+            <a:r>
+              <a:rPr/>
+              <a:t>The honest answer is that a shallow tree simply cannot see them - not because the information isn’t there, but because greedy search only ever commits to the best split available at each individual step. Depth is what buys the tree enough steps to eventually stumble onto them, which is exactly where the next segment goes.</a:t>
+            </a:r>
+          </a:p>
+          <a:p>
+            <a:pPr lvl="0" indent="0" marL="0">
+              <a:buNone/>
+            </a:pPr>
+          </a:p>
+          <a:p>
+            <a:pPr lvl="0" indent="0" marL="0">
+              <a:buNone/>
+            </a:pPr>
+            <a:r>
+              <a:rPr/>
+              <a:t>Handout sections 2.2 and 3.</a:t>
             </a:r>
           </a:p>
         </p:txBody>
@@ -1930,43 +1951,35 @@
             </a:pPr>
             <a:r>
               <a:rPr/>
-              <a:t>Read the two columns against each other, never in isolation, exactly as lesson 5 taught. Training accuracy climbs monotonically towards 1.000. Cross-validated accuracy rises, peaks at depth 8, and then falls back - even though the model keeps getting strictly more flexible.</a:t>
-            </a:r>
-          </a:p>
-          <a:p>
-            <a:pPr lvl="0" indent="0" marL="0">
-              <a:buNone/>
-            </a:pPr>
-          </a:p>
-          <a:p>
-            <a:pPr lvl="0" indent="0" marL="0">
-              <a:buNone/>
-            </a:pPr>
-            <a:r>
-              <a:rPr/>
-              <a:t>Ask which column they would have picked a tree by, if they had only seen the training column. The far right, the unconstrained tree, looks unbeatable on that evidence and is in fact the worst honest model on this table.</a:t>
-            </a:r>
-          </a:p>
-          <a:p>
-            <a:pPr lvl="0" indent="0" marL="0">
-              <a:buNone/>
-            </a:pPr>
-          </a:p>
-          <a:p>
-            <a:pPr lvl="0" indent="0" marL="0">
-              <a:buNone/>
-            </a:pPr>
-            <a:r>
-              <a:rPr/>
-              <a:t>The unconstrained tree loses </a:t>
-            </a:r>
-            <a:r>
-              <a:rPr b="1"/>
-              <a:t>3 points</a:t>
-            </a:r>
-            <a:r>
-              <a:rPr/>
-              <a:t> of cross-validated accuracy relative to the depth-8 peak, for a training score nobody should have trusted in the first place. Handout section 3.</a:t>
+              <a:t>Name the dial explicitly and connect it to lesson 6: k in k-nearest neighbours traded bias against variance directly, and depth is a tree’s version of the same knob.</a:t>
+            </a:r>
+          </a:p>
+          <a:p>
+            <a:pPr lvl="0" indent="0" marL="0">
+              <a:buNone/>
+            </a:pPr>
+          </a:p>
+          <a:p>
+            <a:pPr lvl="0" indent="0" marL="0">
+              <a:buNone/>
+            </a:pPr>
+            <a:r>
+              <a:rPr/>
+              <a:t>The training-accuracy-1.000 claim is the one to make them justify. Ask why an unconstrained tree gets every training point right - the answer is that splitting does not have to stop until every leaf is pure, at worst one example per leaf, which it then “predicts” perfectly by definition. The one exception is the condition on the slide: two applicants with identical income and debt but different outcomes can never be split apart, so one of them stays wrong. With two continuous features drawn at random, as here, that does not happen. That number demonstrates the model class can memorise, not that anything has been learned - the same reading lesson 6 gave k = 1’s training accuracy.</a:t>
+            </a:r>
+          </a:p>
+          <a:p>
+            <a:pPr lvl="0" indent="0" marL="0">
+              <a:buNone/>
+            </a:pPr>
+          </a:p>
+          <a:p>
+            <a:pPr lvl="0" indent="0" marL="0">
+              <a:buNone/>
+            </a:pPr>
+            <a:r>
+              <a:rPr/>
+              <a:t>Handout section 3.</a:t>
             </a:r>
           </a:p>
         </p:txBody>
@@ -2048,49 +2061,43 @@
             </a:pPr>
             <a:r>
               <a:rPr/>
-              <a:t>Point at the two curves in order: training climbing steadily towards the top, cross-validated rising and then turning over. The peak is where the tree is deep enough to isolate both stressed islands and shallow enough to leave the flipped labels as errors rather than as leaves of their own.</a:t>
-            </a:r>
-          </a:p>
-          <a:p>
-            <a:pPr lvl="0" indent="0" marL="0">
-              <a:buNone/>
-            </a:pPr>
-          </a:p>
-          <a:p>
-            <a:pPr lvl="0" indent="0" marL="0">
-              <a:buNone/>
-            </a:pPr>
-            <a:r>
-              <a:rPr/>
-              <a:t>Say plainly what past the peak is buying: every extra split is spent fitting some of the 7% of labels this dataset deliberately flips, and a flipped label has no pattern to learn. A tree that classifies it “correctly” on training data has memorised it, not generalised.</a:t>
-            </a:r>
-          </a:p>
-          <a:p>
-            <a:pPr lvl="0" indent="0" marL="0">
-              <a:buNone/>
-            </a:pPr>
-          </a:p>
-          <a:p>
-            <a:pPr lvl="0" indent="0" marL="0">
-              <a:buNone/>
-            </a:pPr>
-            <a:r>
-              <a:rPr/>
-              <a:t>The gold dashed line is the noise ceiling from the dataset slide, 0.93: one minus the 7% of flipped labels.</a:t>
-            </a:r>
-          </a:p>
-          <a:p>
-            <a:pPr lvl="0" indent="0" marL="0">
-              <a:buNone/>
-            </a:pPr>
-          </a:p>
-          <a:p>
-            <a:pPr lvl="0" indent="0" marL="0">
-              <a:buNone/>
-            </a:pPr>
-            <a:r>
-              <a:rPr/>
-              <a:t>This is not the first time this course has shown a curve bend this way: lesson 3’s test error turned back up as the polynomial degree grew, and lesson 6’s k-nearest neighbours did the same as k shrank towards 1. Handout section 3.</a:t>
+              <a:t>Read the two columns against each other, never in isolation, exactly as lesson 5 taught. Training accuracy climbs monotonically towards 1.000. Cross-validated accuracy rises, peaks at depth 8, and then falls back - even though the model keeps getting strictly more flexible.</a:t>
+            </a:r>
+          </a:p>
+          <a:p>
+            <a:pPr lvl="0" indent="0" marL="0">
+              <a:buNone/>
+            </a:pPr>
+          </a:p>
+          <a:p>
+            <a:pPr lvl="0" indent="0" marL="0">
+              <a:buNone/>
+            </a:pPr>
+            <a:r>
+              <a:rPr/>
+              <a:t>Ask which column they would have picked a tree by, if they had only seen the training column. The far right, the unconstrained tree, looks unbeatable on that evidence and is in fact the worst honest model on this table.</a:t>
+            </a:r>
+          </a:p>
+          <a:p>
+            <a:pPr lvl="0" indent="0" marL="0">
+              <a:buNone/>
+            </a:pPr>
+          </a:p>
+          <a:p>
+            <a:pPr lvl="0" indent="0" marL="0">
+              <a:buNone/>
+            </a:pPr>
+            <a:r>
+              <a:rPr/>
+              <a:t>The unconstrained tree loses </a:t>
+            </a:r>
+            <a:r>
+              <a:rPr b="1"/>
+              <a:t>3 points</a:t>
+            </a:r>
+            <a:r>
+              <a:rPr/>
+              <a:t> of cross-validated accuracy relative to the depth-8 peak, for a training score nobody should have trusted in the first place. Handout section 3.</a:t>
             </a:r>
           </a:p>
         </p:txBody>
@@ -2172,35 +2179,49 @@
             </a:pPr>
             <a:r>
               <a:rPr/>
-              <a:t>Left to right: at depth 2 every applicant answers at most two questions. The tree asks three in all - it is exactly the tree of step 2 on slide 8 - but the third, on the right, splits 229 high-debt applicants into two groups that are both predicted “default”, so it changes no prediction and draws no line. What the boundary shows is the income floor and the debt ceiling - the two biggest, easiest-to-find regions - and neither interior island is visible at all. At depth 8 both islands appear as clean rectangles, close to the rule that generated the data. At full depth the boundary has grown a fringe of tiny rectangles chasing individual flipped labels.</a:t>
-            </a:r>
-          </a:p>
-          <a:p>
-            <a:pPr lvl="0" indent="0" marL="0">
-              <a:buNone/>
-            </a:pPr>
-          </a:p>
-          <a:p>
-            <a:pPr lvl="0" indent="0" marL="0">
-              <a:buNone/>
-            </a:pPr>
-            <a:r>
-              <a:rPr/>
-              <a:t>Make the point explicit: the full-depth boundary is not a smoother version of the depth-8 boundary. It is a noisier one, built out of the same mechanism that gave the unconstrained tree its perfect training score.</a:t>
-            </a:r>
-          </a:p>
-          <a:p>
-            <a:pPr lvl="0" indent="0" marL="0">
-              <a:buNone/>
-            </a:pPr>
-          </a:p>
-          <a:p>
-            <a:pPr lvl="0" indent="0" marL="0">
-              <a:buNone/>
-            </a:pPr>
-            <a:r>
-              <a:rPr/>
-              <a:t>Ask the room which of the three they would trust on a loan applicant they had never seen. Handout section 3.</a:t>
+              <a:t>Point at the two curves in order: training climbing steadily towards the top, cross-validated rising and then turning over. The peak is where the tree is deep enough to isolate both stressed islands and shallow enough to leave the flipped labels as errors rather than as leaves of their own.</a:t>
+            </a:r>
+          </a:p>
+          <a:p>
+            <a:pPr lvl="0" indent="0" marL="0">
+              <a:buNone/>
+            </a:pPr>
+          </a:p>
+          <a:p>
+            <a:pPr lvl="0" indent="0" marL="0">
+              <a:buNone/>
+            </a:pPr>
+            <a:r>
+              <a:rPr/>
+              <a:t>Say plainly what past the peak is buying: every extra split is spent fitting some of the 7% of labels this dataset deliberately flips, and a flipped label has no pattern to learn. A tree that classifies it “correctly” on training data has memorised it, not generalised.</a:t>
+            </a:r>
+          </a:p>
+          <a:p>
+            <a:pPr lvl="0" indent="0" marL="0">
+              <a:buNone/>
+            </a:pPr>
+          </a:p>
+          <a:p>
+            <a:pPr lvl="0" indent="0" marL="0">
+              <a:buNone/>
+            </a:pPr>
+            <a:r>
+              <a:rPr/>
+              <a:t>The gold dashed line is the noise ceiling from the dataset slide, 0.93: one minus the 7% of flipped labels.</a:t>
+            </a:r>
+          </a:p>
+          <a:p>
+            <a:pPr lvl="0" indent="0" marL="0">
+              <a:buNone/>
+            </a:pPr>
+          </a:p>
+          <a:p>
+            <a:pPr lvl="0" indent="0" marL="0">
+              <a:buNone/>
+            </a:pPr>
+            <a:r>
+              <a:rPr/>
+              <a:t>This is not the first time this course has shown a curve bend this way: lesson 3’s test error turned back up as the polynomial degree grew, and lesson 6’s k-nearest neighbours did the same as k shrank towards 1. Handout section 3.</a:t>
             </a:r>
           </a:p>
         </p:txBody>
@@ -2282,35 +2303,35 @@
             </a:pPr>
             <a:r>
               <a:rPr/>
-              <a:t>This is the readability half of the story. The two knobs limit different things. A depth cap limits how long any one path can be, and inside that cap every node that can be split is split - slide 23’s depth-2 tree spent one of its three questions on a split that changed no prediction. A leaf budget limits how many leaves the whole tree may have, and spends them one at a time on whichever leaf gains most. For a tree meant to be read rather than merely scored, the budget is the better knob: a small number of splits goes to the ones that matter most.</a:t>
-            </a:r>
-          </a:p>
-          <a:p>
-            <a:pPr lvl="0" indent="0" marL="0">
-              <a:buNone/>
-            </a:pPr>
-          </a:p>
-          <a:p>
-            <a:pPr lvl="0" indent="0" marL="0">
-              <a:buNone/>
-            </a:pPr>
-            <a:r>
-              <a:rPr/>
-              <a:t>The nine-leaf tree is worth reading aloud as a sequence of if/else statements - that is the entire model, and it is the thing k-nearest neighbours and support vector machines cannot offer at all. For a decision that has to be justified to the person it affects, that can matter as much as accuracy.</a:t>
-            </a:r>
-          </a:p>
-          <a:p>
-            <a:pPr lvl="0" indent="0" marL="0">
-              <a:buNone/>
-            </a:pPr>
-          </a:p>
-          <a:p>
-            <a:pPr lvl="0" indent="0" marL="0">
-              <a:buNone/>
-            </a:pPr>
-            <a:r>
-              <a:rPr/>
-              <a:t>Handout section 4.</a:t>
+              <a:t>Left to right: at depth 2 every applicant answers at most two questions. The tree asks three in all - it is exactly the tree of step 2 on slide 8 - but the third, on the right, splits 229 high-debt applicants into two groups that are both predicted “default”, so it changes no prediction and draws no line. What the boundary shows is the income floor and the debt ceiling - the two biggest, easiest-to-find regions - and neither interior island is visible at all. At depth 8 both islands appear as clean rectangles, close to the rule that generated the data. At full depth the boundary has grown a fringe of tiny rectangles chasing individual flipped labels.</a:t>
+            </a:r>
+          </a:p>
+          <a:p>
+            <a:pPr lvl="0" indent="0" marL="0">
+              <a:buNone/>
+            </a:pPr>
+          </a:p>
+          <a:p>
+            <a:pPr lvl="0" indent="0" marL="0">
+              <a:buNone/>
+            </a:pPr>
+            <a:r>
+              <a:rPr/>
+              <a:t>Make the point explicit: the full-depth boundary is not a smoother version of the depth-8 boundary. It is a noisier one, built out of the same mechanism that gave the unconstrained tree its perfect training score.</a:t>
+            </a:r>
+          </a:p>
+          <a:p>
+            <a:pPr lvl="0" indent="0" marL="0">
+              <a:buNone/>
+            </a:pPr>
+          </a:p>
+          <a:p>
+            <a:pPr lvl="0" indent="0" marL="0">
+              <a:buNone/>
+            </a:pPr>
+            <a:r>
+              <a:rPr/>
+              <a:t>Ask the room which of the three they would trust on a loan applicant they had never seen. Handout section 3.</a:t>
             </a:r>
           </a:p>
         </p:txBody>
@@ -2392,21 +2413,21 @@
             </a:pPr>
             <a:r>
               <a:rPr/>
-              <a:t>This is the instability that ensembles turn into raw material. The strongest split barely moves between the two samples, 0.820 against 0.819, because the evidence behind it is overwhelming: each tree sees 780 applicants, and on the full data the debt ceiling separates 26% default from 94%, a contrast no sample of that size can hide. Every later split is made inside a smaller group, supported by far fewer applicants, and those splits are what actually determine a tree’s shape.</a:t>
-            </a:r>
-          </a:p>
-          <a:p>
-            <a:pPr lvl="0" indent="0" marL="0">
-              <a:buNone/>
-            </a:pPr>
-          </a:p>
-          <a:p>
-            <a:pPr lvl="0" indent="0" marL="0">
-              <a:buNone/>
-            </a:pPr>
-            <a:r>
-              <a:rPr/>
-              <a:t>Ask the room what 11.7% disagreement between two trees fit to overlapping samples of the same applicants implies about trusting any single tree’s exact boundary. The answer is the whole of the next segment: a single tree’s instability looks like a flaw, and it is about to become a strength.</a:t>
+              <a:t>This is the readability half of the story. The two knobs limit different things. A depth cap limits how long any one path can be, and inside that cap every node that can be split is split - slide 24’s depth-2 tree spent one of its three questions on a split that changed no prediction. A leaf budget limits how many leaves the whole tree may have, and spends them one at a time on whichever leaf gains most. For a tree meant to be read rather than merely scored, the budget is the better knob: a small number of splits goes to the ones that matter most.</a:t>
+            </a:r>
+          </a:p>
+          <a:p>
+            <a:pPr lvl="0" indent="0" marL="0">
+              <a:buNone/>
+            </a:pPr>
+          </a:p>
+          <a:p>
+            <a:pPr lvl="0" indent="0" marL="0">
+              <a:buNone/>
+            </a:pPr>
+            <a:r>
+              <a:rPr/>
+              <a:t>The nine-leaf tree is worth reading aloud as a sequence of if/else statements - that is the entire model, and it is the thing k-nearest neighbours and support vector machines cannot offer at all. For a decision that has to be justified to the person it affects, that can matter as much as accuracy.</a:t>
             </a:r>
           </a:p>
           <a:p>
@@ -2502,49 +2523,35 @@
             </a:pPr>
             <a:r>
               <a:rPr/>
-              <a:t>The table is the notebook’s map: each section, the calls it makes, the slides that introduced the idea, and the number to come back with. Decision trees from scratch, checked against scikit-learn; depth swept, the boundaries drawn, and the instability measured.</a:t>
-            </a:r>
-          </a:p>
-          <a:p>
-            <a:pPr lvl="0" indent="0" marL="0">
-              <a:buNone/>
-            </a:pPr>
-          </a:p>
-          <a:p>
-            <a:pPr lvl="0" indent="0" marL="0">
-              <a:buNone/>
-            </a:pPr>
-            <a:r>
-              <a:rPr/>
-              <a:t>Run Notebooks/01_decision_trees_from_scratch.ipynb. Twenty minutes.</a:t>
-            </a:r>
-          </a:p>
-          <a:p>
-            <a:pPr lvl="0" indent="0" marL="0">
-              <a:buNone/>
-            </a:pPr>
-          </a:p>
-          <a:p>
-            <a:pPr lvl="0" indent="0" marL="0">
-              <a:buNone/>
-            </a:pPr>
-            <a:r>
-              <a:rPr/>
-              <a:t>Have them watch the from-scratch implementation confirm the debt-ceiling root split before scikit-learn’s version ever runs - the point is that the agreement is not assumed, it is checked, at every depth.</a:t>
-            </a:r>
-          </a:p>
-          <a:p>
-            <a:pPr lvl="0" indent="0" marL="0">
-              <a:buNone/>
-            </a:pPr>
-          </a:p>
-          <a:p>
-            <a:pPr lvl="0" indent="0" marL="0">
-              <a:buNone/>
-            </a:pPr>
-            <a:r>
-              <a:rPr/>
-              <a:t>The cell worth protecting if time is short is the two-tree resampling comparison at the end: the notebook prints an agreement of 0.883, which is the 11.7% disagreement of the previous slide, and seeing it appear on their own screen lands harder than reading it off a slide.</a:t>
+              <a:t>This is the instability that ensembles turn into raw material. The strongest split barely moves between the two samples, 0.820 against 0.819, because the evidence behind it is overwhelming: each tree sees 780 applicants, and on the full data the debt ceiling separates 26% default from 94%, a contrast no sample of that size can hide. Every later split is made inside a smaller group, supported by far fewer applicants, and those splits are what actually determine a tree’s shape.</a:t>
+            </a:r>
+          </a:p>
+          <a:p>
+            <a:pPr lvl="0" indent="0" marL="0">
+              <a:buNone/>
+            </a:pPr>
+          </a:p>
+          <a:p>
+            <a:pPr lvl="0" indent="0" marL="0">
+              <a:buNone/>
+            </a:pPr>
+            <a:r>
+              <a:rPr/>
+              <a:t>Ask the room what 11.7% disagreement between two trees fit to overlapping samples of the same applicants implies about trusting any single tree’s exact boundary. The answer is the whole of the next segment: a single tree’s instability looks like a flaw, and it is about to become a strength.</a:t>
+            </a:r>
+          </a:p>
+          <a:p>
+            <a:pPr lvl="0" indent="0" marL="0">
+              <a:buNone/>
+            </a:pPr>
+          </a:p>
+          <a:p>
+            <a:pPr lvl="0" indent="0" marL="0">
+              <a:buNone/>
+            </a:pPr>
+            <a:r>
+              <a:rPr/>
+              <a:t>Handout section 4.</a:t>
             </a:r>
           </a:p>
         </p:txBody>
@@ -2626,7 +2633,49 @@
             </a:pPr>
             <a:r>
               <a:rPr/>
-              <a:t>Twelve minutes. The next segment is where the lesson’s real content starts - one tree’s instability, turned into an ensemble’s strength - so they need to come back with that framing fresh.</a:t>
+              <a:t>The table is the notebook’s map: each section, the calls it makes, the slides that introduced the idea, and the number to come back with. Decision trees from scratch, checked against scikit-learn; depth swept, the boundaries drawn, and the instability measured.</a:t>
+            </a:r>
+          </a:p>
+          <a:p>
+            <a:pPr lvl="0" indent="0" marL="0">
+              <a:buNone/>
+            </a:pPr>
+          </a:p>
+          <a:p>
+            <a:pPr lvl="0" indent="0" marL="0">
+              <a:buNone/>
+            </a:pPr>
+            <a:r>
+              <a:rPr/>
+              <a:t>Run Notebooks/01_decision_trees_from_scratch.ipynb. Twenty minutes.</a:t>
+            </a:r>
+          </a:p>
+          <a:p>
+            <a:pPr lvl="0" indent="0" marL="0">
+              <a:buNone/>
+            </a:pPr>
+          </a:p>
+          <a:p>
+            <a:pPr lvl="0" indent="0" marL="0">
+              <a:buNone/>
+            </a:pPr>
+            <a:r>
+              <a:rPr/>
+              <a:t>Have them watch the from-scratch implementation confirm the debt-ceiling root split before scikit-learn’s version ever runs - the point is that the agreement is not assumed, it is checked, at every depth.</a:t>
+            </a:r>
+          </a:p>
+          <a:p>
+            <a:pPr lvl="0" indent="0" marL="0">
+              <a:buNone/>
+            </a:pPr>
+          </a:p>
+          <a:p>
+            <a:pPr lvl="0" indent="0" marL="0">
+              <a:buNone/>
+            </a:pPr>
+            <a:r>
+              <a:rPr/>
+              <a:t>The cell worth protecting if time is short is the two-tree resampling comparison at the end: the notebook prints an agreement of 0.883, which is the 11.7% disagreement of the previous slide, and seeing it appear on their own screen lands harder than reading it off a slide.</a:t>
             </a:r>
           </a:p>
         </p:txBody>
@@ -2708,73 +2757,7 @@
             </a:pPr>
             <a:r>
               <a:rPr/>
-              <a:t>State the logic before the name. Two slides before the break measured that two trees fit to overlapping samples disagree on more than a tenth of predictions. If those disagreements are close to random, averaging many such trees should cancel some of them out - that is the entire idea behind bagging, bootstrap aggregating.</a:t>
-            </a:r>
-          </a:p>
-          <a:p>
-            <a:pPr lvl="0" indent="0" marL="0">
-              <a:buNone/>
-            </a:pPr>
-          </a:p>
-          <a:p>
-            <a:pPr lvl="0" indent="0" marL="0">
-              <a:buNone/>
-            </a:pPr>
-            <a:r>
-              <a:rPr/>
-              <a:t>Say that the tree algorithm itself is unchanged: bagging reuses the first hour’s tree as it is, and only what surrounds it is new.</a:t>
-            </a:r>
-          </a:p>
-          <a:p>
-            <a:pPr lvl="0" indent="0" marL="0">
-              <a:buNone/>
-            </a:pPr>
-          </a:p>
-          <a:p>
-            <a:pPr lvl="0" indent="0" marL="0">
-              <a:buNone/>
-            </a:pPr>
-            <a:r>
-              <a:rPr/>
-              <a:t>Be precise about “with replacement”: some rows appear more than once in a given sample, some not at all. That leftover fraction is not wasted - it becomes free validation data, on slide 31.</a:t>
-            </a:r>
-          </a:p>
-          <a:p>
-            <a:pPr lvl="0" indent="0" marL="0">
-              <a:buNone/>
-            </a:pPr>
-          </a:p>
-          <a:p>
-            <a:pPr lvl="0" indent="0" marL="0">
-              <a:buNone/>
-            </a:pPr>
-            <a:r>
-              <a:rPr/>
-              <a:t>One detail of the In code line, if asked: scikit-learn’s </a:t>
-            </a:r>
-            <a:r>
-              <a:rPr>
-                <a:latin typeface="Courier"/>
-              </a:rPr>
-              <a:t>BaggingClassifier</a:t>
-            </a:r>
-            <a:r>
-              <a:rPr/>
-              <a:t> does not count votes, it averages the trees’ predicted probabilities. With fully grown trees the two are the same thing: every leaf is pure, so each tree’s probability is 0 or 1, and averaging 0s and 1s is counting votes. So notebook 2’s own majority-vote version and scikit-learn’s apply the same rule. They do not use the same trees - each draws its own bootstrap samples - and still they make the same prediction for all 360 test applicants, 0.872 both: with 100 trees, the luck of any one sample is outvoted.</a:t>
-            </a:r>
-          </a:p>
-          <a:p>
-            <a:pPr lvl="0" indent="0" marL="0">
-              <a:buNone/>
-            </a:pPr>
-          </a:p>
-          <a:p>
-            <a:pPr lvl="0" indent="0" marL="0">
-              <a:buNone/>
-            </a:pPr>
-            <a:r>
-              <a:rPr/>
-              <a:t>Handout section 5.</a:t>
+              <a:t>Twelve minutes. The next segment is where the lesson’s real content starts - one tree’s instability, turned into an ensemble’s strength - so they need to come back with that framing fresh.</a:t>
             </a:r>
           </a:p>
         </p:txBody>
@@ -2856,49 +2839,73 @@
             </a:pPr>
             <a:r>
               <a:rPr/>
-              <a:t>Give the one line of reasoning, not the limit. Each draw misses a given row with probability 1 - 1/m, and the m draws are independent, so the row is missed by all of them with probability (1 - 1/m) to the power m. At m = 1,200 that is 0.3677; as m grows it tends to 1/e, 0.368, which is the standard exponential limit worked out in handout section 5.1. What matters here is the consequence: every bootstrap tree automatically leaves out over a third of the rows, and never sees them.</a:t>
-            </a:r>
-          </a:p>
-          <a:p>
-            <a:pPr lvl="0" indent="0" marL="0">
-              <a:buNone/>
-            </a:pPr>
-          </a:p>
-          <a:p>
-            <a:pPr lvl="0" indent="0" marL="0">
-              <a:buNone/>
-            </a:pPr>
-            <a:r>
-              <a:rPr/>
-              <a:t>A predictable slip: “so each tree is trained on 63.2% of the data, 759 rows”. It is reasonable, because 63.2% is the number on the slide. But the sample still has 1,200 draws: about 759 different rows, and the other 441 draws are repeats of rows already drawn. The tree sees 1,200 rows, some of them twice or three times - the next slide counts them.</a:t>
-            </a:r>
-          </a:p>
-          <a:p>
-            <a:pPr lvl="0" indent="0" marL="0">
-              <a:buNone/>
-            </a:pPr>
-          </a:p>
-          <a:p>
-            <a:pPr lvl="0" indent="0" marL="0">
-              <a:buNone/>
-            </a:pPr>
-            <a:r>
-              <a:rPr/>
-              <a:t>Ask the room what that leftover third is good for. The answer is slide 31, after the counts: it is validation data for exactly the trees that never saw it.</a:t>
-            </a:r>
-          </a:p>
-          <a:p>
-            <a:pPr lvl="0" indent="0" marL="0">
-              <a:buNone/>
-            </a:pPr>
-          </a:p>
-          <a:p>
-            <a:pPr lvl="0" indent="0" marL="0">
-              <a:buNone/>
-            </a:pPr>
-            <a:r>
-              <a:rPr/>
-              <a:t>Handout section 5.1.</a:t>
+              <a:t>State the logic before the name. Two slides before the break measured that two trees fit to overlapping samples disagree on more than a tenth of predictions. If those disagreements are close to random, averaging many such trees should cancel some of them out - that is the entire idea behind bagging, bootstrap aggregating.</a:t>
+            </a:r>
+          </a:p>
+          <a:p>
+            <a:pPr lvl="0" indent="0" marL="0">
+              <a:buNone/>
+            </a:pPr>
+          </a:p>
+          <a:p>
+            <a:pPr lvl="0" indent="0" marL="0">
+              <a:buNone/>
+            </a:pPr>
+            <a:r>
+              <a:rPr/>
+              <a:t>Say that the tree algorithm itself is unchanged: bagging reuses the first hour’s tree as it is, and only what surrounds it is new.</a:t>
+            </a:r>
+          </a:p>
+          <a:p>
+            <a:pPr lvl="0" indent="0" marL="0">
+              <a:buNone/>
+            </a:pPr>
+          </a:p>
+          <a:p>
+            <a:pPr lvl="0" indent="0" marL="0">
+              <a:buNone/>
+            </a:pPr>
+            <a:r>
+              <a:rPr/>
+              <a:t>Be precise about “with replacement”: some rows appear more than once in a given sample, some not at all. That leftover fraction is not wasted - it becomes free validation data, on slide 32.</a:t>
+            </a:r>
+          </a:p>
+          <a:p>
+            <a:pPr lvl="0" indent="0" marL="0">
+              <a:buNone/>
+            </a:pPr>
+          </a:p>
+          <a:p>
+            <a:pPr lvl="0" indent="0" marL="0">
+              <a:buNone/>
+            </a:pPr>
+            <a:r>
+              <a:rPr/>
+              <a:t>One detail of the In code line, if asked: scikit-learn’s </a:t>
+            </a:r>
+            <a:r>
+              <a:rPr>
+                <a:latin typeface="Courier"/>
+              </a:rPr>
+              <a:t>BaggingClassifier</a:t>
+            </a:r>
+            <a:r>
+              <a:rPr/>
+              <a:t> does not count votes, it averages the trees’ predicted probabilities. With fully grown trees the two are the same thing: every leaf is pure, so each tree’s probability is 0 or 1, and averaging 0s and 1s is counting votes. So notebook 2’s own majority-vote version and scikit-learn’s apply the same rule. They do not use the same trees - each draws its own bootstrap samples - and still they make the same prediction for all 360 test applicants, 0.872 both: with 100 trees, the luck of any one sample is outvoted.</a:t>
+            </a:r>
+          </a:p>
+          <a:p>
+            <a:pPr lvl="0" indent="0" marL="0">
+              <a:buNone/>
+            </a:pPr>
+          </a:p>
+          <a:p>
+            <a:pPr lvl="0" indent="0" marL="0">
+              <a:buNone/>
+            </a:pPr>
+            <a:r>
+              <a:rPr/>
+              <a:t>Handout section 5.</a:t>
             </a:r>
           </a:p>
         </p:txBody>
@@ -2980,35 +2987,49 @@
             </a:pPr>
             <a:r>
               <a:rPr/>
-              <a:t>How often each of the 1,200 loans turns up in one bootstrap sample, blue, against the limit e^-1 / k!, gold. The first bar is the out-of-bag share: 0.366 here, 0.368 in the limit. The rest are rows drawn once, twice, three times.</a:t>
-            </a:r>
-          </a:p>
-          <a:p>
-            <a:pPr lvl="0" indent="0" marL="0">
-              <a:buNone/>
-            </a:pPr>
-          </a:p>
-          <a:p>
-            <a:pPr lvl="0" indent="0" marL="0">
-              <a:buNone/>
-            </a:pPr>
-            <a:r>
-              <a:rPr/>
-              <a:t>Where the gold bars come from, if asked: the number of times one row is drawn counts successes in 1,200 draws, each with probability 1/1,200. As the number of draws grows with the chance kept at one per row, that count follows the Poisson distribution with mean 1, which gives a fraction e^-1 / k! of rows drawn exactly k times: 0.368 never, 0.368 once, 0.184 twice, 0.061 three times.</a:t>
-            </a:r>
-          </a:p>
-          <a:p>
-            <a:pPr lvl="0" indent="0" marL="0">
-              <a:buNone/>
-            </a:pPr>
-          </a:p>
-          <a:p>
-            <a:pPr lvl="0" indent="0" marL="0">
-              <a:buNone/>
-            </a:pPr>
-            <a:r>
-              <a:rPr/>
-              <a:t>The point to make: about one row in four appears two or more times. Every tree sees a different mix of repeats and absences, and that is where their disagreement - the raw material of bagging - comes from. Handout section 5.1.</a:t>
+              <a:t>Give the one line of reasoning, not the limit. Each draw misses a given row with probability 1 - 1/m, and the m draws are independent, so the row is missed by all of them with probability (1 - 1/m) to the power m. At m = 1,200 that is 0.3677; as m grows it tends to 1/e, 0.368, which is the standard exponential limit worked out in handout section 5.1. What matters here is the consequence: every bootstrap tree automatically leaves out over a third of the rows, and never sees them.</a:t>
+            </a:r>
+          </a:p>
+          <a:p>
+            <a:pPr lvl="0" indent="0" marL="0">
+              <a:buNone/>
+            </a:pPr>
+          </a:p>
+          <a:p>
+            <a:pPr lvl="0" indent="0" marL="0">
+              <a:buNone/>
+            </a:pPr>
+            <a:r>
+              <a:rPr/>
+              <a:t>A predictable slip: “so each tree is trained on 63.2% of the data, 759 rows”. It is reasonable, because 63.2% is the number on the slide. But the sample still has 1,200 draws: about 759 different rows, and the other 441 draws are repeats of rows already drawn. The tree sees 1,200 rows, some of them twice or three times - the next slide counts them.</a:t>
+            </a:r>
+          </a:p>
+          <a:p>
+            <a:pPr lvl="0" indent="0" marL="0">
+              <a:buNone/>
+            </a:pPr>
+          </a:p>
+          <a:p>
+            <a:pPr lvl="0" indent="0" marL="0">
+              <a:buNone/>
+            </a:pPr>
+            <a:r>
+              <a:rPr/>
+              <a:t>Ask the room what that leftover third is good for. The answer is slide 32, after the counts: it is validation data for exactly the trees that never saw it.</a:t>
+            </a:r>
+          </a:p>
+          <a:p>
+            <a:pPr lvl="0" indent="0" marL="0">
+              <a:buNone/>
+            </a:pPr>
+          </a:p>
+          <a:p>
+            <a:pPr lvl="0" indent="0" marL="0">
+              <a:buNone/>
+            </a:pPr>
+            <a:r>
+              <a:rPr/>
+              <a:t>Handout section 5.1.</a:t>
             </a:r>
           </a:p>
         </p:txBody>
@@ -3214,81 +3235,35 @@
             </a:pPr>
             <a:r>
               <a:rPr/>
-              <a:t>The forest here comes four slides before its definition: a random forest is bagging with one extra rule, which slide 35 gives, and scikit-learn computes the OOB score for it with </a:t>
-            </a:r>
-            <a:r>
-              <a:rPr>
-                <a:latin typeface="Courier"/>
-              </a:rPr>
-              <a:t>oob_score=True</a:t>
-            </a:r>
-            <a:r>
-              <a:rPr/>
-              <a:t>. For this slide, read it as “300 bagged trees”.</a:t>
-            </a:r>
-          </a:p>
-          <a:p>
-            <a:pPr lvl="0" indent="0" marL="0">
-              <a:buNone/>
-            </a:pPr>
-          </a:p>
-          <a:p>
-            <a:pPr lvl="0" indent="0" marL="0">
-              <a:buNone/>
-            </a:pPr>
-            <a:r>
-              <a:rPr/>
-              <a:t>The agreement is the point, but be careful how you sell it. On this seed the two numbers match to four decimal places, and that is luck: over twelve seeds the typical gap is 0.0026 and the worst is 0.0075. What is not luck is that they track each other well inside cross-validation’s own ±0.021 spread, because the OOB score works like cross-validation: every row is scored only by models that never saw it. The bookkeeping differs. In 5-fold cross-validation each fold is scored by a whole forest trained without that fold. Out-of-bag, each row is scored by the trees whose bootstrap sample missed it - about a third of the forest, and a different third for each row. There is no single out-of-bag set.</a:t>
-            </a:r>
-          </a:p>
-          <a:p>
-            <a:pPr lvl="0" indent="0" marL="0">
-              <a:buNone/>
-            </a:pPr>
-          </a:p>
-          <a:p>
-            <a:pPr lvl="0" indent="0" marL="0">
-              <a:buNone/>
-            </a:pPr>
-            <a:r>
-              <a:rPr/>
-              <a:t>Worth pausing on, because it is a habit rather than a fact: </a:t>
-            </a:r>
-            <a:r>
-              <a:rPr b="1"/>
-              <a:t>a single coincidence is not evidence of a law.</a:t>
-            </a:r>
-            <a:r>
-              <a:rPr/>
-              <a:t> If you catch yourself saying “exactly”, run it again with another seed. They will need that reflex in their own exercises, and it is cheaper to learn it here.</a:t>
-            </a:r>
-          </a:p>
-          <a:p>
-            <a:pPr lvl="0" indent="0" marL="0">
-              <a:buNone/>
-            </a:pPr>
-          </a:p>
-          <a:p>
-            <a:pPr lvl="0" indent="0" marL="0">
-              <a:buNone/>
-            </a:pPr>
-            <a:r>
-              <a:rPr/>
-              <a:t>Then make the practical consequence explicit: with a bagged ensemble you get a trustworthy estimate of generalisation for free, without setting aside a separate validation set at all - just not one to read to the fourth decimal.</a:t>
-            </a:r>
-          </a:p>
-          <a:p>
-            <a:pPr lvl="0" indent="0" marL="0">
-              <a:buNone/>
-            </a:pPr>
-          </a:p>
-          <a:p>
-            <a:pPr lvl="0" indent="0" marL="0">
-              <a:buNone/>
-            </a:pPr>
-            <a:r>
-              <a:rPr/>
-              <a:t>Handout section 5.1.</a:t>
+              <a:t>How often each of the 1,200 loans turns up in one bootstrap sample, blue, against the limit e^-1 / k!, gold. The first bar is the out-of-bag share: 0.366 here, 0.368 in the limit. The rest are rows drawn once, twice, three times.</a:t>
+            </a:r>
+          </a:p>
+          <a:p>
+            <a:pPr lvl="0" indent="0" marL="0">
+              <a:buNone/>
+            </a:pPr>
+          </a:p>
+          <a:p>
+            <a:pPr lvl="0" indent="0" marL="0">
+              <a:buNone/>
+            </a:pPr>
+            <a:r>
+              <a:rPr/>
+              <a:t>Where the gold bars come from, if asked: the number of times one row is drawn counts successes in 1,200 draws, each with probability 1/1,200. As the number of draws grows with the chance kept at one per row, that count follows the Poisson distribution with mean 1, which gives a fraction e^-1 / k! of rows drawn exactly k times: 0.368 never, 0.368 once, 0.184 twice, 0.061 three times.</a:t>
+            </a:r>
+          </a:p>
+          <a:p>
+            <a:pPr lvl="0" indent="0" marL="0">
+              <a:buNone/>
+            </a:pPr>
+          </a:p>
+          <a:p>
+            <a:pPr lvl="0" indent="0" marL="0">
+              <a:buNone/>
+            </a:pPr>
+            <a:r>
+              <a:rPr/>
+              <a:t>The point to make: about one row in four appears two or more times. Every tree sees a different mix of repeats and absences, and that is where their disagreement - the raw material of bagging - comes from. Handout section 5.1.</a:t>
             </a:r>
           </a:p>
         </p:txBody>
@@ -3370,35 +3345,81 @@
             </a:pPr>
             <a:r>
               <a:rPr/>
-              <a:t>State the headline, not the algebra - the covariance expansion behind this is in handout section 5.2, and it does not belong on a slide. Read the formula on the slide in two pieces: the first term, sigma squared over B, shrinks as trees are added; the second, (B - 1)/B times rho sigma squared, grows towards rho sigma squared and stays there. The two consequences are what matter: there is a floor variance cannot fall below, set by how correlated the trees are with each other, and averaging is a variance tool only, powerless against a systematic mistake shared by every tree.</a:t>
-            </a:r>
-          </a:p>
-          <a:p>
-            <a:pPr lvl="0" indent="0" marL="0">
-              <a:buNone/>
-            </a:pPr>
-          </a:p>
-          <a:p>
-            <a:pPr lvl="0" indent="0" marL="0">
-              <a:buNone/>
-            </a:pPr>
-            <a:r>
-              <a:rPr/>
-              <a:t>That second point is worth a beat: bagging does nothing for a tree that is too shallow to represent the rule in the first place. It cleans up noise, it does not add capability. The bullet is worded with care on purpose. For an average of numbers, averaging leaves the bias exactly where it was. A vote between classifiers is not an average of numbers, and it can change which side of the boundary a point falls on - which is why, two slides on, bagging raises the mean accuracy and not only narrows the spread. What no amount of voting can do is fix a mistake that every tree makes.</a:t>
-            </a:r>
-          </a:p>
-          <a:p>
-            <a:pPr lvl="0" indent="0" marL="0">
-              <a:buNone/>
-            </a:pPr>
-          </a:p>
-          <a:p>
-            <a:pPr lvl="0" indent="0" marL="0">
-              <a:buNone/>
-            </a:pPr>
-            <a:r>
-              <a:rPr/>
-              <a:t>Handout section 5.2.</a:t>
+              <a:t>The forest here comes four slides before its definition: a random forest is bagging with one extra rule, which slide 36 gives, and scikit-learn computes the OOB score for it with </a:t>
+            </a:r>
+            <a:r>
+              <a:rPr>
+                <a:latin typeface="Courier"/>
+              </a:rPr>
+              <a:t>oob_score=True</a:t>
+            </a:r>
+            <a:r>
+              <a:rPr/>
+              <a:t>. For this slide, read it as “300 bagged trees”.</a:t>
+            </a:r>
+          </a:p>
+          <a:p>
+            <a:pPr lvl="0" indent="0" marL="0">
+              <a:buNone/>
+            </a:pPr>
+          </a:p>
+          <a:p>
+            <a:pPr lvl="0" indent="0" marL="0">
+              <a:buNone/>
+            </a:pPr>
+            <a:r>
+              <a:rPr/>
+              <a:t>The agreement is the point, but be careful how you sell it. On this seed the two numbers match to four decimal places, and that is luck: over twelve seeds the typical gap is 0.0026 and the worst is 0.0075. What is not luck is that they track each other well inside cross-validation’s own ±0.021 spread, because the OOB score works like cross-validation: every row is scored only by models that never saw it. The bookkeeping differs. In 5-fold cross-validation each fold is scored by a whole forest trained without that fold. Out-of-bag, each row is scored by the trees whose bootstrap sample missed it - about a third of the forest, and a different third for each row. There is no single out-of-bag set.</a:t>
+            </a:r>
+          </a:p>
+          <a:p>
+            <a:pPr lvl="0" indent="0" marL="0">
+              <a:buNone/>
+            </a:pPr>
+          </a:p>
+          <a:p>
+            <a:pPr lvl="0" indent="0" marL="0">
+              <a:buNone/>
+            </a:pPr>
+            <a:r>
+              <a:rPr/>
+              <a:t>Worth pausing on, because it is a habit rather than a fact: </a:t>
+            </a:r>
+            <a:r>
+              <a:rPr b="1"/>
+              <a:t>a single coincidence is not evidence of a law.</a:t>
+            </a:r>
+            <a:r>
+              <a:rPr/>
+              <a:t> If you catch yourself saying “exactly”, run it again with another seed. They will need that reflex in their own exercises, and it is cheaper to learn it here.</a:t>
+            </a:r>
+          </a:p>
+          <a:p>
+            <a:pPr lvl="0" indent="0" marL="0">
+              <a:buNone/>
+            </a:pPr>
+          </a:p>
+          <a:p>
+            <a:pPr lvl="0" indent="0" marL="0">
+              <a:buNone/>
+            </a:pPr>
+            <a:r>
+              <a:rPr/>
+              <a:t>Then make the practical consequence explicit: with a bagged ensemble you get a trustworthy estimate of generalisation for free, without setting aside a separate validation set at all - just not one to read to the fourth decimal.</a:t>
+            </a:r>
+          </a:p>
+          <a:p>
+            <a:pPr lvl="0" indent="0" marL="0">
+              <a:buNone/>
+            </a:pPr>
+          </a:p>
+          <a:p>
+            <a:pPr lvl="0" indent="0" marL="0">
+              <a:buNone/>
+            </a:pPr>
+            <a:r>
+              <a:rPr/>
+              <a:t>Handout section 5.1.</a:t>
             </a:r>
           </a:p>
         </p:txBody>
@@ -3480,21 +3501,35 @@
             </a:pPr>
             <a:r>
               <a:rPr/>
-              <a:t>The previous slide’s formula as curves: the variance of an average of B trees, as a share of one tree’s, for rho = 0, 0.2, 0.5 and 0.8.</a:t>
-            </a:r>
-          </a:p>
-          <a:p>
-            <a:pPr lvl="0" indent="0" marL="0">
-              <a:buNone/>
-            </a:pPr>
-          </a:p>
-          <a:p>
-            <a:pPr lvl="0" indent="0" marL="0">
-              <a:buNone/>
-            </a:pPr>
-            <a:r>
-              <a:rPr/>
-              <a:t>Only the rho = 0 curve goes to zero. Every other one flattens onto its dotted floor: at rho = 0.5, ten trees keep 0.550 of one tree’s variance and a hundred keep 0.505. Ask the room what the curves say about adding trees past fifty - almost nothing - and what the only remaining lever is: lower rho. That is the random forest, two slides on. Handout section 5.2.</a:t>
+              <a:t>State the headline, not the algebra - the covariance expansion behind this is in handout section 5.2, and it does not belong on a slide. Read the formula on the slide in two pieces: the first term, sigma squared over B, shrinks as trees are added; the second, (B - 1)/B times rho sigma squared, grows towards rho sigma squared and stays there. The two consequences are what matter: there is a floor variance cannot fall below, set by how correlated the trees are with each other, and averaging is a variance tool only, powerless against a systematic mistake shared by every tree.</a:t>
+            </a:r>
+          </a:p>
+          <a:p>
+            <a:pPr lvl="0" indent="0" marL="0">
+              <a:buNone/>
+            </a:pPr>
+          </a:p>
+          <a:p>
+            <a:pPr lvl="0" indent="0" marL="0">
+              <a:buNone/>
+            </a:pPr>
+            <a:r>
+              <a:rPr/>
+              <a:t>That second point is worth a beat: bagging does nothing for a tree that is too shallow to represent the rule in the first place. It cleans up noise, it does not add capability. The bullet is worded with care on purpose. For an average of numbers, averaging leaves the bias exactly where it was. A vote between classifiers is not an average of numbers, and it can change which side of the boundary a point falls on - which is why, two slides on, bagging raises the mean accuracy and not only narrows the spread. What no amount of voting can do is fix a mistake that every tree makes.</a:t>
+            </a:r>
+          </a:p>
+          <a:p>
+            <a:pPr lvl="0" indent="0" marL="0">
+              <a:buNone/>
+            </a:pPr>
+          </a:p>
+          <a:p>
+            <a:pPr lvl="0" indent="0" marL="0">
+              <a:buNone/>
+            </a:pPr>
+            <a:r>
+              <a:rPr/>
+              <a:t>Handout section 5.2.</a:t>
             </a:r>
           </a:p>
         </p:txBody>
@@ -3576,35 +3611,21 @@
             </a:pPr>
             <a:r>
               <a:rPr/>
-              <a:t>Across 30 random 70/30 splits of the loan data, both numbers moved in the predicted direction. The mean rose, because bagging also averages out some of a deep tree’s overfitting; the spread fell, which is what the formula of slide 32 leads us to expect. Say precisely what was measured, because it is not the formula’s quantity: the formula is about the variance of one prediction over bootstrap samples, while this table is the spread of test accuracy over 30 different train/test splits, which also carries the luck of which applicants landed in each test set. The measurement is consistent with the formula, not a direct check of it.</a:t>
-            </a:r>
-          </a:p>
-          <a:p>
-            <a:pPr lvl="0" indent="0" marL="0">
-              <a:buNone/>
-            </a:pPr>
-          </a:p>
-          <a:p>
-            <a:pPr lvl="0" indent="0" marL="0">
-              <a:buNone/>
-            </a:pPr>
-            <a:r>
-              <a:rPr/>
-              <a:t>Ask the room to name which of the two changes matters more for trusting a single deployed model - the tighter spread, because it means the number you report is less likely to be a lucky split.</a:t>
-            </a:r>
-          </a:p>
-          <a:p>
-            <a:pPr lvl="0" indent="0" marL="0">
-              <a:buNone/>
-            </a:pPr>
-          </a:p>
-          <a:p>
-            <a:pPr lvl="0" indent="0" marL="0">
-              <a:buNone/>
-            </a:pPr>
-            <a:r>
-              <a:rPr/>
-              <a:t>Handout section 5.2.</a:t>
+              <a:t>The previous slide’s formula as curves: the variance of an average of B trees, as a share of one tree’s, for rho = 0, 0.2, 0.5 and 0.8.</a:t>
+            </a:r>
+          </a:p>
+          <a:p>
+            <a:pPr lvl="0" indent="0" marL="0">
+              <a:buNone/>
+            </a:pPr>
+          </a:p>
+          <a:p>
+            <a:pPr lvl="0" indent="0" marL="0">
+              <a:buNone/>
+            </a:pPr>
+            <a:r>
+              <a:rPr/>
+              <a:t>Only the rho = 0 curve goes to zero. Every other one flattens onto its dotted floor: at rho = 0.5, ten trees keep 0.550 of one tree’s variance and a hundred keep 0.505. Ask the room what the curves say about adding trees past fifty - almost nothing - and what the only remaining lever is: lower rho. That is the random forest, two slides on. Handout section 5.2.</a:t>
             </a:r>
           </a:p>
         </p:txBody>
@@ -3686,35 +3707,35 @@
             </a:pPr>
             <a:r>
               <a:rPr/>
-              <a:t>Connect this directly to the previous slide’s algebra: if the floor is ρσ², the only way to push it lower is to push ρ down, and bootstrap resampling alone only does that partially, because every bagged tree still gets to see the full feature list.</a:t>
-            </a:r>
-          </a:p>
-          <a:p>
-            <a:pPr lvl="0" indent="0" marL="0">
-              <a:buNone/>
-            </a:pPr>
-          </a:p>
-          <a:p>
-            <a:pPr lvl="0" indent="0" marL="0">
-              <a:buNone/>
-            </a:pPr>
-            <a:r>
-              <a:rPr/>
-              <a:t>The random forest’s one change is a restriction, not an addition: at each split, only a random handful of candidate features is even offered. That forces disagreement between trees at the same point in the tree, purely by denying them the same menu.</a:t>
-            </a:r>
-          </a:p>
-          <a:p>
-            <a:pPr lvl="0" indent="0" marL="0">
-              <a:buNone/>
-            </a:pPr>
-          </a:p>
-          <a:p>
-            <a:pPr lvl="0" indent="0" marL="0">
-              <a:buNone/>
-            </a:pPr>
-            <a:r>
-              <a:rPr/>
-              <a:t>Handout section 6.</a:t>
+              <a:t>Across 30 random 70/30 splits of the loan data, both numbers moved in the predicted direction. The mean rose, because bagging also averages out some of a deep tree’s overfitting; the spread fell, which is what the formula of slide 33 leads us to expect. Say precisely what was measured, because it is not the formula’s quantity: the formula is about the variance of one prediction over bootstrap samples, while this table is the spread of test accuracy over 30 different train/test splits, which also carries the luck of which applicants landed in each test set. The measurement is consistent with the formula, not a direct check of it.</a:t>
+            </a:r>
+          </a:p>
+          <a:p>
+            <a:pPr lvl="0" indent="0" marL="0">
+              <a:buNone/>
+            </a:pPr>
+          </a:p>
+          <a:p>
+            <a:pPr lvl="0" indent="0" marL="0">
+              <a:buNone/>
+            </a:pPr>
+            <a:r>
+              <a:rPr/>
+              <a:t>Ask the room to name which of the two changes matters more for trusting a single deployed model - the tighter spread, because it means the number you report is less likely to be a lucky split.</a:t>
+            </a:r>
+          </a:p>
+          <a:p>
+            <a:pPr lvl="0" indent="0" marL="0">
+              <a:buNone/>
+            </a:pPr>
+          </a:p>
+          <a:p>
+            <a:pPr lvl="0" indent="0" marL="0">
+              <a:buNone/>
+            </a:pPr>
+            <a:r>
+              <a:rPr/>
+              <a:t>Handout section 5.2.</a:t>
             </a:r>
           </a:p>
         </p:txBody>
@@ -3796,35 +3817,21 @@
             </a:pPr>
             <a:r>
               <a:rPr/>
-              <a:t>The same 30 random 70/30 splits as the bagging table, now with the random forest added and drawn rather than tabulated (notebook 2, section 3). Each dot is one split’s test accuracy; the box holds the middle half of the 30, the red line is the median.</a:t>
-            </a:r>
-          </a:p>
-          <a:p>
-            <a:pPr lvl="0" indent="0" marL="0">
-              <a:buNone/>
-            </a:pPr>
-          </a:p>
-          <a:p>
-            <a:pPr lvl="0" indent="0" marL="0">
-              <a:buNone/>
-            </a:pPr>
-            <a:r>
-              <a:rPr/>
-              <a:t>Read it left to right: the boxes rise and narrow together. In numbers, the means are 0.856, 0.902 and 0.908, and the standard deviations 0.0185, 0.0153 and 0.0137. The random forest beats plain bagging on both counts - a better mean and a tighter spread - consistent with ρ having fallen further, as the restriction on the previous slide predicts. The step from bagging to the forest is much smaller than the step from one tree to bagging: averaging did most of the work, decorrelating added a little more.</a:t>
-            </a:r>
-          </a:p>
-          <a:p>
-            <a:pPr lvl="0" indent="0" marL="0">
-              <a:buNone/>
-            </a:pPr>
-          </a:p>
-          <a:p>
-            <a:pPr lvl="0" indent="0" marL="0">
-              <a:buNone/>
-            </a:pPr>
-            <a:r>
-              <a:rPr/>
-              <a:t>Say plainly what has and hasn’t changed: nothing about the splitting rule is different from the first hour’s trees. The only change across the three boxes is what surrounds the tree - resampling, then also restricting the feature menu.</a:t>
+              <a:t>Connect this directly to the previous slide’s algebra: if the floor is ρσ², the only way to push it lower is to push ρ down, and bootstrap resampling alone only does that partially, because every bagged tree still gets to see the full feature list.</a:t>
+            </a:r>
+          </a:p>
+          <a:p>
+            <a:pPr lvl="0" indent="0" marL="0">
+              <a:buNone/>
+            </a:pPr>
+          </a:p>
+          <a:p>
+            <a:pPr lvl="0" indent="0" marL="0">
+              <a:buNone/>
+            </a:pPr>
+            <a:r>
+              <a:rPr/>
+              <a:t>The random forest’s one change is a restriction, not an addition: at each split, only a random handful of candidate features is even offered. That forces disagreement between trees at the same point in the tree, purely by denying them the same menu.</a:t>
             </a:r>
           </a:p>
           <a:p>
@@ -3920,45 +3927,49 @@
             </a:pPr>
             <a:r>
               <a:rPr/>
-              <a:t>State the definition plainly, then set up the experiment. With just income and debt ratio in the dataset, feature importance is a clean, correct answer - both real features get essentially all the credit, because there is nothing else to compete with them.</a:t>
-            </a:r>
-          </a:p>
-          <a:p>
-            <a:pPr lvl="0" indent="0" marL="0">
-              <a:buNone/>
-            </a:pPr>
-          </a:p>
-          <a:p>
-            <a:pPr lvl="0" indent="0" marL="0">
-              <a:buNone/>
-            </a:pPr>
-            <a:r>
-              <a:rPr/>
-              <a:t>Ask the room to predict what happens as you add columns of pure noise - </a:t>
-            </a:r>
-            <a:r>
-              <a:rPr>
-                <a:latin typeface="Courier"/>
-              </a:rPr>
-              <a:t>np.random.normal</a:t>
-            </a:r>
-            <a:r>
-              <a:rPr/>
-              <a:t>, wired to nothing. Most will predict the noise columns get close to zero importance, because averaging over hundreds of trees should wash out anything with no signal. Do not confirm or deny yet - the next slide is the answer.</a:t>
-            </a:r>
-          </a:p>
-          <a:p>
-            <a:pPr lvl="0" indent="0" marL="0">
-              <a:buNone/>
-            </a:pPr>
-          </a:p>
-          <a:p>
-            <a:pPr lvl="0" indent="0" marL="0">
-              <a:buNone/>
-            </a:pPr>
-            <a:r>
-              <a:rPr/>
-              <a:t>Handout section 7.</a:t>
+              <a:t>The same 30 random 70/30 splits as the bagging table, now with the random forest added and drawn rather than tabulated (notebook 2, section 3). Each dot is one split’s test accuracy; the box holds the middle half of the 30, the red line is the median.</a:t>
+            </a:r>
+          </a:p>
+          <a:p>
+            <a:pPr lvl="0" indent="0" marL="0">
+              <a:buNone/>
+            </a:pPr>
+          </a:p>
+          <a:p>
+            <a:pPr lvl="0" indent="0" marL="0">
+              <a:buNone/>
+            </a:pPr>
+            <a:r>
+              <a:rPr/>
+              <a:t>Read it left to right: the boxes rise and narrow together. In numbers, the means are 0.856, 0.902 and 0.908, and the standard deviations 0.0185, 0.0153 and 0.0137. The random forest beats plain bagging on both counts - a better mean and a tighter spread - consistent with ρ having fallen further, as the restriction on the previous slide predicts. The step from bagging to the forest is much smaller than the step from one tree to bagging: averaging did most of the work, decorrelating added a little more.</a:t>
+            </a:r>
+          </a:p>
+          <a:p>
+            <a:pPr lvl="0" indent="0" marL="0">
+              <a:buNone/>
+            </a:pPr>
+          </a:p>
+          <a:p>
+            <a:pPr lvl="0" indent="0" marL="0">
+              <a:buNone/>
+            </a:pPr>
+            <a:r>
+              <a:rPr/>
+              <a:t>Say plainly what has and hasn’t changed: nothing about the splitting rule is different from the first hour’s trees. The only change across the three boxes is what surrounds the tree - resampling, then also restricting the feature menu.</a:t>
+            </a:r>
+          </a:p>
+          <a:p>
+            <a:pPr lvl="0" indent="0" marL="0">
+              <a:buNone/>
+            </a:pPr>
+          </a:p>
+          <a:p>
+            <a:pPr lvl="0" indent="0" marL="0">
+              <a:buNone/>
+            </a:pPr>
+            <a:r>
+              <a:rPr/>
+              <a:t>Handout section 6.</a:t>
             </a:r>
           </a:p>
         </p:txBody>
@@ -4040,21 +4051,21 @@
             </a:pPr>
             <a:r>
               <a:rPr/>
-              <a:t>Say what is plotted before pointing at it (notebook 2, section 5): a 300-tree random forest on the loan data with 0, 5 and 20 columns of random numbers added. Red, left axis: cross-validated accuracy. Blue, right axis: the share of the forest’s importance that lands on the noise columns.</a:t>
-            </a:r>
-          </a:p>
-          <a:p>
-            <a:pPr lvl="0" indent="0" marL="0">
-              <a:buNone/>
-            </a:pPr>
-          </a:p>
-          <a:p>
-            <a:pPr lvl="0" indent="0" marL="0">
-              <a:buNone/>
-            </a:pPr>
-            <a:r>
-              <a:rPr/>
-              <a:t>Follow the blue line, slowly, and let the last point sit before explaining anything: 0% with no noise, 33.9% with 5 columns, 54.5% with 20. With 20 pure-noise columns against 2 real features, more than half of the forest’s own importance scores land on columns that are </a:t>
+              <a:t>State the definition plainly, then set up the experiment. With just income and debt ratio in the dataset, feature importance is a clean, correct answer - both real features get essentially all the credit, because there is nothing else to compete with them.</a:t>
+            </a:r>
+          </a:p>
+          <a:p>
+            <a:pPr lvl="0" indent="0" marL="0">
+              <a:buNone/>
+            </a:pPr>
+          </a:p>
+          <a:p>
+            <a:pPr lvl="0" indent="0" marL="0">
+              <a:buNone/>
+            </a:pPr>
+            <a:r>
+              <a:rPr/>
+              <a:t>Ask the room to predict what happens as you add columns of pure noise - </a:t>
             </a:r>
             <a:r>
               <a:rPr>
@@ -4064,43 +4075,21 @@
             </a:r>
             <a:r>
               <a:rPr/>
-              <a:t> noise by construction. The red line falls at the same time, from 0.912 to 0.837, but gently: nothing in the accuracy warns that the importances have gone wrong.</a:t>
-            </a:r>
-          </a:p>
-          <a:p>
-            <a:pPr lvl="0" indent="0" marL="0">
-              <a:buNone/>
-            </a:pPr>
-          </a:p>
-          <a:p>
-            <a:pPr lvl="0" indent="0" marL="0">
-              <a:buNone/>
-            </a:pPr>
-            <a:r>
-              <a:rPr/>
-              <a:t>Name the instinct this breaks, and defend it before moving on: expecting an average over hundreds of trees to wash out noise is entirely reasonable - the variance-reduction result of the averaging slides is real and measured, and it does point the same way. It reduces the variance of the </a:t>
-            </a:r>
-            <a:r>
-              <a:rPr i="1"/>
-              <a:t>prediction</a:t>
-            </a:r>
-            <a:r>
-              <a:rPr/>
-              <a:t>. It does not guarantee small importance for irrelevant columns. Two things hand credit to noise, and slide 55 takes them apart: the random, incomplete menu at each split, and the deep splits on small groups, where some noise column always lowers the impurity a little by chance.</a:t>
-            </a:r>
-          </a:p>
-          <a:p>
-            <a:pPr lvl="0" indent="0" marL="0">
-              <a:buNone/>
-            </a:pPr>
-          </a:p>
-          <a:p>
-            <a:pPr lvl="0" indent="0" marL="0">
-              <a:buNone/>
-            </a:pPr>
-            <a:r>
-              <a:rPr/>
-              <a:t>The mechanism is in handout section 7. The practical consequence to leave them with: treat a random forest’s importances as suggestive, not definitive, when real features are few against many candidate columns - and check them, which is the next slide.</a:t>
+              <a:t>, wired to nothing. Most will predict the noise columns get close to zero importance, because averaging over hundreds of trees should wash out anything with no signal. Do not confirm or deny yet - the next slide is the answer.</a:t>
+            </a:r>
+          </a:p>
+          <a:p>
+            <a:pPr lvl="0" indent="0" marL="0">
+              <a:buNone/>
+            </a:pPr>
+          </a:p>
+          <a:p>
+            <a:pPr lvl="0" indent="0" marL="0">
+              <a:buNone/>
+            </a:pPr>
+            <a:r>
+              <a:rPr/>
+              <a:t>Handout section 7.</a:t>
             </a:r>
           </a:p>
         </p:txBody>
@@ -4182,57 +4171,67 @@
             </a:pPr>
             <a:r>
               <a:rPr/>
-              <a:t>Name the method and say its recipe before pointing at the figure. </a:t>
-            </a:r>
-            <a:r>
-              <a:rPr b="1"/>
-              <a:t>Permutation importance</a:t>
-            </a:r>
-            <a:r>
-              <a:rPr/>
-              <a:t>: take a fitted model and data it was not trained on; shuffle the values of one column, so that column no longer says anything about the applicant in its row; score the model again. The accuracy lost is that column’s importance. Repeat for every column. If the model never really used a column, shuffling it costs nothing.</a:t>
-            </a:r>
-          </a:p>
-          <a:p>
-            <a:pPr lvl="0" indent="0" marL="0">
-              <a:buNone/>
-            </a:pPr>
-          </a:p>
-          <a:p>
-            <a:pPr lvl="0" indent="0" marL="0">
-              <a:buNone/>
-            </a:pPr>
-            <a:r>
-              <a:rPr/>
-              <a:t>The figure is the 20-noise-column forest, trained on 70% of the applicants and checked on the other 30% (notebook 2, section 6). Left, the importance the forest reports for itself: more than half of it on the twenty noise columns. Right, the same 22 columns by permutation: debt ratio costs 0.18 of accuracy when shuffled, income 0.09, and every noise column costs almost nothing - between 0.003 lost and 0.002 gained.</a:t>
-            </a:r>
-          </a:p>
-          <a:p>
-            <a:pPr lvl="0" indent="0" marL="0">
-              <a:buNone/>
-            </a:pPr>
-          </a:p>
-          <a:p>
-            <a:pPr lvl="0" indent="0" marL="0">
-              <a:buNone/>
-            </a:pPr>
-            <a:r>
-              <a:rPr/>
-              <a:t>Two things to stress. Almost nothing, not exactly nothing: shuffling is random and the test set is finite, so a useless column moves the score by a few thousandths either way. And held-out data is what makes the check honest: on the training rows a deep forest has memorised its noise columns, and shuffling them would cost something there.</a:t>
-            </a:r>
-          </a:p>
-          <a:p>
-            <a:pPr lvl="0" indent="0" marL="0">
-              <a:buNone/>
-            </a:pPr>
-          </a:p>
-          <a:p>
-            <a:pPr lvl="0" indent="0" marL="0">
-              <a:buNone/>
-            </a:pPr>
-            <a:r>
-              <a:rPr/>
-              <a:t>The check costs one function call. The lesson to leave: a ranking the model reports about itself is a claim; shuffling on held-out data is the test of it. Handout section 7.1.</a:t>
+              <a:t>Say what is plotted before pointing at it (notebook 2, section 5): a 300-tree random forest on the loan data with 0, 5 and 20 columns of random numbers added. Red, left axis: cross-validated accuracy. Blue, right axis: the share of the forest’s importance that lands on the noise columns.</a:t>
+            </a:r>
+          </a:p>
+          <a:p>
+            <a:pPr lvl="0" indent="0" marL="0">
+              <a:buNone/>
+            </a:pPr>
+          </a:p>
+          <a:p>
+            <a:pPr lvl="0" indent="0" marL="0">
+              <a:buNone/>
+            </a:pPr>
+            <a:r>
+              <a:rPr/>
+              <a:t>Follow the blue line, slowly, and let the last point sit before explaining anything: 0% with no noise, 33.9% with 5 columns, 54.5% with 20. With 20 pure-noise columns against 2 real features, more than half of the forest’s own importance scores land on columns that are </a:t>
+            </a:r>
+            <a:r>
+              <a:rPr>
+                <a:latin typeface="Courier"/>
+              </a:rPr>
+              <a:t>np.random.normal</a:t>
+            </a:r>
+            <a:r>
+              <a:rPr/>
+              <a:t> noise by construction. The red line falls at the same time, from 0.912 to 0.837, but gently: nothing in the accuracy warns that the importances have gone wrong.</a:t>
+            </a:r>
+          </a:p>
+          <a:p>
+            <a:pPr lvl="0" indent="0" marL="0">
+              <a:buNone/>
+            </a:pPr>
+          </a:p>
+          <a:p>
+            <a:pPr lvl="0" indent="0" marL="0">
+              <a:buNone/>
+            </a:pPr>
+            <a:r>
+              <a:rPr/>
+              <a:t>Name the instinct this breaks, and defend it before moving on: expecting an average over hundreds of trees to wash out noise is entirely reasonable - the variance-reduction result of the averaging slides is real and measured, and it does point the same way. It reduces the variance of the </a:t>
+            </a:r>
+            <a:r>
+              <a:rPr i="1"/>
+              <a:t>prediction</a:t>
+            </a:r>
+            <a:r>
+              <a:rPr/>
+              <a:t>. It does not guarantee small importance for irrelevant columns. Two things hand credit to noise, and slide 56 takes them apart: the random, incomplete menu at each split, and the deep splits on small groups, where some noise column always lowers the impurity a little by chance.</a:t>
+            </a:r>
+          </a:p>
+          <a:p>
+            <a:pPr lvl="0" indent="0" marL="0">
+              <a:buNone/>
+            </a:pPr>
+          </a:p>
+          <a:p>
+            <a:pPr lvl="0" indent="0" marL="0">
+              <a:buNone/>
+            </a:pPr>
+            <a:r>
+              <a:rPr/>
+              <a:t>The mechanism is in handout section 7. The practical consequence to leave them with: treat a random forest’s importances as suggestive, not definitive, when real features are few against many candidate columns - and check them, which is the next slide.</a:t>
             </a:r>
           </a:p>
         </p:txBody>
@@ -4314,69 +4313,57 @@
             </a:pPr>
             <a:r>
               <a:rPr/>
-              <a:t>The table is the notebook’s map: bagging from scratch and against scikit-learn, the out-of-bag score checked against cross-validation, the variance measured over 30 splits, the noise-column experiment, and the permutation check of the previous slide. Section 4 of the notebook is reading only, which is why the table skips it.</a:t>
-            </a:r>
-          </a:p>
-          <a:p>
-            <a:pPr lvl="0" indent="0" marL="0">
-              <a:buNone/>
-            </a:pPr>
-          </a:p>
-          <a:p>
-            <a:pPr lvl="0" indent="0" marL="0">
-              <a:buNone/>
-            </a:pPr>
-            <a:r>
-              <a:rPr/>
-              <a:t>Run Notebooks/02_bagging_and_random_forests.ipynb. Eighteen minutes.</a:t>
-            </a:r>
-          </a:p>
-          <a:p>
-            <a:pPr lvl="0" indent="0" marL="0">
-              <a:buNone/>
-            </a:pPr>
-          </a:p>
-          <a:p>
-            <a:pPr lvl="0" indent="0" marL="0">
-              <a:buNone/>
-            </a:pPr>
-            <a:r>
-              <a:rPr/>
-              <a:t>The cell to protect is the noise-column sweep. Let them add the columns themselves and watch the importance share climb - reading the number off a slide does not land the same way as watching it happen.</a:t>
-            </a:r>
-          </a:p>
-          <a:p>
-            <a:pPr lvl="0" indent="0" marL="0">
-              <a:buNone/>
-            </a:pPr>
-          </a:p>
-          <a:p>
-            <a:pPr lvl="0" indent="0" marL="0">
-              <a:buNone/>
-            </a:pPr>
-            <a:r>
-              <a:rPr/>
-              <a:t>If time allows, section 6 also tries </a:t>
-            </a:r>
-            <a:r>
-              <a:rPr>
-                <a:latin typeface="Courier"/>
-              </a:rPr>
-              <a:t>max_features=None</a:t>
-            </a:r>
-            <a:r>
-              <a:rPr/>
-              <a:t> instead of the default </a:t>
-            </a:r>
-            <a:r>
-              <a:rPr>
-                <a:latin typeface="Courier"/>
-              </a:rPr>
-              <a:t>"sqrt"</a:t>
-            </a:r>
-            <a:r>
-              <a:rPr/>
-              <a:t>: every split sees all 22 columns. Ask them to predict the noise share before running it. Most will say it falls to about zero, since the real features are now always on offer. It falls only to 28%, and the accuracy rises from 0.837 to 0.897. Slide 55 explains both.</a:t>
+              <a:t>Name the method and say its recipe before pointing at the figure. </a:t>
+            </a:r>
+            <a:r>
+              <a:rPr b="1"/>
+              <a:t>Permutation importance</a:t>
+            </a:r>
+            <a:r>
+              <a:rPr/>
+              <a:t>: take a fitted model and data it was not trained on; shuffle the values of one column, so that column no longer says anything about the applicant in its row; score the model again. The accuracy lost is that column’s importance. Repeat for every column. If the model never really used a column, shuffling it costs nothing.</a:t>
+            </a:r>
+          </a:p>
+          <a:p>
+            <a:pPr lvl="0" indent="0" marL="0">
+              <a:buNone/>
+            </a:pPr>
+          </a:p>
+          <a:p>
+            <a:pPr lvl="0" indent="0" marL="0">
+              <a:buNone/>
+            </a:pPr>
+            <a:r>
+              <a:rPr/>
+              <a:t>The figure is the 20-noise-column forest, trained on 70% of the applicants and checked on the other 30% (notebook 2, section 6). Left, the importance the forest reports for itself: more than half of it on the twenty noise columns. Right, the same 22 columns by permutation: debt ratio costs 0.18 of accuracy when shuffled, income 0.09, and every noise column costs almost nothing - between 0.003 lost and 0.002 gained.</a:t>
+            </a:r>
+          </a:p>
+          <a:p>
+            <a:pPr lvl="0" indent="0" marL="0">
+              <a:buNone/>
+            </a:pPr>
+          </a:p>
+          <a:p>
+            <a:pPr lvl="0" indent="0" marL="0">
+              <a:buNone/>
+            </a:pPr>
+            <a:r>
+              <a:rPr/>
+              <a:t>Two things to stress. Almost nothing, not exactly nothing: shuffling is random and the test set is finite, so a useless column moves the score by a few thousandths either way. And held-out data is what makes the check honest: on the training rows a deep forest has memorised its noise columns, and shuffling them would cost something there.</a:t>
+            </a:r>
+          </a:p>
+          <a:p>
+            <a:pPr lvl="0" indent="0" marL="0">
+              <a:buNone/>
+            </a:pPr>
+          </a:p>
+          <a:p>
+            <a:pPr lvl="0" indent="0" marL="0">
+              <a:buNone/>
+            </a:pPr>
+            <a:r>
+              <a:rPr/>
+              <a:t>The check costs one function call. The lesson to leave: a ranking the model reports about itself is a claim; shuffling on held-out data is the test of it. Handout section 7.1.</a:t>
             </a:r>
           </a:p>
         </p:txBody>
@@ -4582,73 +4569,69 @@
             </a:pPr>
             <a:r>
               <a:rPr/>
-              <a:t>Contrast the two strategies directly, because the difference is the whole segment. Bagging and random forests are parallel: every tree is grown once, independently, and combined only at prediction time. Boosting is sequential: tree t exists specifically because of what trees 1 through t-1 still got wrong.</a:t>
-            </a:r>
-          </a:p>
-          <a:p>
-            <a:pPr lvl="0" indent="0" marL="0">
-              <a:buNone/>
-            </a:pPr>
-          </a:p>
-          <a:p>
-            <a:pPr lvl="0" indent="0" marL="0">
-              <a:buNone/>
-            </a:pPr>
-            <a:r>
-              <a:rPr/>
-              <a:t>Slow down on “regression tree”, because it is new. “Shallow” means depth 2 or 3 here. Everything so far this lesson was a classification tree: leaves vote, splits are scored by Gini. A boosted tree is fit to corrections, which are numbers like +0.613 or -0.387, not classes, so it is the regression version of the same algorithm: the same greedy search over features and thresholds, but each leaf predicts the average correction of the examples in it, and a split is scored by how much it lowers the squared error around those averages. Even </a:t>
+              <a:t>The table is the notebook’s map: bagging from scratch and against scikit-learn, the out-of-bag score checked against cross-validation, the variance measured over 30 splits, the noise-column experiment, and the permutation check of the previous slide. Section 4 of the notebook is reading only, which is why the table skips it.</a:t>
+            </a:r>
+          </a:p>
+          <a:p>
+            <a:pPr lvl="0" indent="0" marL="0">
+              <a:buNone/>
+            </a:pPr>
+          </a:p>
+          <a:p>
+            <a:pPr lvl="0" indent="0" marL="0">
+              <a:buNone/>
+            </a:pPr>
+            <a:r>
+              <a:rPr/>
+              <a:t>Run Notebooks/02_bagging_and_random_forests.ipynb. Eighteen minutes.</a:t>
+            </a:r>
+          </a:p>
+          <a:p>
+            <a:pPr lvl="0" indent="0" marL="0">
+              <a:buNone/>
+            </a:pPr>
+          </a:p>
+          <a:p>
+            <a:pPr lvl="0" indent="0" marL="0">
+              <a:buNone/>
+            </a:pPr>
+            <a:r>
+              <a:rPr/>
+              <a:t>The cell to protect is the noise-column sweep. Let them add the columns themselves and watch the importance share climb - reading the number off a slide does not land the same way as watching it happen.</a:t>
+            </a:r>
+          </a:p>
+          <a:p>
+            <a:pPr lvl="0" indent="0" marL="0">
+              <a:buNone/>
+            </a:pPr>
+          </a:p>
+          <a:p>
+            <a:pPr lvl="0" indent="0" marL="0">
+              <a:buNone/>
+            </a:pPr>
+            <a:r>
+              <a:rPr/>
+              <a:t>If time allows, section 6 also tries </a:t>
             </a:r>
             <a:r>
               <a:rPr>
                 <a:latin typeface="Courier"/>
               </a:rPr>
-              <a:t>GradientBoostingClassifier</a:t>
-            </a:r>
-            <a:r>
-              <a:rPr/>
-              <a:t> grows regression trees inside.</a:t>
-            </a:r>
-          </a:p>
-          <a:p>
-            <a:pPr lvl="0" indent="0" marL="0">
-              <a:buNone/>
-            </a:pPr>
-          </a:p>
-          <a:p>
-            <a:pPr lvl="0" indent="0" marL="0">
-              <a:buNone/>
-            </a:pPr>
-            <a:r>
-              <a:rPr/>
-              <a:t>A predictable slip, worth naming now: “the final task is classification, so each boosted tree votes default or repaid, like a tree in a forest”. It is reasonable - every ensemble so far was made of trees that vote. But a boosted tree never outputs a class. It outputs a correction that is added to a running score, and only the final score is turned into a class.</a:t>
-            </a:r>
-          </a:p>
-          <a:p>
-            <a:pPr lvl="0" indent="0" marL="0">
-              <a:buNone/>
-            </a:pPr>
-          </a:p>
-          <a:p>
-            <a:pPr lvl="0" indent="0" marL="0">
-              <a:buNone/>
-            </a:pPr>
-            <a:r>
-              <a:rPr/>
-              <a:t>Name α carefully and tie it to the course’s shared notation - this is the same symbol as lesson 3’s gradient descent learning rate, doing an analogous job: how large a step each correction takes.</a:t>
-            </a:r>
-          </a:p>
-          <a:p>
-            <a:pPr lvl="0" indent="0" marL="0">
-              <a:buNone/>
-            </a:pPr>
-          </a:p>
-          <a:p>
-            <a:pPr lvl="0" indent="0" marL="0">
-              <a:buNone/>
-            </a:pPr>
-            <a:r>
-              <a:rPr/>
-              <a:t>Handout section 8.</a:t>
+              <a:t>max_features=None</a:t>
+            </a:r>
+            <a:r>
+              <a:rPr/>
+              <a:t> instead of the default </a:t>
+            </a:r>
+            <a:r>
+              <a:rPr>
+                <a:latin typeface="Courier"/>
+              </a:rPr>
+              <a:t>"sqrt"</a:t>
+            </a:r>
+            <a:r>
+              <a:rPr/>
+              <a:t>: every split sees all 22 columns. Ask them to predict the noise share before running it. Most will say it falls to about zero, since the real features are now always on offer. It falls only to 28%, and the accuracy rises from 0.837 to 0.897. Slide 56 explains both.</a:t>
             </a:r>
           </a:p>
         </p:txBody>
@@ -4730,21 +4713,73 @@
             </a:pPr>
             <a:r>
               <a:rPr/>
-              <a:t>F₀ is the flat starting guess: the best single constant for the loss being used. For squared error, as on this slide and the next three, that is the mean of the target; for classification it will be the log-odds of the base rate (slide 46). Each subsequent Fₜ is the previous ensemble plus a scaled correction from the newest tree, hₜ. Read it left to right: start flat, then keep adding small, scaled corrections.</a:t>
-            </a:r>
-          </a:p>
-          <a:p>
-            <a:pPr lvl="0" indent="0" marL="0">
-              <a:buNone/>
-            </a:pPr>
-          </a:p>
-          <a:p>
-            <a:pPr lvl="0" indent="0" marL="0">
-              <a:buNone/>
-            </a:pPr>
-            <a:r>
-              <a:rPr/>
-              <a:t>Do not derive anything further here - the next slide states what hₜ is actually fit to. Handout section 8.</a:t>
+              <a:t>Contrast the two strategies directly, because the difference is the whole segment. Bagging and random forests are parallel: every tree is grown once, independently, and combined only at prediction time. Boosting is sequential: tree t exists specifically because of what trees 1 through t-1 still got wrong.</a:t>
+            </a:r>
+          </a:p>
+          <a:p>
+            <a:pPr lvl="0" indent="0" marL="0">
+              <a:buNone/>
+            </a:pPr>
+          </a:p>
+          <a:p>
+            <a:pPr lvl="0" indent="0" marL="0">
+              <a:buNone/>
+            </a:pPr>
+            <a:r>
+              <a:rPr/>
+              <a:t>Slow down on “regression tree”, because it is new. “Shallow” means depth 2 or 3 here. Everything so far this lesson was a classification tree: leaves vote, splits are scored by Gini. A boosted tree is fit to corrections, which are numbers like +0.613 or -0.387, not classes, so it is the regression version of the same algorithm: the same greedy search over features and thresholds, but each leaf predicts the average correction of the examples in it, and a split is scored by how much it lowers the squared error around those averages. Even </a:t>
+            </a:r>
+            <a:r>
+              <a:rPr>
+                <a:latin typeface="Courier"/>
+              </a:rPr>
+              <a:t>GradientBoostingClassifier</a:t>
+            </a:r>
+            <a:r>
+              <a:rPr/>
+              <a:t> grows regression trees inside.</a:t>
+            </a:r>
+          </a:p>
+          <a:p>
+            <a:pPr lvl="0" indent="0" marL="0">
+              <a:buNone/>
+            </a:pPr>
+          </a:p>
+          <a:p>
+            <a:pPr lvl="0" indent="0" marL="0">
+              <a:buNone/>
+            </a:pPr>
+            <a:r>
+              <a:rPr/>
+              <a:t>A predictable slip, worth naming now: “the final task is classification, so each boosted tree votes default or repaid, like a tree in a forest”. It is reasonable - every ensemble so far was made of trees that vote. But a boosted tree never outputs a class. It outputs a correction that is added to a running score, and only the final score is turned into a class.</a:t>
+            </a:r>
+          </a:p>
+          <a:p>
+            <a:pPr lvl="0" indent="0" marL="0">
+              <a:buNone/>
+            </a:pPr>
+          </a:p>
+          <a:p>
+            <a:pPr lvl="0" indent="0" marL="0">
+              <a:buNone/>
+            </a:pPr>
+            <a:r>
+              <a:rPr/>
+              <a:t>Name α carefully and tie it to the course’s shared notation - this is the same symbol as lesson 3’s gradient descent learning rate, doing an analogous job: how large a step each correction takes.</a:t>
+            </a:r>
+          </a:p>
+          <a:p>
+            <a:pPr lvl="0" indent="0" marL="0">
+              <a:buNone/>
+            </a:pPr>
+          </a:p>
+          <a:p>
+            <a:pPr lvl="0" indent="0" marL="0">
+              <a:buNone/>
+            </a:pPr>
+            <a:r>
+              <a:rPr/>
+              <a:t>Handout section 8.</a:t>
             </a:r>
           </a:p>
         </p:txBody>
@@ -4826,35 +4861,21 @@
             </a:pPr>
             <a:r>
               <a:rPr/>
-              <a:t>The In code line is the whole from-scratch loop of notebook 3, section 1: fit a depth-2 regression tree to the residuals, add 0.3 times its predictions to the running prediction, repeat sixty times.</a:t>
-            </a:r>
-          </a:p>
-          <a:p>
-            <a:pPr lvl="0" indent="0" marL="0">
-              <a:buNone/>
-            </a:pPr>
-          </a:p>
-          <a:p>
-            <a:pPr lvl="0" indent="0" marL="0">
-              <a:buNone/>
-            </a:pPr>
-            <a:r>
-              <a:rPr/>
-              <a:t>State the result without the calculus. For plain squared-error regression, what a new tree corrects is literally the residual - the gap between the truth and the ensemble’s current prediction. That is intuitive on its own and does not need a derivative to justify.</a:t>
-            </a:r>
-          </a:p>
-          <a:p>
-            <a:pPr lvl="0" indent="0" marL="0">
-              <a:buNone/>
-            </a:pPr>
-          </a:p>
-          <a:p>
-            <a:pPr lvl="0" indent="0" marL="0">
-              <a:buNone/>
-            </a:pPr>
-            <a:r>
-              <a:rPr/>
-              <a:t>The second bullet is the generalisation that pays off in the very next segment: the same recipe - fit a tree to the negative gradient of whatever loss you’re using - covers classification too, once the loss changes from squared error to something else. The one line of algebra connecting the two is on the slide; handout section 8 sets it out.</a:t>
+              <a:t>F₀ is the flat starting guess: the best single constant for the loss being used. For squared error, as on this slide and the next three, that is the mean of the target; for classification it will be the log-odds of the base rate (slide 47). Each subsequent Fₜ is the previous ensemble plus a scaled correction from the newest tree, hₜ. Read it left to right: start flat, then keep adding small, scaled corrections.</a:t>
+            </a:r>
+          </a:p>
+          <a:p>
+            <a:pPr lvl="0" indent="0" marL="0">
+              <a:buNone/>
+            </a:pPr>
+          </a:p>
+          <a:p>
+            <a:pPr lvl="0" indent="0" marL="0">
+              <a:buNone/>
+            </a:pPr>
+            <a:r>
+              <a:rPr/>
+              <a:t>Do not derive anything further here - the next slide states what hₜ is actually fit to. Handout section 8.</a:t>
             </a:r>
           </a:p>
         </p:txBody>
@@ -4936,35 +4957,35 @@
             </a:pPr>
             <a:r>
               <a:rPr/>
-              <a:t>A new toy dataset, so say what it is before anything else: 200 points on one input x, whose true value is a three-level step function plus a gentle sine wave (the black line), observed with noise (the grey dots). Sixty depth-2 trees, learning rate 0.3, are fit to it. Walk through the coloured curves in order.</a:t>
-            </a:r>
-          </a:p>
-          <a:p>
-            <a:pPr lvl="0" indent="0" marL="0">
-              <a:buNone/>
-            </a:pPr>
-          </a:p>
-          <a:p>
-            <a:pPr lvl="0" indent="0" marL="0">
-              <a:buNone/>
-            </a:pPr>
-            <a:r>
-              <a:rPr/>
-              <a:t>Say the numbers as you point: one tree barely moves the flat starting guess. Five trees sketch the coarse shape. Twenty trace the step function closely - the ensemble’s best point, on the next slide. By sixty, the ensemble is tracking individual noisy observations as well as the underlying shape.</a:t>
-            </a:r>
-          </a:p>
-          <a:p>
-            <a:pPr lvl="0" indent="0" marL="0">
-              <a:buNone/>
-            </a:pPr>
-          </a:p>
-          <a:p>
-            <a:pPr lvl="0" indent="0" marL="0">
-              <a:buNone/>
-            </a:pPr>
-            <a:r>
-              <a:rPr/>
-              <a:t>Handout section 8.</a:t>
+              <a:t>The In code line is the whole from-scratch loop of notebook 3, section 1: fit a depth-2 regression tree to the residuals, add 0.3 times its predictions to the running prediction, repeat sixty times.</a:t>
+            </a:r>
+          </a:p>
+          <a:p>
+            <a:pPr lvl="0" indent="0" marL="0">
+              <a:buNone/>
+            </a:pPr>
+          </a:p>
+          <a:p>
+            <a:pPr lvl="0" indent="0" marL="0">
+              <a:buNone/>
+            </a:pPr>
+            <a:r>
+              <a:rPr/>
+              <a:t>State the result without the calculus. For plain squared-error regression, what a new tree corrects is literally the residual - the gap between the truth and the ensemble’s current prediction. That is intuitive on its own and does not need a derivative to justify.</a:t>
+            </a:r>
+          </a:p>
+          <a:p>
+            <a:pPr lvl="0" indent="0" marL="0">
+              <a:buNone/>
+            </a:pPr>
+          </a:p>
+          <a:p>
+            <a:pPr lvl="0" indent="0" marL="0">
+              <a:buNone/>
+            </a:pPr>
+            <a:r>
+              <a:rPr/>
+              <a:t>The second bullet is the generalisation that pays off in the very next segment: the same recipe - fit a tree to the negative gradient of whatever loss you’re using - covers classification too, once the loss changes from squared error to something else. The one line of algebra connecting the two is on the slide; handout section 8 sets it out.</a:t>
             </a:r>
           </a:p>
         </p:txBody>
@@ -5046,29 +5067,21 @@
             </a:pPr>
             <a:r>
               <a:rPr/>
-              <a:t>Put a number on each curve of the previous slide. Twenty trees is the sweet spot; by sixty the error against the true, noise-free function has risen again, even though the ensemble is still adding trees that reduce error on the </a:t>
-            </a:r>
-            <a:r>
-              <a:rPr i="1"/>
-              <a:t>training</a:t>
-            </a:r>
-            <a:r>
-              <a:rPr/>
-              <a:t> residuals.</a:t>
-            </a:r>
-          </a:p>
-          <a:p>
-            <a:pPr lvl="0" indent="0" marL="0">
-              <a:buNone/>
-            </a:pPr>
-          </a:p>
-          <a:p>
-            <a:pPr lvl="0" indent="0" marL="0">
-              <a:buNone/>
-            </a:pPr>
-            <a:r>
-              <a:rPr/>
-              <a:t>Name what this is: the same overfitting story as the unconstrained single tree of the depth table, reached by a completely different route - not one tree grown too deep, but too many shallow trees each chasing whatever residual noise is left.</a:t>
+              <a:t>A new toy dataset, so say what it is before anything else: 200 points on one input x, whose true value is a three-level step function plus a gentle sine wave (the black line), observed with noise (the grey dots). Sixty depth-2 trees, learning rate 0.3, are fit to it. Walk through the coloured curves in order.</a:t>
+            </a:r>
+          </a:p>
+          <a:p>
+            <a:pPr lvl="0" indent="0" marL="0">
+              <a:buNone/>
+            </a:pPr>
+          </a:p>
+          <a:p>
+            <a:pPr lvl="0" indent="0" marL="0">
+              <a:buNone/>
+            </a:pPr>
+            <a:r>
+              <a:rPr/>
+              <a:t>Say the numbers as you point: one tree barely moves the flat starting guess. Five trees sketch the coarse shape. Twenty trace the step function closely - the ensemble’s best point, on the next slide. By sixty, the ensemble is tracking individual noisy observations as well as the underlying shape.</a:t>
             </a:r>
           </a:p>
           <a:p>
@@ -5164,91 +5177,43 @@
             </a:pPr>
             <a:r>
               <a:rPr/>
-              <a:t>State the result, not the chain rule behind it - the handout carries the full derivative. What matters for this course is the connection: boosting for classification fits a sequence of small trees to y - p, one correction at a time, rather than adjusting a fixed set of linear coefficients against the same quantity in one continuous descent.</a:t>
-            </a:r>
-          </a:p>
-          <a:p>
-            <a:pPr lvl="0" indent="0" marL="0">
-              <a:buNone/>
-            </a:pPr>
-          </a:p>
-          <a:p>
-            <a:pPr lvl="0" indent="0" marL="0">
-              <a:buNone/>
-            </a:pPr>
-            <a:r>
-              <a:rPr/>
-              <a:t>Ask the room to name what’s genuinely different between this and lesson 4’s logistic regression, given they’re descending against the same quantity. The answer: lesson 4 moves a fixed number of coefficients; boosting adds entirely new trees, so the model’s structure itself grows with training rather than staying fixed.</a:t>
-            </a:r>
-          </a:p>
-          <a:p>
-            <a:pPr lvl="0" indent="0" marL="0">
-              <a:buNone/>
-            </a:pPr>
-          </a:p>
-          <a:p>
-            <a:pPr lvl="0" indent="0" marL="0">
-              <a:buNone/>
-            </a:pPr>
-            <a:r>
-              <a:rPr/>
-              <a:t>The sigma here is lesson 4’s logistic function, 1 / (1 + e^-F), not the sigma squared of the variance slides: the slide says so, say it aloud once too, since the same letter has just meant something else.</a:t>
-            </a:r>
-          </a:p>
-          <a:p>
-            <a:pPr lvl="0" indent="0" marL="0">
-              <a:buNone/>
-            </a:pPr>
-          </a:p>
-          <a:p>
-            <a:pPr lvl="0" indent="0" marL="0">
-              <a:buNone/>
-            </a:pPr>
-            <a:r>
-              <a:rPr/>
-              <a:t>Give them the first step in numbers, because it makes y - p concrete. The ensemble starts at the base rate’s log-odds: 464 of the 1,200 defaulted, so F0 = log(464 / 736) = -0.461, which the logistic function turns back into 0.387 for everyone. The first tree is fit to y - p: +0.613 for every applicant who defaulted, -0.387 for every one who repaid.</a:t>
-            </a:r>
-          </a:p>
-          <a:p>
-            <a:pPr lvl="0" indent="0" marL="0">
-              <a:buNone/>
-            </a:pPr>
-          </a:p>
-          <a:p>
-            <a:pPr lvl="0" indent="0" marL="0">
-              <a:buNone/>
-            </a:pPr>
-            <a:r>
-              <a:rPr/>
-              <a:t>A predictable slip: “so the update is p plus alpha times (y - p)”. It is reasonable, because y - p is a difference of probabilities. But the trees correct the score F, not p: F moves by alpha times the tree’s output, and only then does the logistic function turn the new F into a new p. That is what keeps p between 0 and 1 however large the corrections add up.</a:t>
-            </a:r>
-          </a:p>
-          <a:p>
-            <a:pPr lvl="0" indent="0" marL="0">
-              <a:buNone/>
-            </a:pPr>
-          </a:p>
-          <a:p>
-            <a:pPr lvl="0" indent="0" marL="0">
-              <a:buNone/>
-            </a:pPr>
-            <a:r>
-              <a:rPr/>
-              <a:t>One detail, if someone has read scikit-learn’s source. The tree’s splits are chosen on y - p exactly as described. The number written in each leaf is then recomputed: the sum of y - p over the leaf divided by the sum of p(1 - p), one Newton step on the log-loss rather than the plain mean. The splits come from the residuals; the size of each step takes the curvature of the loss into account. Handout section 9 has it in one sentence; nothing in the lesson depends on it.</a:t>
-            </a:r>
-          </a:p>
-          <a:p>
-            <a:pPr lvl="0" indent="0" marL="0">
-              <a:buNone/>
-            </a:pPr>
-          </a:p>
-          <a:p>
-            <a:pPr lvl="0" indent="0" marL="0">
-              <a:buNone/>
-            </a:pPr>
-            <a:r>
-              <a:rPr/>
-              <a:t>Handout section 9.</a:t>
+              <a:t>Put a number on each curve of the previous slide. Twenty trees is the sweet spot; by sixty the error against the true, noise-free function has risen again, even though the ensemble is still adding trees that reduce error on the </a:t>
+            </a:r>
+            <a:r>
+              <a:rPr i="1"/>
+              <a:t>training</a:t>
+            </a:r>
+            <a:r>
+              <a:rPr/>
+              <a:t> residuals.</a:t>
+            </a:r>
+          </a:p>
+          <a:p>
+            <a:pPr lvl="0" indent="0" marL="0">
+              <a:buNone/>
+            </a:pPr>
+          </a:p>
+          <a:p>
+            <a:pPr lvl="0" indent="0" marL="0">
+              <a:buNone/>
+            </a:pPr>
+            <a:r>
+              <a:rPr/>
+              <a:t>Name what this is: the same overfitting story as the unconstrained single tree of the depth table, reached by a completely different route - not one tree grown too deep, but too many shallow trees each chasing whatever residual noise is left.</a:t>
+            </a:r>
+          </a:p>
+          <a:p>
+            <a:pPr lvl="0" indent="0" marL="0">
+              <a:buNone/>
+            </a:pPr>
+          </a:p>
+          <a:p>
+            <a:pPr lvl="0" indent="0" marL="0">
+              <a:buNone/>
+            </a:pPr>
+            <a:r>
+              <a:rPr/>
+              <a:t>Handout section 8.</a:t>
             </a:r>
           </a:p>
         </p:txBody>
@@ -5330,29 +5295,77 @@
             </a:pPr>
             <a:r>
               <a:rPr/>
-              <a:t>Give the number and let it sit against everything shown so far this lesson: 0.902, from a method run at scikit-learn’s defaults, no tuning at all. Ask the room to recall the single tuned tree’s number from the depth table, 0.882 at depth 8, and note that boosting has already passed it without being told anything about depth.</a:t>
-            </a:r>
-          </a:p>
-          <a:p>
-            <a:pPr lvl="0" indent="0" marL="0">
-              <a:buNone/>
-            </a:pPr>
-          </a:p>
-          <a:p>
-            <a:pPr lvl="0" indent="0" marL="0">
-              <a:buNone/>
-            </a:pPr>
-            <a:r>
-              <a:rPr/>
-              <a:t>The rest of this segment is what happens when boosting is </a:t>
-            </a:r>
-            <a:r>
-              <a:rPr i="1"/>
-              <a:t>not</a:t>
-            </a:r>
-            <a:r>
-              <a:rPr/>
-              <a:t> left at sensible defaults.</a:t>
+              <a:t>State the result, not the chain rule behind it - the handout carries the full derivative. What matters for this course is the connection: boosting for classification fits a sequence of small trees to y - p, one correction at a time, rather than adjusting a fixed set of linear coefficients against the same quantity in one continuous descent.</a:t>
+            </a:r>
+          </a:p>
+          <a:p>
+            <a:pPr lvl="0" indent="0" marL="0">
+              <a:buNone/>
+            </a:pPr>
+          </a:p>
+          <a:p>
+            <a:pPr lvl="0" indent="0" marL="0">
+              <a:buNone/>
+            </a:pPr>
+            <a:r>
+              <a:rPr/>
+              <a:t>Ask the room to name what’s genuinely different between this and lesson 4’s logistic regression, given they’re descending against the same quantity. The answer: lesson 4 moves a fixed number of coefficients; boosting adds entirely new trees, so the model’s structure itself grows with training rather than staying fixed.</a:t>
+            </a:r>
+          </a:p>
+          <a:p>
+            <a:pPr lvl="0" indent="0" marL="0">
+              <a:buNone/>
+            </a:pPr>
+          </a:p>
+          <a:p>
+            <a:pPr lvl="0" indent="0" marL="0">
+              <a:buNone/>
+            </a:pPr>
+            <a:r>
+              <a:rPr/>
+              <a:t>The sigma here is lesson 4’s logistic function, 1 / (1 + e^-F), not the sigma squared of the variance slides: the slide says so, say it aloud once too, since the same letter has just meant something else.</a:t>
+            </a:r>
+          </a:p>
+          <a:p>
+            <a:pPr lvl="0" indent="0" marL="0">
+              <a:buNone/>
+            </a:pPr>
+          </a:p>
+          <a:p>
+            <a:pPr lvl="0" indent="0" marL="0">
+              <a:buNone/>
+            </a:pPr>
+            <a:r>
+              <a:rPr/>
+              <a:t>Give them the first step in numbers, because it makes y - p concrete. The ensemble starts at the base rate’s log-odds: 464 of the 1,200 defaulted, so F0 = log(464 / 736) = -0.461, which the logistic function turns back into 0.387 for everyone. The first tree is fit to y - p: +0.613 for every applicant who defaulted, -0.387 for every one who repaid.</a:t>
+            </a:r>
+          </a:p>
+          <a:p>
+            <a:pPr lvl="0" indent="0" marL="0">
+              <a:buNone/>
+            </a:pPr>
+          </a:p>
+          <a:p>
+            <a:pPr lvl="0" indent="0" marL="0">
+              <a:buNone/>
+            </a:pPr>
+            <a:r>
+              <a:rPr/>
+              <a:t>A predictable slip: “so the update is p plus alpha times (y - p)”. It is reasonable, because y - p is a difference of probabilities. But the trees correct the score F, not p: F moves by alpha times the tree’s output, and only then does the logistic function turn the new F into a new p. That is what keeps p between 0 and 1 however large the corrections add up.</a:t>
+            </a:r>
+          </a:p>
+          <a:p>
+            <a:pPr lvl="0" indent="0" marL="0">
+              <a:buNone/>
+            </a:pPr>
+          </a:p>
+          <a:p>
+            <a:pPr lvl="0" indent="0" marL="0">
+              <a:buNone/>
+            </a:pPr>
+            <a:r>
+              <a:rPr/>
+              <a:t>One detail, if someone has read scikit-learn’s source. The tree’s splits are chosen on y - p exactly as described. The number written in each leaf is then recomputed: the sum of y - p over the leaf divided by the sum of p(1 - p), one Newton step on the log-loss rather than the plain mean. The splits come from the residuals; the size of each step takes the curvature of the loss into account. Handout section 9 has it in one sentence; nothing in the lesson depends on it.</a:t>
             </a:r>
           </a:p>
           <a:p>
@@ -5448,35 +5461,43 @@
             </a:pPr>
             <a:r>
               <a:rPr/>
-              <a:t>Unlike bagging, boosting keeps reducing its training loss for as long as it runs, because every new tree is built specifically to reduce what remains - including the 7% of labels that are noise by construction. There is nothing in the algorithm itself that says “stop”. Be exact about which quantity: the log-loss on the training data never goes up, while training accuracy only follows it on the whole - fit to all 1,200 applicants with 800 trees, it dips at a handful of individual steps, too small to show in this table (handout section 10).</a:t>
-            </a:r>
-          </a:p>
-          <a:p>
-            <a:pPr lvl="0" indent="0" marL="0">
-              <a:buNone/>
-            </a:pPr>
-          </a:p>
-          <a:p>
-            <a:pPr lvl="0" indent="0" marL="0">
-              <a:buNone/>
-            </a:pPr>
-            <a:r>
-              <a:rPr/>
-              <a:t>Point at the peak, 30 trees, and then at 800: training accuracy reached 1.000 by 200 trees and stayed there, and cross-validated accuracy has drifted down from 0.897 to 0.890, under a point, since the peak. Contrast the size of that drop with the unconstrained single tree of the depth table, which lost three points past its own peak - boosting’s overfitting is real but gentler.</a:t>
-            </a:r>
-          </a:p>
-          <a:p>
-            <a:pPr lvl="0" indent="0" marL="0">
-              <a:buNone/>
-            </a:pPr>
-          </a:p>
-          <a:p>
-            <a:pPr lvl="0" indent="0" marL="0">
-              <a:buNone/>
-            </a:pPr>
-            <a:r>
-              <a:rPr/>
-              <a:t>Handout section 10.</a:t>
+              <a:t>Give the number and let it sit against everything shown so far this lesson: 0.902, from a method run at scikit-learn’s defaults, no tuning at all. Ask the room to recall the single tuned tree’s number from the depth table, 0.882 at depth 8, and note that boosting has already passed it without being told anything about depth.</a:t>
+            </a:r>
+          </a:p>
+          <a:p>
+            <a:pPr lvl="0" indent="0" marL="0">
+              <a:buNone/>
+            </a:pPr>
+          </a:p>
+          <a:p>
+            <a:pPr lvl="0" indent="0" marL="0">
+              <a:buNone/>
+            </a:pPr>
+            <a:r>
+              <a:rPr/>
+              <a:t>The rest of this segment is what happens when boosting is </a:t>
+            </a:r>
+            <a:r>
+              <a:rPr i="1"/>
+              <a:t>not</a:t>
+            </a:r>
+            <a:r>
+              <a:rPr/>
+              <a:t> left at sensible defaults.</a:t>
+            </a:r>
+          </a:p>
+          <a:p>
+            <a:pPr lvl="0" indent="0" marL="0">
+              <a:buNone/>
+            </a:pPr>
+          </a:p>
+          <a:p>
+            <a:pPr lvl="0" indent="0" marL="0">
+              <a:buNone/>
+            </a:pPr>
+            <a:r>
+              <a:rPr/>
+              <a:t>Handout section 9.</a:t>
             </a:r>
           </a:p>
         </p:txBody>
@@ -5558,41 +5579,21 @@
             </a:pPr>
             <a:r>
               <a:rPr/>
-              <a:t>Two curves again, the same shape of story as the depth curve earlier this lesson but reached by adding trees instead of depth. Training reaches 1.000 by around 200 trees and sits there. Cross-validated accuracy climbs quickly, peaks near 30 trees, and drifts down over the following 770.</a:t>
-            </a:r>
-          </a:p>
-          <a:p>
-            <a:pPr lvl="0" indent="0" marL="0">
-              <a:buNone/>
-            </a:pPr>
-          </a:p>
-          <a:p>
-            <a:pPr lvl="0" indent="0" marL="0">
-              <a:buNone/>
-            </a:pPr>
-            <a:r>
-              <a:rPr/>
-              <a:t>The point worth making explicit: the damage per added tree here is small and easy to miss on a single run - which is why the number of trees has to be chosen on held-out data, never left to run, even though the overfit is gentler than a single unconstrained tree’s. There are two ways to choose it. This lesson cross-validated a list of tree counts and kept the best, 30. The other is early stopping, which the deck has not shown, so say what it is: set aside part of the training data, watch the score on it as trees are added, and stop once it has not improved for a number of rounds. In scikit-learn that is the </a:t>
-            </a:r>
-            <a:r>
-              <a:rPr>
-                <a:latin typeface="Courier"/>
-              </a:rPr>
-              <a:t>n_iter_no_change</a:t>
-            </a:r>
-            <a:r>
-              <a:rPr/>
-              <a:t> argument of </a:t>
-            </a:r>
-            <a:r>
-              <a:rPr>
-                <a:latin typeface="Courier"/>
-              </a:rPr>
-              <a:t>GradientBoostingClassifier</a:t>
-            </a:r>
-            <a:r>
-              <a:rPr/>
-              <a:t>.</a:t>
+              <a:t>Unlike bagging, boosting keeps reducing its training loss for as long as it runs, because every new tree is built specifically to reduce what remains - including the 7% of labels that are noise by construction. There is nothing in the algorithm itself that says “stop”. Be exact about which quantity: the log-loss on the training data never goes up, while training accuracy only follows it on the whole - fit to all 1,200 applicants with 800 trees, it dips at a handful of individual steps, too small to show in this table (handout section 10).</a:t>
+            </a:r>
+          </a:p>
+          <a:p>
+            <a:pPr lvl="0" indent="0" marL="0">
+              <a:buNone/>
+            </a:pPr>
+          </a:p>
+          <a:p>
+            <a:pPr lvl="0" indent="0" marL="0">
+              <a:buNone/>
+            </a:pPr>
+            <a:r>
+              <a:rPr/>
+              <a:t>Point at the peak, 30 trees, and then at 800: training accuracy reached 1.000 by 200 trees and stayed there, and cross-validated accuracy has drifted down from 0.897 to 0.890, under a point, since the peak. Contrast the size of that drop with the unconstrained single tree of the depth table, which lost three points past its own peak - boosting’s overfitting is real but gentler.</a:t>
             </a:r>
           </a:p>
           <a:p>
@@ -5688,43 +5689,41 @@
             </a:pPr>
             <a:r>
               <a:rPr/>
-              <a:t>Learning rate and tree count are not independent - both control how much total correction the ensemble applies, so they trade off against each other. At α = 0.02, 120 trees haven’t finished fitting the signal: training accuracy is still under 0.89. At α = 1.00, the ensemble has memorised the training set completely and given back more than two points of cross-validated accuracy for it, 0.902 down to 0.878.</a:t>
-            </a:r>
-          </a:p>
-          <a:p>
-            <a:pPr lvl="0" indent="0" marL="0">
-              <a:buNone/>
-            </a:pPr>
-          </a:p>
-          <a:p>
-            <a:pPr lvl="0" indent="0" marL="0">
-              <a:buNone/>
-            </a:pPr>
-            <a:r>
-              <a:rPr/>
-              <a:t>The best setting sits in between - large enough to make real progress within the tree budget, small enough that any one correction is easy to outvote if it turns out to be wrong. Ask the room which direction they’d guess is “more regularised” before revealing that it’s the </a:t>
-            </a:r>
-            <a:r>
-              <a:rPr i="1"/>
-              <a:t>small</a:t>
-            </a:r>
-            <a:r>
-              <a:rPr/>
-              <a:t> α side, the same kind of inverted-direction trap lesson 6’s C was.</a:t>
-            </a:r>
-          </a:p>
-          <a:p>
-            <a:pPr lvl="0" indent="0" marL="0">
-              <a:buNone/>
-            </a:pPr>
-          </a:p>
-          <a:p>
-            <a:pPr lvl="0" indent="0" marL="0">
-              <a:buNone/>
-            </a:pPr>
-            <a:r>
-              <a:rPr/>
-              <a:t>A predictable slip: “only alpha times the number of trees matters, so half the learning rate with twice the trees gives the same model”. It is reasonable - the notes above just said both knobs set the total correction. But they are not interchangeable: each tree is fit to what the ensemble before it still gets wrong, so many small steps follow a different path from a few large ones. A large step overshoots on the noisy labels and the next trees spend themselves undoing it; a small step lets later trees outvote an early mistake. The trade-off is real, the equivalence is not.</a:t>
+              <a:t>Two curves again, the same shape of story as the depth curve earlier this lesson but reached by adding trees instead of depth. Training reaches 1.000 by around 200 trees and sits there. Cross-validated accuracy climbs quickly, peaks near 30 trees, and drifts down over the following 770.</a:t>
+            </a:r>
+          </a:p>
+          <a:p>
+            <a:pPr lvl="0" indent="0" marL="0">
+              <a:buNone/>
+            </a:pPr>
+          </a:p>
+          <a:p>
+            <a:pPr lvl="0" indent="0" marL="0">
+              <a:buNone/>
+            </a:pPr>
+            <a:r>
+              <a:rPr/>
+              <a:t>The point worth making explicit: the damage per added tree here is small and easy to miss on a single run - which is why the number of trees has to be chosen on held-out data, never left to run, even though the overfit is gentler than a single unconstrained tree’s. There are two ways to choose it. This lesson cross-validated a list of tree counts and kept the best, 30. The other is early stopping, which the deck has not shown, so say what it is: set aside part of the training data, watch the score on it as trees are added, and stop once it has not improved for a number of rounds. In scikit-learn that is the </a:t>
+            </a:r>
+            <a:r>
+              <a:rPr>
+                <a:latin typeface="Courier"/>
+              </a:rPr>
+              <a:t>n_iter_no_change</a:t>
+            </a:r>
+            <a:r>
+              <a:rPr/>
+              <a:t> argument of </a:t>
+            </a:r>
+            <a:r>
+              <a:rPr>
+                <a:latin typeface="Courier"/>
+              </a:rPr>
+              <a:t>GradientBoostingClassifier</a:t>
+            </a:r>
+            <a:r>
+              <a:rPr/>
+              <a:t>.</a:t>
             </a:r>
           </a:p>
           <a:p>
@@ -5944,49 +5943,57 @@
             </a:pPr>
             <a:r>
               <a:rPr/>
-              <a:t>The table is the notebook’s map: boosting from scratch on the residuals, then scikit-learn’s classifier, the tree-count and learning-rate sweeps, and the leaderboard of the next slide.</a:t>
-            </a:r>
-          </a:p>
-          <a:p>
-            <a:pPr lvl="0" indent="0" marL="0">
-              <a:buNone/>
-            </a:pPr>
-          </a:p>
-          <a:p>
-            <a:pPr lvl="0" indent="0" marL="0">
-              <a:buNone/>
-            </a:pPr>
-            <a:r>
-              <a:rPr/>
-              <a:t>Run Notebooks/03_gradient_boosting.ipynb. Eighteen minutes.</a:t>
-            </a:r>
-          </a:p>
-          <a:p>
-            <a:pPr lvl="0" indent="0" marL="0">
-              <a:buNone/>
-            </a:pPr>
-          </a:p>
-          <a:p>
-            <a:pPr lvl="0" indent="0" marL="0">
-              <a:buNone/>
-            </a:pPr>
-            <a:r>
-              <a:rPr/>
-              <a:t>The cell to protect is the residual sweep at 1, 5, 20 and 60 trees - seeing the ensemble’s fit against the true function rise and then fall again, in real time, is the most direct experience of boosting’s overfitting available in this course.</a:t>
-            </a:r>
-          </a:p>
-          <a:p>
-            <a:pPr lvl="0" indent="0" marL="0">
-              <a:buNone/>
-            </a:pPr>
-          </a:p>
-          <a:p>
-            <a:pPr lvl="0" indent="0" marL="0">
-              <a:buNone/>
-            </a:pPr>
-            <a:r>
-              <a:rPr/>
-              <a:t>If time is short, skip the learning-rate sweep live and set it as reading - the table is in handout section 10.</a:t>
+              <a:t>Learning rate and tree count are not independent - both control how much total correction the ensemble applies, so they trade off against each other. At α = 0.02, 120 trees haven’t finished fitting the signal: training accuracy is still under 0.89. At α = 1.00, the ensemble has memorised the training set completely and given back more than two points of cross-validated accuracy for it, 0.902 down to 0.878.</a:t>
+            </a:r>
+          </a:p>
+          <a:p>
+            <a:pPr lvl="0" indent="0" marL="0">
+              <a:buNone/>
+            </a:pPr>
+          </a:p>
+          <a:p>
+            <a:pPr lvl="0" indent="0" marL="0">
+              <a:buNone/>
+            </a:pPr>
+            <a:r>
+              <a:rPr/>
+              <a:t>The best setting sits in between - large enough to make real progress within the tree budget, small enough that any one correction is easy to outvote if it turns out to be wrong. Ask the room which direction they’d guess is “more regularised” before revealing that it’s the </a:t>
+            </a:r>
+            <a:r>
+              <a:rPr i="1"/>
+              <a:t>small</a:t>
+            </a:r>
+            <a:r>
+              <a:rPr/>
+              <a:t> α side, the same kind of inverted-direction trap lesson 6’s C was.</a:t>
+            </a:r>
+          </a:p>
+          <a:p>
+            <a:pPr lvl="0" indent="0" marL="0">
+              <a:buNone/>
+            </a:pPr>
+          </a:p>
+          <a:p>
+            <a:pPr lvl="0" indent="0" marL="0">
+              <a:buNone/>
+            </a:pPr>
+            <a:r>
+              <a:rPr/>
+              <a:t>A predictable slip: “only alpha times the number of trees matters, so half the learning rate with twice the trees gives the same model”. It is reasonable - the notes above just said both knobs set the total correction. But they are not interchangeable: each tree is fit to what the ensemble before it still gets wrong, so many small steps follow a different path from a few large ones. A large step overshoots on the noisy labels and the next trees spend themselves undoing it; a small step lets later trees outvote an early mistake. The trade-off is real, the equivalence is not.</a:t>
+            </a:r>
+          </a:p>
+          <a:p>
+            <a:pPr lvl="0" indent="0" marL="0">
+              <a:buNone/>
+            </a:pPr>
+          </a:p>
+          <a:p>
+            <a:pPr lvl="0" indent="0" marL="0">
+              <a:buNone/>
+            </a:pPr>
+            <a:r>
+              <a:rPr/>
+              <a:t>Handout section 10.</a:t>
             </a:r>
           </a:p>
         </p:txBody>
@@ -6068,49 +6075,49 @@
             </a:pPr>
             <a:r>
               <a:rPr/>
-              <a:t>Everything from this lesson, cross-validated the same way. Read down the column and let the pattern speak before naming it: every ensemble method - bagging, the random forest, gradient boosting - lands within about a point and a half of the others, and all three sit closer to the ceiling than either single tree.</a:t>
-            </a:r>
-          </a:p>
-          <a:p>
-            <a:pPr lvl="0" indent="0" marL="0">
-              <a:buNone/>
-            </a:pPr>
-          </a:p>
-          <a:p>
-            <a:pPr lvl="0" indent="0" marL="0">
-              <a:buNone/>
-            </a:pPr>
-            <a:r>
-              <a:rPr/>
-              <a:t>The ceiling itself: 1 minus the 7% of labels deliberately flipped. No method reaches it, and none should - a model that classified the flipped labels “correctly” would be modelling the noise, not the rule.</a:t>
-            </a:r>
-          </a:p>
-          <a:p>
-            <a:pPr lvl="0" indent="0" marL="0">
-              <a:buNone/>
-            </a:pPr>
-          </a:p>
-          <a:p>
-            <a:pPr lvl="0" indent="0" marL="0">
-              <a:buNone/>
-            </a:pPr>
-            <a:r>
-              <a:rPr/>
-              <a:t>One honest caveat, in lesson 5’s terms. The depth of 8 and the 30 boosted trees were picked because they scored best on these same five folds, so those two rows are slightly optimistic; nested cross-validation would remove that. Bagging and the random forest ran at their defaults, chose nothing, and are not affected - and they are still on top.</a:t>
-            </a:r>
-          </a:p>
-          <a:p>
-            <a:pPr lvl="0" indent="0" marL="0">
-              <a:buNone/>
-            </a:pPr>
-          </a:p>
-          <a:p>
-            <a:pPr lvl="0" indent="0" marL="0">
-              <a:buNone/>
-            </a:pPr>
-            <a:r>
-              <a:rPr/>
-              <a:t>Handout section 11.</a:t>
+              <a:t>The table is the notebook’s map: boosting from scratch on the residuals, then scikit-learn’s classifier, the tree-count and learning-rate sweeps, and the leaderboard of the next slide.</a:t>
+            </a:r>
+          </a:p>
+          <a:p>
+            <a:pPr lvl="0" indent="0" marL="0">
+              <a:buNone/>
+            </a:pPr>
+          </a:p>
+          <a:p>
+            <a:pPr lvl="0" indent="0" marL="0">
+              <a:buNone/>
+            </a:pPr>
+            <a:r>
+              <a:rPr/>
+              <a:t>Run Notebooks/03_gradient_boosting.ipynb. Eighteen minutes.</a:t>
+            </a:r>
+          </a:p>
+          <a:p>
+            <a:pPr lvl="0" indent="0" marL="0">
+              <a:buNone/>
+            </a:pPr>
+          </a:p>
+          <a:p>
+            <a:pPr lvl="0" indent="0" marL="0">
+              <a:buNone/>
+            </a:pPr>
+            <a:r>
+              <a:rPr/>
+              <a:t>The cell to protect is the residual sweep at 1, 5, 20 and 60 trees - seeing the ensemble’s fit against the true function rise and then fall again, in real time, is the most direct experience of boosting’s overfitting available in this course.</a:t>
+            </a:r>
+          </a:p>
+          <a:p>
+            <a:pPr lvl="0" indent="0" marL="0">
+              <a:buNone/>
+            </a:pPr>
+          </a:p>
+          <a:p>
+            <a:pPr lvl="0" indent="0" marL="0">
+              <a:buNone/>
+            </a:pPr>
+            <a:r>
+              <a:rPr/>
+              <a:t>If time is short, skip the learning-rate sweep live and set it as reading - the table is in handout section 10.</a:t>
             </a:r>
           </a:p>
         </p:txBody>
@@ -6192,21 +6199,35 @@
             </a:pPr>
             <a:r>
               <a:rPr/>
-              <a:t>Read the three findings as a set - together they are this lesson’s real content, more than any single accuracy number.</a:t>
-            </a:r>
-          </a:p>
-          <a:p>
-            <a:pPr lvl="0" indent="0" marL="0">
-              <a:buNone/>
-            </a:pPr>
-          </a:p>
-          <a:p>
-            <a:pPr lvl="0" indent="0" marL="0">
-              <a:buNone/>
-            </a:pPr>
-            <a:r>
-              <a:rPr/>
-              <a:t>The third finding is the one to land hardest, because it repeats a pattern they have now seen with several different methods: flexibility without a stopping rule is not an advantage. Ask the room to name the earlier occurrences before you do - the degree-12 polynomial in lesson 3, k = 1 in lesson 6, and, earlier today, the boosted ensemble that kept adding trees past its peak.</a:t>
+              <a:t>Everything from this lesson, cross-validated the same way. Read down the column and let the pattern speak before naming it: every ensemble method - bagging, the random forest, gradient boosting - lands within about a point and a half of the others, and all three sit closer to the ceiling than either single tree.</a:t>
+            </a:r>
+          </a:p>
+          <a:p>
+            <a:pPr lvl="0" indent="0" marL="0">
+              <a:buNone/>
+            </a:pPr>
+          </a:p>
+          <a:p>
+            <a:pPr lvl="0" indent="0" marL="0">
+              <a:buNone/>
+            </a:pPr>
+            <a:r>
+              <a:rPr/>
+              <a:t>The ceiling itself: 1 minus the 7% of labels deliberately flipped. No method reaches it, and none should - a model that classified the flipped labels “correctly” would be modelling the noise, not the rule.</a:t>
+            </a:r>
+          </a:p>
+          <a:p>
+            <a:pPr lvl="0" indent="0" marL="0">
+              <a:buNone/>
+            </a:pPr>
+          </a:p>
+          <a:p>
+            <a:pPr lvl="0" indent="0" marL="0">
+              <a:buNone/>
+            </a:pPr>
+            <a:r>
+              <a:rPr/>
+              <a:t>One honest caveat, in lesson 5’s terms. The depth of 8 and the 30 boosted trees were picked because they scored best on these same five folds, so those two rows are slightly optimistic; nested cross-validation would remove that. Bagging and the random forest ran at their defaults, chose nothing, and are not affected - and they are still on top.</a:t>
             </a:r>
           </a:p>
           <a:p>
@@ -6302,21 +6323,21 @@
             </a:pPr>
             <a:r>
               <a:rPr/>
-              <a:t>A table to photograph, exactly as lesson 6 closed with one. Work down it and attach today’s evidence to each row rather than leaving it as generic advice: the nine-leaf tree for the first row, the leaderboard for the second, the tree-count and learning-rate tables for the third, the noise experiment for the fourth, the out-of-bag slide for the fifth.</a:t>
-            </a:r>
-          </a:p>
-          <a:p>
-            <a:pPr lvl="0" indent="0" marL="0">
-              <a:buNone/>
-            </a:pPr>
-          </a:p>
-          <a:p>
-            <a:pPr lvl="0" indent="0" marL="0">
-              <a:buNone/>
-            </a:pPr>
-            <a:r>
-              <a:rPr/>
-              <a:t>The fourth row is worth a sentence of its own, tying back to the noise experiment: with two real features among 22 columns and 1,200 rows, more than half the importance already landed on noise. Many rows do not protect against it; what matters is how many useless columns compete at each split. Permutation importance, the check, was slide 39; the next slide comes back to it.</a:t>
+              <a:t>Read the three findings as a set - together they are this lesson’s real content, more than any single accuracy number.</a:t>
+            </a:r>
+          </a:p>
+          <a:p>
+            <a:pPr lvl="0" indent="0" marL="0">
+              <a:buNone/>
+            </a:pPr>
+          </a:p>
+          <a:p>
+            <a:pPr lvl="0" indent="0" marL="0">
+              <a:buNone/>
+            </a:pPr>
+            <a:r>
+              <a:rPr/>
+              <a:t>The third finding is the one to land hardest, because it repeats a pattern they have now seen with several different methods: flexibility without a stopping rule is not an advantage. Ask the room to name the earlier occurrences before you do - the degree-12 polynomial in lesson 3, k = 1 in lesson 6, and, earlier today, the boosted ensemble that kept adding trees past its peak.</a:t>
             </a:r>
           </a:p>
           <a:p>
@@ -6412,115 +6433,35 @@
             </a:pPr>
             <a:r>
               <a:rPr/>
-              <a:t>This is the number to carry out of the room. Say it once more, slowly: with twenty pure-noise columns against two real features, more than half of a random forest’s importance mass sat on columns wired to nothing.</a:t>
-            </a:r>
-          </a:p>
-          <a:p>
-            <a:pPr lvl="0" indent="0" marL="0">
-              <a:buNone/>
-            </a:pPr>
-          </a:p>
-          <a:p>
-            <a:pPr lvl="0" indent="0" marL="0">
-              <a:buNone/>
-            </a:pPr>
-            <a:r>
-              <a:rPr/>
-              <a:t>Ask them to write it down - derivations fade, this kind of number tends not to. Every lesson so far has left one of these - lesson 1’s 77% accuracy on coin-flip labels, lesson 3’s coefficient of 365 where an unpenalised fit wanted billions - and this is lesson 7’s.</a:t>
-            </a:r>
-          </a:p>
-          <a:p>
-            <a:pPr lvl="0" indent="0" marL="0">
-              <a:buNone/>
-            </a:pPr>
-          </a:p>
-          <a:p>
-            <a:pPr lvl="0" indent="0" marL="0">
-              <a:buNone/>
-            </a:pPr>
-            <a:r>
-              <a:rPr/>
-              <a:t>The second and third bullets are the mechanism, and there are two causes, not one. Take them in order.</a:t>
-            </a:r>
-          </a:p>
-          <a:p>
-            <a:pPr lvl="0" indent="0" marL="0">
-              <a:buNone/>
-            </a:pPr>
-          </a:p>
-          <a:p>
-            <a:pPr lvl="0" indent="0" marL="0">
-              <a:buNone/>
-            </a:pPr>
-            <a:r>
-              <a:rPr/>
-              <a:t>The menu. The square root of 22, rounded down, is 4, so each split chooses among 4 random columns. The chance that all 4 come from the 20 noise columns is 4,845 / 7,315 = 0.662: two splits in three offer no real feature. At those splits the tree still has to pick something, and it picks the noise column that happens to separate the classes best.</a:t>
-            </a:r>
-          </a:p>
-          <a:p>
-            <a:pPr lvl="0" indent="0" marL="0">
-              <a:buNone/>
-            </a:pPr>
-          </a:p>
-          <a:p>
-            <a:pPr lvl="0" indent="0" marL="0">
-              <a:buNone/>
-            </a:pPr>
-            <a:r>
-              <a:rPr/>
-              <a:t>Small groups. The menu is not the whole story, and notebook 2 shows it: with </a:t>
-            </a:r>
-            <a:r>
-              <a:rPr>
-                <a:latin typeface="Courier"/>
-              </a:rPr>
-              <a:t>max_features=None</a:t>
-            </a:r>
-            <a:r>
-              <a:rPr/>
-              <a:t>, every split offered all 22 columns, the noise share falls from 54.5% to 28%, not to zero. Deep in a tree a node holds a handful of applicants, and among twenty columns of random numbers one will almost always separate a handful of applicants a little better than income or debt can, purely by chance. Every such split credits noise.</a:t>
-            </a:r>
-          </a:p>
-          <a:p>
-            <a:pPr lvl="0" indent="0" marL="0">
-              <a:buNone/>
-            </a:pPr>
-          </a:p>
-          <a:p>
-            <a:pPr lvl="0" indent="0" marL="0">
-              <a:buNone/>
-            </a:pPr>
-            <a:r>
-              <a:rPr/>
-              <a:t>Most will predict the noise share falls to zero with the full menu, and the reasoning is sound as far as it goes - a real feature is now always there to be chosen near the root. It is the bottom of the trees that it misses. The same run raised the accuracy from 0.837 to 0.897: with 20 useless columns out of 22, the random menu costs more accuracy than decorrelating the trees buys back. The default is a good default, not a law.</a:t>
-            </a:r>
-          </a:p>
-          <a:p>
-            <a:pPr lvl="0" indent="0" marL="0">
-              <a:buNone/>
-            </a:pPr>
-          </a:p>
-          <a:p>
-            <a:pPr lvl="0" indent="0" marL="0">
-              <a:buNone/>
-            </a:pPr>
-            <a:r>
-              <a:rPr/>
-              <a:t>The last bullet sends them back to the check of slide 39: shuffling a column on held-out data costs the two real features 0.09 and 0.18 of accuracy, and each noise column almost nothing.</a:t>
-            </a:r>
-          </a:p>
-          <a:p>
-            <a:pPr lvl="0" indent="0" marL="0">
-              <a:buNone/>
-            </a:pPr>
-          </a:p>
-          <a:p>
-            <a:pPr lvl="0" indent="0" marL="0">
-              <a:buNone/>
-            </a:pPr>
-            <a:r>
-              <a:rPr/>
-              <a:t>Handout section 7 has the full mechanism.</a:t>
+              <a:t>A table to photograph, exactly as lesson 6 closed with one. Work down it and attach today’s evidence to each row rather than leaving it as generic advice: the nine-leaf tree for the first row, the leaderboard for the second, the tree-count and learning-rate tables for the third, the noise experiment for the fourth, the out-of-bag slide for the fifth.</a:t>
+            </a:r>
+          </a:p>
+          <a:p>
+            <a:pPr lvl="0" indent="0" marL="0">
+              <a:buNone/>
+            </a:pPr>
+          </a:p>
+          <a:p>
+            <a:pPr lvl="0" indent="0" marL="0">
+              <a:buNone/>
+            </a:pPr>
+            <a:r>
+              <a:rPr/>
+              <a:t>The fourth row is worth a sentence of its own, tying back to the noise experiment: with two real features among 22 columns and 1,200 rows, more than half the importance already landed on noise. Many rows do not protect against it; what matters is how many useless columns compete at each split. Permutation importance, the check, was slide 40; the next slide comes back to it.</a:t>
+            </a:r>
+          </a:p>
+          <a:p>
+            <a:pPr lvl="0" indent="0" marL="0">
+              <a:buNone/>
+            </a:pPr>
+          </a:p>
+          <a:p>
+            <a:pPr lvl="0" indent="0" marL="0">
+              <a:buNone/>
+            </a:pPr>
+            <a:r>
+              <a:rPr/>
+              <a:t>Handout section 11.</a:t>
             </a:r>
           </a:p>
         </p:txBody>
@@ -6602,49 +6543,115 @@
             </a:pPr>
             <a:r>
               <a:rPr/>
-              <a:t>Close on the same shape as lesson 6’s summary: a handful of numbers that carry the lesson’s argument without needing the mathematics behind them re-derived.</a:t>
-            </a:r>
-          </a:p>
-          <a:p>
-            <a:pPr lvl="0" indent="0" marL="0">
-              <a:buNone/>
-            </a:pPr>
-          </a:p>
-          <a:p>
-            <a:pPr lvl="0" indent="0" marL="0">
-              <a:buNone/>
-            </a:pPr>
-            <a:r>
-              <a:rPr/>
-              <a:t>If they remember one habit from today, make it this: before trusting a random forest’s importance ranking, ask how many of the columns could plausibly matter at all - many useless columns are what hand credit to noise, and the accuracy score gives no warning - and then check the ranking by shuffling on held-out data, as slide 39 did.</a:t>
-            </a:r>
-          </a:p>
-          <a:p>
-            <a:pPr lvl="0" indent="0" marL="0">
-              <a:buNone/>
-            </a:pPr>
-          </a:p>
-          <a:p>
-            <a:pPr lvl="0" indent="0" marL="0">
-              <a:buNone/>
-            </a:pPr>
-            <a:r>
-              <a:rPr/>
-              <a:t>Next lesson turns from labelled data to unlabelled data. Every model so far learned from examples whose answer was known: a price, a class, a default. Lesson 8 asks what structure there is in data when nobody has given the answer at all.</a:t>
-            </a:r>
-          </a:p>
-          <a:p>
-            <a:pPr lvl="0" indent="0" marL="0">
-              <a:buNone/>
-            </a:pPr>
-          </a:p>
-          <a:p>
-            <a:pPr lvl="0" indent="0" marL="0">
-              <a:buNone/>
-            </a:pPr>
-            <a:r>
-              <a:rPr/>
-              <a:t>Handout summary and notation table.</a:t>
+              <a:t>This is the number to carry out of the room. Say it once more, slowly: with twenty pure-noise columns against two real features, more than half of a random forest’s importance mass sat on columns wired to nothing.</a:t>
+            </a:r>
+          </a:p>
+          <a:p>
+            <a:pPr lvl="0" indent="0" marL="0">
+              <a:buNone/>
+            </a:pPr>
+          </a:p>
+          <a:p>
+            <a:pPr lvl="0" indent="0" marL="0">
+              <a:buNone/>
+            </a:pPr>
+            <a:r>
+              <a:rPr/>
+              <a:t>Ask them to write it down - derivations fade, this kind of number tends not to. Every lesson so far has left one of these - lesson 1’s 77% accuracy on coin-flip labels, lesson 3’s coefficient of 365 where an unpenalised fit wanted billions - and this is lesson 7’s.</a:t>
+            </a:r>
+          </a:p>
+          <a:p>
+            <a:pPr lvl="0" indent="0" marL="0">
+              <a:buNone/>
+            </a:pPr>
+          </a:p>
+          <a:p>
+            <a:pPr lvl="0" indent="0" marL="0">
+              <a:buNone/>
+            </a:pPr>
+            <a:r>
+              <a:rPr/>
+              <a:t>The second and third bullets are the mechanism, and there are two causes, not one. Take them in order.</a:t>
+            </a:r>
+          </a:p>
+          <a:p>
+            <a:pPr lvl="0" indent="0" marL="0">
+              <a:buNone/>
+            </a:pPr>
+          </a:p>
+          <a:p>
+            <a:pPr lvl="0" indent="0" marL="0">
+              <a:buNone/>
+            </a:pPr>
+            <a:r>
+              <a:rPr/>
+              <a:t>The menu. The square root of 22, rounded down, is 4, so each split chooses among 4 random columns. The chance that all 4 come from the 20 noise columns is 4,845 / 7,315 = 0.662: two splits in three offer no real feature. At those splits the tree still has to pick something, and it picks the noise column that happens to separate the classes best.</a:t>
+            </a:r>
+          </a:p>
+          <a:p>
+            <a:pPr lvl="0" indent="0" marL="0">
+              <a:buNone/>
+            </a:pPr>
+          </a:p>
+          <a:p>
+            <a:pPr lvl="0" indent="0" marL="0">
+              <a:buNone/>
+            </a:pPr>
+            <a:r>
+              <a:rPr/>
+              <a:t>Small groups. The menu is not the whole story, and notebook 2 shows it: with </a:t>
+            </a:r>
+            <a:r>
+              <a:rPr>
+                <a:latin typeface="Courier"/>
+              </a:rPr>
+              <a:t>max_features=None</a:t>
+            </a:r>
+            <a:r>
+              <a:rPr/>
+              <a:t>, every split offered all 22 columns, the noise share falls from 54.5% to 28%, not to zero. Deep in a tree a node holds a handful of applicants, and among twenty columns of random numbers one will almost always separate a handful of applicants a little better than income or debt can, purely by chance. Every such split credits noise.</a:t>
+            </a:r>
+          </a:p>
+          <a:p>
+            <a:pPr lvl="0" indent="0" marL="0">
+              <a:buNone/>
+            </a:pPr>
+          </a:p>
+          <a:p>
+            <a:pPr lvl="0" indent="0" marL="0">
+              <a:buNone/>
+            </a:pPr>
+            <a:r>
+              <a:rPr/>
+              <a:t>Most will predict the noise share falls to zero with the full menu, and the reasoning is sound as far as it goes - a real feature is now always there to be chosen near the root. It is the bottom of the trees that it misses. The same run raised the accuracy from 0.837 to 0.897: with 20 useless columns out of 22, the random menu costs more accuracy than decorrelating the trees buys back. The default is a good default, not a law.</a:t>
+            </a:r>
+          </a:p>
+          <a:p>
+            <a:pPr lvl="0" indent="0" marL="0">
+              <a:buNone/>
+            </a:pPr>
+          </a:p>
+          <a:p>
+            <a:pPr lvl="0" indent="0" marL="0">
+              <a:buNone/>
+            </a:pPr>
+            <a:r>
+              <a:rPr/>
+              <a:t>The last bullet sends them back to the check of slide 40: shuffling a column on held-out data costs the two real features 0.09 and 0.18 of accuracy, and each noise column almost nothing.</a:t>
+            </a:r>
+          </a:p>
+          <a:p>
+            <a:pPr lvl="0" indent="0" marL="0">
+              <a:buNone/>
+            </a:pPr>
+          </a:p>
+          <a:p>
+            <a:pPr lvl="0" indent="0" marL="0">
+              <a:buNone/>
+            </a:pPr>
+            <a:r>
+              <a:rPr/>
+              <a:t>Handout section 7 has the full mechanism.</a:t>
             </a:r>
           </a:p>
         </p:txBody>
@@ -6726,35 +6733,49 @@
             </a:pPr>
             <a:r>
               <a:rPr/>
-              <a:t>Set it explicitly and say out loud when it comes back: the first ten minutes of lesson 8, Friday 27 November.</a:t>
-            </a:r>
-          </a:p>
-          <a:p>
-            <a:pPr lvl="0" indent="0" marL="0">
-              <a:buNone/>
-            </a:pPr>
-          </a:p>
-          <a:p>
-            <a:pPr lvl="0" indent="0" marL="0">
-              <a:buNone/>
-            </a:pPr>
-            <a:r>
-              <a:rPr/>
-              <a:t>Remind them of the standing rule from lesson 5: every reported number needs a cross-validated spread, and any feature-importance claim needs the check this lesson just demonstrated - a random forest’s importance ranking is a claim to be verified, not a fact to be quoted.</a:t>
-            </a:r>
-          </a:p>
-          <a:p>
-            <a:pPr lvl="0" indent="0" marL="0">
-              <a:buNone/>
-            </a:pPr>
-          </a:p>
-          <a:p>
-            <a:pPr lvl="0" indent="0" marL="0">
-              <a:buNone/>
-            </a:pPr>
-            <a:r>
-              <a:rPr/>
-              <a:t>Next week: unsupervised learning, the first lesson in which the data comes with no labels at all.</a:t>
+              <a:t>Close on the same shape as lesson 6’s summary: a handful of numbers that carry the lesson’s argument without needing the mathematics behind them re-derived.</a:t>
+            </a:r>
+          </a:p>
+          <a:p>
+            <a:pPr lvl="0" indent="0" marL="0">
+              <a:buNone/>
+            </a:pPr>
+          </a:p>
+          <a:p>
+            <a:pPr lvl="0" indent="0" marL="0">
+              <a:buNone/>
+            </a:pPr>
+            <a:r>
+              <a:rPr/>
+              <a:t>If they remember one habit from today, make it this: before trusting a random forest’s importance ranking, ask how many of the columns could plausibly matter at all - many useless columns are what hand credit to noise, and the accuracy score gives no warning - and then check the ranking by shuffling on held-out data, as slide 40 did.</a:t>
+            </a:r>
+          </a:p>
+          <a:p>
+            <a:pPr lvl="0" indent="0" marL="0">
+              <a:buNone/>
+            </a:pPr>
+          </a:p>
+          <a:p>
+            <a:pPr lvl="0" indent="0" marL="0">
+              <a:buNone/>
+            </a:pPr>
+            <a:r>
+              <a:rPr/>
+              <a:t>Next lesson turns from labelled data to unlabelled data. Every model so far learned from examples whose answer was known: a price, a class, a default. Lesson 8 asks what structure there is in data when nobody has given the answer at all.</a:t>
+            </a:r>
+          </a:p>
+          <a:p>
+            <a:pPr lvl="0" indent="0" marL="0">
+              <a:buNone/>
+            </a:pPr>
+          </a:p>
+          <a:p>
+            <a:pPr lvl="0" indent="0" marL="0">
+              <a:buNone/>
+            </a:pPr>
+            <a:r>
+              <a:rPr/>
+              <a:t>Handout summary and notation table.</a:t>
             </a:r>
           </a:p>
         </p:txBody>
@@ -6777,6 +6798,116 @@
             <a:fld id="{18BDFEC3-8487-43E8-A154-7C12CBC1FFF2}" type="slidenum">
               <a:rPr lang="en-US"/>
               <a:t>57</a:t>
+            </a:fld>
+            <a:endParaRPr lang="en-US"/>
+          </a:p>
+        </p:txBody>
+      </p:sp>
+    </p:spTree>
+  </p:cSld>
+</p:notes>
+</file>
+
+<file path=ppt/notesSlides/notesSlide57.xml><?xml version="1.0" encoding="utf-8"?>
+<p:notes xmlns:a="http://schemas.openxmlformats.org/drawingml/2006/main" xmlns:r="http://schemas.openxmlformats.org/officeDocument/2006/relationships" xmlns:p="http://schemas.openxmlformats.org/presentationml/2006/main">
+  <p:cSld>
+    <p:spTree>
+      <p:nvGrpSpPr>
+        <p:cNvPr id="1" name=""/>
+        <p:cNvGrpSpPr/>
+        <p:nvPr/>
+      </p:nvGrpSpPr>
+      <p:grpSpPr>
+        <a:xfrm>
+          <a:off x="0" y="0"/>
+          <a:ext cx="0" cy="0"/>
+          <a:chOff x="0" y="0"/>
+          <a:chExt cx="0" cy="0"/>
+        </a:xfrm>
+      </p:grpSpPr>
+      <p:sp>
+        <p:nvSpPr>
+          <p:cNvPr id="2" name="Slide Image Placeholder 1"/>
+          <p:cNvSpPr>
+            <a:spLocks noGrp="1" noRot="1" noChangeAspect="1"/>
+          </p:cNvSpPr>
+          <p:nvPr>
+            <p:ph type="sldImg"/>
+          </p:nvPr>
+        </p:nvSpPr>
+        <p:spPr/>
+      </p:sp>
+      <p:sp>
+        <p:nvSpPr>
+          <p:cNvPr id="3" name="Notes Placeholder 2"/>
+          <p:cNvSpPr>
+            <a:spLocks noGrp="1"/>
+          </p:cNvSpPr>
+          <p:nvPr>
+            <p:ph type="body" idx="1"/>
+          </p:nvPr>
+        </p:nvSpPr>
+        <p:spPr/>
+        <p:txBody>
+          <a:bodyPr/>
+          <a:lstStyle/>
+          <a:p>
+            <a:pPr lvl="0" indent="0" marL="0">
+              <a:buNone/>
+            </a:pPr>
+            <a:r>
+              <a:rPr/>
+              <a:t>Set it explicitly and say out loud when it comes back: the first ten minutes of lesson 8, Friday 27 November.</a:t>
+            </a:r>
+          </a:p>
+          <a:p>
+            <a:pPr lvl="0" indent="0" marL="0">
+              <a:buNone/>
+            </a:pPr>
+          </a:p>
+          <a:p>
+            <a:pPr lvl="0" indent="0" marL="0">
+              <a:buNone/>
+            </a:pPr>
+            <a:r>
+              <a:rPr/>
+              <a:t>Remind them of the standing rule from lesson 5: every reported number needs a cross-validated spread, and any feature-importance claim needs the check this lesson just demonstrated - a random forest’s importance ranking is a claim to be verified, not a fact to be quoted.</a:t>
+            </a:r>
+          </a:p>
+          <a:p>
+            <a:pPr lvl="0" indent="0" marL="0">
+              <a:buNone/>
+            </a:pPr>
+          </a:p>
+          <a:p>
+            <a:pPr lvl="0" indent="0" marL="0">
+              <a:buNone/>
+            </a:pPr>
+            <a:r>
+              <a:rPr/>
+              <a:t>Next week: unsupervised learning, the first lesson in which the data comes with no labels at all.</a:t>
+            </a:r>
+          </a:p>
+        </p:txBody>
+      </p:sp>
+      <p:sp>
+        <p:nvSpPr>
+          <p:cNvPr id="4" name="Slide Number Placeholder 3"/>
+          <p:cNvSpPr>
+            <a:spLocks noGrp="1"/>
+          </p:cNvSpPr>
+          <p:nvPr>
+            <p:ph type="sldNum" sz="quarter" idx="10"/>
+          </p:nvPr>
+        </p:nvSpPr>
+        <p:spPr/>
+        <p:txBody>
+          <a:bodyPr/>
+          <a:lstStyle/>
+          <a:p>
+            <a:fld id="{18BDFEC3-8487-43E8-A154-7C12CBC1FFF2}" type="slidenum">
+              <a:rPr lang="en-US"/>
+              <a:t>58</a:t>
             </a:fld>
             <a:endParaRPr lang="en-US"/>
           </a:p>
@@ -6878,6 +7009,20 @@
             </a:pPr>
             <a:r>
               <a:rPr/>
+              <a:t>The third bullet’s stopping rules act branch by branch, not on the whole tree. A pure group stops its own branch while the others carry on, and the algorithm is finished when every branch has stopped. Without a depth limit, every branch runs until it is pure, which is the training accuracy of 1.000 on slide 21.</a:t>
+            </a:r>
+          </a:p>
+          <a:p>
+            <a:pPr lvl="0" indent="0" marL="0">
+              <a:buNone/>
+            </a:pPr>
+          </a:p>
+          <a:p>
+            <a:pPr lvl="0" indent="0" marL="0">
+              <a:buNone/>
+            </a:pPr>
+            <a:r>
+              <a:rPr/>
               <a:t>Handout section 2.1.</a:t>
             </a:r>
           </a:p>
@@ -6960,7 +7105,7 @@
             </a:pPr>
             <a:r>
               <a:rPr/>
-              <a:t>The previous slide’s sentence, run three times on the loan data. Each column is one more round; on top the cuts in the plane, the new ones in gold, and underneath the tree that asks the same questions. Point at the two halves of each column in turn: every gold line on top is a gold box underneath. The legend at the bottom gives the colours: gold, a question added in this step; white, a question from an earlier step; teal or rust, a group not split yet. Every box, question or group, shows its applicants and the share who defaulted.</a:t>
+              <a:t>The previous slide’s sentence, run three times on the loan data. Each column is one more round; on top the cuts in the plane, the new ones in gold, and underneath the tree that asks the same questions. Point at the two halves of each column in turn: every gold line on top is a gold box underneath. The legend at the bottom gives the colours: gold, a question added in this step; white, a question from an earlier step; teal or rust, a group not split yet. Every box, question or group, shows its applicants and the share who defaulted, and the gain its split buys, ΔG, defined on slide 13: how much purer the two groups below are than the group above.</a:t>
             </a:r>
           </a:p>
           <a:p>
@@ -6988,21 +7133,21 @@
             </a:pPr>
             <a:r>
               <a:rPr/>
-              <a:t>Step 2 is the word “recursive” made visible, and the place where a student asks where the two groups of step 1 went. They are still there: each group’s box has become the question asked of it. The 971 now reads “income ≤ 28?” with 971 · 26% under it, and splits into 87 + 884 = 971; the 229 reads “debt ≤ 0.947?” and splits into 160 + 69 = 229. A leaf that is split becomes a question; its applicants do not go anywhere. The two questions are different - income on the left, debt again on the right - because each group is searched on its own, without regard to the other. That is “independently” in the sentence.</a:t>
-            </a:r>
-          </a:p>
-          <a:p>
-            <a:pPr lvl="0" indent="0" marL="0">
-              <a:buNone/>
-            </a:pPr>
-          </a:p>
-          <a:p>
-            <a:pPr lvl="0" indent="0" marL="0">
-              <a:buNone/>
-            </a:pPr>
-            <a:r>
-              <a:rPr/>
-              <a:t>Step 3 is where to slow down, because it shows greed. On the right, one split sets aside a single applicant from 68 others - the cut at 0.948, a thousandth above the 0.947 one, so in the plane the two gold lines lie on top of each other. Someone will ask why the tree asks about debt twice. The two thresholds are different questions: exactly one applicant has a debt ratio between 0.947 and 0.948, that applicant repaid, and the tree spent a whole split on separating them. Another split divides 160 applicants into groups at 90% and 97% default - both groups are still predicted “default”, so that cut changes no decision at all. Each was the best available move at that node; the tree has no way to ask whether it was worth making. And neither interior island has appeared yet: three rounds were spent on the easy strips. Hold that thought - it is the “what greedy misses” slide in ten minutes.</a:t>
+              <a:t>Step 2 is the word “recursive” made visible, and the place where a student asks where the two groups of step 1 went. They are still there: each group’s box has become the question asked of it. The 971 now reads “income ≤ 28?” with 971 · 26% under it, and splits into 87 + 884 = 971; the 229 reads “debt ≤ 0.947?” and splits into 160 + 69 = 229. A leaf that is split becomes a question; its applicants do not go anywhere. The two questions are different - income on the left, debt again on the right - because each group is searched on its own, without regard to the other. That is “independently” in the sentence. Compare the two gains: the income question on the left buys 0.0836, the debt question on the right 0.0026, about thirty times less. The right one changes no prediction at all: its two groups, 160 at 96% and 69 at 88%, are both still mostly defaulted, as the 229 were. The tree makes the split anyway, because it judges impurity, not decisions, and any gain above zero is taken.</a:t>
+            </a:r>
+          </a:p>
+          <a:p>
+            <a:pPr lvl="0" indent="0" marL="0">
+              <a:buNone/>
+            </a:pPr>
+          </a:p>
+          <a:p>
+            <a:pPr lvl="0" indent="0" marL="0">
+              <a:buNone/>
+            </a:pPr>
+            <a:r>
+              <a:rPr/>
+              <a:t>Step 3 is where to slow down, because it shows greed. On the right, one split sets aside a single applicant from 68 others - the cut at 0.948, a thousandth above the 0.947 one, so in the plane the two gold lines lie on top of each other. Someone will ask why the tree asks about debt twice. The two thresholds are different questions: exactly one applicant has a debt ratio between 0.947 and 0.948, that applicant repaid, and the tree spent a whole split on separating them. Another split divides 160 applicants into groups at 90% and 97% default - both groups are still predicted “default”, so that cut changes no decision at all. Each was the best available move at that node; the tree has no way to ask whether it was worth making. Add it up: the four splits of the third level change exactly one prediction in 1,200 - training accuracy goes from 0.8400 at depth 2 to 0.8408 at depth 3 - and that one applicant is a flipped label. Income 23.22 is below the floor and debt 0.9475 above the ceiling, so both rules say default, yet the label says repaid. The tree spent a split memorising noise. And neither interior island has appeared yet: three rounds were spent on the easy strips. Hold that thought - it is the “what greedy misses” slide in ten minutes.</a:t>
             </a:r>
           </a:p>
           <a:p>
@@ -7126,6 +7271,20 @@
             </a:pPr>
             <a:r>
               <a:rPr/>
+              <a:t>A predictable slip: “this split is impure”. Impurity belongs to a group, not to a split. A split is then judged by the impurity of the two groups it makes, weighted by their sizes - slides 12 and 13.</a:t>
+            </a:r>
+          </a:p>
+          <a:p>
+            <a:pPr lvl="0" indent="0" marL="0">
+              <a:buNone/>
+            </a:pPr>
+          </a:p>
+          <a:p>
+            <a:pPr lvl="0" indent="0" marL="0">
+              <a:buNone/>
+            </a:pPr>
+            <a:r>
+              <a:rPr/>
               <a:t>Handout section 2.2.</a:t>
             </a:r>
           </a:p>
@@ -7208,7 +7367,7 @@
             </a:pPr>
             <a:r>
               <a:rPr/>
-              <a:t>Each p in the sum is the fraction of the group belonging to one class, across C classes. Do not derive anything here - state what it does: subtract, from one, the chance two examples share a class if drawn independently from the group’s own frequencies. A pure group scores zero; a maximally mixed one scores as high as the formula allows.</a:t>
+              <a:t>Each p in the sum is the fraction of the group belonging to one class, across C classes. The classes are the labels a group can hold: here two, defaulted and repaid, so C = 2, and the two shares add up to 1. The third line works it on a group the room has just seen: slide 8’s right-hand group of step 1, before it is split again - 215 of the 229 defaulted, so p = 215/229 = 0.939 for defaulted and 14/229 = 0.061 for repaid; 0.939² + 0.061² = 0.885, and 1 - 0.885 = 0.115. Nearly pure. The single repaid applicant of step 3 is a pure group: 1 - (0² + 1²) = 0. Do not derive anything here - state what it does: subtract, from one, the chance two examples share a class if drawn independently from the group’s own frequencies. A pure group scores zero; a maximally mixed one scores as high as the formula allows.</a:t>
             </a:r>
           </a:p>
           <a:p>
@@ -10442,7 +10601,7 @@
       </p:sp>
       <p:pic>
         <p:nvPicPr>
-          <p:cNvPr descr="eq_f823b12014.png" id="0" name="Picture 1"/>
+          <p:cNvPr descr="eq_221e003fe1.png" id="0" name="Picture 1"/>
           <p:cNvPicPr>
             <a:picLocks noGrp="1" noChangeAspect="1"/>
           </p:cNvPicPr>
@@ -10456,8 +10615,8 @@
         </p:blipFill>
         <p:spPr bwMode="auto">
           <a:xfrm>
-            <a:off x="2162991" y="1815411"/>
-            <a:ext cx="4818018" cy="2061556"/>
+            <a:off x="457200" y="1665089"/>
+            <a:ext cx="8229600" cy="2362200"/>
           </a:xfrm>
           <a:prstGeom prst="rect">
             <a:avLst/>
@@ -10545,7 +10704,7 @@
             <a:pPr lvl="0"/>
             <a:r>
               <a:rPr/>
-              <a:t>G = 2p(1-p), where p is the fraction of one class</a:t>
+              <a:t>G = 2p(1-p), where p is the share defaulted and 1-p the share repaid</a:t>
             </a:r>
           </a:p>
           <a:p>
@@ -10654,7 +10813,7 @@
             <a:pPr lvl="0"/>
             <a:r>
               <a:rPr/>
-              <a:t>A candidate split divides a parent group P into a left child L and a right child R; </a:t>
+              <a:t>A split divides a parent P into a left child L and a right child R; </a:t>
             </a:r>
             <a:r>
               <a:rPr i="1"/>
@@ -10662,22 +10821,22 @@
             </a:r>
             <a:r>
               <a:rPr/>
-              <a:t> counts the examples in each</a:t>
+              <a:t> counts each one’s examples: at the root, 1,200 in P = 971 in L + 229 in R</a:t>
             </a:r>
           </a:p>
           <a:p>
             <a:pPr lvl="0"/>
             <a:r>
               <a:rPr/>
-              <a:t>Worth taking if the children are, </a:t>
+              <a:t>Worth taking if the children’s impurities, </a:t>
             </a:r>
             <a:r>
               <a:rPr b="1"/>
-              <a:t>on average, purer</a:t>
-            </a:r>
-            <a:r>
-              <a:rPr/>
-              <a:t> than the parent</a:t>
+              <a:t>averaged</a:t>
+            </a:r>
+            <a:r>
+              <a:rPr/>
+              <a:t>, are lower than the parent’s: at the root 0.474 against 0.330</a:t>
             </a:r>
           </a:p>
           <a:p>
@@ -11246,7 +11405,7 @@
             </a:pPr>
             <a:r>
               <a:rPr/>
-              <a:t>Checked against scikit-learn</a:t>
+              <a:t>The loop, in seven lines</a:t>
             </a:r>
           </a:p>
         </p:txBody>
@@ -11271,42 +11430,275 @@
           <a:bodyPr/>
           <a:lstStyle/>
           <a:p>
-            <a:pPr lvl="0"/>
-            <a:r>
-              <a:rPr/>
-              <a:t>The from-scratch implementation and scikit-learn’s </a:t>
+            <a:pPr lvl="0" indent="0">
+              <a:buNone/>
+            </a:pPr>
+            <a:r>
+              <a:rPr b="1">
+                <a:solidFill>
+                  <a:srgbClr val="007020"/>
+                </a:solidFill>
+                <a:latin typeface="Courier"/>
+              </a:rPr>
+              <a:t>def</a:t>
             </a:r>
             <a:r>
               <a:rPr>
                 <a:latin typeface="Courier"/>
               </a:rPr>
-              <a:t>DecisionTreeClassifier</a:t>
-            </a:r>
-            <a:r>
-              <a:rPr/>
-              <a:t> make </a:t>
-            </a:r>
-            <a:r>
-              <a:rPr b="1"/>
-              <a:t>the same prediction for all 1,200 applicants</a:t>
-            </a:r>
-            <a:r>
-              <a:rPr/>
-              <a:t>, at every depth tested</a:t>
-            </a:r>
-          </a:p>
-          <a:p>
-            <a:pPr lvl="0"/>
-            <a:r>
-              <a:rPr/>
-              <a:t>Not a coincidence: both search the same space by the same greedy rule</a:t>
-            </a:r>
-          </a:p>
-          <a:p>
-            <a:pPr lvl="0"/>
-            <a:r>
-              <a:rPr/>
-              <a:t>From here on, the notebooks use scikit-learn’s implementation: the same algorithm, compiled, not a different one</a:t>
+              <a:t> grow(g):</a:t>
+            </a:r>
+            <a:br/>
+            <a:r>
+              <a:rPr>
+                <a:latin typeface="Courier"/>
+              </a:rPr>
+              <a:t>  </a:t>
+            </a:r>
+            <a:r>
+              <a:rPr b="1">
+                <a:solidFill>
+                  <a:srgbClr val="007020"/>
+                </a:solidFill>
+                <a:latin typeface="Courier"/>
+              </a:rPr>
+              <a:t>if</a:t>
+            </a:r>
+            <a:r>
+              <a:rPr>
+                <a:latin typeface="Courier"/>
+              </a:rPr>
+              <a:t> stop(g): </a:t>
+            </a:r>
+            <a:r>
+              <a:rPr b="1">
+                <a:solidFill>
+                  <a:srgbClr val="007020"/>
+                </a:solidFill>
+                <a:latin typeface="Courier"/>
+              </a:rPr>
+              <a:t>return</a:t>
+            </a:r>
+            <a:r>
+              <a:rPr>
+                <a:latin typeface="Courier"/>
+              </a:rPr>
+              <a:t> leaf(g)</a:t>
+            </a:r>
+            <a:br/>
+            <a:r>
+              <a:rPr>
+                <a:latin typeface="Courier"/>
+              </a:rPr>
+              <a:t>  gain </a:t>
+            </a:r>
+            <a:r>
+              <a:rPr>
+                <a:solidFill>
+                  <a:srgbClr val="666666"/>
+                </a:solidFill>
+                <a:latin typeface="Courier"/>
+              </a:rPr>
+              <a:t>=</a:t>
+            </a:r>
+            <a:r>
+              <a:rPr>
+                <a:latin typeface="Courier"/>
+              </a:rPr>
+              <a:t> {c: ΔG(g, c) </a:t>
+            </a:r>
+            <a:r>
+              <a:rPr b="1">
+                <a:solidFill>
+                  <a:srgbClr val="007020"/>
+                </a:solidFill>
+                <a:latin typeface="Courier"/>
+              </a:rPr>
+              <a:t>for</a:t>
+            </a:r>
+            <a:r>
+              <a:rPr>
+                <a:latin typeface="Courier"/>
+              </a:rPr>
+              <a:t> c </a:t>
+            </a:r>
+            <a:r>
+              <a:rPr b="1">
+                <a:solidFill>
+                  <a:srgbClr val="007020"/>
+                </a:solidFill>
+                <a:latin typeface="Courier"/>
+              </a:rPr>
+              <a:t>in</a:t>
+            </a:r>
+            <a:r>
+              <a:rPr>
+                <a:latin typeface="Courier"/>
+              </a:rPr>
+              <a:t> splits(g)}</a:t>
+            </a:r>
+            <a:br/>
+            <a:r>
+              <a:rPr>
+                <a:latin typeface="Courier"/>
+              </a:rPr>
+              <a:t>  best </a:t>
+            </a:r>
+            <a:r>
+              <a:rPr>
+                <a:solidFill>
+                  <a:srgbClr val="666666"/>
+                </a:solidFill>
+                <a:latin typeface="Courier"/>
+              </a:rPr>
+              <a:t>=</a:t>
+            </a:r>
+            <a:r>
+              <a:rPr>
+                <a:latin typeface="Courier"/>
+              </a:rPr>
+              <a:t> </a:t>
+            </a:r>
+            <a:r>
+              <a:rPr>
+                <a:solidFill>
+                  <a:srgbClr val="008000"/>
+                </a:solidFill>
+                <a:latin typeface="Courier"/>
+              </a:rPr>
+              <a:t>max</a:t>
+            </a:r>
+            <a:r>
+              <a:rPr>
+                <a:latin typeface="Courier"/>
+              </a:rPr>
+              <a:t>(gain, key</a:t>
+            </a:r>
+            <a:r>
+              <a:rPr>
+                <a:solidFill>
+                  <a:srgbClr val="666666"/>
+                </a:solidFill>
+                <a:latin typeface="Courier"/>
+              </a:rPr>
+              <a:t>=</a:t>
+            </a:r>
+            <a:r>
+              <a:rPr>
+                <a:latin typeface="Courier"/>
+              </a:rPr>
+              <a:t>gain.get)</a:t>
+            </a:r>
+            <a:br/>
+            <a:r>
+              <a:rPr>
+                <a:latin typeface="Courier"/>
+              </a:rPr>
+              <a:t>  </a:t>
+            </a:r>
+            <a:r>
+              <a:rPr b="1">
+                <a:solidFill>
+                  <a:srgbClr val="007020"/>
+                </a:solidFill>
+                <a:latin typeface="Courier"/>
+              </a:rPr>
+              <a:t>if</a:t>
+            </a:r>
+            <a:r>
+              <a:rPr>
+                <a:latin typeface="Courier"/>
+              </a:rPr>
+              <a:t> gain[best] </a:t>
+            </a:r>
+            <a:r>
+              <a:rPr>
+                <a:solidFill>
+                  <a:srgbClr val="666666"/>
+                </a:solidFill>
+                <a:latin typeface="Courier"/>
+              </a:rPr>
+              <a:t>&lt;=</a:t>
+            </a:r>
+            <a:r>
+              <a:rPr>
+                <a:latin typeface="Courier"/>
+              </a:rPr>
+              <a:t> </a:t>
+            </a:r>
+            <a:r>
+              <a:rPr>
+                <a:solidFill>
+                  <a:srgbClr val="40A070"/>
+                </a:solidFill>
+                <a:latin typeface="Courier"/>
+              </a:rPr>
+              <a:t>0</a:t>
+            </a:r>
+            <a:r>
+              <a:rPr>
+                <a:latin typeface="Courier"/>
+              </a:rPr>
+              <a:t>: </a:t>
+            </a:r>
+            <a:r>
+              <a:rPr b="1">
+                <a:solidFill>
+                  <a:srgbClr val="007020"/>
+                </a:solidFill>
+                <a:latin typeface="Courier"/>
+              </a:rPr>
+              <a:t>return</a:t>
+            </a:r>
+            <a:r>
+              <a:rPr>
+                <a:latin typeface="Courier"/>
+              </a:rPr>
+              <a:t> leaf(g)</a:t>
+            </a:r>
+            <a:br/>
+            <a:r>
+              <a:rPr>
+                <a:latin typeface="Courier"/>
+              </a:rPr>
+              <a:t>  L, R </a:t>
+            </a:r>
+            <a:r>
+              <a:rPr>
+                <a:solidFill>
+                  <a:srgbClr val="666666"/>
+                </a:solidFill>
+                <a:latin typeface="Courier"/>
+              </a:rPr>
+              <a:t>=</a:t>
+            </a:r>
+            <a:r>
+              <a:rPr>
+                <a:latin typeface="Courier"/>
+              </a:rPr>
+              <a:t> split(g, best)</a:t>
+            </a:r>
+            <a:br/>
+            <a:r>
+              <a:rPr>
+                <a:latin typeface="Courier"/>
+              </a:rPr>
+              <a:t>  </a:t>
+            </a:r>
+            <a:r>
+              <a:rPr b="1">
+                <a:solidFill>
+                  <a:srgbClr val="007020"/>
+                </a:solidFill>
+                <a:latin typeface="Courier"/>
+              </a:rPr>
+              <a:t>return</a:t>
+            </a:r>
+            <a:r>
+              <a:rPr>
+                <a:latin typeface="Courier"/>
+              </a:rPr>
+              <a:t> node(best, grow(L), grow(R))</a:t>
             </a:r>
           </a:p>
         </p:txBody>
@@ -11358,7 +11750,7 @@
             </a:pPr>
             <a:r>
               <a:rPr/>
-              <a:t>What greedy misses</a:t>
+              <a:t>Checked against scikit-learn</a:t>
             </a:r>
           </a:p>
         </p:txBody>
@@ -11386,29 +11778,39 @@
             <a:pPr lvl="0"/>
             <a:r>
               <a:rPr/>
-              <a:t>The search never asks “which pair of splits helps most together”: only “which single split helps most right now”</a:t>
+              <a:t>The from-scratch implementation and scikit-learn’s </a:t>
+            </a:r>
+            <a:r>
+              <a:rPr>
+                <a:latin typeface="Courier"/>
+              </a:rPr>
+              <a:t>DecisionTreeClassifier</a:t>
+            </a:r>
+            <a:r>
+              <a:rPr/>
+              <a:t> make </a:t>
+            </a:r>
+            <a:r>
+              <a:rPr b="1"/>
+              <a:t>the same prediction for all 1,200 applicants</a:t>
+            </a:r>
+            <a:r>
+              <a:rPr/>
+              <a:t>, at every depth tested</a:t>
             </a:r>
           </a:p>
           <a:p>
             <a:pPr lvl="0"/>
             <a:r>
               <a:rPr/>
-              <a:t>A feature that only pays off </a:t>
-            </a:r>
-            <a:r>
-              <a:rPr b="1"/>
-              <a:t>in combination</a:t>
-            </a:r>
-            <a:r>
-              <a:rPr/>
-              <a:t> with a later split can be invisible to a shallow tree</a:t>
+              <a:t>Not a coincidence: both search the same space by the same greedy rule</a:t>
             </a:r>
           </a:p>
           <a:p>
             <a:pPr lvl="0"/>
             <a:r>
               <a:rPr/>
-              <a:t>Exactly what happens to this dataset’s two interior “stressed” islands, covered next</a:t>
+              <a:t>From here on, the notebooks use scikit-learn’s implementation: the same algorithm, compiled, not a different one</a:t>
             </a:r>
           </a:p>
         </p:txBody>
@@ -11582,7 +11984,7 @@
             </a:pPr>
             <a:r>
               <a:rPr/>
-              <a:t>Depth is the bias-variance dial</a:t>
+              <a:t>What greedy misses</a:t>
             </a:r>
           </a:p>
         </p:txBody>
@@ -11609,52 +12011,30 @@
           <a:p>
             <a:pPr lvl="0"/>
             <a:r>
-              <a:rPr>
-                <a:latin typeface="Courier"/>
-              </a:rPr>
-              <a:t>max_depth</a:t>
-            </a:r>
-            <a:r>
-              <a:rPr/>
-              <a:t>: the most questions </a:t>
+              <a:rPr/>
+              <a:t>The search never asks “which pair of splits helps most together”: only “which single split helps most right now”</a:t>
+            </a:r>
+          </a:p>
+          <a:p>
+            <a:pPr lvl="0"/>
+            <a:r>
+              <a:rPr/>
+              <a:t>A feature that only pays off </a:t>
             </a:r>
             <a:r>
               <a:rPr b="1"/>
-              <a:t>one applicant</a:t>
-            </a:r>
-            <a:r>
-              <a:rPr/>
-              <a:t> answers</a:t>
+              <a:t>in combination</a:t>
+            </a:r>
+            <a:r>
+              <a:rPr/>
+              <a:t> with a later split can be invisible to a shallow tree</a:t>
             </a:r>
           </a:p>
           <a:p>
             <a:pPr lvl="0"/>
             <a:r>
-              <a:rPr b="1"/>
-              <a:t>Shallow tree</a:t>
-            </a:r>
-            <a:r>
-              <a:rPr/>
-              <a:t>: few questions, only the coarsest structure. High bias, low variance</a:t>
-            </a:r>
-          </a:p>
-          <a:p>
-            <a:pPr lvl="0"/>
-            <a:r>
-              <a:rPr b="1"/>
-              <a:t>Deep tree</a:t>
-            </a:r>
-            <a:r>
-              <a:rPr/>
-              <a:t>: enough questions to isolate single points. Training accuracy </a:t>
-            </a:r>
-            <a:r>
-              <a:rPr b="1"/>
-              <a:t>exactly 1.000</a:t>
-            </a:r>
-            <a:r>
-              <a:rPr/>
-              <a:t>, even on data with no structure, unless two examples share every feature value but not the label</a:t>
+              <a:rPr/>
+              <a:t>Exactly what happens to this dataset’s two interior “stressed” islands, covered next</a:t>
             </a:r>
           </a:p>
         </p:txBody>
@@ -11665,6 +12045,130 @@
 </file>
 
 <file path=ppt/slides/slide21.xml><?xml version="1.0" encoding="utf-8"?>
+<p:sld xmlns:a="http://schemas.openxmlformats.org/drawingml/2006/main" xmlns:r="http://schemas.openxmlformats.org/officeDocument/2006/relationships" xmlns:p="http://schemas.openxmlformats.org/presentationml/2006/main">
+  <p:cSld>
+    <p:spTree>
+      <p:nvGrpSpPr>
+        <p:cNvPr id="1" name=""/>
+        <p:cNvGrpSpPr/>
+        <p:nvPr/>
+      </p:nvGrpSpPr>
+      <p:grpSpPr>
+        <a:xfrm>
+          <a:off x="0" y="0"/>
+          <a:ext cx="0" cy="0"/>
+          <a:chOff x="0" y="0"/>
+          <a:chExt cx="0" cy="0"/>
+        </a:xfrm>
+      </p:grpSpPr>
+      <p:sp>
+        <p:nvSpPr>
+          <p:cNvPr id="2" name="Title 1"/>
+          <p:cNvSpPr>
+            <a:spLocks noGrp="1"/>
+          </p:cNvSpPr>
+          <p:nvPr>
+            <p:ph type="title"/>
+          </p:nvPr>
+        </p:nvSpPr>
+        <p:spPr>
+          <a:xfrm>
+            <a:off x="457200" y="205979"/>
+            <a:ext cx="8229600" cy="857250"/>
+          </a:xfrm>
+        </p:spPr>
+        <p:txBody>
+          <a:bodyPr/>
+          <a:lstStyle/>
+          <a:p>
+            <a:pPr lvl="0" indent="0" marL="0">
+              <a:buNone/>
+            </a:pPr>
+            <a:r>
+              <a:rPr/>
+              <a:t>Depth is the bias-variance dial</a:t>
+            </a:r>
+          </a:p>
+        </p:txBody>
+      </p:sp>
+      <p:sp>
+        <p:nvSpPr>
+          <p:cNvPr id="3" name="Content Placeholder 2"/>
+          <p:cNvSpPr>
+            <a:spLocks noGrp="1"/>
+          </p:cNvSpPr>
+          <p:nvPr>
+            <p:ph idx="1"/>
+          </p:nvPr>
+        </p:nvSpPr>
+        <p:spPr>
+          <a:xfrm>
+            <a:off x="457200" y="1200151"/>
+            <a:ext cx="8229600" cy="3394472"/>
+          </a:xfrm>
+        </p:spPr>
+        <p:txBody>
+          <a:bodyPr/>
+          <a:lstStyle/>
+          <a:p>
+            <a:pPr lvl="0"/>
+            <a:r>
+              <a:rPr>
+                <a:latin typeface="Courier"/>
+              </a:rPr>
+              <a:t>max_depth</a:t>
+            </a:r>
+            <a:r>
+              <a:rPr/>
+              <a:t>: the most questions </a:t>
+            </a:r>
+            <a:r>
+              <a:rPr b="1"/>
+              <a:t>one applicant</a:t>
+            </a:r>
+            <a:r>
+              <a:rPr/>
+              <a:t> answers</a:t>
+            </a:r>
+          </a:p>
+          <a:p>
+            <a:pPr lvl="0"/>
+            <a:r>
+              <a:rPr b="1"/>
+              <a:t>Shallow tree</a:t>
+            </a:r>
+            <a:r>
+              <a:rPr/>
+              <a:t>: few questions, only the coarsest structure. High bias, low variance</a:t>
+            </a:r>
+          </a:p>
+          <a:p>
+            <a:pPr lvl="0"/>
+            <a:r>
+              <a:rPr b="1"/>
+              <a:t>Deep tree</a:t>
+            </a:r>
+            <a:r>
+              <a:rPr/>
+              <a:t>: enough questions to isolate single points. Training accuracy </a:t>
+            </a:r>
+            <a:r>
+              <a:rPr b="1"/>
+              <a:t>exactly 1.000</a:t>
+            </a:r>
+            <a:r>
+              <a:rPr/>
+              <a:t>, even on data with no structure, unless two examples share every feature value but not the label</a:t>
+            </a:r>
+          </a:p>
+        </p:txBody>
+      </p:sp>
+    </p:spTree>
+  </p:cSld>
+</p:sld>
+</file>
+
+<file path=ppt/slides/slide22.xml><?xml version="1.0" encoding="utf-8"?>
 <p:sld xmlns:a="http://schemas.openxmlformats.org/drawingml/2006/main" xmlns:r="http://schemas.openxmlformats.org/officeDocument/2006/relationships" xmlns:p="http://schemas.openxmlformats.org/presentationml/2006/main">
   <p:cSld>
     <p:spTree>
@@ -12126,7 +12630,7 @@
 </p:sld>
 </file>
 
-<file path=ppt/slides/slide22.xml><?xml version="1.0" encoding="utf-8"?>
+<file path=ppt/slides/slide23.xml><?xml version="1.0" encoding="utf-8"?>
 <p:sld xmlns:a="http://schemas.openxmlformats.org/drawingml/2006/main" xmlns:r="http://schemas.openxmlformats.org/officeDocument/2006/relationships" xmlns:p="http://schemas.openxmlformats.org/presentationml/2006/main">
   <p:cSld>
     <p:spTree>
@@ -12208,7 +12712,7 @@
 </p:sld>
 </file>
 
-<file path=ppt/slides/slide23.xml><?xml version="1.0" encoding="utf-8"?>
+<file path=ppt/slides/slide24.xml><?xml version="1.0" encoding="utf-8"?>
 <p:sld xmlns:a="http://schemas.openxmlformats.org/drawingml/2006/main" xmlns:r="http://schemas.openxmlformats.org/officeDocument/2006/relationships" xmlns:p="http://schemas.openxmlformats.org/presentationml/2006/main">
   <p:cSld>
     <p:spTree>
@@ -12290,159 +12794,6 @@
 </p:sld>
 </file>
 
-<file path=ppt/slides/slide24.xml><?xml version="1.0" encoding="utf-8"?>
-<p:sld xmlns:a="http://schemas.openxmlformats.org/drawingml/2006/main" xmlns:r="http://schemas.openxmlformats.org/officeDocument/2006/relationships" xmlns:p="http://schemas.openxmlformats.org/presentationml/2006/main">
-  <p:cSld>
-    <p:spTree>
-      <p:nvGrpSpPr>
-        <p:cNvPr id="1" name=""/>
-        <p:cNvGrpSpPr/>
-        <p:nvPr/>
-      </p:nvGrpSpPr>
-      <p:grpSpPr>
-        <a:xfrm>
-          <a:off x="0" y="0"/>
-          <a:ext cx="0" cy="0"/>
-          <a:chOff x="0" y="0"/>
-          <a:chExt cx="0" cy="0"/>
-        </a:xfrm>
-      </p:grpSpPr>
-      <p:sp>
-        <p:nvSpPr>
-          <p:cNvPr id="2" name="Title 1"/>
-          <p:cNvSpPr>
-            <a:spLocks noGrp="1"/>
-          </p:cNvSpPr>
-          <p:nvPr>
-            <p:ph type="title"/>
-          </p:nvPr>
-        </p:nvSpPr>
-        <p:spPr>
-          <a:xfrm>
-            <a:off x="457200" y="205979"/>
-            <a:ext cx="8229600" cy="857250"/>
-          </a:xfrm>
-        </p:spPr>
-        <p:txBody>
-          <a:bodyPr/>
-          <a:lstStyle/>
-          <a:p>
-            <a:pPr lvl="0" indent="0" marL="0">
-              <a:buNone/>
-            </a:pPr>
-            <a:r>
-              <a:rPr/>
-              <a:t>Reading a tree, and the knob that keeps it small</a:t>
-            </a:r>
-          </a:p>
-        </p:txBody>
-      </p:sp>
-      <p:sp>
-        <p:nvSpPr>
-          <p:cNvPr id="3" name="Content Placeholder 2"/>
-          <p:cNvSpPr>
-            <a:spLocks noGrp="1"/>
-          </p:cNvSpPr>
-          <p:nvPr>
-            <p:ph idx="1"/>
-          </p:nvPr>
-        </p:nvSpPr>
-        <p:spPr>
-          <a:xfrm>
-            <a:off x="457200" y="1200151"/>
-            <a:ext cx="8229600" cy="3394472"/>
-          </a:xfrm>
-        </p:spPr>
-        <p:txBody>
-          <a:bodyPr/>
-          <a:lstStyle/>
-          <a:p>
-            <a:pPr lvl="0"/>
-            <a:r>
-              <a:rPr>
-                <a:latin typeface="Courier"/>
-              </a:rPr>
-              <a:t>max_depth</a:t>
-            </a:r>
-            <a:r>
-              <a:rPr/>
-              <a:t> </a:t>
-            </a:r>
-            <a:r>
-              <a:rPr b="1"/>
-              <a:t>caps every path</a:t>
-            </a:r>
-            <a:r>
-              <a:rPr/>
-              <a:t>: each node above the cap is split if it can be, worth it or not</a:t>
-            </a:r>
-          </a:p>
-          <a:p>
-            <a:pPr lvl="0"/>
-            <a:r>
-              <a:rPr>
-                <a:latin typeface="Courier"/>
-              </a:rPr>
-              <a:t>max_leaf_nodes</a:t>
-            </a:r>
-            <a:r>
-              <a:rPr/>
-              <a:t> is a </a:t>
-            </a:r>
-            <a:r>
-              <a:rPr b="1"/>
-              <a:t>budget of leaves</a:t>
-            </a:r>
-            <a:r>
-              <a:rPr/>
-              <a:t>, spent on the largest ΔG first</a:t>
-            </a:r>
-          </a:p>
-          <a:p>
-            <a:pPr lvl="0"/>
-            <a:r>
-              <a:rPr>
-                <a:latin typeface="Courier"/>
-              </a:rPr>
-              <a:t>max_leaf_nodes = 9</a:t>
-            </a:r>
-            <a:r>
-              <a:rPr/>
-              <a:t>: </a:t>
-            </a:r>
-            <a:r>
-              <a:rPr b="1"/>
-              <a:t>90.8%</a:t>
-            </a:r>
-            <a:r>
-              <a:rPr/>
-              <a:t> training accuracy; thresholds 28 (income floor) and 0.82 (debt ceiling)</a:t>
-            </a:r>
-          </a:p>
-          <a:p>
-            <a:pPr lvl="0"/>
-            <a:r>
-              <a:rPr/>
-              <a:t>In code: </a:t>
-            </a:r>
-            <a:r>
-              <a:rPr>
-                <a:latin typeface="Courier"/>
-              </a:rPr>
-              <a:t>export_text(tree)</a:t>
-            </a:r>
-            <a:r>
-              <a:rPr/>
-              <a:t> prints the tree as if/else rules</a:t>
-            </a:r>
-          </a:p>
-        </p:txBody>
-      </p:sp>
-    </p:spTree>
-  </p:cSld>
-</p:sld>
-</file>
-
 <file path=ppt/slides/slide25.xml><?xml version="1.0" encoding="utf-8"?>
 <p:sld xmlns:a="http://schemas.openxmlformats.org/drawingml/2006/main" xmlns:r="http://schemas.openxmlformats.org/officeDocument/2006/relationships" xmlns:p="http://schemas.openxmlformats.org/presentationml/2006/main">
   <p:cSld>
@@ -12485,7 +12836,7 @@
             </a:pPr>
             <a:r>
               <a:rPr/>
-              <a:t>A tree that doesn’t stay still</a:t>
+              <a:t>Reading a tree, and the knob that keeps it small</a:t>
             </a:r>
           </a:p>
         </p:txBody>
@@ -12512,59 +12863,81 @@
           <a:p>
             <a:pPr lvl="0"/>
             <a:r>
-              <a:rPr/>
-              <a:t>Two trees at </a:t>
-            </a:r>
-            <a:r>
               <a:rPr>
                 <a:latin typeface="Courier"/>
               </a:rPr>
-              <a:t>max_depth = 6</a:t>
-            </a:r>
-            <a:r>
-              <a:rPr/>
-              <a:t>, each on a random 65% of the applicants (no replacement)</a:t>
+              <a:t>max_depth</a:t>
+            </a:r>
+            <a:r>
+              <a:rPr/>
+              <a:t> </a:t>
+            </a:r>
+            <a:r>
+              <a:rPr b="1"/>
+              <a:t>caps every path</a:t>
+            </a:r>
+            <a:r>
+              <a:rPr/>
+              <a:t>: each node above the cap is split if it can be, worth it or not</a:t>
             </a:r>
           </a:p>
           <a:p>
             <a:pPr lvl="0"/>
             <a:r>
-              <a:rPr/>
-              <a:t>The debt ceiling, the strongest split, agrees to within </a:t>
+              <a:rPr>
+                <a:latin typeface="Courier"/>
+              </a:rPr>
+              <a:t>max_leaf_nodes</a:t>
+            </a:r>
+            <a:r>
+              <a:rPr/>
+              <a:t> is a </a:t>
             </a:r>
             <a:r>
               <a:rPr b="1"/>
-              <a:t>0.001</a:t>
+              <a:t>budget of leaves</a:t>
+            </a:r>
+            <a:r>
+              <a:rPr/>
+              <a:t>, spent on the largest ΔG first</a:t>
             </a:r>
           </a:p>
           <a:p>
             <a:pPr lvl="0"/>
             <a:r>
-              <a:rPr/>
-              <a:t>The trees grow </a:t>
+              <a:rPr>
+                <a:latin typeface="Courier"/>
+              </a:rPr>
+              <a:t>max_leaf_nodes = 9</a:t>
+            </a:r>
+            <a:r>
+              <a:rPr/>
+              <a:t>: </a:t>
             </a:r>
             <a:r>
               <a:rPr b="1"/>
-              <a:t>31 and 33 leaves</a:t>
-            </a:r>
-            <a:r>
-              <a:rPr/>
-              <a:t>, and </a:t>
-            </a:r>
-            <a:r>
-              <a:rPr b="1"/>
-              <a:t>disagree on 11.7%</a:t>
-            </a:r>
-            <a:r>
-              <a:rPr/>
-              <a:t> of predictions on the full dataset</a:t>
+              <a:t>90.8%</a:t>
+            </a:r>
+            <a:r>
+              <a:rPr/>
+              <a:t> training accuracy; thresholds 28 (income floor) and 0.82 (debt ceiling)</a:t>
             </a:r>
           </a:p>
           <a:p>
             <a:pPr lvl="0"/>
             <a:r>
               <a:rPr/>
-              <a:t>The strongest split is stable; the weaker ones, which shape most of the tree, are not</a:t>
+              <a:t>In code: </a:t>
+            </a:r>
+            <a:r>
+              <a:rPr>
+                <a:latin typeface="Courier"/>
+              </a:rPr>
+              <a:t>export_text(tree)</a:t>
+            </a:r>
+            <a:r>
+              <a:rPr/>
+              <a:t> prints the tree as if/else rules</a:t>
             </a:r>
           </a:p>
         </p:txBody>
@@ -12575,6 +12948,137 @@
 </file>
 
 <file path=ppt/slides/slide26.xml><?xml version="1.0" encoding="utf-8"?>
+<p:sld xmlns:a="http://schemas.openxmlformats.org/drawingml/2006/main" xmlns:r="http://schemas.openxmlformats.org/officeDocument/2006/relationships" xmlns:p="http://schemas.openxmlformats.org/presentationml/2006/main">
+  <p:cSld>
+    <p:spTree>
+      <p:nvGrpSpPr>
+        <p:cNvPr id="1" name=""/>
+        <p:cNvGrpSpPr/>
+        <p:nvPr/>
+      </p:nvGrpSpPr>
+      <p:grpSpPr>
+        <a:xfrm>
+          <a:off x="0" y="0"/>
+          <a:ext cx="0" cy="0"/>
+          <a:chOff x="0" y="0"/>
+          <a:chExt cx="0" cy="0"/>
+        </a:xfrm>
+      </p:grpSpPr>
+      <p:sp>
+        <p:nvSpPr>
+          <p:cNvPr id="2" name="Title 1"/>
+          <p:cNvSpPr>
+            <a:spLocks noGrp="1"/>
+          </p:cNvSpPr>
+          <p:nvPr>
+            <p:ph type="title"/>
+          </p:nvPr>
+        </p:nvSpPr>
+        <p:spPr>
+          <a:xfrm>
+            <a:off x="457200" y="205979"/>
+            <a:ext cx="8229600" cy="857250"/>
+          </a:xfrm>
+        </p:spPr>
+        <p:txBody>
+          <a:bodyPr/>
+          <a:lstStyle/>
+          <a:p>
+            <a:pPr lvl="0" indent="0" marL="0">
+              <a:buNone/>
+            </a:pPr>
+            <a:r>
+              <a:rPr/>
+              <a:t>A tree that doesn’t stay still</a:t>
+            </a:r>
+          </a:p>
+        </p:txBody>
+      </p:sp>
+      <p:sp>
+        <p:nvSpPr>
+          <p:cNvPr id="3" name="Content Placeholder 2"/>
+          <p:cNvSpPr>
+            <a:spLocks noGrp="1"/>
+          </p:cNvSpPr>
+          <p:nvPr>
+            <p:ph idx="1"/>
+          </p:nvPr>
+        </p:nvSpPr>
+        <p:spPr>
+          <a:xfrm>
+            <a:off x="457200" y="1200151"/>
+            <a:ext cx="8229600" cy="3394472"/>
+          </a:xfrm>
+        </p:spPr>
+        <p:txBody>
+          <a:bodyPr/>
+          <a:lstStyle/>
+          <a:p>
+            <a:pPr lvl="0"/>
+            <a:r>
+              <a:rPr/>
+              <a:t>Two trees at </a:t>
+            </a:r>
+            <a:r>
+              <a:rPr>
+                <a:latin typeface="Courier"/>
+              </a:rPr>
+              <a:t>max_depth = 6</a:t>
+            </a:r>
+            <a:r>
+              <a:rPr/>
+              <a:t>, each on a random 65% of the applicants (no replacement)</a:t>
+            </a:r>
+          </a:p>
+          <a:p>
+            <a:pPr lvl="0"/>
+            <a:r>
+              <a:rPr/>
+              <a:t>The debt ceiling, the strongest split, agrees to within </a:t>
+            </a:r>
+            <a:r>
+              <a:rPr b="1"/>
+              <a:t>0.001</a:t>
+            </a:r>
+          </a:p>
+          <a:p>
+            <a:pPr lvl="0"/>
+            <a:r>
+              <a:rPr/>
+              <a:t>The trees grow </a:t>
+            </a:r>
+            <a:r>
+              <a:rPr b="1"/>
+              <a:t>31 and 33 leaves</a:t>
+            </a:r>
+            <a:r>
+              <a:rPr/>
+              <a:t>, and </a:t>
+            </a:r>
+            <a:r>
+              <a:rPr b="1"/>
+              <a:t>disagree on 11.7%</a:t>
+            </a:r>
+            <a:r>
+              <a:rPr/>
+              <a:t> of predictions on the full dataset</a:t>
+            </a:r>
+          </a:p>
+          <a:p>
+            <a:pPr lvl="0"/>
+            <a:r>
+              <a:rPr/>
+              <a:t>The strongest split is stable; the weaker ones, which shape most of the tree, are not</a:t>
+            </a:r>
+          </a:p>
+        </p:txBody>
+      </p:sp>
+    </p:spTree>
+  </p:cSld>
+</p:sld>
+</file>
+
+<file path=ppt/slides/slide27.xml><?xml version="1.0" encoding="utf-8"?>
 <p:sld xmlns:a="http://schemas.openxmlformats.org/drawingml/2006/main" xmlns:r="http://schemas.openxmlformats.org/officeDocument/2006/relationships" xmlns:p="http://schemas.openxmlformats.org/presentationml/2006/main">
   <p:cSld>
     <p:spTree>
@@ -12738,7 +13242,7 @@
                       </a:pPr>
                       <a:r>
                         <a:rPr/>
-                        <a:t>2. a tree, split by split, 7-19</a:t>
+                        <a:t>2. a tree, split by split, 7-20</a:t>
                       </a:r>
                     </a:p>
                   </a:txBody>
@@ -12800,7 +13304,7 @@
                       </a:pPr>
                       <a:r>
                         <a:rPr/>
-                        <a:t>3. the depth dial, 20-23</a:t>
+                        <a:t>3. the depth dial, 21-24</a:t>
                       </a:r>
                     </a:p>
                   </a:txBody>
@@ -12848,7 +13352,7 @@
                       </a:pPr>
                       <a:r>
                         <a:rPr/>
-                        <a:t>4. what a tree costs, 24-25</a:t>
+                        <a:t>4. what a tree costs, 25-26</a:t>
                       </a:r>
                     </a:p>
                   </a:txBody>
@@ -12894,86 +13398,6 @@
 </p:sld>
 </file>
 
-<file path=ppt/slides/slide27.xml><?xml version="1.0" encoding="utf-8"?>
-<p:sld xmlns:a="http://schemas.openxmlformats.org/drawingml/2006/main" xmlns:r="http://schemas.openxmlformats.org/officeDocument/2006/relationships" xmlns:p="http://schemas.openxmlformats.org/presentationml/2006/main">
-  <p:cSld>
-    <p:spTree>
-      <p:nvGrpSpPr>
-        <p:cNvPr id="1" name=""/>
-        <p:cNvGrpSpPr/>
-        <p:nvPr/>
-      </p:nvGrpSpPr>
-      <p:grpSpPr>
-        <a:xfrm>
-          <a:off x="0" y="0"/>
-          <a:ext cx="0" cy="0"/>
-          <a:chOff x="0" y="0"/>
-          <a:chExt cx="0" cy="0"/>
-        </a:xfrm>
-      </p:grpSpPr>
-      <p:sp>
-        <p:nvSpPr>
-          <p:cNvPr id="2" name="Title 1"/>
-          <p:cNvSpPr>
-            <a:spLocks noGrp="1"/>
-          </p:cNvSpPr>
-          <p:nvPr>
-            <p:ph type="title"/>
-          </p:nvPr>
-        </p:nvSpPr>
-        <p:spPr>
-          <a:xfrm>
-            <a:off x="457200" y="205979"/>
-            <a:ext cx="8229600" cy="857250"/>
-          </a:xfrm>
-        </p:spPr>
-        <p:txBody>
-          <a:bodyPr/>
-          <a:lstStyle/>
-          <a:p>
-            <a:pPr lvl="0" indent="0" marL="0">
-              <a:buNone/>
-            </a:pPr>
-            <a:r>
-              <a:rPr/>
-              <a:t>Break</a:t>
-            </a:r>
-          </a:p>
-        </p:txBody>
-      </p:sp>
-      <p:sp>
-        <p:nvSpPr>
-          <p:cNvPr id="3" name="Content Placeholder 2"/>
-          <p:cNvSpPr>
-            <a:spLocks noGrp="1"/>
-          </p:cNvSpPr>
-          <p:nvPr>
-            <p:ph idx="1"/>
-          </p:nvPr>
-        </p:nvSpPr>
-        <p:spPr>
-          <a:xfrm>
-            <a:off x="457200" y="1200151"/>
-            <a:ext cx="8229600" cy="3394472"/>
-          </a:xfrm>
-        </p:spPr>
-        <p:txBody>
-          <a:bodyPr/>
-          <a:lstStyle/>
-          <a:p>
-            <a:pPr lvl="0"/>
-            <a:r>
-              <a:rPr/>
-              <a:t>Twelve minutes</a:t>
-            </a:r>
-          </a:p>
-        </p:txBody>
-      </p:sp>
-    </p:spTree>
-  </p:cSld>
-</p:sld>
-</file>
-
 <file path=ppt/slides/slide28.xml><?xml version="1.0" encoding="utf-8"?>
 <p:sld xmlns:a="http://schemas.openxmlformats.org/drawingml/2006/main" xmlns:r="http://schemas.openxmlformats.org/officeDocument/2006/relationships" xmlns:p="http://schemas.openxmlformats.org/presentationml/2006/main">
   <p:cSld>
@@ -13016,7 +13440,7 @@
             </a:pPr>
             <a:r>
               <a:rPr/>
-              <a:t>Bagging: averaging away the instability</a:t>
+              <a:t>Break</a:t>
             </a:r>
           </a:p>
         </p:txBody>
@@ -13044,84 +13468,7 @@
             <a:pPr lvl="0"/>
             <a:r>
               <a:rPr/>
-              <a:t>Trees differ across samples, so </a:t>
-            </a:r>
-            <a:r>
-              <a:rPr b="1"/>
-              <a:t>many trees, averaged</a:t>
-            </a:r>
-            <a:r>
-              <a:rPr/>
-              <a:t> should partly cancel their mistakes</a:t>
-            </a:r>
-          </a:p>
-          <a:p>
-            <a:pPr lvl="0"/>
-            <a:r>
-              <a:rPr b="1"/>
-              <a:t>Bootstrap sample</a:t>
-            </a:r>
-            <a:r>
-              <a:rPr/>
-              <a:t>: m rows drawn </a:t>
-            </a:r>
-            <a:r>
-              <a:rPr b="1"/>
-              <a:t>with replacement</a:t>
-            </a:r>
-            <a:r>
-              <a:rPr/>
-              <a:t> from the m training rows</a:t>
-            </a:r>
-          </a:p>
-          <a:p>
-            <a:pPr lvl="0"/>
-            <a:r>
-              <a:rPr/>
-              <a:t>One tree per sample, </a:t>
-            </a:r>
-            <a:r>
-              <a:rPr>
-                <a:latin typeface="Courier"/>
-              </a:rPr>
-              <a:t>n_estimators</a:t>
-            </a:r>
-            <a:r>
-              <a:rPr/>
-              <a:t> times; predict by </a:t>
-            </a:r>
-            <a:r>
-              <a:rPr b="1"/>
-              <a:t>majority vote</a:t>
-            </a:r>
-            <a:r>
-              <a:rPr/>
-              <a:t>. That is </a:t>
-            </a:r>
-            <a:r>
-              <a:rPr b="1"/>
-              <a:t>bagging</a:t>
-            </a:r>
-            <a:r>
-              <a:rPr/>
-              <a:t>: bootstrap aggregating</a:t>
-            </a:r>
-          </a:p>
-          <a:p>
-            <a:pPr lvl="0"/>
-            <a:r>
-              <a:rPr/>
-              <a:t>In code: </a:t>
-            </a:r>
-            <a:r>
-              <a:rPr>
-                <a:latin typeface="Courier"/>
-              </a:rPr>
-              <a:t>BaggingClassifier()</a:t>
-            </a:r>
-            <a:r>
-              <a:rPr/>
-              <a:t>, whose default model is a decision tree</a:t>
+              <a:t>Twelve minutes</a:t>
             </a:r>
           </a:p>
         </p:txBody>
@@ -13173,7 +13520,7 @@
             </a:pPr>
             <a:r>
               <a:rPr/>
-              <a:t>How much data one bootstrap sample sees</a:t>
+              <a:t>Bagging: averaging away the instability</a:t>
             </a:r>
           </a:p>
         </p:txBody>
@@ -13201,48 +13548,84 @@
             <a:pPr lvl="0"/>
             <a:r>
               <a:rPr/>
-              <a:t>One row is missed by all m draws with probability (1 - 1/m)ᵐ, which tends to e⁻¹ ≈ 0.368 as m grows</a:t>
+              <a:t>Trees differ across samples, so </a:t>
+            </a:r>
+            <a:r>
+              <a:rPr b="1"/>
+              <a:t>many trees, averaged</a:t>
+            </a:r>
+            <a:r>
+              <a:rPr/>
+              <a:t> should partly cancel their mistakes</a:t>
             </a:r>
           </a:p>
           <a:p>
             <a:pPr lvl="0"/>
             <a:r>
-              <a:rPr/>
-              <a:t>So about </a:t>
-            </a:r>
-            <a:r>
               <a:rPr b="1"/>
-              <a:t>63.2%</a:t>
-            </a:r>
-            <a:r>
-              <a:rPr/>
-              <a:t> of the distinct rows are drawn at least once</a:t>
+              <a:t>Bootstrap sample</a:t>
+            </a:r>
+            <a:r>
+              <a:rPr/>
+              <a:t>: m rows drawn </a:t>
+            </a:r>
+            <a:r>
+              <a:rPr b="1"/>
+              <a:t>with replacement</a:t>
+            </a:r>
+            <a:r>
+              <a:rPr/>
+              <a:t> from the m training rows</a:t>
             </a:r>
           </a:p>
           <a:p>
             <a:pPr lvl="0"/>
             <a:r>
               <a:rPr/>
-              <a:t>The remaining </a:t>
+              <a:t>One tree per sample, </a:t>
+            </a:r>
+            <a:r>
+              <a:rPr>
+                <a:latin typeface="Courier"/>
+              </a:rPr>
+              <a:t>n_estimators</a:t>
+            </a:r>
+            <a:r>
+              <a:rPr/>
+              <a:t> times; predict by </a:t>
             </a:r>
             <a:r>
               <a:rPr b="1"/>
-              <a:t>36.8%</a:t>
-            </a:r>
-            <a:r>
-              <a:rPr/>
-              <a:t> are left out entirely: called </a:t>
+              <a:t>majority vote</a:t>
+            </a:r>
+            <a:r>
+              <a:rPr/>
+              <a:t>. That is </a:t>
             </a:r>
             <a:r>
               <a:rPr b="1"/>
-              <a:t>out-of-bag (OOB)</a:t>
+              <a:t>bagging</a:t>
+            </a:r>
+            <a:r>
+              <a:rPr/>
+              <a:t>: bootstrap aggregating</a:t>
             </a:r>
           </a:p>
           <a:p>
             <a:pPr lvl="0"/>
             <a:r>
               <a:rPr/>
-              <a:t>At m = 1,200: a single simulated draw left out 36.6% of rows, close to the limit</a:t>
+              <a:t>In code: </a:t>
+            </a:r>
+            <a:r>
+              <a:rPr>
+                <a:latin typeface="Courier"/>
+              </a:rPr>
+              <a:t>BaggingClassifier()</a:t>
+            </a:r>
+            <a:r>
+              <a:rPr/>
+              <a:t>, whose default model is a decision tree</a:t>
             </a:r>
           </a:p>
         </p:txBody>
@@ -13363,6 +13746,127 @@
 </file>
 
 <file path=ppt/slides/slide30.xml><?xml version="1.0" encoding="utf-8"?>
+<p:sld xmlns:a="http://schemas.openxmlformats.org/drawingml/2006/main" xmlns:r="http://schemas.openxmlformats.org/officeDocument/2006/relationships" xmlns:p="http://schemas.openxmlformats.org/presentationml/2006/main">
+  <p:cSld>
+    <p:spTree>
+      <p:nvGrpSpPr>
+        <p:cNvPr id="1" name=""/>
+        <p:cNvGrpSpPr/>
+        <p:nvPr/>
+      </p:nvGrpSpPr>
+      <p:grpSpPr>
+        <a:xfrm>
+          <a:off x="0" y="0"/>
+          <a:ext cx="0" cy="0"/>
+          <a:chOff x="0" y="0"/>
+          <a:chExt cx="0" cy="0"/>
+        </a:xfrm>
+      </p:grpSpPr>
+      <p:sp>
+        <p:nvSpPr>
+          <p:cNvPr id="2" name="Title 1"/>
+          <p:cNvSpPr>
+            <a:spLocks noGrp="1"/>
+          </p:cNvSpPr>
+          <p:nvPr>
+            <p:ph type="title"/>
+          </p:nvPr>
+        </p:nvSpPr>
+        <p:spPr>
+          <a:xfrm>
+            <a:off x="457200" y="205979"/>
+            <a:ext cx="8229600" cy="857250"/>
+          </a:xfrm>
+        </p:spPr>
+        <p:txBody>
+          <a:bodyPr/>
+          <a:lstStyle/>
+          <a:p>
+            <a:pPr lvl="0" indent="0" marL="0">
+              <a:buNone/>
+            </a:pPr>
+            <a:r>
+              <a:rPr/>
+              <a:t>How much data one bootstrap sample sees</a:t>
+            </a:r>
+          </a:p>
+        </p:txBody>
+      </p:sp>
+      <p:sp>
+        <p:nvSpPr>
+          <p:cNvPr id="3" name="Content Placeholder 2"/>
+          <p:cNvSpPr>
+            <a:spLocks noGrp="1"/>
+          </p:cNvSpPr>
+          <p:nvPr>
+            <p:ph idx="1"/>
+          </p:nvPr>
+        </p:nvSpPr>
+        <p:spPr>
+          <a:xfrm>
+            <a:off x="457200" y="1200151"/>
+            <a:ext cx="8229600" cy="3394472"/>
+          </a:xfrm>
+        </p:spPr>
+        <p:txBody>
+          <a:bodyPr/>
+          <a:lstStyle/>
+          <a:p>
+            <a:pPr lvl="0"/>
+            <a:r>
+              <a:rPr/>
+              <a:t>One row is missed by all m draws with probability (1 - 1/m)ᵐ, which tends to e⁻¹ ≈ 0.368 as m grows</a:t>
+            </a:r>
+          </a:p>
+          <a:p>
+            <a:pPr lvl="0"/>
+            <a:r>
+              <a:rPr/>
+              <a:t>So about </a:t>
+            </a:r>
+            <a:r>
+              <a:rPr b="1"/>
+              <a:t>63.2%</a:t>
+            </a:r>
+            <a:r>
+              <a:rPr/>
+              <a:t> of the distinct rows are drawn at least once</a:t>
+            </a:r>
+          </a:p>
+          <a:p>
+            <a:pPr lvl="0"/>
+            <a:r>
+              <a:rPr/>
+              <a:t>The remaining </a:t>
+            </a:r>
+            <a:r>
+              <a:rPr b="1"/>
+              <a:t>36.8%</a:t>
+            </a:r>
+            <a:r>
+              <a:rPr/>
+              <a:t> are left out entirely: called </a:t>
+            </a:r>
+            <a:r>
+              <a:rPr b="1"/>
+              <a:t>out-of-bag (OOB)</a:t>
+            </a:r>
+          </a:p>
+          <a:p>
+            <a:pPr lvl="0"/>
+            <a:r>
+              <a:rPr/>
+              <a:t>At m = 1,200: a single simulated draw left out 36.6% of rows, close to the limit</a:t>
+            </a:r>
+          </a:p>
+        </p:txBody>
+      </p:sp>
+    </p:spTree>
+  </p:cSld>
+</p:sld>
+</file>
+
+<file path=ppt/slides/slide31.xml><?xml version="1.0" encoding="utf-8"?>
 <p:sld xmlns:a="http://schemas.openxmlformats.org/drawingml/2006/main" xmlns:r="http://schemas.openxmlformats.org/officeDocument/2006/relationships" xmlns:p="http://schemas.openxmlformats.org/presentationml/2006/main">
   <p:cSld>
     <p:spTree>
@@ -13444,128 +13948,6 @@
 </p:sld>
 </file>
 
-<file path=ppt/slides/slide31.xml><?xml version="1.0" encoding="utf-8"?>
-<p:sld xmlns:a="http://schemas.openxmlformats.org/drawingml/2006/main" xmlns:r="http://schemas.openxmlformats.org/officeDocument/2006/relationships" xmlns:p="http://schemas.openxmlformats.org/presentationml/2006/main">
-  <p:cSld>
-    <p:spTree>
-      <p:nvGrpSpPr>
-        <p:cNvPr id="1" name=""/>
-        <p:cNvGrpSpPr/>
-        <p:nvPr/>
-      </p:nvGrpSpPr>
-      <p:grpSpPr>
-        <a:xfrm>
-          <a:off x="0" y="0"/>
-          <a:ext cx="0" cy="0"/>
-          <a:chOff x="0" y="0"/>
-          <a:chExt cx="0" cy="0"/>
-        </a:xfrm>
-      </p:grpSpPr>
-      <p:sp>
-        <p:nvSpPr>
-          <p:cNvPr id="2" name="Title 1"/>
-          <p:cNvSpPr>
-            <a:spLocks noGrp="1"/>
-          </p:cNvSpPr>
-          <p:nvPr>
-            <p:ph type="title"/>
-          </p:nvPr>
-        </p:nvSpPr>
-        <p:spPr>
-          <a:xfrm>
-            <a:off x="457200" y="205979"/>
-            <a:ext cx="8229600" cy="857250"/>
-          </a:xfrm>
-        </p:spPr>
-        <p:txBody>
-          <a:bodyPr/>
-          <a:lstStyle/>
-          <a:p>
-            <a:pPr lvl="0" indent="0" marL="0">
-              <a:buNone/>
-            </a:pPr>
-            <a:r>
-              <a:rPr/>
-              <a:t>Out-of-bag: free validation</a:t>
-            </a:r>
-          </a:p>
-        </p:txBody>
-      </p:sp>
-      <p:sp>
-        <p:nvSpPr>
-          <p:cNvPr id="3" name="Content Placeholder 2"/>
-          <p:cNvSpPr>
-            <a:spLocks noGrp="1"/>
-          </p:cNvSpPr>
-          <p:nvPr>
-            <p:ph idx="1"/>
-          </p:nvPr>
-        </p:nvSpPr>
-        <p:spPr>
-          <a:xfrm>
-            <a:off x="457200" y="1200151"/>
-            <a:ext cx="8229600" cy="3394472"/>
-          </a:xfrm>
-        </p:spPr>
-        <p:txBody>
-          <a:bodyPr/>
-          <a:lstStyle/>
-          <a:p>
-            <a:pPr lvl="0"/>
-            <a:r>
-              <a:rPr/>
-              <a:t>Predict each row by a vote of only the trees that never saw it: the accuracy of those votes is the </a:t>
-            </a:r>
-            <a:r>
-              <a:rPr b="1"/>
-              <a:t>OOB score</a:t>
-            </a:r>
-            <a:r>
-              <a:rPr/>
-              <a:t>, with no rows set aside</a:t>
-            </a:r>
-          </a:p>
-          <a:p>
-            <a:pPr lvl="0"/>
-            <a:r>
-              <a:rPr/>
-              <a:t>A 300-tree random forest (bagged trees plus one rule, slide 35): OOB </a:t>
-            </a:r>
-            <a:r>
-              <a:rPr b="1"/>
-              <a:t>0.9117</a:t>
-            </a:r>
-            <a:r>
-              <a:rPr/>
-              <a:t>; 5-fold cross-validation </a:t>
-            </a:r>
-            <a:r>
-              <a:rPr b="1"/>
-              <a:t>0.9117 ± 0.021</a:t>
-            </a:r>
-          </a:p>
-          <a:p>
-            <a:pPr lvl="0"/>
-            <a:r>
-              <a:rPr/>
-              <a:t>The four-decimal match is </a:t>
-            </a:r>
-            <a:r>
-              <a:rPr b="1"/>
-              <a:t>luck</a:t>
-            </a:r>
-            <a:r>
-              <a:rPr/>
-              <a:t>: over twelve seeds the two differ by 0.0026 on average, well inside ±0.021</a:t>
-            </a:r>
-          </a:p>
-        </p:txBody>
-      </p:sp>
-    </p:spTree>
-  </p:cSld>
-</p:sld>
-</file>
-
 <file path=ppt/slides/slide32.xml><?xml version="1.0" encoding="utf-8"?>
 <p:sld xmlns:a="http://schemas.openxmlformats.org/drawingml/2006/main" xmlns:r="http://schemas.openxmlformats.org/officeDocument/2006/relationships" xmlns:p="http://schemas.openxmlformats.org/presentationml/2006/main">
   <p:cSld>
@@ -13608,7 +13990,7 @@
             </a:pPr>
             <a:r>
               <a:rPr/>
-              <a:t>Why averaging reduces variance</a:t>
+              <a:t>Out-of-bag: free validation</a:t>
             </a:r>
           </a:p>
         </p:txBody>
@@ -13636,45 +14018,49 @@
             <a:pPr lvl="0"/>
             <a:r>
               <a:rPr/>
-              <a:t>Model each tree’s prediction as noisy, with variance σ² over the bootstrap sample it drew, and let ρ be the correlation between two trees</a:t>
+              <a:t>Predict each row by a vote of only the trees that never saw it: the accuracy of those votes is the </a:t>
+            </a:r>
+            <a:r>
+              <a:rPr b="1"/>
+              <a:t>OOB score</a:t>
+            </a:r>
+            <a:r>
+              <a:rPr/>
+              <a:t>, with no rows set aside</a:t>
             </a:r>
           </a:p>
           <a:p>
             <a:pPr lvl="0"/>
             <a:r>
               <a:rPr/>
-              <a:t>The average of B trees has variance σ²/B + ρσ² (B-1)/B: a </a:t>
+              <a:t>A 300-tree random forest (bagged trees plus one rule, slide 36): OOB </a:t>
             </a:r>
             <a:r>
               <a:rPr b="1"/>
-              <a:t>floor</a:t>
-            </a:r>
-            <a:r>
-              <a:rPr/>
-              <a:t> of ρσ², </a:t>
+              <a:t>0.9117</a:t>
+            </a:r>
+            <a:r>
+              <a:rPr/>
+              <a:t>; 5-fold cross-validation </a:t>
             </a:r>
             <a:r>
               <a:rPr b="1"/>
-              <a:t>not zero</a:t>
-            </a:r>
-            <a:r>
-              <a:rPr/>
-              <a:t>: more trees soon buy little</a:t>
+              <a:t>0.9117 ± 0.021</a:t>
             </a:r>
           </a:p>
           <a:p>
             <a:pPr lvl="0"/>
             <a:r>
               <a:rPr/>
-              <a:t>Averaging </a:t>
+              <a:t>The four-decimal match is </a:t>
             </a:r>
             <a:r>
               <a:rPr b="1"/>
-              <a:t>cannot repair an error every tree shares</a:t>
-            </a:r>
-            <a:r>
-              <a:rPr/>
-              <a:t>: trees too shallow for the rule stay too shallow, however many are averaged</a:t>
+              <a:t>luck</a:t>
+            </a:r>
+            <a:r>
+              <a:rPr/>
+              <a:t>: over twelve seeds the two differ by 0.0026 on average, well inside ±0.021</a:t>
             </a:r>
           </a:p>
         </p:txBody>
@@ -13685,6 +14071,124 @@
 </file>
 
 <file path=ppt/slides/slide33.xml><?xml version="1.0" encoding="utf-8"?>
+<p:sld xmlns:a="http://schemas.openxmlformats.org/drawingml/2006/main" xmlns:r="http://schemas.openxmlformats.org/officeDocument/2006/relationships" xmlns:p="http://schemas.openxmlformats.org/presentationml/2006/main">
+  <p:cSld>
+    <p:spTree>
+      <p:nvGrpSpPr>
+        <p:cNvPr id="1" name=""/>
+        <p:cNvGrpSpPr/>
+        <p:nvPr/>
+      </p:nvGrpSpPr>
+      <p:grpSpPr>
+        <a:xfrm>
+          <a:off x="0" y="0"/>
+          <a:ext cx="0" cy="0"/>
+          <a:chOff x="0" y="0"/>
+          <a:chExt cx="0" cy="0"/>
+        </a:xfrm>
+      </p:grpSpPr>
+      <p:sp>
+        <p:nvSpPr>
+          <p:cNvPr id="2" name="Title 1"/>
+          <p:cNvSpPr>
+            <a:spLocks noGrp="1"/>
+          </p:cNvSpPr>
+          <p:nvPr>
+            <p:ph type="title"/>
+          </p:nvPr>
+        </p:nvSpPr>
+        <p:spPr>
+          <a:xfrm>
+            <a:off x="457200" y="205979"/>
+            <a:ext cx="8229600" cy="857250"/>
+          </a:xfrm>
+        </p:spPr>
+        <p:txBody>
+          <a:bodyPr/>
+          <a:lstStyle/>
+          <a:p>
+            <a:pPr lvl="0" indent="0" marL="0">
+              <a:buNone/>
+            </a:pPr>
+            <a:r>
+              <a:rPr/>
+              <a:t>Why averaging reduces variance</a:t>
+            </a:r>
+          </a:p>
+        </p:txBody>
+      </p:sp>
+      <p:sp>
+        <p:nvSpPr>
+          <p:cNvPr id="3" name="Content Placeholder 2"/>
+          <p:cNvSpPr>
+            <a:spLocks noGrp="1"/>
+          </p:cNvSpPr>
+          <p:nvPr>
+            <p:ph idx="1"/>
+          </p:nvPr>
+        </p:nvSpPr>
+        <p:spPr>
+          <a:xfrm>
+            <a:off x="457200" y="1200151"/>
+            <a:ext cx="8229600" cy="3394472"/>
+          </a:xfrm>
+        </p:spPr>
+        <p:txBody>
+          <a:bodyPr/>
+          <a:lstStyle/>
+          <a:p>
+            <a:pPr lvl="0"/>
+            <a:r>
+              <a:rPr/>
+              <a:t>Model each tree’s prediction as noisy, with variance σ² over the bootstrap sample it drew, and let ρ be the correlation between two trees</a:t>
+            </a:r>
+          </a:p>
+          <a:p>
+            <a:pPr lvl="0"/>
+            <a:r>
+              <a:rPr/>
+              <a:t>The average of B trees has variance σ²/B + ρσ² (B-1)/B: a </a:t>
+            </a:r>
+            <a:r>
+              <a:rPr b="1"/>
+              <a:t>floor</a:t>
+            </a:r>
+            <a:r>
+              <a:rPr/>
+              <a:t> of ρσ², </a:t>
+            </a:r>
+            <a:r>
+              <a:rPr b="1"/>
+              <a:t>not zero</a:t>
+            </a:r>
+            <a:r>
+              <a:rPr/>
+              <a:t>: more trees soon buy little</a:t>
+            </a:r>
+          </a:p>
+          <a:p>
+            <a:pPr lvl="0"/>
+            <a:r>
+              <a:rPr/>
+              <a:t>Averaging </a:t>
+            </a:r>
+            <a:r>
+              <a:rPr b="1"/>
+              <a:t>cannot repair an error every tree shares</a:t>
+            </a:r>
+            <a:r>
+              <a:rPr/>
+              <a:t>: trees too shallow for the rule stay too shallow, however many are averaged</a:t>
+            </a:r>
+          </a:p>
+        </p:txBody>
+      </p:sp>
+    </p:spTree>
+  </p:cSld>
+</p:sld>
+</file>
+
+<file path=ppt/slides/slide34.xml><?xml version="1.0" encoding="utf-8"?>
 <p:sld xmlns:a="http://schemas.openxmlformats.org/drawingml/2006/main" xmlns:r="http://schemas.openxmlformats.org/officeDocument/2006/relationships" xmlns:p="http://schemas.openxmlformats.org/presentationml/2006/main">
   <p:cSld>
     <p:spTree>
@@ -13766,7 +14270,7 @@
 </p:sld>
 </file>
 
-<file path=ppt/slides/slide34.xml><?xml version="1.0" encoding="utf-8"?>
+<file path=ppt/slides/slide35.xml><?xml version="1.0" encoding="utf-8"?>
 <p:sld xmlns:a="http://schemas.openxmlformats.org/drawingml/2006/main" xmlns:r="http://schemas.openxmlformats.org/officeDocument/2006/relationships" xmlns:p="http://schemas.openxmlformats.org/presentationml/2006/main">
   <p:cSld>
     <p:spTree>
@@ -13991,7 +14495,7 @@
 </p:sld>
 </file>
 
-<file path=ppt/slides/slide35.xml><?xml version="1.0" encoding="utf-8"?>
+<file path=ppt/slides/slide36.xml><?xml version="1.0" encoding="utf-8"?>
 <p:sld xmlns:a="http://schemas.openxmlformats.org/drawingml/2006/main" xmlns:r="http://schemas.openxmlformats.org/officeDocument/2006/relationships" xmlns:p="http://schemas.openxmlformats.org/presentationml/2006/main">
   <p:cSld>
     <p:spTree>
@@ -14132,7 +14636,7 @@
 </p:sld>
 </file>
 
-<file path=ppt/slides/slide36.xml><?xml version="1.0" encoding="utf-8"?>
+<file path=ppt/slides/slide37.xml><?xml version="1.0" encoding="utf-8"?>
 <p:sld xmlns:a="http://schemas.openxmlformats.org/drawingml/2006/main" xmlns:r="http://schemas.openxmlformats.org/officeDocument/2006/relationships" xmlns:p="http://schemas.openxmlformats.org/presentationml/2006/main">
   <p:cSld>
     <p:spTree>
@@ -14214,7 +14718,7 @@
 </p:sld>
 </file>
 
-<file path=ppt/slides/slide37.xml><?xml version="1.0" encoding="utf-8"?>
+<file path=ppt/slides/slide38.xml><?xml version="1.0" encoding="utf-8"?>
 <p:sld xmlns:a="http://schemas.openxmlformats.org/drawingml/2006/main" xmlns:r="http://schemas.openxmlformats.org/officeDocument/2006/relationships" xmlns:p="http://schemas.openxmlformats.org/presentationml/2006/main">
   <p:cSld>
     <p:spTree>
@@ -14325,7 +14829,7 @@
 </p:sld>
 </file>
 
-<file path=ppt/slides/slide38.xml><?xml version="1.0" encoding="utf-8"?>
+<file path=ppt/slides/slide39.xml><?xml version="1.0" encoding="utf-8"?>
 <p:sld xmlns:a="http://schemas.openxmlformats.org/drawingml/2006/main" xmlns:r="http://schemas.openxmlformats.org/officeDocument/2006/relationships" xmlns:p="http://schemas.openxmlformats.org/presentationml/2006/main">
   <p:cSld>
     <p:spTree>
@@ -14407,7 +14911,140 @@
 </p:sld>
 </file>
 
-<file path=ppt/slides/slide39.xml><?xml version="1.0" encoding="utf-8"?>
+<file path=ppt/slides/slide4.xml><?xml version="1.0" encoding="utf-8"?>
+<p:sld xmlns:a="http://schemas.openxmlformats.org/drawingml/2006/main" xmlns:r="http://schemas.openxmlformats.org/officeDocument/2006/relationships" xmlns:p="http://schemas.openxmlformats.org/presentationml/2006/main">
+  <p:cSld>
+    <p:spTree>
+      <p:nvGrpSpPr>
+        <p:cNvPr id="1" name=""/>
+        <p:cNvGrpSpPr/>
+        <p:nvPr/>
+      </p:nvGrpSpPr>
+      <p:grpSpPr>
+        <a:xfrm>
+          <a:off x="0" y="0"/>
+          <a:ext cx="0" cy="0"/>
+          <a:chOff x="0" y="0"/>
+          <a:chExt cx="0" cy="0"/>
+        </a:xfrm>
+      </p:grpSpPr>
+      <p:sp>
+        <p:nvSpPr>
+          <p:cNvPr id="2" name="Title 1"/>
+          <p:cNvSpPr>
+            <a:spLocks noGrp="1"/>
+          </p:cNvSpPr>
+          <p:nvPr>
+            <p:ph type="title"/>
+          </p:nvPr>
+        </p:nvSpPr>
+        <p:spPr>
+          <a:xfrm>
+            <a:off x="457200" y="205979"/>
+            <a:ext cx="8229600" cy="857250"/>
+          </a:xfrm>
+        </p:spPr>
+        <p:txBody>
+          <a:bodyPr/>
+          <a:lstStyle/>
+          <a:p>
+            <a:pPr lvl="0" indent="0" marL="0">
+              <a:buNone/>
+            </a:pPr>
+            <a:r>
+              <a:rPr/>
+              <a:t>1,200 loan applicants, two figures each</a:t>
+            </a:r>
+          </a:p>
+        </p:txBody>
+      </p:sp>
+      <p:sp>
+        <p:nvSpPr>
+          <p:cNvPr id="3" name="Content Placeholder 2"/>
+          <p:cNvSpPr>
+            <a:spLocks noGrp="1"/>
+          </p:cNvSpPr>
+          <p:nvPr>
+            <p:ph idx="1"/>
+          </p:nvPr>
+        </p:nvSpPr>
+        <p:spPr>
+          <a:xfrm>
+            <a:off x="457200" y="1200151"/>
+            <a:ext cx="8229600" cy="3394472"/>
+          </a:xfrm>
+        </p:spPr>
+        <p:txBody>
+          <a:bodyPr/>
+          <a:lstStyle/>
+          <a:p>
+            <a:pPr lvl="0"/>
+            <a:r>
+              <a:rPr/>
+              <a:t>Income in thousands of euros a year, and debt-to-income ratio</a:t>
+            </a:r>
+          </a:p>
+          <a:p>
+            <a:pPr lvl="0"/>
+            <a:r>
+              <a:rPr/>
+              <a:t>Underwriting is a </a:t>
+            </a:r>
+            <a:r>
+              <a:rPr b="1"/>
+              <a:t>checklist</a:t>
+            </a:r>
+            <a:r>
+              <a:rPr/>
+              <a:t>: an income floor, a debt ceiling, and two “stressed” combinations, each figure ordinary alone but risky together</a:t>
+            </a:r>
+          </a:p>
+          <a:p>
+            <a:pPr lvl="0"/>
+            <a:r>
+              <a:rPr b="1"/>
+              <a:t>7%</a:t>
+            </a:r>
+            <a:r>
+              <a:rPr/>
+              <a:t> of labels flipped: no honest model beats about </a:t>
+            </a:r>
+            <a:r>
+              <a:rPr b="1"/>
+              <a:t>0.93</a:t>
+            </a:r>
+            <a:r>
+              <a:rPr/>
+              <a:t>, the </a:t>
+            </a:r>
+            <a:r>
+              <a:rPr b="1"/>
+              <a:t>noise ceiling</a:t>
+            </a:r>
+          </a:p>
+          <a:p>
+            <a:pPr lvl="0"/>
+            <a:r>
+              <a:rPr b="1"/>
+              <a:t>38.7%</a:t>
+            </a:r>
+            <a:r>
+              <a:rPr/>
+              <a:t> defaulted, so the majority baseline is </a:t>
+            </a:r>
+            <a:r>
+              <a:rPr b="1"/>
+              <a:t>0.613</a:t>
+            </a:r>
+          </a:p>
+        </p:txBody>
+      </p:sp>
+    </p:spTree>
+  </p:cSld>
+</p:sld>
+</file>
+
+<file path=ppt/slides/slide40.xml><?xml version="1.0" encoding="utf-8"?>
 <p:sld xmlns:a="http://schemas.openxmlformats.org/drawingml/2006/main" xmlns:r="http://schemas.openxmlformats.org/officeDocument/2006/relationships" xmlns:p="http://schemas.openxmlformats.org/presentationml/2006/main">
   <p:cSld>
     <p:spTree>
@@ -14489,140 +15126,7 @@
 </p:sld>
 </file>
 
-<file path=ppt/slides/slide4.xml><?xml version="1.0" encoding="utf-8"?>
-<p:sld xmlns:a="http://schemas.openxmlformats.org/drawingml/2006/main" xmlns:r="http://schemas.openxmlformats.org/officeDocument/2006/relationships" xmlns:p="http://schemas.openxmlformats.org/presentationml/2006/main">
-  <p:cSld>
-    <p:spTree>
-      <p:nvGrpSpPr>
-        <p:cNvPr id="1" name=""/>
-        <p:cNvGrpSpPr/>
-        <p:nvPr/>
-      </p:nvGrpSpPr>
-      <p:grpSpPr>
-        <a:xfrm>
-          <a:off x="0" y="0"/>
-          <a:ext cx="0" cy="0"/>
-          <a:chOff x="0" y="0"/>
-          <a:chExt cx="0" cy="0"/>
-        </a:xfrm>
-      </p:grpSpPr>
-      <p:sp>
-        <p:nvSpPr>
-          <p:cNvPr id="2" name="Title 1"/>
-          <p:cNvSpPr>
-            <a:spLocks noGrp="1"/>
-          </p:cNvSpPr>
-          <p:nvPr>
-            <p:ph type="title"/>
-          </p:nvPr>
-        </p:nvSpPr>
-        <p:spPr>
-          <a:xfrm>
-            <a:off x="457200" y="205979"/>
-            <a:ext cx="8229600" cy="857250"/>
-          </a:xfrm>
-        </p:spPr>
-        <p:txBody>
-          <a:bodyPr/>
-          <a:lstStyle/>
-          <a:p>
-            <a:pPr lvl="0" indent="0" marL="0">
-              <a:buNone/>
-            </a:pPr>
-            <a:r>
-              <a:rPr/>
-              <a:t>1,200 loan applicants, two figures each</a:t>
-            </a:r>
-          </a:p>
-        </p:txBody>
-      </p:sp>
-      <p:sp>
-        <p:nvSpPr>
-          <p:cNvPr id="3" name="Content Placeholder 2"/>
-          <p:cNvSpPr>
-            <a:spLocks noGrp="1"/>
-          </p:cNvSpPr>
-          <p:nvPr>
-            <p:ph idx="1"/>
-          </p:nvPr>
-        </p:nvSpPr>
-        <p:spPr>
-          <a:xfrm>
-            <a:off x="457200" y="1200151"/>
-            <a:ext cx="8229600" cy="3394472"/>
-          </a:xfrm>
-        </p:spPr>
-        <p:txBody>
-          <a:bodyPr/>
-          <a:lstStyle/>
-          <a:p>
-            <a:pPr lvl="0"/>
-            <a:r>
-              <a:rPr/>
-              <a:t>Income in thousands of euros a year, and debt-to-income ratio</a:t>
-            </a:r>
-          </a:p>
-          <a:p>
-            <a:pPr lvl="0"/>
-            <a:r>
-              <a:rPr/>
-              <a:t>Underwriting is a </a:t>
-            </a:r>
-            <a:r>
-              <a:rPr b="1"/>
-              <a:t>checklist</a:t>
-            </a:r>
-            <a:r>
-              <a:rPr/>
-              <a:t>: an income floor, a debt ceiling, and two “stressed” combinations, each figure ordinary alone but risky together</a:t>
-            </a:r>
-          </a:p>
-          <a:p>
-            <a:pPr lvl="0"/>
-            <a:r>
-              <a:rPr b="1"/>
-              <a:t>7%</a:t>
-            </a:r>
-            <a:r>
-              <a:rPr/>
-              <a:t> of labels flipped: no honest model beats about </a:t>
-            </a:r>
-            <a:r>
-              <a:rPr b="1"/>
-              <a:t>0.93</a:t>
-            </a:r>
-            <a:r>
-              <a:rPr/>
-              <a:t>, the </a:t>
-            </a:r>
-            <a:r>
-              <a:rPr b="1"/>
-              <a:t>noise ceiling</a:t>
-            </a:r>
-          </a:p>
-          <a:p>
-            <a:pPr lvl="0"/>
-            <a:r>
-              <a:rPr b="1"/>
-              <a:t>38.7%</a:t>
-            </a:r>
-            <a:r>
-              <a:rPr/>
-              <a:t> defaulted, so the majority baseline is </a:t>
-            </a:r>
-            <a:r>
-              <a:rPr b="1"/>
-              <a:t>0.613</a:t>
-            </a:r>
-          </a:p>
-        </p:txBody>
-      </p:sp>
-    </p:spTree>
-  </p:cSld>
-</p:sld>
-</file>
-
-<file path=ppt/slides/slide40.xml><?xml version="1.0" encoding="utf-8"?>
+<file path=ppt/slides/slide41.xml><?xml version="1.0" encoding="utf-8"?>
 <p:sld xmlns:a="http://schemas.openxmlformats.org/drawingml/2006/main" xmlns:r="http://schemas.openxmlformats.org/officeDocument/2006/relationships" xmlns:p="http://schemas.openxmlformats.org/presentationml/2006/main">
   <p:cSld>
     <p:spTree>
@@ -14738,7 +15242,7 @@
                       </a:pPr>
                       <a:r>
                         <a:rPr/>
-                        <a:t>1. bagging from scratch, 28</a:t>
+                        <a:t>1. bagging from scratch, 29</a:t>
                       </a:r>
                     </a:p>
                   </a:txBody>
@@ -14796,7 +15300,7 @@
                       </a:pPr>
                       <a:r>
                         <a:rPr/>
-                        <a:t>2. why averaging works, 29-33</a:t>
+                        <a:t>2. why averaging works, 30-34</a:t>
                       </a:r>
                     </a:p>
                   </a:txBody>
@@ -14854,7 +15358,7 @@
                       </a:pPr>
                       <a:r>
                         <a:rPr/>
-                        <a:t>3. variance, measured, 34-36</a:t>
+                        <a:t>3. variance, measured, 35-37</a:t>
                       </a:r>
                     </a:p>
                   </a:txBody>
@@ -14906,7 +15410,7 @@
                       </a:pPr>
                       <a:r>
                         <a:rPr/>
-                        <a:t>5. feature importance, 37-38</a:t>
+                        <a:t>5. feature importance, 38-39</a:t>
                       </a:r>
                     </a:p>
                   </a:txBody>
@@ -14944,7 +15448,7 @@
                       </a:pPr>
                       <a:r>
                         <a:rPr/>
-                        <a:t>6. checking the importances, 39</a:t>
+                        <a:t>6. checking the importances, 40</a:t>
                       </a:r>
                     </a:p>
                   </a:txBody>
@@ -14980,7 +15484,7 @@
 </p:sld>
 </file>
 
-<file path=ppt/slides/slide41.xml><?xml version="1.0" encoding="utf-8"?>
+<file path=ppt/slides/slide42.xml><?xml version="1.0" encoding="utf-8"?>
 <p:sld xmlns:a="http://schemas.openxmlformats.org/drawingml/2006/main" xmlns:r="http://schemas.openxmlformats.org/officeDocument/2006/relationships" xmlns:p="http://schemas.openxmlformats.org/presentationml/2006/main">
   <p:cSld>
     <p:spTree>
@@ -15125,7 +15629,7 @@
 </p:sld>
 </file>
 
-<file path=ppt/slides/slide42.xml><?xml version="1.0" encoding="utf-8"?>
+<file path=ppt/slides/slide43.xml><?xml version="1.0" encoding="utf-8"?>
 <p:sld xmlns:a="http://schemas.openxmlformats.org/drawingml/2006/main" xmlns:r="http://schemas.openxmlformats.org/officeDocument/2006/relationships" xmlns:p="http://schemas.openxmlformats.org/presentationml/2006/main">
   <p:cSld>
     <p:spTree>
@@ -15207,7 +15711,7 @@
 </p:sld>
 </file>
 
-<file path=ppt/slides/slide43.xml><?xml version="1.0" encoding="utf-8"?>
+<file path=ppt/slides/slide44.xml><?xml version="1.0" encoding="utf-8"?>
 <p:sld xmlns:a="http://schemas.openxmlformats.org/drawingml/2006/main" xmlns:r="http://schemas.openxmlformats.org/officeDocument/2006/relationships" xmlns:p="http://schemas.openxmlformats.org/presentationml/2006/main">
   <p:cSld>
     <p:spTree>
@@ -15340,7 +15844,7 @@
 </p:sld>
 </file>
 
-<file path=ppt/slides/slide44.xml><?xml version="1.0" encoding="utf-8"?>
+<file path=ppt/slides/slide45.xml><?xml version="1.0" encoding="utf-8"?>
 <p:sld xmlns:a="http://schemas.openxmlformats.org/drawingml/2006/main" xmlns:r="http://schemas.openxmlformats.org/officeDocument/2006/relationships" xmlns:p="http://schemas.openxmlformats.org/presentationml/2006/main">
   <p:cSld>
     <p:spTree>
@@ -15422,131 +15926,6 @@
 </p:sld>
 </file>
 
-<file path=ppt/slides/slide45.xml><?xml version="1.0" encoding="utf-8"?>
-<p:sld xmlns:a="http://schemas.openxmlformats.org/drawingml/2006/main" xmlns:r="http://schemas.openxmlformats.org/officeDocument/2006/relationships" xmlns:p="http://schemas.openxmlformats.org/presentationml/2006/main">
-  <p:cSld>
-    <p:spTree>
-      <p:nvGrpSpPr>
-        <p:cNvPr id="1" name=""/>
-        <p:cNvGrpSpPr/>
-        <p:nvPr/>
-      </p:nvGrpSpPr>
-      <p:grpSpPr>
-        <a:xfrm>
-          <a:off x="0" y="0"/>
-          <a:ext cx="0" cy="0"/>
-          <a:chOff x="0" y="0"/>
-          <a:chExt cx="0" cy="0"/>
-        </a:xfrm>
-      </p:grpSpPr>
-      <p:sp>
-        <p:nvSpPr>
-          <p:cNvPr id="2" name="Title 1"/>
-          <p:cNvSpPr>
-            <a:spLocks noGrp="1"/>
-          </p:cNvSpPr>
-          <p:nvPr>
-            <p:ph type="title"/>
-          </p:nvPr>
-        </p:nvSpPr>
-        <p:spPr>
-          <a:xfrm>
-            <a:off x="457200" y="205979"/>
-            <a:ext cx="8229600" cy="857250"/>
-          </a:xfrm>
-        </p:spPr>
-        <p:txBody>
-          <a:bodyPr/>
-          <a:lstStyle/>
-          <a:p>
-            <a:pPr lvl="0" indent="0" marL="0">
-              <a:buNone/>
-            </a:pPr>
-            <a:r>
-              <a:rPr/>
-              <a:t>Reading the picture</a:t>
-            </a:r>
-          </a:p>
-        </p:txBody>
-      </p:sp>
-      <p:sp>
-        <p:nvSpPr>
-          <p:cNvPr id="3" name="Content Placeholder 2"/>
-          <p:cNvSpPr>
-            <a:spLocks noGrp="1"/>
-          </p:cNvSpPr>
-          <p:nvPr>
-            <p:ph idx="1"/>
-          </p:nvPr>
-        </p:nvSpPr>
-        <p:spPr>
-          <a:xfrm>
-            <a:off x="457200" y="1200151"/>
-            <a:ext cx="8229600" cy="3394472"/>
-          </a:xfrm>
-        </p:spPr>
-        <p:txBody>
-          <a:bodyPr/>
-          <a:lstStyle/>
-          <a:p>
-            <a:pPr lvl="0"/>
-            <a:r>
-              <a:rPr b="1"/>
-              <a:t>1 tree</a:t>
-            </a:r>
-            <a:r>
-              <a:rPr/>
-              <a:t>: mean squared error (MSE) against the true function 0.395, barely moves the flat guess</a:t>
-            </a:r>
-          </a:p>
-          <a:p>
-            <a:pPr lvl="0"/>
-            <a:r>
-              <a:rPr b="1"/>
-              <a:t>5 trees</a:t>
-            </a:r>
-            <a:r>
-              <a:rPr/>
-              <a:t>: MSE 0.068, the coarse shape appears</a:t>
-            </a:r>
-          </a:p>
-          <a:p>
-            <a:pPr lvl="0"/>
-            <a:r>
-              <a:rPr b="1"/>
-              <a:t>20 trees</a:t>
-            </a:r>
-            <a:r>
-              <a:rPr/>
-              <a:t>: MSE </a:t>
-            </a:r>
-            <a:r>
-              <a:rPr b="1"/>
-              <a:t>0.012</a:t>
-            </a:r>
-            <a:r>
-              <a:rPr/>
-              <a:t>, the ensemble’s best point</a:t>
-            </a:r>
-          </a:p>
-          <a:p>
-            <a:pPr lvl="0"/>
-            <a:r>
-              <a:rPr b="1"/>
-              <a:t>60 trees</a:t>
-            </a:r>
-            <a:r>
-              <a:rPr/>
-              <a:t>: MSE rises back to 0.018, tracking noise, not signal</a:t>
-            </a:r>
-          </a:p>
-        </p:txBody>
-      </p:sp>
-    </p:spTree>
-  </p:cSld>
-</p:sld>
-</file>
-
 <file path=ppt/slides/slide46.xml><?xml version="1.0" encoding="utf-8"?>
 <p:sld xmlns:a="http://schemas.openxmlformats.org/drawingml/2006/main" xmlns:r="http://schemas.openxmlformats.org/officeDocument/2006/relationships" xmlns:p="http://schemas.openxmlformats.org/presentationml/2006/main">
   <p:cSld>
@@ -15589,7 +15968,7 @@
             </a:pPr>
             <a:r>
               <a:rPr/>
-              <a:t>Classification: the same idea, a different gradient</a:t>
+              <a:t>Reading the picture</a:t>
             </a:r>
           </a:p>
         </p:txBody>
@@ -15616,41 +15995,53 @@
           <a:p>
             <a:pPr lvl="0"/>
             <a:r>
-              <a:rPr/>
-              <a:t>y is 0 or 1; the score F becomes a probability through lesson 4’s logistic function, p = σ(F) (this σ is not the σ² of the variance slides)</a:t>
+              <a:rPr b="1"/>
+              <a:t>1 tree</a:t>
+            </a:r>
+            <a:r>
+              <a:rPr/>
+              <a:t>: mean squared error (MSE) against the true function 0.395, barely moves the flat guess</a:t>
             </a:r>
           </a:p>
           <a:p>
             <a:pPr lvl="0"/>
             <a:r>
-              <a:rPr/>
-              <a:t>The loss is lesson 4’s </a:t>
-            </a:r>
-            <a:r>
               <a:rPr b="1"/>
-              <a:t>log-loss</a:t>
+              <a:t>5 trees</a:t>
+            </a:r>
+            <a:r>
+              <a:rPr/>
+              <a:t>: MSE 0.068, the coarse shape appears</a:t>
             </a:r>
           </a:p>
           <a:p>
             <a:pPr lvl="0"/>
             <a:r>
-              <a:rPr/>
-              <a:t>Each tree fits the </a:t>
-            </a:r>
-            <a:r>
               <a:rPr b="1"/>
-              <a:t>pseudo-residual</a:t>
-            </a:r>
-            <a:r>
-              <a:rPr/>
-              <a:t> y - p, the negative gradient: lesson 4’s error term</a:t>
+              <a:t>20 trees</a:t>
+            </a:r>
+            <a:r>
+              <a:rPr/>
+              <a:t>: MSE </a:t>
+            </a:r>
+            <a:r>
+              <a:rPr b="1"/>
+              <a:t>0.012</a:t>
+            </a:r>
+            <a:r>
+              <a:rPr/>
+              <a:t>, the ensemble’s best point</a:t>
             </a:r>
           </a:p>
           <a:p>
             <a:pPr lvl="0"/>
             <a:r>
-              <a:rPr/>
-              <a:t>Start: p = 0.387 for all, so the first tree fits +0.613 to defaulters and −0.387 to the rest</a:t>
+              <a:rPr b="1"/>
+              <a:t>60 trees</a:t>
+            </a:r>
+            <a:r>
+              <a:rPr/>
+              <a:t>: MSE rises back to 0.018, tracking noise, not signal</a:t>
             </a:r>
           </a:p>
         </p:txBody>
@@ -15702,7 +16093,7 @@
             </a:pPr>
             <a:r>
               <a:rPr/>
-              <a:t>On the loan data</a:t>
+              <a:t>Classification: the same idea, a different gradient</a:t>
             </a:r>
           </a:p>
         </p:txBody>
@@ -15729,44 +16120,41 @@
           <a:p>
             <a:pPr lvl="0"/>
             <a:r>
-              <a:rPr>
-                <a:latin typeface="Courier"/>
-              </a:rPr>
-              <a:t>GradientBoostingClassifier</a:t>
-            </a:r>
-            <a:r>
-              <a:rPr/>
-              <a:t>, defaults: </a:t>
+              <a:rPr/>
+              <a:t>y is 0 or 1; the score F becomes a probability through lesson 4’s logistic function, p = σ(F) (this σ is not the σ² of the variance slides)</a:t>
+            </a:r>
+          </a:p>
+          <a:p>
+            <a:pPr lvl="0"/>
+            <a:r>
+              <a:rPr/>
+              <a:t>The loss is lesson 4’s </a:t>
             </a:r>
             <a:r>
               <a:rPr b="1"/>
-              <a:t>100 trees</a:t>
-            </a:r>
-            <a:r>
-              <a:rPr/>
-              <a:t>, learning rate α = 0.1</a:t>
+              <a:t>log-loss</a:t>
             </a:r>
           </a:p>
           <a:p>
             <a:pPr lvl="0"/>
             <a:r>
               <a:rPr/>
-              <a:t>Reaches </a:t>
+              <a:t>Each tree fits the </a:t>
             </a:r>
             <a:r>
               <a:rPr b="1"/>
-              <a:t>0.902 ± 0.020</a:t>
-            </a:r>
-            <a:r>
-              <a:rPr/>
-              <a:t> cross-validated accuracy</a:t>
+              <a:t>pseudo-residual</a:t>
+            </a:r>
+            <a:r>
+              <a:rPr/>
+              <a:t> y - p, the negative gradient: lesson 4’s error term</a:t>
             </a:r>
           </a:p>
           <a:p>
             <a:pPr lvl="0"/>
             <a:r>
               <a:rPr/>
-              <a:t>Already ahead of any single tree from earlier in the lesson</a:t>
+              <a:t>Start: p = 0.387 for all, so the first tree fits +0.613 to defaulters and −0.387 to the rest</a:t>
             </a:r>
           </a:p>
         </p:txBody>
@@ -15777,6 +16165,122 @@
 </file>
 
 <file path=ppt/slides/slide48.xml><?xml version="1.0" encoding="utf-8"?>
+<p:sld xmlns:a="http://schemas.openxmlformats.org/drawingml/2006/main" xmlns:r="http://schemas.openxmlformats.org/officeDocument/2006/relationships" xmlns:p="http://schemas.openxmlformats.org/presentationml/2006/main">
+  <p:cSld>
+    <p:spTree>
+      <p:nvGrpSpPr>
+        <p:cNvPr id="1" name=""/>
+        <p:cNvGrpSpPr/>
+        <p:nvPr/>
+      </p:nvGrpSpPr>
+      <p:grpSpPr>
+        <a:xfrm>
+          <a:off x="0" y="0"/>
+          <a:ext cx="0" cy="0"/>
+          <a:chOff x="0" y="0"/>
+          <a:chExt cx="0" cy="0"/>
+        </a:xfrm>
+      </p:grpSpPr>
+      <p:sp>
+        <p:nvSpPr>
+          <p:cNvPr id="2" name="Title 1"/>
+          <p:cNvSpPr>
+            <a:spLocks noGrp="1"/>
+          </p:cNvSpPr>
+          <p:nvPr>
+            <p:ph type="title"/>
+          </p:nvPr>
+        </p:nvSpPr>
+        <p:spPr>
+          <a:xfrm>
+            <a:off x="457200" y="205979"/>
+            <a:ext cx="8229600" cy="857250"/>
+          </a:xfrm>
+        </p:spPr>
+        <p:txBody>
+          <a:bodyPr/>
+          <a:lstStyle/>
+          <a:p>
+            <a:pPr lvl="0" indent="0" marL="0">
+              <a:buNone/>
+            </a:pPr>
+            <a:r>
+              <a:rPr/>
+              <a:t>On the loan data</a:t>
+            </a:r>
+          </a:p>
+        </p:txBody>
+      </p:sp>
+      <p:sp>
+        <p:nvSpPr>
+          <p:cNvPr id="3" name="Content Placeholder 2"/>
+          <p:cNvSpPr>
+            <a:spLocks noGrp="1"/>
+          </p:cNvSpPr>
+          <p:nvPr>
+            <p:ph idx="1"/>
+          </p:nvPr>
+        </p:nvSpPr>
+        <p:spPr>
+          <a:xfrm>
+            <a:off x="457200" y="1200151"/>
+            <a:ext cx="8229600" cy="3394472"/>
+          </a:xfrm>
+        </p:spPr>
+        <p:txBody>
+          <a:bodyPr/>
+          <a:lstStyle/>
+          <a:p>
+            <a:pPr lvl="0"/>
+            <a:r>
+              <a:rPr>
+                <a:latin typeface="Courier"/>
+              </a:rPr>
+              <a:t>GradientBoostingClassifier</a:t>
+            </a:r>
+            <a:r>
+              <a:rPr/>
+              <a:t>, defaults: </a:t>
+            </a:r>
+            <a:r>
+              <a:rPr b="1"/>
+              <a:t>100 trees</a:t>
+            </a:r>
+            <a:r>
+              <a:rPr/>
+              <a:t>, learning rate α = 0.1</a:t>
+            </a:r>
+          </a:p>
+          <a:p>
+            <a:pPr lvl="0"/>
+            <a:r>
+              <a:rPr/>
+              <a:t>Reaches </a:t>
+            </a:r>
+            <a:r>
+              <a:rPr b="1"/>
+              <a:t>0.902 ± 0.020</a:t>
+            </a:r>
+            <a:r>
+              <a:rPr/>
+              <a:t> cross-validated accuracy</a:t>
+            </a:r>
+          </a:p>
+          <a:p>
+            <a:pPr lvl="0"/>
+            <a:r>
+              <a:rPr/>
+              <a:t>Already ahead of any single tree from earlier in the lesson</a:t>
+            </a:r>
+          </a:p>
+        </p:txBody>
+      </p:sp>
+    </p:spTree>
+  </p:cSld>
+</p:sld>
+</file>
+
+<file path=ppt/slides/slide49.xml><?xml version="1.0" encoding="utf-8"?>
 <p:sld xmlns:a="http://schemas.openxmlformats.org/drawingml/2006/main" xmlns:r="http://schemas.openxmlformats.org/officeDocument/2006/relationships" xmlns:p="http://schemas.openxmlformats.org/presentationml/2006/main">
   <p:cSld>
     <p:spTree>
@@ -16242,88 +16746,6 @@
 </p:sld>
 </file>
 
-<file path=ppt/slides/slide49.xml><?xml version="1.0" encoding="utf-8"?>
-<p:sld xmlns:a="http://schemas.openxmlformats.org/drawingml/2006/main" xmlns:r="http://schemas.openxmlformats.org/officeDocument/2006/relationships" xmlns:p="http://schemas.openxmlformats.org/presentationml/2006/main">
-  <p:cSld>
-    <p:spTree>
-      <p:nvGrpSpPr>
-        <p:cNvPr id="1" name=""/>
-        <p:cNvGrpSpPr/>
-        <p:nvPr/>
-      </p:nvGrpSpPr>
-      <p:grpSpPr>
-        <a:xfrm>
-          <a:off x="0" y="0"/>
-          <a:ext cx="0" cy="0"/>
-          <a:chOff x="0" y="0"/>
-          <a:chExt cx="0" cy="0"/>
-        </a:xfrm>
-      </p:grpSpPr>
-      <p:sp>
-        <p:nvSpPr>
-          <p:cNvPr id="2" name="Title 1"/>
-          <p:cNvSpPr>
-            <a:spLocks noGrp="1"/>
-          </p:cNvSpPr>
-          <p:nvPr>
-            <p:ph type="title"/>
-          </p:nvPr>
-        </p:nvSpPr>
-        <p:spPr>
-          <a:xfrm>
-            <a:off x="457200" y="205979"/>
-            <a:ext cx="8229600" cy="857250"/>
-          </a:xfrm>
-        </p:spPr>
-        <p:txBody>
-          <a:bodyPr/>
-          <a:lstStyle/>
-          <a:p>
-            <a:pPr lvl="0" indent="0" marL="0">
-              <a:buNone/>
-            </a:pPr>
-            <a:r>
-              <a:rPr/>
-              <a:t>Training climbs to 1.000 and stays; the honest curve turns over first</a:t>
-            </a:r>
-          </a:p>
-        </p:txBody>
-      </p:sp>
-      <p:pic>
-        <p:nvPicPr>
-          <p:cNvPr descr="gbm_learning_curve.png" id="0" name="Picture 1"/>
-          <p:cNvPicPr>
-            <a:picLocks noGrp="1" noChangeAspect="1"/>
-          </p:cNvPicPr>
-          <p:nvPr/>
-        </p:nvPicPr>
-        <p:blipFill>
-          <a:blip r:embed="rId3"/>
-          <a:stretch>
-            <a:fillRect/>
-          </a:stretch>
-        </p:blipFill>
-        <p:spPr bwMode="auto">
-          <a:xfrm>
-            <a:off x="2130520" y="1166099"/>
-            <a:ext cx="4882959" cy="3360181"/>
-          </a:xfrm>
-          <a:prstGeom prst="rect">
-            <a:avLst/>
-          </a:prstGeom>
-          <a:noFill/>
-          <a:ln w="9525">
-            <a:noFill/>
-            <a:headEnd/>
-            <a:tailEnd/>
-          </a:ln>
-        </p:spPr>
-      </p:pic>
-    </p:spTree>
-  </p:cSld>
-</p:sld>
-</file>
-
 <file path=ppt/slides/slide5.xml><?xml version="1.0" encoding="utf-8"?>
 <p:sld xmlns:a="http://schemas.openxmlformats.org/drawingml/2006/main" xmlns:r="http://schemas.openxmlformats.org/officeDocument/2006/relationships" xmlns:p="http://schemas.openxmlformats.org/presentationml/2006/main">
   <p:cSld>
@@ -16407,6 +16829,88 @@
 </file>
 
 <file path=ppt/slides/slide50.xml><?xml version="1.0" encoding="utf-8"?>
+<p:sld xmlns:a="http://schemas.openxmlformats.org/drawingml/2006/main" xmlns:r="http://schemas.openxmlformats.org/officeDocument/2006/relationships" xmlns:p="http://schemas.openxmlformats.org/presentationml/2006/main">
+  <p:cSld>
+    <p:spTree>
+      <p:nvGrpSpPr>
+        <p:cNvPr id="1" name=""/>
+        <p:cNvGrpSpPr/>
+        <p:nvPr/>
+      </p:nvGrpSpPr>
+      <p:grpSpPr>
+        <a:xfrm>
+          <a:off x="0" y="0"/>
+          <a:ext cx="0" cy="0"/>
+          <a:chOff x="0" y="0"/>
+          <a:chExt cx="0" cy="0"/>
+        </a:xfrm>
+      </p:grpSpPr>
+      <p:sp>
+        <p:nvSpPr>
+          <p:cNvPr id="2" name="Title 1"/>
+          <p:cNvSpPr>
+            <a:spLocks noGrp="1"/>
+          </p:cNvSpPr>
+          <p:nvPr>
+            <p:ph type="title"/>
+          </p:nvPr>
+        </p:nvSpPr>
+        <p:spPr>
+          <a:xfrm>
+            <a:off x="457200" y="205979"/>
+            <a:ext cx="8229600" cy="857250"/>
+          </a:xfrm>
+        </p:spPr>
+        <p:txBody>
+          <a:bodyPr/>
+          <a:lstStyle/>
+          <a:p>
+            <a:pPr lvl="0" indent="0" marL="0">
+              <a:buNone/>
+            </a:pPr>
+            <a:r>
+              <a:rPr/>
+              <a:t>Training climbs to 1.000 and stays; the honest curve turns over first</a:t>
+            </a:r>
+          </a:p>
+        </p:txBody>
+      </p:sp>
+      <p:pic>
+        <p:nvPicPr>
+          <p:cNvPr descr="gbm_learning_curve.png" id="0" name="Picture 1"/>
+          <p:cNvPicPr>
+            <a:picLocks noGrp="1" noChangeAspect="1"/>
+          </p:cNvPicPr>
+          <p:nvPr/>
+        </p:nvPicPr>
+        <p:blipFill>
+          <a:blip r:embed="rId3"/>
+          <a:stretch>
+            <a:fillRect/>
+          </a:stretch>
+        </p:blipFill>
+        <p:spPr bwMode="auto">
+          <a:xfrm>
+            <a:off x="2130520" y="1166099"/>
+            <a:ext cx="4882959" cy="3360181"/>
+          </a:xfrm>
+          <a:prstGeom prst="rect">
+            <a:avLst/>
+          </a:prstGeom>
+          <a:noFill/>
+          <a:ln w="9525">
+            <a:noFill/>
+            <a:headEnd/>
+            <a:tailEnd/>
+          </a:ln>
+        </p:spPr>
+      </p:pic>
+    </p:spTree>
+  </p:cSld>
+</p:sld>
+</file>
+
+<file path=ppt/slides/slide51.xml><?xml version="1.0" encoding="utf-8"?>
 <p:sld xmlns:a="http://schemas.openxmlformats.org/drawingml/2006/main" xmlns:r="http://schemas.openxmlformats.org/officeDocument/2006/relationships" xmlns:p="http://schemas.openxmlformats.org/presentationml/2006/main">
   <p:cSld>
     <p:spTree>
@@ -16772,7 +17276,7 @@
 </p:sld>
 </file>
 
-<file path=ppt/slides/slide51.xml><?xml version="1.0" encoding="utf-8"?>
+<file path=ppt/slides/slide52.xml><?xml version="1.0" encoding="utf-8"?>
 <p:sld xmlns:a="http://schemas.openxmlformats.org/drawingml/2006/main" xmlns:r="http://schemas.openxmlformats.org/officeDocument/2006/relationships" xmlns:p="http://schemas.openxmlformats.org/presentationml/2006/main">
   <p:cSld>
     <p:spTree>
@@ -16888,7 +17392,7 @@
                       </a:pPr>
                       <a:r>
                         <a:rPr/>
-                        <a:t>1. boosting from scratch, 41-45</a:t>
+                        <a:t>1. boosting from scratch, 42-46</a:t>
                       </a:r>
                     </a:p>
                   </a:txBody>
@@ -16926,7 +17430,7 @@
                       </a:pPr>
                       <a:r>
                         <a:rPr/>
-                        <a:t>2. classification, 46-47</a:t>
+                        <a:t>2. classification, 47-48</a:t>
                       </a:r>
                     </a:p>
                   </a:txBody>
@@ -16974,7 +17478,7 @@
                       </a:pPr>
                       <a:r>
                         <a:rPr/>
-                        <a:t>3. more trees, 48-49</a:t>
+                        <a:t>3. more trees, 49-50</a:t>
                       </a:r>
                     </a:p>
                   </a:txBody>
@@ -17026,7 +17530,7 @@
                       </a:pPr>
                       <a:r>
                         <a:rPr/>
-                        <a:t>4. learning rate, 50</a:t>
+                        <a:t>4. learning rate, 51</a:t>
                       </a:r>
                     </a:p>
                   </a:txBody>
@@ -17078,7 +17582,7 @@
                       </a:pPr>
                       <a:r>
                         <a:rPr/>
-                        <a:t>5. leaderboard, 52</a:t>
+                        <a:t>5. leaderboard, 53</a:t>
                       </a:r>
                     </a:p>
                   </a:txBody>
@@ -17118,7 +17622,7 @@
 </p:sld>
 </file>
 
-<file path=ppt/slides/slide52.xml><?xml version="1.0" encoding="utf-8"?>
+<file path=ppt/slides/slide53.xml><?xml version="1.0" encoding="utf-8"?>
 <p:sld xmlns:a="http://schemas.openxmlformats.org/drawingml/2006/main" xmlns:r="http://schemas.openxmlformats.org/officeDocument/2006/relationships" xmlns:p="http://schemas.openxmlformats.org/presentationml/2006/main">
   <p:cSld>
     <p:spTree>
@@ -17494,7 +17998,7 @@
 </p:sld>
 </file>
 
-<file path=ppt/slides/slide53.xml><?xml version="1.0" encoding="utf-8"?>
+<file path=ppt/slides/slide54.xml><?xml version="1.0" encoding="utf-8"?>
 <p:sld xmlns:a="http://schemas.openxmlformats.org/drawingml/2006/main" xmlns:r="http://schemas.openxmlformats.org/officeDocument/2006/relationships" xmlns:p="http://schemas.openxmlformats.org/presentationml/2006/main">
   <p:cSld>
     <p:spTree>
@@ -17612,7 +18116,7 @@
 </p:sld>
 </file>
 
-<file path=ppt/slides/slide54.xml><?xml version="1.0" encoding="utf-8"?>
+<file path=ppt/slides/slide55.xml><?xml version="1.0" encoding="utf-8"?>
 <p:sld xmlns:a="http://schemas.openxmlformats.org/drawingml/2006/main" xmlns:r="http://schemas.openxmlformats.org/officeDocument/2006/relationships" xmlns:p="http://schemas.openxmlformats.org/presentationml/2006/main">
   <p:cSld>
     <p:spTree>
@@ -17886,131 +18390,6 @@
 </p:sld>
 </file>
 
-<file path=ppt/slides/slide55.xml><?xml version="1.0" encoding="utf-8"?>
-<p:sld xmlns:a="http://schemas.openxmlformats.org/drawingml/2006/main" xmlns:r="http://schemas.openxmlformats.org/officeDocument/2006/relationships" xmlns:p="http://schemas.openxmlformats.org/presentationml/2006/main">
-  <p:cSld>
-    <p:spTree>
-      <p:nvGrpSpPr>
-        <p:cNvPr id="1" name=""/>
-        <p:cNvGrpSpPr/>
-        <p:nvPr/>
-      </p:nvGrpSpPr>
-      <p:grpSpPr>
-        <a:xfrm>
-          <a:off x="0" y="0"/>
-          <a:ext cx="0" cy="0"/>
-          <a:chOff x="0" y="0"/>
-          <a:chExt cx="0" cy="0"/>
-        </a:xfrm>
-      </p:grpSpPr>
-      <p:sp>
-        <p:nvSpPr>
-          <p:cNvPr id="2" name="Title 1"/>
-          <p:cNvSpPr>
-            <a:spLocks noGrp="1"/>
-          </p:cNvSpPr>
-          <p:nvPr>
-            <p:ph type="title"/>
-          </p:nvPr>
-        </p:nvSpPr>
-        <p:spPr>
-          <a:xfrm>
-            <a:off x="457200" y="205979"/>
-            <a:ext cx="8229600" cy="857250"/>
-          </a:xfrm>
-        </p:spPr>
-        <p:txBody>
-          <a:bodyPr/>
-          <a:lstStyle/>
-          <a:p>
-            <a:pPr lvl="0" indent="0" marL="0">
-              <a:buNone/>
-            </a:pPr>
-            <a:r>
-              <a:rPr/>
-              <a:t>54% of the importance landed on noise</a:t>
-            </a:r>
-          </a:p>
-        </p:txBody>
-      </p:sp>
-      <p:sp>
-        <p:nvSpPr>
-          <p:cNvPr id="3" name="Content Placeholder 2"/>
-          <p:cNvSpPr>
-            <a:spLocks noGrp="1"/>
-          </p:cNvSpPr>
-          <p:nvPr>
-            <p:ph idx="1"/>
-          </p:nvPr>
-        </p:nvSpPr>
-        <p:spPr>
-          <a:xfrm>
-            <a:off x="457200" y="1200151"/>
-            <a:ext cx="8229600" cy="3394472"/>
-          </a:xfrm>
-        </p:spPr>
-        <p:txBody>
-          <a:bodyPr/>
-          <a:lstStyle/>
-          <a:p>
-            <a:pPr lvl="0"/>
-            <a:r>
-              <a:rPr/>
-              <a:t>20 noise columns, 2 real ones: not small, not a bug</a:t>
-            </a:r>
-          </a:p>
-          <a:p>
-            <a:pPr lvl="0"/>
-            <a:r>
-              <a:rPr b="1"/>
-              <a:t>The menu</a:t>
-            </a:r>
-            <a:r>
-              <a:rPr/>
-              <a:t>: 4 of 22 columns per split; in two splits of three (0.662), no real feature</a:t>
-            </a:r>
-          </a:p>
-          <a:p>
-            <a:pPr lvl="0"/>
-            <a:r>
-              <a:rPr b="1"/>
-              <a:t>Small groups</a:t>
-            </a:r>
-            <a:r>
-              <a:rPr/>
-              <a:t>: with all 22 on offer, noise still takes </a:t>
-            </a:r>
-            <a:r>
-              <a:rPr b="1"/>
-              <a:t>28%</a:t>
-            </a:r>
-            <a:r>
-              <a:rPr/>
-              <a:t>, from deep splits</a:t>
-            </a:r>
-          </a:p>
-          <a:p>
-            <a:pPr lvl="0"/>
-            <a:r>
-              <a:rPr/>
-              <a:t>The check: </a:t>
-            </a:r>
-            <a:r>
-              <a:rPr b="1"/>
-              <a:t>permutation importance</a:t>
-            </a:r>
-            <a:r>
-              <a:rPr/>
-              <a:t>, slide 39</a:t>
-            </a:r>
-          </a:p>
-        </p:txBody>
-      </p:sp>
-    </p:spTree>
-  </p:cSld>
-</p:sld>
-</file>
-
 <file path=ppt/slides/slide56.xml><?xml version="1.0" encoding="utf-8"?>
 <p:sld xmlns:a="http://schemas.openxmlformats.org/drawingml/2006/main" xmlns:r="http://schemas.openxmlformats.org/officeDocument/2006/relationships" xmlns:p="http://schemas.openxmlformats.org/presentationml/2006/main">
   <p:cSld>
@@ -18053,7 +18432,7 @@
             </a:pPr>
             <a:r>
               <a:rPr/>
-              <a:t>What to take away</a:t>
+              <a:t>54% of the importance landed on noise</a:t>
             </a:r>
           </a:p>
         </p:txBody>
@@ -18081,44 +18460,52 @@
             <a:pPr lvl="0"/>
             <a:r>
               <a:rPr/>
-              <a:t>A tree splits greedily on Gini impurity, matching scikit-learn</a:t>
+              <a:t>20 noise columns, 2 real ones: not small, not a bug</a:t>
             </a:r>
           </a:p>
           <a:p>
             <a:pPr lvl="0"/>
             <a:r>
-              <a:rPr/>
-              <a:t>Depth is the bias-variance dial: accuracy peaked at </a:t>
-            </a:r>
-            <a:r>
               <a:rPr b="1"/>
-              <a:t>depth 8</a:t>
+              <a:t>The menu</a:t>
+            </a:r>
+            <a:r>
+              <a:rPr/>
+              <a:t>: 4 of 22 columns per split; in two splits of three (0.662), no real feature</a:t>
             </a:r>
           </a:p>
           <a:p>
             <a:pPr lvl="0"/>
             <a:r>
-              <a:rPr/>
-              <a:t>Bootstrap resampling leaves </a:t>
-            </a:r>
-            <a:r>
               <a:rPr b="1"/>
-              <a:t>36.8%</a:t>
-            </a:r>
-            <a:r>
-              <a:rPr/>
-              <a:t> of rows out-of-bag: free validation</a:t>
+              <a:t>Small groups</a:t>
+            </a:r>
+            <a:r>
+              <a:rPr/>
+              <a:t>: with all 22 on offer, noise still takes </a:t>
+            </a:r>
+            <a:r>
+              <a:rPr b="1"/>
+              <a:t>28%</a:t>
+            </a:r>
+            <a:r>
+              <a:rPr/>
+              <a:t>, from deep splits</a:t>
             </a:r>
           </a:p>
           <a:p>
             <a:pPr lvl="0"/>
             <a:r>
+              <a:rPr/>
+              <a:t>The check: </a:t>
+            </a:r>
+            <a:r>
               <a:rPr b="1"/>
-              <a:t>54% of a random forest’s importance landed on 20 noise columns</a:t>
-            </a:r>
-            <a:r>
-              <a:rPr/>
-              <a:t>, today’s number</a:t>
+              <a:t>permutation importance</a:t>
+            </a:r>
+            <a:r>
+              <a:rPr/>
+              <a:t>, slide 40</a:t>
             </a:r>
           </a:p>
         </p:txBody>
@@ -18129,6 +18516,123 @@
 </file>
 
 <file path=ppt/slides/slide57.xml><?xml version="1.0" encoding="utf-8"?>
+<p:sld xmlns:a="http://schemas.openxmlformats.org/drawingml/2006/main" xmlns:r="http://schemas.openxmlformats.org/officeDocument/2006/relationships" xmlns:p="http://schemas.openxmlformats.org/presentationml/2006/main">
+  <p:cSld>
+    <p:spTree>
+      <p:nvGrpSpPr>
+        <p:cNvPr id="1" name=""/>
+        <p:cNvGrpSpPr/>
+        <p:nvPr/>
+      </p:nvGrpSpPr>
+      <p:grpSpPr>
+        <a:xfrm>
+          <a:off x="0" y="0"/>
+          <a:ext cx="0" cy="0"/>
+          <a:chOff x="0" y="0"/>
+          <a:chExt cx="0" cy="0"/>
+        </a:xfrm>
+      </p:grpSpPr>
+      <p:sp>
+        <p:nvSpPr>
+          <p:cNvPr id="2" name="Title 1"/>
+          <p:cNvSpPr>
+            <a:spLocks noGrp="1"/>
+          </p:cNvSpPr>
+          <p:nvPr>
+            <p:ph type="title"/>
+          </p:nvPr>
+        </p:nvSpPr>
+        <p:spPr>
+          <a:xfrm>
+            <a:off x="457200" y="205979"/>
+            <a:ext cx="8229600" cy="857250"/>
+          </a:xfrm>
+        </p:spPr>
+        <p:txBody>
+          <a:bodyPr/>
+          <a:lstStyle/>
+          <a:p>
+            <a:pPr lvl="0" indent="0" marL="0">
+              <a:buNone/>
+            </a:pPr>
+            <a:r>
+              <a:rPr/>
+              <a:t>What to take away</a:t>
+            </a:r>
+          </a:p>
+        </p:txBody>
+      </p:sp>
+      <p:sp>
+        <p:nvSpPr>
+          <p:cNvPr id="3" name="Content Placeholder 2"/>
+          <p:cNvSpPr>
+            <a:spLocks noGrp="1"/>
+          </p:cNvSpPr>
+          <p:nvPr>
+            <p:ph idx="1"/>
+          </p:nvPr>
+        </p:nvSpPr>
+        <p:spPr>
+          <a:xfrm>
+            <a:off x="457200" y="1200151"/>
+            <a:ext cx="8229600" cy="3394472"/>
+          </a:xfrm>
+        </p:spPr>
+        <p:txBody>
+          <a:bodyPr/>
+          <a:lstStyle/>
+          <a:p>
+            <a:pPr lvl="0"/>
+            <a:r>
+              <a:rPr/>
+              <a:t>A tree splits greedily on Gini impurity, matching scikit-learn</a:t>
+            </a:r>
+          </a:p>
+          <a:p>
+            <a:pPr lvl="0"/>
+            <a:r>
+              <a:rPr/>
+              <a:t>Depth is the bias-variance dial: accuracy peaked at </a:t>
+            </a:r>
+            <a:r>
+              <a:rPr b="1"/>
+              <a:t>depth 8</a:t>
+            </a:r>
+          </a:p>
+          <a:p>
+            <a:pPr lvl="0"/>
+            <a:r>
+              <a:rPr/>
+              <a:t>Bootstrap resampling leaves </a:t>
+            </a:r>
+            <a:r>
+              <a:rPr b="1"/>
+              <a:t>36.8%</a:t>
+            </a:r>
+            <a:r>
+              <a:rPr/>
+              <a:t> of rows out-of-bag: free validation</a:t>
+            </a:r>
+          </a:p>
+          <a:p>
+            <a:pPr lvl="0"/>
+            <a:r>
+              <a:rPr b="1"/>
+              <a:t>54% of a random forest’s importance landed on 20 noise columns</a:t>
+            </a:r>
+            <a:r>
+              <a:rPr/>
+              <a:t>, today’s number</a:t>
+            </a:r>
+          </a:p>
+        </p:txBody>
+      </p:sp>
+    </p:spTree>
+  </p:cSld>
+</p:sld>
+</file>
+
+<file path=ppt/slides/slide58.xml><?xml version="1.0" encoding="utf-8"?>
 <p:sld xmlns:a="http://schemas.openxmlformats.org/drawingml/2006/main" xmlns:r="http://schemas.openxmlformats.org/officeDocument/2006/relationships" xmlns:p="http://schemas.openxmlformats.org/presentationml/2006/main">
   <p:cSld>
     <p:spTree>
@@ -18606,7 +19110,7 @@
             <a:pPr lvl="0"/>
             <a:r>
               <a:rPr/>
-              <a:t>A leaf split evenly between classes is the worst case: a coin flip</a:t>
+              <a:t>A group half one class, half the other, is the worst case: a coin flip</a:t>
             </a:r>
           </a:p>
           <a:p>

--- a/Lessons/07_trees_and_ensembles/Slides/trees_and_ensembles_slides.pptx
+++ b/Lessons/07_trees_and_ensembles/Slides/trees_and_ensembles_slides.pptx
@@ -5,7 +5,7 @@
     <p:sldMasterId id="2147483648" r:id="rId1"/>
   </p:sldMasterIdLst>
   <p:notesMasterIdLst>
-    <p:notesMasterId r:id="rId60"/>
+    <p:notesMasterId r:id="rId61"/>
   </p:notesMasterIdLst>
   <p:sldIdLst>
     <p:sldId id="256" r:id="rId2"/>
@@ -66,6 +66,7 @@
     <p:sldId id="311" r:id="rId57"/>
     <p:sldId id="312" r:id="rId58"/>
     <p:sldId id="313" r:id="rId59"/>
+    <p:sldId id="314" r:id="rId60"/>
   </p:sldIdLst>
   <p:sldSz cx="9144000" cy="5143500" type="screen16x9"/>
   <p:notesSz cx="6858000" cy="9144000"/>
@@ -950,6 +951,20 @@
               <a:t>No derivation needed here - the formula is exactly the weighted comparison the previous slide described in words. Handout section 2.2 has it worked through on the loan data’s actual root split.</a:t>
             </a:r>
           </a:p>
+          <a:p>
+            <a:pPr lvl="0" indent="0" marL="0">
+              <a:buNone/>
+            </a:pPr>
+          </a:p>
+          <a:p>
+            <a:pPr lvl="0" indent="0" marL="0">
+              <a:buNone/>
+            </a:pPr>
+            <a:r>
+              <a:rPr/>
+              <a:t>A predictable slip: subtracting the weighted average from 1 instead of from the parent’s impurity - 1 - 0.330 = 0.670 instead of 0.474 - 0.330 = 0.144 at the root. It is natural, because the Gini formula three slides back starts with “1 -”. The check that catches it: a split cannot remove more impurity than the parent had, so a gain is never larger than G of the parent, and with two classes never above 0.5.</a:t>
+            </a:r>
+          </a:p>
         </p:txBody>
       </p:sp>
       <p:sp>
@@ -1277,7 +1292,7 @@
             </a:pPr>
             <a:r>
               <a:rPr/>
-              <a:t>Walk the numbers once: parent impurity 0.474, and the winning split is the debt ceiling, found by brute-force search with no hint about how the data was generated. The children’s impurities, 2p(1 - p) at their own default rates, are 0.3814 for the left child and 0.1148 for the right. Their average weighted by size is 971/1,200 × 0.3814 + 229/1,200 × 0.1148 = 0.3305, and the gain is the parent’s 0.4743 minus that, 0.1438, which rounds to 0.144. Use four decimals if you work it on the board: with the impurities rounded to the slide’s 0.381 and 0.115, the weighted average comes out at 0.3302, and someone will notice. That agreement with the known generating rule is the first piece of evidence that the algorithm is doing something sensible.</a:t>
+              <a:t>Walk the numbers once: parent impurity 0.474, and the winning split is the debt ceiling, found by brute-force search with no hint about how the data was generated. Each step starts from a count: 249 of the 971 on the left defaulted and 215 of the 229 on the right, and 249 + 215 = 464, all the defaults. The weights are each child’s share of the parent, 971/1,200 = 0.809 and 229/1,200 = 0.191. The children’s impurities, 2p(1 - p) at their own default rates, are 0.3814 for the left child and 0.1148 for the right. Their average weighted by size is 971/1,200 × 0.3814 + 229/1,200 × 0.1148 = 0.3305, and the gain is the parent’s 0.4743 minus that, 0.1438, which rounds to 0.144. Use four decimals if you work it on the board: with the impurities rounded to the slide’s 0.381 and 0.115, the weighted average comes out at 0.3302, and someone will notice. That agreement with the known generating rule is the first piece of evidence that the algorithm is doing something sensible.</a:t>
             </a:r>
           </a:p>
           <a:p>
@@ -1292,6 +1307,20 @@
             <a:r>
               <a:rPr/>
               <a:t>Ask the room why finding the debt ceiling by blind search, with no knowledge of how the data was built, is a stronger check than it might first appear - the answer is that it rules out the split being an artefact of how the search was coded, since nothing in the algorithm knows the generating rule.</a:t>
+            </a:r>
+          </a:p>
+          <a:p>
+            <a:pPr lvl="0" indent="0" marL="0">
+              <a:buNone/>
+            </a:pPr>
+          </a:p>
+          <a:p>
+            <a:pPr lvl="0" indent="0" marL="0">
+              <a:buNone/>
+            </a:pPr>
+            <a:r>
+              <a:rPr/>
+              <a:t>Two predictable slips on this slide. The first is rebuilding a count from a rounded percentage: slide 8 prints the left group as 26% default, and 0.26 × 971 = 252, not 249 - the true share is 249/971 = 25.6%. Counts come first; a share rounded to two digits loses up to half a percent of the group. The second is slide 13’s: the gain is the parent’s impurity minus the weighted average, 0.474 - 0.330, not 1 - 0.330.</a:t>
             </a:r>
           </a:p>
           <a:p>
@@ -1401,7 +1430,7 @@
             </a:pPr>
             <a:r>
               <a:rPr/>
-              <a:t>The gold square is the two children averaged by size, 0.3305, and it sits on the dotted straight line between them. Point at the bulge: the curve lies above every such line, so any split that separates the classes at all lowers the weighted impurity. The gap, 0.144, is the gain, and the tree takes whichever split makes it largest. Handout section 2.2.</a:t>
+              <a:t>The gold square is the two children averaged by size, 0.3305, and it sits on the dotted straight line between them. Someone will ask why it sits exactly under the parent, at p = 0.387. Because the children’s p, averaged with the same weights, gives the parent’s p back, and with counts it is exact: 971/1,200 × 249/971 + 229/1,200 × 215/229 = 249/1,200 + 215/1,200 = 464/1,200 = 0.387. (With the rounded 0.809 × 0.256 + 0.191 × 0.939 it comes to 0.386: rounding again.) A split moves defaulters from one group to another; it does not create or remove any. So parent and square share one horizontal position, and the vertical gap between them is the gain. Point at the bulge: the curve lies above every such line, so any split that separates the classes at all lowers the weighted impurity. The gap, 0.144, is the gain, and the tree takes whichever split makes it largest. Handout section 2.2.</a:t>
             </a:r>
           </a:p>
         </p:txBody>
@@ -1517,7 +1546,17 @@
             </a:pPr>
             <a:r>
               <a:rPr/>
-              <a:t>Then the recursion, which is the line students skip: each child calls grow on its own examples, with its own G as the parent’s and its own size as m. ΔG is never added up across nodes or compared between them. Walk slide 8’s tree through it: the root, 2,234 candidates, the best gains 0.1438; the left group of 971 runs the loop again and its best gains 0.0836; the right group of 229 runs it and its best gains 0.0026, small but above 0, so the split is made; at depth 3 every call stops on the first line.</a:t>
+              <a:t>Then the recursion, which is the line students skip: each child calls grow on its own examples, with its own G as the parent’s and its own size as m. ΔG is never added up across nodes or compared between them in this loop - slide 25’s </a:t>
+            </a:r>
+            <a:r>
+              <a:rPr>
+                <a:latin typeface="Courier"/>
+              </a:rPr>
+              <a:t>max_leaf_nodes</a:t>
+            </a:r>
+            <a:r>
+              <a:rPr/>
+              <a:t> is the exception, and compares them on purpose. Walk slide 8’s tree through it: the root, 2,234 candidates, the best gains 0.1438; the left group of 971 runs the loop again and its best gains 0.0836; the right group of 229 runs it and its best gains 0.0026, small but above 0, so the split is made; at depth 3 every call stops on the first line.</a:t>
             </a:r>
           </a:p>
           <a:p>
@@ -1532,6 +1571,34 @@
             <a:r>
               <a:rPr/>
               <a:t>Handout section 2.1.</a:t>
+            </a:r>
+          </a:p>
+          <a:p>
+            <a:pPr lvl="0" indent="0" marL="0">
+              <a:buNone/>
+            </a:pPr>
+          </a:p>
+          <a:p>
+            <a:pPr lvl="0" indent="0" marL="0">
+              <a:buNone/>
+            </a:pPr>
+            <a:r>
+              <a:rPr/>
+              <a:t>What the two return, because the code hides it. leaf(g) is a new object that keeps one thing, the majority class of g, as its prediction; it does not keep the examples. node(best, grow(L), grow(R)) is a question node holding three things: the question, and the two subtrees. Python evaluates the arguments first, so grow(L) and grow(R) run all the way down before the node that holds them is built: the tree is assembled from the leaves upward, depth first. At the root that is node((debt, 0.82), grow(the 971), grow(the 229)). And max with key=gain.get returns the candidate whose gain is largest, not the gain; gain[best] is the gain. Two predictable slips follow from reading too fast: “the function returns g” (it returns a leaf built from g), and “max gives the best gain” (it gives the best candidate).</a:t>
+            </a:r>
+          </a:p>
+          <a:p>
+            <a:pPr lvl="0" indent="0" marL="0">
+              <a:buNone/>
+            </a:pPr>
+          </a:p>
+          <a:p>
+            <a:pPr lvl="0" indent="0" marL="0">
+              <a:buNone/>
+            </a:pPr>
+            <a:r>
+              <a:rPr/>
+              <a:t>Training builds the tree; inference walks it. To predict for a new applicant, start at the root: at a question node go left if the applicant’s value is at or below the threshold, right otherwise, until a leaf, and return its class - notebook 1’s predict_one. The costs are lopsided: training scores every candidate at every node; a prediction is at most max_depth comparisons, 8 for the best tree here, however large the training set. Lesson 6’s k-nearest neighbours is the opposite: nothing to train, and every prediction compares the new point with all the training points.</a:t>
             </a:r>
           </a:p>
         </p:txBody>
@@ -1776,6 +1843,20 @@
               <a:t>Handout sections 2.2 and 3.</a:t>
             </a:r>
           </a:p>
+          <a:p>
+            <a:pPr lvl="0" indent="0" marL="0">
+              <a:buNone/>
+            </a:pPr>
+          </a:p>
+          <a:p>
+            <a:pPr lvl="0" indent="0" marL="0">
+              <a:buNone/>
+            </a:pPr>
+            <a:r>
+              <a:rPr/>
+              <a:t>Greedy is short-sighted, not blind. Each edge of an island pays a little on its own, so with enough depth the tree finds the islands one edge at a time: slide 8’s third step already cuts the 884 at debt 0.404, next to island A’s lower edge at 0.40, and by depth 8 both islands are drawn (slide 24). Greedy fails outright only where a single cut pays nothing at all - a chessboard, or the exclusive-or (XOR) of two features, where every first cut leaves both sides exactly as mixed as before.</a:t>
+            </a:r>
+          </a:p>
         </p:txBody>
       </p:sp>
       <p:sp>
@@ -1982,6 +2063,20 @@
               <a:t>Handout section 3.</a:t>
             </a:r>
           </a:p>
+          <a:p>
+            <a:pPr lvl="0" indent="0" marL="0">
+              <a:buNone/>
+            </a:pPr>
+          </a:p>
+          <a:p>
+            <a:pPr lvl="0" indent="0" marL="0">
+              <a:buNone/>
+            </a:pPr>
+            <a:r>
+              <a:rPr/>
+              <a:t>Two intuitions that land, both from notebook 1’s depth table. Who votes in a leaf: a leaf predicts the majority of its applicants. At depth 2 there are 4 leaves with a median of 123.5 applicants each, a vote of a hundred; the unconstrained tree has 156 leaves with a median of 2, and 72 of them hold a single applicant - a prediction made from one person’s label, lesson 6’s k = 1. And the line at 0.929: the true rule itself scores 1,115/1,200 = 0.929 on these labels, because 85 were flipped. A training accuracy above that line means the tree agrees with the labels better than the truth does, so it must be reproducing flipped labels: depth 8 is just past it at 0.951, the unconstrained tree has learned all 85. The gold dashed line on slide 23 is that line. If an image helps: a checklist of three questions written from last year’s customers works on this year’s; fifty questions, each written about one past customer, do not.</a:t>
+            </a:r>
+          </a:p>
         </p:txBody>
       </p:sp>
       <p:sp>
@@ -2100,6 +2195,20 @@
               <a:t> of cross-validated accuracy relative to the depth-8 peak, for a training score nobody should have trusted in the first place. Handout section 3.</a:t>
             </a:r>
           </a:p>
+          <a:p>
+            <a:pPr lvl="0" indent="0" marL="0">
+              <a:buNone/>
+            </a:pPr>
+          </a:p>
+          <a:p>
+            <a:pPr lvl="0" indent="0" marL="0">
+              <a:buNone/>
+            </a:pPr>
+            <a:r>
+              <a:rPr/>
+              <a:t>What “cross-validated” and “±” mean here, since the table leans on lesson 5. Five-fold stratified cross-validation: the 1,200 are cut into five folds of 240, each with the same default share; five times, the tree trains on 960 and is scored on the 240 it did not see. At depth 8 the five scores are 210, 211, 215, 214 and 209 correct out of 240: 0.875, 0.879, 0.896, 0.892, 0.871. The table shows their mean, (0.875 + 0.879 + 0.896 + 0.892 + 0.871) / 5 = 0.882, and after ± their standard deviation, 0.010 - how much the score moves from one fold to another. It is not a confidence interval.</a:t>
+            </a:r>
+          </a:p>
         </p:txBody>
       </p:sp>
       <p:sp>
@@ -2224,6 +2333,20 @@
               <a:t>This is not the first time this course has shown a curve bend this way: lesson 3’s test error turned back up as the polynomial degree grew, and lesson 6’s k-nearest neighbours did the same as k shrank towards 1. Handout section 3.</a:t>
             </a:r>
           </a:p>
+          <a:p>
+            <a:pPr lvl="0" indent="0" marL="0">
+              <a:buNone/>
+            </a:pPr>
+          </a:p>
+          <a:p>
+            <a:pPr lvl="0" indent="0" marL="0">
+              <a:buNone/>
+            </a:pPr>
+            <a:r>
+              <a:rPr/>
+              <a:t>Why the blue curve may cross the gold line and the rust one may not. The ceiling is the best a model can expect on new applicants, whose flipped labels it cannot know. On its own training data it can do better, by memorising them: the crossing, just before depth 8, is where memorising starts, and at 1.000 all 85 flipped labels are learned. A predictable slip: “a score above the noise ceiling means a bug”. True for new data, false for training data. Two reading details: the shaded band is ± one standard deviation across the five folds, and the plot has eleven depths where the table had seven; “20” on the axis stands for the unconstrained tree, whose real depth is 24.</a:t>
+            </a:r>
+          </a:p>
         </p:txBody>
       </p:sp>
       <p:sp>
@@ -2303,7 +2426,7 @@
             </a:pPr>
             <a:r>
               <a:rPr/>
-              <a:t>Left to right: at depth 2 every applicant answers at most two questions. The tree asks three in all - it is exactly the tree of step 2 on slide 8 - but the third, on the right, splits 229 high-debt applicants into two groups that are both predicted “default”, so it changes no prediction and draws no line. What the boundary shows is the income floor and the debt ceiling - the two biggest, easiest-to-find regions - and neither interior island is visible at all. At depth 8 both islands appear as clean rectangles, close to the rule that generated the data. At full depth the boundary has grown a fringe of tiny rectangles chasing individual flipped labels.</a:t>
+              <a:t>Left to right: at depth 2 every applicant answers at most two questions. The tree asks three in all - it is exactly the tree of step 2 on slide 8 - but the third, on the right, splits 229 high-debt applicants into two groups that are both predicted “default”, so it changes no prediction and draws no line. What the boundary shows is the income floor and the debt ceiling - the two biggest, easiest-to-find regions - and neither interior island is visible at all. At depth 8 both islands appear, close to the rectangles of the rule that generated the data though not exact, and a few thin slivers have already started - its training accuracy, 0.951, is past the 0.929 line. At full depth the boundary has grown a fringe of tiny rectangles chasing individual flipped labels, in both colours: rust ones in healthy territory and teal ones inside the risky strips, where a flipped “repaid” label sits - slide 8’s applicant at income 23.22 and debt 0.9475 is one, in the top-left corner.</a:t>
             </a:r>
           </a:p>
           <a:p>
@@ -2413,7 +2536,7 @@
             </a:pPr>
             <a:r>
               <a:rPr/>
-              <a:t>This is the readability half of the story. The two knobs limit different things. A depth cap limits how long any one path can be, and inside that cap every node that can be split is split - slide 24’s depth-2 tree spent one of its three questions on a split that changed no prediction. A leaf budget limits how many leaves the whole tree may have, and spends them one at a time on whichever leaf gains most. For a tree meant to be read rather than merely scored, the budget is the better knob: a small number of splits goes to the ones that matter most.</a:t>
+              <a:t>This is the readability half of the story. The two knobs limit different things. A depth cap limits how long any one path can be, and inside that cap every node that can be split is split - slide 24’s depth-2 tree spent one of its three questions on a split that changed no prediction. A leaf budget limits how many leaves the whole tree may have, and spends them one at a time on whichever leaf gains most - compared across all the current leaves, each leaf’s gain weighted by its share of all the applicants. It is the one place where gains at different nodes are compared, which slide 18’s loop never does. For a tree meant to be read rather than merely scored, the budget is the better knob: a small number of splits goes to the ones that matter most.</a:t>
             </a:r>
           </a:p>
           <a:p>
@@ -2442,6 +2565,20 @@
             <a:r>
               <a:rPr/>
               <a:t>Handout section 4.</a:t>
+            </a:r>
+          </a:p>
+          <a:p>
+            <a:pPr lvl="0" indent="0" marL="0">
+              <a:buNone/>
+            </a:pPr>
+          </a:p>
+          <a:p>
+            <a:pPr lvl="0" indent="0" marL="0">
+              <a:buNone/>
+            </a:pPr>
+            <a:r>
+              <a:rPr/>
+              <a:t>The cross-validated 0.901 is the surprise to dwell on: nine leaves spent where they gain most beat 71 spent evenly by the depth-8 tree (0.882), and come within a point of bagging on slide 54. It is this dataset: its rule is made of axis-aligned rectangles, exactly the shape a few well-placed thresholds draw. The 9 was chosen for readability, not by trying budgets on the folds, so it is not tuned to them.</a:t>
             </a:r>
           </a:p>
         </p:txBody>
@@ -2537,7 +2674,7 @@
             </a:pPr>
             <a:r>
               <a:rPr/>
-              <a:t>Ask the room what 11.7% disagreement between two trees fit to overlapping samples of the same applicants implies about trusting any single tree’s exact boundary. The answer is the whole of the next segment: a single tree’s instability looks like a flaw, and it is about to become a strength.</a:t>
+              <a:t>“Without replacement” means each of the 780 is a different applicant, like cards dealt without putting them back; the two samples share 499. With replacement, a card goes back and can come out twice - that is the bootstrap, two slides after the break. Ask the room what 140 opposite verdicts between two trees fit to overlapping samples of the same applicants implies about trusting any single tree’s exact boundary. The answer is the whole of the next segment: a single tree’s instability looks like a flaw, and it is about to become a strength.</a:t>
             </a:r>
           </a:p>
           <a:p>
@@ -2633,49 +2770,35 @@
             </a:pPr>
             <a:r>
               <a:rPr/>
-              <a:t>The table is the notebook’s map: each section, the calls it makes, the slides that introduced the idea, and the number to come back with. Decision trees from scratch, checked against scikit-learn; depth swept, the boundaries drawn, and the instability measured.</a:t>
-            </a:r>
-          </a:p>
-          <a:p>
-            <a:pPr lvl="0" indent="0" marL="0">
-              <a:buNone/>
-            </a:pPr>
-          </a:p>
-          <a:p>
-            <a:pPr lvl="0" indent="0" marL="0">
-              <a:buNone/>
-            </a:pPr>
-            <a:r>
-              <a:rPr/>
-              <a:t>Run Notebooks/01_decision_trees_from_scratch.ipynb. Twenty minutes.</a:t>
-            </a:r>
-          </a:p>
-          <a:p>
-            <a:pPr lvl="0" indent="0" marL="0">
-              <a:buNone/>
-            </a:pPr>
-          </a:p>
-          <a:p>
-            <a:pPr lvl="0" indent="0" marL="0">
-              <a:buNone/>
-            </a:pPr>
-            <a:r>
-              <a:rPr/>
-              <a:t>Have them watch the from-scratch implementation confirm the debt-ceiling root split before scikit-learn’s version ever runs - the point is that the agreement is not assumed, it is checked, at every depth.</a:t>
-            </a:r>
-          </a:p>
-          <a:p>
-            <a:pPr lvl="0" indent="0" marL="0">
-              <a:buNone/>
-            </a:pPr>
-          </a:p>
-          <a:p>
-            <a:pPr lvl="0" indent="0" marL="0">
-              <a:buNone/>
-            </a:pPr>
-            <a:r>
-              <a:rPr/>
-              <a:t>The cell worth protecting if time is short is the two-tree resampling comparison at the end: the notebook prints an agreement of 0.883, which is the 11.7% disagreement of the previous slide, and seeing it appear on their own screen lands harder than reading it off a slide.</a:t>
+              <a:t>The previous slide’s two trees, drawn. Left and middle: their boundaries, from two random samples of 780 drawn from the same 1,200 applicants. The strips agree: both find the income floor and the debt ceiling. The interior does not: tree A draws one long band across both islands, tree B finds island A and misses island B. Right: the 140 applicants they give opposite verdicts to, in gold.</a:t>
+            </a:r>
+          </a:p>
+          <a:p>
+            <a:pPr lvl="0" indent="0" marL="0">
+              <a:buNone/>
+            </a:pPr>
+          </a:p>
+          <a:p>
+            <a:pPr lvl="0" indent="0" marL="0">
+              <a:buNone/>
+            </a:pPr>
+            <a:r>
+              <a:rPr/>
+              <a:t>Let the room notice where the gold points sit before saying it: almost all of them around the two islands, where each split was decided by a few dozen applicants. That is a tree’s variance, made visible - and the gold points are exactly what averaging many trees will settle by vote, after the break.</a:t>
+            </a:r>
+          </a:p>
+          <a:p>
+            <a:pPr lvl="0" indent="0" marL="0">
+              <a:buNone/>
+            </a:pPr>
+          </a:p>
+          <a:p>
+            <a:pPr lvl="0" indent="0" marL="0">
+              <a:buNone/>
+            </a:pPr>
+            <a:r>
+              <a:rPr/>
+              <a:t>Notebook 1, section 4. Handout section 4.</a:t>
             </a:r>
           </a:p>
         </p:txBody>
@@ -2757,7 +2880,49 @@
             </a:pPr>
             <a:r>
               <a:rPr/>
-              <a:t>Twelve minutes. The next segment is where the lesson’s real content starts - one tree’s instability, turned into an ensemble’s strength - so they need to come back with that framing fresh.</a:t>
+              <a:t>The table is the notebook’s map: each section, the calls it makes, the slides that introduced the idea, and the number to come back with. Decision trees from scratch, checked against scikit-learn; depth swept, the boundaries drawn, and the instability measured.</a:t>
+            </a:r>
+          </a:p>
+          <a:p>
+            <a:pPr lvl="0" indent="0" marL="0">
+              <a:buNone/>
+            </a:pPr>
+          </a:p>
+          <a:p>
+            <a:pPr lvl="0" indent="0" marL="0">
+              <a:buNone/>
+            </a:pPr>
+            <a:r>
+              <a:rPr/>
+              <a:t>Run Notebooks/01_decision_trees_from_scratch.ipynb. Twenty minutes.</a:t>
+            </a:r>
+          </a:p>
+          <a:p>
+            <a:pPr lvl="0" indent="0" marL="0">
+              <a:buNone/>
+            </a:pPr>
+          </a:p>
+          <a:p>
+            <a:pPr lvl="0" indent="0" marL="0">
+              <a:buNone/>
+            </a:pPr>
+            <a:r>
+              <a:rPr/>
+              <a:t>Have them watch the from-scratch implementation confirm the debt-ceiling root split before scikit-learn’s version ever runs - the point is that the agreement is not assumed, it is checked, at every depth.</a:t>
+            </a:r>
+          </a:p>
+          <a:p>
+            <a:pPr lvl="0" indent="0" marL="0">
+              <a:buNone/>
+            </a:pPr>
+          </a:p>
+          <a:p>
+            <a:pPr lvl="0" indent="0" marL="0">
+              <a:buNone/>
+            </a:pPr>
+            <a:r>
+              <a:rPr/>
+              <a:t>The cell worth protecting if time is short is the two-tree resampling comparison at the end: the notebook prints an agreement of 0.883 and 140 opposite verdicts, the numbers of slides 26 and 27, and draws slide 27’s figure; seeing it appear on their own screen lands harder than reading it off a slide.</a:t>
             </a:r>
           </a:p>
         </p:txBody>
@@ -2839,73 +3004,7 @@
             </a:pPr>
             <a:r>
               <a:rPr/>
-              <a:t>State the logic before the name. Two slides before the break measured that two trees fit to overlapping samples disagree on more than a tenth of predictions. If those disagreements are close to random, averaging many such trees should cancel some of them out - that is the entire idea behind bagging, bootstrap aggregating.</a:t>
-            </a:r>
-          </a:p>
-          <a:p>
-            <a:pPr lvl="0" indent="0" marL="0">
-              <a:buNone/>
-            </a:pPr>
-          </a:p>
-          <a:p>
-            <a:pPr lvl="0" indent="0" marL="0">
-              <a:buNone/>
-            </a:pPr>
-            <a:r>
-              <a:rPr/>
-              <a:t>Say that the tree algorithm itself is unchanged: bagging reuses the first hour’s tree as it is, and only what surrounds it is new.</a:t>
-            </a:r>
-          </a:p>
-          <a:p>
-            <a:pPr lvl="0" indent="0" marL="0">
-              <a:buNone/>
-            </a:pPr>
-          </a:p>
-          <a:p>
-            <a:pPr lvl="0" indent="0" marL="0">
-              <a:buNone/>
-            </a:pPr>
-            <a:r>
-              <a:rPr/>
-              <a:t>Be precise about “with replacement”: some rows appear more than once in a given sample, some not at all. That leftover fraction is not wasted - it becomes free validation data, on slide 32.</a:t>
-            </a:r>
-          </a:p>
-          <a:p>
-            <a:pPr lvl="0" indent="0" marL="0">
-              <a:buNone/>
-            </a:pPr>
-          </a:p>
-          <a:p>
-            <a:pPr lvl="0" indent="0" marL="0">
-              <a:buNone/>
-            </a:pPr>
-            <a:r>
-              <a:rPr/>
-              <a:t>One detail of the In code line, if asked: scikit-learn’s </a:t>
-            </a:r>
-            <a:r>
-              <a:rPr>
-                <a:latin typeface="Courier"/>
-              </a:rPr>
-              <a:t>BaggingClassifier</a:t>
-            </a:r>
-            <a:r>
-              <a:rPr/>
-              <a:t> does not count votes, it averages the trees’ predicted probabilities. With fully grown trees the two are the same thing: every leaf is pure, so each tree’s probability is 0 or 1, and averaging 0s and 1s is counting votes. So notebook 2’s own majority-vote version and scikit-learn’s apply the same rule. They do not use the same trees - each draws its own bootstrap samples - and still they make the same prediction for all 360 test applicants, 0.872 both: with 100 trees, the luck of any one sample is outvoted.</a:t>
-            </a:r>
-          </a:p>
-          <a:p>
-            <a:pPr lvl="0" indent="0" marL="0">
-              <a:buNone/>
-            </a:pPr>
-          </a:p>
-          <a:p>
-            <a:pPr lvl="0" indent="0" marL="0">
-              <a:buNone/>
-            </a:pPr>
-            <a:r>
-              <a:rPr/>
-              <a:t>Handout section 5.</a:t>
+              <a:t>Twelve minutes. The next segment is where the lesson’s real content starts - one tree’s instability, turned into an ensemble’s strength - so they need to come back with that framing fresh.</a:t>
             </a:r>
           </a:p>
         </p:txBody>
@@ -2987,49 +3086,87 @@
             </a:pPr>
             <a:r>
               <a:rPr/>
-              <a:t>Give the one line of reasoning, not the limit. Each draw misses a given row with probability 1 - 1/m, and the m draws are independent, so the row is missed by all of them with probability (1 - 1/m) to the power m. At m = 1,200 that is 0.3677; as m grows it tends to 1/e, 0.368, which is the standard exponential limit worked out in handout section 5.1. What matters here is the consequence: every bootstrap tree automatically leaves out over a third of the rows, and never sees them.</a:t>
-            </a:r>
-          </a:p>
-          <a:p>
-            <a:pPr lvl="0" indent="0" marL="0">
-              <a:buNone/>
-            </a:pPr>
-          </a:p>
-          <a:p>
-            <a:pPr lvl="0" indent="0" marL="0">
-              <a:buNone/>
-            </a:pPr>
-            <a:r>
-              <a:rPr/>
-              <a:t>A predictable slip: “so each tree is trained on 63.2% of the data, 759 rows”. It is reasonable, because 63.2% is the number on the slide. But the sample still has 1,200 draws: about 759 different rows, and the other 441 draws are repeats of rows already drawn. The tree sees 1,200 rows, some of them twice or three times - the next slide counts them.</a:t>
-            </a:r>
-          </a:p>
-          <a:p>
-            <a:pPr lvl="0" indent="0" marL="0">
-              <a:buNone/>
-            </a:pPr>
-          </a:p>
-          <a:p>
-            <a:pPr lvl="0" indent="0" marL="0">
-              <a:buNone/>
-            </a:pPr>
-            <a:r>
-              <a:rPr/>
-              <a:t>Ask the room what that leftover third is good for. The answer is slide 32, after the counts: it is validation data for exactly the trees that never saw it.</a:t>
-            </a:r>
-          </a:p>
-          <a:p>
-            <a:pPr lvl="0" indent="0" marL="0">
-              <a:buNone/>
-            </a:pPr>
-          </a:p>
-          <a:p>
-            <a:pPr lvl="0" indent="0" marL="0">
-              <a:buNone/>
-            </a:pPr>
-            <a:r>
-              <a:rPr/>
-              <a:t>Handout section 5.1.</a:t>
+              <a:t>State the logic before the name. Slides 26 and 27, before the break, measured that two trees fit to overlapping samples give opposite verdicts on 140 of the 1,200 applicants. If those disagreements are close to random, averaging many such trees should cancel some of them out - that is the entire idea behind bagging, bootstrap aggregating.</a:t>
+            </a:r>
+          </a:p>
+          <a:p>
+            <a:pPr lvl="0" indent="0" marL="0">
+              <a:buNone/>
+            </a:pPr>
+          </a:p>
+          <a:p>
+            <a:pPr lvl="0" indent="0" marL="0">
+              <a:buNone/>
+            </a:pPr>
+            <a:r>
+              <a:rPr/>
+              <a:t>Say that the tree algorithm itself is unchanged: bagging reuses the first hour’s tree as it is, and only what surrounds it is new.</a:t>
+            </a:r>
+          </a:p>
+          <a:p>
+            <a:pPr lvl="0" indent="0" marL="0">
+              <a:buNone/>
+            </a:pPr>
+          </a:p>
+          <a:p>
+            <a:pPr lvl="0" indent="0" marL="0">
+              <a:buNone/>
+            </a:pPr>
+            <a:r>
+              <a:rPr/>
+              <a:t>Be precise about “with replacement”: some rows appear more than once in a given sample, some not at all. That leftover fraction is not wasted - it becomes free validation data, on slide 33.</a:t>
+            </a:r>
+          </a:p>
+          <a:p>
+            <a:pPr lvl="0" indent="0" marL="0">
+              <a:buNone/>
+            </a:pPr>
+          </a:p>
+          <a:p>
+            <a:pPr lvl="0" indent="0" marL="0">
+              <a:buNone/>
+            </a:pPr>
+            <a:r>
+              <a:rPr/>
+              <a:t>One detail of the In code line, if asked: scikit-learn’s </a:t>
+            </a:r>
+            <a:r>
+              <a:rPr>
+                <a:latin typeface="Courier"/>
+              </a:rPr>
+              <a:t>BaggingClassifier</a:t>
+            </a:r>
+            <a:r>
+              <a:rPr/>
+              <a:t> does not count votes, it averages the trees’ predicted probabilities. With fully grown trees the two are the same thing: every leaf is pure, so each tree’s probability is 0 or 1, and averaging 0s and 1s is counting votes. So notebook 2’s own majority-vote version and scikit-learn’s apply the same rule. They do not use the same trees - each draws its own bootstrap samples - and still they make the same prediction for all 360 test applicants, 0.872 both: with 100 trees, the luck of any one sample is outvoted.</a:t>
+            </a:r>
+          </a:p>
+          <a:p>
+            <a:pPr lvl="0" indent="0" marL="0">
+              <a:buNone/>
+            </a:pPr>
+          </a:p>
+          <a:p>
+            <a:pPr lvl="0" indent="0" marL="0">
+              <a:buNone/>
+            </a:pPr>
+            <a:r>
+              <a:rPr/>
+              <a:t>Handout section 5.</a:t>
+            </a:r>
+          </a:p>
+          <a:p>
+            <a:pPr lvl="0" indent="0" marL="0">
+              <a:buNone/>
+            </a:pPr>
+          </a:p>
+          <a:p>
+            <a:pPr lvl="0" indent="0" marL="0">
+              <a:buNone/>
+            </a:pPr>
+            <a:r>
+              <a:rPr/>
+              <a:t>History, in one line: bagging is Leo Breiman’s, published in 1996 under the title “Bagging predictors” - the same Breiman who co-wrote the CART trees of 1984 and, five years later, the random forest.</a:t>
             </a:r>
           </a:p>
         </p:txBody>
@@ -3235,35 +3372,49 @@
             </a:pPr>
             <a:r>
               <a:rPr/>
-              <a:t>How often each of the 1,200 loans turns up in one bootstrap sample, blue, against the limit e^-1 / k!, gold. The first bar is the out-of-bag share: 0.366 here, 0.368 in the limit. The rest are rows drawn once, twice, three times.</a:t>
-            </a:r>
-          </a:p>
-          <a:p>
-            <a:pPr lvl="0" indent="0" marL="0">
-              <a:buNone/>
-            </a:pPr>
-          </a:p>
-          <a:p>
-            <a:pPr lvl="0" indent="0" marL="0">
-              <a:buNone/>
-            </a:pPr>
-            <a:r>
-              <a:rPr/>
-              <a:t>Where the gold bars come from, if asked: the number of times one row is drawn counts successes in 1,200 draws, each with probability 1/1,200. As the number of draws grows with the chance kept at one per row, that count follows the Poisson distribution with mean 1, which gives a fraction e^-1 / k! of rows drawn exactly k times: 0.368 never, 0.368 once, 0.184 twice, 0.061 three times.</a:t>
-            </a:r>
-          </a:p>
-          <a:p>
-            <a:pPr lvl="0" indent="0" marL="0">
-              <a:buNone/>
-            </a:pPr>
-          </a:p>
-          <a:p>
-            <a:pPr lvl="0" indent="0" marL="0">
-              <a:buNone/>
-            </a:pPr>
-            <a:r>
-              <a:rPr/>
-              <a:t>The point to make: about one row in four appears two or more times. Every tree sees a different mix of repeats and absences, and that is where their disagreement - the raw material of bagging - comes from. Handout section 5.1.</a:t>
+              <a:t>Give the one line of reasoning, not the limit. Each draw misses a given row with probability 1 - 1/m, and the m draws are independent, so the row is missed by all of them with probability (1 - 1/m) to the power m. At m = 1,200 that is 0.3677; as m grows it tends to 1/e, 0.368, which is the standard exponential limit worked out in handout section 5.1. What matters here is the consequence: every bootstrap tree automatically leaves out over a third of the rows, and never sees them.</a:t>
+            </a:r>
+          </a:p>
+          <a:p>
+            <a:pPr lvl="0" indent="0" marL="0">
+              <a:buNone/>
+            </a:pPr>
+          </a:p>
+          <a:p>
+            <a:pPr lvl="0" indent="0" marL="0">
+              <a:buNone/>
+            </a:pPr>
+            <a:r>
+              <a:rPr/>
+              <a:t>A predictable slip: “so each tree is trained on 63.2% of the data, 759 rows”. It is reasonable, because 63.2% is the number on the slide. But the sample still has 1,200 draws: about 759 different rows, and the other 441 draws are repeats of rows already drawn. The tree sees 1,200 rows, some of them twice or three times - the next slide counts them.</a:t>
+            </a:r>
+          </a:p>
+          <a:p>
+            <a:pPr lvl="0" indent="0" marL="0">
+              <a:buNone/>
+            </a:pPr>
+          </a:p>
+          <a:p>
+            <a:pPr lvl="0" indent="0" marL="0">
+              <a:buNone/>
+            </a:pPr>
+            <a:r>
+              <a:rPr/>
+              <a:t>Ask the room what that leftover third is good for. The answer is slide 33, after the counts: it is validation data for exactly the trees that never saw it.</a:t>
+            </a:r>
+          </a:p>
+          <a:p>
+            <a:pPr lvl="0" indent="0" marL="0">
+              <a:buNone/>
+            </a:pPr>
+          </a:p>
+          <a:p>
+            <a:pPr lvl="0" indent="0" marL="0">
+              <a:buNone/>
+            </a:pPr>
+            <a:r>
+              <a:rPr/>
+              <a:t>Handout section 5.1.</a:t>
             </a:r>
           </a:p>
         </p:txBody>
@@ -3345,81 +3496,35 @@
             </a:pPr>
             <a:r>
               <a:rPr/>
-              <a:t>The forest here comes four slides before its definition: a random forest is bagging with one extra rule, which slide 36 gives, and scikit-learn computes the OOB score for it with </a:t>
-            </a:r>
-            <a:r>
-              <a:rPr>
-                <a:latin typeface="Courier"/>
-              </a:rPr>
-              <a:t>oob_score=True</a:t>
-            </a:r>
-            <a:r>
-              <a:rPr/>
-              <a:t>. For this slide, read it as “300 bagged trees”.</a:t>
-            </a:r>
-          </a:p>
-          <a:p>
-            <a:pPr lvl="0" indent="0" marL="0">
-              <a:buNone/>
-            </a:pPr>
-          </a:p>
-          <a:p>
-            <a:pPr lvl="0" indent="0" marL="0">
-              <a:buNone/>
-            </a:pPr>
-            <a:r>
-              <a:rPr/>
-              <a:t>The agreement is the point, but be careful how you sell it. On this seed the two numbers match to four decimal places, and that is luck: over twelve seeds the typical gap is 0.0026 and the worst is 0.0075. What is not luck is that they track each other well inside cross-validation’s own ±0.021 spread, because the OOB score works like cross-validation: every row is scored only by models that never saw it. The bookkeeping differs. In 5-fold cross-validation each fold is scored by a whole forest trained without that fold. Out-of-bag, each row is scored by the trees whose bootstrap sample missed it - about a third of the forest, and a different third for each row. There is no single out-of-bag set.</a:t>
-            </a:r>
-          </a:p>
-          <a:p>
-            <a:pPr lvl="0" indent="0" marL="0">
-              <a:buNone/>
-            </a:pPr>
-          </a:p>
-          <a:p>
-            <a:pPr lvl="0" indent="0" marL="0">
-              <a:buNone/>
-            </a:pPr>
-            <a:r>
-              <a:rPr/>
-              <a:t>Worth pausing on, because it is a habit rather than a fact: </a:t>
-            </a:r>
-            <a:r>
-              <a:rPr b="1"/>
-              <a:t>a single coincidence is not evidence of a law.</a:t>
-            </a:r>
-            <a:r>
-              <a:rPr/>
-              <a:t> If you catch yourself saying “exactly”, run it again with another seed. They will need that reflex in their own exercises, and it is cheaper to learn it here.</a:t>
-            </a:r>
-          </a:p>
-          <a:p>
-            <a:pPr lvl="0" indent="0" marL="0">
-              <a:buNone/>
-            </a:pPr>
-          </a:p>
-          <a:p>
-            <a:pPr lvl="0" indent="0" marL="0">
-              <a:buNone/>
-            </a:pPr>
-            <a:r>
-              <a:rPr/>
-              <a:t>Then make the practical consequence explicit: with a bagged ensemble you get a trustworthy estimate of generalisation for free, without setting aside a separate validation set at all - just not one to read to the fourth decimal.</a:t>
-            </a:r>
-          </a:p>
-          <a:p>
-            <a:pPr lvl="0" indent="0" marL="0">
-              <a:buNone/>
-            </a:pPr>
-          </a:p>
-          <a:p>
-            <a:pPr lvl="0" indent="0" marL="0">
-              <a:buNone/>
-            </a:pPr>
-            <a:r>
-              <a:rPr/>
-              <a:t>Handout section 5.1.</a:t>
+              <a:t>How often each of the 1,200 loans turns up in one bootstrap sample, blue, against the limit e^-1 / k!, gold. The first bar is the out-of-bag share: 0.366 here, 0.368 in the limit. The rest are rows drawn once, twice, three times.</a:t>
+            </a:r>
+          </a:p>
+          <a:p>
+            <a:pPr lvl="0" indent="0" marL="0">
+              <a:buNone/>
+            </a:pPr>
+          </a:p>
+          <a:p>
+            <a:pPr lvl="0" indent="0" marL="0">
+              <a:buNone/>
+            </a:pPr>
+            <a:r>
+              <a:rPr/>
+              <a:t>Where the gold bars come from, if asked: the number of times one row is drawn counts successes in 1,200 draws, each with probability 1/1,200. As the number of draws grows with the chance kept at one per row, that count follows the Poisson distribution with mean 1, which gives a fraction e^-1 / k! of rows drawn exactly k times: 0.368 never, 0.368 once, 0.184 twice, 0.061 three times.</a:t>
+            </a:r>
+          </a:p>
+          <a:p>
+            <a:pPr lvl="0" indent="0" marL="0">
+              <a:buNone/>
+            </a:pPr>
+          </a:p>
+          <a:p>
+            <a:pPr lvl="0" indent="0" marL="0">
+              <a:buNone/>
+            </a:pPr>
+            <a:r>
+              <a:rPr/>
+              <a:t>The point to make: about one row in four appears two or more times. Every tree sees a different mix of repeats and absences, and that is where their disagreement - the raw material of bagging - comes from. Handout section 5.1.</a:t>
             </a:r>
           </a:p>
         </p:txBody>
@@ -3501,35 +3606,81 @@
             </a:pPr>
             <a:r>
               <a:rPr/>
-              <a:t>State the headline, not the algebra - the covariance expansion behind this is in handout section 5.2, and it does not belong on a slide. Read the formula on the slide in two pieces: the first term, sigma squared over B, shrinks as trees are added; the second, (B - 1)/B times rho sigma squared, grows towards rho sigma squared and stays there. The two consequences are what matter: there is a floor variance cannot fall below, set by how correlated the trees are with each other, and averaging is a variance tool only, powerless against a systematic mistake shared by every tree.</a:t>
-            </a:r>
-          </a:p>
-          <a:p>
-            <a:pPr lvl="0" indent="0" marL="0">
-              <a:buNone/>
-            </a:pPr>
-          </a:p>
-          <a:p>
-            <a:pPr lvl="0" indent="0" marL="0">
-              <a:buNone/>
-            </a:pPr>
-            <a:r>
-              <a:rPr/>
-              <a:t>That second point is worth a beat: bagging does nothing for a tree that is too shallow to represent the rule in the first place. It cleans up noise, it does not add capability. The bullet is worded with care on purpose. For an average of numbers, averaging leaves the bias exactly where it was. A vote between classifiers is not an average of numbers, and it can change which side of the boundary a point falls on - which is why, two slides on, bagging raises the mean accuracy and not only narrows the spread. What no amount of voting can do is fix a mistake that every tree makes.</a:t>
-            </a:r>
-          </a:p>
-          <a:p>
-            <a:pPr lvl="0" indent="0" marL="0">
-              <a:buNone/>
-            </a:pPr>
-          </a:p>
-          <a:p>
-            <a:pPr lvl="0" indent="0" marL="0">
-              <a:buNone/>
-            </a:pPr>
-            <a:r>
-              <a:rPr/>
-              <a:t>Handout section 5.2.</a:t>
+              <a:t>The forest here comes four slides before its definition: a random forest is bagging with one extra rule, which slide 37 gives, and scikit-learn computes the OOB score for it with </a:t>
+            </a:r>
+            <a:r>
+              <a:rPr>
+                <a:latin typeface="Courier"/>
+              </a:rPr>
+              <a:t>oob_score=True</a:t>
+            </a:r>
+            <a:r>
+              <a:rPr/>
+              <a:t>. For this slide, read it as “300 bagged trees”.</a:t>
+            </a:r>
+          </a:p>
+          <a:p>
+            <a:pPr lvl="0" indent="0" marL="0">
+              <a:buNone/>
+            </a:pPr>
+          </a:p>
+          <a:p>
+            <a:pPr lvl="0" indent="0" marL="0">
+              <a:buNone/>
+            </a:pPr>
+            <a:r>
+              <a:rPr/>
+              <a:t>The agreement is the point, but be careful how you sell it. On this seed the two numbers match to four decimal places, and that is luck: over twelve seeds the typical gap is 0.0026 and the worst is 0.0075. What is not luck is that they track each other well inside cross-validation’s own ±0.021 spread, because the OOB score works like cross-validation: every row is scored only by models that never saw it. The bookkeeping differs. In 5-fold cross-validation each fold is scored by a whole forest trained without that fold. Out-of-bag, each row is scored by the trees whose bootstrap sample missed it - about a third of the forest, and a different third for each row. There is no single out-of-bag set.</a:t>
+            </a:r>
+          </a:p>
+          <a:p>
+            <a:pPr lvl="0" indent="0" marL="0">
+              <a:buNone/>
+            </a:pPr>
+          </a:p>
+          <a:p>
+            <a:pPr lvl="0" indent="0" marL="0">
+              <a:buNone/>
+            </a:pPr>
+            <a:r>
+              <a:rPr/>
+              <a:t>Worth pausing on, because it is a habit rather than a fact: </a:t>
+            </a:r>
+            <a:r>
+              <a:rPr b="1"/>
+              <a:t>a single coincidence is not evidence of a law.</a:t>
+            </a:r>
+            <a:r>
+              <a:rPr/>
+              <a:t> If you catch yourself saying “exactly”, run it again with another seed. They will need that reflex in their own exercises, and it is cheaper to learn it here.</a:t>
+            </a:r>
+          </a:p>
+          <a:p>
+            <a:pPr lvl="0" indent="0" marL="0">
+              <a:buNone/>
+            </a:pPr>
+          </a:p>
+          <a:p>
+            <a:pPr lvl="0" indent="0" marL="0">
+              <a:buNone/>
+            </a:pPr>
+            <a:r>
+              <a:rPr/>
+              <a:t>Then make the practical consequence explicit: with a bagged ensemble you get a trustworthy estimate of generalisation for free, without setting aside a separate validation set at all - just not one to read to the fourth decimal.</a:t>
+            </a:r>
+          </a:p>
+          <a:p>
+            <a:pPr lvl="0" indent="0" marL="0">
+              <a:buNone/>
+            </a:pPr>
+          </a:p>
+          <a:p>
+            <a:pPr lvl="0" indent="0" marL="0">
+              <a:buNone/>
+            </a:pPr>
+            <a:r>
+              <a:rPr/>
+              <a:t>Handout section 5.1.</a:t>
             </a:r>
           </a:p>
         </p:txBody>
@@ -3611,21 +3762,35 @@
             </a:pPr>
             <a:r>
               <a:rPr/>
-              <a:t>The previous slide’s formula as curves: the variance of an average of B trees, as a share of one tree’s, for rho = 0, 0.2, 0.5 and 0.8.</a:t>
-            </a:r>
-          </a:p>
-          <a:p>
-            <a:pPr lvl="0" indent="0" marL="0">
-              <a:buNone/>
-            </a:pPr>
-          </a:p>
-          <a:p>
-            <a:pPr lvl="0" indent="0" marL="0">
-              <a:buNone/>
-            </a:pPr>
-            <a:r>
-              <a:rPr/>
-              <a:t>Only the rho = 0 curve goes to zero. Every other one flattens onto its dotted floor: at rho = 0.5, ten trees keep 0.550 of one tree’s variance and a hundred keep 0.505. Ask the room what the curves say about adding trees past fifty - almost nothing - and what the only remaining lever is: lower rho. That is the random forest, two slides on. Handout section 5.2.</a:t>
+              <a:t>State the headline, not the algebra - the covariance expansion behind this is in handout section 5.2, and it does not belong on a slide. Read the formula on the slide in two pieces: the first term, sigma squared over B, shrinks as trees are added; the second, (B - 1)/B times rho sigma squared, grows towards rho sigma squared and stays there. The two consequences are what matter: there is a floor variance cannot fall below, set by how correlated the trees are with each other, and averaging is a variance tool only, powerless against a systematic mistake shared by every tree.</a:t>
+            </a:r>
+          </a:p>
+          <a:p>
+            <a:pPr lvl="0" indent="0" marL="0">
+              <a:buNone/>
+            </a:pPr>
+          </a:p>
+          <a:p>
+            <a:pPr lvl="0" indent="0" marL="0">
+              <a:buNone/>
+            </a:pPr>
+            <a:r>
+              <a:rPr/>
+              <a:t>That second point is worth a beat: bagging does nothing for a tree that is too shallow to represent the rule in the first place. It cleans up noise, it does not add capability. The bullet is worded with care on purpose. For an average of numbers, averaging leaves the bias exactly where it was. A vote between classifiers is not an average of numbers, and it can change which side of the boundary a point falls on - which is why, two slides on, bagging raises the mean accuracy and not only narrows the spread. What no amount of voting can do is fix a mistake that every tree makes.</a:t>
+            </a:r>
+          </a:p>
+          <a:p>
+            <a:pPr lvl="0" indent="0" marL="0">
+              <a:buNone/>
+            </a:pPr>
+          </a:p>
+          <a:p>
+            <a:pPr lvl="0" indent="0" marL="0">
+              <a:buNone/>
+            </a:pPr>
+            <a:r>
+              <a:rPr/>
+              <a:t>Handout section 5.2.</a:t>
             </a:r>
           </a:p>
         </p:txBody>
@@ -3707,35 +3872,21 @@
             </a:pPr>
             <a:r>
               <a:rPr/>
-              <a:t>Across 30 random 70/30 splits of the loan data, both numbers moved in the predicted direction. The mean rose, because bagging also averages out some of a deep tree’s overfitting; the spread fell, which is what the formula of slide 33 leads us to expect. Say precisely what was measured, because it is not the formula’s quantity: the formula is about the variance of one prediction over bootstrap samples, while this table is the spread of test accuracy over 30 different train/test splits, which also carries the luck of which applicants landed in each test set. The measurement is consistent with the formula, not a direct check of it.</a:t>
-            </a:r>
-          </a:p>
-          <a:p>
-            <a:pPr lvl="0" indent="0" marL="0">
-              <a:buNone/>
-            </a:pPr>
-          </a:p>
-          <a:p>
-            <a:pPr lvl="0" indent="0" marL="0">
-              <a:buNone/>
-            </a:pPr>
-            <a:r>
-              <a:rPr/>
-              <a:t>Ask the room to name which of the two changes matters more for trusting a single deployed model - the tighter spread, because it means the number you report is less likely to be a lucky split.</a:t>
-            </a:r>
-          </a:p>
-          <a:p>
-            <a:pPr lvl="0" indent="0" marL="0">
-              <a:buNone/>
-            </a:pPr>
-          </a:p>
-          <a:p>
-            <a:pPr lvl="0" indent="0" marL="0">
-              <a:buNone/>
-            </a:pPr>
-            <a:r>
-              <a:rPr/>
-              <a:t>Handout section 5.2.</a:t>
+              <a:t>The previous slide’s formula as curves: the variance of an average of B trees, as a share of one tree’s, for rho = 0, 0.2, 0.5 and 0.8.</a:t>
+            </a:r>
+          </a:p>
+          <a:p>
+            <a:pPr lvl="0" indent="0" marL="0">
+              <a:buNone/>
+            </a:pPr>
+          </a:p>
+          <a:p>
+            <a:pPr lvl="0" indent="0" marL="0">
+              <a:buNone/>
+            </a:pPr>
+            <a:r>
+              <a:rPr/>
+              <a:t>Only the rho = 0 curve goes to zero. Every other one flattens onto its dotted floor: at rho = 0.5, ten trees keep 0.550 of one tree’s variance and a hundred keep 0.505. Ask the room what the curves say about adding trees past fifty - almost nothing - and what the only remaining lever is: lower rho. That is the random forest, two slides on. Handout section 5.2.</a:t>
             </a:r>
           </a:p>
         </p:txBody>
@@ -3817,35 +3968,35 @@
             </a:pPr>
             <a:r>
               <a:rPr/>
-              <a:t>Connect this directly to the previous slide’s algebra: if the floor is ρσ², the only way to push it lower is to push ρ down, and bootstrap resampling alone only does that partially, because every bagged tree still gets to see the full feature list.</a:t>
-            </a:r>
-          </a:p>
-          <a:p>
-            <a:pPr lvl="0" indent="0" marL="0">
-              <a:buNone/>
-            </a:pPr>
-          </a:p>
-          <a:p>
-            <a:pPr lvl="0" indent="0" marL="0">
-              <a:buNone/>
-            </a:pPr>
-            <a:r>
-              <a:rPr/>
-              <a:t>The random forest’s one change is a restriction, not an addition: at each split, only a random handful of candidate features is even offered. That forces disagreement between trees at the same point in the tree, purely by denying them the same menu.</a:t>
-            </a:r>
-          </a:p>
-          <a:p>
-            <a:pPr lvl="0" indent="0" marL="0">
-              <a:buNone/>
-            </a:pPr>
-          </a:p>
-          <a:p>
-            <a:pPr lvl="0" indent="0" marL="0">
-              <a:buNone/>
-            </a:pPr>
-            <a:r>
-              <a:rPr/>
-              <a:t>Handout section 6.</a:t>
+              <a:t>Across 30 random 70/30 splits of the loan data, both numbers moved in the predicted direction. The mean rose, because bagging also averages out some of a deep tree’s overfitting; the spread fell, which is what the formula of slide 34 leads us to expect. Say precisely what was measured, because it is not the formula’s quantity: the formula is about the variance of one prediction over bootstrap samples, while this table is the spread of test accuracy over 30 different train/test splits, which also carries the luck of which applicants landed in each test set. The measurement is consistent with the formula, not a direct check of it.</a:t>
+            </a:r>
+          </a:p>
+          <a:p>
+            <a:pPr lvl="0" indent="0" marL="0">
+              <a:buNone/>
+            </a:pPr>
+          </a:p>
+          <a:p>
+            <a:pPr lvl="0" indent="0" marL="0">
+              <a:buNone/>
+            </a:pPr>
+            <a:r>
+              <a:rPr/>
+              <a:t>Ask the room to name which of the two changes matters more for trusting a single deployed model - the tighter spread, because it means the number you report is less likely to be a lucky split.</a:t>
+            </a:r>
+          </a:p>
+          <a:p>
+            <a:pPr lvl="0" indent="0" marL="0">
+              <a:buNone/>
+            </a:pPr>
+          </a:p>
+          <a:p>
+            <a:pPr lvl="0" indent="0" marL="0">
+              <a:buNone/>
+            </a:pPr>
+            <a:r>
+              <a:rPr/>
+              <a:t>Handout section 5.2.</a:t>
             </a:r>
           </a:p>
         </p:txBody>
@@ -3927,35 +4078,21 @@
             </a:pPr>
             <a:r>
               <a:rPr/>
-              <a:t>The same 30 random 70/30 splits as the bagging table, now with the random forest added and drawn rather than tabulated (notebook 2, section 3). Each dot is one split’s test accuracy; the box holds the middle half of the 30, the red line is the median.</a:t>
-            </a:r>
-          </a:p>
-          <a:p>
-            <a:pPr lvl="0" indent="0" marL="0">
-              <a:buNone/>
-            </a:pPr>
-          </a:p>
-          <a:p>
-            <a:pPr lvl="0" indent="0" marL="0">
-              <a:buNone/>
-            </a:pPr>
-            <a:r>
-              <a:rPr/>
-              <a:t>Read it left to right: the boxes rise and narrow together. In numbers, the means are 0.856, 0.902 and 0.908, and the standard deviations 0.0185, 0.0153 and 0.0137. The random forest beats plain bagging on both counts - a better mean and a tighter spread - consistent with ρ having fallen further, as the restriction on the previous slide predicts. The step from bagging to the forest is much smaller than the step from one tree to bagging: averaging did most of the work, decorrelating added a little more.</a:t>
-            </a:r>
-          </a:p>
-          <a:p>
-            <a:pPr lvl="0" indent="0" marL="0">
-              <a:buNone/>
-            </a:pPr>
-          </a:p>
-          <a:p>
-            <a:pPr lvl="0" indent="0" marL="0">
-              <a:buNone/>
-            </a:pPr>
-            <a:r>
-              <a:rPr/>
-              <a:t>Say plainly what has and hasn’t changed: nothing about the splitting rule is different from the first hour’s trees. The only change across the three boxes is what surrounds the tree - resampling, then also restricting the feature menu.</a:t>
+              <a:t>Connect this directly to the previous slide’s algebra: if the floor is ρσ², the only way to push it lower is to push ρ down, and bootstrap resampling alone only does that partially, because every bagged tree still gets to see the full feature list.</a:t>
+            </a:r>
+          </a:p>
+          <a:p>
+            <a:pPr lvl="0" indent="0" marL="0">
+              <a:buNone/>
+            </a:pPr>
+          </a:p>
+          <a:p>
+            <a:pPr lvl="0" indent="0" marL="0">
+              <a:buNone/>
+            </a:pPr>
+            <a:r>
+              <a:rPr/>
+              <a:t>The random forest’s one change is a restriction, not an addition: at each split, only a random handful of candidate features is even offered. That forces disagreement between trees at the same point in the tree, purely by denying them the same menu.</a:t>
             </a:r>
           </a:p>
           <a:p>
@@ -3970,6 +4107,20 @@
             <a:r>
               <a:rPr/>
               <a:t>Handout section 6.</a:t>
+            </a:r>
+          </a:p>
+          <a:p>
+            <a:pPr lvl="0" indent="0" marL="0">
+              <a:buNone/>
+            </a:pPr>
+          </a:p>
+          <a:p>
+            <a:pPr lvl="0" indent="0" marL="0">
+              <a:buNone/>
+            </a:pPr>
+            <a:r>
+              <a:rPr/>
+              <a:t>History: Leo Breiman’s paper “Random Forests” appeared in 2001 (it is in the handout’s further reading). Breiman, a Berkeley statistician who had spent years as an industrial consultant, also wrote that year’s “Statistical Modeling: The Two Cultures”, a defence of judging models by how well they predict.</a:t>
             </a:r>
           </a:p>
         </p:txBody>
@@ -4051,45 +4202,49 @@
             </a:pPr>
             <a:r>
               <a:rPr/>
-              <a:t>State the definition plainly, then set up the experiment. With just income and debt ratio in the dataset, feature importance is a clean, correct answer - both real features get essentially all the credit, because there is nothing else to compete with them.</a:t>
-            </a:r>
-          </a:p>
-          <a:p>
-            <a:pPr lvl="0" indent="0" marL="0">
-              <a:buNone/>
-            </a:pPr>
-          </a:p>
-          <a:p>
-            <a:pPr lvl="0" indent="0" marL="0">
-              <a:buNone/>
-            </a:pPr>
-            <a:r>
-              <a:rPr/>
-              <a:t>Ask the room to predict what happens as you add columns of pure noise - </a:t>
-            </a:r>
-            <a:r>
-              <a:rPr>
-                <a:latin typeface="Courier"/>
-              </a:rPr>
-              <a:t>np.random.normal</a:t>
-            </a:r>
-            <a:r>
-              <a:rPr/>
-              <a:t>, wired to nothing. Most will predict the noise columns get close to zero importance, because averaging over hundreds of trees should wash out anything with no signal. Do not confirm or deny yet - the next slide is the answer.</a:t>
-            </a:r>
-          </a:p>
-          <a:p>
-            <a:pPr lvl="0" indent="0" marL="0">
-              <a:buNone/>
-            </a:pPr>
-          </a:p>
-          <a:p>
-            <a:pPr lvl="0" indent="0" marL="0">
-              <a:buNone/>
-            </a:pPr>
-            <a:r>
-              <a:rPr/>
-              <a:t>Handout section 7.</a:t>
+              <a:t>The same 30 random 70/30 splits as the bagging table, now with the random forest added and drawn rather than tabulated (notebook 2, section 3). Each dot is one split’s test accuracy; the box holds the middle half of the 30, the red line is the median.</a:t>
+            </a:r>
+          </a:p>
+          <a:p>
+            <a:pPr lvl="0" indent="0" marL="0">
+              <a:buNone/>
+            </a:pPr>
+          </a:p>
+          <a:p>
+            <a:pPr lvl="0" indent="0" marL="0">
+              <a:buNone/>
+            </a:pPr>
+            <a:r>
+              <a:rPr/>
+              <a:t>Read it left to right: the boxes rise and narrow together. In numbers, the means are 0.856, 0.902 and 0.908, and the standard deviations 0.0185, 0.0153 and 0.0137. The random forest beats plain bagging on both counts - a better mean and a tighter spread - consistent with ρ having fallen further, as the restriction on the previous slide predicts. The step from bagging to the forest is much smaller than the step from one tree to bagging: averaging did most of the work, decorrelating added a little more.</a:t>
+            </a:r>
+          </a:p>
+          <a:p>
+            <a:pPr lvl="0" indent="0" marL="0">
+              <a:buNone/>
+            </a:pPr>
+          </a:p>
+          <a:p>
+            <a:pPr lvl="0" indent="0" marL="0">
+              <a:buNone/>
+            </a:pPr>
+            <a:r>
+              <a:rPr/>
+              <a:t>Say plainly what has and hasn’t changed: nothing about the splitting rule is different from the first hour’s trees. The only change across the three boxes is what surrounds the tree - resampling, then also restricting the feature menu.</a:t>
+            </a:r>
+          </a:p>
+          <a:p>
+            <a:pPr lvl="0" indent="0" marL="0">
+              <a:buNone/>
+            </a:pPr>
+          </a:p>
+          <a:p>
+            <a:pPr lvl="0" indent="0" marL="0">
+              <a:buNone/>
+            </a:pPr>
+            <a:r>
+              <a:rPr/>
+              <a:t>Handout section 6.</a:t>
             </a:r>
           </a:p>
         </p:txBody>
@@ -4171,21 +4326,21 @@
             </a:pPr>
             <a:r>
               <a:rPr/>
-              <a:t>Say what is plotted before pointing at it (notebook 2, section 5): a 300-tree random forest on the loan data with 0, 5 and 20 columns of random numbers added. Red, left axis: cross-validated accuracy. Blue, right axis: the share of the forest’s importance that lands on the noise columns.</a:t>
-            </a:r>
-          </a:p>
-          <a:p>
-            <a:pPr lvl="0" indent="0" marL="0">
-              <a:buNone/>
-            </a:pPr>
-          </a:p>
-          <a:p>
-            <a:pPr lvl="0" indent="0" marL="0">
-              <a:buNone/>
-            </a:pPr>
-            <a:r>
-              <a:rPr/>
-              <a:t>Follow the blue line, slowly, and let the last point sit before explaining anything: 0% with no noise, 33.9% with 5 columns, 54.5% with 20. With 20 pure-noise columns against 2 real features, more than half of the forest’s own importance scores land on columns that are </a:t>
+              <a:t>State the definition plainly, then set up the experiment. With just income and debt ratio in the dataset, feature importance is a clean, correct answer - both real features get essentially all the credit, because there is nothing else to compete with them.</a:t>
+            </a:r>
+          </a:p>
+          <a:p>
+            <a:pPr lvl="0" indent="0" marL="0">
+              <a:buNone/>
+            </a:pPr>
+          </a:p>
+          <a:p>
+            <a:pPr lvl="0" indent="0" marL="0">
+              <a:buNone/>
+            </a:pPr>
+            <a:r>
+              <a:rPr/>
+              <a:t>Ask the room to predict what happens as you add columns of pure noise - </a:t>
             </a:r>
             <a:r>
               <a:rPr>
@@ -4195,43 +4350,21 @@
             </a:r>
             <a:r>
               <a:rPr/>
-              <a:t> noise by construction. The red line falls at the same time, from 0.912 to 0.837, but gently: nothing in the accuracy warns that the importances have gone wrong.</a:t>
-            </a:r>
-          </a:p>
-          <a:p>
-            <a:pPr lvl="0" indent="0" marL="0">
-              <a:buNone/>
-            </a:pPr>
-          </a:p>
-          <a:p>
-            <a:pPr lvl="0" indent="0" marL="0">
-              <a:buNone/>
-            </a:pPr>
-            <a:r>
-              <a:rPr/>
-              <a:t>Name the instinct this breaks, and defend it before moving on: expecting an average over hundreds of trees to wash out noise is entirely reasonable - the variance-reduction result of the averaging slides is real and measured, and it does point the same way. It reduces the variance of the </a:t>
-            </a:r>
-            <a:r>
-              <a:rPr i="1"/>
-              <a:t>prediction</a:t>
-            </a:r>
-            <a:r>
-              <a:rPr/>
-              <a:t>. It does not guarantee small importance for irrelevant columns. Two things hand credit to noise, and slide 56 takes them apart: the random, incomplete menu at each split, and the deep splits on small groups, where some noise column always lowers the impurity a little by chance.</a:t>
-            </a:r>
-          </a:p>
-          <a:p>
-            <a:pPr lvl="0" indent="0" marL="0">
-              <a:buNone/>
-            </a:pPr>
-          </a:p>
-          <a:p>
-            <a:pPr lvl="0" indent="0" marL="0">
-              <a:buNone/>
-            </a:pPr>
-            <a:r>
-              <a:rPr/>
-              <a:t>The mechanism is in handout section 7. The practical consequence to leave them with: treat a random forest’s importances as suggestive, not definitive, when real features are few against many candidate columns - and check them, which is the next slide.</a:t>
+              <a:t>, wired to nothing. Most will predict the noise columns get close to zero importance, because averaging over hundreds of trees should wash out anything with no signal. Do not confirm or deny yet - the next slide is the answer.</a:t>
+            </a:r>
+          </a:p>
+          <a:p>
+            <a:pPr lvl="0" indent="0" marL="0">
+              <a:buNone/>
+            </a:pPr>
+          </a:p>
+          <a:p>
+            <a:pPr lvl="0" indent="0" marL="0">
+              <a:buNone/>
+            </a:pPr>
+            <a:r>
+              <a:rPr/>
+              <a:t>Handout section 7.</a:t>
             </a:r>
           </a:p>
         </p:txBody>
@@ -4313,57 +4446,67 @@
             </a:pPr>
             <a:r>
               <a:rPr/>
-              <a:t>Name the method and say its recipe before pointing at the figure. </a:t>
-            </a:r>
-            <a:r>
-              <a:rPr b="1"/>
-              <a:t>Permutation importance</a:t>
-            </a:r>
-            <a:r>
-              <a:rPr/>
-              <a:t>: take a fitted model and data it was not trained on; shuffle the values of one column, so that column no longer says anything about the applicant in its row; score the model again. The accuracy lost is that column’s importance. Repeat for every column. If the model never really used a column, shuffling it costs nothing.</a:t>
-            </a:r>
-          </a:p>
-          <a:p>
-            <a:pPr lvl="0" indent="0" marL="0">
-              <a:buNone/>
-            </a:pPr>
-          </a:p>
-          <a:p>
-            <a:pPr lvl="0" indent="0" marL="0">
-              <a:buNone/>
-            </a:pPr>
-            <a:r>
-              <a:rPr/>
-              <a:t>The figure is the 20-noise-column forest, trained on 70% of the applicants and checked on the other 30% (notebook 2, section 6). Left, the importance the forest reports for itself: more than half of it on the twenty noise columns. Right, the same 22 columns by permutation: debt ratio costs 0.18 of accuracy when shuffled, income 0.09, and every noise column costs almost nothing - between 0.003 lost and 0.002 gained.</a:t>
-            </a:r>
-          </a:p>
-          <a:p>
-            <a:pPr lvl="0" indent="0" marL="0">
-              <a:buNone/>
-            </a:pPr>
-          </a:p>
-          <a:p>
-            <a:pPr lvl="0" indent="0" marL="0">
-              <a:buNone/>
-            </a:pPr>
-            <a:r>
-              <a:rPr/>
-              <a:t>Two things to stress. Almost nothing, not exactly nothing: shuffling is random and the test set is finite, so a useless column moves the score by a few thousandths either way. And held-out data is what makes the check honest: on the training rows a deep forest has memorised its noise columns, and shuffling them would cost something there.</a:t>
-            </a:r>
-          </a:p>
-          <a:p>
-            <a:pPr lvl="0" indent="0" marL="0">
-              <a:buNone/>
-            </a:pPr>
-          </a:p>
-          <a:p>
-            <a:pPr lvl="0" indent="0" marL="0">
-              <a:buNone/>
-            </a:pPr>
-            <a:r>
-              <a:rPr/>
-              <a:t>The check costs one function call. The lesson to leave: a ranking the model reports about itself is a claim; shuffling on held-out data is the test of it. Handout section 7.1.</a:t>
+              <a:t>Say what is plotted before pointing at it (notebook 2, section 5): a 300-tree random forest on the loan data with 0, 5 and 20 columns of random numbers added. Red, left axis: cross-validated accuracy. Blue, right axis: the share of the forest’s importance that lands on the noise columns.</a:t>
+            </a:r>
+          </a:p>
+          <a:p>
+            <a:pPr lvl="0" indent="0" marL="0">
+              <a:buNone/>
+            </a:pPr>
+          </a:p>
+          <a:p>
+            <a:pPr lvl="0" indent="0" marL="0">
+              <a:buNone/>
+            </a:pPr>
+            <a:r>
+              <a:rPr/>
+              <a:t>Follow the blue line, slowly, and let the last point sit before explaining anything: 0% with no noise, 33.9% with 5 columns, 54.5% with 20. With 20 pure-noise columns against 2 real features, more than half of the forest’s own importance scores land on columns that are </a:t>
+            </a:r>
+            <a:r>
+              <a:rPr>
+                <a:latin typeface="Courier"/>
+              </a:rPr>
+              <a:t>np.random.normal</a:t>
+            </a:r>
+            <a:r>
+              <a:rPr/>
+              <a:t> noise by construction. The red line falls at the same time, from 0.912 to 0.837, but gently: nothing in the accuracy warns that the importances have gone wrong.</a:t>
+            </a:r>
+          </a:p>
+          <a:p>
+            <a:pPr lvl="0" indent="0" marL="0">
+              <a:buNone/>
+            </a:pPr>
+          </a:p>
+          <a:p>
+            <a:pPr lvl="0" indent="0" marL="0">
+              <a:buNone/>
+            </a:pPr>
+            <a:r>
+              <a:rPr/>
+              <a:t>Name the instinct this breaks, and defend it before moving on: expecting an average over hundreds of trees to wash out noise is entirely reasonable - the variance-reduction result of the averaging slides is real and measured, and it does point the same way. It reduces the variance of the </a:t>
+            </a:r>
+            <a:r>
+              <a:rPr i="1"/>
+              <a:t>prediction</a:t>
+            </a:r>
+            <a:r>
+              <a:rPr/>
+              <a:t>. It does not guarantee small importance for irrelevant columns. Two things hand credit to noise, and slide 57 takes them apart: the random, incomplete menu at each split, and the deep splits on small groups, where some noise column always lowers the impurity a little by chance.</a:t>
+            </a:r>
+          </a:p>
+          <a:p>
+            <a:pPr lvl="0" indent="0" marL="0">
+              <a:buNone/>
+            </a:pPr>
+          </a:p>
+          <a:p>
+            <a:pPr lvl="0" indent="0" marL="0">
+              <a:buNone/>
+            </a:pPr>
+            <a:r>
+              <a:rPr/>
+              <a:t>The mechanism is in handout section 7. The practical consequence to leave them with: treat a random forest’s importances as suggestive, not definitive, when real features are few against many candidate columns - and check them, which is the next slide.</a:t>
             </a:r>
           </a:p>
         </p:txBody>
@@ -4569,69 +4712,57 @@
             </a:pPr>
             <a:r>
               <a:rPr/>
-              <a:t>The table is the notebook’s map: bagging from scratch and against scikit-learn, the out-of-bag score checked against cross-validation, the variance measured over 30 splits, the noise-column experiment, and the permutation check of the previous slide. Section 4 of the notebook is reading only, which is why the table skips it.</a:t>
-            </a:r>
-          </a:p>
-          <a:p>
-            <a:pPr lvl="0" indent="0" marL="0">
-              <a:buNone/>
-            </a:pPr>
-          </a:p>
-          <a:p>
-            <a:pPr lvl="0" indent="0" marL="0">
-              <a:buNone/>
-            </a:pPr>
-            <a:r>
-              <a:rPr/>
-              <a:t>Run Notebooks/02_bagging_and_random_forests.ipynb. Eighteen minutes.</a:t>
-            </a:r>
-          </a:p>
-          <a:p>
-            <a:pPr lvl="0" indent="0" marL="0">
-              <a:buNone/>
-            </a:pPr>
-          </a:p>
-          <a:p>
-            <a:pPr lvl="0" indent="0" marL="0">
-              <a:buNone/>
-            </a:pPr>
-            <a:r>
-              <a:rPr/>
-              <a:t>The cell to protect is the noise-column sweep. Let them add the columns themselves and watch the importance share climb - reading the number off a slide does not land the same way as watching it happen.</a:t>
-            </a:r>
-          </a:p>
-          <a:p>
-            <a:pPr lvl="0" indent="0" marL="0">
-              <a:buNone/>
-            </a:pPr>
-          </a:p>
-          <a:p>
-            <a:pPr lvl="0" indent="0" marL="0">
-              <a:buNone/>
-            </a:pPr>
-            <a:r>
-              <a:rPr/>
-              <a:t>If time allows, section 6 also tries </a:t>
-            </a:r>
-            <a:r>
-              <a:rPr>
-                <a:latin typeface="Courier"/>
-              </a:rPr>
-              <a:t>max_features=None</a:t>
-            </a:r>
-            <a:r>
-              <a:rPr/>
-              <a:t> instead of the default </a:t>
-            </a:r>
-            <a:r>
-              <a:rPr>
-                <a:latin typeface="Courier"/>
-              </a:rPr>
-              <a:t>"sqrt"</a:t>
-            </a:r>
-            <a:r>
-              <a:rPr/>
-              <a:t>: every split sees all 22 columns. Ask them to predict the noise share before running it. Most will say it falls to about zero, since the real features are now always on offer. It falls only to 28%, and the accuracy rises from 0.837 to 0.897. Slide 56 explains both.</a:t>
+              <a:t>Name the method and say its recipe before pointing at the figure. </a:t>
+            </a:r>
+            <a:r>
+              <a:rPr b="1"/>
+              <a:t>Permutation importance</a:t>
+            </a:r>
+            <a:r>
+              <a:rPr/>
+              <a:t>: take a fitted model and data it was not trained on; shuffle the values of one column, so that column no longer says anything about the applicant in its row; score the model again. The accuracy lost is that column’s importance. Repeat for every column. If the model never really used a column, shuffling it costs nothing.</a:t>
+            </a:r>
+          </a:p>
+          <a:p>
+            <a:pPr lvl="0" indent="0" marL="0">
+              <a:buNone/>
+            </a:pPr>
+          </a:p>
+          <a:p>
+            <a:pPr lvl="0" indent="0" marL="0">
+              <a:buNone/>
+            </a:pPr>
+            <a:r>
+              <a:rPr/>
+              <a:t>The figure is the 20-noise-column forest, trained on 70% of the applicants and checked on the other 30% (notebook 2, section 6). Left, the importance the forest reports for itself: more than half of it on the twenty noise columns. Right, the same 22 columns by permutation: debt ratio costs 0.18 of accuracy when shuffled, income 0.09, and every noise column costs almost nothing - between 0.003 lost and 0.002 gained.</a:t>
+            </a:r>
+          </a:p>
+          <a:p>
+            <a:pPr lvl="0" indent="0" marL="0">
+              <a:buNone/>
+            </a:pPr>
+          </a:p>
+          <a:p>
+            <a:pPr lvl="0" indent="0" marL="0">
+              <a:buNone/>
+            </a:pPr>
+            <a:r>
+              <a:rPr/>
+              <a:t>Two things to stress. Almost nothing, not exactly nothing: shuffling is random and the test set is finite, so a useless column moves the score by a few thousandths either way. And held-out data is what makes the check honest: on the training rows a deep forest has memorised its noise columns, and shuffling them would cost something there.</a:t>
+            </a:r>
+          </a:p>
+          <a:p>
+            <a:pPr lvl="0" indent="0" marL="0">
+              <a:buNone/>
+            </a:pPr>
+          </a:p>
+          <a:p>
+            <a:pPr lvl="0" indent="0" marL="0">
+              <a:buNone/>
+            </a:pPr>
+            <a:r>
+              <a:rPr/>
+              <a:t>The check costs one function call. The lesson to leave: a ranking the model reports about itself is a claim; shuffling on held-out data is the test of it. Handout section 7.1.</a:t>
             </a:r>
           </a:p>
         </p:txBody>
@@ -4713,73 +4844,69 @@
             </a:pPr>
             <a:r>
               <a:rPr/>
-              <a:t>Contrast the two strategies directly, because the difference is the whole segment. Bagging and random forests are parallel: every tree is grown once, independently, and combined only at prediction time. Boosting is sequential: tree t exists specifically because of what trees 1 through t-1 still got wrong.</a:t>
-            </a:r>
-          </a:p>
-          <a:p>
-            <a:pPr lvl="0" indent="0" marL="0">
-              <a:buNone/>
-            </a:pPr>
-          </a:p>
-          <a:p>
-            <a:pPr lvl="0" indent="0" marL="0">
-              <a:buNone/>
-            </a:pPr>
-            <a:r>
-              <a:rPr/>
-              <a:t>Slow down on “regression tree”, because it is new. “Shallow” means depth 2 or 3 here. Everything so far this lesson was a classification tree: leaves vote, splits are scored by Gini. A boosted tree is fit to corrections, which are numbers like +0.613 or -0.387, not classes, so it is the regression version of the same algorithm: the same greedy search over features and thresholds, but each leaf predicts the average correction of the examples in it, and a split is scored by how much it lowers the squared error around those averages. Even </a:t>
+              <a:t>The table is the notebook’s map: bagging from scratch and against scikit-learn, the out-of-bag score checked against cross-validation, the variance measured over 30 splits, the noise-column experiment, and the permutation check of the previous slide. Section 4 of the notebook is reading only, which is why the table skips it.</a:t>
+            </a:r>
+          </a:p>
+          <a:p>
+            <a:pPr lvl="0" indent="0" marL="0">
+              <a:buNone/>
+            </a:pPr>
+          </a:p>
+          <a:p>
+            <a:pPr lvl="0" indent="0" marL="0">
+              <a:buNone/>
+            </a:pPr>
+            <a:r>
+              <a:rPr/>
+              <a:t>Run Notebooks/02_bagging_and_random_forests.ipynb. Eighteen minutes.</a:t>
+            </a:r>
+          </a:p>
+          <a:p>
+            <a:pPr lvl="0" indent="0" marL="0">
+              <a:buNone/>
+            </a:pPr>
+          </a:p>
+          <a:p>
+            <a:pPr lvl="0" indent="0" marL="0">
+              <a:buNone/>
+            </a:pPr>
+            <a:r>
+              <a:rPr/>
+              <a:t>The cell to protect is the noise-column sweep. Let them add the columns themselves and watch the importance share climb - reading the number off a slide does not land the same way as watching it happen.</a:t>
+            </a:r>
+          </a:p>
+          <a:p>
+            <a:pPr lvl="0" indent="0" marL="0">
+              <a:buNone/>
+            </a:pPr>
+          </a:p>
+          <a:p>
+            <a:pPr lvl="0" indent="0" marL="0">
+              <a:buNone/>
+            </a:pPr>
+            <a:r>
+              <a:rPr/>
+              <a:t>If time allows, section 6 also tries </a:t>
             </a:r>
             <a:r>
               <a:rPr>
                 <a:latin typeface="Courier"/>
               </a:rPr>
-              <a:t>GradientBoostingClassifier</a:t>
-            </a:r>
-            <a:r>
-              <a:rPr/>
-              <a:t> grows regression trees inside.</a:t>
-            </a:r>
-          </a:p>
-          <a:p>
-            <a:pPr lvl="0" indent="0" marL="0">
-              <a:buNone/>
-            </a:pPr>
-          </a:p>
-          <a:p>
-            <a:pPr lvl="0" indent="0" marL="0">
-              <a:buNone/>
-            </a:pPr>
-            <a:r>
-              <a:rPr/>
-              <a:t>A predictable slip, worth naming now: “the final task is classification, so each boosted tree votes default or repaid, like a tree in a forest”. It is reasonable - every ensemble so far was made of trees that vote. But a boosted tree never outputs a class. It outputs a correction that is added to a running score, and only the final score is turned into a class.</a:t>
-            </a:r>
-          </a:p>
-          <a:p>
-            <a:pPr lvl="0" indent="0" marL="0">
-              <a:buNone/>
-            </a:pPr>
-          </a:p>
-          <a:p>
-            <a:pPr lvl="0" indent="0" marL="0">
-              <a:buNone/>
-            </a:pPr>
-            <a:r>
-              <a:rPr/>
-              <a:t>Name α carefully and tie it to the course’s shared notation - this is the same symbol as lesson 3’s gradient descent learning rate, doing an analogous job: how large a step each correction takes.</a:t>
-            </a:r>
-          </a:p>
-          <a:p>
-            <a:pPr lvl="0" indent="0" marL="0">
-              <a:buNone/>
-            </a:pPr>
-          </a:p>
-          <a:p>
-            <a:pPr lvl="0" indent="0" marL="0">
-              <a:buNone/>
-            </a:pPr>
-            <a:r>
-              <a:rPr/>
-              <a:t>Handout section 8.</a:t>
+              <a:t>max_features=None</a:t>
+            </a:r>
+            <a:r>
+              <a:rPr/>
+              <a:t> instead of the default </a:t>
+            </a:r>
+            <a:r>
+              <a:rPr>
+                <a:latin typeface="Courier"/>
+              </a:rPr>
+              <a:t>"sqrt"</a:t>
+            </a:r>
+            <a:r>
+              <a:rPr/>
+              <a:t>: every split sees all 22 columns. Ask them to predict the noise share before running it. Most will say it falls to about zero, since the real features are now always on offer. It falls only to 28%, and the accuracy rises from 0.837 to 0.897. Slide 57 explains both.</a:t>
             </a:r>
           </a:p>
         </p:txBody>
@@ -4861,21 +4988,87 @@
             </a:pPr>
             <a:r>
               <a:rPr/>
-              <a:t>F₀ is the flat starting guess: the best single constant for the loss being used. For squared error, as on this slide and the next three, that is the mean of the target; for classification it will be the log-odds of the base rate (slide 47). Each subsequent Fₜ is the previous ensemble plus a scaled correction from the newest tree, hₜ. Read it left to right: start flat, then keep adding small, scaled corrections.</a:t>
-            </a:r>
-          </a:p>
-          <a:p>
-            <a:pPr lvl="0" indent="0" marL="0">
-              <a:buNone/>
-            </a:pPr>
-          </a:p>
-          <a:p>
-            <a:pPr lvl="0" indent="0" marL="0">
-              <a:buNone/>
-            </a:pPr>
-            <a:r>
-              <a:rPr/>
-              <a:t>Do not derive anything further here - the next slide states what hₜ is actually fit to. Handout section 8.</a:t>
+              <a:t>Contrast the two strategies directly, because the difference is the whole segment. Bagging and random forests are parallel: every tree is grown once, independently, and combined only at prediction time. Boosting is sequential: tree t exists specifically because of what trees 1 through t-1 still got wrong.</a:t>
+            </a:r>
+          </a:p>
+          <a:p>
+            <a:pPr lvl="0" indent="0" marL="0">
+              <a:buNone/>
+            </a:pPr>
+          </a:p>
+          <a:p>
+            <a:pPr lvl="0" indent="0" marL="0">
+              <a:buNone/>
+            </a:pPr>
+            <a:r>
+              <a:rPr/>
+              <a:t>Slow down on “regression tree”, because it is new. “Shallow” means depth 2 or 3 here. Everything so far this lesson was a classification tree: leaves vote, splits are scored by Gini. A boosted tree is fit to corrections, which are numbers like +0.613 or -0.387, not classes, so it is the regression version of the same algorithm: the same greedy search over features and thresholds, but each leaf predicts the average correction of the examples in it, and a split is scored by how much it lowers the squared error around those averages. Even </a:t>
+            </a:r>
+            <a:r>
+              <a:rPr>
+                <a:latin typeface="Courier"/>
+              </a:rPr>
+              <a:t>GradientBoostingClassifier</a:t>
+            </a:r>
+            <a:r>
+              <a:rPr/>
+              <a:t> grows regression trees inside.</a:t>
+            </a:r>
+          </a:p>
+          <a:p>
+            <a:pPr lvl="0" indent="0" marL="0">
+              <a:buNone/>
+            </a:pPr>
+          </a:p>
+          <a:p>
+            <a:pPr lvl="0" indent="0" marL="0">
+              <a:buNone/>
+            </a:pPr>
+            <a:r>
+              <a:rPr/>
+              <a:t>A predictable slip, worth naming now: “the final task is classification, so each boosted tree votes default or repaid, like a tree in a forest”. It is reasonable - every ensemble so far was made of trees that vote. But a boosted tree never outputs a class. It outputs a correction that is added to a running score, and only the final score is turned into a class.</a:t>
+            </a:r>
+          </a:p>
+          <a:p>
+            <a:pPr lvl="0" indent="0" marL="0">
+              <a:buNone/>
+            </a:pPr>
+          </a:p>
+          <a:p>
+            <a:pPr lvl="0" indent="0" marL="0">
+              <a:buNone/>
+            </a:pPr>
+            <a:r>
+              <a:rPr/>
+              <a:t>Name α carefully and tie it to the course’s shared notation - this is the same symbol as lesson 3’s gradient descent learning rate, doing an analogous job: how large a step each correction takes.</a:t>
+            </a:r>
+          </a:p>
+          <a:p>
+            <a:pPr lvl="0" indent="0" marL="0">
+              <a:buNone/>
+            </a:pPr>
+          </a:p>
+          <a:p>
+            <a:pPr lvl="0" indent="0" marL="0">
+              <a:buNone/>
+            </a:pPr>
+            <a:r>
+              <a:rPr/>
+              <a:t>Handout section 8.</a:t>
+            </a:r>
+          </a:p>
+          <a:p>
+            <a:pPr lvl="0" indent="0" marL="0">
+              <a:buNone/>
+            </a:pPr>
+          </a:p>
+          <a:p>
+            <a:pPr lvl="0" indent="0" marL="0">
+              <a:buNone/>
+            </a:pPr>
+            <a:r>
+              <a:rPr/>
+              <a:t>History: the first boosting algorithm to work in practice was AdaBoost, by Yoav Freund and Robert Schapire (1995-1997), which reweighted the examples the trees so far got wrong; it won them the Gödel Prize in 2003. Jerome Friedman’s 2001 paper (in the further reading) recast the idea as gradient descent on a loss, which is the version this lesson teaches and scikit-learn implements.</a:t>
             </a:r>
           </a:p>
         </p:txBody>
@@ -4957,35 +5150,21 @@
             </a:pPr>
             <a:r>
               <a:rPr/>
-              <a:t>The In code line is the whole from-scratch loop of notebook 3, section 1: fit a depth-2 regression tree to the residuals, add 0.3 times its predictions to the running prediction, repeat sixty times.</a:t>
-            </a:r>
-          </a:p>
-          <a:p>
-            <a:pPr lvl="0" indent="0" marL="0">
-              <a:buNone/>
-            </a:pPr>
-          </a:p>
-          <a:p>
-            <a:pPr lvl="0" indent="0" marL="0">
-              <a:buNone/>
-            </a:pPr>
-            <a:r>
-              <a:rPr/>
-              <a:t>State the result without the calculus. For plain squared-error regression, what a new tree corrects is literally the residual - the gap between the truth and the ensemble’s current prediction. That is intuitive on its own and does not need a derivative to justify.</a:t>
-            </a:r>
-          </a:p>
-          <a:p>
-            <a:pPr lvl="0" indent="0" marL="0">
-              <a:buNone/>
-            </a:pPr>
-          </a:p>
-          <a:p>
-            <a:pPr lvl="0" indent="0" marL="0">
-              <a:buNone/>
-            </a:pPr>
-            <a:r>
-              <a:rPr/>
-              <a:t>The second bullet is the generalisation that pays off in the very next segment: the same recipe - fit a tree to the negative gradient of whatever loss you’re using - covers classification too, once the loss changes from squared error to something else. The one line of algebra connecting the two is on the slide; handout section 8 sets it out.</a:t>
+              <a:t>F₀ is the flat starting guess: the best single constant for the loss being used. For squared error, as on this slide and the next three, that is the mean of the target; for classification it will be the log-odds of the base rate (slide 48). Each subsequent Fₜ is the previous ensemble plus a scaled correction from the newest tree, hₜ. Read it left to right: start flat, then keep adding small, scaled corrections.</a:t>
+            </a:r>
+          </a:p>
+          <a:p>
+            <a:pPr lvl="0" indent="0" marL="0">
+              <a:buNone/>
+            </a:pPr>
+          </a:p>
+          <a:p>
+            <a:pPr lvl="0" indent="0" marL="0">
+              <a:buNone/>
+            </a:pPr>
+            <a:r>
+              <a:rPr/>
+              <a:t>Do not derive anything further here - the next slide states what hₜ is actually fit to. Handout section 8.</a:t>
             </a:r>
           </a:p>
         </p:txBody>
@@ -5067,35 +5246,35 @@
             </a:pPr>
             <a:r>
               <a:rPr/>
-              <a:t>A new toy dataset, so say what it is before anything else: 200 points on one input x, whose true value is a three-level step function plus a gentle sine wave (the black line), observed with noise (the grey dots). Sixty depth-2 trees, learning rate 0.3, are fit to it. Walk through the coloured curves in order.</a:t>
-            </a:r>
-          </a:p>
-          <a:p>
-            <a:pPr lvl="0" indent="0" marL="0">
-              <a:buNone/>
-            </a:pPr>
-          </a:p>
-          <a:p>
-            <a:pPr lvl="0" indent="0" marL="0">
-              <a:buNone/>
-            </a:pPr>
-            <a:r>
-              <a:rPr/>
-              <a:t>Say the numbers as you point: one tree barely moves the flat starting guess. Five trees sketch the coarse shape. Twenty trace the step function closely - the ensemble’s best point, on the next slide. By sixty, the ensemble is tracking individual noisy observations as well as the underlying shape.</a:t>
-            </a:r>
-          </a:p>
-          <a:p>
-            <a:pPr lvl="0" indent="0" marL="0">
-              <a:buNone/>
-            </a:pPr>
-          </a:p>
-          <a:p>
-            <a:pPr lvl="0" indent="0" marL="0">
-              <a:buNone/>
-            </a:pPr>
-            <a:r>
-              <a:rPr/>
-              <a:t>Handout section 8.</a:t>
+              <a:t>The In code line is the whole from-scratch loop of notebook 3, section 1: fit a depth-2 regression tree to the residuals, add 0.3 times its predictions to the running prediction, repeat sixty times.</a:t>
+            </a:r>
+          </a:p>
+          <a:p>
+            <a:pPr lvl="0" indent="0" marL="0">
+              <a:buNone/>
+            </a:pPr>
+          </a:p>
+          <a:p>
+            <a:pPr lvl="0" indent="0" marL="0">
+              <a:buNone/>
+            </a:pPr>
+            <a:r>
+              <a:rPr/>
+              <a:t>State the result without the calculus. For plain squared-error regression, what a new tree corrects is literally the residual - the gap between the truth and the ensemble’s current prediction. That is intuitive on its own and does not need a derivative to justify.</a:t>
+            </a:r>
+          </a:p>
+          <a:p>
+            <a:pPr lvl="0" indent="0" marL="0">
+              <a:buNone/>
+            </a:pPr>
+          </a:p>
+          <a:p>
+            <a:pPr lvl="0" indent="0" marL="0">
+              <a:buNone/>
+            </a:pPr>
+            <a:r>
+              <a:rPr/>
+              <a:t>The second bullet is the generalisation that pays off in the very next segment: the same recipe - fit a tree to the negative gradient of whatever loss you’re using - covers classification too, once the loss changes from squared error to something else. The one line of algebra connecting the two is on the slide; handout section 8 sets it out.</a:t>
             </a:r>
           </a:p>
         </p:txBody>
@@ -5177,29 +5356,21 @@
             </a:pPr>
             <a:r>
               <a:rPr/>
-              <a:t>Put a number on each curve of the previous slide. Twenty trees is the sweet spot; by sixty the error against the true, noise-free function has risen again, even though the ensemble is still adding trees that reduce error on the </a:t>
-            </a:r>
-            <a:r>
-              <a:rPr i="1"/>
-              <a:t>training</a:t>
-            </a:r>
-            <a:r>
-              <a:rPr/>
-              <a:t> residuals.</a:t>
-            </a:r>
-          </a:p>
-          <a:p>
-            <a:pPr lvl="0" indent="0" marL="0">
-              <a:buNone/>
-            </a:pPr>
-          </a:p>
-          <a:p>
-            <a:pPr lvl="0" indent="0" marL="0">
-              <a:buNone/>
-            </a:pPr>
-            <a:r>
-              <a:rPr/>
-              <a:t>Name what this is: the same overfitting story as the unconstrained single tree of the depth table, reached by a completely different route - not one tree grown too deep, but too many shallow trees each chasing whatever residual noise is left.</a:t>
+              <a:t>A new toy dataset, so say what it is before anything else: 200 points on one input x, whose true value is a three-level step function plus a gentle sine wave (the black line), observed with noise (the grey dots). Sixty depth-2 trees, learning rate 0.3, are fit to it. Walk through the coloured curves in order.</a:t>
+            </a:r>
+          </a:p>
+          <a:p>
+            <a:pPr lvl="0" indent="0" marL="0">
+              <a:buNone/>
+            </a:pPr>
+          </a:p>
+          <a:p>
+            <a:pPr lvl="0" indent="0" marL="0">
+              <a:buNone/>
+            </a:pPr>
+            <a:r>
+              <a:rPr/>
+              <a:t>Say the numbers as you point: one tree barely moves the flat starting guess. Five trees sketch the coarse shape. Twenty trace the step function closely - the ensemble’s best point, on the next slide. By sixty, the ensemble is tracking individual noisy observations as well as the underlying shape.</a:t>
             </a:r>
           </a:p>
           <a:p>
@@ -5295,91 +5466,43 @@
             </a:pPr>
             <a:r>
               <a:rPr/>
-              <a:t>State the result, not the chain rule behind it - the handout carries the full derivative. What matters for this course is the connection: boosting for classification fits a sequence of small trees to y - p, one correction at a time, rather than adjusting a fixed set of linear coefficients against the same quantity in one continuous descent.</a:t>
-            </a:r>
-          </a:p>
-          <a:p>
-            <a:pPr lvl="0" indent="0" marL="0">
-              <a:buNone/>
-            </a:pPr>
-          </a:p>
-          <a:p>
-            <a:pPr lvl="0" indent="0" marL="0">
-              <a:buNone/>
-            </a:pPr>
-            <a:r>
-              <a:rPr/>
-              <a:t>Ask the room to name what’s genuinely different between this and lesson 4’s logistic regression, given they’re descending against the same quantity. The answer: lesson 4 moves a fixed number of coefficients; boosting adds entirely new trees, so the model’s structure itself grows with training rather than staying fixed.</a:t>
-            </a:r>
-          </a:p>
-          <a:p>
-            <a:pPr lvl="0" indent="0" marL="0">
-              <a:buNone/>
-            </a:pPr>
-          </a:p>
-          <a:p>
-            <a:pPr lvl="0" indent="0" marL="0">
-              <a:buNone/>
-            </a:pPr>
-            <a:r>
-              <a:rPr/>
-              <a:t>The sigma here is lesson 4’s logistic function, 1 / (1 + e^-F), not the sigma squared of the variance slides: the slide says so, say it aloud once too, since the same letter has just meant something else.</a:t>
-            </a:r>
-          </a:p>
-          <a:p>
-            <a:pPr lvl="0" indent="0" marL="0">
-              <a:buNone/>
-            </a:pPr>
-          </a:p>
-          <a:p>
-            <a:pPr lvl="0" indent="0" marL="0">
-              <a:buNone/>
-            </a:pPr>
-            <a:r>
-              <a:rPr/>
-              <a:t>Give them the first step in numbers, because it makes y - p concrete. The ensemble starts at the base rate’s log-odds: 464 of the 1,200 defaulted, so F0 = log(464 / 736) = -0.461, which the logistic function turns back into 0.387 for everyone. The first tree is fit to y - p: +0.613 for every applicant who defaulted, -0.387 for every one who repaid.</a:t>
-            </a:r>
-          </a:p>
-          <a:p>
-            <a:pPr lvl="0" indent="0" marL="0">
-              <a:buNone/>
-            </a:pPr>
-          </a:p>
-          <a:p>
-            <a:pPr lvl="0" indent="0" marL="0">
-              <a:buNone/>
-            </a:pPr>
-            <a:r>
-              <a:rPr/>
-              <a:t>A predictable slip: “so the update is p plus alpha times (y - p)”. It is reasonable, because y - p is a difference of probabilities. But the trees correct the score F, not p: F moves by alpha times the tree’s output, and only then does the logistic function turn the new F into a new p. That is what keeps p between 0 and 1 however large the corrections add up.</a:t>
-            </a:r>
-          </a:p>
-          <a:p>
-            <a:pPr lvl="0" indent="0" marL="0">
-              <a:buNone/>
-            </a:pPr>
-          </a:p>
-          <a:p>
-            <a:pPr lvl="0" indent="0" marL="0">
-              <a:buNone/>
-            </a:pPr>
-            <a:r>
-              <a:rPr/>
-              <a:t>One detail, if someone has read scikit-learn’s source. The tree’s splits are chosen on y - p exactly as described. The number written in each leaf is then recomputed: the sum of y - p over the leaf divided by the sum of p(1 - p), one Newton step on the log-loss rather than the plain mean. The splits come from the residuals; the size of each step takes the curvature of the loss into account. Handout section 9 has it in one sentence; nothing in the lesson depends on it.</a:t>
-            </a:r>
-          </a:p>
-          <a:p>
-            <a:pPr lvl="0" indent="0" marL="0">
-              <a:buNone/>
-            </a:pPr>
-          </a:p>
-          <a:p>
-            <a:pPr lvl="0" indent="0" marL="0">
-              <a:buNone/>
-            </a:pPr>
-            <a:r>
-              <a:rPr/>
-              <a:t>Handout section 9.</a:t>
+              <a:t>Put a number on each curve of the previous slide. Twenty trees is the sweet spot; by sixty the error against the true, noise-free function has risen again, even though the ensemble is still adding trees that reduce error on the </a:t>
+            </a:r>
+            <a:r>
+              <a:rPr i="1"/>
+              <a:t>training</a:t>
+            </a:r>
+            <a:r>
+              <a:rPr/>
+              <a:t> residuals.</a:t>
+            </a:r>
+          </a:p>
+          <a:p>
+            <a:pPr lvl="0" indent="0" marL="0">
+              <a:buNone/>
+            </a:pPr>
+          </a:p>
+          <a:p>
+            <a:pPr lvl="0" indent="0" marL="0">
+              <a:buNone/>
+            </a:pPr>
+            <a:r>
+              <a:rPr/>
+              <a:t>Name what this is: the same overfitting story as the unconstrained single tree of the depth table, reached by a completely different route - not one tree grown too deep, but too many shallow trees each chasing whatever residual noise is left.</a:t>
+            </a:r>
+          </a:p>
+          <a:p>
+            <a:pPr lvl="0" indent="0" marL="0">
+              <a:buNone/>
+            </a:pPr>
+          </a:p>
+          <a:p>
+            <a:pPr lvl="0" indent="0" marL="0">
+              <a:buNone/>
+            </a:pPr>
+            <a:r>
+              <a:rPr/>
+              <a:t>Handout section 8.</a:t>
             </a:r>
           </a:p>
         </p:txBody>
@@ -5461,29 +5584,77 @@
             </a:pPr>
             <a:r>
               <a:rPr/>
-              <a:t>Give the number and let it sit against everything shown so far this lesson: 0.902, from a method run at scikit-learn’s defaults, no tuning at all. Ask the room to recall the single tuned tree’s number from the depth table, 0.882 at depth 8, and note that boosting has already passed it without being told anything about depth.</a:t>
-            </a:r>
-          </a:p>
-          <a:p>
-            <a:pPr lvl="0" indent="0" marL="0">
-              <a:buNone/>
-            </a:pPr>
-          </a:p>
-          <a:p>
-            <a:pPr lvl="0" indent="0" marL="0">
-              <a:buNone/>
-            </a:pPr>
-            <a:r>
-              <a:rPr/>
-              <a:t>The rest of this segment is what happens when boosting is </a:t>
-            </a:r>
-            <a:r>
-              <a:rPr i="1"/>
-              <a:t>not</a:t>
-            </a:r>
-            <a:r>
-              <a:rPr/>
-              <a:t> left at sensible defaults.</a:t>
+              <a:t>State the result, not the chain rule behind it - the handout carries the full derivative. What matters for this course is the connection: boosting for classification fits a sequence of small trees to y - p, one correction at a time, rather than adjusting a fixed set of linear coefficients against the same quantity in one continuous descent.</a:t>
+            </a:r>
+          </a:p>
+          <a:p>
+            <a:pPr lvl="0" indent="0" marL="0">
+              <a:buNone/>
+            </a:pPr>
+          </a:p>
+          <a:p>
+            <a:pPr lvl="0" indent="0" marL="0">
+              <a:buNone/>
+            </a:pPr>
+            <a:r>
+              <a:rPr/>
+              <a:t>Ask the room to name what’s genuinely different between this and lesson 4’s logistic regression, given they’re descending against the same quantity. The answer: lesson 4 moves a fixed number of coefficients; boosting adds entirely new trees, so the model’s structure itself grows with training rather than staying fixed.</a:t>
+            </a:r>
+          </a:p>
+          <a:p>
+            <a:pPr lvl="0" indent="0" marL="0">
+              <a:buNone/>
+            </a:pPr>
+          </a:p>
+          <a:p>
+            <a:pPr lvl="0" indent="0" marL="0">
+              <a:buNone/>
+            </a:pPr>
+            <a:r>
+              <a:rPr/>
+              <a:t>The sigma here is lesson 4’s logistic function, 1 / (1 + e^-F), not the sigma squared of the variance slides: the slide says so, say it aloud once too, since the same letter has just meant something else.</a:t>
+            </a:r>
+          </a:p>
+          <a:p>
+            <a:pPr lvl="0" indent="0" marL="0">
+              <a:buNone/>
+            </a:pPr>
+          </a:p>
+          <a:p>
+            <a:pPr lvl="0" indent="0" marL="0">
+              <a:buNone/>
+            </a:pPr>
+            <a:r>
+              <a:rPr/>
+              <a:t>Give them the first step in numbers, because it makes y - p concrete. The ensemble starts at the base rate’s log-odds: 464 of the 1,200 defaulted, so F0 = log(464 / 736) = -0.461, which the logistic function turns back into 0.387 for everyone. The first tree is fit to y - p: +0.613 for every applicant who defaulted, -0.387 for every one who repaid.</a:t>
+            </a:r>
+          </a:p>
+          <a:p>
+            <a:pPr lvl="0" indent="0" marL="0">
+              <a:buNone/>
+            </a:pPr>
+          </a:p>
+          <a:p>
+            <a:pPr lvl="0" indent="0" marL="0">
+              <a:buNone/>
+            </a:pPr>
+            <a:r>
+              <a:rPr/>
+              <a:t>A predictable slip: “so the update is p plus alpha times (y - p)”. It is reasonable, because y - p is a difference of probabilities. But the trees correct the score F, not p: F moves by alpha times the tree’s output, and only then does the logistic function turn the new F into a new p. That is what keeps p between 0 and 1 however large the corrections add up.</a:t>
+            </a:r>
+          </a:p>
+          <a:p>
+            <a:pPr lvl="0" indent="0" marL="0">
+              <a:buNone/>
+            </a:pPr>
+          </a:p>
+          <a:p>
+            <a:pPr lvl="0" indent="0" marL="0">
+              <a:buNone/>
+            </a:pPr>
+            <a:r>
+              <a:rPr/>
+              <a:t>One detail, if someone has read scikit-learn’s source. The tree’s splits are chosen on y - p exactly as described. The number written in each leaf is then recomputed: the sum of y - p over the leaf divided by the sum of p(1 - p), one Newton step on the log-loss rather than the plain mean. The splits come from the residuals; the size of each step takes the curvature of the loss into account. Handout section 9 has it in one sentence; nothing in the lesson depends on it.</a:t>
             </a:r>
           </a:p>
           <a:p>
@@ -5579,35 +5750,43 @@
             </a:pPr>
             <a:r>
               <a:rPr/>
-              <a:t>Unlike bagging, boosting keeps reducing its training loss for as long as it runs, because every new tree is built specifically to reduce what remains - including the 7% of labels that are noise by construction. There is nothing in the algorithm itself that says “stop”. Be exact about which quantity: the log-loss on the training data never goes up, while training accuracy only follows it on the whole - fit to all 1,200 applicants with 800 trees, it dips at a handful of individual steps, too small to show in this table (handout section 10).</a:t>
-            </a:r>
-          </a:p>
-          <a:p>
-            <a:pPr lvl="0" indent="0" marL="0">
-              <a:buNone/>
-            </a:pPr>
-          </a:p>
-          <a:p>
-            <a:pPr lvl="0" indent="0" marL="0">
-              <a:buNone/>
-            </a:pPr>
-            <a:r>
-              <a:rPr/>
-              <a:t>Point at the peak, 30 trees, and then at 800: training accuracy reached 1.000 by 200 trees and stayed there, and cross-validated accuracy has drifted down from 0.897 to 0.890, under a point, since the peak. Contrast the size of that drop with the unconstrained single tree of the depth table, which lost three points past its own peak - boosting’s overfitting is real but gentler.</a:t>
-            </a:r>
-          </a:p>
-          <a:p>
-            <a:pPr lvl="0" indent="0" marL="0">
-              <a:buNone/>
-            </a:pPr>
-          </a:p>
-          <a:p>
-            <a:pPr lvl="0" indent="0" marL="0">
-              <a:buNone/>
-            </a:pPr>
-            <a:r>
-              <a:rPr/>
-              <a:t>Handout section 10.</a:t>
+              <a:t>Give the number and let it sit against everything shown so far this lesson: 0.902, from a method run at scikit-learn’s defaults, no tuning at all. Ask the room to recall the single tuned tree’s number from the depth table, 0.882 at depth 8, and note that boosting has already passed it without being told anything about depth.</a:t>
+            </a:r>
+          </a:p>
+          <a:p>
+            <a:pPr lvl="0" indent="0" marL="0">
+              <a:buNone/>
+            </a:pPr>
+          </a:p>
+          <a:p>
+            <a:pPr lvl="0" indent="0" marL="0">
+              <a:buNone/>
+            </a:pPr>
+            <a:r>
+              <a:rPr/>
+              <a:t>The rest of this segment is what happens when boosting is </a:t>
+            </a:r>
+            <a:r>
+              <a:rPr i="1"/>
+              <a:t>not</a:t>
+            </a:r>
+            <a:r>
+              <a:rPr/>
+              <a:t> left at sensible defaults.</a:t>
+            </a:r>
+          </a:p>
+          <a:p>
+            <a:pPr lvl="0" indent="0" marL="0">
+              <a:buNone/>
+            </a:pPr>
+          </a:p>
+          <a:p>
+            <a:pPr lvl="0" indent="0" marL="0">
+              <a:buNone/>
+            </a:pPr>
+            <a:r>
+              <a:rPr/>
+              <a:t>Handout section 9.</a:t>
             </a:r>
           </a:p>
         </p:txBody>
@@ -5689,41 +5868,21 @@
             </a:pPr>
             <a:r>
               <a:rPr/>
-              <a:t>Two curves again, the same shape of story as the depth curve earlier this lesson but reached by adding trees instead of depth. Training reaches 1.000 by around 200 trees and sits there. Cross-validated accuracy climbs quickly, peaks near 30 trees, and drifts down over the following 770.</a:t>
-            </a:r>
-          </a:p>
-          <a:p>
-            <a:pPr lvl="0" indent="0" marL="0">
-              <a:buNone/>
-            </a:pPr>
-          </a:p>
-          <a:p>
-            <a:pPr lvl="0" indent="0" marL="0">
-              <a:buNone/>
-            </a:pPr>
-            <a:r>
-              <a:rPr/>
-              <a:t>The point worth making explicit: the damage per added tree here is small and easy to miss on a single run - which is why the number of trees has to be chosen on held-out data, never left to run, even though the overfit is gentler than a single unconstrained tree’s. There are two ways to choose it. This lesson cross-validated a list of tree counts and kept the best, 30. The other is early stopping, which the deck has not shown, so say what it is: set aside part of the training data, watch the score on it as trees are added, and stop once it has not improved for a number of rounds. In scikit-learn that is the </a:t>
-            </a:r>
-            <a:r>
-              <a:rPr>
-                <a:latin typeface="Courier"/>
-              </a:rPr>
-              <a:t>n_iter_no_change</a:t>
-            </a:r>
-            <a:r>
-              <a:rPr/>
-              <a:t> argument of </a:t>
-            </a:r>
-            <a:r>
-              <a:rPr>
-                <a:latin typeface="Courier"/>
-              </a:rPr>
-              <a:t>GradientBoostingClassifier</a:t>
-            </a:r>
-            <a:r>
-              <a:rPr/>
-              <a:t>.</a:t>
+              <a:t>Unlike bagging, boosting keeps reducing its training loss for as long as it runs, because every new tree is built specifically to reduce what remains - including the 7% of labels that are noise by construction. There is nothing in the algorithm itself that says “stop”. Be exact about which quantity: the log-loss on the training data never goes up, while training accuracy only follows it on the whole - fit to all 1,200 applicants with 800 trees, it dips at a handful of individual steps, too small to show in this table (handout section 10).</a:t>
+            </a:r>
+          </a:p>
+          <a:p>
+            <a:pPr lvl="0" indent="0" marL="0">
+              <a:buNone/>
+            </a:pPr>
+          </a:p>
+          <a:p>
+            <a:pPr lvl="0" indent="0" marL="0">
+              <a:buNone/>
+            </a:pPr>
+            <a:r>
+              <a:rPr/>
+              <a:t>Point at the peak, 30 trees, and then at 800: training accuracy reached 1.000 by 200 trees and stayed there, and cross-validated accuracy has drifted down from 0.897 to 0.890, under a point, since the peak. Contrast the size of that drop with the unconstrained single tree of the depth table, which lost three points past its own peak - boosting’s overfitting is real but gentler.</a:t>
             </a:r>
           </a:p>
           <a:p>
@@ -5943,43 +6102,41 @@
             </a:pPr>
             <a:r>
               <a:rPr/>
-              <a:t>Learning rate and tree count are not independent - both control how much total correction the ensemble applies, so they trade off against each other. At α = 0.02, 120 trees haven’t finished fitting the signal: training accuracy is still under 0.89. At α = 1.00, the ensemble has memorised the training set completely and given back more than two points of cross-validated accuracy for it, 0.902 down to 0.878.</a:t>
-            </a:r>
-          </a:p>
-          <a:p>
-            <a:pPr lvl="0" indent="0" marL="0">
-              <a:buNone/>
-            </a:pPr>
-          </a:p>
-          <a:p>
-            <a:pPr lvl="0" indent="0" marL="0">
-              <a:buNone/>
-            </a:pPr>
-            <a:r>
-              <a:rPr/>
-              <a:t>The best setting sits in between - large enough to make real progress within the tree budget, small enough that any one correction is easy to outvote if it turns out to be wrong. Ask the room which direction they’d guess is “more regularised” before revealing that it’s the </a:t>
-            </a:r>
-            <a:r>
-              <a:rPr i="1"/>
-              <a:t>small</a:t>
-            </a:r>
-            <a:r>
-              <a:rPr/>
-              <a:t> α side, the same kind of inverted-direction trap lesson 6’s C was.</a:t>
-            </a:r>
-          </a:p>
-          <a:p>
-            <a:pPr lvl="0" indent="0" marL="0">
-              <a:buNone/>
-            </a:pPr>
-          </a:p>
-          <a:p>
-            <a:pPr lvl="0" indent="0" marL="0">
-              <a:buNone/>
-            </a:pPr>
-            <a:r>
-              <a:rPr/>
-              <a:t>A predictable slip: “only alpha times the number of trees matters, so half the learning rate with twice the trees gives the same model”. It is reasonable - the notes above just said both knobs set the total correction. But they are not interchangeable: each tree is fit to what the ensemble before it still gets wrong, so many small steps follow a different path from a few large ones. A large step overshoots on the noisy labels and the next trees spend themselves undoing it; a small step lets later trees outvote an early mistake. The trade-off is real, the equivalence is not.</a:t>
+              <a:t>Two curves again, the same shape of story as the depth curve earlier this lesson but reached by adding trees instead of depth. Training reaches 1.000 by around 200 trees and sits there. Cross-validated accuracy climbs quickly, peaks near 30 trees, and drifts down over the following 770.</a:t>
+            </a:r>
+          </a:p>
+          <a:p>
+            <a:pPr lvl="0" indent="0" marL="0">
+              <a:buNone/>
+            </a:pPr>
+          </a:p>
+          <a:p>
+            <a:pPr lvl="0" indent="0" marL="0">
+              <a:buNone/>
+            </a:pPr>
+            <a:r>
+              <a:rPr/>
+              <a:t>The point worth making explicit: the damage per added tree here is small and easy to miss on a single run - which is why the number of trees has to be chosen on held-out data, never left to run, even though the overfit is gentler than a single unconstrained tree’s. There are two ways to choose it. This lesson cross-validated a list of tree counts and kept the best, 30. The other is early stopping, which the deck has not shown, so say what it is: set aside part of the training data, watch the score on it as trees are added, and stop once it has not improved for a number of rounds. In scikit-learn that is the </a:t>
+            </a:r>
+            <a:r>
+              <a:rPr>
+                <a:latin typeface="Courier"/>
+              </a:rPr>
+              <a:t>n_iter_no_change</a:t>
+            </a:r>
+            <a:r>
+              <a:rPr/>
+              <a:t> argument of </a:t>
+            </a:r>
+            <a:r>
+              <a:rPr>
+                <a:latin typeface="Courier"/>
+              </a:rPr>
+              <a:t>GradientBoostingClassifier</a:t>
+            </a:r>
+            <a:r>
+              <a:rPr/>
+              <a:t>.</a:t>
             </a:r>
           </a:p>
           <a:p>
@@ -6075,49 +6232,57 @@
             </a:pPr>
             <a:r>
               <a:rPr/>
-              <a:t>The table is the notebook’s map: boosting from scratch on the residuals, then scikit-learn’s classifier, the tree-count and learning-rate sweeps, and the leaderboard of the next slide.</a:t>
-            </a:r>
-          </a:p>
-          <a:p>
-            <a:pPr lvl="0" indent="0" marL="0">
-              <a:buNone/>
-            </a:pPr>
-          </a:p>
-          <a:p>
-            <a:pPr lvl="0" indent="0" marL="0">
-              <a:buNone/>
-            </a:pPr>
-            <a:r>
-              <a:rPr/>
-              <a:t>Run Notebooks/03_gradient_boosting.ipynb. Eighteen minutes.</a:t>
-            </a:r>
-          </a:p>
-          <a:p>
-            <a:pPr lvl="0" indent="0" marL="0">
-              <a:buNone/>
-            </a:pPr>
-          </a:p>
-          <a:p>
-            <a:pPr lvl="0" indent="0" marL="0">
-              <a:buNone/>
-            </a:pPr>
-            <a:r>
-              <a:rPr/>
-              <a:t>The cell to protect is the residual sweep at 1, 5, 20 and 60 trees - seeing the ensemble’s fit against the true function rise and then fall again, in real time, is the most direct experience of boosting’s overfitting available in this course.</a:t>
-            </a:r>
-          </a:p>
-          <a:p>
-            <a:pPr lvl="0" indent="0" marL="0">
-              <a:buNone/>
-            </a:pPr>
-          </a:p>
-          <a:p>
-            <a:pPr lvl="0" indent="0" marL="0">
-              <a:buNone/>
-            </a:pPr>
-            <a:r>
-              <a:rPr/>
-              <a:t>If time is short, skip the learning-rate sweep live and set it as reading - the table is in handout section 10.</a:t>
+              <a:t>Learning rate and tree count are not independent - both control how much total correction the ensemble applies, so they trade off against each other. At α = 0.02, 120 trees haven’t finished fitting the signal: training accuracy is still under 0.89. At α = 1.00, the ensemble has memorised the training set completely and given back more than two points of cross-validated accuracy for it, 0.902 down to 0.878.</a:t>
+            </a:r>
+          </a:p>
+          <a:p>
+            <a:pPr lvl="0" indent="0" marL="0">
+              <a:buNone/>
+            </a:pPr>
+          </a:p>
+          <a:p>
+            <a:pPr lvl="0" indent="0" marL="0">
+              <a:buNone/>
+            </a:pPr>
+            <a:r>
+              <a:rPr/>
+              <a:t>The best setting sits in between - large enough to make real progress within the tree budget, small enough that any one correction is easy to outvote if it turns out to be wrong. Ask the room which direction they’d guess is “more regularised” before revealing that it’s the </a:t>
+            </a:r>
+            <a:r>
+              <a:rPr i="1"/>
+              <a:t>small</a:t>
+            </a:r>
+            <a:r>
+              <a:rPr/>
+              <a:t> α side, the same kind of inverted-direction trap lesson 6’s C was.</a:t>
+            </a:r>
+          </a:p>
+          <a:p>
+            <a:pPr lvl="0" indent="0" marL="0">
+              <a:buNone/>
+            </a:pPr>
+          </a:p>
+          <a:p>
+            <a:pPr lvl="0" indent="0" marL="0">
+              <a:buNone/>
+            </a:pPr>
+            <a:r>
+              <a:rPr/>
+              <a:t>A predictable slip: “only alpha times the number of trees matters, so half the learning rate with twice the trees gives the same model”. It is reasonable - the notes above just said both knobs set the total correction. But they are not interchangeable: each tree is fit to what the ensemble before it still gets wrong, so many small steps follow a different path from a few large ones. A large step overshoots on the noisy labels and the next trees spend themselves undoing it; a small step lets later trees outvote an early mistake. The trade-off is real, the equivalence is not.</a:t>
+            </a:r>
+          </a:p>
+          <a:p>
+            <a:pPr lvl="0" indent="0" marL="0">
+              <a:buNone/>
+            </a:pPr>
+          </a:p>
+          <a:p>
+            <a:pPr lvl="0" indent="0" marL="0">
+              <a:buNone/>
+            </a:pPr>
+            <a:r>
+              <a:rPr/>
+              <a:t>Handout section 10.</a:t>
             </a:r>
           </a:p>
         </p:txBody>
@@ -6199,49 +6364,49 @@
             </a:pPr>
             <a:r>
               <a:rPr/>
-              <a:t>Everything from this lesson, cross-validated the same way. Read down the column and let the pattern speak before naming it: every ensemble method - bagging, the random forest, gradient boosting - lands within about a point and a half of the others, and all three sit closer to the ceiling than either single tree.</a:t>
-            </a:r>
-          </a:p>
-          <a:p>
-            <a:pPr lvl="0" indent="0" marL="0">
-              <a:buNone/>
-            </a:pPr>
-          </a:p>
-          <a:p>
-            <a:pPr lvl="0" indent="0" marL="0">
-              <a:buNone/>
-            </a:pPr>
-            <a:r>
-              <a:rPr/>
-              <a:t>The ceiling itself: 1 minus the 7% of labels deliberately flipped. No method reaches it, and none should - a model that classified the flipped labels “correctly” would be modelling the noise, not the rule.</a:t>
-            </a:r>
-          </a:p>
-          <a:p>
-            <a:pPr lvl="0" indent="0" marL="0">
-              <a:buNone/>
-            </a:pPr>
-          </a:p>
-          <a:p>
-            <a:pPr lvl="0" indent="0" marL="0">
-              <a:buNone/>
-            </a:pPr>
-            <a:r>
-              <a:rPr/>
-              <a:t>One honest caveat, in lesson 5’s terms. The depth of 8 and the 30 boosted trees were picked because they scored best on these same five folds, so those two rows are slightly optimistic; nested cross-validation would remove that. Bagging and the random forest ran at their defaults, chose nothing, and are not affected - and they are still on top.</a:t>
-            </a:r>
-          </a:p>
-          <a:p>
-            <a:pPr lvl="0" indent="0" marL="0">
-              <a:buNone/>
-            </a:pPr>
-          </a:p>
-          <a:p>
-            <a:pPr lvl="0" indent="0" marL="0">
-              <a:buNone/>
-            </a:pPr>
-            <a:r>
-              <a:rPr/>
-              <a:t>Handout section 11.</a:t>
+              <a:t>The table is the notebook’s map: boosting from scratch on the residuals, then scikit-learn’s classifier, the tree-count and learning-rate sweeps, and the leaderboard of the next slide.</a:t>
+            </a:r>
+          </a:p>
+          <a:p>
+            <a:pPr lvl="0" indent="0" marL="0">
+              <a:buNone/>
+            </a:pPr>
+          </a:p>
+          <a:p>
+            <a:pPr lvl="0" indent="0" marL="0">
+              <a:buNone/>
+            </a:pPr>
+            <a:r>
+              <a:rPr/>
+              <a:t>Run Notebooks/03_gradient_boosting.ipynb. Eighteen minutes.</a:t>
+            </a:r>
+          </a:p>
+          <a:p>
+            <a:pPr lvl="0" indent="0" marL="0">
+              <a:buNone/>
+            </a:pPr>
+          </a:p>
+          <a:p>
+            <a:pPr lvl="0" indent="0" marL="0">
+              <a:buNone/>
+            </a:pPr>
+            <a:r>
+              <a:rPr/>
+              <a:t>The cell to protect is the residual sweep at 1, 5, 20 and 60 trees - seeing the ensemble’s fit against the true function rise and then fall again, in real time, is the most direct experience of boosting’s overfitting available in this course.</a:t>
+            </a:r>
+          </a:p>
+          <a:p>
+            <a:pPr lvl="0" indent="0" marL="0">
+              <a:buNone/>
+            </a:pPr>
+          </a:p>
+          <a:p>
+            <a:pPr lvl="0" indent="0" marL="0">
+              <a:buNone/>
+            </a:pPr>
+            <a:r>
+              <a:rPr/>
+              <a:t>If time is short, skip the learning-rate sweep live and set it as reading - the table is in handout section 10.</a:t>
             </a:r>
           </a:p>
         </p:txBody>
@@ -6323,21 +6488,35 @@
             </a:pPr>
             <a:r>
               <a:rPr/>
-              <a:t>Read the three findings as a set - together they are this lesson’s real content, more than any single accuracy number.</a:t>
-            </a:r>
-          </a:p>
-          <a:p>
-            <a:pPr lvl="0" indent="0" marL="0">
-              <a:buNone/>
-            </a:pPr>
-          </a:p>
-          <a:p>
-            <a:pPr lvl="0" indent="0" marL="0">
-              <a:buNone/>
-            </a:pPr>
-            <a:r>
-              <a:rPr/>
-              <a:t>The third finding is the one to land hardest, because it repeats a pattern they have now seen with several different methods: flexibility without a stopping rule is not an advantage. Ask the room to name the earlier occurrences before you do - the degree-12 polynomial in lesson 3, k = 1 in lesson 6, and, earlier today, the boosted ensemble that kept adding trees past its peak.</a:t>
+              <a:t>Everything from this lesson, cross-validated the same way. Read down the column and let the pattern speak before naming it: the ensembles - bagging, the random forest, gradient boosting - land within about a point and a half of each other, the random forest on top. And one single tree sits among them: the nine-leaf tree of slide 25, at 0.901, above gradient boosting and a point behind bagging. On this dataset that is no accident - the rule is made of axis-aligned rectangles, the shape a few well-placed thresholds draw.</a:t>
+            </a:r>
+          </a:p>
+          <a:p>
+            <a:pPr lvl="0" indent="0" marL="0">
+              <a:buNone/>
+            </a:pPr>
+          </a:p>
+          <a:p>
+            <a:pPr lvl="0" indent="0" marL="0">
+              <a:buNone/>
+            </a:pPr>
+            <a:r>
+              <a:rPr/>
+              <a:t>The ceiling itself: 1 minus the 7% of labels deliberately flipped. No method reaches it, and none should - a model that classified the flipped labels “correctly” would be modelling the noise, not the rule.</a:t>
+            </a:r>
+          </a:p>
+          <a:p>
+            <a:pPr lvl="0" indent="0" marL="0">
+              <a:buNone/>
+            </a:pPr>
+          </a:p>
+          <a:p>
+            <a:pPr lvl="0" indent="0" marL="0">
+              <a:buNone/>
+            </a:pPr>
+            <a:r>
+              <a:rPr/>
+              <a:t>One honest caveat, in lesson 5’s terms. The depth of 8 and the 30 boosted trees were picked because they scored best on these same five folds, so those two rows are slightly optimistic; nested cross-validation would remove that. Bagging and the random forest ran at their defaults, chose nothing, and are not affected - and they are still on top. The nine leaves were chosen for readability, not on these folds.</a:t>
             </a:r>
           </a:p>
           <a:p>
@@ -6433,21 +6612,35 @@
             </a:pPr>
             <a:r>
               <a:rPr/>
-              <a:t>A table to photograph, exactly as lesson 6 closed with one. Work down it and attach today’s evidence to each row rather than leaving it as generic advice: the nine-leaf tree for the first row, the leaderboard for the second, the tree-count and learning-rate tables for the third, the noise experiment for the fourth, the out-of-bag slide for the fifth.</a:t>
-            </a:r>
-          </a:p>
-          <a:p>
-            <a:pPr lvl="0" indent="0" marL="0">
-              <a:buNone/>
-            </a:pPr>
-          </a:p>
-          <a:p>
-            <a:pPr lvl="0" indent="0" marL="0">
-              <a:buNone/>
-            </a:pPr>
-            <a:r>
-              <a:rPr/>
-              <a:t>The fourth row is worth a sentence of its own, tying back to the noise experiment: with two real features among 22 columns and 1,200 rows, more than half the importance already landed on noise. Many rows do not protect against it; what matters is how many useless columns compete at each split. Permutation importance, the check, was slide 40; the next slide comes back to it.</a:t>
+              <a:t>Read the three findings as a set - together they are this lesson’s real content, more than any single accuracy number.</a:t>
+            </a:r>
+          </a:p>
+          <a:p>
+            <a:pPr lvl="0" indent="0" marL="0">
+              <a:buNone/>
+            </a:pPr>
+          </a:p>
+          <a:p>
+            <a:pPr lvl="0" indent="0" marL="0">
+              <a:buNone/>
+            </a:pPr>
+            <a:r>
+              <a:rPr/>
+              <a:t>The second finding is the honest surprise. The ensembles were not built to score higher than a well-budgeted tree on data made of rectangles - here they barely do. What they buy is steadiness: notebook 2 measured how much less a forest’s score moves from one split of the data to another than a single tree’s, and slide 27 showed where a single tree’s verdicts wobble.</a:t>
+            </a:r>
+          </a:p>
+          <a:p>
+            <a:pPr lvl="0" indent="0" marL="0">
+              <a:buNone/>
+            </a:pPr>
+          </a:p>
+          <a:p>
+            <a:pPr lvl="0" indent="0" marL="0">
+              <a:buNone/>
+            </a:pPr>
+            <a:r>
+              <a:rPr/>
+              <a:t>The third finding is the one to land hardest, because it repeats a pattern they have now seen with several different methods: flexibility without a stopping rule is not an advantage. Ask the room to name the earlier occurrences before you do - the degree-12 polynomial in lesson 3, k = 1 in lesson 6, and, earlier today, the boosted ensemble that kept adding trees past its peak.</a:t>
             </a:r>
           </a:p>
           <a:p>
@@ -6543,115 +6736,35 @@
             </a:pPr>
             <a:r>
               <a:rPr/>
-              <a:t>This is the number to carry out of the room. Say it once more, slowly: with twenty pure-noise columns against two real features, more than half of a random forest’s importance mass sat on columns wired to nothing.</a:t>
-            </a:r>
-          </a:p>
-          <a:p>
-            <a:pPr lvl="0" indent="0" marL="0">
-              <a:buNone/>
-            </a:pPr>
-          </a:p>
-          <a:p>
-            <a:pPr lvl="0" indent="0" marL="0">
-              <a:buNone/>
-            </a:pPr>
-            <a:r>
-              <a:rPr/>
-              <a:t>Ask them to write it down - derivations fade, this kind of number tends not to. Every lesson so far has left one of these - lesson 1’s 77% accuracy on coin-flip labels, lesson 3’s coefficient of 365 where an unpenalised fit wanted billions - and this is lesson 7’s.</a:t>
-            </a:r>
-          </a:p>
-          <a:p>
-            <a:pPr lvl="0" indent="0" marL="0">
-              <a:buNone/>
-            </a:pPr>
-          </a:p>
-          <a:p>
-            <a:pPr lvl="0" indent="0" marL="0">
-              <a:buNone/>
-            </a:pPr>
-            <a:r>
-              <a:rPr/>
-              <a:t>The second and third bullets are the mechanism, and there are two causes, not one. Take them in order.</a:t>
-            </a:r>
-          </a:p>
-          <a:p>
-            <a:pPr lvl="0" indent="0" marL="0">
-              <a:buNone/>
-            </a:pPr>
-          </a:p>
-          <a:p>
-            <a:pPr lvl="0" indent="0" marL="0">
-              <a:buNone/>
-            </a:pPr>
-            <a:r>
-              <a:rPr/>
-              <a:t>The menu. The square root of 22, rounded down, is 4, so each split chooses among 4 random columns. The chance that all 4 come from the 20 noise columns is 4,845 / 7,315 = 0.662: two splits in three offer no real feature. At those splits the tree still has to pick something, and it picks the noise column that happens to separate the classes best.</a:t>
-            </a:r>
-          </a:p>
-          <a:p>
-            <a:pPr lvl="0" indent="0" marL="0">
-              <a:buNone/>
-            </a:pPr>
-          </a:p>
-          <a:p>
-            <a:pPr lvl="0" indent="0" marL="0">
-              <a:buNone/>
-            </a:pPr>
-            <a:r>
-              <a:rPr/>
-              <a:t>Small groups. The menu is not the whole story, and notebook 2 shows it: with </a:t>
-            </a:r>
-            <a:r>
-              <a:rPr>
-                <a:latin typeface="Courier"/>
-              </a:rPr>
-              <a:t>max_features=None</a:t>
-            </a:r>
-            <a:r>
-              <a:rPr/>
-              <a:t>, every split offered all 22 columns, the noise share falls from 54.5% to 28%, not to zero. Deep in a tree a node holds a handful of applicants, and among twenty columns of random numbers one will almost always separate a handful of applicants a little better than income or debt can, purely by chance. Every such split credits noise.</a:t>
-            </a:r>
-          </a:p>
-          <a:p>
-            <a:pPr lvl="0" indent="0" marL="0">
-              <a:buNone/>
-            </a:pPr>
-          </a:p>
-          <a:p>
-            <a:pPr lvl="0" indent="0" marL="0">
-              <a:buNone/>
-            </a:pPr>
-            <a:r>
-              <a:rPr/>
-              <a:t>Most will predict the noise share falls to zero with the full menu, and the reasoning is sound as far as it goes - a real feature is now always there to be chosen near the root. It is the bottom of the trees that it misses. The same run raised the accuracy from 0.837 to 0.897: with 20 useless columns out of 22, the random menu costs more accuracy than decorrelating the trees buys back. The default is a good default, not a law.</a:t>
-            </a:r>
-          </a:p>
-          <a:p>
-            <a:pPr lvl="0" indent="0" marL="0">
-              <a:buNone/>
-            </a:pPr>
-          </a:p>
-          <a:p>
-            <a:pPr lvl="0" indent="0" marL="0">
-              <a:buNone/>
-            </a:pPr>
-            <a:r>
-              <a:rPr/>
-              <a:t>The last bullet sends them back to the check of slide 40: shuffling a column on held-out data costs the two real features 0.09 and 0.18 of accuracy, and each noise column almost nothing.</a:t>
-            </a:r>
-          </a:p>
-          <a:p>
-            <a:pPr lvl="0" indent="0" marL="0">
-              <a:buNone/>
-            </a:pPr>
-          </a:p>
-          <a:p>
-            <a:pPr lvl="0" indent="0" marL="0">
-              <a:buNone/>
-            </a:pPr>
-            <a:r>
-              <a:rPr/>
-              <a:t>Handout section 7 has the full mechanism.</a:t>
+              <a:t>A table to photograph, exactly as lesson 6 closed with one. Work down it and attach today’s evidence to each row rather than leaving it as generic advice: the nine-leaf tree for the first row, the leaderboard for the second, the tree-count and learning-rate tables for the third, the noise experiment for the fourth, the out-of-bag slide for the fifth.</a:t>
+            </a:r>
+          </a:p>
+          <a:p>
+            <a:pPr lvl="0" indent="0" marL="0">
+              <a:buNone/>
+            </a:pPr>
+          </a:p>
+          <a:p>
+            <a:pPr lvl="0" indent="0" marL="0">
+              <a:buNone/>
+            </a:pPr>
+            <a:r>
+              <a:rPr/>
+              <a:t>The fourth row is worth a sentence of its own, tying back to the noise experiment: with two real features among 22 columns and 1,200 rows, more than half the importance already landed on noise. Many rows do not protect against it; what matters is how many useless columns compete at each split. Permutation importance, the check, was slide 41; the next slide comes back to it.</a:t>
+            </a:r>
+          </a:p>
+          <a:p>
+            <a:pPr lvl="0" indent="0" marL="0">
+              <a:buNone/>
+            </a:pPr>
+          </a:p>
+          <a:p>
+            <a:pPr lvl="0" indent="0" marL="0">
+              <a:buNone/>
+            </a:pPr>
+            <a:r>
+              <a:rPr/>
+              <a:t>Handout section 11.</a:t>
             </a:r>
           </a:p>
         </p:txBody>
@@ -6733,49 +6846,115 @@
             </a:pPr>
             <a:r>
               <a:rPr/>
-              <a:t>Close on the same shape as lesson 6’s summary: a handful of numbers that carry the lesson’s argument without needing the mathematics behind them re-derived.</a:t>
-            </a:r>
-          </a:p>
-          <a:p>
-            <a:pPr lvl="0" indent="0" marL="0">
-              <a:buNone/>
-            </a:pPr>
-          </a:p>
-          <a:p>
-            <a:pPr lvl="0" indent="0" marL="0">
-              <a:buNone/>
-            </a:pPr>
-            <a:r>
-              <a:rPr/>
-              <a:t>If they remember one habit from today, make it this: before trusting a random forest’s importance ranking, ask how many of the columns could plausibly matter at all - many useless columns are what hand credit to noise, and the accuracy score gives no warning - and then check the ranking by shuffling on held-out data, as slide 40 did.</a:t>
-            </a:r>
-          </a:p>
-          <a:p>
-            <a:pPr lvl="0" indent="0" marL="0">
-              <a:buNone/>
-            </a:pPr>
-          </a:p>
-          <a:p>
-            <a:pPr lvl="0" indent="0" marL="0">
-              <a:buNone/>
-            </a:pPr>
-            <a:r>
-              <a:rPr/>
-              <a:t>Next lesson turns from labelled data to unlabelled data. Every model so far learned from examples whose answer was known: a price, a class, a default. Lesson 8 asks what structure there is in data when nobody has given the answer at all.</a:t>
-            </a:r>
-          </a:p>
-          <a:p>
-            <a:pPr lvl="0" indent="0" marL="0">
-              <a:buNone/>
-            </a:pPr>
-          </a:p>
-          <a:p>
-            <a:pPr lvl="0" indent="0" marL="0">
-              <a:buNone/>
-            </a:pPr>
-            <a:r>
-              <a:rPr/>
-              <a:t>Handout summary and notation table.</a:t>
+              <a:t>This is the number to carry out of the room. Say it once more, slowly: with twenty pure-noise columns against two real features, more than half of a random forest’s importance mass sat on columns wired to nothing.</a:t>
+            </a:r>
+          </a:p>
+          <a:p>
+            <a:pPr lvl="0" indent="0" marL="0">
+              <a:buNone/>
+            </a:pPr>
+          </a:p>
+          <a:p>
+            <a:pPr lvl="0" indent="0" marL="0">
+              <a:buNone/>
+            </a:pPr>
+            <a:r>
+              <a:rPr/>
+              <a:t>Ask them to write it down - derivations fade, this kind of number tends not to. Every lesson so far has left one of these - lesson 1’s 77% accuracy on coin-flip labels, lesson 3’s coefficient of 365 where an unpenalised fit wanted billions - and this is lesson 7’s.</a:t>
+            </a:r>
+          </a:p>
+          <a:p>
+            <a:pPr lvl="0" indent="0" marL="0">
+              <a:buNone/>
+            </a:pPr>
+          </a:p>
+          <a:p>
+            <a:pPr lvl="0" indent="0" marL="0">
+              <a:buNone/>
+            </a:pPr>
+            <a:r>
+              <a:rPr/>
+              <a:t>The second and third bullets are the mechanism, and there are two causes, not one. Take them in order.</a:t>
+            </a:r>
+          </a:p>
+          <a:p>
+            <a:pPr lvl="0" indent="0" marL="0">
+              <a:buNone/>
+            </a:pPr>
+          </a:p>
+          <a:p>
+            <a:pPr lvl="0" indent="0" marL="0">
+              <a:buNone/>
+            </a:pPr>
+            <a:r>
+              <a:rPr/>
+              <a:t>The menu. The square root of 22, rounded down, is 4, so each split chooses among 4 random columns. The chance that all 4 come from the 20 noise columns is 4,845 / 7,315 = 0.662: two splits in three offer no real feature. At those splits the tree still has to pick something, and it picks the noise column that happens to separate the classes best.</a:t>
+            </a:r>
+          </a:p>
+          <a:p>
+            <a:pPr lvl="0" indent="0" marL="0">
+              <a:buNone/>
+            </a:pPr>
+          </a:p>
+          <a:p>
+            <a:pPr lvl="0" indent="0" marL="0">
+              <a:buNone/>
+            </a:pPr>
+            <a:r>
+              <a:rPr/>
+              <a:t>Small groups. The menu is not the whole story, and notebook 2 shows it: with </a:t>
+            </a:r>
+            <a:r>
+              <a:rPr>
+                <a:latin typeface="Courier"/>
+              </a:rPr>
+              <a:t>max_features=None</a:t>
+            </a:r>
+            <a:r>
+              <a:rPr/>
+              <a:t>, every split offered all 22 columns, the noise share falls from 54.5% to 28%, not to zero. Deep in a tree a node holds a handful of applicants, and among twenty columns of random numbers one will almost always separate a handful of applicants a little better than income or debt can, purely by chance. Every such split credits noise.</a:t>
+            </a:r>
+          </a:p>
+          <a:p>
+            <a:pPr lvl="0" indent="0" marL="0">
+              <a:buNone/>
+            </a:pPr>
+          </a:p>
+          <a:p>
+            <a:pPr lvl="0" indent="0" marL="0">
+              <a:buNone/>
+            </a:pPr>
+            <a:r>
+              <a:rPr/>
+              <a:t>Most will predict the noise share falls to zero with the full menu, and the reasoning is sound as far as it goes - a real feature is now always there to be chosen near the root. It is the bottom of the trees that it misses. The same run raised the accuracy from 0.837 to 0.897: with 20 useless columns out of 22, the random menu costs more accuracy than decorrelating the trees buys back. The default is a good default, not a law.</a:t>
+            </a:r>
+          </a:p>
+          <a:p>
+            <a:pPr lvl="0" indent="0" marL="0">
+              <a:buNone/>
+            </a:pPr>
+          </a:p>
+          <a:p>
+            <a:pPr lvl="0" indent="0" marL="0">
+              <a:buNone/>
+            </a:pPr>
+            <a:r>
+              <a:rPr/>
+              <a:t>The last bullet sends them back to the check of slide 41: shuffling a column on held-out data costs the two real features 0.09 and 0.18 of accuracy, and each noise column almost nothing.</a:t>
+            </a:r>
+          </a:p>
+          <a:p>
+            <a:pPr lvl="0" indent="0" marL="0">
+              <a:buNone/>
+            </a:pPr>
+          </a:p>
+          <a:p>
+            <a:pPr lvl="0" indent="0" marL="0">
+              <a:buNone/>
+            </a:pPr>
+            <a:r>
+              <a:rPr/>
+              <a:t>Handout section 7 has the full mechanism.</a:t>
             </a:r>
           </a:p>
         </p:txBody>
@@ -6857,35 +7036,49 @@
             </a:pPr>
             <a:r>
               <a:rPr/>
-              <a:t>Set it explicitly and say out loud when it comes back: the first ten minutes of lesson 8, Friday 27 November.</a:t>
-            </a:r>
-          </a:p>
-          <a:p>
-            <a:pPr lvl="0" indent="0" marL="0">
-              <a:buNone/>
-            </a:pPr>
-          </a:p>
-          <a:p>
-            <a:pPr lvl="0" indent="0" marL="0">
-              <a:buNone/>
-            </a:pPr>
-            <a:r>
-              <a:rPr/>
-              <a:t>Remind them of the standing rule from lesson 5: every reported number needs a cross-validated spread, and any feature-importance claim needs the check this lesson just demonstrated - a random forest’s importance ranking is a claim to be verified, not a fact to be quoted.</a:t>
-            </a:r>
-          </a:p>
-          <a:p>
-            <a:pPr lvl="0" indent="0" marL="0">
-              <a:buNone/>
-            </a:pPr>
-          </a:p>
-          <a:p>
-            <a:pPr lvl="0" indent="0" marL="0">
-              <a:buNone/>
-            </a:pPr>
-            <a:r>
-              <a:rPr/>
-              <a:t>Next week: unsupervised learning, the first lesson in which the data comes with no labels at all.</a:t>
+              <a:t>Close on the same shape as lesson 6’s summary: a handful of numbers that carry the lesson’s argument without needing the mathematics behind them re-derived.</a:t>
+            </a:r>
+          </a:p>
+          <a:p>
+            <a:pPr lvl="0" indent="0" marL="0">
+              <a:buNone/>
+            </a:pPr>
+          </a:p>
+          <a:p>
+            <a:pPr lvl="0" indent="0" marL="0">
+              <a:buNone/>
+            </a:pPr>
+            <a:r>
+              <a:rPr/>
+              <a:t>If they remember one habit from today, make it this: before trusting a random forest’s importance ranking, ask how many of the columns could plausibly matter at all - many useless columns are what hand credit to noise, and the accuracy score gives no warning - and then check the ranking by shuffling on held-out data, as slide 41 did.</a:t>
+            </a:r>
+          </a:p>
+          <a:p>
+            <a:pPr lvl="0" indent="0" marL="0">
+              <a:buNone/>
+            </a:pPr>
+          </a:p>
+          <a:p>
+            <a:pPr lvl="0" indent="0" marL="0">
+              <a:buNone/>
+            </a:pPr>
+            <a:r>
+              <a:rPr/>
+              <a:t>Next lesson turns from labelled data to unlabelled data. Every model so far learned from examples whose answer was known: a price, a class, a default. Lesson 8 asks what structure there is in data when nobody has given the answer at all.</a:t>
+            </a:r>
+          </a:p>
+          <a:p>
+            <a:pPr lvl="0" indent="0" marL="0">
+              <a:buNone/>
+            </a:pPr>
+          </a:p>
+          <a:p>
+            <a:pPr lvl="0" indent="0" marL="0">
+              <a:buNone/>
+            </a:pPr>
+            <a:r>
+              <a:rPr/>
+              <a:t>Handout summary and notation table.</a:t>
             </a:r>
           </a:p>
         </p:txBody>
@@ -6908,6 +7101,116 @@
             <a:fld id="{18BDFEC3-8487-43E8-A154-7C12CBC1FFF2}" type="slidenum">
               <a:rPr lang="en-US"/>
               <a:t>58</a:t>
+            </a:fld>
+            <a:endParaRPr lang="en-US"/>
+          </a:p>
+        </p:txBody>
+      </p:sp>
+    </p:spTree>
+  </p:cSld>
+</p:notes>
+</file>
+
+<file path=ppt/notesSlides/notesSlide58.xml><?xml version="1.0" encoding="utf-8"?>
+<p:notes xmlns:a="http://schemas.openxmlformats.org/drawingml/2006/main" xmlns:r="http://schemas.openxmlformats.org/officeDocument/2006/relationships" xmlns:p="http://schemas.openxmlformats.org/presentationml/2006/main">
+  <p:cSld>
+    <p:spTree>
+      <p:nvGrpSpPr>
+        <p:cNvPr id="1" name=""/>
+        <p:cNvGrpSpPr/>
+        <p:nvPr/>
+      </p:nvGrpSpPr>
+      <p:grpSpPr>
+        <a:xfrm>
+          <a:off x="0" y="0"/>
+          <a:ext cx="0" cy="0"/>
+          <a:chOff x="0" y="0"/>
+          <a:chExt cx="0" cy="0"/>
+        </a:xfrm>
+      </p:grpSpPr>
+      <p:sp>
+        <p:nvSpPr>
+          <p:cNvPr id="2" name="Slide Image Placeholder 1"/>
+          <p:cNvSpPr>
+            <a:spLocks noGrp="1" noRot="1" noChangeAspect="1"/>
+          </p:cNvSpPr>
+          <p:nvPr>
+            <p:ph type="sldImg"/>
+          </p:nvPr>
+        </p:nvSpPr>
+        <p:spPr/>
+      </p:sp>
+      <p:sp>
+        <p:nvSpPr>
+          <p:cNvPr id="3" name="Notes Placeholder 2"/>
+          <p:cNvSpPr>
+            <a:spLocks noGrp="1"/>
+          </p:cNvSpPr>
+          <p:nvPr>
+            <p:ph type="body" idx="1"/>
+          </p:nvPr>
+        </p:nvSpPr>
+        <p:spPr/>
+        <p:txBody>
+          <a:bodyPr/>
+          <a:lstStyle/>
+          <a:p>
+            <a:pPr lvl="0" indent="0" marL="0">
+              <a:buNone/>
+            </a:pPr>
+            <a:r>
+              <a:rPr/>
+              <a:t>Set it explicitly and say out loud when it comes back: the first ten minutes of lesson 8, Friday 27 November.</a:t>
+            </a:r>
+          </a:p>
+          <a:p>
+            <a:pPr lvl="0" indent="0" marL="0">
+              <a:buNone/>
+            </a:pPr>
+          </a:p>
+          <a:p>
+            <a:pPr lvl="0" indent="0" marL="0">
+              <a:buNone/>
+            </a:pPr>
+            <a:r>
+              <a:rPr/>
+              <a:t>Remind them of the standing rule from lesson 5: every reported number needs a cross-validated spread, and any feature-importance claim needs the check this lesson just demonstrated - a random forest’s importance ranking is a claim to be verified, not a fact to be quoted.</a:t>
+            </a:r>
+          </a:p>
+          <a:p>
+            <a:pPr lvl="0" indent="0" marL="0">
+              <a:buNone/>
+            </a:pPr>
+          </a:p>
+          <a:p>
+            <a:pPr lvl="0" indent="0" marL="0">
+              <a:buNone/>
+            </a:pPr>
+            <a:r>
+              <a:rPr/>
+              <a:t>Next week: unsupervised learning, the first lesson in which the data comes with no labels at all.</a:t>
+            </a:r>
+          </a:p>
+        </p:txBody>
+      </p:sp>
+      <p:sp>
+        <p:nvSpPr>
+          <p:cNvPr id="4" name="Slide Number Placeholder 3"/>
+          <p:cNvSpPr>
+            <a:spLocks noGrp="1"/>
+          </p:cNvSpPr>
+          <p:nvPr>
+            <p:ph type="sldNum" sz="quarter" idx="10"/>
+          </p:nvPr>
+        </p:nvSpPr>
+        <p:spPr/>
+        <p:txBody>
+          <a:bodyPr/>
+          <a:lstStyle/>
+          <a:p>
+            <a:fld id="{18BDFEC3-8487-43E8-A154-7C12CBC1FFF2}" type="slidenum">
+              <a:rPr lang="en-US"/>
+              <a:t>59</a:t>
             </a:fld>
             <a:endParaRPr lang="en-US"/>
           </a:p>
@@ -7404,6 +7707,20 @@
             <a:r>
               <a:rPr/>
               <a:t>Handout section 2.2 has the full definition.</a:t>
+            </a:r>
+          </a:p>
+          <a:p>
+            <a:pPr lvl="0" indent="0" marL="0">
+              <a:buNone/>
+            </a:pPr>
+          </a:p>
+          <a:p>
+            <a:pPr lvl="0" indent="0" marL="0">
+              <a:buNone/>
+            </a:pPr>
+            <a:r>
+              <a:rPr/>
+              <a:t>A line of colour, if there is a minute: the name is Italian. Corrado Gini (1884-1965) was a statistician, the first president of the Istituto Centrale di Statistica in 1926, the body that became ISTAT. 1 - Σ p_c² is his index of heterogeneity, “mutabilità”, from 1912; Leo Breiman and his co-authors made it the splitting criterion of their CART trees in 1984, and scikit-learn kept it. It is not the Gini coefficient of income inequality, his better-known index: same man, a different quantity, and a student who knows the coefficient may think they are one thing.</a:t>
             </a:r>
           </a:p>
         </p:txBody>
@@ -11224,18 +11541,15 @@
             <a:pPr lvl="0"/>
             <a:r>
               <a:rPr/>
-              <a:t>p = 0.387 defaulted, so the parent group’s impurity is </a:t>
+              <a:t>Parent: 464 of 1,200 defaulted, G = </a:t>
             </a:r>
             <a:r>
               <a:rPr b="1"/>
               <a:t>0.474</a:t>
             </a:r>
-          </a:p>
-          <a:p>
-            <a:pPr lvl="0"/>
-            <a:r>
-              <a:rPr/>
-              <a:t>Exhaustive search finds </a:t>
+            <a:r>
+              <a:rPr/>
+              <a:t>; the search finds </a:t>
             </a:r>
             <a:r>
               <a:rPr>
@@ -11245,29 +11559,40 @@
             </a:r>
             <a:r>
               <a:rPr/>
-              <a:t>: the </a:t>
+              <a:t>, the </a:t>
             </a:r>
             <a:r>
               <a:rPr b="1"/>
               <a:t>debt ceiling</a:t>
             </a:r>
-            <a:r>
-              <a:rPr/>
-              <a:t> the data was built with</a:t>
-            </a:r>
           </a:p>
           <a:p>
             <a:pPr lvl="0"/>
             <a:r>
               <a:rPr/>
-              <a:t>971 applicants left (0.256 defaulted, impurity 0.381), 229 right (0.939, impurity 0.115)</a:t>
+              <a:t>Left: 249 of 971 defaulted, p = 0.256, G = 2 × 0.256 × 0.744 = </a:t>
+            </a:r>
+            <a:r>
+              <a:rPr b="1"/>
+              <a:t>0.381</a:t>
             </a:r>
           </a:p>
           <a:p>
             <a:pPr lvl="0"/>
             <a:r>
               <a:rPr/>
-              <a:t>Weighted by size, the children average 0.3305 against the parent’s 0.4743: gain </a:t>
+              <a:t>Right: 215 of 229, p = 0.939, G = 2 × 0.939 × 0.061 = </a:t>
+            </a:r>
+            <a:r>
+              <a:rPr b="1"/>
+              <a:t>0.115</a:t>
+            </a:r>
+          </a:p>
+          <a:p>
+            <a:pPr lvl="0"/>
+            <a:r>
+              <a:rPr/>
+              <a:t>Weighted: 0.809 × 0.381 + 0.191 × 0.115 = 0.330; gain 0.474 - 0.330 = </a:t>
             </a:r>
             <a:r>
               <a:rPr b="1"/>
@@ -12285,7 +12610,7 @@
                       </a:pPr>
                       <a:r>
                         <a:rPr/>
-                        <a:t>Cross-validated accuracy</a:t>
+                        <a:t>Cross-validated, 5 folds (mean ± standard deviation)</a:t>
                       </a:r>
                     </a:p>
                   </a:txBody>
@@ -12916,11 +13241,19 @@
             </a:r>
             <a:r>
               <a:rPr b="1"/>
-              <a:t>90.8%</a:t>
-            </a:r>
-            <a:r>
-              <a:rPr/>
-              <a:t> training accuracy; thresholds 28 (income floor) and 0.82 (debt ceiling)</a:t>
+              <a:t>0.908</a:t>
+            </a:r>
+            <a:r>
+              <a:rPr/>
+              <a:t> training, </a:t>
+            </a:r>
+            <a:r>
+              <a:rPr b="1"/>
+              <a:t>0.901</a:t>
+            </a:r>
+            <a:r>
+              <a:rPr/>
+              <a:t> cross-validated, above depth 8’s 0.882; thresholds 28 and 0.82</a:t>
             </a:r>
           </a:p>
           <a:p>
@@ -13027,7 +13360,15 @@
             </a:r>
             <a:r>
               <a:rPr/>
-              <a:t>, each on a random 65% of the applicants (no replacement)</a:t>
+              <a:t>, each on 780 of the 1,200 applicants, drawn </a:t>
+            </a:r>
+            <a:r>
+              <a:rPr b="1"/>
+              <a:t>without replacement</a:t>
+            </a:r>
+            <a:r>
+              <a:rPr/>
+              <a:t> (no one twice)</a:t>
             </a:r>
           </a:p>
           <a:p>
@@ -13045,7 +13386,7 @@
             <a:pPr lvl="0"/>
             <a:r>
               <a:rPr/>
-              <a:t>The trees grow </a:t>
+              <a:t>They grow </a:t>
             </a:r>
             <a:r>
               <a:rPr b="1"/>
@@ -13053,15 +13394,15 @@
             </a:r>
             <a:r>
               <a:rPr/>
-              <a:t>, and </a:t>
+              <a:t>, and give </a:t>
             </a:r>
             <a:r>
               <a:rPr b="1"/>
-              <a:t>disagree on 11.7%</a:t>
-            </a:r>
-            <a:r>
-              <a:rPr/>
-              <a:t> of predictions on the full dataset</a:t>
+              <a:t>opposite verdicts for 140</a:t>
+            </a:r>
+            <a:r>
+              <a:rPr/>
+              <a:t> of the 1,200 applicants (11.7%)</a:t>
             </a:r>
           </a:p>
           <a:p>
@@ -13079,6 +13420,88 @@
 </file>
 
 <file path=ppt/slides/slide27.xml><?xml version="1.0" encoding="utf-8"?>
+<p:sld xmlns:a="http://schemas.openxmlformats.org/drawingml/2006/main" xmlns:r="http://schemas.openxmlformats.org/officeDocument/2006/relationships" xmlns:p="http://schemas.openxmlformats.org/presentationml/2006/main">
+  <p:cSld>
+    <p:spTree>
+      <p:nvGrpSpPr>
+        <p:cNvPr id="1" name=""/>
+        <p:cNvGrpSpPr/>
+        <p:nvPr/>
+      </p:nvGrpSpPr>
+      <p:grpSpPr>
+        <a:xfrm>
+          <a:off x="0" y="0"/>
+          <a:ext cx="0" cy="0"/>
+          <a:chOff x="0" y="0"/>
+          <a:chExt cx="0" cy="0"/>
+        </a:xfrm>
+      </p:grpSpPr>
+      <p:sp>
+        <p:nvSpPr>
+          <p:cNvPr id="2" name="Title 1"/>
+          <p:cNvSpPr>
+            <a:spLocks noGrp="1"/>
+          </p:cNvSpPr>
+          <p:nvPr>
+            <p:ph type="title"/>
+          </p:nvPr>
+        </p:nvSpPr>
+        <p:spPr>
+          <a:xfrm>
+            <a:off x="457200" y="205979"/>
+            <a:ext cx="8229600" cy="857250"/>
+          </a:xfrm>
+        </p:spPr>
+        <p:txBody>
+          <a:bodyPr/>
+          <a:lstStyle/>
+          <a:p>
+            <a:pPr lvl="0" indent="0" marL="0">
+              <a:buNone/>
+            </a:pPr>
+            <a:r>
+              <a:rPr/>
+              <a:t>Two trees, 140 different verdicts</a:t>
+            </a:r>
+          </a:p>
+        </p:txBody>
+      </p:sp>
+      <p:pic>
+        <p:nvPicPr>
+          <p:cNvPr descr="two_trees_disagree.png" id="0" name="Picture 1"/>
+          <p:cNvPicPr>
+            <a:picLocks noGrp="1" noChangeAspect="1"/>
+          </p:cNvPicPr>
+          <p:nvPr/>
+        </p:nvPicPr>
+        <p:blipFill>
+          <a:blip r:embed="rId3"/>
+          <a:stretch>
+            <a:fillRect/>
+          </a:stretch>
+        </p:blipFill>
+        <p:spPr bwMode="auto">
+          <a:xfrm>
+            <a:off x="457200" y="1499989"/>
+            <a:ext cx="8229600" cy="2692400"/>
+          </a:xfrm>
+          <a:prstGeom prst="rect">
+            <a:avLst/>
+          </a:prstGeom>
+          <a:noFill/>
+          <a:ln w="9525">
+            <a:noFill/>
+            <a:headEnd/>
+            <a:tailEnd/>
+          </a:ln>
+        </p:spPr>
+      </p:pic>
+    </p:spTree>
+  </p:cSld>
+</p:sld>
+</file>
+
+<file path=ppt/slides/slide28.xml><?xml version="1.0" encoding="utf-8"?>
 <p:sld xmlns:a="http://schemas.openxmlformats.org/drawingml/2006/main" xmlns:r="http://schemas.openxmlformats.org/officeDocument/2006/relationships" xmlns:p="http://schemas.openxmlformats.org/presentationml/2006/main">
   <p:cSld>
     <p:spTree>
@@ -13352,7 +13775,7 @@
                       </a:pPr>
                       <a:r>
                         <a:rPr/>
-                        <a:t>4. what a tree costs, 25-26</a:t>
+                        <a:t>4. what a tree costs, 25-27</a:t>
                       </a:r>
                     </a:p>
                   </a:txBody>
@@ -13383,7 +13806,7 @@
                       </a:r>
                       <a:r>
                         <a:rPr/>
-                        <a:t> → 0.908; two trees agree on 0.883</a:t>
+                        <a:t> → 0.908 training, 0.901 cross-validated; two trees, 140 opposite verdicts</a:t>
                       </a:r>
                     </a:p>
                   </a:txBody>
@@ -13393,86 +13816,6 @@
           </a:graphicData>
         </a:graphic>
       </p:graphicFrame>
-    </p:spTree>
-  </p:cSld>
-</p:sld>
-</file>
-
-<file path=ppt/slides/slide28.xml><?xml version="1.0" encoding="utf-8"?>
-<p:sld xmlns:a="http://schemas.openxmlformats.org/drawingml/2006/main" xmlns:r="http://schemas.openxmlformats.org/officeDocument/2006/relationships" xmlns:p="http://schemas.openxmlformats.org/presentationml/2006/main">
-  <p:cSld>
-    <p:spTree>
-      <p:nvGrpSpPr>
-        <p:cNvPr id="1" name=""/>
-        <p:cNvGrpSpPr/>
-        <p:nvPr/>
-      </p:nvGrpSpPr>
-      <p:grpSpPr>
-        <a:xfrm>
-          <a:off x="0" y="0"/>
-          <a:ext cx="0" cy="0"/>
-          <a:chOff x="0" y="0"/>
-          <a:chExt cx="0" cy="0"/>
-        </a:xfrm>
-      </p:grpSpPr>
-      <p:sp>
-        <p:nvSpPr>
-          <p:cNvPr id="2" name="Title 1"/>
-          <p:cNvSpPr>
-            <a:spLocks noGrp="1"/>
-          </p:cNvSpPr>
-          <p:nvPr>
-            <p:ph type="title"/>
-          </p:nvPr>
-        </p:nvSpPr>
-        <p:spPr>
-          <a:xfrm>
-            <a:off x="457200" y="205979"/>
-            <a:ext cx="8229600" cy="857250"/>
-          </a:xfrm>
-        </p:spPr>
-        <p:txBody>
-          <a:bodyPr/>
-          <a:lstStyle/>
-          <a:p>
-            <a:pPr lvl="0" indent="0" marL="0">
-              <a:buNone/>
-            </a:pPr>
-            <a:r>
-              <a:rPr/>
-              <a:t>Break</a:t>
-            </a:r>
-          </a:p>
-        </p:txBody>
-      </p:sp>
-      <p:sp>
-        <p:nvSpPr>
-          <p:cNvPr id="3" name="Content Placeholder 2"/>
-          <p:cNvSpPr>
-            <a:spLocks noGrp="1"/>
-          </p:cNvSpPr>
-          <p:nvPr>
-            <p:ph idx="1"/>
-          </p:nvPr>
-        </p:nvSpPr>
-        <p:spPr>
-          <a:xfrm>
-            <a:off x="457200" y="1200151"/>
-            <a:ext cx="8229600" cy="3394472"/>
-          </a:xfrm>
-        </p:spPr>
-        <p:txBody>
-          <a:bodyPr/>
-          <a:lstStyle/>
-          <a:p>
-            <a:pPr lvl="0"/>
-            <a:r>
-              <a:rPr/>
-              <a:t>Twelve minutes</a:t>
-            </a:r>
-          </a:p>
-        </p:txBody>
-      </p:sp>
     </p:spTree>
   </p:cSld>
 </p:sld>
@@ -13520,7 +13863,7 @@
             </a:pPr>
             <a:r>
               <a:rPr/>
-              <a:t>Bagging: averaging away the instability</a:t>
+              <a:t>Break</a:t>
             </a:r>
           </a:p>
         </p:txBody>
@@ -13548,84 +13891,7 @@
             <a:pPr lvl="0"/>
             <a:r>
               <a:rPr/>
-              <a:t>Trees differ across samples, so </a:t>
-            </a:r>
-            <a:r>
-              <a:rPr b="1"/>
-              <a:t>many trees, averaged</a:t>
-            </a:r>
-            <a:r>
-              <a:rPr/>
-              <a:t> should partly cancel their mistakes</a:t>
-            </a:r>
-          </a:p>
-          <a:p>
-            <a:pPr lvl="0"/>
-            <a:r>
-              <a:rPr b="1"/>
-              <a:t>Bootstrap sample</a:t>
-            </a:r>
-            <a:r>
-              <a:rPr/>
-              <a:t>: m rows drawn </a:t>
-            </a:r>
-            <a:r>
-              <a:rPr b="1"/>
-              <a:t>with replacement</a:t>
-            </a:r>
-            <a:r>
-              <a:rPr/>
-              <a:t> from the m training rows</a:t>
-            </a:r>
-          </a:p>
-          <a:p>
-            <a:pPr lvl="0"/>
-            <a:r>
-              <a:rPr/>
-              <a:t>One tree per sample, </a:t>
-            </a:r>
-            <a:r>
-              <a:rPr>
-                <a:latin typeface="Courier"/>
-              </a:rPr>
-              <a:t>n_estimators</a:t>
-            </a:r>
-            <a:r>
-              <a:rPr/>
-              <a:t> times; predict by </a:t>
-            </a:r>
-            <a:r>
-              <a:rPr b="1"/>
-              <a:t>majority vote</a:t>
-            </a:r>
-            <a:r>
-              <a:rPr/>
-              <a:t>. That is </a:t>
-            </a:r>
-            <a:r>
-              <a:rPr b="1"/>
-              <a:t>bagging</a:t>
-            </a:r>
-            <a:r>
-              <a:rPr/>
-              <a:t>: bootstrap aggregating</a:t>
-            </a:r>
-          </a:p>
-          <a:p>
-            <a:pPr lvl="0"/>
-            <a:r>
-              <a:rPr/>
-              <a:t>In code: </a:t>
-            </a:r>
-            <a:r>
-              <a:rPr>
-                <a:latin typeface="Courier"/>
-              </a:rPr>
-              <a:t>BaggingClassifier()</a:t>
-            </a:r>
-            <a:r>
-              <a:rPr/>
-              <a:t>, whose default model is a decision tree</a:t>
+              <a:t>Twelve minutes</a:t>
             </a:r>
           </a:p>
         </p:txBody>
@@ -13787,7 +14053,7 @@
             </a:pPr>
             <a:r>
               <a:rPr/>
-              <a:t>How much data one bootstrap sample sees</a:t>
+              <a:t>Bagging: averaging away the instability</a:t>
             </a:r>
           </a:p>
         </p:txBody>
@@ -13815,48 +14081,84 @@
             <a:pPr lvl="0"/>
             <a:r>
               <a:rPr/>
-              <a:t>One row is missed by all m draws with probability (1 - 1/m)ᵐ, which tends to e⁻¹ ≈ 0.368 as m grows</a:t>
+              <a:t>Trees differ across samples, so </a:t>
+            </a:r>
+            <a:r>
+              <a:rPr b="1"/>
+              <a:t>many trees, averaged</a:t>
+            </a:r>
+            <a:r>
+              <a:rPr/>
+              <a:t> should partly cancel their mistakes</a:t>
             </a:r>
           </a:p>
           <a:p>
             <a:pPr lvl="0"/>
             <a:r>
-              <a:rPr/>
-              <a:t>So about </a:t>
-            </a:r>
-            <a:r>
               <a:rPr b="1"/>
-              <a:t>63.2%</a:t>
-            </a:r>
-            <a:r>
-              <a:rPr/>
-              <a:t> of the distinct rows are drawn at least once</a:t>
+              <a:t>Bootstrap sample</a:t>
+            </a:r>
+            <a:r>
+              <a:rPr/>
+              <a:t>: m rows drawn </a:t>
+            </a:r>
+            <a:r>
+              <a:rPr b="1"/>
+              <a:t>with replacement</a:t>
+            </a:r>
+            <a:r>
+              <a:rPr/>
+              <a:t> from the m training rows</a:t>
             </a:r>
           </a:p>
           <a:p>
             <a:pPr lvl="0"/>
             <a:r>
               <a:rPr/>
-              <a:t>The remaining </a:t>
+              <a:t>One tree per sample, </a:t>
+            </a:r>
+            <a:r>
+              <a:rPr>
+                <a:latin typeface="Courier"/>
+              </a:rPr>
+              <a:t>n_estimators</a:t>
+            </a:r>
+            <a:r>
+              <a:rPr/>
+              <a:t> times; predict by </a:t>
             </a:r>
             <a:r>
               <a:rPr b="1"/>
-              <a:t>36.8%</a:t>
-            </a:r>
-            <a:r>
-              <a:rPr/>
-              <a:t> are left out entirely: called </a:t>
+              <a:t>majority vote</a:t>
+            </a:r>
+            <a:r>
+              <a:rPr/>
+              <a:t>. That is </a:t>
             </a:r>
             <a:r>
               <a:rPr b="1"/>
-              <a:t>out-of-bag (OOB)</a:t>
+              <a:t>bagging</a:t>
+            </a:r>
+            <a:r>
+              <a:rPr/>
+              <a:t>: bootstrap aggregating</a:t>
             </a:r>
           </a:p>
           <a:p>
             <a:pPr lvl="0"/>
             <a:r>
               <a:rPr/>
-              <a:t>At m = 1,200: a single simulated draw left out 36.6% of rows, close to the limit</a:t>
+              <a:t>In code: </a:t>
+            </a:r>
+            <a:r>
+              <a:rPr>
+                <a:latin typeface="Courier"/>
+              </a:rPr>
+              <a:t>BaggingClassifier()</a:t>
+            </a:r>
+            <a:r>
+              <a:rPr/>
+              <a:t>, whose default model is a decision tree</a:t>
             </a:r>
           </a:p>
         </p:txBody>
@@ -13867,6 +14169,127 @@
 </file>
 
 <file path=ppt/slides/slide31.xml><?xml version="1.0" encoding="utf-8"?>
+<p:sld xmlns:a="http://schemas.openxmlformats.org/drawingml/2006/main" xmlns:r="http://schemas.openxmlformats.org/officeDocument/2006/relationships" xmlns:p="http://schemas.openxmlformats.org/presentationml/2006/main">
+  <p:cSld>
+    <p:spTree>
+      <p:nvGrpSpPr>
+        <p:cNvPr id="1" name=""/>
+        <p:cNvGrpSpPr/>
+        <p:nvPr/>
+      </p:nvGrpSpPr>
+      <p:grpSpPr>
+        <a:xfrm>
+          <a:off x="0" y="0"/>
+          <a:ext cx="0" cy="0"/>
+          <a:chOff x="0" y="0"/>
+          <a:chExt cx="0" cy="0"/>
+        </a:xfrm>
+      </p:grpSpPr>
+      <p:sp>
+        <p:nvSpPr>
+          <p:cNvPr id="2" name="Title 1"/>
+          <p:cNvSpPr>
+            <a:spLocks noGrp="1"/>
+          </p:cNvSpPr>
+          <p:nvPr>
+            <p:ph type="title"/>
+          </p:nvPr>
+        </p:nvSpPr>
+        <p:spPr>
+          <a:xfrm>
+            <a:off x="457200" y="205979"/>
+            <a:ext cx="8229600" cy="857250"/>
+          </a:xfrm>
+        </p:spPr>
+        <p:txBody>
+          <a:bodyPr/>
+          <a:lstStyle/>
+          <a:p>
+            <a:pPr lvl="0" indent="0" marL="0">
+              <a:buNone/>
+            </a:pPr>
+            <a:r>
+              <a:rPr/>
+              <a:t>How much data one bootstrap sample sees</a:t>
+            </a:r>
+          </a:p>
+        </p:txBody>
+      </p:sp>
+      <p:sp>
+        <p:nvSpPr>
+          <p:cNvPr id="3" name="Content Placeholder 2"/>
+          <p:cNvSpPr>
+            <a:spLocks noGrp="1"/>
+          </p:cNvSpPr>
+          <p:nvPr>
+            <p:ph idx="1"/>
+          </p:nvPr>
+        </p:nvSpPr>
+        <p:spPr>
+          <a:xfrm>
+            <a:off x="457200" y="1200151"/>
+            <a:ext cx="8229600" cy="3394472"/>
+          </a:xfrm>
+        </p:spPr>
+        <p:txBody>
+          <a:bodyPr/>
+          <a:lstStyle/>
+          <a:p>
+            <a:pPr lvl="0"/>
+            <a:r>
+              <a:rPr/>
+              <a:t>One row is missed by all m draws with probability (1 - 1/m)ᵐ, which tends to e⁻¹ ≈ 0.368 as m grows</a:t>
+            </a:r>
+          </a:p>
+          <a:p>
+            <a:pPr lvl="0"/>
+            <a:r>
+              <a:rPr/>
+              <a:t>So about </a:t>
+            </a:r>
+            <a:r>
+              <a:rPr b="1"/>
+              <a:t>63.2%</a:t>
+            </a:r>
+            <a:r>
+              <a:rPr/>
+              <a:t> of the distinct rows are drawn at least once</a:t>
+            </a:r>
+          </a:p>
+          <a:p>
+            <a:pPr lvl="0"/>
+            <a:r>
+              <a:rPr/>
+              <a:t>The remaining </a:t>
+            </a:r>
+            <a:r>
+              <a:rPr b="1"/>
+              <a:t>36.8%</a:t>
+            </a:r>
+            <a:r>
+              <a:rPr/>
+              <a:t> are left out entirely: called </a:t>
+            </a:r>
+            <a:r>
+              <a:rPr b="1"/>
+              <a:t>out-of-bag (OOB)</a:t>
+            </a:r>
+          </a:p>
+          <a:p>
+            <a:pPr lvl="0"/>
+            <a:r>
+              <a:rPr/>
+              <a:t>At m = 1,200: a single simulated draw left out 36.6% of rows, close to the limit</a:t>
+            </a:r>
+          </a:p>
+        </p:txBody>
+      </p:sp>
+    </p:spTree>
+  </p:cSld>
+</p:sld>
+</file>
+
+<file path=ppt/slides/slide32.xml><?xml version="1.0" encoding="utf-8"?>
 <p:sld xmlns:a="http://schemas.openxmlformats.org/drawingml/2006/main" xmlns:r="http://schemas.openxmlformats.org/officeDocument/2006/relationships" xmlns:p="http://schemas.openxmlformats.org/presentationml/2006/main">
   <p:cSld>
     <p:spTree>
@@ -13948,128 +14371,6 @@
 </p:sld>
 </file>
 
-<file path=ppt/slides/slide32.xml><?xml version="1.0" encoding="utf-8"?>
-<p:sld xmlns:a="http://schemas.openxmlformats.org/drawingml/2006/main" xmlns:r="http://schemas.openxmlformats.org/officeDocument/2006/relationships" xmlns:p="http://schemas.openxmlformats.org/presentationml/2006/main">
-  <p:cSld>
-    <p:spTree>
-      <p:nvGrpSpPr>
-        <p:cNvPr id="1" name=""/>
-        <p:cNvGrpSpPr/>
-        <p:nvPr/>
-      </p:nvGrpSpPr>
-      <p:grpSpPr>
-        <a:xfrm>
-          <a:off x="0" y="0"/>
-          <a:ext cx="0" cy="0"/>
-          <a:chOff x="0" y="0"/>
-          <a:chExt cx="0" cy="0"/>
-        </a:xfrm>
-      </p:grpSpPr>
-      <p:sp>
-        <p:nvSpPr>
-          <p:cNvPr id="2" name="Title 1"/>
-          <p:cNvSpPr>
-            <a:spLocks noGrp="1"/>
-          </p:cNvSpPr>
-          <p:nvPr>
-            <p:ph type="title"/>
-          </p:nvPr>
-        </p:nvSpPr>
-        <p:spPr>
-          <a:xfrm>
-            <a:off x="457200" y="205979"/>
-            <a:ext cx="8229600" cy="857250"/>
-          </a:xfrm>
-        </p:spPr>
-        <p:txBody>
-          <a:bodyPr/>
-          <a:lstStyle/>
-          <a:p>
-            <a:pPr lvl="0" indent="0" marL="0">
-              <a:buNone/>
-            </a:pPr>
-            <a:r>
-              <a:rPr/>
-              <a:t>Out-of-bag: free validation</a:t>
-            </a:r>
-          </a:p>
-        </p:txBody>
-      </p:sp>
-      <p:sp>
-        <p:nvSpPr>
-          <p:cNvPr id="3" name="Content Placeholder 2"/>
-          <p:cNvSpPr>
-            <a:spLocks noGrp="1"/>
-          </p:cNvSpPr>
-          <p:nvPr>
-            <p:ph idx="1"/>
-          </p:nvPr>
-        </p:nvSpPr>
-        <p:spPr>
-          <a:xfrm>
-            <a:off x="457200" y="1200151"/>
-            <a:ext cx="8229600" cy="3394472"/>
-          </a:xfrm>
-        </p:spPr>
-        <p:txBody>
-          <a:bodyPr/>
-          <a:lstStyle/>
-          <a:p>
-            <a:pPr lvl="0"/>
-            <a:r>
-              <a:rPr/>
-              <a:t>Predict each row by a vote of only the trees that never saw it: the accuracy of those votes is the </a:t>
-            </a:r>
-            <a:r>
-              <a:rPr b="1"/>
-              <a:t>OOB score</a:t>
-            </a:r>
-            <a:r>
-              <a:rPr/>
-              <a:t>, with no rows set aside</a:t>
-            </a:r>
-          </a:p>
-          <a:p>
-            <a:pPr lvl="0"/>
-            <a:r>
-              <a:rPr/>
-              <a:t>A 300-tree random forest (bagged trees plus one rule, slide 36): OOB </a:t>
-            </a:r>
-            <a:r>
-              <a:rPr b="1"/>
-              <a:t>0.9117</a:t>
-            </a:r>
-            <a:r>
-              <a:rPr/>
-              <a:t>; 5-fold cross-validation </a:t>
-            </a:r>
-            <a:r>
-              <a:rPr b="1"/>
-              <a:t>0.9117 ± 0.021</a:t>
-            </a:r>
-          </a:p>
-          <a:p>
-            <a:pPr lvl="0"/>
-            <a:r>
-              <a:rPr/>
-              <a:t>The four-decimal match is </a:t>
-            </a:r>
-            <a:r>
-              <a:rPr b="1"/>
-              <a:t>luck</a:t>
-            </a:r>
-            <a:r>
-              <a:rPr/>
-              <a:t>: over twelve seeds the two differ by 0.0026 on average, well inside ±0.021</a:t>
-            </a:r>
-          </a:p>
-        </p:txBody>
-      </p:sp>
-    </p:spTree>
-  </p:cSld>
-</p:sld>
-</file>
-
 <file path=ppt/slides/slide33.xml><?xml version="1.0" encoding="utf-8"?>
 <p:sld xmlns:a="http://schemas.openxmlformats.org/drawingml/2006/main" xmlns:r="http://schemas.openxmlformats.org/officeDocument/2006/relationships" xmlns:p="http://schemas.openxmlformats.org/presentationml/2006/main">
   <p:cSld>
@@ -14112,7 +14413,7 @@
             </a:pPr>
             <a:r>
               <a:rPr/>
-              <a:t>Why averaging reduces variance</a:t>
+              <a:t>Out-of-bag: free validation</a:t>
             </a:r>
           </a:p>
         </p:txBody>
@@ -14140,45 +14441,49 @@
             <a:pPr lvl="0"/>
             <a:r>
               <a:rPr/>
-              <a:t>Model each tree’s prediction as noisy, with variance σ² over the bootstrap sample it drew, and let ρ be the correlation between two trees</a:t>
+              <a:t>Predict each row by a vote of only the trees that never saw it: the accuracy of those votes is the </a:t>
+            </a:r>
+            <a:r>
+              <a:rPr b="1"/>
+              <a:t>OOB score</a:t>
+            </a:r>
+            <a:r>
+              <a:rPr/>
+              <a:t>, with no rows set aside</a:t>
             </a:r>
           </a:p>
           <a:p>
             <a:pPr lvl="0"/>
             <a:r>
               <a:rPr/>
-              <a:t>The average of B trees has variance σ²/B + ρσ² (B-1)/B: a </a:t>
+              <a:t>A 300-tree random forest (bagged trees plus one rule, slide 37): OOB </a:t>
             </a:r>
             <a:r>
               <a:rPr b="1"/>
-              <a:t>floor</a:t>
-            </a:r>
-            <a:r>
-              <a:rPr/>
-              <a:t> of ρσ², </a:t>
+              <a:t>0.9117</a:t>
+            </a:r>
+            <a:r>
+              <a:rPr/>
+              <a:t>; 5-fold cross-validation </a:t>
             </a:r>
             <a:r>
               <a:rPr b="1"/>
-              <a:t>not zero</a:t>
-            </a:r>
-            <a:r>
-              <a:rPr/>
-              <a:t>: more trees soon buy little</a:t>
+              <a:t>0.9117 ± 0.021</a:t>
             </a:r>
           </a:p>
           <a:p>
             <a:pPr lvl="0"/>
             <a:r>
               <a:rPr/>
-              <a:t>Averaging </a:t>
+              <a:t>The four-decimal match is </a:t>
             </a:r>
             <a:r>
               <a:rPr b="1"/>
-              <a:t>cannot repair an error every tree shares</a:t>
-            </a:r>
-            <a:r>
-              <a:rPr/>
-              <a:t>: trees too shallow for the rule stay too shallow, however many are averaged</a:t>
+              <a:t>luck</a:t>
+            </a:r>
+            <a:r>
+              <a:rPr/>
+              <a:t>: over twelve seeds the two differ by 0.0026 on average, well inside ±0.021</a:t>
             </a:r>
           </a:p>
         </p:txBody>
@@ -14189,6 +14494,124 @@
 </file>
 
 <file path=ppt/slides/slide34.xml><?xml version="1.0" encoding="utf-8"?>
+<p:sld xmlns:a="http://schemas.openxmlformats.org/drawingml/2006/main" xmlns:r="http://schemas.openxmlformats.org/officeDocument/2006/relationships" xmlns:p="http://schemas.openxmlformats.org/presentationml/2006/main">
+  <p:cSld>
+    <p:spTree>
+      <p:nvGrpSpPr>
+        <p:cNvPr id="1" name=""/>
+        <p:cNvGrpSpPr/>
+        <p:nvPr/>
+      </p:nvGrpSpPr>
+      <p:grpSpPr>
+        <a:xfrm>
+          <a:off x="0" y="0"/>
+          <a:ext cx="0" cy="0"/>
+          <a:chOff x="0" y="0"/>
+          <a:chExt cx="0" cy="0"/>
+        </a:xfrm>
+      </p:grpSpPr>
+      <p:sp>
+        <p:nvSpPr>
+          <p:cNvPr id="2" name="Title 1"/>
+          <p:cNvSpPr>
+            <a:spLocks noGrp="1"/>
+          </p:cNvSpPr>
+          <p:nvPr>
+            <p:ph type="title"/>
+          </p:nvPr>
+        </p:nvSpPr>
+        <p:spPr>
+          <a:xfrm>
+            <a:off x="457200" y="205979"/>
+            <a:ext cx="8229600" cy="857250"/>
+          </a:xfrm>
+        </p:spPr>
+        <p:txBody>
+          <a:bodyPr/>
+          <a:lstStyle/>
+          <a:p>
+            <a:pPr lvl="0" indent="0" marL="0">
+              <a:buNone/>
+            </a:pPr>
+            <a:r>
+              <a:rPr/>
+              <a:t>Why averaging reduces variance</a:t>
+            </a:r>
+          </a:p>
+        </p:txBody>
+      </p:sp>
+      <p:sp>
+        <p:nvSpPr>
+          <p:cNvPr id="3" name="Content Placeholder 2"/>
+          <p:cNvSpPr>
+            <a:spLocks noGrp="1"/>
+          </p:cNvSpPr>
+          <p:nvPr>
+            <p:ph idx="1"/>
+          </p:nvPr>
+        </p:nvSpPr>
+        <p:spPr>
+          <a:xfrm>
+            <a:off x="457200" y="1200151"/>
+            <a:ext cx="8229600" cy="3394472"/>
+          </a:xfrm>
+        </p:spPr>
+        <p:txBody>
+          <a:bodyPr/>
+          <a:lstStyle/>
+          <a:p>
+            <a:pPr lvl="0"/>
+            <a:r>
+              <a:rPr/>
+              <a:t>Model each tree’s prediction as noisy, with variance σ² over the bootstrap sample it drew, and let ρ be the correlation between two trees</a:t>
+            </a:r>
+          </a:p>
+          <a:p>
+            <a:pPr lvl="0"/>
+            <a:r>
+              <a:rPr/>
+              <a:t>The average of B trees has variance σ²/B + ρσ² (B-1)/B: a </a:t>
+            </a:r>
+            <a:r>
+              <a:rPr b="1"/>
+              <a:t>floor</a:t>
+            </a:r>
+            <a:r>
+              <a:rPr/>
+              <a:t> of ρσ², </a:t>
+            </a:r>
+            <a:r>
+              <a:rPr b="1"/>
+              <a:t>not zero</a:t>
+            </a:r>
+            <a:r>
+              <a:rPr/>
+              <a:t>: more trees soon buy little</a:t>
+            </a:r>
+          </a:p>
+          <a:p>
+            <a:pPr lvl="0"/>
+            <a:r>
+              <a:rPr/>
+              <a:t>Averaging </a:t>
+            </a:r>
+            <a:r>
+              <a:rPr b="1"/>
+              <a:t>cannot repair an error every tree shares</a:t>
+            </a:r>
+            <a:r>
+              <a:rPr/>
+              <a:t>: trees too shallow for the rule stay too shallow, however many are averaged</a:t>
+            </a:r>
+          </a:p>
+        </p:txBody>
+      </p:sp>
+    </p:spTree>
+  </p:cSld>
+</p:sld>
+</file>
+
+<file path=ppt/slides/slide35.xml><?xml version="1.0" encoding="utf-8"?>
 <p:sld xmlns:a="http://schemas.openxmlformats.org/drawingml/2006/main" xmlns:r="http://schemas.openxmlformats.org/officeDocument/2006/relationships" xmlns:p="http://schemas.openxmlformats.org/presentationml/2006/main">
   <p:cSld>
     <p:spTree>
@@ -14270,7 +14693,7 @@
 </p:sld>
 </file>
 
-<file path=ppt/slides/slide35.xml><?xml version="1.0" encoding="utf-8"?>
+<file path=ppt/slides/slide36.xml><?xml version="1.0" encoding="utf-8"?>
 <p:sld xmlns:a="http://schemas.openxmlformats.org/drawingml/2006/main" xmlns:r="http://schemas.openxmlformats.org/officeDocument/2006/relationships" xmlns:p="http://schemas.openxmlformats.org/presentationml/2006/main">
   <p:cSld>
     <p:spTree>
@@ -14495,7 +14918,7 @@
 </p:sld>
 </file>
 
-<file path=ppt/slides/slide36.xml><?xml version="1.0" encoding="utf-8"?>
+<file path=ppt/slides/slide37.xml><?xml version="1.0" encoding="utf-8"?>
 <p:sld xmlns:a="http://schemas.openxmlformats.org/drawingml/2006/main" xmlns:r="http://schemas.openxmlformats.org/officeDocument/2006/relationships" xmlns:p="http://schemas.openxmlformats.org/presentationml/2006/main">
   <p:cSld>
     <p:spTree>
@@ -14636,7 +15059,7 @@
 </p:sld>
 </file>
 
-<file path=ppt/slides/slide37.xml><?xml version="1.0" encoding="utf-8"?>
+<file path=ppt/slides/slide38.xml><?xml version="1.0" encoding="utf-8"?>
 <p:sld xmlns:a="http://schemas.openxmlformats.org/drawingml/2006/main" xmlns:r="http://schemas.openxmlformats.org/officeDocument/2006/relationships" xmlns:p="http://schemas.openxmlformats.org/presentationml/2006/main">
   <p:cSld>
     <p:spTree>
@@ -14718,7 +15141,7 @@
 </p:sld>
 </file>
 
-<file path=ppt/slides/slide38.xml><?xml version="1.0" encoding="utf-8"?>
+<file path=ppt/slides/slide39.xml><?xml version="1.0" encoding="utf-8"?>
 <p:sld xmlns:a="http://schemas.openxmlformats.org/drawingml/2006/main" xmlns:r="http://schemas.openxmlformats.org/officeDocument/2006/relationships" xmlns:p="http://schemas.openxmlformats.org/presentationml/2006/main">
   <p:cSld>
     <p:spTree>
@@ -14829,7 +15252,140 @@
 </p:sld>
 </file>
 
-<file path=ppt/slides/slide39.xml><?xml version="1.0" encoding="utf-8"?>
+<file path=ppt/slides/slide4.xml><?xml version="1.0" encoding="utf-8"?>
+<p:sld xmlns:a="http://schemas.openxmlformats.org/drawingml/2006/main" xmlns:r="http://schemas.openxmlformats.org/officeDocument/2006/relationships" xmlns:p="http://schemas.openxmlformats.org/presentationml/2006/main">
+  <p:cSld>
+    <p:spTree>
+      <p:nvGrpSpPr>
+        <p:cNvPr id="1" name=""/>
+        <p:cNvGrpSpPr/>
+        <p:nvPr/>
+      </p:nvGrpSpPr>
+      <p:grpSpPr>
+        <a:xfrm>
+          <a:off x="0" y="0"/>
+          <a:ext cx="0" cy="0"/>
+          <a:chOff x="0" y="0"/>
+          <a:chExt cx="0" cy="0"/>
+        </a:xfrm>
+      </p:grpSpPr>
+      <p:sp>
+        <p:nvSpPr>
+          <p:cNvPr id="2" name="Title 1"/>
+          <p:cNvSpPr>
+            <a:spLocks noGrp="1"/>
+          </p:cNvSpPr>
+          <p:nvPr>
+            <p:ph type="title"/>
+          </p:nvPr>
+        </p:nvSpPr>
+        <p:spPr>
+          <a:xfrm>
+            <a:off x="457200" y="205979"/>
+            <a:ext cx="8229600" cy="857250"/>
+          </a:xfrm>
+        </p:spPr>
+        <p:txBody>
+          <a:bodyPr/>
+          <a:lstStyle/>
+          <a:p>
+            <a:pPr lvl="0" indent="0" marL="0">
+              <a:buNone/>
+            </a:pPr>
+            <a:r>
+              <a:rPr/>
+              <a:t>1,200 loan applicants, two figures each</a:t>
+            </a:r>
+          </a:p>
+        </p:txBody>
+      </p:sp>
+      <p:sp>
+        <p:nvSpPr>
+          <p:cNvPr id="3" name="Content Placeholder 2"/>
+          <p:cNvSpPr>
+            <a:spLocks noGrp="1"/>
+          </p:cNvSpPr>
+          <p:nvPr>
+            <p:ph idx="1"/>
+          </p:nvPr>
+        </p:nvSpPr>
+        <p:spPr>
+          <a:xfrm>
+            <a:off x="457200" y="1200151"/>
+            <a:ext cx="8229600" cy="3394472"/>
+          </a:xfrm>
+        </p:spPr>
+        <p:txBody>
+          <a:bodyPr/>
+          <a:lstStyle/>
+          <a:p>
+            <a:pPr lvl="0"/>
+            <a:r>
+              <a:rPr/>
+              <a:t>Income in thousands of euros a year, and debt-to-income ratio</a:t>
+            </a:r>
+          </a:p>
+          <a:p>
+            <a:pPr lvl="0"/>
+            <a:r>
+              <a:rPr/>
+              <a:t>Underwriting is a </a:t>
+            </a:r>
+            <a:r>
+              <a:rPr b="1"/>
+              <a:t>checklist</a:t>
+            </a:r>
+            <a:r>
+              <a:rPr/>
+              <a:t>: an income floor, a debt ceiling, and two “stressed” combinations, each figure ordinary alone but risky together</a:t>
+            </a:r>
+          </a:p>
+          <a:p>
+            <a:pPr lvl="0"/>
+            <a:r>
+              <a:rPr b="1"/>
+              <a:t>7%</a:t>
+            </a:r>
+            <a:r>
+              <a:rPr/>
+              <a:t> of labels flipped: no honest model beats about </a:t>
+            </a:r>
+            <a:r>
+              <a:rPr b="1"/>
+              <a:t>0.93</a:t>
+            </a:r>
+            <a:r>
+              <a:rPr/>
+              <a:t>, the </a:t>
+            </a:r>
+            <a:r>
+              <a:rPr b="1"/>
+              <a:t>noise ceiling</a:t>
+            </a:r>
+          </a:p>
+          <a:p>
+            <a:pPr lvl="0"/>
+            <a:r>
+              <a:rPr b="1"/>
+              <a:t>38.7%</a:t>
+            </a:r>
+            <a:r>
+              <a:rPr/>
+              <a:t> defaulted, so the majority baseline is </a:t>
+            </a:r>
+            <a:r>
+              <a:rPr b="1"/>
+              <a:t>0.613</a:t>
+            </a:r>
+          </a:p>
+        </p:txBody>
+      </p:sp>
+    </p:spTree>
+  </p:cSld>
+</p:sld>
+</file>
+
+<file path=ppt/slides/slide40.xml><?xml version="1.0" encoding="utf-8"?>
 <p:sld xmlns:a="http://schemas.openxmlformats.org/drawingml/2006/main" xmlns:r="http://schemas.openxmlformats.org/officeDocument/2006/relationships" xmlns:p="http://schemas.openxmlformats.org/presentationml/2006/main">
   <p:cSld>
     <p:spTree>
@@ -14911,140 +15467,7 @@
 </p:sld>
 </file>
 
-<file path=ppt/slides/slide4.xml><?xml version="1.0" encoding="utf-8"?>
-<p:sld xmlns:a="http://schemas.openxmlformats.org/drawingml/2006/main" xmlns:r="http://schemas.openxmlformats.org/officeDocument/2006/relationships" xmlns:p="http://schemas.openxmlformats.org/presentationml/2006/main">
-  <p:cSld>
-    <p:spTree>
-      <p:nvGrpSpPr>
-        <p:cNvPr id="1" name=""/>
-        <p:cNvGrpSpPr/>
-        <p:nvPr/>
-      </p:nvGrpSpPr>
-      <p:grpSpPr>
-        <a:xfrm>
-          <a:off x="0" y="0"/>
-          <a:ext cx="0" cy="0"/>
-          <a:chOff x="0" y="0"/>
-          <a:chExt cx="0" cy="0"/>
-        </a:xfrm>
-      </p:grpSpPr>
-      <p:sp>
-        <p:nvSpPr>
-          <p:cNvPr id="2" name="Title 1"/>
-          <p:cNvSpPr>
-            <a:spLocks noGrp="1"/>
-          </p:cNvSpPr>
-          <p:nvPr>
-            <p:ph type="title"/>
-          </p:nvPr>
-        </p:nvSpPr>
-        <p:spPr>
-          <a:xfrm>
-            <a:off x="457200" y="205979"/>
-            <a:ext cx="8229600" cy="857250"/>
-          </a:xfrm>
-        </p:spPr>
-        <p:txBody>
-          <a:bodyPr/>
-          <a:lstStyle/>
-          <a:p>
-            <a:pPr lvl="0" indent="0" marL="0">
-              <a:buNone/>
-            </a:pPr>
-            <a:r>
-              <a:rPr/>
-              <a:t>1,200 loan applicants, two figures each</a:t>
-            </a:r>
-          </a:p>
-        </p:txBody>
-      </p:sp>
-      <p:sp>
-        <p:nvSpPr>
-          <p:cNvPr id="3" name="Content Placeholder 2"/>
-          <p:cNvSpPr>
-            <a:spLocks noGrp="1"/>
-          </p:cNvSpPr>
-          <p:nvPr>
-            <p:ph idx="1"/>
-          </p:nvPr>
-        </p:nvSpPr>
-        <p:spPr>
-          <a:xfrm>
-            <a:off x="457200" y="1200151"/>
-            <a:ext cx="8229600" cy="3394472"/>
-          </a:xfrm>
-        </p:spPr>
-        <p:txBody>
-          <a:bodyPr/>
-          <a:lstStyle/>
-          <a:p>
-            <a:pPr lvl="0"/>
-            <a:r>
-              <a:rPr/>
-              <a:t>Income in thousands of euros a year, and debt-to-income ratio</a:t>
-            </a:r>
-          </a:p>
-          <a:p>
-            <a:pPr lvl="0"/>
-            <a:r>
-              <a:rPr/>
-              <a:t>Underwriting is a </a:t>
-            </a:r>
-            <a:r>
-              <a:rPr b="1"/>
-              <a:t>checklist</a:t>
-            </a:r>
-            <a:r>
-              <a:rPr/>
-              <a:t>: an income floor, a debt ceiling, and two “stressed” combinations, each figure ordinary alone but risky together</a:t>
-            </a:r>
-          </a:p>
-          <a:p>
-            <a:pPr lvl="0"/>
-            <a:r>
-              <a:rPr b="1"/>
-              <a:t>7%</a:t>
-            </a:r>
-            <a:r>
-              <a:rPr/>
-              <a:t> of labels flipped: no honest model beats about </a:t>
-            </a:r>
-            <a:r>
-              <a:rPr b="1"/>
-              <a:t>0.93</a:t>
-            </a:r>
-            <a:r>
-              <a:rPr/>
-              <a:t>, the </a:t>
-            </a:r>
-            <a:r>
-              <a:rPr b="1"/>
-              <a:t>noise ceiling</a:t>
-            </a:r>
-          </a:p>
-          <a:p>
-            <a:pPr lvl="0"/>
-            <a:r>
-              <a:rPr b="1"/>
-              <a:t>38.7%</a:t>
-            </a:r>
-            <a:r>
-              <a:rPr/>
-              <a:t> defaulted, so the majority baseline is </a:t>
-            </a:r>
-            <a:r>
-              <a:rPr b="1"/>
-              <a:t>0.613</a:t>
-            </a:r>
-          </a:p>
-        </p:txBody>
-      </p:sp>
-    </p:spTree>
-  </p:cSld>
-</p:sld>
-</file>
-
-<file path=ppt/slides/slide40.xml><?xml version="1.0" encoding="utf-8"?>
+<file path=ppt/slides/slide41.xml><?xml version="1.0" encoding="utf-8"?>
 <p:sld xmlns:a="http://schemas.openxmlformats.org/drawingml/2006/main" xmlns:r="http://schemas.openxmlformats.org/officeDocument/2006/relationships" xmlns:p="http://schemas.openxmlformats.org/presentationml/2006/main">
   <p:cSld>
     <p:spTree>
@@ -15126,7 +15549,7 @@
 </p:sld>
 </file>
 
-<file path=ppt/slides/slide41.xml><?xml version="1.0" encoding="utf-8"?>
+<file path=ppt/slides/slide42.xml><?xml version="1.0" encoding="utf-8"?>
 <p:sld xmlns:a="http://schemas.openxmlformats.org/drawingml/2006/main" xmlns:r="http://schemas.openxmlformats.org/officeDocument/2006/relationships" xmlns:p="http://schemas.openxmlformats.org/presentationml/2006/main">
   <p:cSld>
     <p:spTree>
@@ -15242,7 +15665,7 @@
                       </a:pPr>
                       <a:r>
                         <a:rPr/>
-                        <a:t>1. bagging from scratch, 29</a:t>
+                        <a:t>1. bagging from scratch, 30</a:t>
                       </a:r>
                     </a:p>
                   </a:txBody>
@@ -15300,7 +15723,7 @@
                       </a:pPr>
                       <a:r>
                         <a:rPr/>
-                        <a:t>2. why averaging works, 30-34</a:t>
+                        <a:t>2. why averaging works, 31-35</a:t>
                       </a:r>
                     </a:p>
                   </a:txBody>
@@ -15358,7 +15781,7 @@
                       </a:pPr>
                       <a:r>
                         <a:rPr/>
-                        <a:t>3. variance, measured, 35-37</a:t>
+                        <a:t>3. variance, measured, 36-38</a:t>
                       </a:r>
                     </a:p>
                   </a:txBody>
@@ -15410,7 +15833,7 @@
                       </a:pPr>
                       <a:r>
                         <a:rPr/>
-                        <a:t>5. feature importance, 38-39</a:t>
+                        <a:t>5. feature importance, 39-40</a:t>
                       </a:r>
                     </a:p>
                   </a:txBody>
@@ -15448,7 +15871,7 @@
                       </a:pPr>
                       <a:r>
                         <a:rPr/>
-                        <a:t>6. checking the importances, 40</a:t>
+                        <a:t>6. checking the importances, 41</a:t>
                       </a:r>
                     </a:p>
                   </a:txBody>
@@ -15484,7 +15907,7 @@
 </p:sld>
 </file>
 
-<file path=ppt/slides/slide42.xml><?xml version="1.0" encoding="utf-8"?>
+<file path=ppt/slides/slide43.xml><?xml version="1.0" encoding="utf-8"?>
 <p:sld xmlns:a="http://schemas.openxmlformats.org/drawingml/2006/main" xmlns:r="http://schemas.openxmlformats.org/officeDocument/2006/relationships" xmlns:p="http://schemas.openxmlformats.org/presentationml/2006/main">
   <p:cSld>
     <p:spTree>
@@ -15629,7 +16052,7 @@
 </p:sld>
 </file>
 
-<file path=ppt/slides/slide43.xml><?xml version="1.0" encoding="utf-8"?>
+<file path=ppt/slides/slide44.xml><?xml version="1.0" encoding="utf-8"?>
 <p:sld xmlns:a="http://schemas.openxmlformats.org/drawingml/2006/main" xmlns:r="http://schemas.openxmlformats.org/officeDocument/2006/relationships" xmlns:p="http://schemas.openxmlformats.org/presentationml/2006/main">
   <p:cSld>
     <p:spTree>
@@ -15711,7 +16134,7 @@
 </p:sld>
 </file>
 
-<file path=ppt/slides/slide44.xml><?xml version="1.0" encoding="utf-8"?>
+<file path=ppt/slides/slide45.xml><?xml version="1.0" encoding="utf-8"?>
 <p:sld xmlns:a="http://schemas.openxmlformats.org/drawingml/2006/main" xmlns:r="http://schemas.openxmlformats.org/officeDocument/2006/relationships" xmlns:p="http://schemas.openxmlformats.org/presentationml/2006/main">
   <p:cSld>
     <p:spTree>
@@ -15844,7 +16267,7 @@
 </p:sld>
 </file>
 
-<file path=ppt/slides/slide45.xml><?xml version="1.0" encoding="utf-8"?>
+<file path=ppt/slides/slide46.xml><?xml version="1.0" encoding="utf-8"?>
 <p:sld xmlns:a="http://schemas.openxmlformats.org/drawingml/2006/main" xmlns:r="http://schemas.openxmlformats.org/officeDocument/2006/relationships" xmlns:p="http://schemas.openxmlformats.org/presentationml/2006/main">
   <p:cSld>
     <p:spTree>
@@ -15926,131 +16349,6 @@
 </p:sld>
 </file>
 
-<file path=ppt/slides/slide46.xml><?xml version="1.0" encoding="utf-8"?>
-<p:sld xmlns:a="http://schemas.openxmlformats.org/drawingml/2006/main" xmlns:r="http://schemas.openxmlformats.org/officeDocument/2006/relationships" xmlns:p="http://schemas.openxmlformats.org/presentationml/2006/main">
-  <p:cSld>
-    <p:spTree>
-      <p:nvGrpSpPr>
-        <p:cNvPr id="1" name=""/>
-        <p:cNvGrpSpPr/>
-        <p:nvPr/>
-      </p:nvGrpSpPr>
-      <p:grpSpPr>
-        <a:xfrm>
-          <a:off x="0" y="0"/>
-          <a:ext cx="0" cy="0"/>
-          <a:chOff x="0" y="0"/>
-          <a:chExt cx="0" cy="0"/>
-        </a:xfrm>
-      </p:grpSpPr>
-      <p:sp>
-        <p:nvSpPr>
-          <p:cNvPr id="2" name="Title 1"/>
-          <p:cNvSpPr>
-            <a:spLocks noGrp="1"/>
-          </p:cNvSpPr>
-          <p:nvPr>
-            <p:ph type="title"/>
-          </p:nvPr>
-        </p:nvSpPr>
-        <p:spPr>
-          <a:xfrm>
-            <a:off x="457200" y="205979"/>
-            <a:ext cx="8229600" cy="857250"/>
-          </a:xfrm>
-        </p:spPr>
-        <p:txBody>
-          <a:bodyPr/>
-          <a:lstStyle/>
-          <a:p>
-            <a:pPr lvl="0" indent="0" marL="0">
-              <a:buNone/>
-            </a:pPr>
-            <a:r>
-              <a:rPr/>
-              <a:t>Reading the picture</a:t>
-            </a:r>
-          </a:p>
-        </p:txBody>
-      </p:sp>
-      <p:sp>
-        <p:nvSpPr>
-          <p:cNvPr id="3" name="Content Placeholder 2"/>
-          <p:cNvSpPr>
-            <a:spLocks noGrp="1"/>
-          </p:cNvSpPr>
-          <p:nvPr>
-            <p:ph idx="1"/>
-          </p:nvPr>
-        </p:nvSpPr>
-        <p:spPr>
-          <a:xfrm>
-            <a:off x="457200" y="1200151"/>
-            <a:ext cx="8229600" cy="3394472"/>
-          </a:xfrm>
-        </p:spPr>
-        <p:txBody>
-          <a:bodyPr/>
-          <a:lstStyle/>
-          <a:p>
-            <a:pPr lvl="0"/>
-            <a:r>
-              <a:rPr b="1"/>
-              <a:t>1 tree</a:t>
-            </a:r>
-            <a:r>
-              <a:rPr/>
-              <a:t>: mean squared error (MSE) against the true function 0.395, barely moves the flat guess</a:t>
-            </a:r>
-          </a:p>
-          <a:p>
-            <a:pPr lvl="0"/>
-            <a:r>
-              <a:rPr b="1"/>
-              <a:t>5 trees</a:t>
-            </a:r>
-            <a:r>
-              <a:rPr/>
-              <a:t>: MSE 0.068, the coarse shape appears</a:t>
-            </a:r>
-          </a:p>
-          <a:p>
-            <a:pPr lvl="0"/>
-            <a:r>
-              <a:rPr b="1"/>
-              <a:t>20 trees</a:t>
-            </a:r>
-            <a:r>
-              <a:rPr/>
-              <a:t>: MSE </a:t>
-            </a:r>
-            <a:r>
-              <a:rPr b="1"/>
-              <a:t>0.012</a:t>
-            </a:r>
-            <a:r>
-              <a:rPr/>
-              <a:t>, the ensemble’s best point</a:t>
-            </a:r>
-          </a:p>
-          <a:p>
-            <a:pPr lvl="0"/>
-            <a:r>
-              <a:rPr b="1"/>
-              <a:t>60 trees</a:t>
-            </a:r>
-            <a:r>
-              <a:rPr/>
-              <a:t>: MSE rises back to 0.018, tracking noise, not signal</a:t>
-            </a:r>
-          </a:p>
-        </p:txBody>
-      </p:sp>
-    </p:spTree>
-  </p:cSld>
-</p:sld>
-</file>
-
 <file path=ppt/slides/slide47.xml><?xml version="1.0" encoding="utf-8"?>
 <p:sld xmlns:a="http://schemas.openxmlformats.org/drawingml/2006/main" xmlns:r="http://schemas.openxmlformats.org/officeDocument/2006/relationships" xmlns:p="http://schemas.openxmlformats.org/presentationml/2006/main">
   <p:cSld>
@@ -16093,7 +16391,7 @@
             </a:pPr>
             <a:r>
               <a:rPr/>
-              <a:t>Classification: the same idea, a different gradient</a:t>
+              <a:t>Reading the picture</a:t>
             </a:r>
           </a:p>
         </p:txBody>
@@ -16120,41 +16418,53 @@
           <a:p>
             <a:pPr lvl="0"/>
             <a:r>
-              <a:rPr/>
-              <a:t>y is 0 or 1; the score F becomes a probability through lesson 4’s logistic function, p = σ(F) (this σ is not the σ² of the variance slides)</a:t>
+              <a:rPr b="1"/>
+              <a:t>1 tree</a:t>
+            </a:r>
+            <a:r>
+              <a:rPr/>
+              <a:t>: mean squared error (MSE) against the true function 0.395, barely moves the flat guess</a:t>
             </a:r>
           </a:p>
           <a:p>
             <a:pPr lvl="0"/>
             <a:r>
-              <a:rPr/>
-              <a:t>The loss is lesson 4’s </a:t>
-            </a:r>
-            <a:r>
               <a:rPr b="1"/>
-              <a:t>log-loss</a:t>
+              <a:t>5 trees</a:t>
+            </a:r>
+            <a:r>
+              <a:rPr/>
+              <a:t>: MSE 0.068, the coarse shape appears</a:t>
             </a:r>
           </a:p>
           <a:p>
             <a:pPr lvl="0"/>
             <a:r>
-              <a:rPr/>
-              <a:t>Each tree fits the </a:t>
-            </a:r>
-            <a:r>
               <a:rPr b="1"/>
-              <a:t>pseudo-residual</a:t>
-            </a:r>
-            <a:r>
-              <a:rPr/>
-              <a:t> y - p, the negative gradient: lesson 4’s error term</a:t>
+              <a:t>20 trees</a:t>
+            </a:r>
+            <a:r>
+              <a:rPr/>
+              <a:t>: MSE </a:t>
+            </a:r>
+            <a:r>
+              <a:rPr b="1"/>
+              <a:t>0.012</a:t>
+            </a:r>
+            <a:r>
+              <a:rPr/>
+              <a:t>, the ensemble’s best point</a:t>
             </a:r>
           </a:p>
           <a:p>
             <a:pPr lvl="0"/>
             <a:r>
-              <a:rPr/>
-              <a:t>Start: p = 0.387 for all, so the first tree fits +0.613 to defaulters and −0.387 to the rest</a:t>
+              <a:rPr b="1"/>
+              <a:t>60 trees</a:t>
+            </a:r>
+            <a:r>
+              <a:rPr/>
+              <a:t>: MSE rises back to 0.018, tracking noise, not signal</a:t>
             </a:r>
           </a:p>
         </p:txBody>
@@ -16206,7 +16516,7 @@
             </a:pPr>
             <a:r>
               <a:rPr/>
-              <a:t>On the loan data</a:t>
+              <a:t>Classification: the same idea, a different gradient</a:t>
             </a:r>
           </a:p>
         </p:txBody>
@@ -16233,44 +16543,41 @@
           <a:p>
             <a:pPr lvl="0"/>
             <a:r>
-              <a:rPr>
-                <a:latin typeface="Courier"/>
-              </a:rPr>
-              <a:t>GradientBoostingClassifier</a:t>
-            </a:r>
-            <a:r>
-              <a:rPr/>
-              <a:t>, defaults: </a:t>
+              <a:rPr/>
+              <a:t>y is 0 or 1; the score F becomes a probability through lesson 4’s logistic function, p = σ(F) (this σ is not the σ² of the variance slides)</a:t>
+            </a:r>
+          </a:p>
+          <a:p>
+            <a:pPr lvl="0"/>
+            <a:r>
+              <a:rPr/>
+              <a:t>The loss is lesson 4’s </a:t>
             </a:r>
             <a:r>
               <a:rPr b="1"/>
-              <a:t>100 trees</a:t>
-            </a:r>
-            <a:r>
-              <a:rPr/>
-              <a:t>, learning rate α = 0.1</a:t>
+              <a:t>log-loss</a:t>
             </a:r>
           </a:p>
           <a:p>
             <a:pPr lvl="0"/>
             <a:r>
               <a:rPr/>
-              <a:t>Reaches </a:t>
+              <a:t>Each tree fits the </a:t>
             </a:r>
             <a:r>
               <a:rPr b="1"/>
-              <a:t>0.902 ± 0.020</a:t>
-            </a:r>
-            <a:r>
-              <a:rPr/>
-              <a:t> cross-validated accuracy</a:t>
+              <a:t>pseudo-residual</a:t>
+            </a:r>
+            <a:r>
+              <a:rPr/>
+              <a:t> y - p, the negative gradient: lesson 4’s error term</a:t>
             </a:r>
           </a:p>
           <a:p>
             <a:pPr lvl="0"/>
             <a:r>
               <a:rPr/>
-              <a:t>Already ahead of any single tree from earlier in the lesson</a:t>
+              <a:t>Start: p = 0.387 for all, so the first tree fits +0.613 to defaulters and −0.387 to the rest</a:t>
             </a:r>
           </a:p>
         </p:txBody>
@@ -16281,6 +16588,204 @@
 </file>
 
 <file path=ppt/slides/slide49.xml><?xml version="1.0" encoding="utf-8"?>
+<p:sld xmlns:a="http://schemas.openxmlformats.org/drawingml/2006/main" xmlns:r="http://schemas.openxmlformats.org/officeDocument/2006/relationships" xmlns:p="http://schemas.openxmlformats.org/presentationml/2006/main">
+  <p:cSld>
+    <p:spTree>
+      <p:nvGrpSpPr>
+        <p:cNvPr id="1" name=""/>
+        <p:cNvGrpSpPr/>
+        <p:nvPr/>
+      </p:nvGrpSpPr>
+      <p:grpSpPr>
+        <a:xfrm>
+          <a:off x="0" y="0"/>
+          <a:ext cx="0" cy="0"/>
+          <a:chOff x="0" y="0"/>
+          <a:chExt cx="0" cy="0"/>
+        </a:xfrm>
+      </p:grpSpPr>
+      <p:sp>
+        <p:nvSpPr>
+          <p:cNvPr id="2" name="Title 1"/>
+          <p:cNvSpPr>
+            <a:spLocks noGrp="1"/>
+          </p:cNvSpPr>
+          <p:nvPr>
+            <p:ph type="title"/>
+          </p:nvPr>
+        </p:nvSpPr>
+        <p:spPr>
+          <a:xfrm>
+            <a:off x="457200" y="205979"/>
+            <a:ext cx="8229600" cy="857250"/>
+          </a:xfrm>
+        </p:spPr>
+        <p:txBody>
+          <a:bodyPr/>
+          <a:lstStyle/>
+          <a:p>
+            <a:pPr lvl="0" indent="0" marL="0">
+              <a:buNone/>
+            </a:pPr>
+            <a:r>
+              <a:rPr/>
+              <a:t>On the loan data</a:t>
+            </a:r>
+          </a:p>
+        </p:txBody>
+      </p:sp>
+      <p:sp>
+        <p:nvSpPr>
+          <p:cNvPr id="3" name="Content Placeholder 2"/>
+          <p:cNvSpPr>
+            <a:spLocks noGrp="1"/>
+          </p:cNvSpPr>
+          <p:nvPr>
+            <p:ph idx="1"/>
+          </p:nvPr>
+        </p:nvSpPr>
+        <p:spPr>
+          <a:xfrm>
+            <a:off x="457200" y="1200151"/>
+            <a:ext cx="8229600" cy="3394472"/>
+          </a:xfrm>
+        </p:spPr>
+        <p:txBody>
+          <a:bodyPr/>
+          <a:lstStyle/>
+          <a:p>
+            <a:pPr lvl="0"/>
+            <a:r>
+              <a:rPr>
+                <a:latin typeface="Courier"/>
+              </a:rPr>
+              <a:t>GradientBoostingClassifier</a:t>
+            </a:r>
+            <a:r>
+              <a:rPr/>
+              <a:t>, defaults: </a:t>
+            </a:r>
+            <a:r>
+              <a:rPr b="1"/>
+              <a:t>100 trees</a:t>
+            </a:r>
+            <a:r>
+              <a:rPr/>
+              <a:t>, learning rate α = 0.1</a:t>
+            </a:r>
+          </a:p>
+          <a:p>
+            <a:pPr lvl="0"/>
+            <a:r>
+              <a:rPr/>
+              <a:t>Reaches </a:t>
+            </a:r>
+            <a:r>
+              <a:rPr b="1"/>
+              <a:t>0.902 ± 0.020</a:t>
+            </a:r>
+            <a:r>
+              <a:rPr/>
+              <a:t> cross-validated accuracy</a:t>
+            </a:r>
+          </a:p>
+          <a:p>
+            <a:pPr lvl="0"/>
+            <a:r>
+              <a:rPr/>
+              <a:t>Already ahead of any single tree from earlier in the lesson</a:t>
+            </a:r>
+          </a:p>
+        </p:txBody>
+      </p:sp>
+    </p:spTree>
+  </p:cSld>
+</p:sld>
+</file>
+
+<file path=ppt/slides/slide5.xml><?xml version="1.0" encoding="utf-8"?>
+<p:sld xmlns:a="http://schemas.openxmlformats.org/drawingml/2006/main" xmlns:r="http://schemas.openxmlformats.org/officeDocument/2006/relationships" xmlns:p="http://schemas.openxmlformats.org/presentationml/2006/main">
+  <p:cSld>
+    <p:spTree>
+      <p:nvGrpSpPr>
+        <p:cNvPr id="1" name=""/>
+        <p:cNvGrpSpPr/>
+        <p:nvPr/>
+      </p:nvGrpSpPr>
+      <p:grpSpPr>
+        <a:xfrm>
+          <a:off x="0" y="0"/>
+          <a:ext cx="0" cy="0"/>
+          <a:chOff x="0" y="0"/>
+          <a:chExt cx="0" cy="0"/>
+        </a:xfrm>
+      </p:grpSpPr>
+      <p:sp>
+        <p:nvSpPr>
+          <p:cNvPr id="2" name="Title 1"/>
+          <p:cNvSpPr>
+            <a:spLocks noGrp="1"/>
+          </p:cNvSpPr>
+          <p:nvPr>
+            <p:ph type="title"/>
+          </p:nvPr>
+        </p:nvSpPr>
+        <p:spPr>
+          <a:xfrm>
+            <a:off x="457200" y="205979"/>
+            <a:ext cx="8229600" cy="857250"/>
+          </a:xfrm>
+        </p:spPr>
+        <p:txBody>
+          <a:bodyPr/>
+          <a:lstStyle/>
+          <a:p>
+            <a:pPr lvl="0" indent="0" marL="0">
+              <a:buNone/>
+            </a:pPr>
+            <a:r>
+              <a:rPr/>
+              <a:t>Four risky rules, three risky regions</a:t>
+            </a:r>
+          </a:p>
+        </p:txBody>
+      </p:sp>
+      <p:pic>
+        <p:nvPicPr>
+          <p:cNvPr descr="loan_scatter.png" id="0" name="Picture 1"/>
+          <p:cNvPicPr>
+            <a:picLocks noGrp="1" noChangeAspect="1"/>
+          </p:cNvPicPr>
+          <p:nvPr/>
+        </p:nvPicPr>
+        <p:blipFill>
+          <a:blip r:embed="rId3"/>
+          <a:stretch>
+            <a:fillRect/>
+          </a:stretch>
+        </p:blipFill>
+        <p:spPr bwMode="auto">
+          <a:xfrm>
+            <a:off x="2445144" y="1166099"/>
+            <a:ext cx="4253712" cy="3360181"/>
+          </a:xfrm>
+          <a:prstGeom prst="rect">
+            <a:avLst/>
+          </a:prstGeom>
+          <a:noFill/>
+          <a:ln w="9525">
+            <a:noFill/>
+            <a:headEnd/>
+            <a:tailEnd/>
+          </a:ln>
+        </p:spPr>
+      </p:pic>
+    </p:spTree>
+  </p:cSld>
+</p:sld>
+</file>
+
+<file path=ppt/slides/slide50.xml><?xml version="1.0" encoding="utf-8"?>
 <p:sld xmlns:a="http://schemas.openxmlformats.org/drawingml/2006/main" xmlns:r="http://schemas.openxmlformats.org/officeDocument/2006/relationships" xmlns:p="http://schemas.openxmlformats.org/presentationml/2006/main">
   <p:cSld>
     <p:spTree>
@@ -16746,89 +17251,7 @@
 </p:sld>
 </file>
 
-<file path=ppt/slides/slide5.xml><?xml version="1.0" encoding="utf-8"?>
-<p:sld xmlns:a="http://schemas.openxmlformats.org/drawingml/2006/main" xmlns:r="http://schemas.openxmlformats.org/officeDocument/2006/relationships" xmlns:p="http://schemas.openxmlformats.org/presentationml/2006/main">
-  <p:cSld>
-    <p:spTree>
-      <p:nvGrpSpPr>
-        <p:cNvPr id="1" name=""/>
-        <p:cNvGrpSpPr/>
-        <p:nvPr/>
-      </p:nvGrpSpPr>
-      <p:grpSpPr>
-        <a:xfrm>
-          <a:off x="0" y="0"/>
-          <a:ext cx="0" cy="0"/>
-          <a:chOff x="0" y="0"/>
-          <a:chExt cx="0" cy="0"/>
-        </a:xfrm>
-      </p:grpSpPr>
-      <p:sp>
-        <p:nvSpPr>
-          <p:cNvPr id="2" name="Title 1"/>
-          <p:cNvSpPr>
-            <a:spLocks noGrp="1"/>
-          </p:cNvSpPr>
-          <p:nvPr>
-            <p:ph type="title"/>
-          </p:nvPr>
-        </p:nvSpPr>
-        <p:spPr>
-          <a:xfrm>
-            <a:off x="457200" y="205979"/>
-            <a:ext cx="8229600" cy="857250"/>
-          </a:xfrm>
-        </p:spPr>
-        <p:txBody>
-          <a:bodyPr/>
-          <a:lstStyle/>
-          <a:p>
-            <a:pPr lvl="0" indent="0" marL="0">
-              <a:buNone/>
-            </a:pPr>
-            <a:r>
-              <a:rPr/>
-              <a:t>Four risky rules, three risky regions</a:t>
-            </a:r>
-          </a:p>
-        </p:txBody>
-      </p:sp>
-      <p:pic>
-        <p:nvPicPr>
-          <p:cNvPr descr="loan_scatter.png" id="0" name="Picture 1"/>
-          <p:cNvPicPr>
-            <a:picLocks noGrp="1" noChangeAspect="1"/>
-          </p:cNvPicPr>
-          <p:nvPr/>
-        </p:nvPicPr>
-        <p:blipFill>
-          <a:blip r:embed="rId3"/>
-          <a:stretch>
-            <a:fillRect/>
-          </a:stretch>
-        </p:blipFill>
-        <p:spPr bwMode="auto">
-          <a:xfrm>
-            <a:off x="2445144" y="1166099"/>
-            <a:ext cx="4253712" cy="3360181"/>
-          </a:xfrm>
-          <a:prstGeom prst="rect">
-            <a:avLst/>
-          </a:prstGeom>
-          <a:noFill/>
-          <a:ln w="9525">
-            <a:noFill/>
-            <a:headEnd/>
-            <a:tailEnd/>
-          </a:ln>
-        </p:spPr>
-      </p:pic>
-    </p:spTree>
-  </p:cSld>
-</p:sld>
-</file>
-
-<file path=ppt/slides/slide50.xml><?xml version="1.0" encoding="utf-8"?>
+<file path=ppt/slides/slide51.xml><?xml version="1.0" encoding="utf-8"?>
 <p:sld xmlns:a="http://schemas.openxmlformats.org/drawingml/2006/main" xmlns:r="http://schemas.openxmlformats.org/officeDocument/2006/relationships" xmlns:p="http://schemas.openxmlformats.org/presentationml/2006/main">
   <p:cSld>
     <p:spTree>
@@ -16910,7 +17333,7 @@
 </p:sld>
 </file>
 
-<file path=ppt/slides/slide51.xml><?xml version="1.0" encoding="utf-8"?>
+<file path=ppt/slides/slide52.xml><?xml version="1.0" encoding="utf-8"?>
 <p:sld xmlns:a="http://schemas.openxmlformats.org/drawingml/2006/main" xmlns:r="http://schemas.openxmlformats.org/officeDocument/2006/relationships" xmlns:p="http://schemas.openxmlformats.org/presentationml/2006/main">
   <p:cSld>
     <p:spTree>
@@ -17276,7 +17699,7 @@
 </p:sld>
 </file>
 
-<file path=ppt/slides/slide52.xml><?xml version="1.0" encoding="utf-8"?>
+<file path=ppt/slides/slide53.xml><?xml version="1.0" encoding="utf-8"?>
 <p:sld xmlns:a="http://schemas.openxmlformats.org/drawingml/2006/main" xmlns:r="http://schemas.openxmlformats.org/officeDocument/2006/relationships" xmlns:p="http://schemas.openxmlformats.org/presentationml/2006/main">
   <p:cSld>
     <p:spTree>
@@ -17392,7 +17815,7 @@
                       </a:pPr>
                       <a:r>
                         <a:rPr/>
-                        <a:t>1. boosting from scratch, 42-46</a:t>
+                        <a:t>1. boosting from scratch, 43-47</a:t>
                       </a:r>
                     </a:p>
                   </a:txBody>
@@ -17430,7 +17853,7 @@
                       </a:pPr>
                       <a:r>
                         <a:rPr/>
-                        <a:t>2. classification, 47-48</a:t>
+                        <a:t>2. classification, 48-49</a:t>
                       </a:r>
                     </a:p>
                   </a:txBody>
@@ -17478,7 +17901,7 @@
                       </a:pPr>
                       <a:r>
                         <a:rPr/>
-                        <a:t>3. more trees, 49-50</a:t>
+                        <a:t>3. more trees, 50-51</a:t>
                       </a:r>
                     </a:p>
                   </a:txBody>
@@ -17530,7 +17953,7 @@
                       </a:pPr>
                       <a:r>
                         <a:rPr/>
-                        <a:t>4. learning rate, 51</a:t>
+                        <a:t>4. learning rate, 52</a:t>
                       </a:r>
                     </a:p>
                   </a:txBody>
@@ -17582,7 +18005,7 @@
                       </a:pPr>
                       <a:r>
                         <a:rPr/>
-                        <a:t>5. leaderboard, 53</a:t>
+                        <a:t>5. leaderboard, 54</a:t>
                       </a:r>
                     </a:p>
                   </a:txBody>
@@ -17622,7 +18045,7 @@
 </p:sld>
 </file>
 
-<file path=ppt/slides/slide53.xml><?xml version="1.0" encoding="utf-8"?>
+<file path=ppt/slides/slide54.xml><?xml version="1.0" encoding="utf-8"?>
 <p:sld xmlns:a="http://schemas.openxmlformats.org/drawingml/2006/main" xmlns:r="http://schemas.openxmlformats.org/officeDocument/2006/relationships" xmlns:p="http://schemas.openxmlformats.org/presentationml/2006/main">
   <p:cSld>
     <p:spTree>
@@ -17904,6 +18327,44 @@
                       </a:pPr>
                       <a:r>
                         <a:rPr/>
+                        <a:t>Single tree, </a:t>
+                      </a:r>
+                      <a:r>
+                        <a:rPr>
+                          <a:latin typeface="Courier"/>
+                        </a:rPr>
+                        <a:t>max_leaf_nodes = 9</a:t>
+                      </a:r>
+                    </a:p>
+                  </a:txBody>
+                </a:tc>
+                <a:tc>
+                  <a:txBody>
+                    <a:bodyPr/>
+                    <a:lstStyle/>
+                    <a:p>
+                      <a:pPr lvl="0" indent="0" marL="0">
+                        <a:buNone/>
+                      </a:pPr>
+                      <a:r>
+                        <a:rPr/>
+                        <a:t>0.901</a:t>
+                      </a:r>
+                    </a:p>
+                  </a:txBody>
+                </a:tc>
+              </a:tr>
+              <a:tr h="0">
+                <a:tc>
+                  <a:txBody>
+                    <a:bodyPr/>
+                    <a:lstStyle/>
+                    <a:p>
+                      <a:pPr lvl="0" indent="0" marL="0">
+                        <a:buNone/>
+                      </a:pPr>
+                      <a:r>
+                        <a:rPr/>
                         <a:t>Bagging, 100 trees</a:t>
                       </a:r>
                     </a:p>
@@ -17998,7 +18459,7 @@
 </p:sld>
 </file>
 
-<file path=ppt/slides/slide54.xml><?xml version="1.0" encoding="utf-8"?>
+<file path=ppt/slides/slide55.xml><?xml version="1.0" encoding="utf-8"?>
 <p:sld xmlns:a="http://schemas.openxmlformats.org/drawingml/2006/main" xmlns:r="http://schemas.openxmlformats.org/officeDocument/2006/relationships" xmlns:p="http://schemas.openxmlformats.org/presentationml/2006/main">
   <p:cSld>
     <p:spTree>
@@ -18091,7 +18552,15 @@
             <a:pPr lvl="0"/>
             <a:r>
               <a:rPr/>
-              <a:t>The tuned single tree is close behind, 0.882 against 0.911, and the only model here a person can read</a:t>
+              <a:t>A </a:t>
+            </a:r>
+            <a:r>
+              <a:rPr b="1"/>
+              <a:t>nine-leaf tree</a:t>
+            </a:r>
+            <a:r>
+              <a:rPr/>
+              <a:t> reaches 0.901, a point from bagging: on rectangles a small tree is enough, and a person can read it</a:t>
             </a:r>
           </a:p>
           <a:p>
@@ -18116,7 +18585,7 @@
 </p:sld>
 </file>
 
-<file path=ppt/slides/slide55.xml><?xml version="1.0" encoding="utf-8"?>
+<file path=ppt/slides/slide56.xml><?xml version="1.0" encoding="utf-8"?>
 <p:sld xmlns:a="http://schemas.openxmlformats.org/drawingml/2006/main" xmlns:r="http://schemas.openxmlformats.org/officeDocument/2006/relationships" xmlns:p="http://schemas.openxmlformats.org/presentationml/2006/main">
   <p:cSld>
     <p:spTree>
@@ -18390,131 +18859,6 @@
 </p:sld>
 </file>
 
-<file path=ppt/slides/slide56.xml><?xml version="1.0" encoding="utf-8"?>
-<p:sld xmlns:a="http://schemas.openxmlformats.org/drawingml/2006/main" xmlns:r="http://schemas.openxmlformats.org/officeDocument/2006/relationships" xmlns:p="http://schemas.openxmlformats.org/presentationml/2006/main">
-  <p:cSld>
-    <p:spTree>
-      <p:nvGrpSpPr>
-        <p:cNvPr id="1" name=""/>
-        <p:cNvGrpSpPr/>
-        <p:nvPr/>
-      </p:nvGrpSpPr>
-      <p:grpSpPr>
-        <a:xfrm>
-          <a:off x="0" y="0"/>
-          <a:ext cx="0" cy="0"/>
-          <a:chOff x="0" y="0"/>
-          <a:chExt cx="0" cy="0"/>
-        </a:xfrm>
-      </p:grpSpPr>
-      <p:sp>
-        <p:nvSpPr>
-          <p:cNvPr id="2" name="Title 1"/>
-          <p:cNvSpPr>
-            <a:spLocks noGrp="1"/>
-          </p:cNvSpPr>
-          <p:nvPr>
-            <p:ph type="title"/>
-          </p:nvPr>
-        </p:nvSpPr>
-        <p:spPr>
-          <a:xfrm>
-            <a:off x="457200" y="205979"/>
-            <a:ext cx="8229600" cy="857250"/>
-          </a:xfrm>
-        </p:spPr>
-        <p:txBody>
-          <a:bodyPr/>
-          <a:lstStyle/>
-          <a:p>
-            <a:pPr lvl="0" indent="0" marL="0">
-              <a:buNone/>
-            </a:pPr>
-            <a:r>
-              <a:rPr/>
-              <a:t>54% of the importance landed on noise</a:t>
-            </a:r>
-          </a:p>
-        </p:txBody>
-      </p:sp>
-      <p:sp>
-        <p:nvSpPr>
-          <p:cNvPr id="3" name="Content Placeholder 2"/>
-          <p:cNvSpPr>
-            <a:spLocks noGrp="1"/>
-          </p:cNvSpPr>
-          <p:nvPr>
-            <p:ph idx="1"/>
-          </p:nvPr>
-        </p:nvSpPr>
-        <p:spPr>
-          <a:xfrm>
-            <a:off x="457200" y="1200151"/>
-            <a:ext cx="8229600" cy="3394472"/>
-          </a:xfrm>
-        </p:spPr>
-        <p:txBody>
-          <a:bodyPr/>
-          <a:lstStyle/>
-          <a:p>
-            <a:pPr lvl="0"/>
-            <a:r>
-              <a:rPr/>
-              <a:t>20 noise columns, 2 real ones: not small, not a bug</a:t>
-            </a:r>
-          </a:p>
-          <a:p>
-            <a:pPr lvl="0"/>
-            <a:r>
-              <a:rPr b="1"/>
-              <a:t>The menu</a:t>
-            </a:r>
-            <a:r>
-              <a:rPr/>
-              <a:t>: 4 of 22 columns per split; in two splits of three (0.662), no real feature</a:t>
-            </a:r>
-          </a:p>
-          <a:p>
-            <a:pPr lvl="0"/>
-            <a:r>
-              <a:rPr b="1"/>
-              <a:t>Small groups</a:t>
-            </a:r>
-            <a:r>
-              <a:rPr/>
-              <a:t>: with all 22 on offer, noise still takes </a:t>
-            </a:r>
-            <a:r>
-              <a:rPr b="1"/>
-              <a:t>28%</a:t>
-            </a:r>
-            <a:r>
-              <a:rPr/>
-              <a:t>, from deep splits</a:t>
-            </a:r>
-          </a:p>
-          <a:p>
-            <a:pPr lvl="0"/>
-            <a:r>
-              <a:rPr/>
-              <a:t>The check: </a:t>
-            </a:r>
-            <a:r>
-              <a:rPr b="1"/>
-              <a:t>permutation importance</a:t>
-            </a:r>
-            <a:r>
-              <a:rPr/>
-              <a:t>, slide 40</a:t>
-            </a:r>
-          </a:p>
-        </p:txBody>
-      </p:sp>
-    </p:spTree>
-  </p:cSld>
-</p:sld>
-</file>
-
 <file path=ppt/slides/slide57.xml><?xml version="1.0" encoding="utf-8"?>
 <p:sld xmlns:a="http://schemas.openxmlformats.org/drawingml/2006/main" xmlns:r="http://schemas.openxmlformats.org/officeDocument/2006/relationships" xmlns:p="http://schemas.openxmlformats.org/presentationml/2006/main">
   <p:cSld>
@@ -18557,7 +18901,7 @@
             </a:pPr>
             <a:r>
               <a:rPr/>
-              <a:t>What to take away</a:t>
+              <a:t>54% of the importance landed on noise</a:t>
             </a:r>
           </a:p>
         </p:txBody>
@@ -18585,44 +18929,52 @@
             <a:pPr lvl="0"/>
             <a:r>
               <a:rPr/>
-              <a:t>A tree splits greedily on Gini impurity, matching scikit-learn</a:t>
+              <a:t>20 noise columns, 2 real ones: not small, not a bug</a:t>
             </a:r>
           </a:p>
           <a:p>
             <a:pPr lvl="0"/>
             <a:r>
-              <a:rPr/>
-              <a:t>Depth is the bias-variance dial: accuracy peaked at </a:t>
-            </a:r>
-            <a:r>
               <a:rPr b="1"/>
-              <a:t>depth 8</a:t>
+              <a:t>The menu</a:t>
+            </a:r>
+            <a:r>
+              <a:rPr/>
+              <a:t>: 4 of 22 columns per split; in two splits of three (0.662), no real feature</a:t>
             </a:r>
           </a:p>
           <a:p>
             <a:pPr lvl="0"/>
             <a:r>
-              <a:rPr/>
-              <a:t>Bootstrap resampling leaves </a:t>
-            </a:r>
-            <a:r>
               <a:rPr b="1"/>
-              <a:t>36.8%</a:t>
-            </a:r>
-            <a:r>
-              <a:rPr/>
-              <a:t> of rows out-of-bag: free validation</a:t>
+              <a:t>Small groups</a:t>
+            </a:r>
+            <a:r>
+              <a:rPr/>
+              <a:t>: with all 22 on offer, noise still takes </a:t>
+            </a:r>
+            <a:r>
+              <a:rPr b="1"/>
+              <a:t>28%</a:t>
+            </a:r>
+            <a:r>
+              <a:rPr/>
+              <a:t>, from deep splits</a:t>
             </a:r>
           </a:p>
           <a:p>
             <a:pPr lvl="0"/>
             <a:r>
+              <a:rPr/>
+              <a:t>The check: </a:t>
+            </a:r>
+            <a:r>
               <a:rPr b="1"/>
-              <a:t>54% of a random forest’s importance landed on 20 noise columns</a:t>
-            </a:r>
-            <a:r>
-              <a:rPr/>
-              <a:t>, today’s number</a:t>
+              <a:t>permutation importance</a:t>
+            </a:r>
+            <a:r>
+              <a:rPr/>
+              <a:t>, slide 41</a:t>
             </a:r>
           </a:p>
         </p:txBody>
@@ -18633,6 +18985,123 @@
 </file>
 
 <file path=ppt/slides/slide58.xml><?xml version="1.0" encoding="utf-8"?>
+<p:sld xmlns:a="http://schemas.openxmlformats.org/drawingml/2006/main" xmlns:r="http://schemas.openxmlformats.org/officeDocument/2006/relationships" xmlns:p="http://schemas.openxmlformats.org/presentationml/2006/main">
+  <p:cSld>
+    <p:spTree>
+      <p:nvGrpSpPr>
+        <p:cNvPr id="1" name=""/>
+        <p:cNvGrpSpPr/>
+        <p:nvPr/>
+      </p:nvGrpSpPr>
+      <p:grpSpPr>
+        <a:xfrm>
+          <a:off x="0" y="0"/>
+          <a:ext cx="0" cy="0"/>
+          <a:chOff x="0" y="0"/>
+          <a:chExt cx="0" cy="0"/>
+        </a:xfrm>
+      </p:grpSpPr>
+      <p:sp>
+        <p:nvSpPr>
+          <p:cNvPr id="2" name="Title 1"/>
+          <p:cNvSpPr>
+            <a:spLocks noGrp="1"/>
+          </p:cNvSpPr>
+          <p:nvPr>
+            <p:ph type="title"/>
+          </p:nvPr>
+        </p:nvSpPr>
+        <p:spPr>
+          <a:xfrm>
+            <a:off x="457200" y="205979"/>
+            <a:ext cx="8229600" cy="857250"/>
+          </a:xfrm>
+        </p:spPr>
+        <p:txBody>
+          <a:bodyPr/>
+          <a:lstStyle/>
+          <a:p>
+            <a:pPr lvl="0" indent="0" marL="0">
+              <a:buNone/>
+            </a:pPr>
+            <a:r>
+              <a:rPr/>
+              <a:t>What to take away</a:t>
+            </a:r>
+          </a:p>
+        </p:txBody>
+      </p:sp>
+      <p:sp>
+        <p:nvSpPr>
+          <p:cNvPr id="3" name="Content Placeholder 2"/>
+          <p:cNvSpPr>
+            <a:spLocks noGrp="1"/>
+          </p:cNvSpPr>
+          <p:nvPr>
+            <p:ph idx="1"/>
+          </p:nvPr>
+        </p:nvSpPr>
+        <p:spPr>
+          <a:xfrm>
+            <a:off x="457200" y="1200151"/>
+            <a:ext cx="8229600" cy="3394472"/>
+          </a:xfrm>
+        </p:spPr>
+        <p:txBody>
+          <a:bodyPr/>
+          <a:lstStyle/>
+          <a:p>
+            <a:pPr lvl="0"/>
+            <a:r>
+              <a:rPr/>
+              <a:t>A tree splits greedily on Gini impurity, matching scikit-learn</a:t>
+            </a:r>
+          </a:p>
+          <a:p>
+            <a:pPr lvl="0"/>
+            <a:r>
+              <a:rPr/>
+              <a:t>Depth is the bias-variance dial: accuracy peaked at </a:t>
+            </a:r>
+            <a:r>
+              <a:rPr b="1"/>
+              <a:t>depth 8</a:t>
+            </a:r>
+          </a:p>
+          <a:p>
+            <a:pPr lvl="0"/>
+            <a:r>
+              <a:rPr/>
+              <a:t>Bootstrap resampling leaves </a:t>
+            </a:r>
+            <a:r>
+              <a:rPr b="1"/>
+              <a:t>36.8%</a:t>
+            </a:r>
+            <a:r>
+              <a:rPr/>
+              <a:t> of rows out-of-bag: free validation</a:t>
+            </a:r>
+          </a:p>
+          <a:p>
+            <a:pPr lvl="0"/>
+            <a:r>
+              <a:rPr b="1"/>
+              <a:t>54% of a random forest’s importance landed on 20 noise columns</a:t>
+            </a:r>
+            <a:r>
+              <a:rPr/>
+              <a:t>, today’s number</a:t>
+            </a:r>
+          </a:p>
+        </p:txBody>
+      </p:sp>
+    </p:spTree>
+  </p:cSld>
+</p:sld>
+</file>
+
+<file path=ppt/slides/slide59.xml><?xml version="1.0" encoding="utf-8"?>
 <p:sld xmlns:a="http://schemas.openxmlformats.org/drawingml/2006/main" xmlns:r="http://schemas.openxmlformats.org/officeDocument/2006/relationships" xmlns:p="http://schemas.openxmlformats.org/presentationml/2006/main">
   <p:cSld>
     <p:spTree>
